--- a/tcc/TCC - Slides.pptx
+++ b/tcc/TCC - Slides.pptx
@@ -5,7 +5,7 @@
     <p:sldMasterId id="2147483648" r:id="rId1"/>
   </p:sldMasterIdLst>
   <p:notesMasterIdLst>
-    <p:notesMasterId r:id="rId21"/>
+    <p:notesMasterId r:id="rId22"/>
   </p:notesMasterIdLst>
   <p:sldIdLst>
     <p:sldId id="256" r:id="rId6"/>
@@ -23,25 +23,30 @@
     <p:sldId id="268" r:id="rId18"/>
     <p:sldId id="269" r:id="rId19"/>
     <p:sldId id="270" r:id="rId20"/>
+    <p:sldId id="271" r:id="rId21"/>
   </p:sldIdLst>
   <p:sldSz cx="18288000" cy="10287000"/>
   <p:notesSz cx="6858000" cy="9144000"/>
   <p:embeddedFontLst>
     <p:embeddedFont>
       <p:font typeface="Arimo" charset="1" panose="020B0604020202020204"/>
-      <p:regular r:id="rId24"/>
+      <p:regular r:id="rId25"/>
     </p:embeddedFont>
     <p:embeddedFont>
       <p:font typeface="Noto Sans Bold" charset="1" panose="020B0802040504020204"/>
-      <p:regular r:id="rId25"/>
+      <p:regular r:id="rId26"/>
+    </p:embeddedFont>
+    <p:embeddedFont>
+      <p:font typeface="Arimo Bold" charset="1" panose="020B0704020202020204"/>
+      <p:regular r:id="rId28"/>
     </p:embeddedFont>
     <p:embeddedFont>
       <p:font typeface="Noto Sans" charset="1" panose="020B0502040504020204"/>
-      <p:regular r:id="rId27"/>
+      <p:regular r:id="rId29"/>
     </p:embeddedFont>
     <p:embeddedFont>
       <p:font typeface="Gill Sans Bold" charset="1" panose="020B0802020104020203"/>
-      <p:regular r:id="rId35"/>
+      <p:regular r:id="rId37"/>
     </p:embeddedFont>
   </p:embeddedFontLst>
   <p:defaultTextStyle>
@@ -5657,7 +5662,7 @@
         </p:nvGrpSpPr>
         <p:grpSpPr>
           <a:xfrm rot="0">
-            <a:off x="7109460" y="2478167"/>
+            <a:off x="7109460" y="1824250"/>
             <a:ext cx="10654897" cy="6638500"/>
             <a:chOff x="0" y="0"/>
             <a:chExt cx="13401040" cy="8349475"/>
@@ -7138,50 +7143,9 @@
           </p:spPr>
         </p:sp>
       </p:grpSp>
-      <p:sp>
-        <p:nvSpPr>
-          <p:cNvPr name="TextBox 8" id="8"/>
-          <p:cNvSpPr txBox="true"/>
-          <p:nvPr/>
-        </p:nvSpPr>
-        <p:spPr>
-          <a:xfrm rot="0">
-            <a:off x="992238" y="2221116"/>
-            <a:ext cx="16303523" cy="1829095"/>
-          </a:xfrm>
-          <a:prstGeom prst="rect">
-            <a:avLst/>
-          </a:prstGeom>
-        </p:spPr>
-        <p:txBody>
-          <a:bodyPr anchor="t" rtlCol="false" tIns="0" lIns="0" bIns="0" rIns="0">
-            <a:spAutoFit/>
-          </a:bodyPr>
-          <a:lstStyle/>
-          <a:p>
-            <a:pPr algn="l">
-              <a:lnSpc>
-                <a:spcPts val="6937"/>
-              </a:lnSpc>
-            </a:pPr>
-            <a:r>
-              <a:rPr lang="en-US" sz="5562">
-                <a:solidFill>
-                  <a:srgbClr val="000000"/>
-                </a:solidFill>
-                <a:latin typeface="Arimo"/>
-                <a:ea typeface="Arimo"/>
-                <a:cs typeface="Arimo"/>
-                <a:sym typeface="Arimo"/>
-              </a:rPr>
-              <a:t>Defesa em Profundidade (Advanced Security)</a:t>
-            </a:r>
-          </a:p>
-        </p:txBody>
-      </p:sp>
       <p:grpSp>
         <p:nvGrpSpPr>
-          <p:cNvPr name="Group 9" id="9"/>
+          <p:cNvPr name="Group 8" id="8"/>
           <p:cNvGrpSpPr/>
           <p:nvPr/>
         </p:nvGrpSpPr>
@@ -7195,7 +7159,7 @@
         </p:grpSpPr>
         <p:sp>
           <p:nvSpPr>
-            <p:cNvPr name="Freeform 10" id="10"/>
+            <p:cNvPr name="Freeform 9" id="9"/>
             <p:cNvSpPr/>
             <p:nvPr/>
           </p:nvSpPr>
@@ -7251,132 +7215,9 @@
           </p:spPr>
         </p:sp>
       </p:grpSp>
-      <p:sp>
-        <p:nvSpPr>
-          <p:cNvPr name="TextBox 11" id="11"/>
-          <p:cNvSpPr txBox="true"/>
-          <p:nvPr/>
-        </p:nvSpPr>
-        <p:spPr>
-          <a:xfrm rot="0">
-            <a:off x="3402359" y="4814735"/>
-            <a:ext cx="425206" cy="493509"/>
-          </a:xfrm>
-          <a:prstGeom prst="rect">
-            <a:avLst/>
-          </a:prstGeom>
-        </p:spPr>
-        <p:txBody>
-          <a:bodyPr anchor="t" rtlCol="false" tIns="0" lIns="0" bIns="0" rIns="0">
-            <a:spAutoFit/>
-          </a:bodyPr>
-          <a:lstStyle/>
-          <a:p>
-            <a:pPr algn="l">
-              <a:lnSpc>
-                <a:spcPts val="3312"/>
-              </a:lnSpc>
-            </a:pPr>
-            <a:r>
-              <a:rPr lang="en-US" sz="3312">
-                <a:solidFill>
-                  <a:srgbClr val="E0D6DE"/>
-                </a:solidFill>
-                <a:latin typeface="Arimo"/>
-                <a:ea typeface="Arimo"/>
-                <a:cs typeface="Arimo"/>
-                <a:sym typeface="Arimo"/>
-              </a:rPr>
-              <a:t>1</a:t>
-            </a:r>
-          </a:p>
-        </p:txBody>
-      </p:sp>
-      <p:sp>
-        <p:nvSpPr>
-          <p:cNvPr name="TextBox 12" id="12"/>
-          <p:cNvSpPr txBox="true"/>
-          <p:nvPr/>
-        </p:nvSpPr>
-        <p:spPr>
-          <a:xfrm rot="0">
-            <a:off x="1275759" y="5713209"/>
-            <a:ext cx="3544043" cy="481012"/>
-          </a:xfrm>
-          <a:prstGeom prst="rect">
-            <a:avLst/>
-          </a:prstGeom>
-        </p:spPr>
-        <p:txBody>
-          <a:bodyPr anchor="t" rtlCol="false" tIns="0" lIns="0" bIns="0" rIns="0">
-            <a:spAutoFit/>
-          </a:bodyPr>
-          <a:lstStyle/>
-          <a:p>
-            <a:pPr algn="l">
-              <a:lnSpc>
-                <a:spcPts val="3437"/>
-              </a:lnSpc>
-            </a:pPr>
-            <a:r>
-              <a:rPr lang="en-US" sz="2750">
-                <a:solidFill>
-                  <a:srgbClr val="000000"/>
-                </a:solidFill>
-                <a:latin typeface="Arimo"/>
-                <a:ea typeface="Arimo"/>
-                <a:cs typeface="Arimo"/>
-                <a:sym typeface="Arimo"/>
-              </a:rPr>
-              <a:t>Honeytokens</a:t>
-            </a:r>
-          </a:p>
-        </p:txBody>
-      </p:sp>
-      <p:sp>
-        <p:nvSpPr>
-          <p:cNvPr name="TextBox 13" id="13"/>
-          <p:cNvSpPr txBox="true"/>
-          <p:nvPr/>
-        </p:nvSpPr>
-        <p:spPr>
-          <a:xfrm rot="0">
-            <a:off x="1275759" y="6278613"/>
-            <a:ext cx="4678413" cy="1446609"/>
-          </a:xfrm>
-          <a:prstGeom prst="rect">
-            <a:avLst/>
-          </a:prstGeom>
-        </p:spPr>
-        <p:txBody>
-          <a:bodyPr anchor="t" rtlCol="false" tIns="0" lIns="0" bIns="0" rIns="0">
-            <a:spAutoFit/>
-          </a:bodyPr>
-          <a:lstStyle/>
-          <a:p>
-            <a:pPr algn="l">
-              <a:lnSpc>
-                <a:spcPts val="3562"/>
-              </a:lnSpc>
-            </a:pPr>
-            <a:r>
-              <a:rPr lang="en-US" sz="2187">
-                <a:solidFill>
-                  <a:srgbClr val="000000"/>
-                </a:solidFill>
-                <a:latin typeface="Noto Sans"/>
-                <a:ea typeface="Noto Sans"/>
-                <a:cs typeface="Noto Sans"/>
-                <a:sym typeface="Noto Sans"/>
-              </a:rPr>
-              <a:t>Credenciais falsas inseridas no código para atrair e detectar invasores.</a:t>
-            </a:r>
-          </a:p>
-        </p:txBody>
-      </p:sp>
       <p:grpSp>
         <p:nvGrpSpPr>
-          <p:cNvPr name="Group 14" id="14"/>
+          <p:cNvPr name="Group 10" id="10"/>
           <p:cNvGrpSpPr/>
           <p:nvPr/>
         </p:nvGrpSpPr>
@@ -7390,7 +7231,7 @@
         </p:grpSpPr>
         <p:sp>
           <p:nvSpPr>
-            <p:cNvPr name="Freeform 15" id="15"/>
+            <p:cNvPr name="Freeform 11" id="11"/>
             <p:cNvSpPr/>
             <p:nvPr/>
           </p:nvSpPr>
@@ -7448,7 +7289,7 @@
       </p:grpSp>
       <p:sp>
         <p:nvSpPr>
-          <p:cNvPr name="Freeform 16" id="16" descr="preencoded.png"/>
+          <p:cNvPr name="Freeform 12" id="12" descr="preencoded.png"/>
           <p:cNvSpPr/>
           <p:nvPr/>
         </p:nvSpPr>
@@ -7498,91 +7339,9 @@
           </a:blipFill>
         </p:spPr>
       </p:sp>
-      <p:sp>
-        <p:nvSpPr>
-          <p:cNvPr name="TextBox 17" id="17"/>
-          <p:cNvSpPr txBox="true"/>
-          <p:nvPr/>
-        </p:nvSpPr>
-        <p:spPr>
-          <a:xfrm rot="0">
-            <a:off x="6804717" y="5713209"/>
-            <a:ext cx="3544043" cy="481012"/>
-          </a:xfrm>
-          <a:prstGeom prst="rect">
-            <a:avLst/>
-          </a:prstGeom>
-        </p:spPr>
-        <p:txBody>
-          <a:bodyPr anchor="t" rtlCol="false" tIns="0" lIns="0" bIns="0" rIns="0">
-            <a:spAutoFit/>
-          </a:bodyPr>
-          <a:lstStyle/>
-          <a:p>
-            <a:pPr algn="l">
-              <a:lnSpc>
-                <a:spcPts val="3437"/>
-              </a:lnSpc>
-            </a:pPr>
-            <a:r>
-              <a:rPr lang="en-US" sz="2750">
-                <a:solidFill>
-                  <a:srgbClr val="E0D6DE"/>
-                </a:solidFill>
-                <a:latin typeface="Arimo"/>
-                <a:ea typeface="Arimo"/>
-                <a:cs typeface="Arimo"/>
-                <a:sym typeface="Arimo"/>
-              </a:rPr>
-              <a:t>Canary Endpoints</a:t>
-            </a:r>
-          </a:p>
-        </p:txBody>
-      </p:sp>
-      <p:sp>
-        <p:nvSpPr>
-          <p:cNvPr name="TextBox 18" id="18"/>
-          <p:cNvSpPr txBox="true"/>
-          <p:nvPr/>
-        </p:nvSpPr>
-        <p:spPr>
-          <a:xfrm rot="0">
-            <a:off x="6804717" y="6278613"/>
-            <a:ext cx="4678413" cy="992981"/>
-          </a:xfrm>
-          <a:prstGeom prst="rect">
-            <a:avLst/>
-          </a:prstGeom>
-        </p:spPr>
-        <p:txBody>
-          <a:bodyPr anchor="t" rtlCol="false" tIns="0" lIns="0" bIns="0" rIns="0">
-            <a:spAutoFit/>
-          </a:bodyPr>
-          <a:lstStyle/>
-          <a:p>
-            <a:pPr algn="l">
-              <a:lnSpc>
-                <a:spcPts val="3562"/>
-              </a:lnSpc>
-            </a:pPr>
-            <a:r>
-              <a:rPr lang="en-US" sz="2187">
-                <a:solidFill>
-                  <a:srgbClr val="E0D6DE"/>
-                </a:solidFill>
-                <a:latin typeface="Noto Sans"/>
-                <a:ea typeface="Noto Sans"/>
-                <a:cs typeface="Noto Sans"/>
-                <a:sym typeface="Noto Sans"/>
-              </a:rPr>
-              <a:t>Rotas monitoradas que disparam alertas ao serem acessadas.</a:t>
-            </a:r>
-          </a:p>
-        </p:txBody>
-      </p:sp>
       <p:grpSp>
         <p:nvGrpSpPr>
-          <p:cNvPr name="Group 19" id="19"/>
+          <p:cNvPr name="Group 13" id="13"/>
           <p:cNvGrpSpPr/>
           <p:nvPr/>
         </p:nvGrpSpPr>
@@ -7596,7 +7355,7 @@
         </p:grpSpPr>
         <p:sp>
           <p:nvSpPr>
-            <p:cNvPr name="Freeform 20" id="20"/>
+            <p:cNvPr name="Freeform 14" id="14"/>
             <p:cNvSpPr/>
             <p:nvPr/>
           </p:nvSpPr>
@@ -7652,76 +7411,160 @@
           </p:spPr>
         </p:sp>
       </p:grpSp>
-      <p:grpSp>
-        <p:nvGrpSpPr>
-          <p:cNvPr name="Group 21" id="21"/>
-          <p:cNvGrpSpPr/>
-          <p:nvPr/>
-        </p:nvGrpSpPr>
-        <p:grpSpPr>
+      <p:sp>
+        <p:nvSpPr>
+          <p:cNvPr name="Freeform 15" id="15"/>
+          <p:cNvSpPr/>
+          <p:nvPr/>
+        </p:nvSpPr>
+        <p:spPr>
+          <a:xfrm flipH="false" flipV="false" rot="0">
+            <a:off x="14116815" y="4762311"/>
+            <a:ext cx="723897" cy="560115"/>
+          </a:xfrm>
+          <a:custGeom>
+            <a:avLst/>
+            <a:gdLst/>
+            <a:ahLst/>
+            <a:cxnLst/>
+            <a:rect r="r" b="b" t="t" l="l"/>
+            <a:pathLst>
+              <a:path h="560115" w="723897">
+                <a:moveTo>
+                  <a:pt x="0" y="0"/>
+                </a:moveTo>
+                <a:lnTo>
+                  <a:pt x="723897" y="0"/>
+                </a:lnTo>
+                <a:lnTo>
+                  <a:pt x="723897" y="560115"/>
+                </a:lnTo>
+                <a:lnTo>
+                  <a:pt x="0" y="560115"/>
+                </a:lnTo>
+                <a:lnTo>
+                  <a:pt x="0" y="0"/>
+                </a:lnTo>
+                <a:close/>
+              </a:path>
+            </a:pathLst>
+          </a:custGeom>
+          <a:blipFill>
+            <a:blip r:embed="rId5">
+              <a:extLst>
+                <a:ext uri="{96DAC541-7B7A-43D3-8B79-37D633B846F1}">
+                  <asvg:svgBlip xmlns:asvg="http://schemas.microsoft.com/office/drawing/2016/SVG/main" r:embed="rId6"/>
+                </a:ext>
+              </a:extLst>
+            </a:blip>
+            <a:stretch>
+              <a:fillRect l="0" t="0" r="0" b="0"/>
+            </a:stretch>
+          </a:blipFill>
+        </p:spPr>
+      </p:sp>
+      <p:sp>
+        <p:nvSpPr>
+          <p:cNvPr name="Freeform 16" id="16"/>
+          <p:cNvSpPr/>
+          <p:nvPr/>
+        </p:nvSpPr>
+        <p:spPr>
+          <a:xfrm flipH="false" flipV="false" rot="0">
+            <a:off x="3008751" y="4617244"/>
+            <a:ext cx="877075" cy="763055"/>
+          </a:xfrm>
+          <a:custGeom>
+            <a:avLst/>
+            <a:gdLst/>
+            <a:ahLst/>
+            <a:cxnLst/>
+            <a:rect r="r" b="b" t="t" l="l"/>
+            <a:pathLst>
+              <a:path h="763055" w="877075">
+                <a:moveTo>
+                  <a:pt x="0" y="0"/>
+                </a:moveTo>
+                <a:lnTo>
+                  <a:pt x="877074" y="0"/>
+                </a:lnTo>
+                <a:lnTo>
+                  <a:pt x="877074" y="763055"/>
+                </a:lnTo>
+                <a:lnTo>
+                  <a:pt x="0" y="763055"/>
+                </a:lnTo>
+                <a:lnTo>
+                  <a:pt x="0" y="0"/>
+                </a:lnTo>
+                <a:close/>
+              </a:path>
+            </a:pathLst>
+          </a:custGeom>
+          <a:blipFill>
+            <a:blip r:embed="rId7">
+              <a:extLst>
+                <a:ext uri="{96DAC541-7B7A-43D3-8B79-37D633B846F1}">
+                  <asvg:svgBlip xmlns:asvg="http://schemas.microsoft.com/office/drawing/2016/SVG/main" r:embed="rId8"/>
+                </a:ext>
+              </a:extLst>
+            </a:blip>
+            <a:stretch>
+              <a:fillRect l="0" t="0" r="0" b="0"/>
+            </a:stretch>
+          </a:blipFill>
+        </p:spPr>
+      </p:sp>
+      <p:sp>
+        <p:nvSpPr>
+          <p:cNvPr name="TextBox 17" id="17"/>
+          <p:cNvSpPr txBox="true"/>
+          <p:nvPr/>
+        </p:nvSpPr>
+        <p:spPr>
           <a:xfrm rot="0">
-            <a:off x="14460293" y="4829766"/>
-            <a:ext cx="425206" cy="425206"/>
-            <a:chOff x="0" y="0"/>
-            <a:chExt cx="566941" cy="566941"/>
-          </a:xfrm>
-        </p:grpSpPr>
-        <p:sp>
-          <p:nvSpPr>
-            <p:cNvPr name="Freeform 22" id="22" descr="preencoded.png"/>
-            <p:cNvSpPr/>
-            <p:nvPr/>
-          </p:nvSpPr>
-          <p:spPr>
-            <a:xfrm flipH="false" flipV="false" rot="0">
-              <a:off x="0" y="0"/>
-              <a:ext cx="566928" cy="566928"/>
-            </a:xfrm>
-            <a:custGeom>
-              <a:avLst/>
-              <a:gdLst/>
-              <a:ahLst/>
-              <a:cxnLst/>
-              <a:rect r="r" b="b" t="t" l="l"/>
-              <a:pathLst>
-                <a:path h="566928" w="566928">
-                  <a:moveTo>
-                    <a:pt x="0" y="0"/>
-                  </a:moveTo>
-                  <a:lnTo>
-                    <a:pt x="566928" y="0"/>
-                  </a:lnTo>
-                  <a:lnTo>
-                    <a:pt x="566928" y="566928"/>
-                  </a:lnTo>
-                  <a:lnTo>
-                    <a:pt x="0" y="566928"/>
-                  </a:lnTo>
-                  <a:lnTo>
-                    <a:pt x="0" y="0"/>
-                  </a:lnTo>
-                  <a:close/>
-                </a:path>
-              </a:pathLst>
-            </a:custGeom>
-            <a:blipFill>
-              <a:blip r:embed="rId5"/>
-              <a:stretch>
-                <a:fillRect l="0" t="0" r="-2" b="-2"/>
-              </a:stretch>
-            </a:blipFill>
-          </p:spPr>
-        </p:sp>
-      </p:grpSp>
-      <p:sp>
-        <p:nvSpPr>
-          <p:cNvPr name="TextBox 23" id="23"/>
+            <a:off x="992238" y="2221116"/>
+            <a:ext cx="16303523" cy="1829095"/>
+          </a:xfrm>
+          <a:prstGeom prst="rect">
+            <a:avLst/>
+          </a:prstGeom>
+        </p:spPr>
+        <p:txBody>
+          <a:bodyPr anchor="t" rtlCol="false" tIns="0" lIns="0" bIns="0" rIns="0">
+            <a:spAutoFit/>
+          </a:bodyPr>
+          <a:lstStyle/>
+          <a:p>
+            <a:pPr algn="l">
+              <a:lnSpc>
+                <a:spcPts val="6937"/>
+              </a:lnSpc>
+            </a:pPr>
+            <a:r>
+              <a:rPr lang="en-US" sz="5562">
+                <a:solidFill>
+                  <a:srgbClr val="000000"/>
+                </a:solidFill>
+                <a:latin typeface="Arimo"/>
+                <a:ea typeface="Arimo"/>
+                <a:cs typeface="Arimo"/>
+                <a:sym typeface="Arimo"/>
+              </a:rPr>
+              <a:t>Defesa em Profundidade (Advanced Security)</a:t>
+            </a:r>
+          </a:p>
+        </p:txBody>
+      </p:sp>
+      <p:sp>
+        <p:nvSpPr>
+          <p:cNvPr name="TextBox 18" id="18"/>
           <p:cNvSpPr txBox="true"/>
           <p:nvPr/>
         </p:nvSpPr>
         <p:spPr>
           <a:xfrm rot="0">
-            <a:off x="12333684" y="5713209"/>
+            <a:off x="1275759" y="5713209"/>
             <a:ext cx="3544043" cy="481012"/>
           </a:xfrm>
           <a:prstGeom prst="rect">
@@ -7742,7 +7585,171 @@
             <a:r>
               <a:rPr lang="en-US" sz="2750">
                 <a:solidFill>
-                  <a:srgbClr val="E0D6DE"/>
+                  <a:srgbClr val="000000"/>
+                </a:solidFill>
+                <a:latin typeface="Arimo"/>
+                <a:ea typeface="Arimo"/>
+                <a:cs typeface="Arimo"/>
+                <a:sym typeface="Arimo"/>
+              </a:rPr>
+              <a:t>Honeytokens</a:t>
+            </a:r>
+          </a:p>
+        </p:txBody>
+      </p:sp>
+      <p:sp>
+        <p:nvSpPr>
+          <p:cNvPr name="TextBox 19" id="19"/>
+          <p:cNvSpPr txBox="true"/>
+          <p:nvPr/>
+        </p:nvSpPr>
+        <p:spPr>
+          <a:xfrm rot="0">
+            <a:off x="1275759" y="6278613"/>
+            <a:ext cx="4678413" cy="1446609"/>
+          </a:xfrm>
+          <a:prstGeom prst="rect">
+            <a:avLst/>
+          </a:prstGeom>
+        </p:spPr>
+        <p:txBody>
+          <a:bodyPr anchor="t" rtlCol="false" tIns="0" lIns="0" bIns="0" rIns="0">
+            <a:spAutoFit/>
+          </a:bodyPr>
+          <a:lstStyle/>
+          <a:p>
+            <a:pPr algn="l">
+              <a:lnSpc>
+                <a:spcPts val="3562"/>
+              </a:lnSpc>
+            </a:pPr>
+            <a:r>
+              <a:rPr lang="en-US" sz="2187">
+                <a:solidFill>
+                  <a:srgbClr val="000000"/>
+                </a:solidFill>
+                <a:latin typeface="Noto Sans"/>
+                <a:ea typeface="Noto Sans"/>
+                <a:cs typeface="Noto Sans"/>
+                <a:sym typeface="Noto Sans"/>
+              </a:rPr>
+              <a:t>Credenciais falsas inseridas no código para atrair e detectar invasores.</a:t>
+            </a:r>
+          </a:p>
+        </p:txBody>
+      </p:sp>
+      <p:sp>
+        <p:nvSpPr>
+          <p:cNvPr name="TextBox 20" id="20"/>
+          <p:cNvSpPr txBox="true"/>
+          <p:nvPr/>
+        </p:nvSpPr>
+        <p:spPr>
+          <a:xfrm rot="0">
+            <a:off x="6804717" y="5713209"/>
+            <a:ext cx="3544043" cy="481012"/>
+          </a:xfrm>
+          <a:prstGeom prst="rect">
+            <a:avLst/>
+          </a:prstGeom>
+        </p:spPr>
+        <p:txBody>
+          <a:bodyPr anchor="t" rtlCol="false" tIns="0" lIns="0" bIns="0" rIns="0">
+            <a:spAutoFit/>
+          </a:bodyPr>
+          <a:lstStyle/>
+          <a:p>
+            <a:pPr algn="l">
+              <a:lnSpc>
+                <a:spcPts val="3437"/>
+              </a:lnSpc>
+            </a:pPr>
+            <a:r>
+              <a:rPr lang="en-US" sz="2750">
+                <a:solidFill>
+                  <a:srgbClr val="000000"/>
+                </a:solidFill>
+                <a:latin typeface="Arimo"/>
+                <a:ea typeface="Arimo"/>
+                <a:cs typeface="Arimo"/>
+                <a:sym typeface="Arimo"/>
+              </a:rPr>
+              <a:t>Canary Endpoints</a:t>
+            </a:r>
+          </a:p>
+        </p:txBody>
+      </p:sp>
+      <p:sp>
+        <p:nvSpPr>
+          <p:cNvPr name="TextBox 21" id="21"/>
+          <p:cNvSpPr txBox="true"/>
+          <p:nvPr/>
+        </p:nvSpPr>
+        <p:spPr>
+          <a:xfrm rot="0">
+            <a:off x="6804717" y="6278613"/>
+            <a:ext cx="4678413" cy="992981"/>
+          </a:xfrm>
+          <a:prstGeom prst="rect">
+            <a:avLst/>
+          </a:prstGeom>
+        </p:spPr>
+        <p:txBody>
+          <a:bodyPr anchor="t" rtlCol="false" tIns="0" lIns="0" bIns="0" rIns="0">
+            <a:spAutoFit/>
+          </a:bodyPr>
+          <a:lstStyle/>
+          <a:p>
+            <a:pPr algn="l">
+              <a:lnSpc>
+                <a:spcPts val="3562"/>
+              </a:lnSpc>
+            </a:pPr>
+            <a:r>
+              <a:rPr lang="en-US" sz="2187">
+                <a:solidFill>
+                  <a:srgbClr val="000000"/>
+                </a:solidFill>
+                <a:latin typeface="Noto Sans"/>
+                <a:ea typeface="Noto Sans"/>
+                <a:cs typeface="Noto Sans"/>
+                <a:sym typeface="Noto Sans"/>
+              </a:rPr>
+              <a:t>Rotas monitoradas que disparam alertas ao serem acessadas.</a:t>
+            </a:r>
+          </a:p>
+        </p:txBody>
+      </p:sp>
+      <p:sp>
+        <p:nvSpPr>
+          <p:cNvPr name="TextBox 22" id="22"/>
+          <p:cNvSpPr txBox="true"/>
+          <p:nvPr/>
+        </p:nvSpPr>
+        <p:spPr>
+          <a:xfrm rot="0">
+            <a:off x="12333684" y="5713209"/>
+            <a:ext cx="3544043" cy="481012"/>
+          </a:xfrm>
+          <a:prstGeom prst="rect">
+            <a:avLst/>
+          </a:prstGeom>
+        </p:spPr>
+        <p:txBody>
+          <a:bodyPr anchor="t" rtlCol="false" tIns="0" lIns="0" bIns="0" rIns="0">
+            <a:spAutoFit/>
+          </a:bodyPr>
+          <a:lstStyle/>
+          <a:p>
+            <a:pPr algn="l">
+              <a:lnSpc>
+                <a:spcPts val="3437"/>
+              </a:lnSpc>
+            </a:pPr>
+            <a:r>
+              <a:rPr lang="en-US" sz="2750">
+                <a:solidFill>
+                  <a:srgbClr val="000000"/>
                 </a:solidFill>
                 <a:latin typeface="Arimo"/>
                 <a:ea typeface="Arimo"/>
@@ -7756,7 +7763,7 @@
       </p:sp>
       <p:sp>
         <p:nvSpPr>
-          <p:cNvPr name="TextBox 24" id="24"/>
+          <p:cNvPr name="TextBox 23" id="23"/>
           <p:cNvSpPr txBox="true"/>
           <p:nvPr/>
         </p:nvSpPr>
@@ -7783,7 +7790,7 @@
             <a:r>
               <a:rPr lang="en-US" sz="2187">
                 <a:solidFill>
-                  <a:srgbClr val="E0D6DE"/>
+                  <a:srgbClr val="000000"/>
                 </a:solidFill>
                 <a:latin typeface="Noto Sans"/>
                 <a:ea typeface="Noto Sans"/>
@@ -8346,8 +8353,8 @@
         </p:nvSpPr>
         <p:spPr>
           <a:xfrm rot="0">
-            <a:off x="992238" y="2657180"/>
-            <a:ext cx="7832827" cy="943127"/>
+            <a:off x="669798" y="2090014"/>
+            <a:ext cx="6792786" cy="900140"/>
           </a:xfrm>
           <a:prstGeom prst="rect">
             <a:avLst/>
@@ -8374,7 +8381,19 @@
                 <a:cs typeface="Arimo"/>
                 <a:sym typeface="Arimo"/>
               </a:rPr>
-              <a:t>Resultados e Impacto</a:t>
+              <a:t>Con</a:t>
+            </a:r>
+            <a:r>
+              <a:rPr lang="en-US" sz="5562">
+                <a:solidFill>
+                  <a:srgbClr val="000000"/>
+                </a:solidFill>
+                <a:latin typeface="Arimo"/>
+                <a:ea typeface="Arimo"/>
+                <a:cs typeface="Arimo"/>
+                <a:sym typeface="Arimo"/>
+              </a:rPr>
+              <a:t>siderações Finais</a:t>
             </a:r>
           </a:p>
         </p:txBody>
@@ -8449,7 +8468,7 @@
             <a:r>
               <a:rPr lang="en-US" sz="2750">
                 <a:solidFill>
-                  <a:srgbClr val="E0D6DE"/>
+                  <a:srgbClr val="000000"/>
                 </a:solidFill>
                 <a:latin typeface="Arimo"/>
                 <a:ea typeface="Arimo"/>
@@ -8572,7 +8591,7 @@
             <a:r>
               <a:rPr lang="en-US" sz="2750">
                 <a:solidFill>
-                  <a:srgbClr val="E0D6DE"/>
+                  <a:srgbClr val="000000"/>
                 </a:solidFill>
                 <a:latin typeface="Arimo"/>
                 <a:ea typeface="Arimo"/>
@@ -8674,8 +8693,8 @@
         </p:nvSpPr>
         <p:spPr>
           <a:xfrm rot="0">
-            <a:off x="12924530" y="5560666"/>
-            <a:ext cx="3544043" cy="481012"/>
+            <a:off x="13658001" y="5560666"/>
+            <a:ext cx="2077099" cy="449262"/>
           </a:xfrm>
           <a:prstGeom prst="rect">
             <a:avLst/>
@@ -8695,14 +8714,14 @@
             <a:r>
               <a:rPr lang="en-US" sz="2750">
                 <a:solidFill>
-                  <a:srgbClr val="E0D6DE"/>
+                  <a:srgbClr val="000000"/>
                 </a:solidFill>
                 <a:latin typeface="Arimo"/>
                 <a:ea typeface="Arimo"/>
                 <a:cs typeface="Arimo"/>
                 <a:sym typeface="Arimo"/>
               </a:rPr>
-              <a:t>Conclusão</a:t>
+              <a:t>Produto Final</a:t>
             </a:r>
           </a:p>
         </p:txBody>
@@ -8757,6 +8776,477 @@
 </file>
 
 <file path=ppt/slides/slide15.xml><?xml version="1.0" encoding="utf-8"?>
+<p:sld xmlns:p="http://schemas.openxmlformats.org/presentationml/2006/main" xmlns:a="http://schemas.openxmlformats.org/drawingml/2006/main">
+  <p:cSld>
+    <p:spTree>
+      <p:nvGrpSpPr>
+        <p:cNvPr id="1" name=""/>
+        <p:cNvGrpSpPr/>
+        <p:nvPr/>
+      </p:nvGrpSpPr>
+      <p:grpSpPr>
+        <a:xfrm>
+          <a:off x="0" y="0"/>
+          <a:ext cx="0" cy="0"/>
+          <a:chOff x="0" y="0"/>
+          <a:chExt cx="0" cy="0"/>
+        </a:xfrm>
+      </p:grpSpPr>
+      <p:sp>
+        <p:nvSpPr>
+          <p:cNvPr name="TextBox 2" id="2"/>
+          <p:cNvSpPr txBox="true"/>
+          <p:nvPr/>
+        </p:nvSpPr>
+        <p:spPr>
+          <a:xfrm rot="0">
+            <a:off x="139652" y="613923"/>
+            <a:ext cx="18008697" cy="9097255"/>
+          </a:xfrm>
+          <a:prstGeom prst="rect">
+            <a:avLst/>
+          </a:prstGeom>
+        </p:spPr>
+        <p:txBody>
+          <a:bodyPr anchor="t" rtlCol="false" tIns="0" lIns="0" bIns="0" rIns="0">
+            <a:spAutoFit/>
+          </a:bodyPr>
+          <a:lstStyle/>
+          <a:p>
+            <a:pPr algn="ctr">
+              <a:lnSpc>
+                <a:spcPts val="2599"/>
+              </a:lnSpc>
+              <a:spcBef>
+                <a:spcPct val="0"/>
+              </a:spcBef>
+            </a:pPr>
+            <a:r>
+              <a:rPr lang="en-US" sz="2599">
+                <a:solidFill>
+                  <a:srgbClr val="000000"/>
+                </a:solidFill>
+                <a:latin typeface="Arimo"/>
+                <a:ea typeface="Arimo"/>
+                <a:cs typeface="Arimo"/>
+                <a:sym typeface="Arimo"/>
+              </a:rPr>
+              <a:t>REFERÊNCIAS BIBLIOGRÁFICAS</a:t>
+            </a:r>
+          </a:p>
+          <a:p>
+            <a:pPr algn="l">
+              <a:lnSpc>
+                <a:spcPts val="2599"/>
+              </a:lnSpc>
+              <a:spcBef>
+                <a:spcPct val="0"/>
+              </a:spcBef>
+            </a:pPr>
+          </a:p>
+          <a:p>
+            <a:pPr algn="l">
+              <a:lnSpc>
+                <a:spcPts val="2599"/>
+              </a:lnSpc>
+              <a:spcBef>
+                <a:spcPct val="0"/>
+              </a:spcBef>
+            </a:pPr>
+          </a:p>
+          <a:p>
+            <a:pPr algn="l">
+              <a:lnSpc>
+                <a:spcPts val="2599"/>
+              </a:lnSpc>
+              <a:spcBef>
+                <a:spcPct val="0"/>
+              </a:spcBef>
+            </a:pPr>
+            <a:r>
+              <a:rPr lang="en-US" sz="2599">
+                <a:solidFill>
+                  <a:srgbClr val="000000"/>
+                </a:solidFill>
+                <a:latin typeface="Arimo"/>
+                <a:ea typeface="Arimo"/>
+                <a:cs typeface="Arimo"/>
+                <a:sym typeface="Arimo"/>
+              </a:rPr>
+              <a:t> BRASIL. [Portal da Legislação]. </a:t>
+            </a:r>
+            <a:r>
+              <a:rPr lang="en-US" b="true" sz="2599">
+                <a:solidFill>
+                  <a:srgbClr val="000000"/>
+                </a:solidFill>
+                <a:latin typeface="Arimo Bold"/>
+                <a:ea typeface="Arimo Bold"/>
+                <a:cs typeface="Arimo Bold"/>
+                <a:sym typeface="Arimo Bold"/>
+              </a:rPr>
+              <a:t>Lei nº 13.146, de 6 de julho de 2015</a:t>
+            </a:r>
+            <a:r>
+              <a:rPr lang="en-US" sz="2599">
+                <a:solidFill>
+                  <a:srgbClr val="000000"/>
+                </a:solidFill>
+                <a:latin typeface="Arimo"/>
+                <a:ea typeface="Arimo"/>
+                <a:cs typeface="Arimo"/>
+                <a:sym typeface="Arimo"/>
+              </a:rPr>
+              <a:t>. Institui a Lei Brasileira de Inclusão da Pessoa com Deficiência (Estatuto da Pessoa com Deficiência). Brasília, DF: Presidência da República, [2015]. Disponível em: http://www.planalto.gov.br/ccivil_03/_ato2015 2018/2015/lei/l13146.htm. Acesso em: 15 dez. 2025. </a:t>
+            </a:r>
+          </a:p>
+          <a:p>
+            <a:pPr algn="l">
+              <a:lnSpc>
+                <a:spcPts val="2599"/>
+              </a:lnSpc>
+              <a:spcBef>
+                <a:spcPct val="0"/>
+              </a:spcBef>
+            </a:pPr>
+          </a:p>
+          <a:p>
+            <a:pPr algn="l">
+              <a:lnSpc>
+                <a:spcPts val="2599"/>
+              </a:lnSpc>
+              <a:spcBef>
+                <a:spcPct val="0"/>
+              </a:spcBef>
+            </a:pPr>
+            <a:r>
+              <a:rPr lang="en-US" sz="2599">
+                <a:solidFill>
+                  <a:srgbClr val="000000"/>
+                </a:solidFill>
+                <a:latin typeface="Arimo"/>
+                <a:ea typeface="Arimo"/>
+                <a:cs typeface="Arimo"/>
+                <a:sym typeface="Arimo"/>
+              </a:rPr>
+              <a:t>BRASIL. [Portal da Legislação]. </a:t>
+            </a:r>
+            <a:r>
+              <a:rPr lang="en-US" b="true" sz="2599">
+                <a:solidFill>
+                  <a:srgbClr val="000000"/>
+                </a:solidFill>
+                <a:latin typeface="Arimo Bold"/>
+                <a:ea typeface="Arimo Bold"/>
+                <a:cs typeface="Arimo Bold"/>
+                <a:sym typeface="Arimo Bold"/>
+              </a:rPr>
+              <a:t>Lei nº 13.709, de 14 de agosto de 2018</a:t>
+            </a:r>
+            <a:r>
+              <a:rPr lang="en-US" sz="2599">
+                <a:solidFill>
+                  <a:srgbClr val="000000"/>
+                </a:solidFill>
+                <a:latin typeface="Arimo"/>
+                <a:ea typeface="Arimo"/>
+                <a:cs typeface="Arimo"/>
+                <a:sym typeface="Arimo"/>
+              </a:rPr>
+              <a:t>. Lei Geral de Proteção de Dados Pessoais (LGPD). Brasília, DF: Presidência da República, [2018]. Disponível em: http://www.planalto.gov.br/ccivil_03/_ato2017-2020/2018/lei/l13709.htm. Acesso em: 15 dez. 2025. </a:t>
+            </a:r>
+          </a:p>
+          <a:p>
+            <a:pPr algn="l">
+              <a:lnSpc>
+                <a:spcPts val="2599"/>
+              </a:lnSpc>
+              <a:spcBef>
+                <a:spcPct val="0"/>
+              </a:spcBef>
+            </a:pPr>
+          </a:p>
+          <a:p>
+            <a:pPr algn="l">
+              <a:lnSpc>
+                <a:spcPts val="2599"/>
+              </a:lnSpc>
+              <a:spcBef>
+                <a:spcPct val="0"/>
+              </a:spcBef>
+            </a:pPr>
+            <a:r>
+              <a:rPr lang="en-US" sz="2599">
+                <a:solidFill>
+                  <a:srgbClr val="000000"/>
+                </a:solidFill>
+                <a:latin typeface="Arimo"/>
+                <a:ea typeface="Arimo"/>
+                <a:cs typeface="Arimo"/>
+                <a:sym typeface="Arimo"/>
+              </a:rPr>
+              <a:t>BRASIL. </a:t>
+            </a:r>
+            <a:r>
+              <a:rPr lang="en-US" b="true" sz="2599">
+                <a:solidFill>
+                  <a:srgbClr val="000000"/>
+                </a:solidFill>
+                <a:latin typeface="Arimo Bold"/>
+                <a:ea typeface="Arimo Bold"/>
+                <a:cs typeface="Arimo Bold"/>
+                <a:sym typeface="Arimo Bold"/>
+              </a:rPr>
+              <a:t>Decreto nº 10.502, de 30 de setembro de 2020</a:t>
+            </a:r>
+            <a:r>
+              <a:rPr lang="en-US" sz="2599">
+                <a:solidFill>
+                  <a:srgbClr val="000000"/>
+                </a:solidFill>
+                <a:latin typeface="Arimo"/>
+                <a:ea typeface="Arimo"/>
+                <a:cs typeface="Arimo"/>
+                <a:sym typeface="Arimo"/>
+              </a:rPr>
+              <a:t>. Institui a Política Nacional de Educação Especial: Equitativa, Inclusiva e com Aprendizado ao Longo da Vida. Brasília, DF: Presidência da República, 2020. LIMA, Marcos Guilherme Oliveira. Gestão Atípicos: Sistema Web para Gestão Especializada de Alunos Atípicos na Educação Inclusiva. 2025. Repositório de código (GitHub). Disponível em: https://github.com/z12guilherme/gestao_atipicos. Acesso em: 19 dez. 2025. </a:t>
+            </a:r>
+          </a:p>
+          <a:p>
+            <a:pPr algn="l">
+              <a:lnSpc>
+                <a:spcPts val="2599"/>
+              </a:lnSpc>
+              <a:spcBef>
+                <a:spcPct val="0"/>
+              </a:spcBef>
+            </a:pPr>
+          </a:p>
+          <a:p>
+            <a:pPr algn="l">
+              <a:lnSpc>
+                <a:spcPts val="2599"/>
+              </a:lnSpc>
+              <a:spcBef>
+                <a:spcPct val="0"/>
+              </a:spcBef>
+            </a:pPr>
+            <a:r>
+              <a:rPr lang="en-US" sz="2599">
+                <a:solidFill>
+                  <a:srgbClr val="000000"/>
+                </a:solidFill>
+                <a:latin typeface="Arimo"/>
+                <a:ea typeface="Arimo"/>
+                <a:cs typeface="Arimo"/>
+                <a:sym typeface="Arimo"/>
+              </a:rPr>
+              <a:t>MICROSOFT. </a:t>
+            </a:r>
+            <a:r>
+              <a:rPr lang="en-US" b="true" sz="2599">
+                <a:solidFill>
+                  <a:srgbClr val="000000"/>
+                </a:solidFill>
+                <a:latin typeface="Arimo Bold"/>
+                <a:ea typeface="Arimo Bold"/>
+                <a:cs typeface="Arimo Bold"/>
+                <a:sym typeface="Arimo Bold"/>
+              </a:rPr>
+              <a:t>The STRIDE Threat Model</a:t>
+            </a:r>
+            <a:r>
+              <a:rPr lang="en-US" sz="2599">
+                <a:solidFill>
+                  <a:srgbClr val="000000"/>
+                </a:solidFill>
+                <a:latin typeface="Arimo"/>
+                <a:ea typeface="Arimo"/>
+                <a:cs typeface="Arimo"/>
+                <a:sym typeface="Arimo"/>
+              </a:rPr>
+              <a:t>. Azure Security Center, 2026. Disponível em: https://learn.microsoft.com/en-us/azure/security/develop/threat-modeling-tool-threats. Acesso em: 15 dez. 2025. </a:t>
+            </a:r>
+          </a:p>
+          <a:p>
+            <a:pPr algn="l">
+              <a:lnSpc>
+                <a:spcPts val="2599"/>
+              </a:lnSpc>
+              <a:spcBef>
+                <a:spcPct val="0"/>
+              </a:spcBef>
+            </a:pPr>
+          </a:p>
+          <a:p>
+            <a:pPr algn="l">
+              <a:lnSpc>
+                <a:spcPts val="2599"/>
+              </a:lnSpc>
+              <a:spcBef>
+                <a:spcPct val="0"/>
+              </a:spcBef>
+            </a:pPr>
+            <a:r>
+              <a:rPr lang="en-US" sz="2599">
+                <a:solidFill>
+                  <a:srgbClr val="000000"/>
+                </a:solidFill>
+                <a:latin typeface="Arimo"/>
+                <a:ea typeface="Arimo"/>
+                <a:cs typeface="Arimo"/>
+                <a:sym typeface="Arimo"/>
+              </a:rPr>
+              <a:t>OWASP FOUNDATION. </a:t>
+            </a:r>
+            <a:r>
+              <a:rPr lang="en-US" b="true" sz="2599">
+                <a:solidFill>
+                  <a:srgbClr val="000000"/>
+                </a:solidFill>
+                <a:latin typeface="Arimo Bold"/>
+                <a:ea typeface="Arimo Bold"/>
+                <a:cs typeface="Arimo Bold"/>
+                <a:sym typeface="Arimo Bold"/>
+              </a:rPr>
+              <a:t>Application Security Verification Standard</a:t>
+            </a:r>
+            <a:r>
+              <a:rPr lang="en-US" sz="2599">
+                <a:solidFill>
+                  <a:srgbClr val="000000"/>
+                </a:solidFill>
+                <a:latin typeface="Arimo"/>
+                <a:ea typeface="Arimo"/>
+                <a:cs typeface="Arimo"/>
+                <a:sym typeface="Arimo"/>
+              </a:rPr>
+              <a:t> (ASVS). Version 4.0.3. 2021. Disponível em: https://owasp.org/www-project-application-security-verification-standard/. Acesso em: 15 dez. 2025. </a:t>
+            </a:r>
+          </a:p>
+          <a:p>
+            <a:pPr algn="l">
+              <a:lnSpc>
+                <a:spcPts val="2599"/>
+              </a:lnSpc>
+              <a:spcBef>
+                <a:spcPct val="0"/>
+              </a:spcBef>
+            </a:pPr>
+          </a:p>
+          <a:p>
+            <a:pPr algn="l">
+              <a:lnSpc>
+                <a:spcPts val="2599"/>
+              </a:lnSpc>
+              <a:spcBef>
+                <a:spcPct val="0"/>
+              </a:spcBef>
+            </a:pPr>
+            <a:r>
+              <a:rPr lang="en-US" sz="2599">
+                <a:solidFill>
+                  <a:srgbClr val="000000"/>
+                </a:solidFill>
+                <a:latin typeface="Arimo"/>
+                <a:ea typeface="Arimo"/>
+                <a:cs typeface="Arimo"/>
+                <a:sym typeface="Arimo"/>
+              </a:rPr>
+              <a:t>OWASP FOUNDATION. </a:t>
+            </a:r>
+            <a:r>
+              <a:rPr lang="en-US" b="true" sz="2599">
+                <a:solidFill>
+                  <a:srgbClr val="000000"/>
+                </a:solidFill>
+                <a:latin typeface="Arimo Bold"/>
+                <a:ea typeface="Arimo Bold"/>
+                <a:cs typeface="Arimo Bold"/>
+                <a:sym typeface="Arimo Bold"/>
+              </a:rPr>
+              <a:t>OWASP Top 10:2021</a:t>
+            </a:r>
+            <a:r>
+              <a:rPr lang="en-US" sz="2599">
+                <a:solidFill>
+                  <a:srgbClr val="000000"/>
+                </a:solidFill>
+                <a:latin typeface="Arimo"/>
+                <a:ea typeface="Arimo"/>
+                <a:cs typeface="Arimo"/>
+                <a:sym typeface="Arimo"/>
+              </a:rPr>
+              <a:t>. The Most Critical Web Application Security Risks. Disponível em: https://owasp.org/www-project-top-ten/. Acesso em: 15 dez. 2025. </a:t>
+            </a:r>
+          </a:p>
+          <a:p>
+            <a:pPr algn="l">
+              <a:lnSpc>
+                <a:spcPts val="2599"/>
+              </a:lnSpc>
+              <a:spcBef>
+                <a:spcPct val="0"/>
+              </a:spcBef>
+            </a:pPr>
+          </a:p>
+          <a:p>
+            <a:pPr algn="l">
+              <a:lnSpc>
+                <a:spcPts val="2599"/>
+              </a:lnSpc>
+              <a:spcBef>
+                <a:spcPct val="0"/>
+              </a:spcBef>
+            </a:pPr>
+            <a:r>
+              <a:rPr lang="en-US" sz="2599">
+                <a:solidFill>
+                  <a:srgbClr val="000000"/>
+                </a:solidFill>
+                <a:latin typeface="Arimo"/>
+                <a:ea typeface="Arimo"/>
+                <a:cs typeface="Arimo"/>
+                <a:sym typeface="Arimo"/>
+              </a:rPr>
+              <a:t>SUPABASE INC. </a:t>
+            </a:r>
+            <a:r>
+              <a:rPr lang="en-US" b="true" sz="2599">
+                <a:solidFill>
+                  <a:srgbClr val="000000"/>
+                </a:solidFill>
+                <a:latin typeface="Arimo Bold"/>
+                <a:ea typeface="Arimo Bold"/>
+                <a:cs typeface="Arimo Bold"/>
+                <a:sym typeface="Arimo Bold"/>
+              </a:rPr>
+              <a:t>Row Level Security</a:t>
+            </a:r>
+            <a:r>
+              <a:rPr lang="en-US" sz="2599">
+                <a:solidFill>
+                  <a:srgbClr val="000000"/>
+                </a:solidFill>
+                <a:latin typeface="Arimo"/>
+                <a:ea typeface="Arimo"/>
+                <a:cs typeface="Arimo"/>
+                <a:sym typeface="Arimo"/>
+              </a:rPr>
+              <a:t>. Documentation. 2026. Disponível em: https://supabase.com/docs/guides/auth/row-level-security. Acesso em: 15 dez. 2025. </a:t>
+            </a:r>
+          </a:p>
+        </p:txBody>
+      </p:sp>
+    </p:spTree>
+  </p:cSld>
+  <p:clrMapOvr>
+    <a:masterClrMapping/>
+  </p:clrMapOvr>
+</p:sld>
+</file>
+
+<file path=ppt/slides/slide16.xml><?xml version="1.0" encoding="utf-8"?>
 <p:sld xmlns:p="http://schemas.openxmlformats.org/presentationml/2006/main" xmlns:a="http://schemas.openxmlformats.org/drawingml/2006/main" xmlns:r="http://schemas.openxmlformats.org/officeDocument/2006/relationships">
   <p:cSld>
     <p:spTree>
@@ -8946,7 +9436,7 @@
         </p:nvGrpSpPr>
         <p:grpSpPr>
           <a:xfrm rot="0">
-            <a:off x="0" y="0"/>
+            <a:off x="669798" y="446885"/>
             <a:ext cx="18288000" cy="3544043"/>
             <a:chOff x="0" y="0"/>
             <a:chExt cx="24384000" cy="4725391"/>
@@ -9393,56 +9883,15 @@
           </p:spPr>
         </p:sp>
       </p:grpSp>
-      <p:sp>
-        <p:nvSpPr>
-          <p:cNvPr name="TextBox 8" id="8"/>
-          <p:cNvSpPr txBox="true"/>
-          <p:nvPr/>
-        </p:nvSpPr>
-        <p:spPr>
-          <a:xfrm rot="0">
-            <a:off x="992238" y="2824458"/>
-            <a:ext cx="10827096" cy="943127"/>
-          </a:xfrm>
-          <a:prstGeom prst="rect">
-            <a:avLst/>
-          </a:prstGeom>
-        </p:spPr>
-        <p:txBody>
-          <a:bodyPr anchor="t" rtlCol="false" tIns="0" lIns="0" bIns="0" rIns="0">
-            <a:spAutoFit/>
-          </a:bodyPr>
-          <a:lstStyle/>
-          <a:p>
-            <a:pPr algn="l">
-              <a:lnSpc>
-                <a:spcPts val="6937"/>
-              </a:lnSpc>
-            </a:pPr>
-            <a:r>
-              <a:rPr lang="en-US" sz="5562">
-                <a:solidFill>
-                  <a:srgbClr val="000000"/>
-                </a:solidFill>
-                <a:latin typeface="Arimo"/>
-                <a:ea typeface="Arimo"/>
-                <a:cs typeface="Arimo"/>
-                <a:sym typeface="Arimo"/>
-              </a:rPr>
-              <a:t>O Problema da Gestão Manual</a:t>
-            </a:r>
-          </a:p>
-        </p:txBody>
-      </p:sp>
       <p:grpSp>
         <p:nvGrpSpPr>
-          <p:cNvPr name="Group 9" id="9"/>
+          <p:cNvPr name="Group 8" id="8"/>
           <p:cNvGrpSpPr/>
           <p:nvPr/>
         </p:nvGrpSpPr>
         <p:grpSpPr>
           <a:xfrm rot="0">
-            <a:off x="954138" y="4334618"/>
+            <a:off x="669798" y="5143500"/>
             <a:ext cx="152400" cy="3070774"/>
             <a:chOff x="0" y="0"/>
             <a:chExt cx="203200" cy="4094366"/>
@@ -9450,7 +9899,7 @@
         </p:grpSpPr>
         <p:sp>
           <p:nvSpPr>
-            <p:cNvPr name="Freeform 10" id="10" descr="preencoded.png"/>
+            <p:cNvPr name="Freeform 9" id="9" descr="preencoded.png"/>
             <p:cNvSpPr/>
             <p:nvPr/>
           </p:nvSpPr>
@@ -9495,97 +9944,15 @@
           </p:spPr>
         </p:sp>
       </p:grpSp>
-      <p:sp>
-        <p:nvSpPr>
-          <p:cNvPr name="TextBox 11" id="11"/>
-          <p:cNvSpPr txBox="true"/>
-          <p:nvPr/>
-        </p:nvSpPr>
-        <p:spPr>
-          <a:xfrm rot="0">
-            <a:off x="1428159" y="4618139"/>
-            <a:ext cx="3544043" cy="481012"/>
-          </a:xfrm>
-          <a:prstGeom prst="rect">
-            <a:avLst/>
-          </a:prstGeom>
-        </p:spPr>
-        <p:txBody>
-          <a:bodyPr anchor="t" rtlCol="false" tIns="0" lIns="0" bIns="0" rIns="0">
-            <a:spAutoFit/>
-          </a:bodyPr>
-          <a:lstStyle/>
-          <a:p>
-            <a:pPr algn="l">
-              <a:lnSpc>
-                <a:spcPts val="3437"/>
-              </a:lnSpc>
-            </a:pPr>
-            <a:r>
-              <a:rPr lang="en-US" sz="2750">
-                <a:solidFill>
-                  <a:srgbClr val="000000"/>
-                </a:solidFill>
-                <a:latin typeface="Arimo"/>
-                <a:ea typeface="Arimo"/>
-                <a:cs typeface="Arimo"/>
-                <a:sym typeface="Arimo"/>
-              </a:rPr>
-              <a:t>Cenário</a:t>
-            </a:r>
-          </a:p>
-        </p:txBody>
-      </p:sp>
-      <p:sp>
-        <p:nvSpPr>
-          <p:cNvPr name="TextBox 12" id="12"/>
-          <p:cNvSpPr txBox="true"/>
-          <p:nvPr/>
-        </p:nvSpPr>
-        <p:spPr>
-          <a:xfrm rot="0">
-            <a:off x="1428159" y="5183534"/>
-            <a:ext cx="4487913" cy="1900237"/>
-          </a:xfrm>
-          <a:prstGeom prst="rect">
-            <a:avLst/>
-          </a:prstGeom>
-        </p:spPr>
-        <p:txBody>
-          <a:bodyPr anchor="t" rtlCol="false" tIns="0" lIns="0" bIns="0" rIns="0">
-            <a:spAutoFit/>
-          </a:bodyPr>
-          <a:lstStyle/>
-          <a:p>
-            <a:pPr algn="l">
-              <a:lnSpc>
-                <a:spcPts val="3562"/>
-              </a:lnSpc>
-            </a:pPr>
-            <a:r>
-              <a:rPr lang="en-US" sz="2187">
-                <a:solidFill>
-                  <a:srgbClr val="000000"/>
-                </a:solidFill>
-                <a:latin typeface="Noto Sans"/>
-                <a:ea typeface="Noto Sans"/>
-                <a:cs typeface="Noto Sans"/>
-                <a:sym typeface="Noto Sans"/>
-              </a:rPr>
-              <a:t>A Lei Brasileira de Inclusão obriga o atendimento especializado, mas muitas escolas ainda usam planilhas e papel.</a:t>
-            </a:r>
-          </a:p>
-        </p:txBody>
-      </p:sp>
       <p:grpSp>
         <p:nvGrpSpPr>
-          <p:cNvPr name="Group 13" id="13"/>
+          <p:cNvPr name="Group 10" id="10"/>
           <p:cNvGrpSpPr/>
           <p:nvPr/>
         </p:nvGrpSpPr>
         <p:grpSpPr>
           <a:xfrm rot="0">
-            <a:off x="6483106" y="4334618"/>
+            <a:off x="6198765" y="5143500"/>
             <a:ext cx="152400" cy="3070774"/>
             <a:chOff x="0" y="0"/>
             <a:chExt cx="203200" cy="4094366"/>
@@ -9593,7 +9960,7 @@
         </p:grpSpPr>
         <p:sp>
           <p:nvSpPr>
-            <p:cNvPr name="Freeform 14" id="14" descr="preencoded.png"/>
+            <p:cNvPr name="Freeform 11" id="11" descr="preencoded.png"/>
             <p:cNvSpPr/>
             <p:nvPr/>
           </p:nvSpPr>
@@ -9638,97 +10005,15 @@
           </p:spPr>
         </p:sp>
       </p:grpSp>
-      <p:sp>
-        <p:nvSpPr>
-          <p:cNvPr name="TextBox 15" id="15"/>
-          <p:cNvSpPr txBox="true"/>
-          <p:nvPr/>
-        </p:nvSpPr>
-        <p:spPr>
-          <a:xfrm rot="0">
-            <a:off x="6957117" y="4618139"/>
-            <a:ext cx="3544043" cy="481012"/>
-          </a:xfrm>
-          <a:prstGeom prst="rect">
-            <a:avLst/>
-          </a:prstGeom>
-        </p:spPr>
-        <p:txBody>
-          <a:bodyPr anchor="t" rtlCol="false" tIns="0" lIns="0" bIns="0" rIns="0">
-            <a:spAutoFit/>
-          </a:bodyPr>
-          <a:lstStyle/>
-          <a:p>
-            <a:pPr algn="l">
-              <a:lnSpc>
-                <a:spcPts val="3437"/>
-              </a:lnSpc>
-            </a:pPr>
-            <a:r>
-              <a:rPr lang="en-US" sz="2750">
-                <a:solidFill>
-                  <a:srgbClr val="000000"/>
-                </a:solidFill>
-                <a:latin typeface="Arimo"/>
-                <a:ea typeface="Arimo"/>
-                <a:cs typeface="Arimo"/>
-                <a:sym typeface="Arimo"/>
-              </a:rPr>
-              <a:t>Riscos</a:t>
-            </a:r>
-          </a:p>
-        </p:txBody>
-      </p:sp>
-      <p:sp>
-        <p:nvSpPr>
-          <p:cNvPr name="TextBox 16" id="16"/>
-          <p:cNvSpPr txBox="true"/>
-          <p:nvPr/>
-        </p:nvSpPr>
-        <p:spPr>
-          <a:xfrm rot="0">
-            <a:off x="6957117" y="5183534"/>
-            <a:ext cx="4487913" cy="1446609"/>
-          </a:xfrm>
-          <a:prstGeom prst="rect">
-            <a:avLst/>
-          </a:prstGeom>
-        </p:spPr>
-        <p:txBody>
-          <a:bodyPr anchor="t" rtlCol="false" tIns="0" lIns="0" bIns="0" rIns="0">
-            <a:spAutoFit/>
-          </a:bodyPr>
-          <a:lstStyle/>
-          <a:p>
-            <a:pPr algn="l">
-              <a:lnSpc>
-                <a:spcPts val="3562"/>
-              </a:lnSpc>
-            </a:pPr>
-            <a:r>
-              <a:rPr lang="en-US" sz="2187">
-                <a:solidFill>
-                  <a:srgbClr val="000000"/>
-                </a:solidFill>
-                <a:latin typeface="Noto Sans"/>
-                <a:ea typeface="Noto Sans"/>
-                <a:cs typeface="Noto Sans"/>
-                <a:sym typeface="Noto Sans"/>
-              </a:rPr>
-              <a:t>Perda de histórico pedagógico e, principalmente, vulnerabilidade jurídica perante a LGPD.</a:t>
-            </a:r>
-          </a:p>
-        </p:txBody>
-      </p:sp>
       <p:grpSp>
         <p:nvGrpSpPr>
-          <p:cNvPr name="Group 17" id="17"/>
+          <p:cNvPr name="Group 12" id="12"/>
           <p:cNvGrpSpPr/>
           <p:nvPr/>
         </p:nvGrpSpPr>
         <p:grpSpPr>
           <a:xfrm rot="0">
-            <a:off x="12012063" y="4334618"/>
+            <a:off x="11727723" y="5143500"/>
             <a:ext cx="152400" cy="3070774"/>
             <a:chOff x="0" y="0"/>
             <a:chExt cx="203200" cy="4094366"/>
@@ -9736,7 +10021,7 @@
         </p:grpSpPr>
         <p:sp>
           <p:nvSpPr>
-            <p:cNvPr name="Freeform 18" id="18" descr="preencoded.png"/>
+            <p:cNvPr name="Freeform 13" id="13" descr="preencoded.png"/>
             <p:cNvSpPr/>
             <p:nvPr/>
           </p:nvSpPr>
@@ -9783,14 +10068,14 @@
       </p:grpSp>
       <p:sp>
         <p:nvSpPr>
-          <p:cNvPr name="TextBox 19" id="19"/>
+          <p:cNvPr name="TextBox 14" id="14"/>
           <p:cNvSpPr txBox="true"/>
           <p:nvPr/>
         </p:nvSpPr>
         <p:spPr>
           <a:xfrm rot="0">
-            <a:off x="12486084" y="4618139"/>
-            <a:ext cx="3544043" cy="481012"/>
+            <a:off x="669798" y="1185501"/>
+            <a:ext cx="16948404" cy="1925948"/>
           </a:xfrm>
           <a:prstGeom prst="rect">
             <a:avLst/>
@@ -9804,11 +10089,11 @@
           <a:p>
             <a:pPr algn="l">
               <a:lnSpc>
-                <a:spcPts val="3437"/>
+                <a:spcPts val="4193"/>
               </a:lnSpc>
             </a:pPr>
             <a:r>
-              <a:rPr lang="en-US" sz="2750">
+              <a:rPr lang="en-US" sz="3362">
                 <a:solidFill>
                   <a:srgbClr val="000000"/>
                 </a:solidFill>
@@ -9817,6 +10102,230 @@
                 <a:cs typeface="Arimo"/>
                 <a:sym typeface="Arimo"/>
               </a:rPr>
+              <a:t>Como</a:t>
+            </a:r>
+            <a:r>
+              <a:rPr lang="en-US" sz="3362">
+                <a:solidFill>
+                  <a:srgbClr val="000000"/>
+                </a:solidFill>
+                <a:latin typeface="Arimo"/>
+                <a:ea typeface="Arimo"/>
+                <a:cs typeface="Arimo"/>
+                <a:sym typeface="Arimo"/>
+              </a:rPr>
+              <a:t> desenvolver um sistema web seguro, acessível e funcional que centralize a gestão de alunos atípicos, facilitando o trabalho de gestores, cuidadores e responsáveis?</a:t>
+            </a:r>
+          </a:p>
+          <a:p>
+            <a:pPr algn="l">
+              <a:lnSpc>
+                <a:spcPts val="6937"/>
+              </a:lnSpc>
+            </a:pPr>
+          </a:p>
+        </p:txBody>
+      </p:sp>
+      <p:sp>
+        <p:nvSpPr>
+          <p:cNvPr name="TextBox 15" id="15"/>
+          <p:cNvSpPr txBox="true"/>
+          <p:nvPr/>
+        </p:nvSpPr>
+        <p:spPr>
+          <a:xfrm rot="0">
+            <a:off x="1139352" y="5427021"/>
+            <a:ext cx="1300217" cy="449262"/>
+          </a:xfrm>
+          <a:prstGeom prst="rect">
+            <a:avLst/>
+          </a:prstGeom>
+        </p:spPr>
+        <p:txBody>
+          <a:bodyPr anchor="t" rtlCol="false" tIns="0" lIns="0" bIns="0" rIns="0">
+            <a:spAutoFit/>
+          </a:bodyPr>
+          <a:lstStyle/>
+          <a:p>
+            <a:pPr algn="l">
+              <a:lnSpc>
+                <a:spcPts val="3437"/>
+              </a:lnSpc>
+            </a:pPr>
+            <a:r>
+              <a:rPr lang="en-US" sz="2750" b="true">
+                <a:solidFill>
+                  <a:srgbClr val="000000"/>
+                </a:solidFill>
+                <a:latin typeface="Arimo Bold"/>
+                <a:ea typeface="Arimo Bold"/>
+                <a:cs typeface="Arimo Bold"/>
+                <a:sym typeface="Arimo Bold"/>
+              </a:rPr>
+              <a:t>Cenário</a:t>
+            </a:r>
+          </a:p>
+        </p:txBody>
+      </p:sp>
+      <p:sp>
+        <p:nvSpPr>
+          <p:cNvPr name="TextBox 16" id="16"/>
+          <p:cNvSpPr txBox="true"/>
+          <p:nvPr/>
+        </p:nvSpPr>
+        <p:spPr>
+          <a:xfrm rot="0">
+            <a:off x="1139352" y="5992416"/>
+            <a:ext cx="4487913" cy="1900237"/>
+          </a:xfrm>
+          <a:prstGeom prst="rect">
+            <a:avLst/>
+          </a:prstGeom>
+        </p:spPr>
+        <p:txBody>
+          <a:bodyPr anchor="t" rtlCol="false" tIns="0" lIns="0" bIns="0" rIns="0">
+            <a:spAutoFit/>
+          </a:bodyPr>
+          <a:lstStyle/>
+          <a:p>
+            <a:pPr algn="l">
+              <a:lnSpc>
+                <a:spcPts val="3562"/>
+              </a:lnSpc>
+            </a:pPr>
+            <a:r>
+              <a:rPr lang="en-US" sz="2187">
+                <a:solidFill>
+                  <a:srgbClr val="000000"/>
+                </a:solidFill>
+                <a:latin typeface="Noto Sans"/>
+                <a:ea typeface="Noto Sans"/>
+                <a:cs typeface="Noto Sans"/>
+                <a:sym typeface="Noto Sans"/>
+              </a:rPr>
+              <a:t>A Lei Brasileira de Inclusão obriga o atendimento especializado, mas muitas escolas ainda usam planilhas e papel.</a:t>
+            </a:r>
+          </a:p>
+        </p:txBody>
+      </p:sp>
+      <p:sp>
+        <p:nvSpPr>
+          <p:cNvPr name="TextBox 17" id="17"/>
+          <p:cNvSpPr txBox="true"/>
+          <p:nvPr/>
+        </p:nvSpPr>
+        <p:spPr>
+          <a:xfrm rot="0">
+            <a:off x="6665490" y="5427021"/>
+            <a:ext cx="1145300" cy="449262"/>
+          </a:xfrm>
+          <a:prstGeom prst="rect">
+            <a:avLst/>
+          </a:prstGeom>
+        </p:spPr>
+        <p:txBody>
+          <a:bodyPr anchor="t" rtlCol="false" tIns="0" lIns="0" bIns="0" rIns="0">
+            <a:spAutoFit/>
+          </a:bodyPr>
+          <a:lstStyle/>
+          <a:p>
+            <a:pPr algn="l">
+              <a:lnSpc>
+                <a:spcPts val="3437"/>
+              </a:lnSpc>
+            </a:pPr>
+            <a:r>
+              <a:rPr lang="en-US" sz="2750" b="true">
+                <a:solidFill>
+                  <a:srgbClr val="000000"/>
+                </a:solidFill>
+                <a:latin typeface="Arimo Bold"/>
+                <a:ea typeface="Arimo Bold"/>
+                <a:cs typeface="Arimo Bold"/>
+                <a:sym typeface="Arimo Bold"/>
+              </a:rPr>
+              <a:t>Riscos</a:t>
+            </a:r>
+          </a:p>
+        </p:txBody>
+      </p:sp>
+      <p:sp>
+        <p:nvSpPr>
+          <p:cNvPr name="TextBox 18" id="18"/>
+          <p:cNvSpPr txBox="true"/>
+          <p:nvPr/>
+        </p:nvSpPr>
+        <p:spPr>
+          <a:xfrm rot="0">
+            <a:off x="6665490" y="5992416"/>
+            <a:ext cx="4487913" cy="1446609"/>
+          </a:xfrm>
+          <a:prstGeom prst="rect">
+            <a:avLst/>
+          </a:prstGeom>
+        </p:spPr>
+        <p:txBody>
+          <a:bodyPr anchor="t" rtlCol="false" tIns="0" lIns="0" bIns="0" rIns="0">
+            <a:spAutoFit/>
+          </a:bodyPr>
+          <a:lstStyle/>
+          <a:p>
+            <a:pPr algn="l">
+              <a:lnSpc>
+                <a:spcPts val="3562"/>
+              </a:lnSpc>
+            </a:pPr>
+            <a:r>
+              <a:rPr lang="en-US" sz="2187">
+                <a:solidFill>
+                  <a:srgbClr val="000000"/>
+                </a:solidFill>
+                <a:latin typeface="Noto Sans"/>
+                <a:ea typeface="Noto Sans"/>
+                <a:cs typeface="Noto Sans"/>
+                <a:sym typeface="Noto Sans"/>
+              </a:rPr>
+              <a:t>Perda de histórico pedagógico e, principalmente, vulnerabilidade jurídica perante a LGPD.</a:t>
+            </a:r>
+          </a:p>
+        </p:txBody>
+      </p:sp>
+      <p:sp>
+        <p:nvSpPr>
+          <p:cNvPr name="TextBox 19" id="19"/>
+          <p:cNvSpPr txBox="true"/>
+          <p:nvPr/>
+        </p:nvSpPr>
+        <p:spPr>
+          <a:xfrm rot="0">
+            <a:off x="12194448" y="5427021"/>
+            <a:ext cx="2775780" cy="449262"/>
+          </a:xfrm>
+          <a:prstGeom prst="rect">
+            <a:avLst/>
+          </a:prstGeom>
+        </p:spPr>
+        <p:txBody>
+          <a:bodyPr anchor="t" rtlCol="false" tIns="0" lIns="0" bIns="0" rIns="0">
+            <a:spAutoFit/>
+          </a:bodyPr>
+          <a:lstStyle/>
+          <a:p>
+            <a:pPr algn="l">
+              <a:lnSpc>
+                <a:spcPts val="3437"/>
+              </a:lnSpc>
+            </a:pPr>
+            <a:r>
+              <a:rPr lang="en-US" sz="2750" b="true">
+                <a:solidFill>
+                  <a:srgbClr val="000000"/>
+                </a:solidFill>
+                <a:latin typeface="Arimo Bold"/>
+                <a:ea typeface="Arimo Bold"/>
+                <a:cs typeface="Arimo Bold"/>
+                <a:sym typeface="Arimo Bold"/>
+              </a:rPr>
               <a:t>Dados Sensíveis</a:t>
             </a:r>
           </a:p>
@@ -9830,7 +10339,7 @@
         </p:nvSpPr>
         <p:spPr>
           <a:xfrm rot="0">
-            <a:off x="12486084" y="5183534"/>
+            <a:off x="12194448" y="5992416"/>
             <a:ext cx="4487913" cy="1446609"/>
           </a:xfrm>
           <a:prstGeom prst="rect">
@@ -10850,7 +11359,7 @@
 </file>
 
 <file path=ppt/slides/slide5.xml><?xml version="1.0" encoding="utf-8"?>
-<p:sld xmlns:p="http://schemas.openxmlformats.org/presentationml/2006/main" xmlns:a="http://schemas.openxmlformats.org/drawingml/2006/main">
+<p:sld xmlns:p="http://schemas.openxmlformats.org/presentationml/2006/main" xmlns:a="http://schemas.openxmlformats.org/drawingml/2006/main" xmlns:r="http://schemas.openxmlformats.org/officeDocument/2006/relationships">
   <p:cSld>
     <p:spTree>
       <p:nvGrpSpPr>
@@ -10866,50 +11375,9 @@
           <a:chExt cx="0" cy="0"/>
         </a:xfrm>
       </p:grpSpPr>
-      <p:sp>
-        <p:nvSpPr>
-          <p:cNvPr name="TextBox 2" id="2"/>
-          <p:cNvSpPr txBox="true"/>
-          <p:nvPr/>
-        </p:nvSpPr>
-        <p:spPr>
-          <a:xfrm rot="0">
-            <a:off x="6881115" y="1227385"/>
-            <a:ext cx="3848695" cy="900140"/>
-          </a:xfrm>
-          <a:prstGeom prst="rect">
-            <a:avLst/>
-          </a:prstGeom>
-        </p:spPr>
-        <p:txBody>
-          <a:bodyPr anchor="t" rtlCol="false" tIns="0" lIns="0" bIns="0" rIns="0">
-            <a:spAutoFit/>
-          </a:bodyPr>
-          <a:lstStyle/>
-          <a:p>
-            <a:pPr algn="l">
-              <a:lnSpc>
-                <a:spcPts val="6937"/>
-              </a:lnSpc>
-            </a:pPr>
-            <a:r>
-              <a:rPr lang="en-US" sz="5562">
-                <a:solidFill>
-                  <a:srgbClr val="000000"/>
-                </a:solidFill>
-                <a:latin typeface="Arimo"/>
-                <a:ea typeface="Arimo"/>
-                <a:cs typeface="Arimo"/>
-                <a:sym typeface="Arimo"/>
-              </a:rPr>
-              <a:t>Metodologia</a:t>
-            </a:r>
-          </a:p>
-        </p:txBody>
-      </p:sp>
       <p:grpSp>
         <p:nvGrpSpPr>
-          <p:cNvPr name="Group 3" id="3"/>
+          <p:cNvPr name="Group 2" id="2"/>
           <p:cNvGrpSpPr/>
           <p:nvPr/>
         </p:nvGrpSpPr>
@@ -10923,7 +11391,7 @@
         </p:grpSpPr>
         <p:sp>
           <p:nvSpPr>
-            <p:cNvPr name="Freeform 4" id="4"/>
+            <p:cNvPr name="Freeform 3" id="3"/>
             <p:cNvSpPr/>
             <p:nvPr/>
           </p:nvSpPr>
@@ -10964,7 +11432,7 @@
       </p:grpSp>
       <p:grpSp>
         <p:nvGrpSpPr>
-          <p:cNvPr name="Group 5" id="5"/>
+          <p:cNvPr name="Group 4" id="4"/>
           <p:cNvGrpSpPr/>
           <p:nvPr/>
         </p:nvGrpSpPr>
@@ -10978,7 +11446,7 @@
         </p:grpSpPr>
         <p:sp>
           <p:nvSpPr>
-            <p:cNvPr name="Freeform 6" id="6"/>
+            <p:cNvPr name="Freeform 5" id="5"/>
             <p:cNvSpPr/>
             <p:nvPr/>
           </p:nvSpPr>
@@ -11019,7 +11487,7 @@
       </p:grpSp>
       <p:grpSp>
         <p:nvGrpSpPr>
-          <p:cNvPr name="Group 7" id="7"/>
+          <p:cNvPr name="Group 6" id="6"/>
           <p:cNvGrpSpPr/>
           <p:nvPr/>
         </p:nvGrpSpPr>
@@ -11033,7 +11501,7 @@
         </p:grpSpPr>
         <p:sp>
           <p:nvSpPr>
-            <p:cNvPr name="Freeform 8" id="8"/>
+            <p:cNvPr name="Freeform 7" id="7"/>
             <p:cNvSpPr/>
             <p:nvPr/>
           </p:nvSpPr>
@@ -11074,14 +11542,14 @@
       </p:grpSp>
       <p:sp>
         <p:nvSpPr>
-          <p:cNvPr name="TextBox 9" id="9"/>
+          <p:cNvPr name="TextBox 8" id="8"/>
           <p:cNvSpPr txBox="true"/>
           <p:nvPr/>
         </p:nvSpPr>
         <p:spPr>
           <a:xfrm rot="0">
-            <a:off x="510588" y="3156194"/>
-            <a:ext cx="14649218" cy="6117467"/>
+            <a:off x="2610082" y="2483689"/>
+            <a:ext cx="14649218" cy="7431755"/>
           </a:xfrm>
           <a:prstGeom prst="rect">
             <a:avLst/>
@@ -11146,6 +11614,16 @@
             </a:pPr>
           </a:p>
           <a:p>
+            <a:pPr algn="just">
+              <a:lnSpc>
+                <a:spcPts val="3499"/>
+              </a:lnSpc>
+              <a:spcBef>
+                <a:spcPct val="0"/>
+              </a:spcBef>
+            </a:pPr>
+          </a:p>
+          <a:p>
             <a:pPr algn="l" marL="539749" indent="-269875" lvl="1">
               <a:lnSpc>
                 <a:spcPts val="3499"/>
@@ -11199,6 +11677,16 @@
             </a:pPr>
           </a:p>
           <a:p>
+            <a:pPr algn="just">
+              <a:lnSpc>
+                <a:spcPts val="3499"/>
+              </a:lnSpc>
+              <a:spcBef>
+                <a:spcPct val="0"/>
+              </a:spcBef>
+            </a:pPr>
+          </a:p>
+          <a:p>
             <a:pPr algn="l" marL="539749" indent="-269875" lvl="1">
               <a:lnSpc>
                 <a:spcPts val="3499"/>
@@ -11296,6 +11784,16 @@
             </a:pPr>
           </a:p>
           <a:p>
+            <a:pPr algn="just">
+              <a:lnSpc>
+                <a:spcPts val="3499"/>
+              </a:lnSpc>
+              <a:spcBef>
+                <a:spcPct val="0"/>
+              </a:spcBef>
+            </a:pPr>
+          </a:p>
+          <a:p>
             <a:pPr algn="l" marL="539749" indent="-269875" lvl="1">
               <a:lnSpc>
                 <a:spcPts val="3499"/>
@@ -11336,6 +11834,255 @@
                 <a:sym typeface="Noto Sans"/>
               </a:rPr>
               <a:t>Execução de testes automatizados unitários/integração (Vitest) e testes de penetração Black-Box.</a:t>
+            </a:r>
+          </a:p>
+        </p:txBody>
+      </p:sp>
+      <p:sp>
+        <p:nvSpPr>
+          <p:cNvPr name="Freeform 9" id="9"/>
+          <p:cNvSpPr/>
+          <p:nvPr/>
+        </p:nvSpPr>
+        <p:spPr>
+          <a:xfrm flipH="false" flipV="false" rot="0">
+            <a:off x="395757" y="2531314"/>
+            <a:ext cx="1909823" cy="1272420"/>
+          </a:xfrm>
+          <a:custGeom>
+            <a:avLst/>
+            <a:gdLst/>
+            <a:ahLst/>
+            <a:cxnLst/>
+            <a:rect r="r" b="b" t="t" l="l"/>
+            <a:pathLst>
+              <a:path h="1272420" w="1909823">
+                <a:moveTo>
+                  <a:pt x="0" y="0"/>
+                </a:moveTo>
+                <a:lnTo>
+                  <a:pt x="1909823" y="0"/>
+                </a:lnTo>
+                <a:lnTo>
+                  <a:pt x="1909823" y="1272420"/>
+                </a:lnTo>
+                <a:lnTo>
+                  <a:pt x="0" y="1272420"/>
+                </a:lnTo>
+                <a:lnTo>
+                  <a:pt x="0" y="0"/>
+                </a:lnTo>
+                <a:close/>
+              </a:path>
+            </a:pathLst>
+          </a:custGeom>
+          <a:blipFill>
+            <a:blip r:embed="rId2">
+              <a:extLst>
+                <a:ext uri="{96DAC541-7B7A-43D3-8B79-37D633B846F1}">
+                  <asvg:svgBlip xmlns:asvg="http://schemas.microsoft.com/office/drawing/2016/SVG/main" r:embed="rId3"/>
+                </a:ext>
+              </a:extLst>
+            </a:blip>
+            <a:stretch>
+              <a:fillRect l="0" t="0" r="0" b="0"/>
+            </a:stretch>
+          </a:blipFill>
+        </p:spPr>
+      </p:sp>
+      <p:sp>
+        <p:nvSpPr>
+          <p:cNvPr name="Freeform 10" id="10"/>
+          <p:cNvSpPr/>
+          <p:nvPr/>
+        </p:nvSpPr>
+        <p:spPr>
+          <a:xfrm flipH="false" flipV="false" rot="0">
+            <a:off x="453542" y="4333914"/>
+            <a:ext cx="1713719" cy="1718015"/>
+          </a:xfrm>
+          <a:custGeom>
+            <a:avLst/>
+            <a:gdLst/>
+            <a:ahLst/>
+            <a:cxnLst/>
+            <a:rect r="r" b="b" t="t" l="l"/>
+            <a:pathLst>
+              <a:path h="1718015" w="1713719">
+                <a:moveTo>
+                  <a:pt x="0" y="0"/>
+                </a:moveTo>
+                <a:lnTo>
+                  <a:pt x="1713719" y="0"/>
+                </a:lnTo>
+                <a:lnTo>
+                  <a:pt x="1713719" y="1718015"/>
+                </a:lnTo>
+                <a:lnTo>
+                  <a:pt x="0" y="1718015"/>
+                </a:lnTo>
+                <a:lnTo>
+                  <a:pt x="0" y="0"/>
+                </a:lnTo>
+                <a:close/>
+              </a:path>
+            </a:pathLst>
+          </a:custGeom>
+          <a:blipFill>
+            <a:blip r:embed="rId4">
+              <a:extLst>
+                <a:ext uri="{96DAC541-7B7A-43D3-8B79-37D633B846F1}">
+                  <asvg:svgBlip xmlns:asvg="http://schemas.microsoft.com/office/drawing/2016/SVG/main" r:embed="rId5"/>
+                </a:ext>
+              </a:extLst>
+            </a:blip>
+            <a:stretch>
+              <a:fillRect l="0" t="0" r="0" b="0"/>
+            </a:stretch>
+          </a:blipFill>
+        </p:spPr>
+      </p:sp>
+      <p:sp>
+        <p:nvSpPr>
+          <p:cNvPr name="Freeform 11" id="11"/>
+          <p:cNvSpPr/>
+          <p:nvPr/>
+        </p:nvSpPr>
+        <p:spPr>
+          <a:xfrm flipH="false" flipV="false" rot="0">
+            <a:off x="395757" y="6385744"/>
+            <a:ext cx="1582979" cy="1670690"/>
+          </a:xfrm>
+          <a:custGeom>
+            <a:avLst/>
+            <a:gdLst/>
+            <a:ahLst/>
+            <a:cxnLst/>
+            <a:rect r="r" b="b" t="t" l="l"/>
+            <a:pathLst>
+              <a:path h="1670690" w="1582979">
+                <a:moveTo>
+                  <a:pt x="0" y="0"/>
+                </a:moveTo>
+                <a:lnTo>
+                  <a:pt x="1582979" y="0"/>
+                </a:lnTo>
+                <a:lnTo>
+                  <a:pt x="1582979" y="1670690"/>
+                </a:lnTo>
+                <a:lnTo>
+                  <a:pt x="0" y="1670690"/>
+                </a:lnTo>
+                <a:lnTo>
+                  <a:pt x="0" y="0"/>
+                </a:lnTo>
+                <a:close/>
+              </a:path>
+            </a:pathLst>
+          </a:custGeom>
+          <a:blipFill>
+            <a:blip r:embed="rId6">
+              <a:extLst>
+                <a:ext uri="{96DAC541-7B7A-43D3-8B79-37D633B846F1}">
+                  <asvg:svgBlip xmlns:asvg="http://schemas.microsoft.com/office/drawing/2016/SVG/main" r:embed="rId7"/>
+                </a:ext>
+              </a:extLst>
+            </a:blip>
+            <a:stretch>
+              <a:fillRect l="0" t="0" r="0" b="0"/>
+            </a:stretch>
+          </a:blipFill>
+        </p:spPr>
+      </p:sp>
+      <p:sp>
+        <p:nvSpPr>
+          <p:cNvPr name="Freeform 12" id="12"/>
+          <p:cNvSpPr/>
+          <p:nvPr/>
+        </p:nvSpPr>
+        <p:spPr>
+          <a:xfrm flipH="false" flipV="false" rot="0">
+            <a:off x="453542" y="8390249"/>
+            <a:ext cx="1525195" cy="1525195"/>
+          </a:xfrm>
+          <a:custGeom>
+            <a:avLst/>
+            <a:gdLst/>
+            <a:ahLst/>
+            <a:cxnLst/>
+            <a:rect r="r" b="b" t="t" l="l"/>
+            <a:pathLst>
+              <a:path h="1525195" w="1525195">
+                <a:moveTo>
+                  <a:pt x="0" y="0"/>
+                </a:moveTo>
+                <a:lnTo>
+                  <a:pt x="1525194" y="0"/>
+                </a:lnTo>
+                <a:lnTo>
+                  <a:pt x="1525194" y="1525195"/>
+                </a:lnTo>
+                <a:lnTo>
+                  <a:pt x="0" y="1525195"/>
+                </a:lnTo>
+                <a:lnTo>
+                  <a:pt x="0" y="0"/>
+                </a:lnTo>
+                <a:close/>
+              </a:path>
+            </a:pathLst>
+          </a:custGeom>
+          <a:blipFill>
+            <a:blip r:embed="rId8">
+              <a:extLst>
+                <a:ext uri="{96DAC541-7B7A-43D3-8B79-37D633B846F1}">
+                  <asvg:svgBlip xmlns:asvg="http://schemas.microsoft.com/office/drawing/2016/SVG/main" r:embed="rId9"/>
+                </a:ext>
+              </a:extLst>
+            </a:blip>
+            <a:stretch>
+              <a:fillRect l="0" t="0" r="0" b="0"/>
+            </a:stretch>
+          </a:blipFill>
+        </p:spPr>
+      </p:sp>
+      <p:sp>
+        <p:nvSpPr>
+          <p:cNvPr name="TextBox 13" id="13"/>
+          <p:cNvSpPr txBox="true"/>
+          <p:nvPr/>
+        </p:nvSpPr>
+        <p:spPr>
+          <a:xfrm rot="0">
+            <a:off x="6881115" y="1227385"/>
+            <a:ext cx="3848695" cy="900140"/>
+          </a:xfrm>
+          <a:prstGeom prst="rect">
+            <a:avLst/>
+          </a:prstGeom>
+        </p:spPr>
+        <p:txBody>
+          <a:bodyPr anchor="t" rtlCol="false" tIns="0" lIns="0" bIns="0" rIns="0">
+            <a:spAutoFit/>
+          </a:bodyPr>
+          <a:lstStyle/>
+          <a:p>
+            <a:pPr algn="l">
+              <a:lnSpc>
+                <a:spcPts val="6937"/>
+              </a:lnSpc>
+            </a:pPr>
+            <a:r>
+              <a:rPr lang="en-US" sz="5562">
+                <a:solidFill>
+                  <a:srgbClr val="000000"/>
+                </a:solidFill>
+                <a:latin typeface="Arimo"/>
+                <a:ea typeface="Arimo"/>
+                <a:cs typeface="Arimo"/>
+                <a:sym typeface="Arimo"/>
+              </a:rPr>
+              <a:t>Metodologia</a:t>
             </a:r>
           </a:p>
         </p:txBody>
@@ -11532,116 +12279,14 @@
       </p:grpSp>
       <p:sp>
         <p:nvSpPr>
-          <p:cNvPr name="TextBox 8" id="8"/>
-          <p:cNvSpPr txBox="true"/>
-          <p:nvPr/>
-        </p:nvSpPr>
-        <p:spPr>
-          <a:xfrm rot="0">
-            <a:off x="992238" y="2522334"/>
-            <a:ext cx="7107136" cy="943127"/>
-          </a:xfrm>
-          <a:prstGeom prst="rect">
-            <a:avLst/>
-          </a:prstGeom>
-        </p:spPr>
-        <p:txBody>
-          <a:bodyPr anchor="t" rtlCol="false" tIns="0" lIns="0" bIns="0" rIns="0">
-            <a:spAutoFit/>
-          </a:bodyPr>
-          <a:lstStyle/>
-          <a:p>
-            <a:pPr algn="l">
-              <a:lnSpc>
-                <a:spcPts val="6937"/>
-              </a:lnSpc>
-            </a:pPr>
-            <a:r>
-              <a:rPr lang="en-US" sz="5562">
-                <a:solidFill>
-                  <a:srgbClr val="000000"/>
-                </a:solidFill>
-                <a:latin typeface="Arimo"/>
-                <a:ea typeface="Arimo"/>
-                <a:cs typeface="Arimo"/>
-                <a:sym typeface="Arimo"/>
-              </a:rPr>
-              <a:t>A Solução Proposta</a:t>
-            </a:r>
-          </a:p>
-        </p:txBody>
-      </p:sp>
-      <p:grpSp>
-        <p:nvGrpSpPr>
-          <p:cNvPr name="Group 9" id="9"/>
-          <p:cNvGrpSpPr/>
-          <p:nvPr/>
-        </p:nvGrpSpPr>
-        <p:grpSpPr>
-          <a:xfrm rot="0">
-            <a:off x="1275759" y="4316016"/>
-            <a:ext cx="850554" cy="850554"/>
-            <a:chOff x="0" y="0"/>
-            <a:chExt cx="1134072" cy="1134072"/>
-          </a:xfrm>
-        </p:grpSpPr>
-        <p:sp>
-          <p:nvSpPr>
-            <p:cNvPr name="Freeform 10" id="10" descr="preencoded.png"/>
-            <p:cNvSpPr/>
-            <p:nvPr/>
-          </p:nvSpPr>
-          <p:spPr>
-            <a:xfrm flipH="false" flipV="false" rot="0">
-              <a:off x="0" y="0"/>
-              <a:ext cx="1134110" cy="1134110"/>
-            </a:xfrm>
-            <a:custGeom>
-              <a:avLst/>
-              <a:gdLst/>
-              <a:ahLst/>
-              <a:cxnLst/>
-              <a:rect r="r" b="b" t="t" l="l"/>
-              <a:pathLst>
-                <a:path h="1134110" w="1134110">
-                  <a:moveTo>
-                    <a:pt x="0" y="0"/>
-                  </a:moveTo>
-                  <a:lnTo>
-                    <a:pt x="1134110" y="0"/>
-                  </a:lnTo>
-                  <a:lnTo>
-                    <a:pt x="1134110" y="1134110"/>
-                  </a:lnTo>
-                  <a:lnTo>
-                    <a:pt x="0" y="1134110"/>
-                  </a:lnTo>
-                  <a:lnTo>
-                    <a:pt x="0" y="0"/>
-                  </a:lnTo>
-                  <a:close/>
-                </a:path>
-              </a:pathLst>
-            </a:custGeom>
-            <a:blipFill>
-              <a:blip r:embed="rId3"/>
-              <a:stretch>
-                <a:fillRect l="0" t="0" r="3" b="3"/>
-              </a:stretch>
-            </a:blipFill>
-          </p:spPr>
-        </p:sp>
-      </p:grpSp>
-      <p:sp>
-        <p:nvSpPr>
-          <p:cNvPr name="Freeform 11" id="11" descr="preencoded.png"/>
+          <p:cNvPr name="Freeform 8" id="8"/>
           <p:cNvSpPr/>
           <p:nvPr/>
         </p:nvSpPr>
         <p:spPr>
           <a:xfrm flipH="false" flipV="false" rot="0">
-            <a:off x="1509712" y="4549826"/>
-            <a:ext cx="382638" cy="382638"/>
+            <a:off x="1275759" y="3947408"/>
+            <a:ext cx="1204836" cy="1204836"/>
           </a:xfrm>
           <a:custGeom>
             <a:avLst/>
@@ -11650,18 +12295,18 @@
             <a:cxnLst/>
             <a:rect r="r" b="b" t="t" l="l"/>
             <a:pathLst>
-              <a:path h="382638" w="382638">
+              <a:path h="1204836" w="1204836">
                 <a:moveTo>
                   <a:pt x="0" y="0"/>
                 </a:moveTo>
                 <a:lnTo>
-                  <a:pt x="382639" y="0"/>
+                  <a:pt x="1204837" y="0"/>
                 </a:lnTo>
                 <a:lnTo>
-                  <a:pt x="382639" y="382638"/>
+                  <a:pt x="1204837" y="1204836"/>
                 </a:lnTo>
                 <a:lnTo>
-                  <a:pt x="0" y="382638"/>
+                  <a:pt x="0" y="1204836"/>
                 </a:lnTo>
                 <a:lnTo>
                   <a:pt x="0" y="0"/>
@@ -11671,10 +12316,10 @@
             </a:pathLst>
           </a:custGeom>
           <a:blipFill>
-            <a:blip r:embed="rId4">
+            <a:blip r:embed="rId3">
               <a:extLst>
                 <a:ext uri="{96DAC541-7B7A-43D3-8B79-37D633B846F1}">
-                  <asvg:svgBlip xmlns:asvg="http://schemas.microsoft.com/office/drawing/2016/SVG/main" r:embed="rId5"/>
+                  <asvg:svgBlip xmlns:asvg="http://schemas.microsoft.com/office/drawing/2016/SVG/main" r:embed="rId4"/>
                 </a:ext>
               </a:extLst>
             </a:blip>
@@ -11686,157 +12331,14 @@
       </p:sp>
       <p:sp>
         <p:nvSpPr>
-          <p:cNvPr name="TextBox 12" id="12"/>
-          <p:cNvSpPr txBox="true"/>
-          <p:nvPr/>
-        </p:nvSpPr>
-        <p:spPr>
-          <a:xfrm rot="0">
-            <a:off x="1275759" y="5411991"/>
-            <a:ext cx="3544043" cy="481012"/>
-          </a:xfrm>
-          <a:prstGeom prst="rect">
-            <a:avLst/>
-          </a:prstGeom>
-        </p:spPr>
-        <p:txBody>
-          <a:bodyPr anchor="t" rtlCol="false" tIns="0" lIns="0" bIns="0" rIns="0">
-            <a:spAutoFit/>
-          </a:bodyPr>
-          <a:lstStyle/>
-          <a:p>
-            <a:pPr algn="l">
-              <a:lnSpc>
-                <a:spcPts val="3437"/>
-              </a:lnSpc>
-            </a:pPr>
-            <a:r>
-              <a:rPr lang="en-US" sz="2750">
-                <a:solidFill>
-                  <a:srgbClr val="000000"/>
-                </a:solidFill>
-                <a:latin typeface="Arimo"/>
-                <a:ea typeface="Arimo"/>
-                <a:cs typeface="Arimo"/>
-                <a:sym typeface="Arimo"/>
-              </a:rPr>
-              <a:t>Objetivo</a:t>
-            </a:r>
-          </a:p>
-        </p:txBody>
-      </p:sp>
-      <p:sp>
-        <p:nvSpPr>
-          <p:cNvPr name="TextBox 13" id="13"/>
-          <p:cNvSpPr txBox="true"/>
-          <p:nvPr/>
-        </p:nvSpPr>
-        <p:spPr>
-          <a:xfrm rot="0">
-            <a:off x="1275759" y="5977385"/>
-            <a:ext cx="4678413" cy="992981"/>
-          </a:xfrm>
-          <a:prstGeom prst="rect">
-            <a:avLst/>
-          </a:prstGeom>
-        </p:spPr>
-        <p:txBody>
-          <a:bodyPr anchor="t" rtlCol="false" tIns="0" lIns="0" bIns="0" rIns="0">
-            <a:spAutoFit/>
-          </a:bodyPr>
-          <a:lstStyle/>
-          <a:p>
-            <a:pPr algn="l">
-              <a:lnSpc>
-                <a:spcPts val="3562"/>
-              </a:lnSpc>
-            </a:pPr>
-            <a:r>
-              <a:rPr lang="en-US" sz="2187">
-                <a:solidFill>
-                  <a:srgbClr val="000000"/>
-                </a:solidFill>
-                <a:latin typeface="Noto Sans"/>
-                <a:ea typeface="Noto Sans"/>
-                <a:cs typeface="Noto Sans"/>
-                <a:sym typeface="Noto Sans"/>
-              </a:rPr>
-              <a:t>Sistema Web Centralizado para gestão de alunos atípicos.</a:t>
-            </a:r>
-          </a:p>
-        </p:txBody>
-      </p:sp>
-      <p:grpSp>
-        <p:nvGrpSpPr>
-          <p:cNvPr name="Group 14" id="14"/>
-          <p:cNvGrpSpPr/>
-          <p:nvPr/>
-        </p:nvGrpSpPr>
-        <p:grpSpPr>
-          <a:xfrm rot="0">
-            <a:off x="6804717" y="4316016"/>
-            <a:ext cx="850554" cy="850554"/>
-            <a:chOff x="0" y="0"/>
-            <a:chExt cx="1134072" cy="1134072"/>
-          </a:xfrm>
-        </p:grpSpPr>
-        <p:sp>
-          <p:nvSpPr>
-            <p:cNvPr name="Freeform 15" id="15" descr="preencoded.png"/>
-            <p:cNvSpPr/>
-            <p:nvPr/>
-          </p:nvSpPr>
-          <p:spPr>
-            <a:xfrm flipH="false" flipV="false" rot="0">
-              <a:off x="0" y="0"/>
-              <a:ext cx="1134110" cy="1134110"/>
-            </a:xfrm>
-            <a:custGeom>
-              <a:avLst/>
-              <a:gdLst/>
-              <a:ahLst/>
-              <a:cxnLst/>
-              <a:rect r="r" b="b" t="t" l="l"/>
-              <a:pathLst>
-                <a:path h="1134110" w="1134110">
-                  <a:moveTo>
-                    <a:pt x="0" y="0"/>
-                  </a:moveTo>
-                  <a:lnTo>
-                    <a:pt x="1134110" y="0"/>
-                  </a:lnTo>
-                  <a:lnTo>
-                    <a:pt x="1134110" y="1134110"/>
-                  </a:lnTo>
-                  <a:lnTo>
-                    <a:pt x="0" y="1134110"/>
-                  </a:lnTo>
-                  <a:lnTo>
-                    <a:pt x="0" y="0"/>
-                  </a:lnTo>
-                  <a:close/>
-                </a:path>
-              </a:pathLst>
-            </a:custGeom>
-            <a:blipFill>
-              <a:blip r:embed="rId6"/>
-              <a:stretch>
-                <a:fillRect l="0" t="0" r="3" b="3"/>
-              </a:stretch>
-            </a:blipFill>
-          </p:spPr>
-        </p:sp>
-      </p:grpSp>
-      <p:sp>
-        <p:nvSpPr>
-          <p:cNvPr name="Freeform 16" id="16" descr="preencoded.png"/>
+          <p:cNvPr name="Freeform 9" id="9"/>
           <p:cNvSpPr/>
           <p:nvPr/>
         </p:nvSpPr>
         <p:spPr>
           <a:xfrm flipH="false" flipV="false" rot="0">
-            <a:off x="7038680" y="4549826"/>
-            <a:ext cx="382638" cy="382638"/>
+            <a:off x="6804717" y="3947408"/>
+            <a:ext cx="1007333" cy="1219162"/>
           </a:xfrm>
           <a:custGeom>
             <a:avLst/>
@@ -11845,18 +12347,70 @@
             <a:cxnLst/>
             <a:rect r="r" b="b" t="t" l="l"/>
             <a:pathLst>
-              <a:path h="382638" w="382638">
+              <a:path h="1219162" w="1007333">
                 <a:moveTo>
                   <a:pt x="0" y="0"/>
                 </a:moveTo>
                 <a:lnTo>
-                  <a:pt x="382638" y="0"/>
+                  <a:pt x="1007333" y="0"/>
                 </a:lnTo>
                 <a:lnTo>
-                  <a:pt x="382638" y="382638"/>
+                  <a:pt x="1007333" y="1219162"/>
                 </a:lnTo>
                 <a:lnTo>
-                  <a:pt x="0" y="382638"/>
+                  <a:pt x="0" y="1219162"/>
+                </a:lnTo>
+                <a:lnTo>
+                  <a:pt x="0" y="0"/>
+                </a:lnTo>
+                <a:close/>
+              </a:path>
+            </a:pathLst>
+          </a:custGeom>
+          <a:blipFill>
+            <a:blip r:embed="rId5">
+              <a:extLst>
+                <a:ext uri="{96DAC541-7B7A-43D3-8B79-37D633B846F1}">
+                  <asvg:svgBlip xmlns:asvg="http://schemas.microsoft.com/office/drawing/2016/SVG/main" r:embed="rId6"/>
+                </a:ext>
+              </a:extLst>
+            </a:blip>
+            <a:stretch>
+              <a:fillRect l="0" t="0" r="0" b="0"/>
+            </a:stretch>
+          </a:blipFill>
+        </p:spPr>
+      </p:sp>
+      <p:sp>
+        <p:nvSpPr>
+          <p:cNvPr name="Freeform 10" id="10"/>
+          <p:cNvSpPr/>
+          <p:nvPr/>
+        </p:nvSpPr>
+        <p:spPr>
+          <a:xfrm flipH="false" flipV="false" rot="0">
+            <a:off x="12333684" y="3947408"/>
+            <a:ext cx="1219162" cy="1219162"/>
+          </a:xfrm>
+          <a:custGeom>
+            <a:avLst/>
+            <a:gdLst/>
+            <a:ahLst/>
+            <a:cxnLst/>
+            <a:rect r="r" b="b" t="t" l="l"/>
+            <a:pathLst>
+              <a:path h="1219162" w="1219162">
+                <a:moveTo>
+                  <a:pt x="0" y="0"/>
+                </a:moveTo>
+                <a:lnTo>
+                  <a:pt x="1219162" y="0"/>
+                </a:lnTo>
+                <a:lnTo>
+                  <a:pt x="1219162" y="1219162"/>
+                </a:lnTo>
+                <a:lnTo>
+                  <a:pt x="0" y="1219162"/>
                 </a:lnTo>
                 <a:lnTo>
                   <a:pt x="0" y="0"/>
@@ -11874,14 +12428,137 @@
               </a:extLst>
             </a:blip>
             <a:stretch>
-              <a:fillRect l="-20730" t="0" r="-20733" b="0"/>
+              <a:fillRect l="0" t="0" r="0" b="0"/>
             </a:stretch>
           </a:blipFill>
         </p:spPr>
       </p:sp>
       <p:sp>
         <p:nvSpPr>
-          <p:cNvPr name="TextBox 17" id="17"/>
+          <p:cNvPr name="TextBox 11" id="11"/>
+          <p:cNvSpPr txBox="true"/>
+          <p:nvPr/>
+        </p:nvSpPr>
+        <p:spPr>
+          <a:xfrm rot="0">
+            <a:off x="992238" y="2522334"/>
+            <a:ext cx="7107136" cy="943127"/>
+          </a:xfrm>
+          <a:prstGeom prst="rect">
+            <a:avLst/>
+          </a:prstGeom>
+        </p:spPr>
+        <p:txBody>
+          <a:bodyPr anchor="t" rtlCol="false" tIns="0" lIns="0" bIns="0" rIns="0">
+            <a:spAutoFit/>
+          </a:bodyPr>
+          <a:lstStyle/>
+          <a:p>
+            <a:pPr algn="l">
+              <a:lnSpc>
+                <a:spcPts val="6937"/>
+              </a:lnSpc>
+            </a:pPr>
+            <a:r>
+              <a:rPr lang="en-US" sz="5562">
+                <a:solidFill>
+                  <a:srgbClr val="000000"/>
+                </a:solidFill>
+                <a:latin typeface="Arimo"/>
+                <a:ea typeface="Arimo"/>
+                <a:cs typeface="Arimo"/>
+                <a:sym typeface="Arimo"/>
+              </a:rPr>
+              <a:t>A Solução Proposta</a:t>
+            </a:r>
+          </a:p>
+        </p:txBody>
+      </p:sp>
+      <p:sp>
+        <p:nvSpPr>
+          <p:cNvPr name="TextBox 12" id="12"/>
+          <p:cNvSpPr txBox="true"/>
+          <p:nvPr/>
+        </p:nvSpPr>
+        <p:spPr>
+          <a:xfrm rot="0">
+            <a:off x="1275759" y="5411991"/>
+            <a:ext cx="3544043" cy="481012"/>
+          </a:xfrm>
+          <a:prstGeom prst="rect">
+            <a:avLst/>
+          </a:prstGeom>
+        </p:spPr>
+        <p:txBody>
+          <a:bodyPr anchor="t" rtlCol="false" tIns="0" lIns="0" bIns="0" rIns="0">
+            <a:spAutoFit/>
+          </a:bodyPr>
+          <a:lstStyle/>
+          <a:p>
+            <a:pPr algn="l">
+              <a:lnSpc>
+                <a:spcPts val="3437"/>
+              </a:lnSpc>
+            </a:pPr>
+            <a:r>
+              <a:rPr lang="en-US" sz="2750">
+                <a:solidFill>
+                  <a:srgbClr val="000000"/>
+                </a:solidFill>
+                <a:latin typeface="Arimo"/>
+                <a:ea typeface="Arimo"/>
+                <a:cs typeface="Arimo"/>
+                <a:sym typeface="Arimo"/>
+              </a:rPr>
+              <a:t>Objetivo</a:t>
+            </a:r>
+          </a:p>
+        </p:txBody>
+      </p:sp>
+      <p:sp>
+        <p:nvSpPr>
+          <p:cNvPr name="TextBox 13" id="13"/>
+          <p:cNvSpPr txBox="true"/>
+          <p:nvPr/>
+        </p:nvSpPr>
+        <p:spPr>
+          <a:xfrm rot="0">
+            <a:off x="1275759" y="5977385"/>
+            <a:ext cx="4678413" cy="992981"/>
+          </a:xfrm>
+          <a:prstGeom prst="rect">
+            <a:avLst/>
+          </a:prstGeom>
+        </p:spPr>
+        <p:txBody>
+          <a:bodyPr anchor="t" rtlCol="false" tIns="0" lIns="0" bIns="0" rIns="0">
+            <a:spAutoFit/>
+          </a:bodyPr>
+          <a:lstStyle/>
+          <a:p>
+            <a:pPr algn="l">
+              <a:lnSpc>
+                <a:spcPts val="3562"/>
+              </a:lnSpc>
+            </a:pPr>
+            <a:r>
+              <a:rPr lang="en-US" sz="2187">
+                <a:solidFill>
+                  <a:srgbClr val="000000"/>
+                </a:solidFill>
+                <a:latin typeface="Noto Sans"/>
+                <a:ea typeface="Noto Sans"/>
+                <a:cs typeface="Noto Sans"/>
+                <a:sym typeface="Noto Sans"/>
+              </a:rPr>
+              <a:t>Sistema Web Centralizado para gestão de alunos atípicos.</a:t>
+            </a:r>
+          </a:p>
+        </p:txBody>
+      </p:sp>
+      <p:sp>
+        <p:nvSpPr>
+          <p:cNvPr name="TextBox 14" id="14"/>
           <p:cNvSpPr txBox="true"/>
           <p:nvPr/>
         </p:nvSpPr>
@@ -11922,7 +12599,7 @@
       </p:sp>
       <p:sp>
         <p:nvSpPr>
-          <p:cNvPr name="TextBox 18" id="18"/>
+          <p:cNvPr name="TextBox 15" id="15"/>
           <p:cNvSpPr txBox="true"/>
           <p:nvPr/>
         </p:nvSpPr>
@@ -11961,122 +12638,9 @@
           </a:p>
         </p:txBody>
       </p:sp>
-      <p:grpSp>
-        <p:nvGrpSpPr>
-          <p:cNvPr name="Group 19" id="19"/>
-          <p:cNvGrpSpPr/>
-          <p:nvPr/>
-        </p:nvGrpSpPr>
-        <p:grpSpPr>
-          <a:xfrm rot="0">
-            <a:off x="12333684" y="4316016"/>
-            <a:ext cx="850554" cy="850554"/>
-            <a:chOff x="0" y="0"/>
-            <a:chExt cx="1134072" cy="1134072"/>
-          </a:xfrm>
-        </p:grpSpPr>
-        <p:sp>
-          <p:nvSpPr>
-            <p:cNvPr name="Freeform 20" id="20" descr="preencoded.png"/>
-            <p:cNvSpPr/>
-            <p:nvPr/>
-          </p:nvSpPr>
-          <p:spPr>
-            <a:xfrm flipH="false" flipV="false" rot="0">
-              <a:off x="0" y="0"/>
-              <a:ext cx="1134110" cy="1134110"/>
-            </a:xfrm>
-            <a:custGeom>
-              <a:avLst/>
-              <a:gdLst/>
-              <a:ahLst/>
-              <a:cxnLst/>
-              <a:rect r="r" b="b" t="t" l="l"/>
-              <a:pathLst>
-                <a:path h="1134110" w="1134110">
-                  <a:moveTo>
-                    <a:pt x="0" y="0"/>
-                  </a:moveTo>
-                  <a:lnTo>
-                    <a:pt x="1134110" y="0"/>
-                  </a:lnTo>
-                  <a:lnTo>
-                    <a:pt x="1134110" y="1134110"/>
-                  </a:lnTo>
-                  <a:lnTo>
-                    <a:pt x="0" y="1134110"/>
-                  </a:lnTo>
-                  <a:lnTo>
-                    <a:pt x="0" y="0"/>
-                  </a:lnTo>
-                  <a:close/>
-                </a:path>
-              </a:pathLst>
-            </a:custGeom>
-            <a:blipFill>
-              <a:blip r:embed="rId9"/>
-              <a:stretch>
-                <a:fillRect l="0" t="0" r="3" b="3"/>
-              </a:stretch>
-            </a:blipFill>
-          </p:spPr>
-        </p:sp>
-      </p:grpSp>
-      <p:sp>
-        <p:nvSpPr>
-          <p:cNvPr name="Freeform 21" id="21" descr="preencoded.png"/>
-          <p:cNvSpPr/>
-          <p:nvPr/>
-        </p:nvSpPr>
-        <p:spPr>
-          <a:xfrm flipH="false" flipV="false" rot="0">
-            <a:off x="12567647" y="4549826"/>
-            <a:ext cx="382638" cy="382638"/>
-          </a:xfrm>
-          <a:custGeom>
-            <a:avLst/>
-            <a:gdLst/>
-            <a:ahLst/>
-            <a:cxnLst/>
-            <a:rect r="r" b="b" t="t" l="l"/>
-            <a:pathLst>
-              <a:path h="382638" w="382638">
-                <a:moveTo>
-                  <a:pt x="0" y="0"/>
-                </a:moveTo>
-                <a:lnTo>
-                  <a:pt x="382638" y="0"/>
-                </a:lnTo>
-                <a:lnTo>
-                  <a:pt x="382638" y="382638"/>
-                </a:lnTo>
-                <a:lnTo>
-                  <a:pt x="0" y="382638"/>
-                </a:lnTo>
-                <a:lnTo>
-                  <a:pt x="0" y="0"/>
-                </a:lnTo>
-                <a:close/>
-              </a:path>
-            </a:pathLst>
-          </a:custGeom>
-          <a:blipFill>
-            <a:blip r:embed="rId10">
-              <a:extLst>
-                <a:ext uri="{96DAC541-7B7A-43D3-8B79-37D633B846F1}">
-                  <asvg:svgBlip xmlns:asvg="http://schemas.microsoft.com/office/drawing/2016/SVG/main" r:embed="rId11"/>
-                </a:ext>
-              </a:extLst>
-            </a:blip>
-            <a:stretch>
-              <a:fillRect l="0" t="0" r="0" b="0"/>
-            </a:stretch>
-          </a:blipFill>
-        </p:spPr>
-      </p:sp>
-      <p:sp>
-        <p:nvSpPr>
-          <p:cNvPr name="TextBox 22" id="22"/>
+      <p:sp>
+        <p:nvSpPr>
+          <p:cNvPr name="TextBox 16" id="16"/>
           <p:cNvSpPr txBox="true"/>
           <p:nvPr/>
         </p:nvSpPr>
@@ -12117,7 +12681,7 @@
       </p:sp>
       <p:sp>
         <p:nvSpPr>
-          <p:cNvPr name="TextBox 23" id="23"/>
+          <p:cNvPr name="TextBox 17" id="17"/>
           <p:cNvSpPr txBox="true"/>
           <p:nvPr/>
         </p:nvSpPr>
@@ -12354,7 +12918,7 @@
         </p:nvSpPr>
         <p:spPr>
           <a:xfrm rot="0">
-            <a:off x="690858" y="800691"/>
+            <a:off x="690858" y="1199269"/>
             <a:ext cx="6977805" cy="654996"/>
           </a:xfrm>
           <a:prstGeom prst="rect">
@@ -12395,8 +12959,8 @@
         </p:nvSpPr>
         <p:spPr>
           <a:xfrm rot="0">
-            <a:off x="690858" y="1700660"/>
-            <a:ext cx="2467270" cy="260747"/>
+            <a:off x="690858" y="2099239"/>
+            <a:ext cx="1375442" cy="326971"/>
           </a:xfrm>
           <a:prstGeom prst="rect">
             <a:avLst/>
@@ -12414,14 +12978,14 @@
               </a:lnSpc>
             </a:pPr>
             <a:r>
-              <a:rPr lang="en-US" sz="2499">
+              <a:rPr lang="en-US" sz="2499" b="true">
                 <a:solidFill>
                   <a:srgbClr val="000000"/>
                 </a:solidFill>
-                <a:latin typeface="Arimo"/>
-                <a:ea typeface="Arimo"/>
-                <a:cs typeface="Arimo"/>
-                <a:sym typeface="Arimo"/>
+                <a:latin typeface="Arimo Bold"/>
+                <a:ea typeface="Arimo Bold"/>
+                <a:cs typeface="Arimo Bold"/>
+                <a:sym typeface="Arimo Bold"/>
               </a:rPr>
               <a:t>Frontend</a:t>
             </a:r>
@@ -12436,7 +13000,7 @@
         </p:nvSpPr>
         <p:spPr>
           <a:xfrm rot="0">
-            <a:off x="690858" y="2206381"/>
+            <a:off x="690858" y="2604959"/>
             <a:ext cx="8212341" cy="268043"/>
           </a:xfrm>
           <a:prstGeom prst="rect">
@@ -12496,8 +13060,8 @@
         </p:nvSpPr>
         <p:spPr>
           <a:xfrm rot="0">
-            <a:off x="690858" y="2719387"/>
-            <a:ext cx="2467270" cy="260747"/>
+            <a:off x="690858" y="3625477"/>
+            <a:ext cx="1323353" cy="622192"/>
           </a:xfrm>
           <a:prstGeom prst="rect">
             <a:avLst/>
@@ -12522,14 +13086,14 @@
               </a:lnSpc>
             </a:pPr>
             <a:r>
-              <a:rPr lang="en-US" sz="2499">
+              <a:rPr lang="en-US" sz="2499" b="true">
                 <a:solidFill>
                   <a:srgbClr val="000000"/>
                 </a:solidFill>
-                <a:latin typeface="Arimo"/>
-                <a:ea typeface="Arimo"/>
-                <a:cs typeface="Arimo"/>
-                <a:sym typeface="Arimo"/>
+                <a:latin typeface="Arimo Bold"/>
+                <a:ea typeface="Arimo Bold"/>
+                <a:cs typeface="Arimo Bold"/>
+                <a:sym typeface="Arimo Bold"/>
               </a:rPr>
               <a:t>Backend</a:t>
             </a:r>
@@ -12544,7 +13108,7 @@
         </p:nvSpPr>
         <p:spPr>
           <a:xfrm rot="0">
-            <a:off x="690858" y="3225108"/>
+            <a:off x="669798" y="4131188"/>
             <a:ext cx="8212341" cy="268043"/>
           </a:xfrm>
           <a:prstGeom prst="rect">
@@ -12592,7 +13156,7 @@
         </p:nvSpPr>
         <p:spPr>
           <a:xfrm rot="0">
-            <a:off x="690858" y="3738115"/>
+            <a:off x="669798" y="4644195"/>
             <a:ext cx="2467270" cy="260747"/>
           </a:xfrm>
           <a:prstGeom prst="rect">
@@ -12640,7 +13204,7 @@
         </p:nvSpPr>
         <p:spPr>
           <a:xfrm rot="0">
-            <a:off x="690858" y="4243835"/>
+            <a:off x="669798" y="5149915"/>
             <a:ext cx="8212341" cy="268043"/>
           </a:xfrm>
           <a:prstGeom prst="rect">
@@ -13488,67 +14052,88 @@
           </p:spPr>
         </p:sp>
       </p:grpSp>
-      <p:grpSp>
-        <p:nvGrpSpPr>
-          <p:cNvPr name="Group 11" id="11"/>
-          <p:cNvGrpSpPr/>
-          <p:nvPr/>
-        </p:nvGrpSpPr>
-        <p:grpSpPr>
+      <p:sp>
+        <p:nvSpPr>
+          <p:cNvPr name="TextBox 11" id="11"/>
+          <p:cNvSpPr txBox="true"/>
+          <p:nvPr/>
+        </p:nvSpPr>
+        <p:spPr>
           <a:xfrm rot="0">
-            <a:off x="3189608" y="4371384"/>
-            <a:ext cx="850554" cy="850554"/>
-            <a:chOff x="0" y="0"/>
-            <a:chExt cx="1134072" cy="1134072"/>
-          </a:xfrm>
-        </p:grpSpPr>
-        <p:sp>
-          <p:nvSpPr>
-            <p:cNvPr name="Freeform 12" id="12" descr="preencoded.png"/>
-            <p:cNvSpPr/>
-            <p:nvPr/>
-          </p:nvSpPr>
-          <p:spPr>
-            <a:xfrm flipH="false" flipV="false" rot="0">
-              <a:off x="0" y="0"/>
-              <a:ext cx="1134110" cy="1134110"/>
-            </a:xfrm>
-            <a:custGeom>
-              <a:avLst/>
-              <a:gdLst/>
-              <a:ahLst/>
-              <a:cxnLst/>
-              <a:rect r="r" b="b" t="t" l="l"/>
-              <a:pathLst>
-                <a:path h="1134110" w="1134110">
-                  <a:moveTo>
-                    <a:pt x="0" y="0"/>
-                  </a:moveTo>
-                  <a:lnTo>
-                    <a:pt x="1134110" y="0"/>
-                  </a:lnTo>
-                  <a:lnTo>
-                    <a:pt x="1134110" y="1134110"/>
-                  </a:lnTo>
-                  <a:lnTo>
-                    <a:pt x="0" y="1134110"/>
-                  </a:lnTo>
-                  <a:lnTo>
-                    <a:pt x="0" y="0"/>
-                  </a:lnTo>
-                  <a:close/>
-                </a:path>
-              </a:pathLst>
-            </a:custGeom>
-            <a:blipFill>
-              <a:blip r:embed="rId4"/>
-              <a:stretch>
-                <a:fillRect l="0" t="0" r="3" b="3"/>
-              </a:stretch>
-            </a:blipFill>
-          </p:spPr>
-        </p:sp>
-      </p:grpSp>
+            <a:off x="1313859" y="5467198"/>
+            <a:ext cx="3774872" cy="481012"/>
+          </a:xfrm>
+          <a:prstGeom prst="rect">
+            <a:avLst/>
+          </a:prstGeom>
+        </p:spPr>
+        <p:txBody>
+          <a:bodyPr anchor="t" rtlCol="false" tIns="0" lIns="0" bIns="0" rIns="0">
+            <a:spAutoFit/>
+          </a:bodyPr>
+          <a:lstStyle/>
+          <a:p>
+            <a:pPr algn="l">
+              <a:lnSpc>
+                <a:spcPts val="3437"/>
+              </a:lnSpc>
+            </a:pPr>
+            <a:r>
+              <a:rPr lang="en-US" sz="2750">
+                <a:solidFill>
+                  <a:srgbClr val="000000"/>
+                </a:solidFill>
+                <a:latin typeface="Arimo"/>
+                <a:ea typeface="Arimo"/>
+                <a:cs typeface="Arimo"/>
+                <a:sym typeface="Arimo"/>
+              </a:rPr>
+              <a:t>O Grande Diferencial</a:t>
+            </a:r>
+          </a:p>
+        </p:txBody>
+      </p:sp>
+      <p:sp>
+        <p:nvSpPr>
+          <p:cNvPr name="TextBox 12" id="12"/>
+          <p:cNvSpPr txBox="true"/>
+          <p:nvPr/>
+        </p:nvSpPr>
+        <p:spPr>
+          <a:xfrm rot="0">
+            <a:off x="1313859" y="6032602"/>
+            <a:ext cx="4602213" cy="1900237"/>
+          </a:xfrm>
+          <a:prstGeom prst="rect">
+            <a:avLst/>
+          </a:prstGeom>
+        </p:spPr>
+        <p:txBody>
+          <a:bodyPr anchor="t" rtlCol="false" tIns="0" lIns="0" bIns="0" rIns="0">
+            <a:spAutoFit/>
+          </a:bodyPr>
+          <a:lstStyle/>
+          <a:p>
+            <a:pPr algn="l">
+              <a:lnSpc>
+                <a:spcPts val="3562"/>
+              </a:lnSpc>
+            </a:pPr>
+            <a:r>
+              <a:rPr lang="en-US" sz="2187">
+                <a:solidFill>
+                  <a:srgbClr val="000000"/>
+                </a:solidFill>
+                <a:latin typeface="Noto Sans"/>
+                <a:ea typeface="Noto Sans"/>
+                <a:cs typeface="Noto Sans"/>
+                <a:sym typeface="Noto Sans"/>
+              </a:rPr>
+              <a:t>A segurança não depende apenas da API, mas é aplicada diretamente no Banco de Dados (PostgreSQL).</a:t>
+            </a:r>
+          </a:p>
+        </p:txBody>
+      </p:sp>
       <p:grpSp>
         <p:nvGrpSpPr>
           <p:cNvPr name="Group 13" id="13"/>
@@ -13557,10 +14142,10 @@
         </p:nvGrpSpPr>
         <p:grpSpPr>
           <a:xfrm rot="0">
-            <a:off x="3444697" y="4626473"/>
-            <a:ext cx="340223" cy="340223"/>
+            <a:off x="6521206" y="4758480"/>
+            <a:ext cx="5245446" cy="152400"/>
             <a:chOff x="0" y="0"/>
-            <a:chExt cx="453631" cy="453631"/>
+            <a:chExt cx="6993928" cy="203200"/>
           </a:xfrm>
         </p:grpSpPr>
         <p:sp>
@@ -13572,7 +14157,7 @@
           <p:spPr>
             <a:xfrm flipH="false" flipV="false" rot="0">
               <a:off x="0" y="0"/>
-              <a:ext cx="453644" cy="453644"/>
+              <a:ext cx="6993890" cy="203200"/>
             </a:xfrm>
             <a:custGeom>
               <a:avLst/>
@@ -13581,18 +14166,18 @@
               <a:cxnLst/>
               <a:rect r="r" b="b" t="t" l="l"/>
               <a:pathLst>
-                <a:path h="453644" w="453644">
+                <a:path h="203200" w="6993890">
                   <a:moveTo>
                     <a:pt x="0" y="0"/>
                   </a:moveTo>
                   <a:lnTo>
-                    <a:pt x="453644" y="0"/>
-                  </a:lnTo>
-                  <a:lnTo>
-                    <a:pt x="453644" y="453644"/>
-                  </a:lnTo>
-                  <a:lnTo>
-                    <a:pt x="0" y="453644"/>
+                    <a:pt x="6993890" y="0"/>
+                  </a:lnTo>
+                  <a:lnTo>
+                    <a:pt x="6993890" y="203200"/>
+                  </a:lnTo>
+                  <a:lnTo>
+                    <a:pt x="0" y="203200"/>
                   </a:lnTo>
                   <a:lnTo>
                     <a:pt x="0" y="0"/>
@@ -13602,9 +14187,9 @@
               </a:pathLst>
             </a:custGeom>
             <a:blipFill>
-              <a:blip r:embed="rId5"/>
+              <a:blip r:embed="rId3"/>
               <a:stretch>
-                <a:fillRect l="0" t="0" r="2" b="2"/>
+                <a:fillRect l="-26" t="0" r="-27" b="0"/>
               </a:stretch>
             </a:blipFill>
           </p:spPr>
@@ -13618,8 +14203,8 @@
         </p:nvSpPr>
         <p:spPr>
           <a:xfrm rot="0">
-            <a:off x="1313859" y="5467198"/>
-            <a:ext cx="3774872" cy="481012"/>
+            <a:off x="6842817" y="5467198"/>
+            <a:ext cx="3544043" cy="481012"/>
           </a:xfrm>
           <a:prstGeom prst="rect">
             <a:avLst/>
@@ -13646,7 +14231,7 @@
                 <a:cs typeface="Arimo"/>
                 <a:sym typeface="Arimo"/>
               </a:rPr>
-              <a:t>O Grande Diferencial</a:t>
+              <a:t>Política de Acesso</a:t>
             </a:r>
           </a:p>
         </p:txBody>
@@ -13659,7 +14244,7 @@
         </p:nvSpPr>
         <p:spPr>
           <a:xfrm rot="0">
-            <a:off x="1313859" y="6032602"/>
+            <a:off x="6842817" y="6032602"/>
             <a:ext cx="4602213" cy="1900237"/>
           </a:xfrm>
           <a:prstGeom prst="rect">
@@ -13687,7 +14272,7 @@
                 <a:cs typeface="Noto Sans"/>
                 <a:sym typeface="Noto Sans"/>
               </a:rPr>
-              <a:t>A segurança não depende apenas da API, mas é aplicada diretamente no Banco de Dados (PostgreSQL).</a:t>
+              <a:t>Mesmo com a chave pública exposta no frontend, o banco recusa a leitura de dados se o usuário não tiver o token correto.</a:t>
             </a:r>
           </a:p>
         </p:txBody>
@@ -13700,7 +14285,7 @@
         </p:nvGrpSpPr>
         <p:grpSpPr>
           <a:xfrm rot="0">
-            <a:off x="6521206" y="4758480"/>
+            <a:off x="12050163" y="4758480"/>
             <a:ext cx="5245446" cy="152400"/>
             <a:chOff x="0" y="0"/>
             <a:chExt cx="6993928" cy="203200"/>
@@ -13761,7 +14346,7 @@
         </p:nvGrpSpPr>
         <p:grpSpPr>
           <a:xfrm rot="0">
-            <a:off x="8718575" y="4371384"/>
+            <a:off x="14247543" y="4371384"/>
             <a:ext cx="850554" cy="850554"/>
             <a:chOff x="0" y="0"/>
             <a:chExt cx="1134072" cy="1134072"/>
@@ -13814,335 +14399,9 @@
           </p:spPr>
         </p:sp>
       </p:grpSp>
-      <p:grpSp>
-        <p:nvGrpSpPr>
-          <p:cNvPr name="Group 21" id="21"/>
-          <p:cNvGrpSpPr/>
-          <p:nvPr/>
-        </p:nvGrpSpPr>
-        <p:grpSpPr>
-          <a:xfrm rot="0">
-            <a:off x="8973664" y="4626473"/>
-            <a:ext cx="340223" cy="340223"/>
-            <a:chOff x="0" y="0"/>
-            <a:chExt cx="453631" cy="453631"/>
-          </a:xfrm>
-        </p:grpSpPr>
-        <p:sp>
-          <p:nvSpPr>
-            <p:cNvPr name="Freeform 22" id="22" descr="preencoded.png"/>
-            <p:cNvSpPr/>
-            <p:nvPr/>
-          </p:nvSpPr>
-          <p:spPr>
-            <a:xfrm flipH="false" flipV="false" rot="0">
-              <a:off x="0" y="0"/>
-              <a:ext cx="453644" cy="453644"/>
-            </a:xfrm>
-            <a:custGeom>
-              <a:avLst/>
-              <a:gdLst/>
-              <a:ahLst/>
-              <a:cxnLst/>
-              <a:rect r="r" b="b" t="t" l="l"/>
-              <a:pathLst>
-                <a:path h="453644" w="453644">
-                  <a:moveTo>
-                    <a:pt x="0" y="0"/>
-                  </a:moveTo>
-                  <a:lnTo>
-                    <a:pt x="453644" y="0"/>
-                  </a:lnTo>
-                  <a:lnTo>
-                    <a:pt x="453644" y="453644"/>
-                  </a:lnTo>
-                  <a:lnTo>
-                    <a:pt x="0" y="453644"/>
-                  </a:lnTo>
-                  <a:lnTo>
-                    <a:pt x="0" y="0"/>
-                  </a:lnTo>
-                  <a:close/>
-                </a:path>
-              </a:pathLst>
-            </a:custGeom>
-            <a:blipFill>
-              <a:blip r:embed="rId6"/>
-              <a:stretch>
-                <a:fillRect l="0" t="0" r="2" b="2"/>
-              </a:stretch>
-            </a:blipFill>
-          </p:spPr>
-        </p:sp>
-      </p:grpSp>
-      <p:sp>
-        <p:nvSpPr>
-          <p:cNvPr name="TextBox 23" id="23"/>
-          <p:cNvSpPr txBox="true"/>
-          <p:nvPr/>
-        </p:nvSpPr>
-        <p:spPr>
-          <a:xfrm rot="0">
-            <a:off x="6842817" y="5467198"/>
-            <a:ext cx="3544043" cy="481012"/>
-          </a:xfrm>
-          <a:prstGeom prst="rect">
-            <a:avLst/>
-          </a:prstGeom>
-        </p:spPr>
-        <p:txBody>
-          <a:bodyPr anchor="t" rtlCol="false" tIns="0" lIns="0" bIns="0" rIns="0">
-            <a:spAutoFit/>
-          </a:bodyPr>
-          <a:lstStyle/>
-          <a:p>
-            <a:pPr algn="l">
-              <a:lnSpc>
-                <a:spcPts val="3437"/>
-              </a:lnSpc>
-            </a:pPr>
-            <a:r>
-              <a:rPr lang="en-US" sz="2750">
-                <a:solidFill>
-                  <a:srgbClr val="000000"/>
-                </a:solidFill>
-                <a:latin typeface="Arimo"/>
-                <a:ea typeface="Arimo"/>
-                <a:cs typeface="Arimo"/>
-                <a:sym typeface="Arimo"/>
-              </a:rPr>
-              <a:t>Política de Acesso</a:t>
-            </a:r>
-          </a:p>
-        </p:txBody>
-      </p:sp>
-      <p:sp>
-        <p:nvSpPr>
-          <p:cNvPr name="TextBox 24" id="24"/>
-          <p:cNvSpPr txBox="true"/>
-          <p:nvPr/>
-        </p:nvSpPr>
-        <p:spPr>
-          <a:xfrm rot="0">
-            <a:off x="6842817" y="6032602"/>
-            <a:ext cx="4602213" cy="1900237"/>
-          </a:xfrm>
-          <a:prstGeom prst="rect">
-            <a:avLst/>
-          </a:prstGeom>
-        </p:spPr>
-        <p:txBody>
-          <a:bodyPr anchor="t" rtlCol="false" tIns="0" lIns="0" bIns="0" rIns="0">
-            <a:spAutoFit/>
-          </a:bodyPr>
-          <a:lstStyle/>
-          <a:p>
-            <a:pPr algn="l">
-              <a:lnSpc>
-                <a:spcPts val="3562"/>
-              </a:lnSpc>
-            </a:pPr>
-            <a:r>
-              <a:rPr lang="en-US" sz="2187">
-                <a:solidFill>
-                  <a:srgbClr val="000000"/>
-                </a:solidFill>
-                <a:latin typeface="Noto Sans"/>
-                <a:ea typeface="Noto Sans"/>
-                <a:cs typeface="Noto Sans"/>
-                <a:sym typeface="Noto Sans"/>
-              </a:rPr>
-              <a:t>Mesmo com a chave pública exposta no frontend, o banco recusa a leitura de dados se o usuário não tiver o token correto.</a:t>
-            </a:r>
-          </a:p>
-        </p:txBody>
-      </p:sp>
-      <p:grpSp>
-        <p:nvGrpSpPr>
-          <p:cNvPr name="Group 25" id="25"/>
-          <p:cNvGrpSpPr/>
-          <p:nvPr/>
-        </p:nvGrpSpPr>
-        <p:grpSpPr>
-          <a:xfrm rot="0">
-            <a:off x="12050163" y="4758480"/>
-            <a:ext cx="5245446" cy="152400"/>
-            <a:chOff x="0" y="0"/>
-            <a:chExt cx="6993928" cy="203200"/>
-          </a:xfrm>
-        </p:grpSpPr>
-        <p:sp>
-          <p:nvSpPr>
-            <p:cNvPr name="Freeform 26" id="26" descr="preencoded.png"/>
-            <p:cNvSpPr/>
-            <p:nvPr/>
-          </p:nvSpPr>
-          <p:spPr>
-            <a:xfrm flipH="false" flipV="false" rot="0">
-              <a:off x="0" y="0"/>
-              <a:ext cx="6993890" cy="203200"/>
-            </a:xfrm>
-            <a:custGeom>
-              <a:avLst/>
-              <a:gdLst/>
-              <a:ahLst/>
-              <a:cxnLst/>
-              <a:rect r="r" b="b" t="t" l="l"/>
-              <a:pathLst>
-                <a:path h="203200" w="6993890">
-                  <a:moveTo>
-                    <a:pt x="0" y="0"/>
-                  </a:moveTo>
-                  <a:lnTo>
-                    <a:pt x="6993890" y="0"/>
-                  </a:lnTo>
-                  <a:lnTo>
-                    <a:pt x="6993890" y="203200"/>
-                  </a:lnTo>
-                  <a:lnTo>
-                    <a:pt x="0" y="203200"/>
-                  </a:lnTo>
-                  <a:lnTo>
-                    <a:pt x="0" y="0"/>
-                  </a:lnTo>
-                  <a:close/>
-                </a:path>
-              </a:pathLst>
-            </a:custGeom>
-            <a:blipFill>
-              <a:blip r:embed="rId3"/>
-              <a:stretch>
-                <a:fillRect l="-26" t="0" r="-27" b="0"/>
-              </a:stretch>
-            </a:blipFill>
-          </p:spPr>
-        </p:sp>
-      </p:grpSp>
-      <p:grpSp>
-        <p:nvGrpSpPr>
-          <p:cNvPr name="Group 27" id="27"/>
-          <p:cNvGrpSpPr/>
-          <p:nvPr/>
-        </p:nvGrpSpPr>
-        <p:grpSpPr>
-          <a:xfrm rot="0">
-            <a:off x="14247543" y="4371384"/>
-            <a:ext cx="850554" cy="850554"/>
-            <a:chOff x="0" y="0"/>
-            <a:chExt cx="1134072" cy="1134072"/>
-          </a:xfrm>
-        </p:grpSpPr>
-        <p:sp>
-          <p:nvSpPr>
-            <p:cNvPr name="Freeform 28" id="28" descr="preencoded.png"/>
-            <p:cNvSpPr/>
-            <p:nvPr/>
-          </p:nvSpPr>
-          <p:spPr>
-            <a:xfrm flipH="false" flipV="false" rot="0">
-              <a:off x="0" y="0"/>
-              <a:ext cx="1134110" cy="1134110"/>
-            </a:xfrm>
-            <a:custGeom>
-              <a:avLst/>
-              <a:gdLst/>
-              <a:ahLst/>
-              <a:cxnLst/>
-              <a:rect r="r" b="b" t="t" l="l"/>
-              <a:pathLst>
-                <a:path h="1134110" w="1134110">
-                  <a:moveTo>
-                    <a:pt x="0" y="0"/>
-                  </a:moveTo>
-                  <a:lnTo>
-                    <a:pt x="1134110" y="0"/>
-                  </a:lnTo>
-                  <a:lnTo>
-                    <a:pt x="1134110" y="1134110"/>
-                  </a:lnTo>
-                  <a:lnTo>
-                    <a:pt x="0" y="1134110"/>
-                  </a:lnTo>
-                  <a:lnTo>
-                    <a:pt x="0" y="0"/>
-                  </a:lnTo>
-                  <a:close/>
-                </a:path>
-              </a:pathLst>
-            </a:custGeom>
-            <a:blipFill>
-              <a:blip r:embed="rId4"/>
-              <a:stretch>
-                <a:fillRect l="0" t="0" r="3" b="3"/>
-              </a:stretch>
-            </a:blipFill>
-          </p:spPr>
-        </p:sp>
-      </p:grpSp>
-      <p:grpSp>
-        <p:nvGrpSpPr>
-          <p:cNvPr name="Group 29" id="29"/>
-          <p:cNvGrpSpPr/>
-          <p:nvPr/>
-        </p:nvGrpSpPr>
-        <p:grpSpPr>
-          <a:xfrm rot="0">
-            <a:off x="14502632" y="4626473"/>
-            <a:ext cx="340223" cy="340223"/>
-            <a:chOff x="0" y="0"/>
-            <a:chExt cx="453631" cy="453631"/>
-          </a:xfrm>
-        </p:grpSpPr>
-        <p:sp>
-          <p:nvSpPr>
-            <p:cNvPr name="Freeform 30" id="30" descr="preencoded.png"/>
-            <p:cNvSpPr/>
-            <p:nvPr/>
-          </p:nvSpPr>
-          <p:spPr>
-            <a:xfrm flipH="false" flipV="false" rot="0">
-              <a:off x="0" y="0"/>
-              <a:ext cx="453644" cy="453644"/>
-            </a:xfrm>
-            <a:custGeom>
-              <a:avLst/>
-              <a:gdLst/>
-              <a:ahLst/>
-              <a:cxnLst/>
-              <a:rect r="r" b="b" t="t" l="l"/>
-              <a:pathLst>
-                <a:path h="453644" w="453644">
-                  <a:moveTo>
-                    <a:pt x="0" y="0"/>
-                  </a:moveTo>
-                  <a:lnTo>
-                    <a:pt x="453644" y="0"/>
-                  </a:lnTo>
-                  <a:lnTo>
-                    <a:pt x="453644" y="453644"/>
-                  </a:lnTo>
-                  <a:lnTo>
-                    <a:pt x="0" y="453644"/>
-                  </a:lnTo>
-                  <a:lnTo>
-                    <a:pt x="0" y="0"/>
-                  </a:lnTo>
-                  <a:close/>
-                </a:path>
-              </a:pathLst>
-            </a:custGeom>
-            <a:blipFill>
-              <a:blip r:embed="rId5"/>
-              <a:stretch>
-                <a:fillRect l="0" t="0" r="2" b="2"/>
-              </a:stretch>
-            </a:blipFill>
-          </p:spPr>
-        </p:sp>
-      </p:grpSp>
-      <p:sp>
-        <p:nvSpPr>
-          <p:cNvPr name="TextBox 31" id="31"/>
+      <p:sp>
+        <p:nvSpPr>
+          <p:cNvPr name="TextBox 21" id="21"/>
           <p:cNvSpPr txBox="true"/>
           <p:nvPr/>
         </p:nvSpPr>
@@ -14183,7 +14442,7 @@
       </p:sp>
       <p:sp>
         <p:nvSpPr>
-          <p:cNvPr name="TextBox 32" id="32"/>
+          <p:cNvPr name="TextBox 22" id="22"/>
           <p:cNvSpPr txBox="true"/>
           <p:nvPr/>
         </p:nvSpPr>

--- a/tcc/TCC - Slides.pptx
+++ b/tcc/TCC - Slides.pptx
@@ -9891,10 +9891,10 @@
         </p:nvGrpSpPr>
         <p:grpSpPr>
           <a:xfrm rot="0">
-            <a:off x="669798" y="5143500"/>
-            <a:ext cx="152400" cy="3070774"/>
+            <a:off x="669798" y="1409169"/>
+            <a:ext cx="155977" cy="3070774"/>
             <a:chOff x="0" y="0"/>
-            <a:chExt cx="203200" cy="4094366"/>
+            <a:chExt cx="207969" cy="4094366"/>
           </a:xfrm>
         </p:grpSpPr>
         <p:sp>
@@ -9906,7 +9906,7 @@
           <p:spPr>
             <a:xfrm flipH="false" flipV="false" rot="0">
               <a:off x="0" y="0"/>
-              <a:ext cx="203200" cy="4094353"/>
+              <a:ext cx="207969" cy="4094353"/>
             </a:xfrm>
             <a:custGeom>
               <a:avLst/>
@@ -9915,15 +9915,15 @@
               <a:cxnLst/>
               <a:rect r="r" b="b" t="t" l="l"/>
               <a:pathLst>
-                <a:path h="4094353" w="203200">
+                <a:path h="4094353" w="207969">
                   <a:moveTo>
                     <a:pt x="0" y="0"/>
                   </a:moveTo>
                   <a:lnTo>
-                    <a:pt x="203200" y="0"/>
-                  </a:lnTo>
-                  <a:lnTo>
-                    <a:pt x="203200" y="4094353"/>
+                    <a:pt x="207969" y="0"/>
+                  </a:lnTo>
+                  <a:lnTo>
+                    <a:pt x="207969" y="4094353"/>
                   </a:lnTo>
                   <a:lnTo>
                     <a:pt x="0" y="4094353"/>
@@ -9938,7 +9938,7 @@
             <a:blipFill>
               <a:blip r:embed="rId3"/>
               <a:stretch>
-                <a:fillRect l="-62" t="0" r="-56" b="0"/>
+                <a:fillRect l="-6" t="-1115" r="0" b="-1116"/>
               </a:stretch>
             </a:blipFill>
           </p:spPr>
@@ -9952,10 +9952,10 @@
         </p:nvGrpSpPr>
         <p:grpSpPr>
           <a:xfrm rot="0">
-            <a:off x="6198765" y="5143500"/>
-            <a:ext cx="152400" cy="3070774"/>
+            <a:off x="6328519" y="1409169"/>
+            <a:ext cx="155977" cy="3070774"/>
             <a:chOff x="0" y="0"/>
-            <a:chExt cx="203200" cy="4094366"/>
+            <a:chExt cx="207969" cy="4094366"/>
           </a:xfrm>
         </p:grpSpPr>
         <p:sp>
@@ -9967,7 +9967,7 @@
           <p:spPr>
             <a:xfrm flipH="false" flipV="false" rot="0">
               <a:off x="0" y="0"/>
-              <a:ext cx="203200" cy="4094353"/>
+              <a:ext cx="207969" cy="4094353"/>
             </a:xfrm>
             <a:custGeom>
               <a:avLst/>
@@ -9976,15 +9976,15 @@
               <a:cxnLst/>
               <a:rect r="r" b="b" t="t" l="l"/>
               <a:pathLst>
-                <a:path h="4094353" w="203200">
+                <a:path h="4094353" w="207969">
                   <a:moveTo>
                     <a:pt x="0" y="0"/>
                   </a:moveTo>
                   <a:lnTo>
-                    <a:pt x="203200" y="0"/>
-                  </a:lnTo>
-                  <a:lnTo>
-                    <a:pt x="203200" y="4094353"/>
+                    <a:pt x="207969" y="0"/>
+                  </a:lnTo>
+                  <a:lnTo>
+                    <a:pt x="207969" y="4094353"/>
                   </a:lnTo>
                   <a:lnTo>
                     <a:pt x="0" y="4094353"/>
@@ -9999,7 +9999,7 @@
             <a:blipFill>
               <a:blip r:embed="rId3"/>
               <a:stretch>
-                <a:fillRect l="-62" t="0" r="-56" b="0"/>
+                <a:fillRect l="-6" t="-1115" r="0" b="-1116"/>
               </a:stretch>
             </a:blipFill>
           </p:spPr>
@@ -10013,10 +10013,10 @@
         </p:nvGrpSpPr>
         <p:grpSpPr>
           <a:xfrm rot="0">
-            <a:off x="11727723" y="5143500"/>
-            <a:ext cx="152400" cy="3070774"/>
+            <a:off x="11987230" y="1409169"/>
+            <a:ext cx="155977" cy="3070774"/>
             <a:chOff x="0" y="0"/>
-            <a:chExt cx="203200" cy="4094366"/>
+            <a:chExt cx="207969" cy="4094366"/>
           </a:xfrm>
         </p:grpSpPr>
         <p:sp>
@@ -10028,7 +10028,7 @@
           <p:spPr>
             <a:xfrm flipH="false" flipV="false" rot="0">
               <a:off x="0" y="0"/>
-              <a:ext cx="203200" cy="4094353"/>
+              <a:ext cx="207969" cy="4094353"/>
             </a:xfrm>
             <a:custGeom>
               <a:avLst/>
@@ -10037,15 +10037,15 @@
               <a:cxnLst/>
               <a:rect r="r" b="b" t="t" l="l"/>
               <a:pathLst>
-                <a:path h="4094353" w="203200">
+                <a:path h="4094353" w="207969">
                   <a:moveTo>
                     <a:pt x="0" y="0"/>
                   </a:moveTo>
                   <a:lnTo>
-                    <a:pt x="203200" y="0"/>
-                  </a:lnTo>
-                  <a:lnTo>
-                    <a:pt x="203200" y="4094353"/>
+                    <a:pt x="207969" y="0"/>
+                  </a:lnTo>
+                  <a:lnTo>
+                    <a:pt x="207969" y="4094353"/>
                   </a:lnTo>
                   <a:lnTo>
                     <a:pt x="0" y="4094353"/>
@@ -10060,7 +10060,7 @@
             <a:blipFill>
               <a:blip r:embed="rId3"/>
               <a:stretch>
-                <a:fillRect l="-62" t="0" r="-56" b="0"/>
+                <a:fillRect l="-6" t="-1115" r="0" b="-1116"/>
               </a:stretch>
             </a:blipFill>
           </p:spPr>
@@ -10074,8 +10074,8 @@
         </p:nvSpPr>
         <p:spPr>
           <a:xfrm rot="0">
-            <a:off x="669798" y="1185501"/>
-            <a:ext cx="16948404" cy="1925948"/>
+            <a:off x="628612" y="5975368"/>
+            <a:ext cx="16948404" cy="1056172"/>
           </a:xfrm>
           <a:prstGeom prst="rect">
             <a:avLst/>
@@ -10117,13 +10117,6 @@
               <a:t> desenvolver um sistema web seguro, acessível e funcional que centralize a gestão de alunos atípicos, facilitando o trabalho de gestores, cuidadores e responsáveis?</a:t>
             </a:r>
           </a:p>
-          <a:p>
-            <a:pPr algn="l">
-              <a:lnSpc>
-                <a:spcPts val="6937"/>
-              </a:lnSpc>
-            </a:pPr>
-          </a:p>
         </p:txBody>
       </p:sp>
       <p:sp>
@@ -10134,8 +10127,8 @@
         </p:nvSpPr>
         <p:spPr>
           <a:xfrm rot="0">
-            <a:off x="1139352" y="5427021"/>
-            <a:ext cx="1300217" cy="449262"/>
+            <a:off x="1150371" y="1692690"/>
+            <a:ext cx="1330730" cy="449262"/>
           </a:xfrm>
           <a:prstGeom prst="rect">
             <a:avLst/>
@@ -10175,8 +10168,8 @@
         </p:nvSpPr>
         <p:spPr>
           <a:xfrm rot="0">
-            <a:off x="1139352" y="5992416"/>
-            <a:ext cx="4487913" cy="1900237"/>
+            <a:off x="1150371" y="2258084"/>
+            <a:ext cx="4593235" cy="1757471"/>
           </a:xfrm>
           <a:prstGeom prst="rect">
             <a:avLst/>
@@ -10216,8 +10209,8 @@
         </p:nvSpPr>
         <p:spPr>
           <a:xfrm rot="0">
-            <a:off x="6665490" y="5427021"/>
-            <a:ext cx="1145300" cy="449262"/>
+            <a:off x="6806197" y="1692690"/>
+            <a:ext cx="1172178" cy="449262"/>
           </a:xfrm>
           <a:prstGeom prst="rect">
             <a:avLst/>
@@ -10257,8 +10250,8 @@
         </p:nvSpPr>
         <p:spPr>
           <a:xfrm rot="0">
-            <a:off x="6665490" y="5992416"/>
-            <a:ext cx="4487913" cy="1446609"/>
+            <a:off x="6806197" y="2258084"/>
+            <a:ext cx="4593235" cy="1309769"/>
           </a:xfrm>
           <a:prstGeom prst="rect">
             <a:avLst/>
@@ -10298,8 +10291,8 @@
         </p:nvSpPr>
         <p:spPr>
           <a:xfrm rot="0">
-            <a:off x="12194448" y="5427021"/>
-            <a:ext cx="2775780" cy="449262"/>
+            <a:off x="12464908" y="1692690"/>
+            <a:ext cx="2840922" cy="449262"/>
           </a:xfrm>
           <a:prstGeom prst="rect">
             <a:avLst/>
@@ -10339,8 +10332,8 @@
         </p:nvSpPr>
         <p:spPr>
           <a:xfrm rot="0">
-            <a:off x="12194448" y="5992416"/>
-            <a:ext cx="4487913" cy="1446609"/>
+            <a:off x="12464908" y="2258084"/>
+            <a:ext cx="4593235" cy="1309769"/>
           </a:xfrm>
           <a:prstGeom prst="rect">
             <a:avLst/>

--- a/tcc/TCC - Slides.pptx
+++ b/tcc/TCC - Slides.pptx
@@ -1,52 +1,59 @@
 
 <file path=ppt/presentation.xml><?xml version="1.0" encoding="utf-8"?>
-<p:presentation xmlns:a="http://schemas.openxmlformats.org/drawingml/2006/main" xmlns:r="http://schemas.openxmlformats.org/officeDocument/2006/relationships" xmlns:p="http://schemas.openxmlformats.org/presentationml/2006/main" saveSubsetFonts="1" embedTrueTypeFonts="true">
+<p:presentation xmlns:a="http://schemas.openxmlformats.org/drawingml/2006/main" xmlns:r="http://schemas.openxmlformats.org/officeDocument/2006/relationships" xmlns:p="http://schemas.openxmlformats.org/presentationml/2006/main" embedTrueTypeFonts="1" saveSubsetFonts="1">
   <p:sldMasterIdLst>
     <p:sldMasterId id="2147483648" r:id="rId1"/>
   </p:sldMasterIdLst>
   <p:notesMasterIdLst>
-    <p:notesMasterId r:id="rId22"/>
+    <p:notesMasterId r:id="rId18"/>
   </p:notesMasterIdLst>
   <p:sldIdLst>
-    <p:sldId id="256" r:id="rId6"/>
-    <p:sldId id="257" r:id="rId7"/>
-    <p:sldId id="258" r:id="rId8"/>
-    <p:sldId id="259" r:id="rId9"/>
-    <p:sldId id="260" r:id="rId10"/>
-    <p:sldId id="261" r:id="rId11"/>
-    <p:sldId id="262" r:id="rId12"/>
-    <p:sldId id="263" r:id="rId13"/>
-    <p:sldId id="264" r:id="rId14"/>
-    <p:sldId id="265" r:id="rId15"/>
-    <p:sldId id="266" r:id="rId16"/>
-    <p:sldId id="267" r:id="rId17"/>
-    <p:sldId id="268" r:id="rId18"/>
-    <p:sldId id="269" r:id="rId19"/>
-    <p:sldId id="270" r:id="rId20"/>
-    <p:sldId id="271" r:id="rId21"/>
+    <p:sldId id="256" r:id="rId2"/>
+    <p:sldId id="257" r:id="rId3"/>
+    <p:sldId id="258" r:id="rId4"/>
+    <p:sldId id="259" r:id="rId5"/>
+    <p:sldId id="260" r:id="rId6"/>
+    <p:sldId id="261" r:id="rId7"/>
+    <p:sldId id="262" r:id="rId8"/>
+    <p:sldId id="263" r:id="rId9"/>
+    <p:sldId id="264" r:id="rId10"/>
+    <p:sldId id="265" r:id="rId11"/>
+    <p:sldId id="266" r:id="rId12"/>
+    <p:sldId id="267" r:id="rId13"/>
+    <p:sldId id="268" r:id="rId14"/>
+    <p:sldId id="269" r:id="rId15"/>
+    <p:sldId id="270" r:id="rId16"/>
+    <p:sldId id="271" r:id="rId17"/>
   </p:sldIdLst>
   <p:sldSz cx="18288000" cy="10287000"/>
   <p:notesSz cx="6858000" cy="9144000"/>
   <p:embeddedFontLst>
     <p:embeddedFont>
-      <p:font typeface="Arimo" charset="1" panose="020B0604020202020204"/>
+      <p:font typeface="Arimo" panose="020B0604020202020204" charset="0"/>
+      <p:regular r:id="rId19"/>
+    </p:embeddedFont>
+    <p:embeddedFont>
+      <p:font typeface="Arimo Bold" panose="020B0604020202020204" charset="0"/>
+      <p:regular r:id="rId20"/>
+    </p:embeddedFont>
+    <p:embeddedFont>
+      <p:font typeface="Calibri" panose="020F0502020204030204" pitchFamily="34" charset="0"/>
+      <p:regular r:id="rId21"/>
+      <p:bold r:id="rId22"/>
+      <p:italic r:id="rId23"/>
+      <p:boldItalic r:id="rId24"/>
+    </p:embeddedFont>
+    <p:embeddedFont>
+      <p:font typeface="Gill Sans Bold" panose="020B0604020202020204" charset="0"/>
       <p:regular r:id="rId25"/>
     </p:embeddedFont>
     <p:embeddedFont>
-      <p:font typeface="Noto Sans Bold" charset="1" panose="020B0802040504020204"/>
+      <p:font typeface="Noto Sans" panose="020B0502040504020204" pitchFamily="34" charset="0"/>
       <p:regular r:id="rId26"/>
     </p:embeddedFont>
     <p:embeddedFont>
-      <p:font typeface="Arimo Bold" charset="1" panose="020B0704020202020204"/>
-      <p:regular r:id="rId28"/>
-    </p:embeddedFont>
-    <p:embeddedFont>
-      <p:font typeface="Noto Sans" charset="1" panose="020B0502040504020204"/>
-      <p:regular r:id="rId29"/>
-    </p:embeddedFont>
-    <p:embeddedFont>
-      <p:font typeface="Gill Sans Bold" charset="1" panose="020B0802020104020203"/>
-      <p:regular r:id="rId37"/>
+      <p:font typeface="Noto Sans Bold" panose="020B0604020202020204" charset="0"/>
+      <p:regular r:id="rId27"/>
     </p:embeddedFont>
   </p:embeddedFontLst>
   <p:defaultTextStyle>
@@ -144,6 +151,22 @@
       </a:defRPr>
     </a:lvl9pPr>
   </p:defaultTextStyle>
+  <p:extLst>
+    <p:ext uri="{EFAFB233-063F-42B5-8137-9DF3F51BA10A}">
+      <p15:sldGuideLst xmlns:p15="http://schemas.microsoft.com/office/powerpoint/2012/main">
+        <p15:guide id="1" orient="horz" pos="2160">
+          <p15:clr>
+            <a:srgbClr val="A4A3A4"/>
+          </p15:clr>
+        </p15:guide>
+        <p15:guide id="2" pos="2880">
+          <p15:clr>
+            <a:srgbClr val="A4A3A4"/>
+          </p15:clr>
+        </p15:guide>
+      </p15:sldGuideLst>
+    </p:ext>
+  </p:extLst>
 </p:presentation>
 </file>
 
@@ -229,7 +252,7 @@
           <a:p>
             <a:fld id="{B7268E1E-0E44-426D-905E-8AD9B19D2182}" type="datetimeFigureOut">
               <a:rPr lang="cs-CZ" smtClean="0"/>
-              <a:t>1.7.2013</a:t>
+              <a:t>20.04.2026</a:t>
             </a:fld>
             <a:endParaRPr lang="cs-CZ"/>
           </a:p>
@@ -293,35 +316,35 @@
           <a:p>
             <a:pPr lvl="0"/>
             <a:r>
-              <a:rPr lang="en-US" smtClean="0"/>
+              <a:rPr lang="en-US"/>
               <a:t>Click to edit Master text styles</a:t>
             </a:r>
           </a:p>
           <a:p>
             <a:pPr lvl="1"/>
             <a:r>
-              <a:rPr lang="en-US" smtClean="0"/>
+              <a:rPr lang="en-US"/>
               <a:t>Second level</a:t>
             </a:r>
           </a:p>
           <a:p>
             <a:pPr lvl="2"/>
             <a:r>
-              <a:rPr lang="en-US" smtClean="0"/>
+              <a:rPr lang="en-US"/>
               <a:t>Third level</a:t>
             </a:r>
           </a:p>
           <a:p>
             <a:pPr lvl="3"/>
             <a:r>
-              <a:rPr lang="en-US" smtClean="0"/>
+              <a:rPr lang="en-US"/>
               <a:t>Fourth level</a:t>
             </a:r>
           </a:p>
           <a:p>
             <a:pPr lvl="4"/>
             <a:r>
-              <a:rPr lang="en-US" smtClean="0"/>
+              <a:rPr lang="en-US"/>
               <a:t>Fifth level</a:t>
             </a:r>
             <a:endParaRPr lang="cs-CZ"/>
@@ -388,7 +411,7 @@
           <a:p>
             <a:fld id="{871B2431-D351-4C6E-A3CF-9DFAC0E3E050}" type="slidenum">
               <a:rPr lang="cs-CZ" smtClean="0"/>
-              <a:t>‹#›</a:t>
+              <a:t>‹nº›</a:t>
             </a:fld>
             <a:endParaRPr lang="cs-CZ"/>
           </a:p>
@@ -498,9 +521,9 @@
 </file>
 
 <file path=ppt/notesSlides/notesSlide1.xml><?xml version="1.0" encoding="utf-8"?>
-<p:notes xmlns:p="http://schemas.openxmlformats.org/presentationml/2006/main" xmlns:a="http://schemas.openxmlformats.org/drawingml/2006/main">
+<p:notes xmlns:a="http://schemas.openxmlformats.org/drawingml/2006/main" xmlns:r="http://schemas.openxmlformats.org/officeDocument/2006/relationships" xmlns:p="http://schemas.openxmlformats.org/presentationml/2006/main">
   <p:cSld>
-    <p:spTree xmlns:r="http://schemas.openxmlformats.org/officeDocument/2006/relationships">
+    <p:spTree>
       <p:nvGrpSpPr>
         <p:cNvPr id="1" name=""/>
         <p:cNvGrpSpPr/>
@@ -540,7 +563,9 @@
               <a:defRPr sz="1200"/>
             </a:lvl1pPr>
           </a:lstStyle>
-          <a:p/>
+          <a:p>
+            <a:endParaRPr/>
+          </a:p>
         </p:txBody>
       </p:sp>
       <p:sp>
@@ -570,8 +595,8 @@
             </a:lvl1pPr>
           </a:lstStyle>
           <a:p>
-            <a:r id="{B7268E1E-0E44-426D-905E-8AD9B19D2182}" type="datetimeFigureOut">
-              <a:rPr lang="cs-CZ" smtClean="0"/>
+            <a:r>
+              <a:rPr lang="cs-CZ"/>
               <a:t>1.7.2013</a:t>
             </a:r>
           </a:p>
@@ -605,7 +630,9 @@
         <p:txBody>
           <a:bodyPr vert="horz" lIns="91440" tIns="45720" rIns="91440" bIns="45720" rtlCol="0" anchor="ctr"/>
           <a:lstStyle/>
-          <a:p/>
+          <a:p>
+            <a:endParaRPr/>
+          </a:p>
         </p:txBody>
       </p:sp>
       <p:sp>
@@ -635,7 +662,6 @@
               <a:rPr lang="en-US"/>
               <a:t>1</a:t>
             </a:r>
-            <a:endParaRPr lang="en-US" smtClean="0"/>
           </a:p>
         </p:txBody>
       </p:sp>
@@ -665,7 +691,9 @@
               <a:defRPr sz="1200"/>
             </a:lvl1pPr>
           </a:lstStyle>
-          <a:p/>
+          <a:p>
+            <a:endParaRPr/>
+          </a:p>
         </p:txBody>
       </p:sp>
       <p:sp>
@@ -695,8 +723,8 @@
             </a:lvl1pPr>
           </a:lstStyle>
           <a:p>
-            <a:r id="{871B2431-D351-4C6E-A3CF-9DFAC0E3E050}" type="slidenum">
-              <a:rPr lang="cs-CZ" smtClean="0"/>
+            <a:r>
+              <a:rPr lang="cs-CZ"/>
               <a:t>‹#›</a:t>
             </a:r>
           </a:p>
@@ -711,9 +739,9 @@
 </file>
 
 <file path=ppt/notesSlides/notesSlide2.xml><?xml version="1.0" encoding="utf-8"?>
-<p:notes xmlns:p="http://schemas.openxmlformats.org/presentationml/2006/main" xmlns:a="http://schemas.openxmlformats.org/drawingml/2006/main">
+<p:notes xmlns:a="http://schemas.openxmlformats.org/drawingml/2006/main" xmlns:r="http://schemas.openxmlformats.org/officeDocument/2006/relationships" xmlns:p="http://schemas.openxmlformats.org/presentationml/2006/main">
   <p:cSld>
-    <p:spTree xmlns:r="http://schemas.openxmlformats.org/officeDocument/2006/relationships">
+    <p:spTree>
       <p:nvGrpSpPr>
         <p:cNvPr id="1" name=""/>
         <p:cNvGrpSpPr/>
@@ -753,7 +781,9 @@
               <a:defRPr sz="1200"/>
             </a:lvl1pPr>
           </a:lstStyle>
-          <a:p/>
+          <a:p>
+            <a:endParaRPr/>
+          </a:p>
         </p:txBody>
       </p:sp>
       <p:sp>
@@ -783,8 +813,8 @@
             </a:lvl1pPr>
           </a:lstStyle>
           <a:p>
-            <a:r id="{B7268E1E-0E44-426D-905E-8AD9B19D2182}" type="datetimeFigureOut">
-              <a:rPr lang="cs-CZ" smtClean="0"/>
+            <a:r>
+              <a:rPr lang="cs-CZ"/>
               <a:t>1.7.2013</a:t>
             </a:r>
           </a:p>
@@ -818,7 +848,9 @@
         <p:txBody>
           <a:bodyPr vert="horz" lIns="91440" tIns="45720" rIns="91440" bIns="45720" rtlCol="0" anchor="ctr"/>
           <a:lstStyle/>
-          <a:p/>
+          <a:p>
+            <a:endParaRPr/>
+          </a:p>
         </p:txBody>
       </p:sp>
       <p:sp>
@@ -848,7 +880,6 @@
               <a:rPr lang="en-US"/>
               <a:t>2</a:t>
             </a:r>
-            <a:endParaRPr lang="en-US" smtClean="0"/>
           </a:p>
         </p:txBody>
       </p:sp>
@@ -878,7 +909,9 @@
               <a:defRPr sz="1200"/>
             </a:lvl1pPr>
           </a:lstStyle>
-          <a:p/>
+          <a:p>
+            <a:endParaRPr/>
+          </a:p>
         </p:txBody>
       </p:sp>
       <p:sp>
@@ -908,8 +941,8 @@
             </a:lvl1pPr>
           </a:lstStyle>
           <a:p>
-            <a:r id="{871B2431-D351-4C6E-A3CF-9DFAC0E3E050}" type="slidenum">
-              <a:rPr lang="cs-CZ" smtClean="0"/>
+            <a:r>
+              <a:rPr lang="cs-CZ"/>
               <a:t>‹#›</a:t>
             </a:r>
           </a:p>
@@ -924,9 +957,9 @@
 </file>
 
 <file path=ppt/notesSlides/notesSlide3.xml><?xml version="1.0" encoding="utf-8"?>
-<p:notes xmlns:p="http://schemas.openxmlformats.org/presentationml/2006/main" xmlns:a="http://schemas.openxmlformats.org/drawingml/2006/main">
+<p:notes xmlns:a="http://schemas.openxmlformats.org/drawingml/2006/main" xmlns:r="http://schemas.openxmlformats.org/officeDocument/2006/relationships" xmlns:p="http://schemas.openxmlformats.org/presentationml/2006/main">
   <p:cSld>
-    <p:spTree xmlns:r="http://schemas.openxmlformats.org/officeDocument/2006/relationships">
+    <p:spTree>
       <p:nvGrpSpPr>
         <p:cNvPr id="1" name=""/>
         <p:cNvGrpSpPr/>
@@ -966,7 +999,9 @@
               <a:defRPr sz="1200"/>
             </a:lvl1pPr>
           </a:lstStyle>
-          <a:p/>
+          <a:p>
+            <a:endParaRPr/>
+          </a:p>
         </p:txBody>
       </p:sp>
       <p:sp>
@@ -996,8 +1031,8 @@
             </a:lvl1pPr>
           </a:lstStyle>
           <a:p>
-            <a:r id="{B7268E1E-0E44-426D-905E-8AD9B19D2182}" type="datetimeFigureOut">
-              <a:rPr lang="cs-CZ" smtClean="0"/>
+            <a:r>
+              <a:rPr lang="cs-CZ"/>
               <a:t>1.7.2013</a:t>
             </a:r>
           </a:p>
@@ -1031,7 +1066,9 @@
         <p:txBody>
           <a:bodyPr vert="horz" lIns="91440" tIns="45720" rIns="91440" bIns="45720" rtlCol="0" anchor="ctr"/>
           <a:lstStyle/>
-          <a:p/>
+          <a:p>
+            <a:endParaRPr/>
+          </a:p>
         </p:txBody>
       </p:sp>
       <p:sp>
@@ -1061,7 +1098,6 @@
               <a:rPr lang="en-US"/>
               <a:t>3</a:t>
             </a:r>
-            <a:endParaRPr lang="en-US" smtClean="0"/>
           </a:p>
         </p:txBody>
       </p:sp>
@@ -1091,7 +1127,9 @@
               <a:defRPr sz="1200"/>
             </a:lvl1pPr>
           </a:lstStyle>
-          <a:p/>
+          <a:p>
+            <a:endParaRPr/>
+          </a:p>
         </p:txBody>
       </p:sp>
       <p:sp>
@@ -1121,8 +1159,8 @@
             </a:lvl1pPr>
           </a:lstStyle>
           <a:p>
-            <a:r id="{871B2431-D351-4C6E-A3CF-9DFAC0E3E050}" type="slidenum">
-              <a:rPr lang="cs-CZ" smtClean="0"/>
+            <a:r>
+              <a:rPr lang="cs-CZ"/>
               <a:t>‹#›</a:t>
             </a:r>
           </a:p>
@@ -1137,9 +1175,9 @@
 </file>
 
 <file path=ppt/notesSlides/notesSlide4.xml><?xml version="1.0" encoding="utf-8"?>
-<p:notes xmlns:p="http://schemas.openxmlformats.org/presentationml/2006/main" xmlns:a="http://schemas.openxmlformats.org/drawingml/2006/main">
+<p:notes xmlns:a="http://schemas.openxmlformats.org/drawingml/2006/main" xmlns:r="http://schemas.openxmlformats.org/officeDocument/2006/relationships" xmlns:p="http://schemas.openxmlformats.org/presentationml/2006/main">
   <p:cSld>
-    <p:spTree xmlns:r="http://schemas.openxmlformats.org/officeDocument/2006/relationships">
+    <p:spTree>
       <p:nvGrpSpPr>
         <p:cNvPr id="1" name=""/>
         <p:cNvGrpSpPr/>
@@ -1179,7 +1217,9 @@
               <a:defRPr sz="1200"/>
             </a:lvl1pPr>
           </a:lstStyle>
-          <a:p/>
+          <a:p>
+            <a:endParaRPr/>
+          </a:p>
         </p:txBody>
       </p:sp>
       <p:sp>
@@ -1209,8 +1249,8 @@
             </a:lvl1pPr>
           </a:lstStyle>
           <a:p>
-            <a:r id="{B7268E1E-0E44-426D-905E-8AD9B19D2182}" type="datetimeFigureOut">
-              <a:rPr lang="cs-CZ" smtClean="0"/>
+            <a:r>
+              <a:rPr lang="cs-CZ"/>
               <a:t>1.7.2013</a:t>
             </a:r>
           </a:p>
@@ -1244,7 +1284,9 @@
         <p:txBody>
           <a:bodyPr vert="horz" lIns="91440" tIns="45720" rIns="91440" bIns="45720" rtlCol="0" anchor="ctr"/>
           <a:lstStyle/>
-          <a:p/>
+          <a:p>
+            <a:endParaRPr/>
+          </a:p>
         </p:txBody>
       </p:sp>
       <p:sp>
@@ -1274,7 +1316,6 @@
               <a:rPr lang="en-US"/>
               <a:t>4</a:t>
             </a:r>
-            <a:endParaRPr lang="en-US" smtClean="0"/>
           </a:p>
         </p:txBody>
       </p:sp>
@@ -1304,7 +1345,9 @@
               <a:defRPr sz="1200"/>
             </a:lvl1pPr>
           </a:lstStyle>
-          <a:p/>
+          <a:p>
+            <a:endParaRPr/>
+          </a:p>
         </p:txBody>
       </p:sp>
       <p:sp>
@@ -1334,8 +1377,8 @@
             </a:lvl1pPr>
           </a:lstStyle>
           <a:p>
-            <a:r id="{871B2431-D351-4C6E-A3CF-9DFAC0E3E050}" type="slidenum">
-              <a:rPr lang="cs-CZ" smtClean="0"/>
+            <a:r>
+              <a:rPr lang="cs-CZ"/>
               <a:t>‹#›</a:t>
             </a:r>
           </a:p>
@@ -1350,9 +1393,9 @@
 </file>
 
 <file path=ppt/notesSlides/notesSlide5.xml><?xml version="1.0" encoding="utf-8"?>
-<p:notes xmlns:p="http://schemas.openxmlformats.org/presentationml/2006/main" xmlns:a="http://schemas.openxmlformats.org/drawingml/2006/main">
+<p:notes xmlns:a="http://schemas.openxmlformats.org/drawingml/2006/main" xmlns:r="http://schemas.openxmlformats.org/officeDocument/2006/relationships" xmlns:p="http://schemas.openxmlformats.org/presentationml/2006/main">
   <p:cSld>
-    <p:spTree xmlns:r="http://schemas.openxmlformats.org/officeDocument/2006/relationships">
+    <p:spTree>
       <p:nvGrpSpPr>
         <p:cNvPr id="1" name=""/>
         <p:cNvGrpSpPr/>
@@ -1392,7 +1435,9 @@
               <a:defRPr sz="1200"/>
             </a:lvl1pPr>
           </a:lstStyle>
-          <a:p/>
+          <a:p>
+            <a:endParaRPr/>
+          </a:p>
         </p:txBody>
       </p:sp>
       <p:sp>
@@ -1422,8 +1467,8 @@
             </a:lvl1pPr>
           </a:lstStyle>
           <a:p>
-            <a:r id="{B7268E1E-0E44-426D-905E-8AD9B19D2182}" type="datetimeFigureOut">
-              <a:rPr lang="cs-CZ" smtClean="0"/>
+            <a:r>
+              <a:rPr lang="cs-CZ"/>
               <a:t>1.7.2013</a:t>
             </a:r>
           </a:p>
@@ -1457,7 +1502,9 @@
         <p:txBody>
           <a:bodyPr vert="horz" lIns="91440" tIns="45720" rIns="91440" bIns="45720" rtlCol="0" anchor="ctr"/>
           <a:lstStyle/>
-          <a:p/>
+          <a:p>
+            <a:endParaRPr/>
+          </a:p>
         </p:txBody>
       </p:sp>
       <p:sp>
@@ -1487,7 +1534,6 @@
               <a:rPr lang="en-US"/>
               <a:t>6</a:t>
             </a:r>
-            <a:endParaRPr lang="en-US" smtClean="0"/>
           </a:p>
         </p:txBody>
       </p:sp>
@@ -1517,7 +1563,9 @@
               <a:defRPr sz="1200"/>
             </a:lvl1pPr>
           </a:lstStyle>
-          <a:p/>
+          <a:p>
+            <a:endParaRPr/>
+          </a:p>
         </p:txBody>
       </p:sp>
       <p:sp>
@@ -1547,8 +1595,8 @@
             </a:lvl1pPr>
           </a:lstStyle>
           <a:p>
-            <a:r id="{871B2431-D351-4C6E-A3CF-9DFAC0E3E050}" type="slidenum">
-              <a:rPr lang="cs-CZ" smtClean="0"/>
+            <a:r>
+              <a:rPr lang="cs-CZ"/>
               <a:t>‹#›</a:t>
             </a:r>
           </a:p>
@@ -1563,9 +1611,9 @@
 </file>
 
 <file path=ppt/notesSlides/notesSlide6.xml><?xml version="1.0" encoding="utf-8"?>
-<p:notes xmlns:p="http://schemas.openxmlformats.org/presentationml/2006/main" xmlns:a="http://schemas.openxmlformats.org/drawingml/2006/main">
+<p:notes xmlns:a="http://schemas.openxmlformats.org/drawingml/2006/main" xmlns:r="http://schemas.openxmlformats.org/officeDocument/2006/relationships" xmlns:p="http://schemas.openxmlformats.org/presentationml/2006/main">
   <p:cSld>
-    <p:spTree xmlns:r="http://schemas.openxmlformats.org/officeDocument/2006/relationships">
+    <p:spTree>
       <p:nvGrpSpPr>
         <p:cNvPr id="1" name=""/>
         <p:cNvGrpSpPr/>
@@ -1605,7 +1653,9 @@
               <a:defRPr sz="1200"/>
             </a:lvl1pPr>
           </a:lstStyle>
-          <a:p/>
+          <a:p>
+            <a:endParaRPr/>
+          </a:p>
         </p:txBody>
       </p:sp>
       <p:sp>
@@ -1635,8 +1685,8 @@
             </a:lvl1pPr>
           </a:lstStyle>
           <a:p>
-            <a:r id="{B7268E1E-0E44-426D-905E-8AD9B19D2182}" type="datetimeFigureOut">
-              <a:rPr lang="cs-CZ" smtClean="0"/>
+            <a:r>
+              <a:rPr lang="cs-CZ"/>
               <a:t>1.7.2013</a:t>
             </a:r>
           </a:p>
@@ -1670,7 +1720,9 @@
         <p:txBody>
           <a:bodyPr vert="horz" lIns="91440" tIns="45720" rIns="91440" bIns="45720" rtlCol="0" anchor="ctr"/>
           <a:lstStyle/>
-          <a:p/>
+          <a:p>
+            <a:endParaRPr/>
+          </a:p>
         </p:txBody>
       </p:sp>
       <p:sp>
@@ -1700,7 +1752,6 @@
               <a:rPr lang="en-US"/>
               <a:t>8</a:t>
             </a:r>
-            <a:endParaRPr lang="en-US" smtClean="0"/>
           </a:p>
         </p:txBody>
       </p:sp>
@@ -1730,7 +1781,9 @@
               <a:defRPr sz="1200"/>
             </a:lvl1pPr>
           </a:lstStyle>
-          <a:p/>
+          <a:p>
+            <a:endParaRPr/>
+          </a:p>
         </p:txBody>
       </p:sp>
       <p:sp>
@@ -1760,8 +1813,8 @@
             </a:lvl1pPr>
           </a:lstStyle>
           <a:p>
-            <a:r id="{871B2431-D351-4C6E-A3CF-9DFAC0E3E050}" type="slidenum">
-              <a:rPr lang="cs-CZ" smtClean="0"/>
+            <a:r>
+              <a:rPr lang="cs-CZ"/>
               <a:t>‹#›</a:t>
             </a:r>
           </a:p>
@@ -1776,9 +1829,9 @@
 </file>
 
 <file path=ppt/notesSlides/notesSlide7.xml><?xml version="1.0" encoding="utf-8"?>
-<p:notes xmlns:p="http://schemas.openxmlformats.org/presentationml/2006/main" xmlns:a="http://schemas.openxmlformats.org/drawingml/2006/main">
+<p:notes xmlns:a="http://schemas.openxmlformats.org/drawingml/2006/main" xmlns:r="http://schemas.openxmlformats.org/officeDocument/2006/relationships" xmlns:p="http://schemas.openxmlformats.org/presentationml/2006/main">
   <p:cSld>
-    <p:spTree xmlns:r="http://schemas.openxmlformats.org/officeDocument/2006/relationships">
+    <p:spTree>
       <p:nvGrpSpPr>
         <p:cNvPr id="1" name=""/>
         <p:cNvGrpSpPr/>
@@ -1818,7 +1871,9 @@
               <a:defRPr sz="1200"/>
             </a:lvl1pPr>
           </a:lstStyle>
-          <a:p/>
+          <a:p>
+            <a:endParaRPr/>
+          </a:p>
         </p:txBody>
       </p:sp>
       <p:sp>
@@ -1848,8 +1903,8 @@
             </a:lvl1pPr>
           </a:lstStyle>
           <a:p>
-            <a:r id="{B7268E1E-0E44-426D-905E-8AD9B19D2182}" type="datetimeFigureOut">
-              <a:rPr lang="cs-CZ" smtClean="0"/>
+            <a:r>
+              <a:rPr lang="cs-CZ"/>
               <a:t>1.7.2013</a:t>
             </a:r>
           </a:p>
@@ -1883,7 +1938,9 @@
         <p:txBody>
           <a:bodyPr vert="horz" lIns="91440" tIns="45720" rIns="91440" bIns="45720" rtlCol="0" anchor="ctr"/>
           <a:lstStyle/>
-          <a:p/>
+          <a:p>
+            <a:endParaRPr/>
+          </a:p>
         </p:txBody>
       </p:sp>
       <p:sp>
@@ -1913,7 +1970,6 @@
               <a:rPr lang="en-US"/>
               <a:t>9</a:t>
             </a:r>
-            <a:endParaRPr lang="en-US" smtClean="0"/>
           </a:p>
         </p:txBody>
       </p:sp>
@@ -1943,7 +1999,9 @@
               <a:defRPr sz="1200"/>
             </a:lvl1pPr>
           </a:lstStyle>
-          <a:p/>
+          <a:p>
+            <a:endParaRPr/>
+          </a:p>
         </p:txBody>
       </p:sp>
       <p:sp>
@@ -1973,8 +2031,8 @@
             </a:lvl1pPr>
           </a:lstStyle>
           <a:p>
-            <a:r id="{871B2431-D351-4C6E-A3CF-9DFAC0E3E050}" type="slidenum">
-              <a:rPr lang="cs-CZ" smtClean="0"/>
+            <a:r>
+              <a:rPr lang="cs-CZ"/>
               <a:t>‹#›</a:t>
             </a:r>
           </a:p>
@@ -1989,9 +2047,9 @@
 </file>
 
 <file path=ppt/notesSlides/notesSlide8.xml><?xml version="1.0" encoding="utf-8"?>
-<p:notes xmlns:p="http://schemas.openxmlformats.org/presentationml/2006/main" xmlns:a="http://schemas.openxmlformats.org/drawingml/2006/main">
+<p:notes xmlns:a="http://schemas.openxmlformats.org/drawingml/2006/main" xmlns:r="http://schemas.openxmlformats.org/officeDocument/2006/relationships" xmlns:p="http://schemas.openxmlformats.org/presentationml/2006/main">
   <p:cSld>
-    <p:spTree xmlns:r="http://schemas.openxmlformats.org/officeDocument/2006/relationships">
+    <p:spTree>
       <p:nvGrpSpPr>
         <p:cNvPr id="1" name=""/>
         <p:cNvGrpSpPr/>
@@ -2031,7 +2089,9 @@
               <a:defRPr sz="1200"/>
             </a:lvl1pPr>
           </a:lstStyle>
-          <a:p/>
+          <a:p>
+            <a:endParaRPr/>
+          </a:p>
         </p:txBody>
       </p:sp>
       <p:sp>
@@ -2061,8 +2121,8 @@
             </a:lvl1pPr>
           </a:lstStyle>
           <a:p>
-            <a:r id="{B7268E1E-0E44-426D-905E-8AD9B19D2182}" type="datetimeFigureOut">
-              <a:rPr lang="cs-CZ" smtClean="0"/>
+            <a:r>
+              <a:rPr lang="cs-CZ"/>
               <a:t>1.7.2013</a:t>
             </a:r>
           </a:p>
@@ -2096,7 +2156,9 @@
         <p:txBody>
           <a:bodyPr vert="horz" lIns="91440" tIns="45720" rIns="91440" bIns="45720" rtlCol="0" anchor="ctr"/>
           <a:lstStyle/>
-          <a:p/>
+          <a:p>
+            <a:endParaRPr/>
+          </a:p>
         </p:txBody>
       </p:sp>
       <p:sp>
@@ -2126,7 +2188,6 @@
               <a:rPr lang="en-US"/>
               <a:t>11</a:t>
             </a:r>
-            <a:endParaRPr lang="en-US" smtClean="0"/>
           </a:p>
         </p:txBody>
       </p:sp>
@@ -2156,7 +2217,9 @@
               <a:defRPr sz="1200"/>
             </a:lvl1pPr>
           </a:lstStyle>
-          <a:p/>
+          <a:p>
+            <a:endParaRPr/>
+          </a:p>
         </p:txBody>
       </p:sp>
       <p:sp>
@@ -2186,8 +2249,8 @@
             </a:lvl1pPr>
           </a:lstStyle>
           <a:p>
-            <a:r id="{871B2431-D351-4C6E-A3CF-9DFAC0E3E050}" type="slidenum">
-              <a:rPr lang="cs-CZ" smtClean="0"/>
+            <a:r>
+              <a:rPr lang="cs-CZ"/>
               <a:t>‹#›</a:t>
             </a:r>
           </a:p>
@@ -2202,9 +2265,9 @@
 </file>
 
 <file path=ppt/notesSlides/notesSlide9.xml><?xml version="1.0" encoding="utf-8"?>
-<p:notes xmlns:p="http://schemas.openxmlformats.org/presentationml/2006/main" xmlns:a="http://schemas.openxmlformats.org/drawingml/2006/main">
+<p:notes xmlns:a="http://schemas.openxmlformats.org/drawingml/2006/main" xmlns:r="http://schemas.openxmlformats.org/officeDocument/2006/relationships" xmlns:p="http://schemas.openxmlformats.org/presentationml/2006/main">
   <p:cSld>
-    <p:spTree xmlns:r="http://schemas.openxmlformats.org/officeDocument/2006/relationships">
+    <p:spTree>
       <p:nvGrpSpPr>
         <p:cNvPr id="1" name=""/>
         <p:cNvGrpSpPr/>
@@ -2244,7 +2307,9 @@
               <a:defRPr sz="1200"/>
             </a:lvl1pPr>
           </a:lstStyle>
-          <a:p/>
+          <a:p>
+            <a:endParaRPr/>
+          </a:p>
         </p:txBody>
       </p:sp>
       <p:sp>
@@ -2274,8 +2339,8 @@
             </a:lvl1pPr>
           </a:lstStyle>
           <a:p>
-            <a:r id="{B7268E1E-0E44-426D-905E-8AD9B19D2182}" type="datetimeFigureOut">
-              <a:rPr lang="cs-CZ" smtClean="0"/>
+            <a:r>
+              <a:rPr lang="cs-CZ"/>
               <a:t>1.7.2013</a:t>
             </a:r>
           </a:p>
@@ -2309,7 +2374,9 @@
         <p:txBody>
           <a:bodyPr vert="horz" lIns="91440" tIns="45720" rIns="91440" bIns="45720" rtlCol="0" anchor="ctr"/>
           <a:lstStyle/>
-          <a:p/>
+          <a:p>
+            <a:endParaRPr/>
+          </a:p>
         </p:txBody>
       </p:sp>
       <p:sp>
@@ -2339,7 +2406,6 @@
               <a:rPr lang="en-US"/>
               <a:t>12</a:t>
             </a:r>
-            <a:endParaRPr lang="en-US" smtClean="0"/>
           </a:p>
         </p:txBody>
       </p:sp>
@@ -2369,7 +2435,9 @@
               <a:defRPr sz="1200"/>
             </a:lvl1pPr>
           </a:lstStyle>
-          <a:p/>
+          <a:p>
+            <a:endParaRPr/>
+          </a:p>
         </p:txBody>
       </p:sp>
       <p:sp>
@@ -2399,8 +2467,8 @@
             </a:lvl1pPr>
           </a:lstStyle>
           <a:p>
-            <a:r id="{871B2431-D351-4C6E-A3CF-9DFAC0E3E050}" type="slidenum">
-              <a:rPr lang="cs-CZ" smtClean="0"/>
+            <a:r>
+              <a:rPr lang="cs-CZ"/>
               <a:t>‹#›</a:t>
             </a:r>
           </a:p>
@@ -2452,10 +2520,9 @@
           <a:lstStyle/>
           <a:p>
             <a:r>
-              <a:rPr lang="en-US" smtClean="0"/>
+              <a:rPr lang="en-US"/>
               <a:t>Click to edit Master title style</a:t>
             </a:r>
-            <a:endParaRPr lang="en-US"/>
           </a:p>
         </p:txBody>
       </p:sp>
@@ -2571,10 +2638,9 @@
           </a:lstStyle>
           <a:p>
             <a:r>
-              <a:rPr lang="en-US" smtClean="0"/>
+              <a:rPr lang="en-US"/>
               <a:t>Click to edit Master subtitle style</a:t>
             </a:r>
-            <a:endParaRPr lang="en-US"/>
           </a:p>
         </p:txBody>
       </p:sp>
@@ -2596,7 +2662,7 @@
             <a:fld id="{1D8BD707-D9CF-40AE-B4C6-C98DA3205C09}" type="datetimeFigureOut">
               <a:rPr lang="en-US" smtClean="0"/>
               <a:pPr/>
-              <a:t>8/1/2011</a:t>
+              <a:t>4/20/2026</a:t>
             </a:fld>
             <a:endParaRPr lang="en-US"/>
           </a:p>
@@ -2639,7 +2705,7 @@
             <a:fld id="{B6F15528-21DE-4FAA-801E-634DDDAF4B2B}" type="slidenum">
               <a:rPr lang="en-US" smtClean="0"/>
               <a:pPr/>
-              <a:t>‹#›</a:t>
+              <a:t>‹nº›</a:t>
             </a:fld>
             <a:endParaRPr lang="en-US"/>
           </a:p>
@@ -2686,10 +2752,9 @@
           <a:lstStyle/>
           <a:p>
             <a:r>
-              <a:rPr lang="en-US" smtClean="0"/>
+              <a:rPr lang="en-US"/>
               <a:t>Click to edit Master title style</a:t>
             </a:r>
-            <a:endParaRPr lang="en-US"/>
           </a:p>
         </p:txBody>
       </p:sp>
@@ -2710,38 +2775,37 @@
           <a:p>
             <a:pPr lvl="0"/>
             <a:r>
-              <a:rPr lang="en-US" smtClean="0"/>
+              <a:rPr lang="en-US"/>
               <a:t>Click to edit Master text styles</a:t>
             </a:r>
           </a:p>
           <a:p>
             <a:pPr lvl="1"/>
             <a:r>
-              <a:rPr lang="en-US" smtClean="0"/>
+              <a:rPr lang="en-US"/>
               <a:t>Second level</a:t>
             </a:r>
           </a:p>
           <a:p>
             <a:pPr lvl="2"/>
             <a:r>
-              <a:rPr lang="en-US" smtClean="0"/>
+              <a:rPr lang="en-US"/>
               <a:t>Third level</a:t>
             </a:r>
           </a:p>
           <a:p>
             <a:pPr lvl="3"/>
             <a:r>
-              <a:rPr lang="en-US" smtClean="0"/>
+              <a:rPr lang="en-US"/>
               <a:t>Fourth level</a:t>
             </a:r>
           </a:p>
           <a:p>
             <a:pPr lvl="4"/>
             <a:r>
-              <a:rPr lang="en-US" smtClean="0"/>
+              <a:rPr lang="en-US"/>
               <a:t>Fifth level</a:t>
             </a:r>
-            <a:endParaRPr lang="en-US"/>
           </a:p>
         </p:txBody>
       </p:sp>
@@ -2763,7 +2827,7 @@
             <a:fld id="{1D8BD707-D9CF-40AE-B4C6-C98DA3205C09}" type="datetimeFigureOut">
               <a:rPr lang="en-US" smtClean="0"/>
               <a:pPr/>
-              <a:t>8/1/2011</a:t>
+              <a:t>4/20/2026</a:t>
             </a:fld>
             <a:endParaRPr lang="en-US"/>
           </a:p>
@@ -2806,7 +2870,7 @@
             <a:fld id="{B6F15528-21DE-4FAA-801E-634DDDAF4B2B}" type="slidenum">
               <a:rPr lang="en-US" smtClean="0"/>
               <a:pPr/>
-              <a:t>‹#›</a:t>
+              <a:t>‹nº›</a:t>
             </a:fld>
             <a:endParaRPr lang="en-US"/>
           </a:p>
@@ -2858,10 +2922,9 @@
           <a:lstStyle/>
           <a:p>
             <a:r>
-              <a:rPr lang="en-US" smtClean="0"/>
+              <a:rPr lang="en-US"/>
               <a:t>Click to edit Master title style</a:t>
             </a:r>
-            <a:endParaRPr lang="en-US"/>
           </a:p>
         </p:txBody>
       </p:sp>
@@ -2887,38 +2950,37 @@
           <a:p>
             <a:pPr lvl="0"/>
             <a:r>
-              <a:rPr lang="en-US" smtClean="0"/>
+              <a:rPr lang="en-US"/>
               <a:t>Click to edit Master text styles</a:t>
             </a:r>
           </a:p>
           <a:p>
             <a:pPr lvl="1"/>
             <a:r>
-              <a:rPr lang="en-US" smtClean="0"/>
+              <a:rPr lang="en-US"/>
               <a:t>Second level</a:t>
             </a:r>
           </a:p>
           <a:p>
             <a:pPr lvl="2"/>
             <a:r>
-              <a:rPr lang="en-US" smtClean="0"/>
+              <a:rPr lang="en-US"/>
               <a:t>Third level</a:t>
             </a:r>
           </a:p>
           <a:p>
             <a:pPr lvl="3"/>
             <a:r>
-              <a:rPr lang="en-US" smtClean="0"/>
+              <a:rPr lang="en-US"/>
               <a:t>Fourth level</a:t>
             </a:r>
           </a:p>
           <a:p>
             <a:pPr lvl="4"/>
             <a:r>
-              <a:rPr lang="en-US" smtClean="0"/>
+              <a:rPr lang="en-US"/>
               <a:t>Fifth level</a:t>
             </a:r>
-            <a:endParaRPr lang="en-US"/>
           </a:p>
         </p:txBody>
       </p:sp>
@@ -2940,7 +3002,7 @@
             <a:fld id="{1D8BD707-D9CF-40AE-B4C6-C98DA3205C09}" type="datetimeFigureOut">
               <a:rPr lang="en-US" smtClean="0"/>
               <a:pPr/>
-              <a:t>8/1/2011</a:t>
+              <a:t>4/20/2026</a:t>
             </a:fld>
             <a:endParaRPr lang="en-US"/>
           </a:p>
@@ -2983,7 +3045,7 @@
             <a:fld id="{B6F15528-21DE-4FAA-801E-634DDDAF4B2B}" type="slidenum">
               <a:rPr lang="en-US" smtClean="0"/>
               <a:pPr/>
-              <a:t>‹#›</a:t>
+              <a:t>‹nº›</a:t>
             </a:fld>
             <a:endParaRPr lang="en-US"/>
           </a:p>
@@ -3030,10 +3092,9 @@
           <a:lstStyle/>
           <a:p>
             <a:r>
-              <a:rPr lang="en-US" smtClean="0"/>
+              <a:rPr lang="en-US"/>
               <a:t>Click to edit Master title style</a:t>
             </a:r>
-            <a:endParaRPr lang="en-US"/>
           </a:p>
         </p:txBody>
       </p:sp>
@@ -3054,38 +3115,37 @@
           <a:p>
             <a:pPr lvl="0"/>
             <a:r>
-              <a:rPr lang="en-US" smtClean="0"/>
+              <a:rPr lang="en-US"/>
               <a:t>Click to edit Master text styles</a:t>
             </a:r>
           </a:p>
           <a:p>
             <a:pPr lvl="1"/>
             <a:r>
-              <a:rPr lang="en-US" smtClean="0"/>
+              <a:rPr lang="en-US"/>
               <a:t>Second level</a:t>
             </a:r>
           </a:p>
           <a:p>
             <a:pPr lvl="2"/>
             <a:r>
-              <a:rPr lang="en-US" smtClean="0"/>
+              <a:rPr lang="en-US"/>
               <a:t>Third level</a:t>
             </a:r>
           </a:p>
           <a:p>
             <a:pPr lvl="3"/>
             <a:r>
-              <a:rPr lang="en-US" smtClean="0"/>
+              <a:rPr lang="en-US"/>
               <a:t>Fourth level</a:t>
             </a:r>
           </a:p>
           <a:p>
             <a:pPr lvl="4"/>
             <a:r>
-              <a:rPr lang="en-US" smtClean="0"/>
+              <a:rPr lang="en-US"/>
               <a:t>Fifth level</a:t>
             </a:r>
-            <a:endParaRPr lang="en-US"/>
           </a:p>
         </p:txBody>
       </p:sp>
@@ -3107,7 +3167,7 @@
             <a:fld id="{1D8BD707-D9CF-40AE-B4C6-C98DA3205C09}" type="datetimeFigureOut">
               <a:rPr lang="en-US" smtClean="0"/>
               <a:pPr/>
-              <a:t>8/1/2011</a:t>
+              <a:t>4/20/2026</a:t>
             </a:fld>
             <a:endParaRPr lang="en-US"/>
           </a:p>
@@ -3150,7 +3210,7 @@
             <a:fld id="{B6F15528-21DE-4FAA-801E-634DDDAF4B2B}" type="slidenum">
               <a:rPr lang="en-US" smtClean="0"/>
               <a:pPr/>
-              <a:t>‹#›</a:t>
+              <a:t>‹nº›</a:t>
             </a:fld>
             <a:endParaRPr lang="en-US"/>
           </a:p>
@@ -3206,10 +3266,9 @@
           </a:lstStyle>
           <a:p>
             <a:r>
-              <a:rPr lang="en-US" smtClean="0"/>
+              <a:rPr lang="en-US"/>
               <a:t>Click to edit Master title style</a:t>
             </a:r>
-            <a:endParaRPr lang="en-US"/>
           </a:p>
         </p:txBody>
       </p:sp>
@@ -3326,7 +3385,7 @@
           <a:p>
             <a:pPr lvl="0"/>
             <a:r>
-              <a:rPr lang="en-US" smtClean="0"/>
+              <a:rPr lang="en-US"/>
               <a:t>Click to edit Master text styles</a:t>
             </a:r>
           </a:p>
@@ -3350,7 +3409,7 @@
             <a:fld id="{1D8BD707-D9CF-40AE-B4C6-C98DA3205C09}" type="datetimeFigureOut">
               <a:rPr lang="en-US" smtClean="0"/>
               <a:pPr/>
-              <a:t>8/1/2011</a:t>
+              <a:t>4/20/2026</a:t>
             </a:fld>
             <a:endParaRPr lang="en-US"/>
           </a:p>
@@ -3393,7 +3452,7 @@
             <a:fld id="{B6F15528-21DE-4FAA-801E-634DDDAF4B2B}" type="slidenum">
               <a:rPr lang="en-US" smtClean="0"/>
               <a:pPr/>
-              <a:t>‹#›</a:t>
+              <a:t>‹nº›</a:t>
             </a:fld>
             <a:endParaRPr lang="en-US"/>
           </a:p>
@@ -3440,10 +3499,9 @@
           <a:lstStyle/>
           <a:p>
             <a:r>
-              <a:rPr lang="en-US" smtClean="0"/>
+              <a:rPr lang="en-US"/>
               <a:t>Click to edit Master title style</a:t>
             </a:r>
-            <a:endParaRPr lang="en-US"/>
           </a:p>
         </p:txBody>
       </p:sp>
@@ -3497,38 +3555,37 @@
           <a:p>
             <a:pPr lvl="0"/>
             <a:r>
-              <a:rPr lang="en-US" smtClean="0"/>
+              <a:rPr lang="en-US"/>
               <a:t>Click to edit Master text styles</a:t>
             </a:r>
           </a:p>
           <a:p>
             <a:pPr lvl="1"/>
             <a:r>
-              <a:rPr lang="en-US" smtClean="0"/>
+              <a:rPr lang="en-US"/>
               <a:t>Second level</a:t>
             </a:r>
           </a:p>
           <a:p>
             <a:pPr lvl="2"/>
             <a:r>
-              <a:rPr lang="en-US" smtClean="0"/>
+              <a:rPr lang="en-US"/>
               <a:t>Third level</a:t>
             </a:r>
           </a:p>
           <a:p>
             <a:pPr lvl="3"/>
             <a:r>
-              <a:rPr lang="en-US" smtClean="0"/>
+              <a:rPr lang="en-US"/>
               <a:t>Fourth level</a:t>
             </a:r>
           </a:p>
           <a:p>
             <a:pPr lvl="4"/>
             <a:r>
-              <a:rPr lang="en-US" smtClean="0"/>
+              <a:rPr lang="en-US"/>
               <a:t>Fifth level</a:t>
             </a:r>
-            <a:endParaRPr lang="en-US"/>
           </a:p>
         </p:txBody>
       </p:sp>
@@ -3582,38 +3639,37 @@
           <a:p>
             <a:pPr lvl="0"/>
             <a:r>
-              <a:rPr lang="en-US" smtClean="0"/>
+              <a:rPr lang="en-US"/>
               <a:t>Click to edit Master text styles</a:t>
             </a:r>
           </a:p>
           <a:p>
             <a:pPr lvl="1"/>
             <a:r>
-              <a:rPr lang="en-US" smtClean="0"/>
+              <a:rPr lang="en-US"/>
               <a:t>Second level</a:t>
             </a:r>
           </a:p>
           <a:p>
             <a:pPr lvl="2"/>
             <a:r>
-              <a:rPr lang="en-US" smtClean="0"/>
+              <a:rPr lang="en-US"/>
               <a:t>Third level</a:t>
             </a:r>
           </a:p>
           <a:p>
             <a:pPr lvl="3"/>
             <a:r>
-              <a:rPr lang="en-US" smtClean="0"/>
+              <a:rPr lang="en-US"/>
               <a:t>Fourth level</a:t>
             </a:r>
           </a:p>
           <a:p>
             <a:pPr lvl="4"/>
             <a:r>
-              <a:rPr lang="en-US" smtClean="0"/>
+              <a:rPr lang="en-US"/>
               <a:t>Fifth level</a:t>
             </a:r>
-            <a:endParaRPr lang="en-US"/>
           </a:p>
         </p:txBody>
       </p:sp>
@@ -3635,7 +3691,7 @@
             <a:fld id="{1D8BD707-D9CF-40AE-B4C6-C98DA3205C09}" type="datetimeFigureOut">
               <a:rPr lang="en-US" smtClean="0"/>
               <a:pPr/>
-              <a:t>8/1/2011</a:t>
+              <a:t>4/20/2026</a:t>
             </a:fld>
             <a:endParaRPr lang="en-US"/>
           </a:p>
@@ -3678,7 +3734,7 @@
             <a:fld id="{B6F15528-21DE-4FAA-801E-634DDDAF4B2B}" type="slidenum">
               <a:rPr lang="en-US" smtClean="0"/>
               <a:pPr/>
-              <a:t>‹#›</a:t>
+              <a:t>‹nº›</a:t>
             </a:fld>
             <a:endParaRPr lang="en-US"/>
           </a:p>
@@ -3729,10 +3785,9 @@
           </a:lstStyle>
           <a:p>
             <a:r>
-              <a:rPr lang="en-US" smtClean="0"/>
+              <a:rPr lang="en-US"/>
               <a:t>Click to edit Master title style</a:t>
             </a:r>
-            <a:endParaRPr lang="en-US"/>
           </a:p>
         </p:txBody>
       </p:sp>
@@ -3795,7 +3850,7 @@
           <a:p>
             <a:pPr lvl="0"/>
             <a:r>
-              <a:rPr lang="en-US" smtClean="0"/>
+              <a:rPr lang="en-US"/>
               <a:t>Click to edit Master text styles</a:t>
             </a:r>
           </a:p>
@@ -3851,38 +3906,37 @@
           <a:p>
             <a:pPr lvl="0"/>
             <a:r>
-              <a:rPr lang="en-US" smtClean="0"/>
+              <a:rPr lang="en-US"/>
               <a:t>Click to edit Master text styles</a:t>
             </a:r>
           </a:p>
           <a:p>
             <a:pPr lvl="1"/>
             <a:r>
-              <a:rPr lang="en-US" smtClean="0"/>
+              <a:rPr lang="en-US"/>
               <a:t>Second level</a:t>
             </a:r>
           </a:p>
           <a:p>
             <a:pPr lvl="2"/>
             <a:r>
-              <a:rPr lang="en-US" smtClean="0"/>
+              <a:rPr lang="en-US"/>
               <a:t>Third level</a:t>
             </a:r>
           </a:p>
           <a:p>
             <a:pPr lvl="3"/>
             <a:r>
-              <a:rPr lang="en-US" smtClean="0"/>
+              <a:rPr lang="en-US"/>
               <a:t>Fourth level</a:t>
             </a:r>
           </a:p>
           <a:p>
             <a:pPr lvl="4"/>
             <a:r>
-              <a:rPr lang="en-US" smtClean="0"/>
+              <a:rPr lang="en-US"/>
               <a:t>Fifth level</a:t>
             </a:r>
-            <a:endParaRPr lang="en-US"/>
           </a:p>
         </p:txBody>
       </p:sp>
@@ -3945,7 +3999,7 @@
           <a:p>
             <a:pPr lvl="0"/>
             <a:r>
-              <a:rPr lang="en-US" smtClean="0"/>
+              <a:rPr lang="en-US"/>
               <a:t>Click to edit Master text styles</a:t>
             </a:r>
           </a:p>
@@ -4001,38 +4055,37 @@
           <a:p>
             <a:pPr lvl="0"/>
             <a:r>
-              <a:rPr lang="en-US" smtClean="0"/>
+              <a:rPr lang="en-US"/>
               <a:t>Click to edit Master text styles</a:t>
             </a:r>
           </a:p>
           <a:p>
             <a:pPr lvl="1"/>
             <a:r>
-              <a:rPr lang="en-US" smtClean="0"/>
+              <a:rPr lang="en-US"/>
               <a:t>Second level</a:t>
             </a:r>
           </a:p>
           <a:p>
             <a:pPr lvl="2"/>
             <a:r>
-              <a:rPr lang="en-US" smtClean="0"/>
+              <a:rPr lang="en-US"/>
               <a:t>Third level</a:t>
             </a:r>
           </a:p>
           <a:p>
             <a:pPr lvl="3"/>
             <a:r>
-              <a:rPr lang="en-US" smtClean="0"/>
+              <a:rPr lang="en-US"/>
               <a:t>Fourth level</a:t>
             </a:r>
           </a:p>
           <a:p>
             <a:pPr lvl="4"/>
             <a:r>
-              <a:rPr lang="en-US" smtClean="0"/>
+              <a:rPr lang="en-US"/>
               <a:t>Fifth level</a:t>
             </a:r>
-            <a:endParaRPr lang="en-US"/>
           </a:p>
         </p:txBody>
       </p:sp>
@@ -4054,7 +4107,7 @@
             <a:fld id="{1D8BD707-D9CF-40AE-B4C6-C98DA3205C09}" type="datetimeFigureOut">
               <a:rPr lang="en-US" smtClean="0"/>
               <a:pPr/>
-              <a:t>8/1/2011</a:t>
+              <a:t>4/20/2026</a:t>
             </a:fld>
             <a:endParaRPr lang="en-US"/>
           </a:p>
@@ -4097,7 +4150,7 @@
             <a:fld id="{B6F15528-21DE-4FAA-801E-634DDDAF4B2B}" type="slidenum">
               <a:rPr lang="en-US" smtClean="0"/>
               <a:pPr/>
-              <a:t>‹#›</a:t>
+              <a:t>‹nº›</a:t>
             </a:fld>
             <a:endParaRPr lang="en-US"/>
           </a:p>
@@ -4144,10 +4197,9 @@
           <a:lstStyle/>
           <a:p>
             <a:r>
-              <a:rPr lang="en-US" smtClean="0"/>
+              <a:rPr lang="en-US"/>
               <a:t>Click to edit Master title style</a:t>
             </a:r>
-            <a:endParaRPr lang="en-US"/>
           </a:p>
         </p:txBody>
       </p:sp>
@@ -4169,7 +4221,7 @@
             <a:fld id="{1D8BD707-D9CF-40AE-B4C6-C98DA3205C09}" type="datetimeFigureOut">
               <a:rPr lang="en-US" smtClean="0"/>
               <a:pPr/>
-              <a:t>8/1/2011</a:t>
+              <a:t>4/20/2026</a:t>
             </a:fld>
             <a:endParaRPr lang="en-US"/>
           </a:p>
@@ -4212,7 +4264,7 @@
             <a:fld id="{B6F15528-21DE-4FAA-801E-634DDDAF4B2B}" type="slidenum">
               <a:rPr lang="en-US" smtClean="0"/>
               <a:pPr/>
-              <a:t>‹#›</a:t>
+              <a:t>‹nº›</a:t>
             </a:fld>
             <a:endParaRPr lang="en-US"/>
           </a:p>
@@ -4261,7 +4313,7 @@
             <a:fld id="{1D8BD707-D9CF-40AE-B4C6-C98DA3205C09}" type="datetimeFigureOut">
               <a:rPr lang="en-US" smtClean="0"/>
               <a:pPr/>
-              <a:t>8/1/2011</a:t>
+              <a:t>4/20/2026</a:t>
             </a:fld>
             <a:endParaRPr lang="en-US"/>
           </a:p>
@@ -4304,7 +4356,7 @@
             <a:fld id="{B6F15528-21DE-4FAA-801E-634DDDAF4B2B}" type="slidenum">
               <a:rPr lang="en-US" smtClean="0"/>
               <a:pPr/>
-              <a:t>‹#›</a:t>
+              <a:t>‹nº›</a:t>
             </a:fld>
             <a:endParaRPr lang="en-US"/>
           </a:p>
@@ -4360,10 +4412,9 @@
           </a:lstStyle>
           <a:p>
             <a:r>
-              <a:rPr lang="en-US" smtClean="0"/>
+              <a:rPr lang="en-US"/>
               <a:t>Click to edit Master title style</a:t>
             </a:r>
-            <a:endParaRPr lang="en-US"/>
           </a:p>
         </p:txBody>
       </p:sp>
@@ -4417,38 +4468,37 @@
           <a:p>
             <a:pPr lvl="0"/>
             <a:r>
-              <a:rPr lang="en-US" smtClean="0"/>
+              <a:rPr lang="en-US"/>
               <a:t>Click to edit Master text styles</a:t>
             </a:r>
           </a:p>
           <a:p>
             <a:pPr lvl="1"/>
             <a:r>
-              <a:rPr lang="en-US" smtClean="0"/>
+              <a:rPr lang="en-US"/>
               <a:t>Second level</a:t>
             </a:r>
           </a:p>
           <a:p>
             <a:pPr lvl="2"/>
             <a:r>
-              <a:rPr lang="en-US" smtClean="0"/>
+              <a:rPr lang="en-US"/>
               <a:t>Third level</a:t>
             </a:r>
           </a:p>
           <a:p>
             <a:pPr lvl="3"/>
             <a:r>
-              <a:rPr lang="en-US" smtClean="0"/>
+              <a:rPr lang="en-US"/>
               <a:t>Fourth level</a:t>
             </a:r>
           </a:p>
           <a:p>
             <a:pPr lvl="4"/>
             <a:r>
-              <a:rPr lang="en-US" smtClean="0"/>
+              <a:rPr lang="en-US"/>
               <a:t>Fifth level</a:t>
             </a:r>
-            <a:endParaRPr lang="en-US"/>
           </a:p>
         </p:txBody>
       </p:sp>
@@ -4511,7 +4561,7 @@
           <a:p>
             <a:pPr lvl="0"/>
             <a:r>
-              <a:rPr lang="en-US" smtClean="0"/>
+              <a:rPr lang="en-US"/>
               <a:t>Click to edit Master text styles</a:t>
             </a:r>
           </a:p>
@@ -4535,7 +4585,7 @@
             <a:fld id="{1D8BD707-D9CF-40AE-B4C6-C98DA3205C09}" type="datetimeFigureOut">
               <a:rPr lang="en-US" smtClean="0"/>
               <a:pPr/>
-              <a:t>8/1/2011</a:t>
+              <a:t>4/20/2026</a:t>
             </a:fld>
             <a:endParaRPr lang="en-US"/>
           </a:p>
@@ -4578,7 +4628,7 @@
             <a:fld id="{B6F15528-21DE-4FAA-801E-634DDDAF4B2B}" type="slidenum">
               <a:rPr lang="en-US" smtClean="0"/>
               <a:pPr/>
-              <a:t>‹#›</a:t>
+              <a:t>‹nº›</a:t>
             </a:fld>
             <a:endParaRPr lang="en-US"/>
           </a:p>
@@ -4634,10 +4684,9 @@
           </a:lstStyle>
           <a:p>
             <a:r>
-              <a:rPr lang="en-US" smtClean="0"/>
+              <a:rPr lang="en-US"/>
               <a:t>Click to edit Master title style</a:t>
             </a:r>
-            <a:endParaRPr lang="en-US"/>
           </a:p>
         </p:txBody>
       </p:sp>
@@ -4761,7 +4810,7 @@
           <a:p>
             <a:pPr lvl="0"/>
             <a:r>
-              <a:rPr lang="en-US" smtClean="0"/>
+              <a:rPr lang="en-US"/>
               <a:t>Click to edit Master text styles</a:t>
             </a:r>
           </a:p>
@@ -4785,7 +4834,7 @@
             <a:fld id="{1D8BD707-D9CF-40AE-B4C6-C98DA3205C09}" type="datetimeFigureOut">
               <a:rPr lang="en-US" smtClean="0"/>
               <a:pPr/>
-              <a:t>8/1/2011</a:t>
+              <a:t>4/20/2026</a:t>
             </a:fld>
             <a:endParaRPr lang="en-US"/>
           </a:p>
@@ -4828,7 +4877,7 @@
             <a:fld id="{B6F15528-21DE-4FAA-801E-634DDDAF4B2B}" type="slidenum">
               <a:rPr lang="en-US" smtClean="0"/>
               <a:pPr/>
-              <a:t>‹#›</a:t>
+              <a:t>‹nº›</a:t>
             </a:fld>
             <a:endParaRPr lang="en-US"/>
           </a:p>
@@ -4890,10 +4939,9 @@
           <a:lstStyle/>
           <a:p>
             <a:r>
-              <a:rPr lang="en-US" smtClean="0"/>
+              <a:rPr lang="en-US"/>
               <a:t>Click to edit Master title style</a:t>
             </a:r>
-            <a:endParaRPr lang="en-US"/>
           </a:p>
         </p:txBody>
       </p:sp>
@@ -4924,38 +4972,37 @@
           <a:p>
             <a:pPr lvl="0"/>
             <a:r>
-              <a:rPr lang="en-US" smtClean="0"/>
+              <a:rPr lang="en-US"/>
               <a:t>Click to edit Master text styles</a:t>
             </a:r>
           </a:p>
           <a:p>
             <a:pPr lvl="1"/>
             <a:r>
-              <a:rPr lang="en-US" smtClean="0"/>
+              <a:rPr lang="en-US"/>
               <a:t>Second level</a:t>
             </a:r>
           </a:p>
           <a:p>
             <a:pPr lvl="2"/>
             <a:r>
-              <a:rPr lang="en-US" smtClean="0"/>
+              <a:rPr lang="en-US"/>
               <a:t>Third level</a:t>
             </a:r>
           </a:p>
           <a:p>
             <a:pPr lvl="3"/>
             <a:r>
-              <a:rPr lang="en-US" smtClean="0"/>
+              <a:rPr lang="en-US"/>
               <a:t>Fourth level</a:t>
             </a:r>
           </a:p>
           <a:p>
             <a:pPr lvl="4"/>
             <a:r>
-              <a:rPr lang="en-US" smtClean="0"/>
+              <a:rPr lang="en-US"/>
               <a:t>Fifth level</a:t>
             </a:r>
-            <a:endParaRPr lang="en-US"/>
           </a:p>
         </p:txBody>
       </p:sp>
@@ -4995,7 +5042,7 @@
             <a:fld id="{1D8BD707-D9CF-40AE-B4C6-C98DA3205C09}" type="datetimeFigureOut">
               <a:rPr lang="en-US" smtClean="0"/>
               <a:pPr/>
-              <a:t>8/1/2011</a:t>
+              <a:t>4/20/2026</a:t>
             </a:fld>
             <a:endParaRPr lang="en-US"/>
           </a:p>
@@ -5074,7 +5121,7 @@
             <a:fld id="{B6F15528-21DE-4FAA-801E-634DDDAF4B2B}" type="slidenum">
               <a:rPr lang="en-US" smtClean="0"/>
               <a:pPr/>
-              <a:t>‹#›</a:t>
+              <a:t>‹nº›</a:t>
             </a:fld>
             <a:endParaRPr lang="en-US"/>
           </a:p>
@@ -5350,7 +5397,7 @@
 </file>
 
 <file path=ppt/slides/slide1.xml><?xml version="1.0" encoding="utf-8"?>
-<p:sld xmlns:p="http://schemas.openxmlformats.org/presentationml/2006/main" xmlns:a="http://schemas.openxmlformats.org/drawingml/2006/main" xmlns:r="http://schemas.openxmlformats.org/officeDocument/2006/relationships">
+<p:sld xmlns:a="http://schemas.openxmlformats.org/drawingml/2006/main" xmlns:r="http://schemas.openxmlformats.org/officeDocument/2006/relationships" xmlns:p="http://schemas.openxmlformats.org/presentationml/2006/main">
   <p:cSld>
     <p:spTree>
       <p:nvGrpSpPr>
@@ -5368,12 +5415,12 @@
       </p:grpSpPr>
       <p:grpSp>
         <p:nvGrpSpPr>
-          <p:cNvPr name="Group 2" id="2"/>
+          <p:cNvPr id="2" name="Group 2"/>
           <p:cNvGrpSpPr/>
           <p:nvPr/>
         </p:nvGrpSpPr>
         <p:grpSpPr>
-          <a:xfrm rot="0">
+          <a:xfrm>
             <a:off x="669798" y="685800"/>
             <a:ext cx="5554980" cy="142494"/>
             <a:chOff x="0" y="0"/>
@@ -5382,12 +5429,12 @@
         </p:grpSpPr>
         <p:sp>
           <p:nvSpPr>
-            <p:cNvPr name="Freeform 3" id="3"/>
+            <p:cNvPr id="3" name="Freeform 3"/>
             <p:cNvSpPr/>
             <p:nvPr/>
           </p:nvSpPr>
           <p:spPr>
-            <a:xfrm flipH="false" flipV="false" rot="0">
+            <a:xfrm>
               <a:off x="0" y="0"/>
               <a:ext cx="7406640" cy="189992"/>
             </a:xfrm>
@@ -5396,9 +5443,9 @@
               <a:gdLst/>
               <a:ahLst/>
               <a:cxnLst/>
-              <a:rect r="r" b="b" t="t" l="l"/>
+              <a:rect l="l" t="t" r="r" b="b"/>
               <a:pathLst>
-                <a:path h="189992" w="7406640">
+                <a:path w="7406640" h="189992">
                   <a:moveTo>
                     <a:pt x="0" y="0"/>
                   </a:moveTo>
@@ -5423,12 +5470,12 @@
       </p:grpSp>
       <p:grpSp>
         <p:nvGrpSpPr>
-          <p:cNvPr name="Group 4" id="4"/>
+          <p:cNvPr id="4" name="Group 4"/>
           <p:cNvGrpSpPr/>
           <p:nvPr/>
         </p:nvGrpSpPr>
         <p:grpSpPr>
-          <a:xfrm rot="0">
+          <a:xfrm>
             <a:off x="12063222" y="680466"/>
             <a:ext cx="5554980" cy="147828"/>
             <a:chOff x="0" y="0"/>
@@ -5437,12 +5484,12 @@
         </p:grpSpPr>
         <p:sp>
           <p:nvSpPr>
-            <p:cNvPr name="Freeform 5" id="5"/>
+            <p:cNvPr id="5" name="Freeform 5"/>
             <p:cNvSpPr/>
             <p:nvPr/>
           </p:nvSpPr>
           <p:spPr>
-            <a:xfrm flipH="false" flipV="false" rot="0">
+            <a:xfrm>
               <a:off x="0" y="0"/>
               <a:ext cx="7406640" cy="197104"/>
             </a:xfrm>
@@ -5451,9 +5498,9 @@
               <a:gdLst/>
               <a:ahLst/>
               <a:cxnLst/>
-              <a:rect r="r" b="b" t="t" l="l"/>
+              <a:rect l="l" t="t" r="r" b="b"/>
               <a:pathLst>
-                <a:path h="197104" w="7406640">
+                <a:path w="7406640" h="197104">
                   <a:moveTo>
                     <a:pt x="0" y="0"/>
                   </a:moveTo>
@@ -5478,12 +5525,12 @@
       </p:grpSp>
       <p:grpSp>
         <p:nvGrpSpPr>
-          <p:cNvPr name="Group 6" id="6"/>
+          <p:cNvPr id="6" name="Group 6"/>
           <p:cNvGrpSpPr/>
           <p:nvPr/>
         </p:nvGrpSpPr>
         <p:grpSpPr>
-          <a:xfrm rot="0">
+          <a:xfrm>
             <a:off x="6362748" y="685800"/>
             <a:ext cx="5554980" cy="137160"/>
             <a:chOff x="0" y="0"/>
@@ -5492,12 +5539,12 @@
         </p:grpSpPr>
         <p:sp>
           <p:nvSpPr>
-            <p:cNvPr name="Freeform 7" id="7"/>
+            <p:cNvPr id="7" name="Freeform 7"/>
             <p:cNvSpPr/>
             <p:nvPr/>
           </p:nvSpPr>
           <p:spPr>
-            <a:xfrm flipH="false" flipV="false" rot="0">
+            <a:xfrm>
               <a:off x="0" y="0"/>
               <a:ext cx="7406640" cy="182880"/>
             </a:xfrm>
@@ -5506,9 +5553,9 @@
               <a:gdLst/>
               <a:ahLst/>
               <a:cxnLst/>
-              <a:rect r="r" b="b" t="t" l="l"/>
+              <a:rect l="l" t="t" r="r" b="b"/>
               <a:pathLst>
-                <a:path h="182880" w="7406640">
+                <a:path w="7406640" h="182880">
                   <a:moveTo>
                     <a:pt x="0" y="0"/>
                   </a:moveTo>
@@ -5533,12 +5580,12 @@
       </p:grpSp>
       <p:sp>
         <p:nvSpPr>
-          <p:cNvPr name="TextBox 8" id="8"/>
-          <p:cNvSpPr txBox="true"/>
-          <p:nvPr/>
-        </p:nvSpPr>
-        <p:spPr>
-          <a:xfrm rot="0">
+          <p:cNvPr id="8" name="TextBox 8"/>
+          <p:cNvSpPr txBox="1"/>
+          <p:nvPr/>
+        </p:nvSpPr>
+        <p:spPr>
+          <a:xfrm>
             <a:off x="4437875" y="771144"/>
             <a:ext cx="13180327" cy="900140"/>
           </a:xfrm>
@@ -5547,7 +5594,7 @@
           </a:prstGeom>
         </p:spPr>
         <p:txBody>
-          <a:bodyPr anchor="t" rtlCol="false" tIns="0" lIns="0" bIns="0" rIns="0">
+          <a:bodyPr lIns="0" tIns="0" rIns="0" bIns="0" rtlCol="0" anchor="t">
             <a:spAutoFit/>
           </a:bodyPr>
           <a:lstStyle/>
@@ -5574,12 +5621,12 @@
       </p:sp>
       <p:sp>
         <p:nvSpPr>
-          <p:cNvPr name="TextBox 9" id="9"/>
-          <p:cNvSpPr txBox="true"/>
-          <p:nvPr/>
-        </p:nvSpPr>
-        <p:spPr>
-          <a:xfrm rot="0">
+          <p:cNvPr id="9" name="TextBox 9"/>
+          <p:cNvSpPr txBox="1"/>
+          <p:nvPr/>
+        </p:nvSpPr>
+        <p:spPr>
+          <a:xfrm>
             <a:off x="329298" y="3392995"/>
             <a:ext cx="6780162" cy="3443849"/>
           </a:xfrm>
@@ -5588,7 +5635,7 @@
           </a:prstGeom>
         </p:spPr>
         <p:txBody>
-          <a:bodyPr anchor="t" rtlCol="false" tIns="0" lIns="0" bIns="0" rIns="0">
+          <a:bodyPr lIns="0" tIns="0" rIns="0" bIns="0" rtlCol="0" anchor="t">
             <a:spAutoFit/>
           </a:bodyPr>
           <a:lstStyle/>
@@ -5615,12 +5662,12 @@
       </p:sp>
       <p:sp>
         <p:nvSpPr>
-          <p:cNvPr name="TextBox 10" id="10"/>
-          <p:cNvSpPr txBox="true"/>
-          <p:nvPr/>
-        </p:nvSpPr>
-        <p:spPr>
-          <a:xfrm rot="0">
+          <p:cNvPr id="10" name="TextBox 10"/>
+          <p:cNvSpPr txBox="1"/>
+          <p:nvPr/>
+        </p:nvSpPr>
+        <p:spPr>
+          <a:xfrm>
             <a:off x="7357042" y="9030942"/>
             <a:ext cx="2455050" cy="414365"/>
           </a:xfrm>
@@ -5629,7 +5676,7 @@
           </a:prstGeom>
         </p:spPr>
         <p:txBody>
-          <a:bodyPr anchor="t" rtlCol="false" tIns="0" lIns="0" bIns="0" rIns="0">
+          <a:bodyPr lIns="0" tIns="0" rIns="0" bIns="0" rtlCol="0" anchor="t">
             <a:spAutoFit/>
           </a:bodyPr>
           <a:lstStyle/>
@@ -5640,7 +5687,7 @@
               </a:lnSpc>
             </a:pPr>
             <a:r>
-              <a:rPr lang="en-US" sz="2187" b="true">
+              <a:rPr lang="en-US" sz="2187" b="1">
                 <a:solidFill>
                   <a:srgbClr val="000000"/>
                 </a:solidFill>
@@ -5656,12 +5703,12 @@
       </p:sp>
       <p:grpSp>
         <p:nvGrpSpPr>
-          <p:cNvPr name="Group 11" id="11"/>
+          <p:cNvPr id="11" name="Group 11"/>
           <p:cNvGrpSpPr/>
           <p:nvPr/>
         </p:nvGrpSpPr>
         <p:grpSpPr>
-          <a:xfrm rot="0">
+          <a:xfrm>
             <a:off x="7109460" y="1824250"/>
             <a:ext cx="10654897" cy="6638500"/>
             <a:chOff x="0" y="0"/>
@@ -5670,12 +5717,12 @@
         </p:grpSpPr>
         <p:sp>
           <p:nvSpPr>
-            <p:cNvPr name="Freeform 12" id="12"/>
+            <p:cNvPr id="12" name="Freeform 12"/>
             <p:cNvSpPr/>
             <p:nvPr/>
           </p:nvSpPr>
           <p:spPr>
-            <a:xfrm flipH="false" flipV="false" rot="0">
+            <a:xfrm>
               <a:off x="0" y="0"/>
               <a:ext cx="13401039" cy="8349488"/>
             </a:xfrm>
@@ -5684,9 +5731,9 @@
               <a:gdLst/>
               <a:ahLst/>
               <a:cxnLst/>
-              <a:rect r="r" b="b" t="t" l="l"/>
+              <a:rect l="l" t="t" r="r" b="b"/>
               <a:pathLst>
-                <a:path h="8349488" w="13401039">
+                <a:path w="13401039" h="8349488">
                   <a:moveTo>
                     <a:pt x="0" y="0"/>
                   </a:moveTo>
@@ -5709,7 +5756,7 @@
             <a:blipFill>
               <a:blip r:embed="rId3"/>
               <a:stretch>
-                <a:fillRect l="0" t="0" r="0" b="0"/>
+                <a:fillRect/>
               </a:stretch>
             </a:blipFill>
           </p:spPr>
@@ -5717,12 +5764,12 @@
       </p:grpSp>
       <p:grpSp>
         <p:nvGrpSpPr>
-          <p:cNvPr name="Group 13" id="13"/>
+          <p:cNvPr id="13" name="Group 13"/>
           <p:cNvGrpSpPr/>
           <p:nvPr/>
         </p:nvGrpSpPr>
         <p:grpSpPr>
-          <a:xfrm rot="0">
+          <a:xfrm>
             <a:off x="329298" y="276859"/>
             <a:ext cx="2788849" cy="2788849"/>
             <a:chOff x="0" y="0"/>
@@ -5731,12 +5778,12 @@
         </p:grpSpPr>
         <p:sp>
           <p:nvSpPr>
-            <p:cNvPr name="Freeform 14" id="14"/>
+            <p:cNvPr id="14" name="Freeform 14"/>
             <p:cNvSpPr/>
             <p:nvPr/>
           </p:nvSpPr>
           <p:spPr>
-            <a:xfrm flipH="false" flipV="false" rot="0">
+            <a:xfrm>
               <a:off x="0" y="0"/>
               <a:ext cx="8796401" cy="8796401"/>
             </a:xfrm>
@@ -5745,9 +5792,9 @@
               <a:gdLst/>
               <a:ahLst/>
               <a:cxnLst/>
-              <a:rect r="r" b="b" t="t" l="l"/>
+              <a:rect l="l" t="t" r="r" b="b"/>
               <a:pathLst>
-                <a:path h="8796401" w="8796401">
+                <a:path w="8796401" h="8796401">
                   <a:moveTo>
                     <a:pt x="0" y="0"/>
                   </a:moveTo>
@@ -5770,7 +5817,7 @@
             <a:blipFill>
               <a:blip r:embed="rId4"/>
               <a:stretch>
-                <a:fillRect l="0" t="0" r="0" b="0"/>
+                <a:fillRect/>
               </a:stretch>
             </a:blipFill>
           </p:spPr>
@@ -5785,7 +5832,7 @@
 </file>
 
 <file path=ppt/slides/slide10.xml><?xml version="1.0" encoding="utf-8"?>
-<p:sld xmlns:p="http://schemas.openxmlformats.org/presentationml/2006/main" xmlns:a="http://schemas.openxmlformats.org/drawingml/2006/main" xmlns:r="http://schemas.openxmlformats.org/officeDocument/2006/relationships">
+<p:sld xmlns:a="http://schemas.openxmlformats.org/drawingml/2006/main" xmlns:r="http://schemas.openxmlformats.org/officeDocument/2006/relationships" xmlns:p="http://schemas.openxmlformats.org/presentationml/2006/main">
   <p:cSld>
     <p:spTree>
       <p:nvGrpSpPr>
@@ -5803,12 +5850,12 @@
       </p:grpSpPr>
       <p:grpSp>
         <p:nvGrpSpPr>
-          <p:cNvPr name="Group 2" id="2"/>
+          <p:cNvPr id="2" name="Group 2"/>
           <p:cNvGrpSpPr/>
           <p:nvPr/>
         </p:nvGrpSpPr>
         <p:grpSpPr>
-          <a:xfrm rot="0">
+          <a:xfrm>
             <a:off x="669798" y="685800"/>
             <a:ext cx="5554980" cy="142494"/>
             <a:chOff x="0" y="0"/>
@@ -5817,12 +5864,12 @@
         </p:grpSpPr>
         <p:sp>
           <p:nvSpPr>
-            <p:cNvPr name="Freeform 3" id="3"/>
+            <p:cNvPr id="3" name="Freeform 3"/>
             <p:cNvSpPr/>
             <p:nvPr/>
           </p:nvSpPr>
           <p:spPr>
-            <a:xfrm flipH="false" flipV="false" rot="0">
+            <a:xfrm>
               <a:off x="0" y="0"/>
               <a:ext cx="7406640" cy="189992"/>
             </a:xfrm>
@@ -5831,9 +5878,9 @@
               <a:gdLst/>
               <a:ahLst/>
               <a:cxnLst/>
-              <a:rect r="r" b="b" t="t" l="l"/>
+              <a:rect l="l" t="t" r="r" b="b"/>
               <a:pathLst>
-                <a:path h="189992" w="7406640">
+                <a:path w="7406640" h="189992">
                   <a:moveTo>
                     <a:pt x="0" y="0"/>
                   </a:moveTo>
@@ -5858,12 +5905,12 @@
       </p:grpSp>
       <p:grpSp>
         <p:nvGrpSpPr>
-          <p:cNvPr name="Group 4" id="4"/>
+          <p:cNvPr id="4" name="Group 4"/>
           <p:cNvGrpSpPr/>
           <p:nvPr/>
         </p:nvGrpSpPr>
         <p:grpSpPr>
-          <a:xfrm rot="0">
+          <a:xfrm>
             <a:off x="12063222" y="680466"/>
             <a:ext cx="5554980" cy="147828"/>
             <a:chOff x="0" y="0"/>
@@ -5872,12 +5919,12 @@
         </p:grpSpPr>
         <p:sp>
           <p:nvSpPr>
-            <p:cNvPr name="Freeform 5" id="5"/>
+            <p:cNvPr id="5" name="Freeform 5"/>
             <p:cNvSpPr/>
             <p:nvPr/>
           </p:nvSpPr>
           <p:spPr>
-            <a:xfrm flipH="false" flipV="false" rot="0">
+            <a:xfrm>
               <a:off x="0" y="0"/>
               <a:ext cx="7406640" cy="197104"/>
             </a:xfrm>
@@ -5886,9 +5933,9 @@
               <a:gdLst/>
               <a:ahLst/>
               <a:cxnLst/>
-              <a:rect r="r" b="b" t="t" l="l"/>
+              <a:rect l="l" t="t" r="r" b="b"/>
               <a:pathLst>
-                <a:path h="197104" w="7406640">
+                <a:path w="7406640" h="197104">
                   <a:moveTo>
                     <a:pt x="0" y="0"/>
                   </a:moveTo>
@@ -5913,12 +5960,12 @@
       </p:grpSp>
       <p:grpSp>
         <p:nvGrpSpPr>
-          <p:cNvPr name="Group 6" id="6"/>
+          <p:cNvPr id="6" name="Group 6"/>
           <p:cNvGrpSpPr/>
           <p:nvPr/>
         </p:nvGrpSpPr>
         <p:grpSpPr>
-          <a:xfrm rot="0">
+          <a:xfrm>
             <a:off x="6362748" y="685800"/>
             <a:ext cx="5554980" cy="137160"/>
             <a:chOff x="0" y="0"/>
@@ -5927,12 +5974,12 @@
         </p:grpSpPr>
         <p:sp>
           <p:nvSpPr>
-            <p:cNvPr name="Freeform 7" id="7"/>
+            <p:cNvPr id="7" name="Freeform 7"/>
             <p:cNvSpPr/>
             <p:nvPr/>
           </p:nvSpPr>
           <p:spPr>
-            <a:xfrm flipH="false" flipV="false" rot="0">
+            <a:xfrm>
               <a:off x="0" y="0"/>
               <a:ext cx="7406640" cy="182880"/>
             </a:xfrm>
@@ -5941,9 +5988,9 @@
               <a:gdLst/>
               <a:ahLst/>
               <a:cxnLst/>
-              <a:rect r="r" b="b" t="t" l="l"/>
+              <a:rect l="l" t="t" r="r" b="b"/>
               <a:pathLst>
-                <a:path h="182880" w="7406640">
+                <a:path w="7406640" h="182880">
                   <a:moveTo>
                     <a:pt x="0" y="0"/>
                   </a:moveTo>
@@ -5968,21 +6015,21 @@
       </p:grpSp>
       <p:sp>
         <p:nvSpPr>
-          <p:cNvPr name="TextBox 8" id="8"/>
-          <p:cNvSpPr txBox="true"/>
-          <p:nvPr/>
-        </p:nvSpPr>
-        <p:spPr>
-          <a:xfrm rot="0">
-            <a:off x="662940" y="444437"/>
-            <a:ext cx="8961120" cy="1056580"/>
+          <p:cNvPr id="8" name="TextBox 8"/>
+          <p:cNvSpPr txBox="1"/>
+          <p:nvPr/>
+        </p:nvSpPr>
+        <p:spPr>
+          <a:xfrm>
+            <a:off x="669798" y="617791"/>
+            <a:ext cx="8961120" cy="780406"/>
           </a:xfrm>
           <a:prstGeom prst="rect">
             <a:avLst/>
           </a:prstGeom>
         </p:spPr>
         <p:txBody>
-          <a:bodyPr anchor="t" rtlCol="false" tIns="0" lIns="0" bIns="0" rIns="0">
+          <a:bodyPr lIns="0" tIns="0" rIns="0" bIns="0" rtlCol="0" anchor="t">
             <a:spAutoFit/>
           </a:bodyPr>
           <a:lstStyle/>
@@ -5993,28 +6040,34 @@
               </a:lnSpc>
             </a:pPr>
             <a:r>
-              <a:rPr lang="en-US" sz="4000">
-                <a:solidFill>
-                  <a:srgbClr val="97B8FF"/>
-                </a:solidFill>
+              <a:rPr lang="en-US" sz="4000" dirty="0" err="1">
                 <a:latin typeface="Arimo"/>
                 <a:ea typeface="Arimo"/>
                 <a:cs typeface="Arimo"/>
                 <a:sym typeface="Arimo"/>
               </a:rPr>
-              <a:t>Diagrama do Banco de Dados</a:t>
+              <a:t>Diagrama</a:t>
+            </a:r>
+            <a:r>
+              <a:rPr lang="en-US" sz="4000" dirty="0">
+                <a:latin typeface="Arimo"/>
+                <a:ea typeface="Arimo"/>
+                <a:cs typeface="Arimo"/>
+                <a:sym typeface="Arimo"/>
+              </a:rPr>
+              <a:t> do Banco de Dados</a:t>
             </a:r>
           </a:p>
         </p:txBody>
       </p:sp>
       <p:grpSp>
         <p:nvGrpSpPr>
-          <p:cNvPr name="Group 9" id="9"/>
+          <p:cNvPr id="9" name="Group 9"/>
           <p:cNvGrpSpPr/>
           <p:nvPr/>
         </p:nvGrpSpPr>
         <p:grpSpPr>
-          <a:xfrm rot="0">
+          <a:xfrm>
             <a:off x="571500" y="1987201"/>
             <a:ext cx="15692438" cy="7682008"/>
             <a:chOff x="0" y="0"/>
@@ -6023,12 +6076,12 @@
         </p:grpSpPr>
         <p:sp>
           <p:nvSpPr>
-            <p:cNvPr name="Freeform 10" id="10"/>
+            <p:cNvPr id="10" name="Freeform 10"/>
             <p:cNvSpPr/>
             <p:nvPr/>
           </p:nvSpPr>
           <p:spPr>
-            <a:xfrm flipH="false" flipV="false" rot="0">
+            <a:xfrm>
               <a:off x="0" y="0"/>
               <a:ext cx="20923250" cy="10242677"/>
             </a:xfrm>
@@ -6037,9 +6090,9 @@
               <a:gdLst/>
               <a:ahLst/>
               <a:cxnLst/>
-              <a:rect r="r" b="b" t="t" l="l"/>
+              <a:rect l="l" t="t" r="r" b="b"/>
               <a:pathLst>
-                <a:path h="10242677" w="20923250">
+                <a:path w="20923250" h="10242677">
                   <a:moveTo>
                     <a:pt x="0" y="0"/>
                   </a:moveTo>
@@ -6062,7 +6115,7 @@
             <a:blipFill>
               <a:blip r:embed="rId2"/>
               <a:stretch>
-                <a:fillRect l="0" t="0" r="0" b="0"/>
+                <a:fillRect/>
               </a:stretch>
             </a:blipFill>
           </p:spPr>
@@ -6077,7 +6130,7 @@
 </file>
 
 <file path=ppt/slides/slide11.xml><?xml version="1.0" encoding="utf-8"?>
-<p:sld xmlns:p="http://schemas.openxmlformats.org/presentationml/2006/main" xmlns:a="http://schemas.openxmlformats.org/drawingml/2006/main" xmlns:r="http://schemas.openxmlformats.org/officeDocument/2006/relationships">
+<p:sld xmlns:a="http://schemas.openxmlformats.org/drawingml/2006/main" xmlns:r="http://schemas.openxmlformats.org/officeDocument/2006/relationships" xmlns:p="http://schemas.openxmlformats.org/presentationml/2006/main">
   <p:cSld>
     <p:spTree>
       <p:nvGrpSpPr>
@@ -6095,12 +6148,12 @@
       </p:grpSpPr>
       <p:grpSp>
         <p:nvGrpSpPr>
-          <p:cNvPr name="Group 2" id="2"/>
+          <p:cNvPr id="2" name="Group 2"/>
           <p:cNvGrpSpPr/>
           <p:nvPr/>
         </p:nvGrpSpPr>
         <p:grpSpPr>
-          <a:xfrm rot="0">
+          <a:xfrm>
             <a:off x="669798" y="685800"/>
             <a:ext cx="5554980" cy="142494"/>
             <a:chOff x="0" y="0"/>
@@ -6109,12 +6162,12 @@
         </p:grpSpPr>
         <p:sp>
           <p:nvSpPr>
-            <p:cNvPr name="Freeform 3" id="3"/>
+            <p:cNvPr id="3" name="Freeform 3"/>
             <p:cNvSpPr/>
             <p:nvPr/>
           </p:nvSpPr>
           <p:spPr>
-            <a:xfrm flipH="false" flipV="false" rot="0">
+            <a:xfrm>
               <a:off x="0" y="0"/>
               <a:ext cx="7406640" cy="189992"/>
             </a:xfrm>
@@ -6123,9 +6176,9 @@
               <a:gdLst/>
               <a:ahLst/>
               <a:cxnLst/>
-              <a:rect r="r" b="b" t="t" l="l"/>
+              <a:rect l="l" t="t" r="r" b="b"/>
               <a:pathLst>
-                <a:path h="189992" w="7406640">
+                <a:path w="7406640" h="189992">
                   <a:moveTo>
                     <a:pt x="0" y="0"/>
                   </a:moveTo>
@@ -6150,12 +6203,12 @@
       </p:grpSp>
       <p:grpSp>
         <p:nvGrpSpPr>
-          <p:cNvPr name="Group 4" id="4"/>
+          <p:cNvPr id="4" name="Group 4"/>
           <p:cNvGrpSpPr/>
           <p:nvPr/>
         </p:nvGrpSpPr>
         <p:grpSpPr>
-          <a:xfrm rot="0">
+          <a:xfrm>
             <a:off x="12063222" y="680466"/>
             <a:ext cx="5554980" cy="147828"/>
             <a:chOff x="0" y="0"/>
@@ -6164,12 +6217,12 @@
         </p:grpSpPr>
         <p:sp>
           <p:nvSpPr>
-            <p:cNvPr name="Freeform 5" id="5"/>
+            <p:cNvPr id="5" name="Freeform 5"/>
             <p:cNvSpPr/>
             <p:nvPr/>
           </p:nvSpPr>
           <p:spPr>
-            <a:xfrm flipH="false" flipV="false" rot="0">
+            <a:xfrm>
               <a:off x="0" y="0"/>
               <a:ext cx="7406640" cy="197104"/>
             </a:xfrm>
@@ -6178,9 +6231,9 @@
               <a:gdLst/>
               <a:ahLst/>
               <a:cxnLst/>
-              <a:rect r="r" b="b" t="t" l="l"/>
+              <a:rect l="l" t="t" r="r" b="b"/>
               <a:pathLst>
-                <a:path h="197104" w="7406640">
+                <a:path w="7406640" h="197104">
                   <a:moveTo>
                     <a:pt x="0" y="0"/>
                   </a:moveTo>
@@ -6205,12 +6258,12 @@
       </p:grpSp>
       <p:grpSp>
         <p:nvGrpSpPr>
-          <p:cNvPr name="Group 6" id="6"/>
+          <p:cNvPr id="6" name="Group 6"/>
           <p:cNvGrpSpPr/>
           <p:nvPr/>
         </p:nvGrpSpPr>
         <p:grpSpPr>
-          <a:xfrm rot="0">
+          <a:xfrm>
             <a:off x="6362748" y="685800"/>
             <a:ext cx="5554980" cy="137160"/>
             <a:chOff x="0" y="0"/>
@@ -6219,12 +6272,12 @@
         </p:grpSpPr>
         <p:sp>
           <p:nvSpPr>
-            <p:cNvPr name="Freeform 7" id="7"/>
+            <p:cNvPr id="7" name="Freeform 7"/>
             <p:cNvSpPr/>
             <p:nvPr/>
           </p:nvSpPr>
           <p:spPr>
-            <a:xfrm flipH="false" flipV="false" rot="0">
+            <a:xfrm>
               <a:off x="0" y="0"/>
               <a:ext cx="7406640" cy="182880"/>
             </a:xfrm>
@@ -6233,9 +6286,9 @@
               <a:gdLst/>
               <a:ahLst/>
               <a:cxnLst/>
-              <a:rect r="r" b="b" t="t" l="l"/>
+              <a:rect l="l" t="t" r="r" b="b"/>
               <a:pathLst>
-                <a:path h="182880" w="7406640">
+                <a:path w="7406640" h="182880">
                   <a:moveTo>
                     <a:pt x="0" y="0"/>
                   </a:moveTo>
@@ -6260,12 +6313,12 @@
       </p:grpSp>
       <p:grpSp>
         <p:nvGrpSpPr>
-          <p:cNvPr name="Group 8" id="8"/>
+          <p:cNvPr id="8" name="Group 8"/>
           <p:cNvGrpSpPr/>
           <p:nvPr/>
         </p:nvGrpSpPr>
         <p:grpSpPr>
-          <a:xfrm rot="0">
+          <a:xfrm>
             <a:off x="11430000" y="0"/>
             <a:ext cx="6858000" cy="10287000"/>
             <a:chOff x="0" y="0"/>
@@ -6274,12 +6327,12 @@
         </p:grpSpPr>
         <p:sp>
           <p:nvSpPr>
-            <p:cNvPr name="Freeform 9" id="9" descr="preencoded.png"/>
+            <p:cNvPr id="9" name="Freeform 9" descr="preencoded.png"/>
             <p:cNvSpPr/>
             <p:nvPr/>
           </p:nvSpPr>
           <p:spPr>
-            <a:xfrm flipH="false" flipV="false" rot="0">
+            <a:xfrm>
               <a:off x="0" y="0"/>
               <a:ext cx="9144000" cy="13716000"/>
             </a:xfrm>
@@ -6288,9 +6341,9 @@
               <a:gdLst/>
               <a:ahLst/>
               <a:cxnLst/>
-              <a:rect r="r" b="b" t="t" l="l"/>
+              <a:rect l="l" t="t" r="r" b="b"/>
               <a:pathLst>
-                <a:path h="13716000" w="9144000">
+                <a:path w="9144000" h="13716000">
                   <a:moveTo>
                     <a:pt x="0" y="0"/>
                   </a:moveTo>
@@ -6313,7 +6366,7 @@
             <a:blipFill>
               <a:blip r:embed="rId3"/>
               <a:stretch>
-                <a:fillRect l="0" t="0" r="0" b="0"/>
+                <a:fillRect/>
               </a:stretch>
             </a:blipFill>
           </p:spPr>
@@ -6321,12 +6374,12 @@
       </p:grpSp>
       <p:grpSp>
         <p:nvGrpSpPr>
-          <p:cNvPr name="Group 10" id="10"/>
+          <p:cNvPr id="10" name="Group 10"/>
           <p:cNvGrpSpPr/>
           <p:nvPr/>
         </p:nvGrpSpPr>
         <p:grpSpPr>
-          <a:xfrm rot="0">
+          <a:xfrm>
             <a:off x="11430000" y="0"/>
             <a:ext cx="6858000" cy="10287000"/>
             <a:chOff x="0" y="0"/>
@@ -6335,12 +6388,12 @@
         </p:grpSpPr>
         <p:sp>
           <p:nvSpPr>
-            <p:cNvPr name="Freeform 11" id="11"/>
+            <p:cNvPr id="11" name="Freeform 11"/>
             <p:cNvSpPr/>
             <p:nvPr/>
           </p:nvSpPr>
           <p:spPr>
-            <a:xfrm flipH="false" flipV="false" rot="0">
+            <a:xfrm>
               <a:off x="0" y="0"/>
               <a:ext cx="9144000" cy="13716000"/>
             </a:xfrm>
@@ -6349,9 +6402,9 @@
               <a:gdLst/>
               <a:ahLst/>
               <a:cxnLst/>
-              <a:rect r="r" b="b" t="t" l="l"/>
+              <a:rect l="l" t="t" r="r" b="b"/>
               <a:pathLst>
-                <a:path h="13716000" w="9144000">
+                <a:path w="9144000" h="13716000">
                   <a:moveTo>
                     <a:pt x="0" y="0"/>
                   </a:moveTo>
@@ -6376,12 +6429,12 @@
       </p:grpSp>
       <p:grpSp>
         <p:nvGrpSpPr>
-          <p:cNvPr name="Group 12" id="12"/>
+          <p:cNvPr id="12" name="Group 12"/>
           <p:cNvGrpSpPr/>
           <p:nvPr/>
         </p:nvGrpSpPr>
         <p:grpSpPr>
-          <a:xfrm rot="0">
+          <a:xfrm>
             <a:off x="11430000" y="0"/>
             <a:ext cx="6858000" cy="10287000"/>
             <a:chOff x="0" y="0"/>
@@ -6390,12 +6443,12 @@
         </p:grpSpPr>
         <p:sp>
           <p:nvSpPr>
-            <p:cNvPr name="Freeform 13" id="13" descr="preencoded.png"/>
+            <p:cNvPr id="13" name="Freeform 13" descr="preencoded.png"/>
             <p:cNvSpPr/>
             <p:nvPr/>
           </p:nvSpPr>
           <p:spPr>
-            <a:xfrm flipH="false" flipV="false" rot="0">
+            <a:xfrm>
               <a:off x="0" y="0"/>
               <a:ext cx="9144000" cy="13716000"/>
             </a:xfrm>
@@ -6404,9 +6457,9 @@
               <a:gdLst/>
               <a:ahLst/>
               <a:cxnLst/>
-              <a:rect r="r" b="b" t="t" l="l"/>
+              <a:rect l="l" t="t" r="r" b="b"/>
               <a:pathLst>
-                <a:path h="13716000" w="9144000">
+                <a:path w="9144000" h="13716000">
                   <a:moveTo>
                     <a:pt x="0" y="0"/>
                   </a:moveTo>
@@ -6429,7 +6482,7 @@
             <a:blipFill>
               <a:blip r:embed="rId4"/>
               <a:stretch>
-                <a:fillRect l="0" t="0" r="0" b="0"/>
+                <a:fillRect/>
               </a:stretch>
             </a:blipFill>
           </p:spPr>
@@ -6437,12 +6490,12 @@
       </p:grpSp>
       <p:sp>
         <p:nvSpPr>
-          <p:cNvPr name="TextBox 14" id="14"/>
-          <p:cNvSpPr txBox="true"/>
-          <p:nvPr/>
-        </p:nvSpPr>
-        <p:spPr>
-          <a:xfrm rot="0">
+          <p:cNvPr id="14" name="TextBox 14"/>
+          <p:cNvSpPr txBox="1"/>
+          <p:nvPr/>
+        </p:nvSpPr>
+        <p:spPr>
+          <a:xfrm>
             <a:off x="992238" y="1163393"/>
             <a:ext cx="9445523" cy="1829095"/>
           </a:xfrm>
@@ -6451,7 +6504,7 @@
           </a:prstGeom>
         </p:spPr>
         <p:txBody>
-          <a:bodyPr anchor="t" rtlCol="false" tIns="0" lIns="0" bIns="0" rIns="0">
+          <a:bodyPr lIns="0" tIns="0" rIns="0" bIns="0" rtlCol="0" anchor="t">
             <a:spAutoFit/>
           </a:bodyPr>
           <a:lstStyle/>
@@ -6478,12 +6531,12 @@
       </p:sp>
       <p:sp>
         <p:nvSpPr>
-          <p:cNvPr name="TextBox 15" id="15"/>
-          <p:cNvSpPr txBox="true"/>
-          <p:nvPr/>
-        </p:nvSpPr>
-        <p:spPr>
-          <a:xfrm rot="0">
+          <p:cNvPr id="15" name="TextBox 15"/>
+          <p:cNvSpPr txBox="1"/>
+          <p:nvPr/>
+        </p:nvSpPr>
+        <p:spPr>
+          <a:xfrm>
             <a:off x="992238" y="3663105"/>
             <a:ext cx="3544043" cy="481012"/>
           </a:xfrm>
@@ -6492,7 +6545,7 @@
           </a:prstGeom>
         </p:spPr>
         <p:txBody>
-          <a:bodyPr anchor="t" rtlCol="false" tIns="0" lIns="0" bIns="0" rIns="0">
+          <a:bodyPr lIns="0" tIns="0" rIns="0" bIns="0" rtlCol="0" anchor="t">
             <a:spAutoFit/>
           </a:bodyPr>
           <a:lstStyle/>
@@ -6519,12 +6572,12 @@
       </p:sp>
       <p:sp>
         <p:nvSpPr>
-          <p:cNvPr name="TextBox 16" id="16"/>
-          <p:cNvSpPr txBox="true"/>
-          <p:nvPr/>
-        </p:nvSpPr>
-        <p:spPr>
-          <a:xfrm rot="0">
+          <p:cNvPr id="16" name="TextBox 16"/>
+          <p:cNvSpPr txBox="1"/>
+          <p:nvPr/>
+        </p:nvSpPr>
+        <p:spPr>
+          <a:xfrm>
             <a:off x="992238" y="4341914"/>
             <a:ext cx="4376890" cy="992981"/>
           </a:xfrm>
@@ -6533,7 +6586,7 @@
           </a:prstGeom>
         </p:spPr>
         <p:txBody>
-          <a:bodyPr anchor="t" rtlCol="false" tIns="0" lIns="0" bIns="0" rIns="0">
+          <a:bodyPr lIns="0" tIns="0" rIns="0" bIns="0" rtlCol="0" anchor="t">
             <a:spAutoFit/>
           </a:bodyPr>
           <a:lstStyle/>
@@ -6560,12 +6613,12 @@
       </p:sp>
       <p:sp>
         <p:nvSpPr>
-          <p:cNvPr name="TextBox 17" id="17"/>
-          <p:cNvSpPr txBox="true"/>
-          <p:nvPr/>
-        </p:nvSpPr>
-        <p:spPr>
-          <a:xfrm rot="0">
+          <p:cNvPr id="17" name="TextBox 17"/>
+          <p:cNvSpPr txBox="1"/>
+          <p:nvPr/>
+        </p:nvSpPr>
+        <p:spPr>
+          <a:xfrm>
             <a:off x="992238" y="5580307"/>
             <a:ext cx="3544043" cy="481012"/>
           </a:xfrm>
@@ -6574,7 +6627,7 @@
           </a:prstGeom>
         </p:spPr>
         <p:txBody>
-          <a:bodyPr anchor="t" rtlCol="false" tIns="0" lIns="0" bIns="0" rIns="0">
+          <a:bodyPr lIns="0" tIns="0" rIns="0" bIns="0" rtlCol="0" anchor="t">
             <a:spAutoFit/>
           </a:bodyPr>
           <a:lstStyle/>
@@ -6601,12 +6654,12 @@
       </p:sp>
       <p:sp>
         <p:nvSpPr>
-          <p:cNvPr name="TextBox 18" id="18"/>
-          <p:cNvSpPr txBox="true"/>
-          <p:nvPr/>
-        </p:nvSpPr>
-        <p:spPr>
-          <a:xfrm rot="0">
+          <p:cNvPr id="18" name="TextBox 18"/>
+          <p:cNvSpPr txBox="1"/>
+          <p:nvPr/>
+        </p:nvSpPr>
+        <p:spPr>
+          <a:xfrm>
             <a:off x="992238" y="6259116"/>
             <a:ext cx="4376890" cy="539353"/>
           </a:xfrm>
@@ -6615,7 +6668,7 @@
           </a:prstGeom>
         </p:spPr>
         <p:txBody>
-          <a:bodyPr anchor="t" rtlCol="false" tIns="0" lIns="0" bIns="0" rIns="0">
+          <a:bodyPr lIns="0" tIns="0" rIns="0" bIns="0" rtlCol="0" anchor="t">
             <a:spAutoFit/>
           </a:bodyPr>
           <a:lstStyle/>
@@ -6642,12 +6695,12 @@
       </p:sp>
       <p:sp>
         <p:nvSpPr>
-          <p:cNvPr name="TextBox 19" id="19"/>
-          <p:cNvSpPr txBox="true"/>
-          <p:nvPr/>
-        </p:nvSpPr>
-        <p:spPr>
-          <a:xfrm rot="0">
+          <p:cNvPr id="19" name="TextBox 19"/>
+          <p:cNvSpPr txBox="1"/>
+          <p:nvPr/>
+        </p:nvSpPr>
+        <p:spPr>
+          <a:xfrm>
             <a:off x="6070397" y="3663105"/>
             <a:ext cx="3544043" cy="481012"/>
           </a:xfrm>
@@ -6656,7 +6709,7 @@
           </a:prstGeom>
         </p:spPr>
         <p:txBody>
-          <a:bodyPr anchor="t" rtlCol="false" tIns="0" lIns="0" bIns="0" rIns="0">
+          <a:bodyPr lIns="0" tIns="0" rIns="0" bIns="0" rtlCol="0" anchor="t">
             <a:spAutoFit/>
           </a:bodyPr>
           <a:lstStyle/>
@@ -6683,12 +6736,12 @@
       </p:sp>
       <p:sp>
         <p:nvSpPr>
-          <p:cNvPr name="TextBox 20" id="20"/>
-          <p:cNvSpPr txBox="true"/>
-          <p:nvPr/>
-        </p:nvSpPr>
-        <p:spPr>
-          <a:xfrm rot="0">
+          <p:cNvPr id="20" name="TextBox 20"/>
+          <p:cNvSpPr txBox="1"/>
+          <p:nvPr/>
+        </p:nvSpPr>
+        <p:spPr>
+          <a:xfrm>
             <a:off x="6070397" y="4341914"/>
             <a:ext cx="4376890" cy="539353"/>
           </a:xfrm>
@@ -6697,12 +6750,12 @@
           </a:prstGeom>
         </p:spPr>
         <p:txBody>
-          <a:bodyPr anchor="t" rtlCol="false" tIns="0" lIns="0" bIns="0" rIns="0">
+          <a:bodyPr lIns="0" tIns="0" rIns="0" bIns="0" rtlCol="0" anchor="t">
             <a:spAutoFit/>
           </a:bodyPr>
           <a:lstStyle/>
           <a:p>
-            <a:pPr algn="l" marL="329902" indent="-164951" lvl="1">
+            <a:pPr marL="329902" lvl="1" indent="-164951" algn="l">
               <a:lnSpc>
                 <a:spcPts val="3562"/>
               </a:lnSpc>
@@ -6726,12 +6779,12 @@
       </p:sp>
       <p:sp>
         <p:nvSpPr>
-          <p:cNvPr name="TextBox 21" id="21"/>
-          <p:cNvSpPr txBox="true"/>
-          <p:nvPr/>
-        </p:nvSpPr>
-        <p:spPr>
-          <a:xfrm rot="0">
+          <p:cNvPr id="21" name="TextBox 21"/>
+          <p:cNvSpPr txBox="1"/>
+          <p:nvPr/>
+        </p:nvSpPr>
+        <p:spPr>
+          <a:xfrm>
             <a:off x="6070397" y="4894659"/>
             <a:ext cx="4376890" cy="992981"/>
           </a:xfrm>
@@ -6740,12 +6793,12 @@
           </a:prstGeom>
         </p:spPr>
         <p:txBody>
-          <a:bodyPr anchor="t" rtlCol="false" tIns="0" lIns="0" bIns="0" rIns="0">
+          <a:bodyPr lIns="0" tIns="0" rIns="0" bIns="0" rtlCol="0" anchor="t">
             <a:spAutoFit/>
           </a:bodyPr>
           <a:lstStyle/>
           <a:p>
-            <a:pPr algn="l" marL="329902" indent="-164951" lvl="1">
+            <a:pPr marL="329902" lvl="1" indent="-164951" algn="l">
               <a:lnSpc>
                 <a:spcPts val="3562"/>
               </a:lnSpc>
@@ -6769,12 +6822,12 @@
       </p:sp>
       <p:sp>
         <p:nvSpPr>
-          <p:cNvPr name="TextBox 22" id="22"/>
-          <p:cNvSpPr txBox="true"/>
-          <p:nvPr/>
-        </p:nvSpPr>
-        <p:spPr>
-          <a:xfrm rot="0">
+          <p:cNvPr id="22" name="TextBox 22"/>
+          <p:cNvSpPr txBox="1"/>
+          <p:nvPr/>
+        </p:nvSpPr>
+        <p:spPr>
+          <a:xfrm>
             <a:off x="6070397" y="5901033"/>
             <a:ext cx="4376890" cy="992981"/>
           </a:xfrm>
@@ -6783,12 +6836,12 @@
           </a:prstGeom>
         </p:spPr>
         <p:txBody>
-          <a:bodyPr anchor="t" rtlCol="false" tIns="0" lIns="0" bIns="0" rIns="0">
+          <a:bodyPr lIns="0" tIns="0" rIns="0" bIns="0" rtlCol="0" anchor="t">
             <a:spAutoFit/>
           </a:bodyPr>
           <a:lstStyle/>
           <a:p>
-            <a:pPr algn="l" marL="329902" indent="-164951" lvl="1">
+            <a:pPr marL="329902" lvl="1" indent="-164951" algn="l">
               <a:lnSpc>
                 <a:spcPts val="3562"/>
               </a:lnSpc>
@@ -6812,12 +6865,12 @@
       </p:sp>
       <p:sp>
         <p:nvSpPr>
-          <p:cNvPr name="TextBox 23" id="23"/>
-          <p:cNvSpPr txBox="true"/>
-          <p:nvPr/>
-        </p:nvSpPr>
-        <p:spPr>
-          <a:xfrm rot="0">
+          <p:cNvPr id="23" name="TextBox 23"/>
+          <p:cNvSpPr txBox="1"/>
+          <p:nvPr/>
+        </p:nvSpPr>
+        <p:spPr>
+          <a:xfrm>
             <a:off x="6070397" y="7139435"/>
             <a:ext cx="3544043" cy="481012"/>
           </a:xfrm>
@@ -6826,7 +6879,7 @@
           </a:prstGeom>
         </p:spPr>
         <p:txBody>
-          <a:bodyPr anchor="t" rtlCol="false" tIns="0" lIns="0" bIns="0" rIns="0">
+          <a:bodyPr lIns="0" tIns="0" rIns="0" bIns="0" rtlCol="0" anchor="t">
             <a:spAutoFit/>
           </a:bodyPr>
           <a:lstStyle/>
@@ -6853,12 +6906,12 @@
       </p:sp>
       <p:sp>
         <p:nvSpPr>
-          <p:cNvPr name="TextBox 24" id="24"/>
-          <p:cNvSpPr txBox="true"/>
-          <p:nvPr/>
-        </p:nvSpPr>
-        <p:spPr>
-          <a:xfrm rot="0">
+          <p:cNvPr id="24" name="TextBox 24"/>
+          <p:cNvSpPr txBox="1"/>
+          <p:nvPr/>
+        </p:nvSpPr>
+        <p:spPr>
+          <a:xfrm>
             <a:off x="6070397" y="7818234"/>
             <a:ext cx="4376890" cy="992981"/>
           </a:xfrm>
@@ -6867,7 +6920,7 @@
           </a:prstGeom>
         </p:spPr>
         <p:txBody>
-          <a:bodyPr anchor="t" rtlCol="false" tIns="0" lIns="0" bIns="0" rIns="0">
+          <a:bodyPr lIns="0" tIns="0" rIns="0" bIns="0" rtlCol="0" anchor="t">
             <a:spAutoFit/>
           </a:bodyPr>
           <a:lstStyle/>
@@ -6894,12 +6947,12 @@
       </p:sp>
       <p:grpSp>
         <p:nvGrpSpPr>
-          <p:cNvPr name="Group 25" id="25"/>
+          <p:cNvPr id="25" name="Group 25"/>
           <p:cNvGrpSpPr/>
           <p:nvPr/>
         </p:nvGrpSpPr>
         <p:grpSpPr>
-          <a:xfrm rot="0">
+          <a:xfrm>
             <a:off x="11430000" y="3223260"/>
             <a:ext cx="6858000" cy="3840480"/>
             <a:chOff x="0" y="0"/>
@@ -6908,12 +6961,12 @@
         </p:grpSpPr>
         <p:sp>
           <p:nvSpPr>
-            <p:cNvPr name="Freeform 26" id="26" descr="All about the xz-utils backdoor | Kali Linux Blog"/>
+            <p:cNvPr id="26" name="Freeform 26" descr="All about the xz-utils backdoor | Kali Linux Blog"/>
             <p:cNvSpPr/>
             <p:nvPr/>
           </p:nvSpPr>
           <p:spPr>
-            <a:xfrm flipH="false" flipV="false" rot="0">
+            <a:xfrm>
               <a:off x="0" y="0"/>
               <a:ext cx="9144000" cy="5120640"/>
             </a:xfrm>
@@ -6922,9 +6975,9 @@
               <a:gdLst/>
               <a:ahLst/>
               <a:cxnLst/>
-              <a:rect r="r" b="b" t="t" l="l"/>
+              <a:rect l="l" t="t" r="r" b="b"/>
               <a:pathLst>
-                <a:path h="5120640" w="9144000">
+                <a:path w="9144000" h="5120640">
                   <a:moveTo>
                     <a:pt x="0" y="0"/>
                   </a:moveTo>
@@ -6947,7 +7000,7 @@
             <a:blipFill>
               <a:blip r:embed="rId5"/>
               <a:stretch>
-                <a:fillRect l="0" t="0" r="0" b="0"/>
+                <a:fillRect/>
               </a:stretch>
             </a:blipFill>
           </p:spPr>
@@ -6962,7 +7015,7 @@
 </file>
 
 <file path=ppt/slides/slide12.xml><?xml version="1.0" encoding="utf-8"?>
-<p:sld xmlns:p="http://schemas.openxmlformats.org/presentationml/2006/main" xmlns:a="http://schemas.openxmlformats.org/drawingml/2006/main" xmlns:r="http://schemas.openxmlformats.org/officeDocument/2006/relationships">
+<p:sld xmlns:a="http://schemas.openxmlformats.org/drawingml/2006/main" xmlns:r="http://schemas.openxmlformats.org/officeDocument/2006/relationships" xmlns:p="http://schemas.openxmlformats.org/presentationml/2006/main">
   <p:cSld>
     <p:spTree>
       <p:nvGrpSpPr>
@@ -6980,12 +7033,12 @@
       </p:grpSpPr>
       <p:grpSp>
         <p:nvGrpSpPr>
-          <p:cNvPr name="Group 2" id="2"/>
+          <p:cNvPr id="2" name="Group 2"/>
           <p:cNvGrpSpPr/>
           <p:nvPr/>
         </p:nvGrpSpPr>
         <p:grpSpPr>
-          <a:xfrm rot="0">
+          <a:xfrm>
             <a:off x="669798" y="685800"/>
             <a:ext cx="5554980" cy="142494"/>
             <a:chOff x="0" y="0"/>
@@ -6994,12 +7047,12 @@
         </p:grpSpPr>
         <p:sp>
           <p:nvSpPr>
-            <p:cNvPr name="Freeform 3" id="3"/>
+            <p:cNvPr id="3" name="Freeform 3"/>
             <p:cNvSpPr/>
             <p:nvPr/>
           </p:nvSpPr>
           <p:spPr>
-            <a:xfrm flipH="false" flipV="false" rot="0">
+            <a:xfrm>
               <a:off x="0" y="0"/>
               <a:ext cx="7406640" cy="189992"/>
             </a:xfrm>
@@ -7008,9 +7061,9 @@
               <a:gdLst/>
               <a:ahLst/>
               <a:cxnLst/>
-              <a:rect r="r" b="b" t="t" l="l"/>
+              <a:rect l="l" t="t" r="r" b="b"/>
               <a:pathLst>
-                <a:path h="189992" w="7406640">
+                <a:path w="7406640" h="189992">
                   <a:moveTo>
                     <a:pt x="0" y="0"/>
                   </a:moveTo>
@@ -7035,12 +7088,12 @@
       </p:grpSp>
       <p:grpSp>
         <p:nvGrpSpPr>
-          <p:cNvPr name="Group 4" id="4"/>
+          <p:cNvPr id="4" name="Group 4"/>
           <p:cNvGrpSpPr/>
           <p:nvPr/>
         </p:nvGrpSpPr>
         <p:grpSpPr>
-          <a:xfrm rot="0">
+          <a:xfrm>
             <a:off x="12063222" y="680466"/>
             <a:ext cx="5554980" cy="147828"/>
             <a:chOff x="0" y="0"/>
@@ -7049,12 +7102,12 @@
         </p:grpSpPr>
         <p:sp>
           <p:nvSpPr>
-            <p:cNvPr name="Freeform 5" id="5"/>
+            <p:cNvPr id="5" name="Freeform 5"/>
             <p:cNvSpPr/>
             <p:nvPr/>
           </p:nvSpPr>
           <p:spPr>
-            <a:xfrm flipH="false" flipV="false" rot="0">
+            <a:xfrm>
               <a:off x="0" y="0"/>
               <a:ext cx="7406640" cy="197104"/>
             </a:xfrm>
@@ -7063,9 +7116,9 @@
               <a:gdLst/>
               <a:ahLst/>
               <a:cxnLst/>
-              <a:rect r="r" b="b" t="t" l="l"/>
+              <a:rect l="l" t="t" r="r" b="b"/>
               <a:pathLst>
-                <a:path h="197104" w="7406640">
+                <a:path w="7406640" h="197104">
                   <a:moveTo>
                     <a:pt x="0" y="0"/>
                   </a:moveTo>
@@ -7090,12 +7143,12 @@
       </p:grpSp>
       <p:grpSp>
         <p:nvGrpSpPr>
-          <p:cNvPr name="Group 6" id="6"/>
+          <p:cNvPr id="6" name="Group 6"/>
           <p:cNvGrpSpPr/>
           <p:nvPr/>
         </p:nvGrpSpPr>
         <p:grpSpPr>
-          <a:xfrm rot="0">
+          <a:xfrm>
             <a:off x="6362748" y="685800"/>
             <a:ext cx="5554980" cy="137160"/>
             <a:chOff x="0" y="0"/>
@@ -7104,12 +7157,12 @@
         </p:grpSpPr>
         <p:sp>
           <p:nvSpPr>
-            <p:cNvPr name="Freeform 7" id="7"/>
+            <p:cNvPr id="7" name="Freeform 7"/>
             <p:cNvSpPr/>
             <p:nvPr/>
           </p:nvSpPr>
           <p:spPr>
-            <a:xfrm flipH="false" flipV="false" rot="0">
+            <a:xfrm>
               <a:off x="0" y="0"/>
               <a:ext cx="7406640" cy="182880"/>
             </a:xfrm>
@@ -7118,9 +7171,9 @@
               <a:gdLst/>
               <a:ahLst/>
               <a:cxnLst/>
-              <a:rect r="r" b="b" t="t" l="l"/>
+              <a:rect l="l" t="t" r="r" b="b"/>
               <a:pathLst>
-                <a:path h="182880" w="7406640">
+                <a:path w="7406640" h="182880">
                   <a:moveTo>
                     <a:pt x="0" y="0"/>
                   </a:moveTo>
@@ -7145,12 +7198,12 @@
       </p:grpSp>
       <p:grpSp>
         <p:nvGrpSpPr>
-          <p:cNvPr name="Group 8" id="8"/>
+          <p:cNvPr id="8" name="Group 8"/>
           <p:cNvGrpSpPr/>
           <p:nvPr/>
         </p:nvGrpSpPr>
         <p:grpSpPr>
-          <a:xfrm rot="0">
+          <a:xfrm>
             <a:off x="992238" y="4617244"/>
             <a:ext cx="5245446" cy="850554"/>
             <a:chOff x="0" y="0"/>
@@ -7159,12 +7212,12 @@
         </p:grpSpPr>
         <p:sp>
           <p:nvSpPr>
-            <p:cNvPr name="Freeform 9" id="9"/>
+            <p:cNvPr id="9" name="Freeform 9"/>
             <p:cNvSpPr/>
             <p:nvPr/>
           </p:nvSpPr>
           <p:spPr>
-            <a:xfrm flipH="false" flipV="false" rot="0">
+            <a:xfrm>
               <a:off x="0" y="0"/>
               <a:ext cx="6993890" cy="1134110"/>
             </a:xfrm>
@@ -7173,9 +7226,9 @@
               <a:gdLst/>
               <a:ahLst/>
               <a:cxnLst/>
-              <a:rect r="r" b="b" t="t" l="l"/>
+              <a:rect l="l" t="t" r="r" b="b"/>
               <a:pathLst>
-                <a:path h="1134110" w="6993890">
+                <a:path w="6993890" h="1134110">
                   <a:moveTo>
                     <a:pt x="0" y="567055"/>
                   </a:moveTo>
@@ -7217,12 +7270,12 @@
       </p:grpSp>
       <p:grpSp>
         <p:nvGrpSpPr>
-          <p:cNvPr name="Group 10" id="10"/>
+          <p:cNvPr id="10" name="Group 10"/>
           <p:cNvGrpSpPr/>
           <p:nvPr/>
         </p:nvGrpSpPr>
         <p:grpSpPr>
-          <a:xfrm rot="0">
+          <a:xfrm>
             <a:off x="6521206" y="4617244"/>
             <a:ext cx="5245446" cy="850554"/>
             <a:chOff x="0" y="0"/>
@@ -7231,12 +7284,12 @@
         </p:grpSpPr>
         <p:sp>
           <p:nvSpPr>
-            <p:cNvPr name="Freeform 11" id="11"/>
+            <p:cNvPr id="11" name="Freeform 11"/>
             <p:cNvSpPr/>
             <p:nvPr/>
           </p:nvSpPr>
           <p:spPr>
-            <a:xfrm flipH="false" flipV="false" rot="0">
+            <a:xfrm>
               <a:off x="0" y="0"/>
               <a:ext cx="6993890" cy="1134110"/>
             </a:xfrm>
@@ -7245,9 +7298,9 @@
               <a:gdLst/>
               <a:ahLst/>
               <a:cxnLst/>
-              <a:rect r="r" b="b" t="t" l="l"/>
+              <a:rect l="l" t="t" r="r" b="b"/>
               <a:pathLst>
-                <a:path h="1134110" w="6993890">
+                <a:path w="6993890" h="1134110">
                   <a:moveTo>
                     <a:pt x="0" y="567055"/>
                   </a:moveTo>
@@ -7289,12 +7342,12 @@
       </p:grpSp>
       <p:sp>
         <p:nvSpPr>
-          <p:cNvPr name="Freeform 12" id="12" descr="preencoded.png"/>
+          <p:cNvPr id="12" name="Freeform 12" descr="preencoded.png"/>
           <p:cNvSpPr/>
           <p:nvPr/>
         </p:nvSpPr>
         <p:spPr>
-          <a:xfrm flipH="false" flipV="false" rot="0">
+          <a:xfrm>
             <a:off x="8931326" y="4829766"/>
             <a:ext cx="425206" cy="425206"/>
           </a:xfrm>
@@ -7303,9 +7356,9 @@
             <a:gdLst/>
             <a:ahLst/>
             <a:cxnLst/>
-            <a:rect r="r" b="b" t="t" l="l"/>
+            <a:rect l="l" t="t" r="r" b="b"/>
             <a:pathLst>
-              <a:path h="425206" w="425206">
+              <a:path w="425206" h="425206">
                 <a:moveTo>
                   <a:pt x="0" y="0"/>
                 </a:moveTo>
@@ -7334,19 +7387,19 @@
               </a:extLst>
             </a:blip>
             <a:stretch>
-              <a:fillRect l="-1111" t="0" r="-1111" b="0"/>
+              <a:fillRect l="-1111" r="-1111"/>
             </a:stretch>
           </a:blipFill>
         </p:spPr>
       </p:sp>
       <p:grpSp>
         <p:nvGrpSpPr>
-          <p:cNvPr name="Group 13" id="13"/>
+          <p:cNvPr id="13" name="Group 13"/>
           <p:cNvGrpSpPr/>
           <p:nvPr/>
         </p:nvGrpSpPr>
         <p:grpSpPr>
-          <a:xfrm rot="0">
+          <a:xfrm>
             <a:off x="12050163" y="4617244"/>
             <a:ext cx="5245446" cy="850554"/>
             <a:chOff x="0" y="0"/>
@@ -7355,12 +7408,12 @@
         </p:grpSpPr>
         <p:sp>
           <p:nvSpPr>
-            <p:cNvPr name="Freeform 14" id="14"/>
+            <p:cNvPr id="14" name="Freeform 14"/>
             <p:cNvSpPr/>
             <p:nvPr/>
           </p:nvSpPr>
           <p:spPr>
-            <a:xfrm flipH="false" flipV="false" rot="0">
+            <a:xfrm>
               <a:off x="0" y="0"/>
               <a:ext cx="6993890" cy="1134110"/>
             </a:xfrm>
@@ -7369,9 +7422,9 @@
               <a:gdLst/>
               <a:ahLst/>
               <a:cxnLst/>
-              <a:rect r="r" b="b" t="t" l="l"/>
+              <a:rect l="l" t="t" r="r" b="b"/>
               <a:pathLst>
-                <a:path h="1134110" w="6993890">
+                <a:path w="6993890" h="1134110">
                   <a:moveTo>
                     <a:pt x="0" y="567055"/>
                   </a:moveTo>
@@ -7413,12 +7466,12 @@
       </p:grpSp>
       <p:sp>
         <p:nvSpPr>
-          <p:cNvPr name="Freeform 15" id="15"/>
+          <p:cNvPr id="15" name="Freeform 15"/>
           <p:cNvSpPr/>
           <p:nvPr/>
         </p:nvSpPr>
         <p:spPr>
-          <a:xfrm flipH="false" flipV="false" rot="0">
+          <a:xfrm>
             <a:off x="14116815" y="4762311"/>
             <a:ext cx="723897" cy="560115"/>
           </a:xfrm>
@@ -7427,9 +7480,9 @@
             <a:gdLst/>
             <a:ahLst/>
             <a:cxnLst/>
-            <a:rect r="r" b="b" t="t" l="l"/>
+            <a:rect l="l" t="t" r="r" b="b"/>
             <a:pathLst>
-              <a:path h="560115" w="723897">
+              <a:path w="723897" h="560115">
                 <a:moveTo>
                   <a:pt x="0" y="0"/>
                 </a:moveTo>
@@ -7458,19 +7511,19 @@
               </a:extLst>
             </a:blip>
             <a:stretch>
-              <a:fillRect l="0" t="0" r="0" b="0"/>
+              <a:fillRect/>
             </a:stretch>
           </a:blipFill>
         </p:spPr>
       </p:sp>
       <p:sp>
         <p:nvSpPr>
-          <p:cNvPr name="Freeform 16" id="16"/>
+          <p:cNvPr id="16" name="Freeform 16"/>
           <p:cNvSpPr/>
           <p:nvPr/>
         </p:nvSpPr>
         <p:spPr>
-          <a:xfrm flipH="false" flipV="false" rot="0">
+          <a:xfrm>
             <a:off x="3008751" y="4617244"/>
             <a:ext cx="877075" cy="763055"/>
           </a:xfrm>
@@ -7479,9 +7532,9 @@
             <a:gdLst/>
             <a:ahLst/>
             <a:cxnLst/>
-            <a:rect r="r" b="b" t="t" l="l"/>
+            <a:rect l="l" t="t" r="r" b="b"/>
             <a:pathLst>
-              <a:path h="763055" w="877075">
+              <a:path w="877075" h="763055">
                 <a:moveTo>
                   <a:pt x="0" y="0"/>
                 </a:moveTo>
@@ -7510,19 +7563,19 @@
               </a:extLst>
             </a:blip>
             <a:stretch>
-              <a:fillRect l="0" t="0" r="0" b="0"/>
+              <a:fillRect/>
             </a:stretch>
           </a:blipFill>
         </p:spPr>
       </p:sp>
       <p:sp>
         <p:nvSpPr>
-          <p:cNvPr name="TextBox 17" id="17"/>
-          <p:cNvSpPr txBox="true"/>
-          <p:nvPr/>
-        </p:nvSpPr>
-        <p:spPr>
-          <a:xfrm rot="0">
+          <p:cNvPr id="17" name="TextBox 17"/>
+          <p:cNvSpPr txBox="1"/>
+          <p:nvPr/>
+        </p:nvSpPr>
+        <p:spPr>
+          <a:xfrm>
             <a:off x="992238" y="2221116"/>
             <a:ext cx="16303523" cy="1829095"/>
           </a:xfrm>
@@ -7531,7 +7584,7 @@
           </a:prstGeom>
         </p:spPr>
         <p:txBody>
-          <a:bodyPr anchor="t" rtlCol="false" tIns="0" lIns="0" bIns="0" rIns="0">
+          <a:bodyPr lIns="0" tIns="0" rIns="0" bIns="0" rtlCol="0" anchor="t">
             <a:spAutoFit/>
           </a:bodyPr>
           <a:lstStyle/>
@@ -7542,7 +7595,7 @@
               </a:lnSpc>
             </a:pPr>
             <a:r>
-              <a:rPr lang="en-US" sz="5562">
+              <a:rPr lang="en-US" sz="5562" dirty="0" err="1">
                 <a:solidFill>
                   <a:srgbClr val="000000"/>
                 </a:solidFill>
@@ -7551,19 +7604,79 @@
                 <a:cs typeface="Arimo"/>
                 <a:sym typeface="Arimo"/>
               </a:rPr>
-              <a:t>Defesa em Profundidade (Advanced Security)</a:t>
-            </a:r>
-          </a:p>
-        </p:txBody>
-      </p:sp>
-      <p:sp>
-        <p:nvSpPr>
-          <p:cNvPr name="TextBox 18" id="18"/>
-          <p:cNvSpPr txBox="true"/>
-          <p:nvPr/>
-        </p:nvSpPr>
-        <p:spPr>
-          <a:xfrm rot="0">
+              <a:t>Defesa</a:t>
+            </a:r>
+            <a:r>
+              <a:rPr lang="en-US" sz="5562" dirty="0">
+                <a:solidFill>
+                  <a:srgbClr val="000000"/>
+                </a:solidFill>
+                <a:latin typeface="Arimo"/>
+                <a:ea typeface="Arimo"/>
+                <a:cs typeface="Arimo"/>
+                <a:sym typeface="Arimo"/>
+              </a:rPr>
+              <a:t> </a:t>
+            </a:r>
+            <a:r>
+              <a:rPr lang="en-US" sz="5562" dirty="0" err="1">
+                <a:solidFill>
+                  <a:srgbClr val="000000"/>
+                </a:solidFill>
+                <a:latin typeface="Arimo"/>
+                <a:ea typeface="Arimo"/>
+                <a:cs typeface="Arimo"/>
+                <a:sym typeface="Arimo"/>
+              </a:rPr>
+              <a:t>em</a:t>
+            </a:r>
+            <a:r>
+              <a:rPr lang="en-US" sz="5562" dirty="0">
+                <a:solidFill>
+                  <a:srgbClr val="000000"/>
+                </a:solidFill>
+                <a:latin typeface="Arimo"/>
+                <a:ea typeface="Arimo"/>
+                <a:cs typeface="Arimo"/>
+                <a:sym typeface="Arimo"/>
+              </a:rPr>
+              <a:t> </a:t>
+            </a:r>
+            <a:r>
+              <a:rPr lang="en-US" sz="5562" dirty="0" err="1">
+                <a:solidFill>
+                  <a:srgbClr val="000000"/>
+                </a:solidFill>
+                <a:latin typeface="Arimo"/>
+                <a:ea typeface="Arimo"/>
+                <a:cs typeface="Arimo"/>
+                <a:sym typeface="Arimo"/>
+              </a:rPr>
+              <a:t>Profundidade</a:t>
+            </a:r>
+            <a:r>
+              <a:rPr lang="en-US" sz="5562" dirty="0">
+                <a:solidFill>
+                  <a:srgbClr val="000000"/>
+                </a:solidFill>
+                <a:latin typeface="Arimo"/>
+                <a:ea typeface="Arimo"/>
+                <a:cs typeface="Arimo"/>
+                <a:sym typeface="Arimo"/>
+              </a:rPr>
+              <a:t> (Advanced Security)</a:t>
+            </a:r>
+          </a:p>
+        </p:txBody>
+      </p:sp>
+      <p:sp>
+        <p:nvSpPr>
+          <p:cNvPr id="18" name="TextBox 18"/>
+          <p:cNvSpPr txBox="1"/>
+          <p:nvPr/>
+        </p:nvSpPr>
+        <p:spPr>
+          <a:xfrm>
             <a:off x="1275759" y="5713209"/>
             <a:ext cx="3544043" cy="481012"/>
           </a:xfrm>
@@ -7572,7 +7685,7 @@
           </a:prstGeom>
         </p:spPr>
         <p:txBody>
-          <a:bodyPr anchor="t" rtlCol="false" tIns="0" lIns="0" bIns="0" rIns="0">
+          <a:bodyPr lIns="0" tIns="0" rIns="0" bIns="0" rtlCol="0" anchor="t">
             <a:spAutoFit/>
           </a:bodyPr>
           <a:lstStyle/>
@@ -7599,12 +7712,12 @@
       </p:sp>
       <p:sp>
         <p:nvSpPr>
-          <p:cNvPr name="TextBox 19" id="19"/>
-          <p:cNvSpPr txBox="true"/>
-          <p:nvPr/>
-        </p:nvSpPr>
-        <p:spPr>
-          <a:xfrm rot="0">
+          <p:cNvPr id="19" name="TextBox 19"/>
+          <p:cNvSpPr txBox="1"/>
+          <p:nvPr/>
+        </p:nvSpPr>
+        <p:spPr>
+          <a:xfrm>
             <a:off x="1275759" y="6278613"/>
             <a:ext cx="4678413" cy="1446609"/>
           </a:xfrm>
@@ -7613,7 +7726,7 @@
           </a:prstGeom>
         </p:spPr>
         <p:txBody>
-          <a:bodyPr anchor="t" rtlCol="false" tIns="0" lIns="0" bIns="0" rIns="0">
+          <a:bodyPr lIns="0" tIns="0" rIns="0" bIns="0" rtlCol="0" anchor="t">
             <a:spAutoFit/>
           </a:bodyPr>
           <a:lstStyle/>
@@ -7640,12 +7753,12 @@
       </p:sp>
       <p:sp>
         <p:nvSpPr>
-          <p:cNvPr name="TextBox 20" id="20"/>
-          <p:cNvSpPr txBox="true"/>
-          <p:nvPr/>
-        </p:nvSpPr>
-        <p:spPr>
-          <a:xfrm rot="0">
+          <p:cNvPr id="20" name="TextBox 20"/>
+          <p:cNvSpPr txBox="1"/>
+          <p:nvPr/>
+        </p:nvSpPr>
+        <p:spPr>
+          <a:xfrm>
             <a:off x="6804717" y="5713209"/>
             <a:ext cx="3544043" cy="481012"/>
           </a:xfrm>
@@ -7654,7 +7767,7 @@
           </a:prstGeom>
         </p:spPr>
         <p:txBody>
-          <a:bodyPr anchor="t" rtlCol="false" tIns="0" lIns="0" bIns="0" rIns="0">
+          <a:bodyPr lIns="0" tIns="0" rIns="0" bIns="0" rtlCol="0" anchor="t">
             <a:spAutoFit/>
           </a:bodyPr>
           <a:lstStyle/>
@@ -7681,12 +7794,12 @@
       </p:sp>
       <p:sp>
         <p:nvSpPr>
-          <p:cNvPr name="TextBox 21" id="21"/>
-          <p:cNvSpPr txBox="true"/>
-          <p:nvPr/>
-        </p:nvSpPr>
-        <p:spPr>
-          <a:xfrm rot="0">
+          <p:cNvPr id="21" name="TextBox 21"/>
+          <p:cNvSpPr txBox="1"/>
+          <p:nvPr/>
+        </p:nvSpPr>
+        <p:spPr>
+          <a:xfrm>
             <a:off x="6804717" y="6278613"/>
             <a:ext cx="4678413" cy="992981"/>
           </a:xfrm>
@@ -7695,7 +7808,7 @@
           </a:prstGeom>
         </p:spPr>
         <p:txBody>
-          <a:bodyPr anchor="t" rtlCol="false" tIns="0" lIns="0" bIns="0" rIns="0">
+          <a:bodyPr lIns="0" tIns="0" rIns="0" bIns="0" rtlCol="0" anchor="t">
             <a:spAutoFit/>
           </a:bodyPr>
           <a:lstStyle/>
@@ -7722,12 +7835,12 @@
       </p:sp>
       <p:sp>
         <p:nvSpPr>
-          <p:cNvPr name="TextBox 22" id="22"/>
-          <p:cNvSpPr txBox="true"/>
-          <p:nvPr/>
-        </p:nvSpPr>
-        <p:spPr>
-          <a:xfrm rot="0">
+          <p:cNvPr id="22" name="TextBox 22"/>
+          <p:cNvSpPr txBox="1"/>
+          <p:nvPr/>
+        </p:nvSpPr>
+        <p:spPr>
+          <a:xfrm>
             <a:off x="12333684" y="5713209"/>
             <a:ext cx="3544043" cy="481012"/>
           </a:xfrm>
@@ -7736,7 +7849,7 @@
           </a:prstGeom>
         </p:spPr>
         <p:txBody>
-          <a:bodyPr anchor="t" rtlCol="false" tIns="0" lIns="0" bIns="0" rIns="0">
+          <a:bodyPr lIns="0" tIns="0" rIns="0" bIns="0" rtlCol="0" anchor="t">
             <a:spAutoFit/>
           </a:bodyPr>
           <a:lstStyle/>
@@ -7763,12 +7876,12 @@
       </p:sp>
       <p:sp>
         <p:nvSpPr>
-          <p:cNvPr name="TextBox 23" id="23"/>
-          <p:cNvSpPr txBox="true"/>
-          <p:nvPr/>
-        </p:nvSpPr>
-        <p:spPr>
-          <a:xfrm rot="0">
+          <p:cNvPr id="23" name="TextBox 23"/>
+          <p:cNvSpPr txBox="1"/>
+          <p:nvPr/>
+        </p:nvSpPr>
+        <p:spPr>
+          <a:xfrm>
             <a:off x="12333684" y="6278613"/>
             <a:ext cx="4678413" cy="992981"/>
           </a:xfrm>
@@ -7777,7 +7890,7 @@
           </a:prstGeom>
         </p:spPr>
         <p:txBody>
-          <a:bodyPr anchor="t" rtlCol="false" tIns="0" lIns="0" bIns="0" rIns="0">
+          <a:bodyPr lIns="0" tIns="0" rIns="0" bIns="0" rtlCol="0" anchor="t">
             <a:spAutoFit/>
           </a:bodyPr>
           <a:lstStyle/>
@@ -7811,7 +7924,7 @@
 </file>
 
 <file path=ppt/slides/slide13.xml><?xml version="1.0" encoding="utf-8"?>
-<p:sld xmlns:p="http://schemas.openxmlformats.org/presentationml/2006/main" xmlns:a="http://schemas.openxmlformats.org/drawingml/2006/main" xmlns:r="http://schemas.openxmlformats.org/officeDocument/2006/relationships">
+<p:sld xmlns:a="http://schemas.openxmlformats.org/drawingml/2006/main" xmlns:r="http://schemas.openxmlformats.org/officeDocument/2006/relationships" xmlns:p="http://schemas.openxmlformats.org/presentationml/2006/main">
   <p:cSld>
     <p:spTree>
       <p:nvGrpSpPr>
@@ -7829,12 +7942,12 @@
       </p:grpSpPr>
       <p:grpSp>
         <p:nvGrpSpPr>
-          <p:cNvPr name="Group 2" id="2"/>
+          <p:cNvPr id="2" name="Group 2"/>
           <p:cNvGrpSpPr/>
           <p:nvPr/>
         </p:nvGrpSpPr>
         <p:grpSpPr>
-          <a:xfrm rot="0">
+          <a:xfrm>
             <a:off x="669798" y="685800"/>
             <a:ext cx="5554980" cy="142494"/>
             <a:chOff x="0" y="0"/>
@@ -7843,12 +7956,12 @@
         </p:grpSpPr>
         <p:sp>
           <p:nvSpPr>
-            <p:cNvPr name="Freeform 3" id="3"/>
+            <p:cNvPr id="3" name="Freeform 3"/>
             <p:cNvSpPr/>
             <p:nvPr/>
           </p:nvSpPr>
           <p:spPr>
-            <a:xfrm flipH="false" flipV="false" rot="0">
+            <a:xfrm>
               <a:off x="0" y="0"/>
               <a:ext cx="7406640" cy="189992"/>
             </a:xfrm>
@@ -7857,9 +7970,9 @@
               <a:gdLst/>
               <a:ahLst/>
               <a:cxnLst/>
-              <a:rect r="r" b="b" t="t" l="l"/>
+              <a:rect l="l" t="t" r="r" b="b"/>
               <a:pathLst>
-                <a:path h="189992" w="7406640">
+                <a:path w="7406640" h="189992">
                   <a:moveTo>
                     <a:pt x="0" y="0"/>
                   </a:moveTo>
@@ -7884,12 +7997,12 @@
       </p:grpSp>
       <p:grpSp>
         <p:nvGrpSpPr>
-          <p:cNvPr name="Group 4" id="4"/>
+          <p:cNvPr id="4" name="Group 4"/>
           <p:cNvGrpSpPr/>
           <p:nvPr/>
         </p:nvGrpSpPr>
         <p:grpSpPr>
-          <a:xfrm rot="0">
+          <a:xfrm>
             <a:off x="12063222" y="680466"/>
             <a:ext cx="5554980" cy="147828"/>
             <a:chOff x="0" y="0"/>
@@ -7898,12 +8011,12 @@
         </p:grpSpPr>
         <p:sp>
           <p:nvSpPr>
-            <p:cNvPr name="Freeform 5" id="5"/>
+            <p:cNvPr id="5" name="Freeform 5"/>
             <p:cNvSpPr/>
             <p:nvPr/>
           </p:nvSpPr>
           <p:spPr>
-            <a:xfrm flipH="false" flipV="false" rot="0">
+            <a:xfrm>
               <a:off x="0" y="0"/>
               <a:ext cx="7406640" cy="197104"/>
             </a:xfrm>
@@ -7912,9 +8025,9 @@
               <a:gdLst/>
               <a:ahLst/>
               <a:cxnLst/>
-              <a:rect r="r" b="b" t="t" l="l"/>
+              <a:rect l="l" t="t" r="r" b="b"/>
               <a:pathLst>
-                <a:path h="197104" w="7406640">
+                <a:path w="7406640" h="197104">
                   <a:moveTo>
                     <a:pt x="0" y="0"/>
                   </a:moveTo>
@@ -7939,12 +8052,12 @@
       </p:grpSp>
       <p:grpSp>
         <p:nvGrpSpPr>
-          <p:cNvPr name="Group 6" id="6"/>
+          <p:cNvPr id="6" name="Group 6"/>
           <p:cNvGrpSpPr/>
           <p:nvPr/>
         </p:nvGrpSpPr>
         <p:grpSpPr>
-          <a:xfrm rot="0">
+          <a:xfrm>
             <a:off x="6362748" y="685800"/>
             <a:ext cx="5554980" cy="137160"/>
             <a:chOff x="0" y="0"/>
@@ -7953,12 +8066,12 @@
         </p:grpSpPr>
         <p:sp>
           <p:nvSpPr>
-            <p:cNvPr name="Freeform 7" id="7"/>
+            <p:cNvPr id="7" name="Freeform 7"/>
             <p:cNvSpPr/>
             <p:nvPr/>
           </p:nvSpPr>
           <p:spPr>
-            <a:xfrm flipH="false" flipV="false" rot="0">
+            <a:xfrm>
               <a:off x="0" y="0"/>
               <a:ext cx="7406640" cy="182880"/>
             </a:xfrm>
@@ -7967,9 +8080,9 @@
               <a:gdLst/>
               <a:ahLst/>
               <a:cxnLst/>
-              <a:rect r="r" b="b" t="t" l="l"/>
+              <a:rect l="l" t="t" r="r" b="b"/>
               <a:pathLst>
-                <a:path h="182880" w="7406640">
+                <a:path w="7406640" h="182880">
                   <a:moveTo>
                     <a:pt x="0" y="0"/>
                   </a:moveTo>
@@ -7994,12 +8107,12 @@
       </p:grpSp>
       <p:sp>
         <p:nvSpPr>
-          <p:cNvPr name="TextBox 8" id="8"/>
-          <p:cNvSpPr txBox="true"/>
-          <p:nvPr/>
-        </p:nvSpPr>
-        <p:spPr>
-          <a:xfrm rot="0">
+          <p:cNvPr id="8" name="TextBox 8"/>
+          <p:cNvSpPr txBox="1"/>
+          <p:nvPr/>
+        </p:nvSpPr>
+        <p:spPr>
+          <a:xfrm>
             <a:off x="1681306" y="314325"/>
             <a:ext cx="15419869" cy="1558544"/>
           </a:xfrm>
@@ -8008,7 +8121,7 @@
           </a:prstGeom>
         </p:spPr>
         <p:txBody>
-          <a:bodyPr anchor="t" rtlCol="false" tIns="0" lIns="0" bIns="0" rIns="0">
+          <a:bodyPr lIns="0" tIns="0" rIns="0" bIns="0" rtlCol="0" anchor="t">
             <a:spAutoFit/>
           </a:bodyPr>
           <a:lstStyle/>
@@ -8035,12 +8148,12 @@
       </p:sp>
       <p:grpSp>
         <p:nvGrpSpPr>
-          <p:cNvPr name="Group 9" id="9"/>
+          <p:cNvPr id="9" name="Group 9"/>
           <p:cNvGrpSpPr/>
           <p:nvPr/>
         </p:nvGrpSpPr>
         <p:grpSpPr>
-          <a:xfrm rot="0">
+          <a:xfrm>
             <a:off x="9391240" y="3577419"/>
             <a:ext cx="8241992" cy="2472595"/>
             <a:chOff x="0" y="0"/>
@@ -8049,12 +8162,12 @@
         </p:grpSpPr>
         <p:sp>
           <p:nvSpPr>
-            <p:cNvPr name="Freeform 10" id="10" descr="GitHub - ionic-team/capacitor: Build cross-platform Native Progressive Web  Apps for iOS, Android, and the Web ⚡️"/>
+            <p:cNvPr id="10" name="Freeform 10" descr="GitHub - ionic-team/capacitor: Build cross-platform Native Progressive Web  Apps for iOS, Android, and the Web ⚡️"/>
             <p:cNvSpPr/>
             <p:nvPr/>
           </p:nvSpPr>
           <p:spPr>
-            <a:xfrm flipH="false" flipV="false" rot="0">
+            <a:xfrm>
               <a:off x="0" y="0"/>
               <a:ext cx="10989310" cy="3296793"/>
             </a:xfrm>
@@ -8063,9 +8176,9 @@
               <a:gdLst/>
               <a:ahLst/>
               <a:cxnLst/>
-              <a:rect r="r" b="b" t="t" l="l"/>
+              <a:rect l="l" t="t" r="r" b="b"/>
               <a:pathLst>
-                <a:path h="3296793" w="10989310">
+                <a:path w="10989310" h="3296793">
                   <a:moveTo>
                     <a:pt x="0" y="0"/>
                   </a:moveTo>
@@ -8088,7 +8201,7 @@
             <a:blipFill>
               <a:blip r:embed="rId2"/>
               <a:stretch>
-                <a:fillRect l="0" t="0" r="0" b="0"/>
+                <a:fillRect/>
               </a:stretch>
             </a:blipFill>
           </p:spPr>
@@ -8096,12 +8209,12 @@
       </p:grpSp>
       <p:grpSp>
         <p:nvGrpSpPr>
-          <p:cNvPr name="Group 11" id="11"/>
+          <p:cNvPr id="11" name="Group 11"/>
           <p:cNvGrpSpPr/>
           <p:nvPr/>
         </p:nvGrpSpPr>
         <p:grpSpPr>
-          <a:xfrm rot="0">
+          <a:xfrm>
             <a:off x="973026" y="2794064"/>
             <a:ext cx="7468162" cy="4182170"/>
             <a:chOff x="0" y="0"/>
@@ -8110,12 +8223,12 @@
         </p:grpSpPr>
         <p:sp>
           <p:nvSpPr>
-            <p:cNvPr name="Freeform 12" id="12" descr="5 Progressive Web App Alternatives to Popular Android Apps - DroidViews"/>
+            <p:cNvPr id="12" name="Freeform 12" descr="5 Progressive Web App Alternatives to Popular Android Apps - DroidViews"/>
             <p:cNvSpPr/>
             <p:nvPr/>
           </p:nvSpPr>
           <p:spPr>
-            <a:xfrm flipH="false" flipV="false" rot="0">
+            <a:xfrm>
               <a:off x="0" y="0"/>
               <a:ext cx="9957562" cy="5576189"/>
             </a:xfrm>
@@ -8124,9 +8237,9 @@
               <a:gdLst/>
               <a:ahLst/>
               <a:cxnLst/>
-              <a:rect r="r" b="b" t="t" l="l"/>
+              <a:rect l="l" t="t" r="r" b="b"/>
               <a:pathLst>
-                <a:path h="5576189" w="9957562">
+                <a:path w="9957562" h="5576189">
                   <a:moveTo>
                     <a:pt x="0" y="0"/>
                   </a:moveTo>
@@ -8149,7 +8262,7 @@
             <a:blipFill>
               <a:blip r:embed="rId3"/>
               <a:stretch>
-                <a:fillRect l="0" t="0" r="0" b="0"/>
+                <a:fillRect/>
               </a:stretch>
             </a:blipFill>
           </p:spPr>
@@ -8164,7 +8277,7 @@
 </file>
 
 <file path=ppt/slides/slide14.xml><?xml version="1.0" encoding="utf-8"?>
-<p:sld xmlns:p="http://schemas.openxmlformats.org/presentationml/2006/main" xmlns:a="http://schemas.openxmlformats.org/drawingml/2006/main">
+<p:sld xmlns:a="http://schemas.openxmlformats.org/drawingml/2006/main" xmlns:r="http://schemas.openxmlformats.org/officeDocument/2006/relationships" xmlns:p="http://schemas.openxmlformats.org/presentationml/2006/main">
   <p:cSld>
     <p:spTree>
       <p:nvGrpSpPr>
@@ -8182,12 +8295,12 @@
       </p:grpSpPr>
       <p:grpSp>
         <p:nvGrpSpPr>
-          <p:cNvPr name="Group 2" id="2"/>
+          <p:cNvPr id="2" name="Group 2"/>
           <p:cNvGrpSpPr/>
           <p:nvPr/>
         </p:nvGrpSpPr>
         <p:grpSpPr>
-          <a:xfrm rot="0">
+          <a:xfrm>
             <a:off x="669798" y="685800"/>
             <a:ext cx="5554980" cy="142494"/>
             <a:chOff x="0" y="0"/>
@@ -8196,12 +8309,12 @@
         </p:grpSpPr>
         <p:sp>
           <p:nvSpPr>
-            <p:cNvPr name="Freeform 3" id="3"/>
+            <p:cNvPr id="3" name="Freeform 3"/>
             <p:cNvSpPr/>
             <p:nvPr/>
           </p:nvSpPr>
           <p:spPr>
-            <a:xfrm flipH="false" flipV="false" rot="0">
+            <a:xfrm>
               <a:off x="0" y="0"/>
               <a:ext cx="7406640" cy="189992"/>
             </a:xfrm>
@@ -8210,9 +8323,9 @@
               <a:gdLst/>
               <a:ahLst/>
               <a:cxnLst/>
-              <a:rect r="r" b="b" t="t" l="l"/>
+              <a:rect l="l" t="t" r="r" b="b"/>
               <a:pathLst>
-                <a:path h="189992" w="7406640">
+                <a:path w="7406640" h="189992">
                   <a:moveTo>
                     <a:pt x="0" y="0"/>
                   </a:moveTo>
@@ -8237,12 +8350,12 @@
       </p:grpSp>
       <p:grpSp>
         <p:nvGrpSpPr>
-          <p:cNvPr name="Group 4" id="4"/>
+          <p:cNvPr id="4" name="Group 4"/>
           <p:cNvGrpSpPr/>
           <p:nvPr/>
         </p:nvGrpSpPr>
         <p:grpSpPr>
-          <a:xfrm rot="0">
+          <a:xfrm>
             <a:off x="12063222" y="680466"/>
             <a:ext cx="5554980" cy="147828"/>
             <a:chOff x="0" y="0"/>
@@ -8251,12 +8364,12 @@
         </p:grpSpPr>
         <p:sp>
           <p:nvSpPr>
-            <p:cNvPr name="Freeform 5" id="5"/>
+            <p:cNvPr id="5" name="Freeform 5"/>
             <p:cNvSpPr/>
             <p:nvPr/>
           </p:nvSpPr>
           <p:spPr>
-            <a:xfrm flipH="false" flipV="false" rot="0">
+            <a:xfrm>
               <a:off x="0" y="0"/>
               <a:ext cx="7406640" cy="197104"/>
             </a:xfrm>
@@ -8265,9 +8378,9 @@
               <a:gdLst/>
               <a:ahLst/>
               <a:cxnLst/>
-              <a:rect r="r" b="b" t="t" l="l"/>
+              <a:rect l="l" t="t" r="r" b="b"/>
               <a:pathLst>
-                <a:path h="197104" w="7406640">
+                <a:path w="7406640" h="197104">
                   <a:moveTo>
                     <a:pt x="0" y="0"/>
                   </a:moveTo>
@@ -8292,12 +8405,12 @@
       </p:grpSp>
       <p:grpSp>
         <p:nvGrpSpPr>
-          <p:cNvPr name="Group 6" id="6"/>
+          <p:cNvPr id="6" name="Group 6"/>
           <p:cNvGrpSpPr/>
           <p:nvPr/>
         </p:nvGrpSpPr>
         <p:grpSpPr>
-          <a:xfrm rot="0">
+          <a:xfrm>
             <a:off x="6362748" y="685800"/>
             <a:ext cx="5554980" cy="137160"/>
             <a:chOff x="0" y="0"/>
@@ -8306,12 +8419,12 @@
         </p:grpSpPr>
         <p:sp>
           <p:nvSpPr>
-            <p:cNvPr name="Freeform 7" id="7"/>
+            <p:cNvPr id="7" name="Freeform 7"/>
             <p:cNvSpPr/>
             <p:nvPr/>
           </p:nvSpPr>
           <p:spPr>
-            <a:xfrm flipH="false" flipV="false" rot="0">
+            <a:xfrm>
               <a:off x="0" y="0"/>
               <a:ext cx="7406640" cy="182880"/>
             </a:xfrm>
@@ -8320,9 +8433,9 @@
               <a:gdLst/>
               <a:ahLst/>
               <a:cxnLst/>
-              <a:rect r="r" b="b" t="t" l="l"/>
+              <a:rect l="l" t="t" r="r" b="b"/>
               <a:pathLst>
-                <a:path h="182880" w="7406640">
+                <a:path w="7406640" h="182880">
                   <a:moveTo>
                     <a:pt x="0" y="0"/>
                   </a:moveTo>
@@ -8347,12 +8460,12 @@
       </p:grpSp>
       <p:sp>
         <p:nvSpPr>
-          <p:cNvPr name="TextBox 8" id="8"/>
-          <p:cNvSpPr txBox="true"/>
-          <p:nvPr/>
-        </p:nvSpPr>
-        <p:spPr>
-          <a:xfrm rot="0">
+          <p:cNvPr id="8" name="TextBox 8"/>
+          <p:cNvSpPr txBox="1"/>
+          <p:nvPr/>
+        </p:nvSpPr>
+        <p:spPr>
+          <a:xfrm>
             <a:off x="669798" y="2090014"/>
             <a:ext cx="6792786" cy="900140"/>
           </a:xfrm>
@@ -8361,7 +8474,7 @@
           </a:prstGeom>
         </p:spPr>
         <p:txBody>
-          <a:bodyPr anchor="t" rtlCol="false" tIns="0" lIns="0" bIns="0" rIns="0">
+          <a:bodyPr lIns="0" tIns="0" rIns="0" bIns="0" rtlCol="0" anchor="t">
             <a:spAutoFit/>
           </a:bodyPr>
           <a:lstStyle/>
@@ -8381,31 +8494,19 @@
                 <a:cs typeface="Arimo"/>
                 <a:sym typeface="Arimo"/>
               </a:rPr>
-              <a:t>Con</a:t>
-            </a:r>
-            <a:r>
-              <a:rPr lang="en-US" sz="5562">
-                <a:solidFill>
-                  <a:srgbClr val="000000"/>
-                </a:solidFill>
-                <a:latin typeface="Arimo"/>
-                <a:ea typeface="Arimo"/>
-                <a:cs typeface="Arimo"/>
-                <a:sym typeface="Arimo"/>
-              </a:rPr>
-              <a:t>siderações Finais</a:t>
-            </a:r>
-          </a:p>
-        </p:txBody>
-      </p:sp>
-      <p:sp>
-        <p:nvSpPr>
-          <p:cNvPr name="TextBox 9" id="9"/>
-          <p:cNvSpPr txBox="true"/>
-          <p:nvPr/>
-        </p:nvSpPr>
-        <p:spPr>
-          <a:xfrm rot="0">
+              <a:t>Considerações Finais</a:t>
+            </a:r>
+          </a:p>
+        </p:txBody>
+      </p:sp>
+      <p:sp>
+        <p:nvSpPr>
+          <p:cNvPr id="9" name="TextBox 9"/>
+          <p:cNvSpPr txBox="1"/>
+          <p:nvPr/>
+        </p:nvSpPr>
+        <p:spPr>
+          <a:xfrm>
             <a:off x="992238" y="4413799"/>
             <a:ext cx="5198269" cy="830761"/>
           </a:xfrm>
@@ -8414,7 +8515,7 @@
           </a:prstGeom>
         </p:spPr>
         <p:txBody>
-          <a:bodyPr anchor="t" rtlCol="false" tIns="0" lIns="0" bIns="0" rIns="0">
+          <a:bodyPr lIns="0" tIns="0" rIns="0" bIns="0" rtlCol="0" anchor="t">
             <a:spAutoFit/>
           </a:bodyPr>
           <a:lstStyle/>
@@ -8441,12 +8542,12 @@
       </p:sp>
       <p:sp>
         <p:nvSpPr>
-          <p:cNvPr name="TextBox 10" id="10"/>
-          <p:cNvSpPr txBox="true"/>
-          <p:nvPr/>
-        </p:nvSpPr>
-        <p:spPr>
-          <a:xfrm rot="0">
+          <p:cNvPr id="10" name="TextBox 10"/>
+          <p:cNvSpPr txBox="1"/>
+          <p:nvPr/>
+        </p:nvSpPr>
+        <p:spPr>
+          <a:xfrm>
             <a:off x="1819275" y="5560666"/>
             <a:ext cx="3544043" cy="481012"/>
           </a:xfrm>
@@ -8455,7 +8556,7 @@
           </a:prstGeom>
         </p:spPr>
         <p:txBody>
-          <a:bodyPr anchor="t" rtlCol="false" tIns="0" lIns="0" bIns="0" rIns="0">
+          <a:bodyPr lIns="0" tIns="0" rIns="0" bIns="0" rtlCol="0" anchor="t">
             <a:spAutoFit/>
           </a:bodyPr>
           <a:lstStyle/>
@@ -8482,12 +8583,12 @@
       </p:sp>
       <p:sp>
         <p:nvSpPr>
-          <p:cNvPr name="TextBox 11" id="11"/>
-          <p:cNvSpPr txBox="true"/>
-          <p:nvPr/>
-        </p:nvSpPr>
-        <p:spPr>
-          <a:xfrm rot="0">
+          <p:cNvPr id="11" name="TextBox 11"/>
+          <p:cNvSpPr txBox="1"/>
+          <p:nvPr/>
+        </p:nvSpPr>
+        <p:spPr>
+          <a:xfrm>
             <a:off x="992238" y="6126061"/>
             <a:ext cx="5198269" cy="992981"/>
           </a:xfrm>
@@ -8496,7 +8597,7 @@
           </a:prstGeom>
         </p:spPr>
         <p:txBody>
-          <a:bodyPr anchor="t" rtlCol="false" tIns="0" lIns="0" bIns="0" rIns="0">
+          <a:bodyPr lIns="0" tIns="0" rIns="0" bIns="0" rtlCol="0" anchor="t">
             <a:spAutoFit/>
           </a:bodyPr>
           <a:lstStyle/>
@@ -8523,12 +8624,12 @@
       </p:sp>
       <p:sp>
         <p:nvSpPr>
-          <p:cNvPr name="TextBox 12" id="12"/>
-          <p:cNvSpPr txBox="true"/>
-          <p:nvPr/>
-        </p:nvSpPr>
-        <p:spPr>
-          <a:xfrm rot="0">
+          <p:cNvPr id="12" name="TextBox 12"/>
+          <p:cNvSpPr txBox="1"/>
+          <p:nvPr/>
+        </p:nvSpPr>
+        <p:spPr>
+          <a:xfrm>
             <a:off x="6544866" y="4413799"/>
             <a:ext cx="5198269" cy="830761"/>
           </a:xfrm>
@@ -8537,7 +8638,7 @@
           </a:prstGeom>
         </p:spPr>
         <p:txBody>
-          <a:bodyPr anchor="t" rtlCol="false" tIns="0" lIns="0" bIns="0" rIns="0">
+          <a:bodyPr lIns="0" tIns="0" rIns="0" bIns="0" rtlCol="0" anchor="t">
             <a:spAutoFit/>
           </a:bodyPr>
           <a:lstStyle/>
@@ -8564,12 +8665,12 @@
       </p:sp>
       <p:sp>
         <p:nvSpPr>
-          <p:cNvPr name="TextBox 13" id="13"/>
-          <p:cNvSpPr txBox="true"/>
-          <p:nvPr/>
-        </p:nvSpPr>
-        <p:spPr>
-          <a:xfrm rot="0">
+          <p:cNvPr id="13" name="TextBox 13"/>
+          <p:cNvSpPr txBox="1"/>
+          <p:nvPr/>
+        </p:nvSpPr>
+        <p:spPr>
+          <a:xfrm>
             <a:off x="7371902" y="5560666"/>
             <a:ext cx="3544043" cy="481012"/>
           </a:xfrm>
@@ -8578,7 +8679,7 @@
           </a:prstGeom>
         </p:spPr>
         <p:txBody>
-          <a:bodyPr anchor="t" rtlCol="false" tIns="0" lIns="0" bIns="0" rIns="0">
+          <a:bodyPr lIns="0" tIns="0" rIns="0" bIns="0" rtlCol="0" anchor="t">
             <a:spAutoFit/>
           </a:bodyPr>
           <a:lstStyle/>
@@ -8605,12 +8706,12 @@
       </p:sp>
       <p:sp>
         <p:nvSpPr>
-          <p:cNvPr name="TextBox 14" id="14"/>
-          <p:cNvSpPr txBox="true"/>
-          <p:nvPr/>
-        </p:nvSpPr>
-        <p:spPr>
-          <a:xfrm rot="0">
+          <p:cNvPr id="14" name="TextBox 14"/>
+          <p:cNvSpPr txBox="1"/>
+          <p:nvPr/>
+        </p:nvSpPr>
+        <p:spPr>
+          <a:xfrm>
             <a:off x="6544866" y="6126061"/>
             <a:ext cx="5198269" cy="992981"/>
           </a:xfrm>
@@ -8619,7 +8720,7 @@
           </a:prstGeom>
         </p:spPr>
         <p:txBody>
-          <a:bodyPr anchor="t" rtlCol="false" tIns="0" lIns="0" bIns="0" rIns="0">
+          <a:bodyPr lIns="0" tIns="0" rIns="0" bIns="0" rtlCol="0" anchor="t">
             <a:spAutoFit/>
           </a:bodyPr>
           <a:lstStyle/>
@@ -8646,12 +8747,12 @@
       </p:sp>
       <p:sp>
         <p:nvSpPr>
-          <p:cNvPr name="TextBox 15" id="15"/>
-          <p:cNvSpPr txBox="true"/>
-          <p:nvPr/>
-        </p:nvSpPr>
-        <p:spPr>
-          <a:xfrm rot="0">
+          <p:cNvPr id="15" name="TextBox 15"/>
+          <p:cNvSpPr txBox="1"/>
+          <p:nvPr/>
+        </p:nvSpPr>
+        <p:spPr>
+          <a:xfrm>
             <a:off x="12097493" y="4413799"/>
             <a:ext cx="5198269" cy="830761"/>
           </a:xfrm>
@@ -8660,7 +8761,7 @@
           </a:prstGeom>
         </p:spPr>
         <p:txBody>
-          <a:bodyPr anchor="t" rtlCol="false" tIns="0" lIns="0" bIns="0" rIns="0">
+          <a:bodyPr lIns="0" tIns="0" rIns="0" bIns="0" rtlCol="0" anchor="t">
             <a:spAutoFit/>
           </a:bodyPr>
           <a:lstStyle/>
@@ -8687,12 +8788,12 @@
       </p:sp>
       <p:sp>
         <p:nvSpPr>
-          <p:cNvPr name="TextBox 16" id="16"/>
-          <p:cNvSpPr txBox="true"/>
-          <p:nvPr/>
-        </p:nvSpPr>
-        <p:spPr>
-          <a:xfrm rot="0">
+          <p:cNvPr id="16" name="TextBox 16"/>
+          <p:cNvSpPr txBox="1"/>
+          <p:nvPr/>
+        </p:nvSpPr>
+        <p:spPr>
+          <a:xfrm>
             <a:off x="13658001" y="5560666"/>
             <a:ext cx="2077099" cy="449262"/>
           </a:xfrm>
@@ -8701,7 +8802,7 @@
           </a:prstGeom>
         </p:spPr>
         <p:txBody>
-          <a:bodyPr anchor="t" rtlCol="false" tIns="0" lIns="0" bIns="0" rIns="0">
+          <a:bodyPr lIns="0" tIns="0" rIns="0" bIns="0" rtlCol="0" anchor="t">
             <a:spAutoFit/>
           </a:bodyPr>
           <a:lstStyle/>
@@ -8728,12 +8829,12 @@
       </p:sp>
       <p:sp>
         <p:nvSpPr>
-          <p:cNvPr name="TextBox 17" id="17"/>
-          <p:cNvSpPr txBox="true"/>
-          <p:nvPr/>
-        </p:nvSpPr>
-        <p:spPr>
-          <a:xfrm rot="0">
+          <p:cNvPr id="17" name="TextBox 17"/>
+          <p:cNvSpPr txBox="1"/>
+          <p:nvPr/>
+        </p:nvSpPr>
+        <p:spPr>
+          <a:xfrm>
             <a:off x="12097493" y="6126061"/>
             <a:ext cx="5198269" cy="1446609"/>
           </a:xfrm>
@@ -8742,7 +8843,7 @@
           </a:prstGeom>
         </p:spPr>
         <p:txBody>
-          <a:bodyPr anchor="t" rtlCol="false" tIns="0" lIns="0" bIns="0" rIns="0">
+          <a:bodyPr lIns="0" tIns="0" rIns="0" bIns="0" rtlCol="0" anchor="t">
             <a:spAutoFit/>
           </a:bodyPr>
           <a:lstStyle/>
@@ -8776,7 +8877,7 @@
 </file>
 
 <file path=ppt/slides/slide15.xml><?xml version="1.0" encoding="utf-8"?>
-<p:sld xmlns:p="http://schemas.openxmlformats.org/presentationml/2006/main" xmlns:a="http://schemas.openxmlformats.org/drawingml/2006/main">
+<p:sld xmlns:a="http://schemas.openxmlformats.org/drawingml/2006/main" xmlns:r="http://schemas.openxmlformats.org/officeDocument/2006/relationships" xmlns:p="http://schemas.openxmlformats.org/presentationml/2006/main">
   <p:cSld>
     <p:spTree>
       <p:nvGrpSpPr>
@@ -8794,12 +8895,12 @@
       </p:grpSpPr>
       <p:sp>
         <p:nvSpPr>
-          <p:cNvPr name="TextBox 2" id="2"/>
-          <p:cNvSpPr txBox="true"/>
-          <p:nvPr/>
-        </p:nvSpPr>
-        <p:spPr>
-          <a:xfrm rot="0">
+          <p:cNvPr id="2" name="TextBox 2"/>
+          <p:cNvSpPr txBox="1"/>
+          <p:nvPr/>
+        </p:nvSpPr>
+        <p:spPr>
+          <a:xfrm>
             <a:off x="139652" y="613923"/>
             <a:ext cx="18008697" cy="9097255"/>
           </a:xfrm>
@@ -8808,7 +8909,7 @@
           </a:prstGeom>
         </p:spPr>
         <p:txBody>
-          <a:bodyPr anchor="t" rtlCol="false" tIns="0" lIns="0" bIns="0" rIns="0">
+          <a:bodyPr lIns="0" tIns="0" rIns="0" bIns="0" rtlCol="0" anchor="t">
             <a:spAutoFit/>
           </a:bodyPr>
           <a:lstStyle/>
@@ -8843,6 +8944,15 @@
                 <a:spcPct val="0"/>
               </a:spcBef>
             </a:pPr>
+            <a:endParaRPr lang="en-US" sz="2599">
+              <a:solidFill>
+                <a:srgbClr val="000000"/>
+              </a:solidFill>
+              <a:latin typeface="Arimo"/>
+              <a:ea typeface="Arimo"/>
+              <a:cs typeface="Arimo"/>
+              <a:sym typeface="Arimo"/>
+            </a:endParaRPr>
           </a:p>
           <a:p>
             <a:pPr algn="l">
@@ -8853,6 +8963,15 @@
                 <a:spcPct val="0"/>
               </a:spcBef>
             </a:pPr>
+            <a:endParaRPr lang="en-US" sz="2599">
+              <a:solidFill>
+                <a:srgbClr val="000000"/>
+              </a:solidFill>
+              <a:latin typeface="Arimo"/>
+              <a:ea typeface="Arimo"/>
+              <a:cs typeface="Arimo"/>
+              <a:sym typeface="Arimo"/>
+            </a:endParaRPr>
           </a:p>
           <a:p>
             <a:pPr algn="l">
@@ -8876,7 +8995,7 @@
               <a:t> BRASIL. [Portal da Legislação]. </a:t>
             </a:r>
             <a:r>
-              <a:rPr lang="en-US" b="true" sz="2599">
+              <a:rPr lang="en-US" sz="2599" b="1">
                 <a:solidFill>
                   <a:srgbClr val="000000"/>
                 </a:solidFill>
@@ -8909,6 +9028,15 @@
                 <a:spcPct val="0"/>
               </a:spcBef>
             </a:pPr>
+            <a:endParaRPr lang="en-US" sz="2599">
+              <a:solidFill>
+                <a:srgbClr val="000000"/>
+              </a:solidFill>
+              <a:latin typeface="Arimo"/>
+              <a:ea typeface="Arimo"/>
+              <a:cs typeface="Arimo"/>
+              <a:sym typeface="Arimo"/>
+            </a:endParaRPr>
           </a:p>
           <a:p>
             <a:pPr algn="l">
@@ -8932,7 +9060,7 @@
               <a:t>BRASIL. [Portal da Legislação]. </a:t>
             </a:r>
             <a:r>
-              <a:rPr lang="en-US" b="true" sz="2599">
+              <a:rPr lang="en-US" sz="2599" b="1">
                 <a:solidFill>
                   <a:srgbClr val="000000"/>
                 </a:solidFill>
@@ -8965,6 +9093,15 @@
                 <a:spcPct val="0"/>
               </a:spcBef>
             </a:pPr>
+            <a:endParaRPr lang="en-US" sz="2599">
+              <a:solidFill>
+                <a:srgbClr val="000000"/>
+              </a:solidFill>
+              <a:latin typeface="Arimo"/>
+              <a:ea typeface="Arimo"/>
+              <a:cs typeface="Arimo"/>
+              <a:sym typeface="Arimo"/>
+            </a:endParaRPr>
           </a:p>
           <a:p>
             <a:pPr algn="l">
@@ -8988,7 +9125,7 @@
               <a:t>BRASIL. </a:t>
             </a:r>
             <a:r>
-              <a:rPr lang="en-US" b="true" sz="2599">
+              <a:rPr lang="en-US" sz="2599" b="1">
                 <a:solidFill>
                   <a:srgbClr val="000000"/>
                 </a:solidFill>
@@ -9021,6 +9158,15 @@
                 <a:spcPct val="0"/>
               </a:spcBef>
             </a:pPr>
+            <a:endParaRPr lang="en-US" sz="2599">
+              <a:solidFill>
+                <a:srgbClr val="000000"/>
+              </a:solidFill>
+              <a:latin typeface="Arimo"/>
+              <a:ea typeface="Arimo"/>
+              <a:cs typeface="Arimo"/>
+              <a:sym typeface="Arimo"/>
+            </a:endParaRPr>
           </a:p>
           <a:p>
             <a:pPr algn="l">
@@ -9044,7 +9190,7 @@
               <a:t>MICROSOFT. </a:t>
             </a:r>
             <a:r>
-              <a:rPr lang="en-US" b="true" sz="2599">
+              <a:rPr lang="en-US" sz="2599" b="1">
                 <a:solidFill>
                   <a:srgbClr val="000000"/>
                 </a:solidFill>
@@ -9077,6 +9223,15 @@
                 <a:spcPct val="0"/>
               </a:spcBef>
             </a:pPr>
+            <a:endParaRPr lang="en-US" sz="2599">
+              <a:solidFill>
+                <a:srgbClr val="000000"/>
+              </a:solidFill>
+              <a:latin typeface="Arimo"/>
+              <a:ea typeface="Arimo"/>
+              <a:cs typeface="Arimo"/>
+              <a:sym typeface="Arimo"/>
+            </a:endParaRPr>
           </a:p>
           <a:p>
             <a:pPr algn="l">
@@ -9100,7 +9255,7 @@
               <a:t>OWASP FOUNDATION. </a:t>
             </a:r>
             <a:r>
-              <a:rPr lang="en-US" b="true" sz="2599">
+              <a:rPr lang="en-US" sz="2599" b="1">
                 <a:solidFill>
                   <a:srgbClr val="000000"/>
                 </a:solidFill>
@@ -9133,6 +9288,15 @@
                 <a:spcPct val="0"/>
               </a:spcBef>
             </a:pPr>
+            <a:endParaRPr lang="en-US" sz="2599">
+              <a:solidFill>
+                <a:srgbClr val="000000"/>
+              </a:solidFill>
+              <a:latin typeface="Arimo"/>
+              <a:ea typeface="Arimo"/>
+              <a:cs typeface="Arimo"/>
+              <a:sym typeface="Arimo"/>
+            </a:endParaRPr>
           </a:p>
           <a:p>
             <a:pPr algn="l">
@@ -9156,7 +9320,7 @@
               <a:t>OWASP FOUNDATION. </a:t>
             </a:r>
             <a:r>
-              <a:rPr lang="en-US" b="true" sz="2599">
+              <a:rPr lang="en-US" sz="2599" b="1">
                 <a:solidFill>
                   <a:srgbClr val="000000"/>
                 </a:solidFill>
@@ -9189,6 +9353,15 @@
                 <a:spcPct val="0"/>
               </a:spcBef>
             </a:pPr>
+            <a:endParaRPr lang="en-US" sz="2599">
+              <a:solidFill>
+                <a:srgbClr val="000000"/>
+              </a:solidFill>
+              <a:latin typeface="Arimo"/>
+              <a:ea typeface="Arimo"/>
+              <a:cs typeface="Arimo"/>
+              <a:sym typeface="Arimo"/>
+            </a:endParaRPr>
           </a:p>
           <a:p>
             <a:pPr algn="l">
@@ -9212,7 +9385,7 @@
               <a:t>SUPABASE INC. </a:t>
             </a:r>
             <a:r>
-              <a:rPr lang="en-US" b="true" sz="2599">
+              <a:rPr lang="en-US" sz="2599" b="1">
                 <a:solidFill>
                   <a:srgbClr val="000000"/>
                 </a:solidFill>
@@ -9247,7 +9420,7 @@
 </file>
 
 <file path=ppt/slides/slide16.xml><?xml version="1.0" encoding="utf-8"?>
-<p:sld xmlns:p="http://schemas.openxmlformats.org/presentationml/2006/main" xmlns:a="http://schemas.openxmlformats.org/drawingml/2006/main" xmlns:r="http://schemas.openxmlformats.org/officeDocument/2006/relationships">
+<p:sld xmlns:a="http://schemas.openxmlformats.org/drawingml/2006/main" xmlns:r="http://schemas.openxmlformats.org/officeDocument/2006/relationships" xmlns:p="http://schemas.openxmlformats.org/presentationml/2006/main">
   <p:cSld>
     <p:spTree>
       <p:nvGrpSpPr>
@@ -9265,12 +9438,12 @@
       </p:grpSpPr>
       <p:grpSp>
         <p:nvGrpSpPr>
-          <p:cNvPr name="Group 2" id="2"/>
+          <p:cNvPr id="2" name="Group 2"/>
           <p:cNvGrpSpPr/>
           <p:nvPr/>
         </p:nvGrpSpPr>
         <p:grpSpPr>
-          <a:xfrm rot="0">
+          <a:xfrm>
             <a:off x="669798" y="685800"/>
             <a:ext cx="5554980" cy="142494"/>
             <a:chOff x="0" y="0"/>
@@ -9279,12 +9452,12 @@
         </p:grpSpPr>
         <p:sp>
           <p:nvSpPr>
-            <p:cNvPr name="Freeform 3" id="3"/>
+            <p:cNvPr id="3" name="Freeform 3"/>
             <p:cNvSpPr/>
             <p:nvPr/>
           </p:nvSpPr>
           <p:spPr>
-            <a:xfrm flipH="false" flipV="false" rot="0">
+            <a:xfrm>
               <a:off x="0" y="0"/>
               <a:ext cx="7406640" cy="189992"/>
             </a:xfrm>
@@ -9293,9 +9466,9 @@
               <a:gdLst/>
               <a:ahLst/>
               <a:cxnLst/>
-              <a:rect r="r" b="b" t="t" l="l"/>
+              <a:rect l="l" t="t" r="r" b="b"/>
               <a:pathLst>
-                <a:path h="189992" w="7406640">
+                <a:path w="7406640" h="189992">
                   <a:moveTo>
                     <a:pt x="0" y="0"/>
                   </a:moveTo>
@@ -9320,12 +9493,12 @@
       </p:grpSp>
       <p:grpSp>
         <p:nvGrpSpPr>
-          <p:cNvPr name="Group 4" id="4"/>
+          <p:cNvPr id="4" name="Group 4"/>
           <p:cNvGrpSpPr/>
           <p:nvPr/>
         </p:nvGrpSpPr>
         <p:grpSpPr>
-          <a:xfrm rot="0">
+          <a:xfrm>
             <a:off x="12063222" y="680466"/>
             <a:ext cx="5554980" cy="147828"/>
             <a:chOff x="0" y="0"/>
@@ -9334,12 +9507,12 @@
         </p:grpSpPr>
         <p:sp>
           <p:nvSpPr>
-            <p:cNvPr name="Freeform 5" id="5"/>
+            <p:cNvPr id="5" name="Freeform 5"/>
             <p:cNvSpPr/>
             <p:nvPr/>
           </p:nvSpPr>
           <p:spPr>
-            <a:xfrm flipH="false" flipV="false" rot="0">
+            <a:xfrm>
               <a:off x="0" y="0"/>
               <a:ext cx="7406640" cy="197104"/>
             </a:xfrm>
@@ -9348,9 +9521,9 @@
               <a:gdLst/>
               <a:ahLst/>
               <a:cxnLst/>
-              <a:rect r="r" b="b" t="t" l="l"/>
+              <a:rect l="l" t="t" r="r" b="b"/>
               <a:pathLst>
-                <a:path h="197104" w="7406640">
+                <a:path w="7406640" h="197104">
                   <a:moveTo>
                     <a:pt x="0" y="0"/>
                   </a:moveTo>
@@ -9375,12 +9548,12 @@
       </p:grpSp>
       <p:grpSp>
         <p:nvGrpSpPr>
-          <p:cNvPr name="Group 6" id="6"/>
+          <p:cNvPr id="6" name="Group 6"/>
           <p:cNvGrpSpPr/>
           <p:nvPr/>
         </p:nvGrpSpPr>
         <p:grpSpPr>
-          <a:xfrm rot="0">
+          <a:xfrm>
             <a:off x="6362748" y="685800"/>
             <a:ext cx="5554980" cy="137160"/>
             <a:chOff x="0" y="0"/>
@@ -9389,12 +9562,12 @@
         </p:grpSpPr>
         <p:sp>
           <p:nvSpPr>
-            <p:cNvPr name="Freeform 7" id="7"/>
+            <p:cNvPr id="7" name="Freeform 7"/>
             <p:cNvSpPr/>
             <p:nvPr/>
           </p:nvSpPr>
           <p:spPr>
-            <a:xfrm flipH="false" flipV="false" rot="0">
+            <a:xfrm>
               <a:off x="0" y="0"/>
               <a:ext cx="7406640" cy="182880"/>
             </a:xfrm>
@@ -9403,9 +9576,9 @@
               <a:gdLst/>
               <a:ahLst/>
               <a:cxnLst/>
-              <a:rect r="r" b="b" t="t" l="l"/>
+              <a:rect l="l" t="t" r="r" b="b"/>
               <a:pathLst>
-                <a:path h="182880" w="7406640">
+                <a:path w="7406640" h="182880">
                   <a:moveTo>
                     <a:pt x="0" y="0"/>
                   </a:moveTo>
@@ -9430,12 +9603,12 @@
       </p:grpSp>
       <p:grpSp>
         <p:nvGrpSpPr>
-          <p:cNvPr name="Group 8" id="8"/>
+          <p:cNvPr id="8" name="Group 8"/>
           <p:cNvGrpSpPr/>
           <p:nvPr/>
         </p:nvGrpSpPr>
         <p:grpSpPr>
-          <a:xfrm rot="0">
+          <a:xfrm>
             <a:off x="669798" y="446885"/>
             <a:ext cx="18288000" cy="3544043"/>
             <a:chOff x="0" y="0"/>
@@ -9444,12 +9617,12 @@
         </p:grpSpPr>
         <p:sp>
           <p:nvSpPr>
-            <p:cNvPr name="Freeform 9" id="9" descr="preencoded.png"/>
+            <p:cNvPr id="9" name="Freeform 9" descr="preencoded.png"/>
             <p:cNvSpPr/>
             <p:nvPr/>
           </p:nvSpPr>
           <p:spPr>
-            <a:xfrm flipH="false" flipV="false" rot="0">
+            <a:xfrm>
               <a:off x="0" y="0"/>
               <a:ext cx="24384000" cy="4725416"/>
             </a:xfrm>
@@ -9458,9 +9631,9 @@
               <a:gdLst/>
               <a:ahLst/>
               <a:cxnLst/>
-              <a:rect r="r" b="b" t="t" l="l"/>
+              <a:rect l="l" t="t" r="r" b="b"/>
               <a:pathLst>
-                <a:path h="4725416" w="24384000">
+                <a:path w="24384000" h="4725416">
                   <a:moveTo>
                     <a:pt x="0" y="0"/>
                   </a:moveTo>
@@ -9483,7 +9656,7 @@
             <a:blipFill>
               <a:blip r:embed="rId3"/>
               <a:stretch>
-                <a:fillRect l="-10" t="0" r="-10" b="0"/>
+                <a:fillRect l="-10" r="-10"/>
               </a:stretch>
             </a:blipFill>
           </p:spPr>
@@ -9491,12 +9664,12 @@
       </p:grpSp>
       <p:sp>
         <p:nvSpPr>
-          <p:cNvPr name="TextBox 10" id="10"/>
-          <p:cNvSpPr txBox="true"/>
-          <p:nvPr/>
-        </p:nvSpPr>
-        <p:spPr>
-          <a:xfrm rot="0">
+          <p:cNvPr id="10" name="TextBox 10"/>
+          <p:cNvSpPr txBox="1"/>
+          <p:nvPr/>
+        </p:nvSpPr>
+        <p:spPr>
+          <a:xfrm>
             <a:off x="809358" y="7864373"/>
             <a:ext cx="14176619" cy="1876873"/>
           </a:xfrm>
@@ -9505,7 +9678,7 @@
           </a:prstGeom>
         </p:spPr>
         <p:txBody>
-          <a:bodyPr anchor="t" rtlCol="false" tIns="0" lIns="0" bIns="0" rIns="0">
+          <a:bodyPr lIns="0" tIns="0" rIns="0" bIns="0" rtlCol="0" anchor="t">
             <a:spAutoFit/>
           </a:bodyPr>
           <a:lstStyle/>
@@ -9532,12 +9705,12 @@
       </p:sp>
       <p:grpSp>
         <p:nvGrpSpPr>
-          <p:cNvPr name="Group 11" id="11"/>
+          <p:cNvPr id="11" name="Group 11"/>
           <p:cNvGrpSpPr/>
           <p:nvPr/>
         </p:nvGrpSpPr>
         <p:grpSpPr>
-          <a:xfrm rot="0">
+          <a:xfrm>
             <a:off x="13892508" y="6294672"/>
             <a:ext cx="3723294" cy="3723294"/>
             <a:chOff x="0" y="0"/>
@@ -9546,12 +9719,12 @@
         </p:grpSpPr>
         <p:sp>
           <p:nvSpPr>
-            <p:cNvPr name="Freeform 12" id="12"/>
+            <p:cNvPr id="12" name="Freeform 12"/>
             <p:cNvSpPr/>
             <p:nvPr/>
           </p:nvSpPr>
           <p:spPr>
-            <a:xfrm flipH="false" flipV="false" rot="0">
+            <a:xfrm>
               <a:off x="0" y="0"/>
               <a:ext cx="4964430" cy="4964430"/>
             </a:xfrm>
@@ -9560,9 +9733,9 @@
               <a:gdLst/>
               <a:ahLst/>
               <a:cxnLst/>
-              <a:rect r="r" b="b" t="t" l="l"/>
+              <a:rect l="l" t="t" r="r" b="b"/>
               <a:pathLst>
-                <a:path h="4964430" w="4964430">
+                <a:path w="4964430" h="4964430">
                   <a:moveTo>
                     <a:pt x="0" y="0"/>
                   </a:moveTo>
@@ -9585,7 +9758,7 @@
             <a:blipFill>
               <a:blip r:embed="rId4"/>
               <a:stretch>
-                <a:fillRect l="0" t="0" r="0" b="0"/>
+                <a:fillRect/>
               </a:stretch>
             </a:blipFill>
           </p:spPr>
@@ -9593,12 +9766,12 @@
       </p:grpSp>
       <p:grpSp>
         <p:nvGrpSpPr>
-          <p:cNvPr name="Group 13" id="13"/>
+          <p:cNvPr id="13" name="Group 13"/>
           <p:cNvGrpSpPr/>
           <p:nvPr/>
         </p:nvGrpSpPr>
         <p:grpSpPr>
-          <a:xfrm rot="0">
+          <a:xfrm>
             <a:off x="-165678" y="0"/>
             <a:ext cx="6597253" cy="6597253"/>
             <a:chOff x="0" y="0"/>
@@ -9607,12 +9780,12 @@
         </p:grpSpPr>
         <p:sp>
           <p:nvSpPr>
-            <p:cNvPr name="Freeform 14" id="14"/>
+            <p:cNvPr id="14" name="Freeform 14"/>
             <p:cNvSpPr/>
             <p:nvPr/>
           </p:nvSpPr>
           <p:spPr>
-            <a:xfrm flipH="false" flipV="false" rot="0">
+            <a:xfrm>
               <a:off x="0" y="0"/>
               <a:ext cx="8796401" cy="8796401"/>
             </a:xfrm>
@@ -9621,9 +9794,9 @@
               <a:gdLst/>
               <a:ahLst/>
               <a:cxnLst/>
-              <a:rect r="r" b="b" t="t" l="l"/>
+              <a:rect l="l" t="t" r="r" b="b"/>
               <a:pathLst>
-                <a:path h="8796401" w="8796401">
+                <a:path w="8796401" h="8796401">
                   <a:moveTo>
                     <a:pt x="0" y="0"/>
                   </a:moveTo>
@@ -9646,7 +9819,7 @@
             <a:blipFill>
               <a:blip r:embed="rId5"/>
               <a:stretch>
-                <a:fillRect l="0" t="0" r="0" b="0"/>
+                <a:fillRect/>
               </a:stretch>
             </a:blipFill>
           </p:spPr>
@@ -9654,12 +9827,12 @@
       </p:grpSp>
       <p:sp>
         <p:nvSpPr>
-          <p:cNvPr name="TextBox 15" id="15"/>
-          <p:cNvSpPr txBox="true"/>
-          <p:nvPr/>
-        </p:nvSpPr>
-        <p:spPr>
-          <a:xfrm rot="0">
+          <p:cNvPr id="15" name="TextBox 15"/>
+          <p:cNvSpPr txBox="1"/>
+          <p:nvPr/>
+        </p:nvSpPr>
+        <p:spPr>
+          <a:xfrm>
             <a:off x="13875144" y="5234930"/>
             <a:ext cx="3758013" cy="1100823"/>
           </a:xfrm>
@@ -9668,7 +9841,7 @@
           </a:prstGeom>
         </p:spPr>
         <p:txBody>
-          <a:bodyPr anchor="t" rtlCol="false" tIns="0" lIns="0" bIns="0" rIns="0">
+          <a:bodyPr lIns="0" tIns="0" rIns="0" bIns="0" rtlCol="0" anchor="t">
             <a:spAutoFit/>
           </a:bodyPr>
           <a:lstStyle/>
@@ -9679,7 +9852,7 @@
               </a:lnSpc>
             </a:pPr>
             <a:r>
-              <a:rPr lang="en-US" sz="2249" b="true">
+              <a:rPr lang="en-US" sz="2249" b="1">
                 <a:solidFill>
                   <a:srgbClr val="000000"/>
                 </a:solidFill>
@@ -9702,7 +9875,7 @@
 </file>
 
 <file path=ppt/slides/slide2.xml><?xml version="1.0" encoding="utf-8"?>
-<p:sld xmlns:p="http://schemas.openxmlformats.org/presentationml/2006/main" xmlns:a="http://schemas.openxmlformats.org/drawingml/2006/main" xmlns:r="http://schemas.openxmlformats.org/officeDocument/2006/relationships">
+<p:sld xmlns:a="http://schemas.openxmlformats.org/drawingml/2006/main" xmlns:r="http://schemas.openxmlformats.org/officeDocument/2006/relationships" xmlns:p="http://schemas.openxmlformats.org/presentationml/2006/main">
   <p:cSld>
     <p:spTree>
       <p:nvGrpSpPr>
@@ -9720,12 +9893,12 @@
       </p:grpSpPr>
       <p:grpSp>
         <p:nvGrpSpPr>
-          <p:cNvPr name="Group 2" id="2"/>
+          <p:cNvPr id="2" name="Group 2"/>
           <p:cNvGrpSpPr/>
           <p:nvPr/>
         </p:nvGrpSpPr>
         <p:grpSpPr>
-          <a:xfrm rot="0">
+          <a:xfrm>
             <a:off x="669798" y="685800"/>
             <a:ext cx="5554980" cy="142494"/>
             <a:chOff x="0" y="0"/>
@@ -9734,12 +9907,12 @@
         </p:grpSpPr>
         <p:sp>
           <p:nvSpPr>
-            <p:cNvPr name="Freeform 3" id="3"/>
+            <p:cNvPr id="3" name="Freeform 3"/>
             <p:cNvSpPr/>
             <p:nvPr/>
           </p:nvSpPr>
           <p:spPr>
-            <a:xfrm flipH="false" flipV="false" rot="0">
+            <a:xfrm>
               <a:off x="0" y="0"/>
               <a:ext cx="7406640" cy="189992"/>
             </a:xfrm>
@@ -9748,9 +9921,9 @@
               <a:gdLst/>
               <a:ahLst/>
               <a:cxnLst/>
-              <a:rect r="r" b="b" t="t" l="l"/>
+              <a:rect l="l" t="t" r="r" b="b"/>
               <a:pathLst>
-                <a:path h="189992" w="7406640">
+                <a:path w="7406640" h="189992">
                   <a:moveTo>
                     <a:pt x="0" y="0"/>
                   </a:moveTo>
@@ -9775,12 +9948,12 @@
       </p:grpSp>
       <p:grpSp>
         <p:nvGrpSpPr>
-          <p:cNvPr name="Group 4" id="4"/>
+          <p:cNvPr id="4" name="Group 4"/>
           <p:cNvGrpSpPr/>
           <p:nvPr/>
         </p:nvGrpSpPr>
         <p:grpSpPr>
-          <a:xfrm rot="0">
+          <a:xfrm>
             <a:off x="12063222" y="680466"/>
             <a:ext cx="5554980" cy="147828"/>
             <a:chOff x="0" y="0"/>
@@ -9789,12 +9962,12 @@
         </p:grpSpPr>
         <p:sp>
           <p:nvSpPr>
-            <p:cNvPr name="Freeform 5" id="5"/>
+            <p:cNvPr id="5" name="Freeform 5"/>
             <p:cNvSpPr/>
             <p:nvPr/>
           </p:nvSpPr>
           <p:spPr>
-            <a:xfrm flipH="false" flipV="false" rot="0">
+            <a:xfrm>
               <a:off x="0" y="0"/>
               <a:ext cx="7406640" cy="197104"/>
             </a:xfrm>
@@ -9803,9 +9976,9 @@
               <a:gdLst/>
               <a:ahLst/>
               <a:cxnLst/>
-              <a:rect r="r" b="b" t="t" l="l"/>
+              <a:rect l="l" t="t" r="r" b="b"/>
               <a:pathLst>
-                <a:path h="197104" w="7406640">
+                <a:path w="7406640" h="197104">
                   <a:moveTo>
                     <a:pt x="0" y="0"/>
                   </a:moveTo>
@@ -9830,12 +10003,12 @@
       </p:grpSp>
       <p:grpSp>
         <p:nvGrpSpPr>
-          <p:cNvPr name="Group 6" id="6"/>
+          <p:cNvPr id="6" name="Group 6"/>
           <p:cNvGrpSpPr/>
           <p:nvPr/>
         </p:nvGrpSpPr>
         <p:grpSpPr>
-          <a:xfrm rot="0">
+          <a:xfrm>
             <a:off x="6362748" y="685800"/>
             <a:ext cx="5554980" cy="137160"/>
             <a:chOff x="0" y="0"/>
@@ -9844,12 +10017,12 @@
         </p:grpSpPr>
         <p:sp>
           <p:nvSpPr>
-            <p:cNvPr name="Freeform 7" id="7"/>
+            <p:cNvPr id="7" name="Freeform 7"/>
             <p:cNvSpPr/>
             <p:nvPr/>
           </p:nvSpPr>
           <p:spPr>
-            <a:xfrm flipH="false" flipV="false" rot="0">
+            <a:xfrm>
               <a:off x="0" y="0"/>
               <a:ext cx="7406640" cy="182880"/>
             </a:xfrm>
@@ -9858,9 +10031,9 @@
               <a:gdLst/>
               <a:ahLst/>
               <a:cxnLst/>
-              <a:rect r="r" b="b" t="t" l="l"/>
+              <a:rect l="l" t="t" r="r" b="b"/>
               <a:pathLst>
-                <a:path h="182880" w="7406640">
+                <a:path w="7406640" h="182880">
                   <a:moveTo>
                     <a:pt x="0" y="0"/>
                   </a:moveTo>
@@ -9885,12 +10058,12 @@
       </p:grpSp>
       <p:grpSp>
         <p:nvGrpSpPr>
-          <p:cNvPr name="Group 8" id="8"/>
+          <p:cNvPr id="8" name="Group 8"/>
           <p:cNvGrpSpPr/>
           <p:nvPr/>
         </p:nvGrpSpPr>
         <p:grpSpPr>
-          <a:xfrm rot="0">
+          <a:xfrm>
             <a:off x="669798" y="1409169"/>
             <a:ext cx="155977" cy="3070774"/>
             <a:chOff x="0" y="0"/>
@@ -9899,12 +10072,12 @@
         </p:grpSpPr>
         <p:sp>
           <p:nvSpPr>
-            <p:cNvPr name="Freeform 9" id="9" descr="preencoded.png"/>
+            <p:cNvPr id="9" name="Freeform 9" descr="preencoded.png"/>
             <p:cNvSpPr/>
             <p:nvPr/>
           </p:nvSpPr>
           <p:spPr>
-            <a:xfrm flipH="false" flipV="false" rot="0">
+            <a:xfrm>
               <a:off x="0" y="0"/>
               <a:ext cx="207969" cy="4094353"/>
             </a:xfrm>
@@ -9913,9 +10086,9 @@
               <a:gdLst/>
               <a:ahLst/>
               <a:cxnLst/>
-              <a:rect r="r" b="b" t="t" l="l"/>
+              <a:rect l="l" t="t" r="r" b="b"/>
               <a:pathLst>
-                <a:path h="4094353" w="207969">
+                <a:path w="207969" h="4094353">
                   <a:moveTo>
                     <a:pt x="0" y="0"/>
                   </a:moveTo>
@@ -9938,7 +10111,7 @@
             <a:blipFill>
               <a:blip r:embed="rId3"/>
               <a:stretch>
-                <a:fillRect l="-6" t="-1115" r="0" b="-1116"/>
+                <a:fillRect l="-6" t="-1115" b="-1116"/>
               </a:stretch>
             </a:blipFill>
           </p:spPr>
@@ -9946,12 +10119,12 @@
       </p:grpSp>
       <p:grpSp>
         <p:nvGrpSpPr>
-          <p:cNvPr name="Group 10" id="10"/>
+          <p:cNvPr id="10" name="Group 10"/>
           <p:cNvGrpSpPr/>
           <p:nvPr/>
         </p:nvGrpSpPr>
         <p:grpSpPr>
-          <a:xfrm rot="0">
+          <a:xfrm>
             <a:off x="6328519" y="1409169"/>
             <a:ext cx="155977" cy="3070774"/>
             <a:chOff x="0" y="0"/>
@@ -9960,12 +10133,12 @@
         </p:grpSpPr>
         <p:sp>
           <p:nvSpPr>
-            <p:cNvPr name="Freeform 11" id="11" descr="preencoded.png"/>
+            <p:cNvPr id="11" name="Freeform 11" descr="preencoded.png"/>
             <p:cNvSpPr/>
             <p:nvPr/>
           </p:nvSpPr>
           <p:spPr>
-            <a:xfrm flipH="false" flipV="false" rot="0">
+            <a:xfrm>
               <a:off x="0" y="0"/>
               <a:ext cx="207969" cy="4094353"/>
             </a:xfrm>
@@ -9974,9 +10147,9 @@
               <a:gdLst/>
               <a:ahLst/>
               <a:cxnLst/>
-              <a:rect r="r" b="b" t="t" l="l"/>
+              <a:rect l="l" t="t" r="r" b="b"/>
               <a:pathLst>
-                <a:path h="4094353" w="207969">
+                <a:path w="207969" h="4094353">
                   <a:moveTo>
                     <a:pt x="0" y="0"/>
                   </a:moveTo>
@@ -9999,7 +10172,7 @@
             <a:blipFill>
               <a:blip r:embed="rId3"/>
               <a:stretch>
-                <a:fillRect l="-6" t="-1115" r="0" b="-1116"/>
+                <a:fillRect l="-6" t="-1115" b="-1116"/>
               </a:stretch>
             </a:blipFill>
           </p:spPr>
@@ -10007,12 +10180,12 @@
       </p:grpSp>
       <p:grpSp>
         <p:nvGrpSpPr>
-          <p:cNvPr name="Group 12" id="12"/>
+          <p:cNvPr id="12" name="Group 12"/>
           <p:cNvGrpSpPr/>
           <p:nvPr/>
         </p:nvGrpSpPr>
         <p:grpSpPr>
-          <a:xfrm rot="0">
+          <a:xfrm>
             <a:off x="11987230" y="1409169"/>
             <a:ext cx="155977" cy="3070774"/>
             <a:chOff x="0" y="0"/>
@@ -10021,12 +10194,12 @@
         </p:grpSpPr>
         <p:sp>
           <p:nvSpPr>
-            <p:cNvPr name="Freeform 13" id="13" descr="preencoded.png"/>
+            <p:cNvPr id="13" name="Freeform 13" descr="preencoded.png"/>
             <p:cNvSpPr/>
             <p:nvPr/>
           </p:nvSpPr>
           <p:spPr>
-            <a:xfrm flipH="false" flipV="false" rot="0">
+            <a:xfrm>
               <a:off x="0" y="0"/>
               <a:ext cx="207969" cy="4094353"/>
             </a:xfrm>
@@ -10035,9 +10208,9 @@
               <a:gdLst/>
               <a:ahLst/>
               <a:cxnLst/>
-              <a:rect r="r" b="b" t="t" l="l"/>
+              <a:rect l="l" t="t" r="r" b="b"/>
               <a:pathLst>
-                <a:path h="4094353" w="207969">
+                <a:path w="207969" h="4094353">
                   <a:moveTo>
                     <a:pt x="0" y="0"/>
                   </a:moveTo>
@@ -10060,7 +10233,7 @@
             <a:blipFill>
               <a:blip r:embed="rId3"/>
               <a:stretch>
-                <a:fillRect l="-6" t="-1115" r="0" b="-1116"/>
+                <a:fillRect l="-6" t="-1115" b="-1116"/>
               </a:stretch>
             </a:blipFill>
           </p:spPr>
@@ -10068,12 +10241,12 @@
       </p:grpSp>
       <p:sp>
         <p:nvSpPr>
-          <p:cNvPr name="TextBox 14" id="14"/>
-          <p:cNvSpPr txBox="true"/>
-          <p:nvPr/>
-        </p:nvSpPr>
-        <p:spPr>
-          <a:xfrm rot="0">
+          <p:cNvPr id="14" name="TextBox 14"/>
+          <p:cNvSpPr txBox="1"/>
+          <p:nvPr/>
+        </p:nvSpPr>
+        <p:spPr>
+          <a:xfrm>
             <a:off x="628612" y="5975368"/>
             <a:ext cx="16948404" cy="1056172"/>
           </a:xfrm>
@@ -10082,7 +10255,7 @@
           </a:prstGeom>
         </p:spPr>
         <p:txBody>
-          <a:bodyPr anchor="t" rtlCol="false" tIns="0" lIns="0" bIns="0" rIns="0">
+          <a:bodyPr lIns="0" tIns="0" rIns="0" bIns="0" rtlCol="0" anchor="t">
             <a:spAutoFit/>
           </a:bodyPr>
           <a:lstStyle/>
@@ -10102,31 +10275,19 @@
                 <a:cs typeface="Arimo"/>
                 <a:sym typeface="Arimo"/>
               </a:rPr>
-              <a:t>Como</a:t>
-            </a:r>
-            <a:r>
-              <a:rPr lang="en-US" sz="3362">
-                <a:solidFill>
-                  <a:srgbClr val="000000"/>
-                </a:solidFill>
-                <a:latin typeface="Arimo"/>
-                <a:ea typeface="Arimo"/>
-                <a:cs typeface="Arimo"/>
-                <a:sym typeface="Arimo"/>
-              </a:rPr>
-              <a:t> desenvolver um sistema web seguro, acessível e funcional que centralize a gestão de alunos atípicos, facilitando o trabalho de gestores, cuidadores e responsáveis?</a:t>
-            </a:r>
-          </a:p>
-        </p:txBody>
-      </p:sp>
-      <p:sp>
-        <p:nvSpPr>
-          <p:cNvPr name="TextBox 15" id="15"/>
-          <p:cNvSpPr txBox="true"/>
-          <p:nvPr/>
-        </p:nvSpPr>
-        <p:spPr>
-          <a:xfrm rot="0">
+              <a:t>Como desenvolver um sistema web seguro, acessível e funcional que centralize a gestão de alunos atípicos, facilitando o trabalho de gestores, cuidadores e responsáveis?</a:t>
+            </a:r>
+          </a:p>
+        </p:txBody>
+      </p:sp>
+      <p:sp>
+        <p:nvSpPr>
+          <p:cNvPr id="15" name="TextBox 15"/>
+          <p:cNvSpPr txBox="1"/>
+          <p:nvPr/>
+        </p:nvSpPr>
+        <p:spPr>
+          <a:xfrm>
             <a:off x="1150371" y="1692690"/>
             <a:ext cx="1330730" cy="449262"/>
           </a:xfrm>
@@ -10135,7 +10296,7 @@
           </a:prstGeom>
         </p:spPr>
         <p:txBody>
-          <a:bodyPr anchor="t" rtlCol="false" tIns="0" lIns="0" bIns="0" rIns="0">
+          <a:bodyPr lIns="0" tIns="0" rIns="0" bIns="0" rtlCol="0" anchor="t">
             <a:spAutoFit/>
           </a:bodyPr>
           <a:lstStyle/>
@@ -10146,7 +10307,7 @@
               </a:lnSpc>
             </a:pPr>
             <a:r>
-              <a:rPr lang="en-US" sz="2750" b="true">
+              <a:rPr lang="en-US" sz="2750" b="1">
                 <a:solidFill>
                   <a:srgbClr val="000000"/>
                 </a:solidFill>
@@ -10162,12 +10323,12 @@
       </p:sp>
       <p:sp>
         <p:nvSpPr>
-          <p:cNvPr name="TextBox 16" id="16"/>
-          <p:cNvSpPr txBox="true"/>
-          <p:nvPr/>
-        </p:nvSpPr>
-        <p:spPr>
-          <a:xfrm rot="0">
+          <p:cNvPr id="16" name="TextBox 16"/>
+          <p:cNvSpPr txBox="1"/>
+          <p:nvPr/>
+        </p:nvSpPr>
+        <p:spPr>
+          <a:xfrm>
             <a:off x="1150371" y="2258084"/>
             <a:ext cx="4593235" cy="1757471"/>
           </a:xfrm>
@@ -10176,7 +10337,7 @@
           </a:prstGeom>
         </p:spPr>
         <p:txBody>
-          <a:bodyPr anchor="t" rtlCol="false" tIns="0" lIns="0" bIns="0" rIns="0">
+          <a:bodyPr lIns="0" tIns="0" rIns="0" bIns="0" rtlCol="0" anchor="t">
             <a:spAutoFit/>
           </a:bodyPr>
           <a:lstStyle/>
@@ -10203,12 +10364,12 @@
       </p:sp>
       <p:sp>
         <p:nvSpPr>
-          <p:cNvPr name="TextBox 17" id="17"/>
-          <p:cNvSpPr txBox="true"/>
-          <p:nvPr/>
-        </p:nvSpPr>
-        <p:spPr>
-          <a:xfrm rot="0">
+          <p:cNvPr id="17" name="TextBox 17"/>
+          <p:cNvSpPr txBox="1"/>
+          <p:nvPr/>
+        </p:nvSpPr>
+        <p:spPr>
+          <a:xfrm>
             <a:off x="6806197" y="1692690"/>
             <a:ext cx="1172178" cy="449262"/>
           </a:xfrm>
@@ -10217,7 +10378,7 @@
           </a:prstGeom>
         </p:spPr>
         <p:txBody>
-          <a:bodyPr anchor="t" rtlCol="false" tIns="0" lIns="0" bIns="0" rIns="0">
+          <a:bodyPr lIns="0" tIns="0" rIns="0" bIns="0" rtlCol="0" anchor="t">
             <a:spAutoFit/>
           </a:bodyPr>
           <a:lstStyle/>
@@ -10228,7 +10389,7 @@
               </a:lnSpc>
             </a:pPr>
             <a:r>
-              <a:rPr lang="en-US" sz="2750" b="true">
+              <a:rPr lang="en-US" sz="2750" b="1">
                 <a:solidFill>
                   <a:srgbClr val="000000"/>
                 </a:solidFill>
@@ -10244,12 +10405,12 @@
       </p:sp>
       <p:sp>
         <p:nvSpPr>
-          <p:cNvPr name="TextBox 18" id="18"/>
-          <p:cNvSpPr txBox="true"/>
-          <p:nvPr/>
-        </p:nvSpPr>
-        <p:spPr>
-          <a:xfrm rot="0">
+          <p:cNvPr id="18" name="TextBox 18"/>
+          <p:cNvSpPr txBox="1"/>
+          <p:nvPr/>
+        </p:nvSpPr>
+        <p:spPr>
+          <a:xfrm>
             <a:off x="6806197" y="2258084"/>
             <a:ext cx="4593235" cy="1309769"/>
           </a:xfrm>
@@ -10258,7 +10419,7 @@
           </a:prstGeom>
         </p:spPr>
         <p:txBody>
-          <a:bodyPr anchor="t" rtlCol="false" tIns="0" lIns="0" bIns="0" rIns="0">
+          <a:bodyPr lIns="0" tIns="0" rIns="0" bIns="0" rtlCol="0" anchor="t">
             <a:spAutoFit/>
           </a:bodyPr>
           <a:lstStyle/>
@@ -10285,12 +10446,12 @@
       </p:sp>
       <p:sp>
         <p:nvSpPr>
-          <p:cNvPr name="TextBox 19" id="19"/>
-          <p:cNvSpPr txBox="true"/>
-          <p:nvPr/>
-        </p:nvSpPr>
-        <p:spPr>
-          <a:xfrm rot="0">
+          <p:cNvPr id="19" name="TextBox 19"/>
+          <p:cNvSpPr txBox="1"/>
+          <p:nvPr/>
+        </p:nvSpPr>
+        <p:spPr>
+          <a:xfrm>
             <a:off x="12464908" y="1692690"/>
             <a:ext cx="2840922" cy="449262"/>
           </a:xfrm>
@@ -10299,7 +10460,7 @@
           </a:prstGeom>
         </p:spPr>
         <p:txBody>
-          <a:bodyPr anchor="t" rtlCol="false" tIns="0" lIns="0" bIns="0" rIns="0">
+          <a:bodyPr lIns="0" tIns="0" rIns="0" bIns="0" rtlCol="0" anchor="t">
             <a:spAutoFit/>
           </a:bodyPr>
           <a:lstStyle/>
@@ -10310,7 +10471,7 @@
               </a:lnSpc>
             </a:pPr>
             <a:r>
-              <a:rPr lang="en-US" sz="2750" b="true">
+              <a:rPr lang="en-US" sz="2750" b="1">
                 <a:solidFill>
                   <a:srgbClr val="000000"/>
                 </a:solidFill>
@@ -10326,12 +10487,12 @@
       </p:sp>
       <p:sp>
         <p:nvSpPr>
-          <p:cNvPr name="TextBox 20" id="20"/>
-          <p:cNvSpPr txBox="true"/>
-          <p:nvPr/>
-        </p:nvSpPr>
-        <p:spPr>
-          <a:xfrm rot="0">
+          <p:cNvPr id="20" name="TextBox 20"/>
+          <p:cNvSpPr txBox="1"/>
+          <p:nvPr/>
+        </p:nvSpPr>
+        <p:spPr>
+          <a:xfrm>
             <a:off x="12464908" y="2258084"/>
             <a:ext cx="4593235" cy="1309769"/>
           </a:xfrm>
@@ -10340,7 +10501,7 @@
           </a:prstGeom>
         </p:spPr>
         <p:txBody>
-          <a:bodyPr anchor="t" rtlCol="false" tIns="0" lIns="0" bIns="0" rIns="0">
+          <a:bodyPr lIns="0" tIns="0" rIns="0" bIns="0" rtlCol="0" anchor="t">
             <a:spAutoFit/>
           </a:bodyPr>
           <a:lstStyle/>
@@ -10374,7 +10535,7 @@
 </file>
 
 <file path=ppt/slides/slide3.xml><?xml version="1.0" encoding="utf-8"?>
-<p:sld xmlns:p="http://schemas.openxmlformats.org/presentationml/2006/main" xmlns:a="http://schemas.openxmlformats.org/drawingml/2006/main">
+<p:sld xmlns:a="http://schemas.openxmlformats.org/drawingml/2006/main" xmlns:r="http://schemas.openxmlformats.org/officeDocument/2006/relationships" xmlns:p="http://schemas.openxmlformats.org/presentationml/2006/main">
   <p:cSld>
     <p:spTree>
       <p:nvGrpSpPr>
@@ -10392,12 +10553,12 @@
       </p:grpSpPr>
       <p:sp>
         <p:nvSpPr>
-          <p:cNvPr name="TextBox 2" id="2"/>
-          <p:cNvSpPr txBox="true"/>
-          <p:nvPr/>
-        </p:nvSpPr>
-        <p:spPr>
-          <a:xfrm rot="0">
+          <p:cNvPr id="2" name="TextBox 2"/>
+          <p:cNvSpPr txBox="1"/>
+          <p:nvPr/>
+        </p:nvSpPr>
+        <p:spPr>
+          <a:xfrm>
             <a:off x="7667854" y="1133440"/>
             <a:ext cx="2944767" cy="900140"/>
           </a:xfrm>
@@ -10406,7 +10567,7 @@
           </a:prstGeom>
         </p:spPr>
         <p:txBody>
-          <a:bodyPr anchor="t" rtlCol="false" tIns="0" lIns="0" bIns="0" rIns="0">
+          <a:bodyPr lIns="0" tIns="0" rIns="0" bIns="0" rtlCol="0" anchor="t">
             <a:spAutoFit/>
           </a:bodyPr>
           <a:lstStyle/>
@@ -10433,12 +10594,12 @@
       </p:sp>
       <p:grpSp>
         <p:nvGrpSpPr>
-          <p:cNvPr name="Group 3" id="3"/>
+          <p:cNvPr id="3" name="Group 3"/>
           <p:cNvGrpSpPr/>
           <p:nvPr/>
         </p:nvGrpSpPr>
         <p:grpSpPr>
-          <a:xfrm rot="0">
+          <a:xfrm>
             <a:off x="669798" y="685800"/>
             <a:ext cx="5554980" cy="142494"/>
             <a:chOff x="0" y="0"/>
@@ -10447,12 +10608,12 @@
         </p:grpSpPr>
         <p:sp>
           <p:nvSpPr>
-            <p:cNvPr name="Freeform 4" id="4"/>
+            <p:cNvPr id="4" name="Freeform 4"/>
             <p:cNvSpPr/>
             <p:nvPr/>
           </p:nvSpPr>
           <p:spPr>
-            <a:xfrm flipH="false" flipV="false" rot="0">
+            <a:xfrm>
               <a:off x="0" y="0"/>
               <a:ext cx="7406640" cy="189992"/>
             </a:xfrm>
@@ -10461,9 +10622,9 @@
               <a:gdLst/>
               <a:ahLst/>
               <a:cxnLst/>
-              <a:rect r="r" b="b" t="t" l="l"/>
+              <a:rect l="l" t="t" r="r" b="b"/>
               <a:pathLst>
-                <a:path h="189992" w="7406640">
+                <a:path w="7406640" h="189992">
                   <a:moveTo>
                     <a:pt x="0" y="0"/>
                   </a:moveTo>
@@ -10488,12 +10649,12 @@
       </p:grpSp>
       <p:grpSp>
         <p:nvGrpSpPr>
-          <p:cNvPr name="Group 5" id="5"/>
+          <p:cNvPr id="5" name="Group 5"/>
           <p:cNvGrpSpPr/>
           <p:nvPr/>
         </p:nvGrpSpPr>
         <p:grpSpPr>
-          <a:xfrm rot="0">
+          <a:xfrm>
             <a:off x="12063222" y="680466"/>
             <a:ext cx="5554980" cy="147828"/>
             <a:chOff x="0" y="0"/>
@@ -10502,12 +10663,12 @@
         </p:grpSpPr>
         <p:sp>
           <p:nvSpPr>
-            <p:cNvPr name="Freeform 6" id="6"/>
+            <p:cNvPr id="6" name="Freeform 6"/>
             <p:cNvSpPr/>
             <p:nvPr/>
           </p:nvSpPr>
           <p:spPr>
-            <a:xfrm flipH="false" flipV="false" rot="0">
+            <a:xfrm>
               <a:off x="0" y="0"/>
               <a:ext cx="7406640" cy="197104"/>
             </a:xfrm>
@@ -10516,9 +10677,9 @@
               <a:gdLst/>
               <a:ahLst/>
               <a:cxnLst/>
-              <a:rect r="r" b="b" t="t" l="l"/>
+              <a:rect l="l" t="t" r="r" b="b"/>
               <a:pathLst>
-                <a:path h="197104" w="7406640">
+                <a:path w="7406640" h="197104">
                   <a:moveTo>
                     <a:pt x="0" y="0"/>
                   </a:moveTo>
@@ -10543,12 +10704,12 @@
       </p:grpSp>
       <p:grpSp>
         <p:nvGrpSpPr>
-          <p:cNvPr name="Group 7" id="7"/>
+          <p:cNvPr id="7" name="Group 7"/>
           <p:cNvGrpSpPr/>
           <p:nvPr/>
         </p:nvGrpSpPr>
         <p:grpSpPr>
-          <a:xfrm rot="0">
+          <a:xfrm>
             <a:off x="6362748" y="685800"/>
             <a:ext cx="5554980" cy="137160"/>
             <a:chOff x="0" y="0"/>
@@ -10557,12 +10718,12 @@
         </p:grpSpPr>
         <p:sp>
           <p:nvSpPr>
-            <p:cNvPr name="Freeform 8" id="8"/>
+            <p:cNvPr id="8" name="Freeform 8"/>
             <p:cNvSpPr/>
             <p:nvPr/>
           </p:nvSpPr>
           <p:spPr>
-            <a:xfrm flipH="false" flipV="false" rot="0">
+            <a:xfrm>
               <a:off x="0" y="0"/>
               <a:ext cx="7406640" cy="182880"/>
             </a:xfrm>
@@ -10571,9 +10732,9 @@
               <a:gdLst/>
               <a:ahLst/>
               <a:cxnLst/>
-              <a:rect r="r" b="b" t="t" l="l"/>
+              <a:rect l="l" t="t" r="r" b="b"/>
               <a:pathLst>
-                <a:path h="182880" w="7406640">
+                <a:path w="7406640" h="182880">
                   <a:moveTo>
                     <a:pt x="0" y="0"/>
                   </a:moveTo>
@@ -10598,12 +10759,12 @@
       </p:grpSp>
       <p:sp>
         <p:nvSpPr>
-          <p:cNvPr name="TextBox 9" id="9"/>
-          <p:cNvSpPr txBox="true"/>
-          <p:nvPr/>
-        </p:nvSpPr>
-        <p:spPr>
-          <a:xfrm rot="0">
+          <p:cNvPr id="9" name="TextBox 9"/>
+          <p:cNvSpPr txBox="1"/>
+          <p:nvPr/>
+        </p:nvSpPr>
+        <p:spPr>
+          <a:xfrm>
             <a:off x="669798" y="2952013"/>
             <a:ext cx="15711243" cy="4263755"/>
           </a:xfrm>
@@ -10612,7 +10773,7 @@
           </a:prstGeom>
         </p:spPr>
         <p:txBody>
-          <a:bodyPr anchor="t" rtlCol="false" tIns="0" lIns="0" bIns="0" rIns="0">
+          <a:bodyPr lIns="0" tIns="0" rIns="0" bIns="0" rtlCol="0" anchor="t">
             <a:spAutoFit/>
           </a:bodyPr>
           <a:lstStyle/>
@@ -10626,7 +10787,7 @@
               </a:spcBef>
             </a:pPr>
             <a:r>
-              <a:rPr lang="en-US" b="true" sz="2999">
+              <a:rPr lang="en-US" sz="2999" b="1">
                 <a:solidFill>
                   <a:srgbClr val="000000"/>
                 </a:solidFill>
@@ -10647,6 +10808,15 @@
                 <a:spcPct val="0"/>
               </a:spcBef>
             </a:pPr>
+            <a:endParaRPr lang="en-US" sz="2999" b="1">
+              <a:solidFill>
+                <a:srgbClr val="000000"/>
+              </a:solidFill>
+              <a:latin typeface="Noto Sans Bold"/>
+              <a:ea typeface="Noto Sans Bold"/>
+              <a:cs typeface="Noto Sans Bold"/>
+              <a:sym typeface="Noto Sans Bold"/>
+            </a:endParaRPr>
           </a:p>
           <a:p>
             <a:pPr algn="l">
@@ -10679,6 +10849,15 @@
                 <a:spcPct val="0"/>
               </a:spcBef>
             </a:pPr>
+            <a:endParaRPr lang="en-US" sz="2499">
+              <a:solidFill>
+                <a:srgbClr val="000000"/>
+              </a:solidFill>
+              <a:latin typeface="Noto Sans"/>
+              <a:ea typeface="Noto Sans"/>
+              <a:cs typeface="Noto Sans"/>
+              <a:sym typeface="Noto Sans"/>
+            </a:endParaRPr>
           </a:p>
           <a:p>
             <a:pPr algn="l">
@@ -10690,7 +10869,7 @@
               </a:spcBef>
             </a:pPr>
             <a:r>
-              <a:rPr lang="en-US" b="true" sz="2999">
+              <a:rPr lang="en-US" sz="2999" b="1">
                 <a:solidFill>
                   <a:srgbClr val="000000"/>
                 </a:solidFill>
@@ -10711,9 +10890,18 @@
                 <a:spcPct val="0"/>
               </a:spcBef>
             </a:pPr>
-          </a:p>
-          <a:p>
-            <a:pPr algn="l" marL="539749" indent="-269875" lvl="1">
+            <a:endParaRPr lang="en-US" sz="2999" b="1">
+              <a:solidFill>
+                <a:srgbClr val="000000"/>
+              </a:solidFill>
+              <a:latin typeface="Noto Sans Bold"/>
+              <a:ea typeface="Noto Sans Bold"/>
+              <a:cs typeface="Noto Sans Bold"/>
+              <a:sym typeface="Noto Sans Bold"/>
+            </a:endParaRPr>
+          </a:p>
+          <a:p>
+            <a:pPr marL="539749" lvl="1" indent="-269875" algn="l">
               <a:lnSpc>
                 <a:spcPts val="3499"/>
               </a:lnSpc>
@@ -10734,7 +10922,7 @@
             </a:r>
           </a:p>
           <a:p>
-            <a:pPr algn="l" marL="539749" indent="-269875" lvl="1">
+            <a:pPr marL="539749" lvl="1" indent="-269875" algn="l">
               <a:lnSpc>
                 <a:spcPts val="3499"/>
               </a:lnSpc>
@@ -10755,7 +10943,7 @@
             </a:r>
           </a:p>
           <a:p>
-            <a:pPr algn="l" marL="539749" indent="-269875" lvl="1">
+            <a:pPr marL="539749" lvl="1" indent="-269875" algn="l">
               <a:lnSpc>
                 <a:spcPts val="3499"/>
               </a:lnSpc>
@@ -10786,7 +10974,7 @@
 </file>
 
 <file path=ppt/slides/slide4.xml><?xml version="1.0" encoding="utf-8"?>
-<p:sld xmlns:p="http://schemas.openxmlformats.org/presentationml/2006/main" xmlns:a="http://schemas.openxmlformats.org/drawingml/2006/main" xmlns:r="http://schemas.openxmlformats.org/officeDocument/2006/relationships">
+<p:sld xmlns:a="http://schemas.openxmlformats.org/drawingml/2006/main" xmlns:r="http://schemas.openxmlformats.org/officeDocument/2006/relationships" xmlns:p="http://schemas.openxmlformats.org/presentationml/2006/main">
   <p:cSld>
     <p:spTree>
       <p:nvGrpSpPr>
@@ -10804,12 +10992,12 @@
       </p:grpSpPr>
       <p:grpSp>
         <p:nvGrpSpPr>
-          <p:cNvPr name="Group 2" id="2"/>
+          <p:cNvPr id="2" name="Group 2"/>
           <p:cNvGrpSpPr/>
           <p:nvPr/>
         </p:nvGrpSpPr>
         <p:grpSpPr>
-          <a:xfrm rot="0">
+          <a:xfrm>
             <a:off x="669798" y="685800"/>
             <a:ext cx="5554980" cy="142494"/>
             <a:chOff x="0" y="0"/>
@@ -10818,12 +11006,12 @@
         </p:grpSpPr>
         <p:sp>
           <p:nvSpPr>
-            <p:cNvPr name="Freeform 3" id="3"/>
+            <p:cNvPr id="3" name="Freeform 3"/>
             <p:cNvSpPr/>
             <p:nvPr/>
           </p:nvSpPr>
           <p:spPr>
-            <a:xfrm flipH="false" flipV="false" rot="0">
+            <a:xfrm>
               <a:off x="0" y="0"/>
               <a:ext cx="7406640" cy="189992"/>
             </a:xfrm>
@@ -10832,9 +11020,9 @@
               <a:gdLst/>
               <a:ahLst/>
               <a:cxnLst/>
-              <a:rect r="r" b="b" t="t" l="l"/>
+              <a:rect l="l" t="t" r="r" b="b"/>
               <a:pathLst>
-                <a:path h="189992" w="7406640">
+                <a:path w="7406640" h="189992">
                   <a:moveTo>
                     <a:pt x="0" y="0"/>
                   </a:moveTo>
@@ -10859,12 +11047,12 @@
       </p:grpSp>
       <p:grpSp>
         <p:nvGrpSpPr>
-          <p:cNvPr name="Group 4" id="4"/>
+          <p:cNvPr id="4" name="Group 4"/>
           <p:cNvGrpSpPr/>
           <p:nvPr/>
         </p:nvGrpSpPr>
         <p:grpSpPr>
-          <a:xfrm rot="0">
+          <a:xfrm>
             <a:off x="12063222" y="680466"/>
             <a:ext cx="5554980" cy="147828"/>
             <a:chOff x="0" y="0"/>
@@ -10873,12 +11061,12 @@
         </p:grpSpPr>
         <p:sp>
           <p:nvSpPr>
-            <p:cNvPr name="Freeform 5" id="5"/>
+            <p:cNvPr id="5" name="Freeform 5"/>
             <p:cNvSpPr/>
             <p:nvPr/>
           </p:nvSpPr>
           <p:spPr>
-            <a:xfrm flipH="false" flipV="false" rot="0">
+            <a:xfrm>
               <a:off x="0" y="0"/>
               <a:ext cx="7406640" cy="197104"/>
             </a:xfrm>
@@ -10887,9 +11075,9 @@
               <a:gdLst/>
               <a:ahLst/>
               <a:cxnLst/>
-              <a:rect r="r" b="b" t="t" l="l"/>
+              <a:rect l="l" t="t" r="r" b="b"/>
               <a:pathLst>
-                <a:path h="197104" w="7406640">
+                <a:path w="7406640" h="197104">
                   <a:moveTo>
                     <a:pt x="0" y="0"/>
                   </a:moveTo>
@@ -10914,12 +11102,12 @@
       </p:grpSp>
       <p:grpSp>
         <p:nvGrpSpPr>
-          <p:cNvPr name="Group 6" id="6"/>
+          <p:cNvPr id="6" name="Group 6"/>
           <p:cNvGrpSpPr/>
           <p:nvPr/>
         </p:nvGrpSpPr>
         <p:grpSpPr>
-          <a:xfrm rot="0">
+          <a:xfrm>
             <a:off x="6362748" y="685800"/>
             <a:ext cx="5554980" cy="137160"/>
             <a:chOff x="0" y="0"/>
@@ -10928,12 +11116,12 @@
         </p:grpSpPr>
         <p:sp>
           <p:nvSpPr>
-            <p:cNvPr name="Freeform 7" id="7"/>
+            <p:cNvPr id="7" name="Freeform 7"/>
             <p:cNvSpPr/>
             <p:nvPr/>
           </p:nvSpPr>
           <p:spPr>
-            <a:xfrm flipH="false" flipV="false" rot="0">
+            <a:xfrm>
               <a:off x="0" y="0"/>
               <a:ext cx="7406640" cy="182880"/>
             </a:xfrm>
@@ -10942,9 +11130,9 @@
               <a:gdLst/>
               <a:ahLst/>
               <a:cxnLst/>
-              <a:rect r="r" b="b" t="t" l="l"/>
+              <a:rect l="l" t="t" r="r" b="b"/>
               <a:pathLst>
-                <a:path h="182880" w="7406640">
+                <a:path w="7406640" h="182880">
                   <a:moveTo>
                     <a:pt x="0" y="0"/>
                   </a:moveTo>
@@ -10969,12 +11157,12 @@
       </p:grpSp>
       <p:sp>
         <p:nvSpPr>
-          <p:cNvPr name="Freeform 8" id="8"/>
+          <p:cNvPr id="8" name="Freeform 8"/>
           <p:cNvSpPr/>
           <p:nvPr/>
         </p:nvSpPr>
         <p:spPr>
-          <a:xfrm flipH="false" flipV="false" rot="0">
+          <a:xfrm>
             <a:off x="1885314" y="2432563"/>
             <a:ext cx="1561974" cy="1493637"/>
           </a:xfrm>
@@ -10983,9 +11171,9 @@
             <a:gdLst/>
             <a:ahLst/>
             <a:cxnLst/>
-            <a:rect r="r" b="b" t="t" l="l"/>
+            <a:rect l="l" t="t" r="r" b="b"/>
             <a:pathLst>
-              <a:path h="1493637" w="1561974">
+              <a:path w="1561974" h="1493637">
                 <a:moveTo>
                   <a:pt x="0" y="0"/>
                 </a:moveTo>
@@ -11014,19 +11202,19 @@
               </a:extLst>
             </a:blip>
             <a:stretch>
-              <a:fillRect l="0" t="0" r="0" b="0"/>
+              <a:fillRect/>
             </a:stretch>
           </a:blipFill>
         </p:spPr>
       </p:sp>
       <p:sp>
         <p:nvSpPr>
-          <p:cNvPr name="Freeform 9" id="9"/>
+          <p:cNvPr id="9" name="Freeform 9"/>
           <p:cNvSpPr/>
           <p:nvPr/>
         </p:nvSpPr>
         <p:spPr>
-          <a:xfrm flipH="false" flipV="false" rot="0">
+          <a:xfrm>
             <a:off x="1885314" y="4405675"/>
             <a:ext cx="1319260" cy="1618724"/>
           </a:xfrm>
@@ -11035,9 +11223,9 @@
             <a:gdLst/>
             <a:ahLst/>
             <a:cxnLst/>
-            <a:rect r="r" b="b" t="t" l="l"/>
+            <a:rect l="l" t="t" r="r" b="b"/>
             <a:pathLst>
-              <a:path h="1618724" w="1319260">
+              <a:path w="1319260" h="1618724">
                 <a:moveTo>
                   <a:pt x="0" y="0"/>
                 </a:moveTo>
@@ -11066,19 +11254,19 @@
               </a:extLst>
             </a:blip>
             <a:stretch>
-              <a:fillRect l="0" t="0" r="0" b="0"/>
+              <a:fillRect/>
             </a:stretch>
           </a:blipFill>
         </p:spPr>
       </p:sp>
       <p:sp>
         <p:nvSpPr>
-          <p:cNvPr name="Freeform 10" id="10"/>
+          <p:cNvPr id="10" name="Freeform 10"/>
           <p:cNvSpPr/>
           <p:nvPr/>
         </p:nvSpPr>
         <p:spPr>
-          <a:xfrm flipH="false" flipV="false" rot="0">
+          <a:xfrm>
             <a:off x="1838010" y="6171025"/>
             <a:ext cx="1413869" cy="1665825"/>
           </a:xfrm>
@@ -11087,9 +11275,9 @@
             <a:gdLst/>
             <a:ahLst/>
             <a:cxnLst/>
-            <a:rect r="r" b="b" t="t" l="l"/>
+            <a:rect l="l" t="t" r="r" b="b"/>
             <a:pathLst>
-              <a:path h="1665825" w="1413869">
+              <a:path w="1413869" h="1665825">
                 <a:moveTo>
                   <a:pt x="0" y="0"/>
                 </a:moveTo>
@@ -11118,19 +11306,19 @@
               </a:extLst>
             </a:blip>
             <a:stretch>
-              <a:fillRect l="0" t="0" r="0" b="0"/>
+              <a:fillRect/>
             </a:stretch>
           </a:blipFill>
         </p:spPr>
       </p:sp>
       <p:sp>
         <p:nvSpPr>
-          <p:cNvPr name="Freeform 11" id="11"/>
+          <p:cNvPr id="11" name="Freeform 11"/>
           <p:cNvSpPr/>
           <p:nvPr/>
         </p:nvSpPr>
         <p:spPr>
-          <a:xfrm flipH="false" flipV="false" rot="0">
+          <a:xfrm>
             <a:off x="1728097" y="7979725"/>
             <a:ext cx="1719191" cy="1719191"/>
           </a:xfrm>
@@ -11139,9 +11327,9 @@
             <a:gdLst/>
             <a:ahLst/>
             <a:cxnLst/>
-            <a:rect r="r" b="b" t="t" l="l"/>
+            <a:rect l="l" t="t" r="r" b="b"/>
             <a:pathLst>
-              <a:path h="1719191" w="1719191">
+              <a:path w="1719191" h="1719191">
                 <a:moveTo>
                   <a:pt x="0" y="0"/>
                 </a:moveTo>
@@ -11170,19 +11358,19 @@
               </a:extLst>
             </a:blip>
             <a:stretch>
-              <a:fillRect l="0" t="0" r="0" b="0"/>
+              <a:fillRect/>
             </a:stretch>
           </a:blipFill>
         </p:spPr>
       </p:sp>
       <p:sp>
         <p:nvSpPr>
-          <p:cNvPr name="TextBox 12" id="12"/>
-          <p:cNvSpPr txBox="true"/>
-          <p:nvPr/>
-        </p:nvSpPr>
-        <p:spPr>
-          <a:xfrm rot="0">
+          <p:cNvPr id="12" name="TextBox 12"/>
+          <p:cNvSpPr txBox="1"/>
+          <p:nvPr/>
+        </p:nvSpPr>
+        <p:spPr>
+          <a:xfrm>
             <a:off x="4696884" y="1156926"/>
             <a:ext cx="7657072" cy="900140"/>
           </a:xfrm>
@@ -11191,7 +11379,7 @@
           </a:prstGeom>
         </p:spPr>
         <p:txBody>
-          <a:bodyPr anchor="t" rtlCol="false" tIns="0" lIns="0" bIns="0" rIns="0">
+          <a:bodyPr lIns="0" tIns="0" rIns="0" bIns="0" rtlCol="0" anchor="t">
             <a:spAutoFit/>
           </a:bodyPr>
           <a:lstStyle/>
@@ -11218,12 +11406,12 @@
       </p:sp>
       <p:sp>
         <p:nvSpPr>
-          <p:cNvPr name="TextBox 13" id="13"/>
-          <p:cNvSpPr txBox="true"/>
-          <p:nvPr/>
-        </p:nvSpPr>
-        <p:spPr>
-          <a:xfrm rot="0">
+          <p:cNvPr id="13" name="TextBox 13"/>
+          <p:cNvSpPr txBox="1"/>
+          <p:nvPr/>
+        </p:nvSpPr>
+        <p:spPr>
+          <a:xfrm>
             <a:off x="5735372" y="3141281"/>
             <a:ext cx="11523928" cy="6021387"/>
           </a:xfrm>
@@ -11232,12 +11420,12 @@
           </a:prstGeom>
         </p:spPr>
         <p:txBody>
-          <a:bodyPr anchor="t" rtlCol="false" tIns="0" lIns="0" bIns="0" rIns="0">
+          <a:bodyPr lIns="0" tIns="0" rIns="0" bIns="0" rtlCol="0" anchor="t">
             <a:spAutoFit/>
           </a:bodyPr>
           <a:lstStyle/>
           <a:p>
-            <a:pPr algn="l" marL="593726" indent="-296863" lvl="1">
+            <a:pPr marL="593726" lvl="1" indent="-296863" algn="l">
               <a:lnSpc>
                 <a:spcPts val="3437"/>
               </a:lnSpc>
@@ -11263,9 +11451,18 @@
                 <a:spcPts val="3437"/>
               </a:lnSpc>
             </a:pPr>
-          </a:p>
-          <a:p>
-            <a:pPr algn="l" marL="593726" indent="-296863" lvl="1">
+            <a:endParaRPr lang="en-US" sz="2750">
+              <a:solidFill>
+                <a:srgbClr val="000000"/>
+              </a:solidFill>
+              <a:latin typeface="Arimo"/>
+              <a:ea typeface="Arimo"/>
+              <a:cs typeface="Arimo"/>
+              <a:sym typeface="Arimo"/>
+            </a:endParaRPr>
+          </a:p>
+          <a:p>
+            <a:pPr marL="593726" lvl="1" indent="-296863" algn="l">
               <a:lnSpc>
                 <a:spcPts val="3437"/>
               </a:lnSpc>
@@ -11291,9 +11488,18 @@
                 <a:spcPts val="3437"/>
               </a:lnSpc>
             </a:pPr>
-          </a:p>
-          <a:p>
-            <a:pPr algn="l" marL="593726" indent="-296863" lvl="1">
+            <a:endParaRPr lang="en-US" sz="2750">
+              <a:solidFill>
+                <a:srgbClr val="000000"/>
+              </a:solidFill>
+              <a:latin typeface="Arimo"/>
+              <a:ea typeface="Arimo"/>
+              <a:cs typeface="Arimo"/>
+              <a:sym typeface="Arimo"/>
+            </a:endParaRPr>
+          </a:p>
+          <a:p>
+            <a:pPr marL="593726" lvl="1" indent="-296863" algn="l">
               <a:lnSpc>
                 <a:spcPts val="3437"/>
               </a:lnSpc>
@@ -11319,9 +11525,18 @@
                 <a:spcPts val="3437"/>
               </a:lnSpc>
             </a:pPr>
-          </a:p>
-          <a:p>
-            <a:pPr algn="l" marL="593726" indent="-296863" lvl="1">
+            <a:endParaRPr lang="en-US" sz="2750">
+              <a:solidFill>
+                <a:srgbClr val="000000"/>
+              </a:solidFill>
+              <a:latin typeface="Arimo"/>
+              <a:ea typeface="Arimo"/>
+              <a:cs typeface="Arimo"/>
+              <a:sym typeface="Arimo"/>
+            </a:endParaRPr>
+          </a:p>
+          <a:p>
+            <a:pPr marL="593726" lvl="1" indent="-296863" algn="l">
               <a:lnSpc>
                 <a:spcPts val="3437"/>
               </a:lnSpc>
@@ -11352,7 +11567,7 @@
 </file>
 
 <file path=ppt/slides/slide5.xml><?xml version="1.0" encoding="utf-8"?>
-<p:sld xmlns:p="http://schemas.openxmlformats.org/presentationml/2006/main" xmlns:a="http://schemas.openxmlformats.org/drawingml/2006/main" xmlns:r="http://schemas.openxmlformats.org/officeDocument/2006/relationships">
+<p:sld xmlns:a="http://schemas.openxmlformats.org/drawingml/2006/main" xmlns:r="http://schemas.openxmlformats.org/officeDocument/2006/relationships" xmlns:p="http://schemas.openxmlformats.org/presentationml/2006/main">
   <p:cSld>
     <p:spTree>
       <p:nvGrpSpPr>
@@ -11370,12 +11585,12 @@
       </p:grpSpPr>
       <p:grpSp>
         <p:nvGrpSpPr>
-          <p:cNvPr name="Group 2" id="2"/>
+          <p:cNvPr id="2" name="Group 2"/>
           <p:cNvGrpSpPr/>
           <p:nvPr/>
         </p:nvGrpSpPr>
         <p:grpSpPr>
-          <a:xfrm rot="0">
+          <a:xfrm>
             <a:off x="669798" y="685800"/>
             <a:ext cx="5554980" cy="142494"/>
             <a:chOff x="0" y="0"/>
@@ -11384,12 +11599,12 @@
         </p:grpSpPr>
         <p:sp>
           <p:nvSpPr>
-            <p:cNvPr name="Freeform 3" id="3"/>
+            <p:cNvPr id="3" name="Freeform 3"/>
             <p:cNvSpPr/>
             <p:nvPr/>
           </p:nvSpPr>
           <p:spPr>
-            <a:xfrm flipH="false" flipV="false" rot="0">
+            <a:xfrm>
               <a:off x="0" y="0"/>
               <a:ext cx="7406640" cy="189992"/>
             </a:xfrm>
@@ -11398,9 +11613,9 @@
               <a:gdLst/>
               <a:ahLst/>
               <a:cxnLst/>
-              <a:rect r="r" b="b" t="t" l="l"/>
+              <a:rect l="l" t="t" r="r" b="b"/>
               <a:pathLst>
-                <a:path h="189992" w="7406640">
+                <a:path w="7406640" h="189992">
                   <a:moveTo>
                     <a:pt x="0" y="0"/>
                   </a:moveTo>
@@ -11425,12 +11640,12 @@
       </p:grpSp>
       <p:grpSp>
         <p:nvGrpSpPr>
-          <p:cNvPr name="Group 4" id="4"/>
+          <p:cNvPr id="4" name="Group 4"/>
           <p:cNvGrpSpPr/>
           <p:nvPr/>
         </p:nvGrpSpPr>
         <p:grpSpPr>
-          <a:xfrm rot="0">
+          <a:xfrm>
             <a:off x="12063222" y="680466"/>
             <a:ext cx="5554980" cy="147828"/>
             <a:chOff x="0" y="0"/>
@@ -11439,12 +11654,12 @@
         </p:grpSpPr>
         <p:sp>
           <p:nvSpPr>
-            <p:cNvPr name="Freeform 5" id="5"/>
+            <p:cNvPr id="5" name="Freeform 5"/>
             <p:cNvSpPr/>
             <p:nvPr/>
           </p:nvSpPr>
           <p:spPr>
-            <a:xfrm flipH="false" flipV="false" rot="0">
+            <a:xfrm>
               <a:off x="0" y="0"/>
               <a:ext cx="7406640" cy="197104"/>
             </a:xfrm>
@@ -11453,9 +11668,9 @@
               <a:gdLst/>
               <a:ahLst/>
               <a:cxnLst/>
-              <a:rect r="r" b="b" t="t" l="l"/>
+              <a:rect l="l" t="t" r="r" b="b"/>
               <a:pathLst>
-                <a:path h="197104" w="7406640">
+                <a:path w="7406640" h="197104">
                   <a:moveTo>
                     <a:pt x="0" y="0"/>
                   </a:moveTo>
@@ -11480,12 +11695,12 @@
       </p:grpSp>
       <p:grpSp>
         <p:nvGrpSpPr>
-          <p:cNvPr name="Group 6" id="6"/>
+          <p:cNvPr id="6" name="Group 6"/>
           <p:cNvGrpSpPr/>
           <p:nvPr/>
         </p:nvGrpSpPr>
         <p:grpSpPr>
-          <a:xfrm rot="0">
+          <a:xfrm>
             <a:off x="6362748" y="685800"/>
             <a:ext cx="5554980" cy="137160"/>
             <a:chOff x="0" y="0"/>
@@ -11494,12 +11709,12 @@
         </p:grpSpPr>
         <p:sp>
           <p:nvSpPr>
-            <p:cNvPr name="Freeform 7" id="7"/>
+            <p:cNvPr id="7" name="Freeform 7"/>
             <p:cNvSpPr/>
             <p:nvPr/>
           </p:nvSpPr>
           <p:spPr>
-            <a:xfrm flipH="false" flipV="false" rot="0">
+            <a:xfrm>
               <a:off x="0" y="0"/>
               <a:ext cx="7406640" cy="182880"/>
             </a:xfrm>
@@ -11508,9 +11723,9 @@
               <a:gdLst/>
               <a:ahLst/>
               <a:cxnLst/>
-              <a:rect r="r" b="b" t="t" l="l"/>
+              <a:rect l="l" t="t" r="r" b="b"/>
               <a:pathLst>
-                <a:path h="182880" w="7406640">
+                <a:path w="7406640" h="182880">
                   <a:moveTo>
                     <a:pt x="0" y="0"/>
                   </a:moveTo>
@@ -11535,12 +11750,12 @@
       </p:grpSp>
       <p:sp>
         <p:nvSpPr>
-          <p:cNvPr name="TextBox 8" id="8"/>
-          <p:cNvSpPr txBox="true"/>
-          <p:nvPr/>
-        </p:nvSpPr>
-        <p:spPr>
-          <a:xfrm rot="0">
+          <p:cNvPr id="8" name="TextBox 8"/>
+          <p:cNvSpPr txBox="1"/>
+          <p:nvPr/>
+        </p:nvSpPr>
+        <p:spPr>
+          <a:xfrm>
             <a:off x="2610082" y="2483689"/>
             <a:ext cx="14649218" cy="7431755"/>
           </a:xfrm>
@@ -11549,12 +11764,12 @@
           </a:prstGeom>
         </p:spPr>
         <p:txBody>
-          <a:bodyPr anchor="t" rtlCol="false" tIns="0" lIns="0" bIns="0" rIns="0">
+          <a:bodyPr lIns="0" tIns="0" rIns="0" bIns="0" rtlCol="0" anchor="t">
             <a:spAutoFit/>
           </a:bodyPr>
           <a:lstStyle/>
           <a:p>
-            <a:pPr algn="l" marL="539749" indent="-269875" lvl="1">
+            <a:pPr marL="539749" lvl="1" indent="-269875" algn="l">
               <a:lnSpc>
                 <a:spcPts val="3499"/>
               </a:lnSpc>
@@ -11605,6 +11820,15 @@
                 <a:spcPct val="0"/>
               </a:spcBef>
             </a:pPr>
+            <a:endParaRPr lang="en-US" sz="2499">
+              <a:solidFill>
+                <a:srgbClr val="000000"/>
+              </a:solidFill>
+              <a:latin typeface="Noto Sans"/>
+              <a:ea typeface="Noto Sans"/>
+              <a:cs typeface="Noto Sans"/>
+              <a:sym typeface="Noto Sans"/>
+            </a:endParaRPr>
           </a:p>
           <a:p>
             <a:pPr algn="just">
@@ -11615,9 +11839,18 @@
                 <a:spcPct val="0"/>
               </a:spcBef>
             </a:pPr>
-          </a:p>
-          <a:p>
-            <a:pPr algn="l" marL="539749" indent="-269875" lvl="1">
+            <a:endParaRPr lang="en-US" sz="2499">
+              <a:solidFill>
+                <a:srgbClr val="000000"/>
+              </a:solidFill>
+              <a:latin typeface="Noto Sans"/>
+              <a:ea typeface="Noto Sans"/>
+              <a:cs typeface="Noto Sans"/>
+              <a:sym typeface="Noto Sans"/>
+            </a:endParaRPr>
+          </a:p>
+          <a:p>
+            <a:pPr marL="539749" lvl="1" indent="-269875" algn="l">
               <a:lnSpc>
                 <a:spcPts val="3499"/>
               </a:lnSpc>
@@ -11668,6 +11901,15 @@
                 <a:spcPct val="0"/>
               </a:spcBef>
             </a:pPr>
+            <a:endParaRPr lang="en-US" sz="2499">
+              <a:solidFill>
+                <a:srgbClr val="000000"/>
+              </a:solidFill>
+              <a:latin typeface="Noto Sans"/>
+              <a:ea typeface="Noto Sans"/>
+              <a:cs typeface="Noto Sans"/>
+              <a:sym typeface="Noto Sans"/>
+            </a:endParaRPr>
           </a:p>
           <a:p>
             <a:pPr algn="just">
@@ -11678,9 +11920,18 @@
                 <a:spcPct val="0"/>
               </a:spcBef>
             </a:pPr>
-          </a:p>
-          <a:p>
-            <a:pPr algn="l" marL="539749" indent="-269875" lvl="1">
+            <a:endParaRPr lang="en-US" sz="2499">
+              <a:solidFill>
+                <a:srgbClr val="000000"/>
+              </a:solidFill>
+              <a:latin typeface="Noto Sans"/>
+              <a:ea typeface="Noto Sans"/>
+              <a:cs typeface="Noto Sans"/>
+              <a:sym typeface="Noto Sans"/>
+            </a:endParaRPr>
+          </a:p>
+          <a:p>
+            <a:pPr marL="539749" lvl="1" indent="-269875" algn="l">
               <a:lnSpc>
                 <a:spcPts val="3499"/>
               </a:lnSpc>
@@ -11775,6 +12026,15 @@
                 <a:spcPct val="0"/>
               </a:spcBef>
             </a:pPr>
+            <a:endParaRPr lang="en-US" sz="2499">
+              <a:solidFill>
+                <a:srgbClr val="000000"/>
+              </a:solidFill>
+              <a:latin typeface="Noto Sans"/>
+              <a:ea typeface="Noto Sans"/>
+              <a:cs typeface="Noto Sans"/>
+              <a:sym typeface="Noto Sans"/>
+            </a:endParaRPr>
           </a:p>
           <a:p>
             <a:pPr algn="just">
@@ -11785,9 +12045,18 @@
                 <a:spcPct val="0"/>
               </a:spcBef>
             </a:pPr>
-          </a:p>
-          <a:p>
-            <a:pPr algn="l" marL="539749" indent="-269875" lvl="1">
+            <a:endParaRPr lang="en-US" sz="2499">
+              <a:solidFill>
+                <a:srgbClr val="000000"/>
+              </a:solidFill>
+              <a:latin typeface="Noto Sans"/>
+              <a:ea typeface="Noto Sans"/>
+              <a:cs typeface="Noto Sans"/>
+              <a:sym typeface="Noto Sans"/>
+            </a:endParaRPr>
+          </a:p>
+          <a:p>
+            <a:pPr marL="539749" lvl="1" indent="-269875" algn="l">
               <a:lnSpc>
                 <a:spcPts val="3499"/>
               </a:lnSpc>
@@ -11833,12 +12102,12 @@
       </p:sp>
       <p:sp>
         <p:nvSpPr>
-          <p:cNvPr name="Freeform 9" id="9"/>
+          <p:cNvPr id="9" name="Freeform 9"/>
           <p:cNvSpPr/>
           <p:nvPr/>
         </p:nvSpPr>
         <p:spPr>
-          <a:xfrm flipH="false" flipV="false" rot="0">
+          <a:xfrm>
             <a:off x="395757" y="2531314"/>
             <a:ext cx="1909823" cy="1272420"/>
           </a:xfrm>
@@ -11847,9 +12116,9 @@
             <a:gdLst/>
             <a:ahLst/>
             <a:cxnLst/>
-            <a:rect r="r" b="b" t="t" l="l"/>
+            <a:rect l="l" t="t" r="r" b="b"/>
             <a:pathLst>
-              <a:path h="1272420" w="1909823">
+              <a:path w="1909823" h="1272420">
                 <a:moveTo>
                   <a:pt x="0" y="0"/>
                 </a:moveTo>
@@ -11878,19 +12147,19 @@
               </a:extLst>
             </a:blip>
             <a:stretch>
-              <a:fillRect l="0" t="0" r="0" b="0"/>
+              <a:fillRect/>
             </a:stretch>
           </a:blipFill>
         </p:spPr>
       </p:sp>
       <p:sp>
         <p:nvSpPr>
-          <p:cNvPr name="Freeform 10" id="10"/>
+          <p:cNvPr id="10" name="Freeform 10"/>
           <p:cNvSpPr/>
           <p:nvPr/>
         </p:nvSpPr>
         <p:spPr>
-          <a:xfrm flipH="false" flipV="false" rot="0">
+          <a:xfrm>
             <a:off x="453542" y="4333914"/>
             <a:ext cx="1713719" cy="1718015"/>
           </a:xfrm>
@@ -11899,9 +12168,9 @@
             <a:gdLst/>
             <a:ahLst/>
             <a:cxnLst/>
-            <a:rect r="r" b="b" t="t" l="l"/>
+            <a:rect l="l" t="t" r="r" b="b"/>
             <a:pathLst>
-              <a:path h="1718015" w="1713719">
+              <a:path w="1713719" h="1718015">
                 <a:moveTo>
                   <a:pt x="0" y="0"/>
                 </a:moveTo>
@@ -11930,19 +12199,19 @@
               </a:extLst>
             </a:blip>
             <a:stretch>
-              <a:fillRect l="0" t="0" r="0" b="0"/>
+              <a:fillRect/>
             </a:stretch>
           </a:blipFill>
         </p:spPr>
       </p:sp>
       <p:sp>
         <p:nvSpPr>
-          <p:cNvPr name="Freeform 11" id="11"/>
+          <p:cNvPr id="11" name="Freeform 11"/>
           <p:cNvSpPr/>
           <p:nvPr/>
         </p:nvSpPr>
         <p:spPr>
-          <a:xfrm flipH="false" flipV="false" rot="0">
+          <a:xfrm>
             <a:off x="395757" y="6385744"/>
             <a:ext cx="1582979" cy="1670690"/>
           </a:xfrm>
@@ -11951,9 +12220,9 @@
             <a:gdLst/>
             <a:ahLst/>
             <a:cxnLst/>
-            <a:rect r="r" b="b" t="t" l="l"/>
+            <a:rect l="l" t="t" r="r" b="b"/>
             <a:pathLst>
-              <a:path h="1670690" w="1582979">
+              <a:path w="1582979" h="1670690">
                 <a:moveTo>
                   <a:pt x="0" y="0"/>
                 </a:moveTo>
@@ -11982,19 +12251,19 @@
               </a:extLst>
             </a:blip>
             <a:stretch>
-              <a:fillRect l="0" t="0" r="0" b="0"/>
+              <a:fillRect/>
             </a:stretch>
           </a:blipFill>
         </p:spPr>
       </p:sp>
       <p:sp>
         <p:nvSpPr>
-          <p:cNvPr name="Freeform 12" id="12"/>
+          <p:cNvPr id="12" name="Freeform 12"/>
           <p:cNvSpPr/>
           <p:nvPr/>
         </p:nvSpPr>
         <p:spPr>
-          <a:xfrm flipH="false" flipV="false" rot="0">
+          <a:xfrm>
             <a:off x="453542" y="8390249"/>
             <a:ext cx="1525195" cy="1525195"/>
           </a:xfrm>
@@ -12003,9 +12272,9 @@
             <a:gdLst/>
             <a:ahLst/>
             <a:cxnLst/>
-            <a:rect r="r" b="b" t="t" l="l"/>
+            <a:rect l="l" t="t" r="r" b="b"/>
             <a:pathLst>
-              <a:path h="1525195" w="1525195">
+              <a:path w="1525195" h="1525195">
                 <a:moveTo>
                   <a:pt x="0" y="0"/>
                 </a:moveTo>
@@ -12034,19 +12303,19 @@
               </a:extLst>
             </a:blip>
             <a:stretch>
-              <a:fillRect l="0" t="0" r="0" b="0"/>
+              <a:fillRect/>
             </a:stretch>
           </a:blipFill>
         </p:spPr>
       </p:sp>
       <p:sp>
         <p:nvSpPr>
-          <p:cNvPr name="TextBox 13" id="13"/>
-          <p:cNvSpPr txBox="true"/>
-          <p:nvPr/>
-        </p:nvSpPr>
-        <p:spPr>
-          <a:xfrm rot="0">
+          <p:cNvPr id="13" name="TextBox 13"/>
+          <p:cNvSpPr txBox="1"/>
+          <p:nvPr/>
+        </p:nvSpPr>
+        <p:spPr>
+          <a:xfrm>
             <a:off x="6881115" y="1227385"/>
             <a:ext cx="3848695" cy="900140"/>
           </a:xfrm>
@@ -12055,7 +12324,7 @@
           </a:prstGeom>
         </p:spPr>
         <p:txBody>
-          <a:bodyPr anchor="t" rtlCol="false" tIns="0" lIns="0" bIns="0" rIns="0">
+          <a:bodyPr lIns="0" tIns="0" rIns="0" bIns="0" rtlCol="0" anchor="t">
             <a:spAutoFit/>
           </a:bodyPr>
           <a:lstStyle/>
@@ -12089,7 +12358,7 @@
 </file>
 
 <file path=ppt/slides/slide6.xml><?xml version="1.0" encoding="utf-8"?>
-<p:sld xmlns:p="http://schemas.openxmlformats.org/presentationml/2006/main" xmlns:a="http://schemas.openxmlformats.org/drawingml/2006/main" xmlns:r="http://schemas.openxmlformats.org/officeDocument/2006/relationships">
+<p:sld xmlns:a="http://schemas.openxmlformats.org/drawingml/2006/main" xmlns:r="http://schemas.openxmlformats.org/officeDocument/2006/relationships" xmlns:p="http://schemas.openxmlformats.org/presentationml/2006/main">
   <p:cSld>
     <p:spTree>
       <p:nvGrpSpPr>
@@ -12107,12 +12376,12 @@
       </p:grpSpPr>
       <p:grpSp>
         <p:nvGrpSpPr>
-          <p:cNvPr name="Group 2" id="2"/>
+          <p:cNvPr id="2" name="Group 2"/>
           <p:cNvGrpSpPr/>
           <p:nvPr/>
         </p:nvGrpSpPr>
         <p:grpSpPr>
-          <a:xfrm rot="0">
+          <a:xfrm>
             <a:off x="669798" y="685800"/>
             <a:ext cx="5554980" cy="142494"/>
             <a:chOff x="0" y="0"/>
@@ -12121,12 +12390,12 @@
         </p:grpSpPr>
         <p:sp>
           <p:nvSpPr>
-            <p:cNvPr name="Freeform 3" id="3"/>
+            <p:cNvPr id="3" name="Freeform 3"/>
             <p:cNvSpPr/>
             <p:nvPr/>
           </p:nvSpPr>
           <p:spPr>
-            <a:xfrm flipH="false" flipV="false" rot="0">
+            <a:xfrm>
               <a:off x="0" y="0"/>
               <a:ext cx="7406640" cy="189992"/>
             </a:xfrm>
@@ -12135,9 +12404,9 @@
               <a:gdLst/>
               <a:ahLst/>
               <a:cxnLst/>
-              <a:rect r="r" b="b" t="t" l="l"/>
+              <a:rect l="l" t="t" r="r" b="b"/>
               <a:pathLst>
-                <a:path h="189992" w="7406640">
+                <a:path w="7406640" h="189992">
                   <a:moveTo>
                     <a:pt x="0" y="0"/>
                   </a:moveTo>
@@ -12162,12 +12431,12 @@
       </p:grpSp>
       <p:grpSp>
         <p:nvGrpSpPr>
-          <p:cNvPr name="Group 4" id="4"/>
+          <p:cNvPr id="4" name="Group 4"/>
           <p:cNvGrpSpPr/>
           <p:nvPr/>
         </p:nvGrpSpPr>
         <p:grpSpPr>
-          <a:xfrm rot="0">
+          <a:xfrm>
             <a:off x="12063222" y="680466"/>
             <a:ext cx="5554980" cy="147828"/>
             <a:chOff x="0" y="0"/>
@@ -12176,12 +12445,12 @@
         </p:grpSpPr>
         <p:sp>
           <p:nvSpPr>
-            <p:cNvPr name="Freeform 5" id="5"/>
+            <p:cNvPr id="5" name="Freeform 5"/>
             <p:cNvSpPr/>
             <p:nvPr/>
           </p:nvSpPr>
           <p:spPr>
-            <a:xfrm flipH="false" flipV="false" rot="0">
+            <a:xfrm>
               <a:off x="0" y="0"/>
               <a:ext cx="7406640" cy="197104"/>
             </a:xfrm>
@@ -12190,9 +12459,9 @@
               <a:gdLst/>
               <a:ahLst/>
               <a:cxnLst/>
-              <a:rect r="r" b="b" t="t" l="l"/>
+              <a:rect l="l" t="t" r="r" b="b"/>
               <a:pathLst>
-                <a:path h="197104" w="7406640">
+                <a:path w="7406640" h="197104">
                   <a:moveTo>
                     <a:pt x="0" y="0"/>
                   </a:moveTo>
@@ -12217,12 +12486,12 @@
       </p:grpSp>
       <p:grpSp>
         <p:nvGrpSpPr>
-          <p:cNvPr name="Group 6" id="6"/>
+          <p:cNvPr id="6" name="Group 6"/>
           <p:cNvGrpSpPr/>
           <p:nvPr/>
         </p:nvGrpSpPr>
         <p:grpSpPr>
-          <a:xfrm rot="0">
+          <a:xfrm>
             <a:off x="6362748" y="685800"/>
             <a:ext cx="5554980" cy="137160"/>
             <a:chOff x="0" y="0"/>
@@ -12231,12 +12500,12 @@
         </p:grpSpPr>
         <p:sp>
           <p:nvSpPr>
-            <p:cNvPr name="Freeform 7" id="7"/>
+            <p:cNvPr id="7" name="Freeform 7"/>
             <p:cNvSpPr/>
             <p:nvPr/>
           </p:nvSpPr>
           <p:spPr>
-            <a:xfrm flipH="false" flipV="false" rot="0">
+            <a:xfrm>
               <a:off x="0" y="0"/>
               <a:ext cx="7406640" cy="182880"/>
             </a:xfrm>
@@ -12245,9 +12514,9 @@
               <a:gdLst/>
               <a:ahLst/>
               <a:cxnLst/>
-              <a:rect r="r" b="b" t="t" l="l"/>
+              <a:rect l="l" t="t" r="r" b="b"/>
               <a:pathLst>
-                <a:path h="182880" w="7406640">
+                <a:path w="7406640" h="182880">
                   <a:moveTo>
                     <a:pt x="0" y="0"/>
                   </a:moveTo>
@@ -12272,12 +12541,12 @@
       </p:grpSp>
       <p:sp>
         <p:nvSpPr>
-          <p:cNvPr name="Freeform 8" id="8"/>
+          <p:cNvPr id="8" name="Freeform 8"/>
           <p:cNvSpPr/>
           <p:nvPr/>
         </p:nvSpPr>
         <p:spPr>
-          <a:xfrm flipH="false" flipV="false" rot="0">
+          <a:xfrm>
             <a:off x="1275759" y="3947408"/>
             <a:ext cx="1204836" cy="1204836"/>
           </a:xfrm>
@@ -12286,9 +12555,9 @@
             <a:gdLst/>
             <a:ahLst/>
             <a:cxnLst/>
-            <a:rect r="r" b="b" t="t" l="l"/>
+            <a:rect l="l" t="t" r="r" b="b"/>
             <a:pathLst>
-              <a:path h="1204836" w="1204836">
+              <a:path w="1204836" h="1204836">
                 <a:moveTo>
                   <a:pt x="0" y="0"/>
                 </a:moveTo>
@@ -12317,19 +12586,19 @@
               </a:extLst>
             </a:blip>
             <a:stretch>
-              <a:fillRect l="0" t="0" r="0" b="0"/>
+              <a:fillRect/>
             </a:stretch>
           </a:blipFill>
         </p:spPr>
       </p:sp>
       <p:sp>
         <p:nvSpPr>
-          <p:cNvPr name="Freeform 9" id="9"/>
+          <p:cNvPr id="9" name="Freeform 9"/>
           <p:cNvSpPr/>
           <p:nvPr/>
         </p:nvSpPr>
         <p:spPr>
-          <a:xfrm flipH="false" flipV="false" rot="0">
+          <a:xfrm>
             <a:off x="6804717" y="3947408"/>
             <a:ext cx="1007333" cy="1219162"/>
           </a:xfrm>
@@ -12338,9 +12607,9 @@
             <a:gdLst/>
             <a:ahLst/>
             <a:cxnLst/>
-            <a:rect r="r" b="b" t="t" l="l"/>
+            <a:rect l="l" t="t" r="r" b="b"/>
             <a:pathLst>
-              <a:path h="1219162" w="1007333">
+              <a:path w="1007333" h="1219162">
                 <a:moveTo>
                   <a:pt x="0" y="0"/>
                 </a:moveTo>
@@ -12369,19 +12638,19 @@
               </a:extLst>
             </a:blip>
             <a:stretch>
-              <a:fillRect l="0" t="0" r="0" b="0"/>
+              <a:fillRect/>
             </a:stretch>
           </a:blipFill>
         </p:spPr>
       </p:sp>
       <p:sp>
         <p:nvSpPr>
-          <p:cNvPr name="Freeform 10" id="10"/>
+          <p:cNvPr id="10" name="Freeform 10"/>
           <p:cNvSpPr/>
           <p:nvPr/>
         </p:nvSpPr>
         <p:spPr>
-          <a:xfrm flipH="false" flipV="false" rot="0">
+          <a:xfrm>
             <a:off x="12333684" y="3947408"/>
             <a:ext cx="1219162" cy="1219162"/>
           </a:xfrm>
@@ -12390,9 +12659,9 @@
             <a:gdLst/>
             <a:ahLst/>
             <a:cxnLst/>
-            <a:rect r="r" b="b" t="t" l="l"/>
+            <a:rect l="l" t="t" r="r" b="b"/>
             <a:pathLst>
-              <a:path h="1219162" w="1219162">
+              <a:path w="1219162" h="1219162">
                 <a:moveTo>
                   <a:pt x="0" y="0"/>
                 </a:moveTo>
@@ -12421,19 +12690,19 @@
               </a:extLst>
             </a:blip>
             <a:stretch>
-              <a:fillRect l="0" t="0" r="0" b="0"/>
+              <a:fillRect/>
             </a:stretch>
           </a:blipFill>
         </p:spPr>
       </p:sp>
       <p:sp>
         <p:nvSpPr>
-          <p:cNvPr name="TextBox 11" id="11"/>
-          <p:cNvSpPr txBox="true"/>
-          <p:nvPr/>
-        </p:nvSpPr>
-        <p:spPr>
-          <a:xfrm rot="0">
+          <p:cNvPr id="11" name="TextBox 11"/>
+          <p:cNvSpPr txBox="1"/>
+          <p:nvPr/>
+        </p:nvSpPr>
+        <p:spPr>
+          <a:xfrm>
             <a:off x="992238" y="2522334"/>
             <a:ext cx="7107136" cy="943127"/>
           </a:xfrm>
@@ -12442,7 +12711,7 @@
           </a:prstGeom>
         </p:spPr>
         <p:txBody>
-          <a:bodyPr anchor="t" rtlCol="false" tIns="0" lIns="0" bIns="0" rIns="0">
+          <a:bodyPr lIns="0" tIns="0" rIns="0" bIns="0" rtlCol="0" anchor="t">
             <a:spAutoFit/>
           </a:bodyPr>
           <a:lstStyle/>
@@ -12469,12 +12738,12 @@
       </p:sp>
       <p:sp>
         <p:nvSpPr>
-          <p:cNvPr name="TextBox 12" id="12"/>
-          <p:cNvSpPr txBox="true"/>
-          <p:nvPr/>
-        </p:nvSpPr>
-        <p:spPr>
-          <a:xfrm rot="0">
+          <p:cNvPr id="12" name="TextBox 12"/>
+          <p:cNvSpPr txBox="1"/>
+          <p:nvPr/>
+        </p:nvSpPr>
+        <p:spPr>
+          <a:xfrm>
             <a:off x="1275759" y="5411991"/>
             <a:ext cx="3544043" cy="481012"/>
           </a:xfrm>
@@ -12483,7 +12752,7 @@
           </a:prstGeom>
         </p:spPr>
         <p:txBody>
-          <a:bodyPr anchor="t" rtlCol="false" tIns="0" lIns="0" bIns="0" rIns="0">
+          <a:bodyPr lIns="0" tIns="0" rIns="0" bIns="0" rtlCol="0" anchor="t">
             <a:spAutoFit/>
           </a:bodyPr>
           <a:lstStyle/>
@@ -12510,12 +12779,12 @@
       </p:sp>
       <p:sp>
         <p:nvSpPr>
-          <p:cNvPr name="TextBox 13" id="13"/>
-          <p:cNvSpPr txBox="true"/>
-          <p:nvPr/>
-        </p:nvSpPr>
-        <p:spPr>
-          <a:xfrm rot="0">
+          <p:cNvPr id="13" name="TextBox 13"/>
+          <p:cNvSpPr txBox="1"/>
+          <p:nvPr/>
+        </p:nvSpPr>
+        <p:spPr>
+          <a:xfrm>
             <a:off x="1275759" y="5977385"/>
             <a:ext cx="4678413" cy="992981"/>
           </a:xfrm>
@@ -12524,7 +12793,7 @@
           </a:prstGeom>
         </p:spPr>
         <p:txBody>
-          <a:bodyPr anchor="t" rtlCol="false" tIns="0" lIns="0" bIns="0" rIns="0">
+          <a:bodyPr lIns="0" tIns="0" rIns="0" bIns="0" rtlCol="0" anchor="t">
             <a:spAutoFit/>
           </a:bodyPr>
           <a:lstStyle/>
@@ -12551,12 +12820,12 @@
       </p:sp>
       <p:sp>
         <p:nvSpPr>
-          <p:cNvPr name="TextBox 14" id="14"/>
-          <p:cNvSpPr txBox="true"/>
-          <p:nvPr/>
-        </p:nvSpPr>
-        <p:spPr>
-          <a:xfrm rot="0">
+          <p:cNvPr id="14" name="TextBox 14"/>
+          <p:cNvSpPr txBox="1"/>
+          <p:nvPr/>
+        </p:nvSpPr>
+        <p:spPr>
+          <a:xfrm>
             <a:off x="6804717" y="5411991"/>
             <a:ext cx="3544043" cy="481012"/>
           </a:xfrm>
@@ -12565,7 +12834,7 @@
           </a:prstGeom>
         </p:spPr>
         <p:txBody>
-          <a:bodyPr anchor="t" rtlCol="false" tIns="0" lIns="0" bIns="0" rIns="0">
+          <a:bodyPr lIns="0" tIns="0" rIns="0" bIns="0" rtlCol="0" anchor="t">
             <a:spAutoFit/>
           </a:bodyPr>
           <a:lstStyle/>
@@ -12592,12 +12861,12 @@
       </p:sp>
       <p:sp>
         <p:nvSpPr>
-          <p:cNvPr name="TextBox 15" id="15"/>
-          <p:cNvSpPr txBox="true"/>
-          <p:nvPr/>
-        </p:nvSpPr>
-        <p:spPr>
-          <a:xfrm rot="0">
+          <p:cNvPr id="15" name="TextBox 15"/>
+          <p:cNvSpPr txBox="1"/>
+          <p:nvPr/>
+        </p:nvSpPr>
+        <p:spPr>
+          <a:xfrm>
             <a:off x="6804717" y="5977385"/>
             <a:ext cx="4678413" cy="1446609"/>
           </a:xfrm>
@@ -12606,7 +12875,7 @@
           </a:prstGeom>
         </p:spPr>
         <p:txBody>
-          <a:bodyPr anchor="t" rtlCol="false" tIns="0" lIns="0" bIns="0" rIns="0">
+          <a:bodyPr lIns="0" tIns="0" rIns="0" bIns="0" rtlCol="0" anchor="t">
             <a:spAutoFit/>
           </a:bodyPr>
           <a:lstStyle/>
@@ -12633,12 +12902,12 @@
       </p:sp>
       <p:sp>
         <p:nvSpPr>
-          <p:cNvPr name="TextBox 16" id="16"/>
-          <p:cNvSpPr txBox="true"/>
-          <p:nvPr/>
-        </p:nvSpPr>
-        <p:spPr>
-          <a:xfrm rot="0">
+          <p:cNvPr id="16" name="TextBox 16"/>
+          <p:cNvSpPr txBox="1"/>
+          <p:nvPr/>
+        </p:nvSpPr>
+        <p:spPr>
+          <a:xfrm>
             <a:off x="12333684" y="5411991"/>
             <a:ext cx="3544043" cy="481012"/>
           </a:xfrm>
@@ -12647,7 +12916,7 @@
           </a:prstGeom>
         </p:spPr>
         <p:txBody>
-          <a:bodyPr anchor="t" rtlCol="false" tIns="0" lIns="0" bIns="0" rIns="0">
+          <a:bodyPr lIns="0" tIns="0" rIns="0" bIns="0" rtlCol="0" anchor="t">
             <a:spAutoFit/>
           </a:bodyPr>
           <a:lstStyle/>
@@ -12674,12 +12943,12 @@
       </p:sp>
       <p:sp>
         <p:nvSpPr>
-          <p:cNvPr name="TextBox 17" id="17"/>
-          <p:cNvSpPr txBox="true"/>
-          <p:nvPr/>
-        </p:nvSpPr>
-        <p:spPr>
-          <a:xfrm rot="0">
+          <p:cNvPr id="17" name="TextBox 17"/>
+          <p:cNvSpPr txBox="1"/>
+          <p:nvPr/>
+        </p:nvSpPr>
+        <p:spPr>
+          <a:xfrm>
             <a:off x="12333684" y="5977385"/>
             <a:ext cx="4678413" cy="1446609"/>
           </a:xfrm>
@@ -12688,7 +12957,7 @@
           </a:prstGeom>
         </p:spPr>
         <p:txBody>
-          <a:bodyPr anchor="t" rtlCol="false" tIns="0" lIns="0" bIns="0" rIns="0">
+          <a:bodyPr lIns="0" tIns="0" rIns="0" bIns="0" rtlCol="0" anchor="t">
             <a:spAutoFit/>
           </a:bodyPr>
           <a:lstStyle/>
@@ -12722,7 +12991,7 @@
 </file>
 
 <file path=ppt/slides/slide7.xml><?xml version="1.0" encoding="utf-8"?>
-<p:sld xmlns:p="http://schemas.openxmlformats.org/presentationml/2006/main" xmlns:a="http://schemas.openxmlformats.org/drawingml/2006/main" xmlns:r="http://schemas.openxmlformats.org/officeDocument/2006/relationships">
+<p:sld xmlns:a="http://schemas.openxmlformats.org/drawingml/2006/main" xmlns:r="http://schemas.openxmlformats.org/officeDocument/2006/relationships" xmlns:p="http://schemas.openxmlformats.org/presentationml/2006/main">
   <p:cSld>
     <p:spTree>
       <p:nvGrpSpPr>
@@ -12740,12 +13009,12 @@
       </p:grpSpPr>
       <p:grpSp>
         <p:nvGrpSpPr>
-          <p:cNvPr name="Group 2" id="2"/>
+          <p:cNvPr id="2" name="Group 2"/>
           <p:cNvGrpSpPr/>
           <p:nvPr/>
         </p:nvGrpSpPr>
         <p:grpSpPr>
-          <a:xfrm rot="0">
+          <a:xfrm>
             <a:off x="669798" y="685800"/>
             <a:ext cx="5554980" cy="142494"/>
             <a:chOff x="0" y="0"/>
@@ -12754,12 +13023,12 @@
         </p:grpSpPr>
         <p:sp>
           <p:nvSpPr>
-            <p:cNvPr name="Freeform 3" id="3"/>
+            <p:cNvPr id="3" name="Freeform 3"/>
             <p:cNvSpPr/>
             <p:nvPr/>
           </p:nvSpPr>
           <p:spPr>
-            <a:xfrm flipH="false" flipV="false" rot="0">
+            <a:xfrm>
               <a:off x="0" y="0"/>
               <a:ext cx="7406640" cy="189992"/>
             </a:xfrm>
@@ -12768,9 +13037,9 @@
               <a:gdLst/>
               <a:ahLst/>
               <a:cxnLst/>
-              <a:rect r="r" b="b" t="t" l="l"/>
+              <a:rect l="l" t="t" r="r" b="b"/>
               <a:pathLst>
-                <a:path h="189992" w="7406640">
+                <a:path w="7406640" h="189992">
                   <a:moveTo>
                     <a:pt x="0" y="0"/>
                   </a:moveTo>
@@ -12795,12 +13064,12 @@
       </p:grpSp>
       <p:grpSp>
         <p:nvGrpSpPr>
-          <p:cNvPr name="Group 4" id="4"/>
+          <p:cNvPr id="4" name="Group 4"/>
           <p:cNvGrpSpPr/>
           <p:nvPr/>
         </p:nvGrpSpPr>
         <p:grpSpPr>
-          <a:xfrm rot="0">
+          <a:xfrm>
             <a:off x="12063222" y="680466"/>
             <a:ext cx="5554980" cy="147828"/>
             <a:chOff x="0" y="0"/>
@@ -12809,12 +13078,12 @@
         </p:grpSpPr>
         <p:sp>
           <p:nvSpPr>
-            <p:cNvPr name="Freeform 5" id="5"/>
+            <p:cNvPr id="5" name="Freeform 5"/>
             <p:cNvSpPr/>
             <p:nvPr/>
           </p:nvSpPr>
           <p:spPr>
-            <a:xfrm flipH="false" flipV="false" rot="0">
+            <a:xfrm>
               <a:off x="0" y="0"/>
               <a:ext cx="7406640" cy="197104"/>
             </a:xfrm>
@@ -12823,9 +13092,9 @@
               <a:gdLst/>
               <a:ahLst/>
               <a:cxnLst/>
-              <a:rect r="r" b="b" t="t" l="l"/>
+              <a:rect l="l" t="t" r="r" b="b"/>
               <a:pathLst>
-                <a:path h="197104" w="7406640">
+                <a:path w="7406640" h="197104">
                   <a:moveTo>
                     <a:pt x="0" y="0"/>
                   </a:moveTo>
@@ -12850,12 +13119,12 @@
       </p:grpSp>
       <p:grpSp>
         <p:nvGrpSpPr>
-          <p:cNvPr name="Group 6" id="6"/>
+          <p:cNvPr id="6" name="Group 6"/>
           <p:cNvGrpSpPr/>
           <p:nvPr/>
         </p:nvGrpSpPr>
         <p:grpSpPr>
-          <a:xfrm rot="0">
+          <a:xfrm>
             <a:off x="6362748" y="685800"/>
             <a:ext cx="5554980" cy="137160"/>
             <a:chOff x="0" y="0"/>
@@ -12864,12 +13133,12 @@
         </p:grpSpPr>
         <p:sp>
           <p:nvSpPr>
-            <p:cNvPr name="Freeform 7" id="7"/>
+            <p:cNvPr id="7" name="Freeform 7"/>
             <p:cNvSpPr/>
             <p:nvPr/>
           </p:nvSpPr>
           <p:spPr>
-            <a:xfrm flipH="false" flipV="false" rot="0">
+            <a:xfrm>
               <a:off x="0" y="0"/>
               <a:ext cx="7406640" cy="182880"/>
             </a:xfrm>
@@ -12878,9 +13147,9 @@
               <a:gdLst/>
               <a:ahLst/>
               <a:cxnLst/>
-              <a:rect r="r" b="b" t="t" l="l"/>
+              <a:rect l="l" t="t" r="r" b="b"/>
               <a:pathLst>
-                <a:path h="182880" w="7406640">
+                <a:path w="7406640" h="182880">
                   <a:moveTo>
                     <a:pt x="0" y="0"/>
                   </a:moveTo>
@@ -12905,12 +13174,12 @@
       </p:grpSp>
       <p:sp>
         <p:nvSpPr>
-          <p:cNvPr name="TextBox 8" id="8"/>
-          <p:cNvSpPr txBox="true"/>
-          <p:nvPr/>
-        </p:nvSpPr>
-        <p:spPr>
-          <a:xfrm rot="0">
+          <p:cNvPr id="8" name="TextBox 8"/>
+          <p:cNvSpPr txBox="1"/>
+          <p:nvPr/>
+        </p:nvSpPr>
+        <p:spPr>
+          <a:xfrm>
             <a:off x="690858" y="1199269"/>
             <a:ext cx="6977805" cy="654996"/>
           </a:xfrm>
@@ -12919,7 +13188,7 @@
           </a:prstGeom>
         </p:spPr>
         <p:txBody>
-          <a:bodyPr anchor="t" rtlCol="false" tIns="0" lIns="0" bIns="0" rIns="0">
+          <a:bodyPr lIns="0" tIns="0" rIns="0" bIns="0" rtlCol="0" anchor="t">
             <a:spAutoFit/>
           </a:bodyPr>
           <a:lstStyle/>
@@ -12946,12 +13215,12 @@
       </p:sp>
       <p:sp>
         <p:nvSpPr>
-          <p:cNvPr name="TextBox 9" id="9"/>
-          <p:cNvSpPr txBox="true"/>
-          <p:nvPr/>
-        </p:nvSpPr>
-        <p:spPr>
-          <a:xfrm rot="0">
+          <p:cNvPr id="9" name="TextBox 9"/>
+          <p:cNvSpPr txBox="1"/>
+          <p:nvPr/>
+        </p:nvSpPr>
+        <p:spPr>
+          <a:xfrm>
             <a:off x="690858" y="2099239"/>
             <a:ext cx="1375442" cy="326971"/>
           </a:xfrm>
@@ -12960,7 +13229,7 @@
           </a:prstGeom>
         </p:spPr>
         <p:txBody>
-          <a:bodyPr anchor="t" rtlCol="false" tIns="0" lIns="0" bIns="0" rIns="0">
+          <a:bodyPr lIns="0" tIns="0" rIns="0" bIns="0" rtlCol="0" anchor="t">
             <a:spAutoFit/>
           </a:bodyPr>
           <a:lstStyle/>
@@ -12971,7 +13240,7 @@
               </a:lnSpc>
             </a:pPr>
             <a:r>
-              <a:rPr lang="en-US" sz="2499" b="true">
+              <a:rPr lang="en-US" sz="2499" b="1">
                 <a:solidFill>
                   <a:srgbClr val="000000"/>
                 </a:solidFill>
@@ -12987,12 +13256,12 @@
       </p:sp>
       <p:sp>
         <p:nvSpPr>
-          <p:cNvPr name="TextBox 10" id="10"/>
-          <p:cNvSpPr txBox="true"/>
-          <p:nvPr/>
-        </p:nvSpPr>
-        <p:spPr>
-          <a:xfrm rot="0">
+          <p:cNvPr id="10" name="TextBox 10"/>
+          <p:cNvSpPr txBox="1"/>
+          <p:nvPr/>
+        </p:nvSpPr>
+        <p:spPr>
+          <a:xfrm>
             <a:off x="690858" y="2604959"/>
             <a:ext cx="8212341" cy="268043"/>
           </a:xfrm>
@@ -13001,7 +13270,7 @@
           </a:prstGeom>
         </p:spPr>
         <p:txBody>
-          <a:bodyPr anchor="t" rtlCol="false" tIns="0" lIns="0" bIns="0" rIns="0">
+          <a:bodyPr lIns="0" tIns="0" rIns="0" bIns="0" rtlCol="0" anchor="t">
             <a:spAutoFit/>
           </a:bodyPr>
           <a:lstStyle/>
@@ -13047,12 +13316,12 @@
       </p:sp>
       <p:sp>
         <p:nvSpPr>
-          <p:cNvPr name="TextBox 11" id="11"/>
-          <p:cNvSpPr txBox="true"/>
-          <p:nvPr/>
-        </p:nvSpPr>
-        <p:spPr>
-          <a:xfrm rot="0">
+          <p:cNvPr id="11" name="TextBox 11"/>
+          <p:cNvSpPr txBox="1"/>
+          <p:nvPr/>
+        </p:nvSpPr>
+        <p:spPr>
+          <a:xfrm>
             <a:off x="690858" y="3625477"/>
             <a:ext cx="1323353" cy="622192"/>
           </a:xfrm>
@@ -13061,7 +13330,7 @@
           </a:prstGeom>
         </p:spPr>
         <p:txBody>
-          <a:bodyPr anchor="t" rtlCol="false" tIns="0" lIns="0" bIns="0" rIns="0">
+          <a:bodyPr lIns="0" tIns="0" rIns="0" bIns="0" rtlCol="0" anchor="t">
             <a:spAutoFit/>
           </a:bodyPr>
           <a:lstStyle/>
@@ -13071,6 +13340,7 @@
                 <a:spcPts val="2375"/>
               </a:lnSpc>
             </a:pPr>
+            <a:endParaRPr/>
           </a:p>
           <a:p>
             <a:pPr algn="l">
@@ -13079,7 +13349,7 @@
               </a:lnSpc>
             </a:pPr>
             <a:r>
-              <a:rPr lang="en-US" sz="2499" b="true">
+              <a:rPr lang="en-US" sz="2499" b="1">
                 <a:solidFill>
                   <a:srgbClr val="000000"/>
                 </a:solidFill>
@@ -13095,12 +13365,12 @@
       </p:sp>
       <p:sp>
         <p:nvSpPr>
-          <p:cNvPr name="TextBox 12" id="12"/>
-          <p:cNvSpPr txBox="true"/>
-          <p:nvPr/>
-        </p:nvSpPr>
-        <p:spPr>
-          <a:xfrm rot="0">
+          <p:cNvPr id="12" name="TextBox 12"/>
+          <p:cNvSpPr txBox="1"/>
+          <p:nvPr/>
+        </p:nvSpPr>
+        <p:spPr>
+          <a:xfrm>
             <a:off x="669798" y="4131188"/>
             <a:ext cx="8212341" cy="268043"/>
           </a:xfrm>
@@ -13109,7 +13379,7 @@
           </a:prstGeom>
         </p:spPr>
         <p:txBody>
-          <a:bodyPr anchor="t" rtlCol="false" tIns="0" lIns="0" bIns="0" rIns="0">
+          <a:bodyPr lIns="0" tIns="0" rIns="0" bIns="0" rtlCol="0" anchor="t">
             <a:spAutoFit/>
           </a:bodyPr>
           <a:lstStyle/>
@@ -13119,6 +13389,7 @@
                 <a:spcPts val="2437"/>
               </a:lnSpc>
             </a:pPr>
+            <a:endParaRPr/>
           </a:p>
           <a:p>
             <a:pPr algn="l">
@@ -13143,12 +13414,12 @@
       </p:sp>
       <p:sp>
         <p:nvSpPr>
-          <p:cNvPr name="TextBox 13" id="13"/>
-          <p:cNvSpPr txBox="true"/>
-          <p:nvPr/>
-        </p:nvSpPr>
-        <p:spPr>
-          <a:xfrm rot="0">
+          <p:cNvPr id="13" name="TextBox 13"/>
+          <p:cNvSpPr txBox="1"/>
+          <p:nvPr/>
+        </p:nvSpPr>
+        <p:spPr>
+          <a:xfrm>
             <a:off x="669798" y="4644195"/>
             <a:ext cx="2467270" cy="260747"/>
           </a:xfrm>
@@ -13157,7 +13428,7 @@
           </a:prstGeom>
         </p:spPr>
         <p:txBody>
-          <a:bodyPr anchor="t" rtlCol="false" tIns="0" lIns="0" bIns="0" rIns="0">
+          <a:bodyPr lIns="0" tIns="0" rIns="0" bIns="0" rtlCol="0" anchor="t">
             <a:spAutoFit/>
           </a:bodyPr>
           <a:lstStyle/>
@@ -13167,6 +13438,7 @@
                 <a:spcPts val="2375"/>
               </a:lnSpc>
             </a:pPr>
+            <a:endParaRPr/>
           </a:p>
           <a:p>
             <a:pPr algn="l">
@@ -13191,12 +13463,12 @@
       </p:sp>
       <p:sp>
         <p:nvSpPr>
-          <p:cNvPr name="TextBox 14" id="14"/>
-          <p:cNvSpPr txBox="true"/>
-          <p:nvPr/>
-        </p:nvSpPr>
-        <p:spPr>
-          <a:xfrm rot="0">
+          <p:cNvPr id="14" name="TextBox 14"/>
+          <p:cNvSpPr txBox="1"/>
+          <p:nvPr/>
+        </p:nvSpPr>
+        <p:spPr>
+          <a:xfrm>
             <a:off x="669798" y="5149915"/>
             <a:ext cx="8212341" cy="268043"/>
           </a:xfrm>
@@ -13205,7 +13477,7 @@
           </a:prstGeom>
         </p:spPr>
         <p:txBody>
-          <a:bodyPr anchor="t" rtlCol="false" tIns="0" lIns="0" bIns="0" rIns="0">
+          <a:bodyPr lIns="0" tIns="0" rIns="0" bIns="0" rtlCol="0" anchor="t">
             <a:spAutoFit/>
           </a:bodyPr>
           <a:lstStyle/>
@@ -13215,6 +13487,7 @@
                 <a:spcPts val="2437"/>
               </a:lnSpc>
             </a:pPr>
+            <a:endParaRPr/>
           </a:p>
           <a:p>
             <a:pPr algn="l">
@@ -13239,12 +13512,12 @@
       </p:sp>
       <p:grpSp>
         <p:nvGrpSpPr>
-          <p:cNvPr name="Group 15" id="15"/>
+          <p:cNvPr id="15" name="Group 15"/>
           <p:cNvGrpSpPr/>
           <p:nvPr/>
         </p:nvGrpSpPr>
         <p:grpSpPr>
-          <a:xfrm rot="0">
+          <a:xfrm>
             <a:off x="9384802" y="851221"/>
             <a:ext cx="8212341" cy="8212341"/>
             <a:chOff x="0" y="0"/>
@@ -13253,12 +13526,12 @@
         </p:grpSpPr>
         <p:sp>
           <p:nvSpPr>
-            <p:cNvPr name="Freeform 16" id="16" descr="preencoded.png"/>
+            <p:cNvPr id="16" name="Freeform 16" descr="preencoded.png"/>
             <p:cNvSpPr/>
             <p:nvPr/>
           </p:nvSpPr>
           <p:spPr>
-            <a:xfrm flipH="false" flipV="false" rot="0">
+            <a:xfrm>
               <a:off x="0" y="0"/>
               <a:ext cx="10949813" cy="10949813"/>
             </a:xfrm>
@@ -13267,9 +13540,9 @@
               <a:gdLst/>
               <a:ahLst/>
               <a:cxnLst/>
-              <a:rect r="r" b="b" t="t" l="l"/>
+              <a:rect l="l" t="t" r="r" b="b"/>
               <a:pathLst>
-                <a:path h="10949813" w="10949813">
+                <a:path w="10949813" h="10949813">
                   <a:moveTo>
                     <a:pt x="0" y="0"/>
                   </a:moveTo>
@@ -13292,7 +13565,7 @@
             <a:blipFill>
               <a:blip r:embed="rId3"/>
               <a:stretch>
-                <a:fillRect l="0" t="0" r="0" b="0"/>
+                <a:fillRect/>
               </a:stretch>
             </a:blipFill>
           </p:spPr>
@@ -13300,12 +13573,12 @@
       </p:grpSp>
       <p:sp>
         <p:nvSpPr>
-          <p:cNvPr name="TextBox 17" id="17"/>
-          <p:cNvSpPr txBox="true"/>
-          <p:nvPr/>
-        </p:nvSpPr>
-        <p:spPr>
-          <a:xfrm rot="0">
+          <p:cNvPr id="17" name="TextBox 17"/>
+          <p:cNvSpPr txBox="1"/>
+          <p:nvPr/>
+        </p:nvSpPr>
+        <p:spPr>
+          <a:xfrm>
             <a:off x="9394327" y="10560691"/>
             <a:ext cx="8212341" cy="372818"/>
           </a:xfrm>
@@ -13314,7 +13587,7 @@
           </a:prstGeom>
         </p:spPr>
         <p:txBody>
-          <a:bodyPr anchor="t" rtlCol="false" tIns="0" lIns="0" bIns="0" rIns="0">
+          <a:bodyPr lIns="0" tIns="0" rIns="0" bIns="0" rtlCol="0" anchor="t">
             <a:spAutoFit/>
           </a:bodyPr>
           <a:lstStyle/>
@@ -13348,7 +13621,7 @@
 </file>
 
 <file path=ppt/slides/slide8.xml><?xml version="1.0" encoding="utf-8"?>
-<p:sld xmlns:p="http://schemas.openxmlformats.org/presentationml/2006/main" xmlns:a="http://schemas.openxmlformats.org/drawingml/2006/main" xmlns:r="http://schemas.openxmlformats.org/officeDocument/2006/relationships">
+<p:sld xmlns:a="http://schemas.openxmlformats.org/drawingml/2006/main" xmlns:r="http://schemas.openxmlformats.org/officeDocument/2006/relationships" xmlns:p="http://schemas.openxmlformats.org/presentationml/2006/main">
   <p:cSld>
     <p:spTree>
       <p:nvGrpSpPr>
@@ -13366,12 +13639,12 @@
       </p:grpSpPr>
       <p:grpSp>
         <p:nvGrpSpPr>
-          <p:cNvPr name="Group 2" id="2"/>
+          <p:cNvPr id="2" name="Group 2"/>
           <p:cNvGrpSpPr/>
           <p:nvPr/>
         </p:nvGrpSpPr>
         <p:grpSpPr>
-          <a:xfrm rot="0">
+          <a:xfrm>
             <a:off x="669798" y="685800"/>
             <a:ext cx="5554980" cy="142494"/>
             <a:chOff x="0" y="0"/>
@@ -13380,12 +13653,12 @@
         </p:grpSpPr>
         <p:sp>
           <p:nvSpPr>
-            <p:cNvPr name="Freeform 3" id="3"/>
+            <p:cNvPr id="3" name="Freeform 3"/>
             <p:cNvSpPr/>
             <p:nvPr/>
           </p:nvSpPr>
           <p:spPr>
-            <a:xfrm flipH="false" flipV="false" rot="0">
+            <a:xfrm>
               <a:off x="0" y="0"/>
               <a:ext cx="7406640" cy="189992"/>
             </a:xfrm>
@@ -13394,9 +13667,9 @@
               <a:gdLst/>
               <a:ahLst/>
               <a:cxnLst/>
-              <a:rect r="r" b="b" t="t" l="l"/>
+              <a:rect l="l" t="t" r="r" b="b"/>
               <a:pathLst>
-                <a:path h="189992" w="7406640">
+                <a:path w="7406640" h="189992">
                   <a:moveTo>
                     <a:pt x="0" y="0"/>
                   </a:moveTo>
@@ -13421,12 +13694,12 @@
       </p:grpSp>
       <p:grpSp>
         <p:nvGrpSpPr>
-          <p:cNvPr name="Group 4" id="4"/>
+          <p:cNvPr id="4" name="Group 4"/>
           <p:cNvGrpSpPr/>
           <p:nvPr/>
         </p:nvGrpSpPr>
         <p:grpSpPr>
-          <a:xfrm rot="0">
+          <a:xfrm>
             <a:off x="12063222" y="680466"/>
             <a:ext cx="5554980" cy="147828"/>
             <a:chOff x="0" y="0"/>
@@ -13435,12 +13708,12 @@
         </p:grpSpPr>
         <p:sp>
           <p:nvSpPr>
-            <p:cNvPr name="Freeform 5" id="5"/>
+            <p:cNvPr id="5" name="Freeform 5"/>
             <p:cNvSpPr/>
             <p:nvPr/>
           </p:nvSpPr>
           <p:spPr>
-            <a:xfrm flipH="false" flipV="false" rot="0">
+            <a:xfrm>
               <a:off x="0" y="0"/>
               <a:ext cx="7406640" cy="197104"/>
             </a:xfrm>
@@ -13449,9 +13722,9 @@
               <a:gdLst/>
               <a:ahLst/>
               <a:cxnLst/>
-              <a:rect r="r" b="b" t="t" l="l"/>
+              <a:rect l="l" t="t" r="r" b="b"/>
               <a:pathLst>
-                <a:path h="197104" w="7406640">
+                <a:path w="7406640" h="197104">
                   <a:moveTo>
                     <a:pt x="0" y="0"/>
                   </a:moveTo>
@@ -13476,12 +13749,12 @@
       </p:grpSp>
       <p:grpSp>
         <p:nvGrpSpPr>
-          <p:cNvPr name="Group 6" id="6"/>
+          <p:cNvPr id="6" name="Group 6"/>
           <p:cNvGrpSpPr/>
           <p:nvPr/>
         </p:nvGrpSpPr>
         <p:grpSpPr>
-          <a:xfrm rot="0">
+          <a:xfrm>
             <a:off x="6362748" y="685800"/>
             <a:ext cx="5554980" cy="137160"/>
             <a:chOff x="0" y="0"/>
@@ -13490,12 +13763,12 @@
         </p:grpSpPr>
         <p:sp>
           <p:nvSpPr>
-            <p:cNvPr name="Freeform 7" id="7"/>
+            <p:cNvPr id="7" name="Freeform 7"/>
             <p:cNvSpPr/>
             <p:nvPr/>
           </p:nvSpPr>
           <p:spPr>
-            <a:xfrm flipH="false" flipV="false" rot="0">
+            <a:xfrm>
               <a:off x="0" y="0"/>
               <a:ext cx="7406640" cy="182880"/>
             </a:xfrm>
@@ -13504,9 +13777,9 @@
               <a:gdLst/>
               <a:ahLst/>
               <a:cxnLst/>
-              <a:rect r="r" b="b" t="t" l="l"/>
+              <a:rect l="l" t="t" r="r" b="b"/>
               <a:pathLst>
-                <a:path h="182880" w="7406640">
+                <a:path w="7406640" h="182880">
                   <a:moveTo>
                     <a:pt x="0" y="0"/>
                   </a:moveTo>
@@ -13531,12 +13804,12 @@
       </p:grpSp>
       <p:grpSp>
         <p:nvGrpSpPr>
-          <p:cNvPr name="Group 8" id="8"/>
+          <p:cNvPr id="8" name="Group 8"/>
           <p:cNvGrpSpPr/>
           <p:nvPr/>
         </p:nvGrpSpPr>
         <p:grpSpPr>
-          <a:xfrm rot="0">
+          <a:xfrm>
             <a:off x="756999" y="5143500"/>
             <a:ext cx="7746921" cy="4931931"/>
             <a:chOff x="0" y="0"/>
@@ -13545,12 +13818,12 @@
         </p:grpSpPr>
         <p:sp>
           <p:nvSpPr>
-            <p:cNvPr name="Freeform 9" id="9"/>
+            <p:cNvPr id="9" name="Freeform 9"/>
             <p:cNvSpPr/>
             <p:nvPr/>
           </p:nvSpPr>
           <p:spPr>
-            <a:xfrm flipH="false" flipV="false" rot="0">
+            <a:xfrm>
               <a:off x="0" y="0"/>
               <a:ext cx="10329291" cy="6575933"/>
             </a:xfrm>
@@ -13559,9 +13832,9 @@
               <a:gdLst/>
               <a:ahLst/>
               <a:cxnLst/>
-              <a:rect r="r" b="b" t="t" l="l"/>
+              <a:rect l="l" t="t" r="r" b="b"/>
               <a:pathLst>
-                <a:path h="6575933" w="10329291">
+                <a:path w="10329291" h="6575933">
                   <a:moveTo>
                     <a:pt x="0" y="0"/>
                   </a:moveTo>
@@ -13584,7 +13857,7 @@
             <a:blipFill>
               <a:blip r:embed="rId2"/>
               <a:stretch>
-                <a:fillRect l="0" t="0" r="0" b="0"/>
+                <a:fillRect/>
               </a:stretch>
             </a:blipFill>
           </p:spPr>
@@ -13592,12 +13865,12 @@
       </p:grpSp>
       <p:grpSp>
         <p:nvGrpSpPr>
-          <p:cNvPr name="Group 10" id="10"/>
+          <p:cNvPr id="10" name="Group 10"/>
           <p:cNvGrpSpPr/>
           <p:nvPr/>
         </p:nvGrpSpPr>
         <p:grpSpPr>
-          <a:xfrm rot="0">
+          <a:xfrm>
             <a:off x="10373973" y="128683"/>
             <a:ext cx="7746921" cy="4885934"/>
             <a:chOff x="0" y="0"/>
@@ -13606,12 +13879,12 @@
         </p:grpSpPr>
         <p:sp>
           <p:nvSpPr>
-            <p:cNvPr name="Freeform 11" id="11"/>
+            <p:cNvPr id="11" name="Freeform 11"/>
             <p:cNvSpPr/>
             <p:nvPr/>
           </p:nvSpPr>
           <p:spPr>
-            <a:xfrm flipH="false" flipV="false" rot="0">
+            <a:xfrm>
               <a:off x="0" y="0"/>
               <a:ext cx="10329291" cy="6514592"/>
             </a:xfrm>
@@ -13620,9 +13893,9 @@
               <a:gdLst/>
               <a:ahLst/>
               <a:cxnLst/>
-              <a:rect r="r" b="b" t="t" l="l"/>
+              <a:rect l="l" t="t" r="r" b="b"/>
               <a:pathLst>
-                <a:path h="6514592" w="10329291">
+                <a:path w="10329291" h="6514592">
                   <a:moveTo>
                     <a:pt x="0" y="0"/>
                   </a:moveTo>
@@ -13645,7 +13918,7 @@
             <a:blipFill>
               <a:blip r:embed="rId3"/>
               <a:stretch>
-                <a:fillRect l="0" t="0" r="0" b="0"/>
+                <a:fillRect/>
               </a:stretch>
             </a:blipFill>
           </p:spPr>
@@ -13653,12 +13926,12 @@
       </p:grpSp>
       <p:grpSp>
         <p:nvGrpSpPr>
-          <p:cNvPr name="Group 12" id="12"/>
+          <p:cNvPr id="12" name="Group 12"/>
           <p:cNvGrpSpPr/>
           <p:nvPr/>
         </p:nvGrpSpPr>
         <p:grpSpPr>
-          <a:xfrm rot="0">
+          <a:xfrm>
             <a:off x="10373973" y="5272392"/>
             <a:ext cx="7746921" cy="4849387"/>
             <a:chOff x="0" y="0"/>
@@ -13667,12 +13940,12 @@
         </p:grpSpPr>
         <p:sp>
           <p:nvSpPr>
-            <p:cNvPr name="Freeform 13" id="13"/>
+            <p:cNvPr id="13" name="Freeform 13"/>
             <p:cNvSpPr/>
             <p:nvPr/>
           </p:nvSpPr>
           <p:spPr>
-            <a:xfrm flipH="false" flipV="false" rot="0">
+            <a:xfrm>
               <a:off x="0" y="0"/>
               <a:ext cx="10329291" cy="6465824"/>
             </a:xfrm>
@@ -13681,9 +13954,9 @@
               <a:gdLst/>
               <a:ahLst/>
               <a:cxnLst/>
-              <a:rect r="r" b="b" t="t" l="l"/>
+              <a:rect l="l" t="t" r="r" b="b"/>
               <a:pathLst>
-                <a:path h="6465824" w="10329291">
+                <a:path w="10329291" h="6465824">
                   <a:moveTo>
                     <a:pt x="0" y="0"/>
                   </a:moveTo>
@@ -13706,7 +13979,7 @@
             <a:blipFill>
               <a:blip r:embed="rId4"/>
               <a:stretch>
-                <a:fillRect l="0" t="0" r="0" b="0"/>
+                <a:fillRect/>
               </a:stretch>
             </a:blipFill>
           </p:spPr>
@@ -13714,12 +13987,12 @@
       </p:grpSp>
       <p:sp>
         <p:nvSpPr>
-          <p:cNvPr name="TextBox 14" id="14"/>
-          <p:cNvSpPr txBox="true"/>
-          <p:nvPr/>
-        </p:nvSpPr>
-        <p:spPr>
-          <a:xfrm rot="0">
+          <p:cNvPr id="14" name="TextBox 14"/>
+          <p:cNvSpPr txBox="1"/>
+          <p:nvPr/>
+        </p:nvSpPr>
+        <p:spPr>
+          <a:xfrm>
             <a:off x="848439" y="857822"/>
             <a:ext cx="8961120" cy="1985905"/>
           </a:xfrm>
@@ -13728,7 +14001,7 @@
           </a:prstGeom>
         </p:spPr>
         <p:txBody>
-          <a:bodyPr anchor="t" rtlCol="false" tIns="0" lIns="0" bIns="0" rIns="0">
+          <a:bodyPr lIns="0" tIns="0" rIns="0" bIns="0" rtlCol="0" anchor="t">
             <a:spAutoFit/>
           </a:bodyPr>
           <a:lstStyle/>
@@ -13762,7 +14035,7 @@
 </file>
 
 <file path=ppt/slides/slide9.xml><?xml version="1.0" encoding="utf-8"?>
-<p:sld xmlns:p="http://schemas.openxmlformats.org/presentationml/2006/main" xmlns:a="http://schemas.openxmlformats.org/drawingml/2006/main" xmlns:r="http://schemas.openxmlformats.org/officeDocument/2006/relationships">
+<p:sld xmlns:a="http://schemas.openxmlformats.org/drawingml/2006/main" xmlns:r="http://schemas.openxmlformats.org/officeDocument/2006/relationships" xmlns:p="http://schemas.openxmlformats.org/presentationml/2006/main">
   <p:cSld>
     <p:spTree>
       <p:nvGrpSpPr>
@@ -13780,12 +14053,12 @@
       </p:grpSpPr>
       <p:grpSp>
         <p:nvGrpSpPr>
-          <p:cNvPr name="Group 2" id="2"/>
+          <p:cNvPr id="2" name="Group 2"/>
           <p:cNvGrpSpPr/>
           <p:nvPr/>
         </p:nvGrpSpPr>
         <p:grpSpPr>
-          <a:xfrm rot="0">
+          <a:xfrm>
             <a:off x="669798" y="685800"/>
             <a:ext cx="5554980" cy="142494"/>
             <a:chOff x="0" y="0"/>
@@ -13794,12 +14067,12 @@
         </p:grpSpPr>
         <p:sp>
           <p:nvSpPr>
-            <p:cNvPr name="Freeform 3" id="3"/>
+            <p:cNvPr id="3" name="Freeform 3"/>
             <p:cNvSpPr/>
             <p:nvPr/>
           </p:nvSpPr>
           <p:spPr>
-            <a:xfrm flipH="false" flipV="false" rot="0">
+            <a:xfrm>
               <a:off x="0" y="0"/>
               <a:ext cx="7406640" cy="189992"/>
             </a:xfrm>
@@ -13808,9 +14081,9 @@
               <a:gdLst/>
               <a:ahLst/>
               <a:cxnLst/>
-              <a:rect r="r" b="b" t="t" l="l"/>
+              <a:rect l="l" t="t" r="r" b="b"/>
               <a:pathLst>
-                <a:path h="189992" w="7406640">
+                <a:path w="7406640" h="189992">
                   <a:moveTo>
                     <a:pt x="0" y="0"/>
                   </a:moveTo>
@@ -13835,12 +14108,12 @@
       </p:grpSp>
       <p:grpSp>
         <p:nvGrpSpPr>
-          <p:cNvPr name="Group 4" id="4"/>
+          <p:cNvPr id="4" name="Group 4"/>
           <p:cNvGrpSpPr/>
           <p:nvPr/>
         </p:nvGrpSpPr>
         <p:grpSpPr>
-          <a:xfrm rot="0">
+          <a:xfrm>
             <a:off x="12063222" y="680466"/>
             <a:ext cx="5554980" cy="147828"/>
             <a:chOff x="0" y="0"/>
@@ -13849,12 +14122,12 @@
         </p:grpSpPr>
         <p:sp>
           <p:nvSpPr>
-            <p:cNvPr name="Freeform 5" id="5"/>
+            <p:cNvPr id="5" name="Freeform 5"/>
             <p:cNvSpPr/>
             <p:nvPr/>
           </p:nvSpPr>
           <p:spPr>
-            <a:xfrm flipH="false" flipV="false" rot="0">
+            <a:xfrm>
               <a:off x="0" y="0"/>
               <a:ext cx="7406640" cy="197104"/>
             </a:xfrm>
@@ -13863,9 +14136,9 @@
               <a:gdLst/>
               <a:ahLst/>
               <a:cxnLst/>
-              <a:rect r="r" b="b" t="t" l="l"/>
+              <a:rect l="l" t="t" r="r" b="b"/>
               <a:pathLst>
-                <a:path h="197104" w="7406640">
+                <a:path w="7406640" h="197104">
                   <a:moveTo>
                     <a:pt x="0" y="0"/>
                   </a:moveTo>
@@ -13890,12 +14163,12 @@
       </p:grpSp>
       <p:grpSp>
         <p:nvGrpSpPr>
-          <p:cNvPr name="Group 6" id="6"/>
+          <p:cNvPr id="6" name="Group 6"/>
           <p:cNvGrpSpPr/>
           <p:nvPr/>
         </p:nvGrpSpPr>
         <p:grpSpPr>
-          <a:xfrm rot="0">
+          <a:xfrm>
             <a:off x="6362748" y="685800"/>
             <a:ext cx="5554980" cy="137160"/>
             <a:chOff x="0" y="0"/>
@@ -13904,12 +14177,12 @@
         </p:grpSpPr>
         <p:sp>
           <p:nvSpPr>
-            <p:cNvPr name="Freeform 7" id="7"/>
+            <p:cNvPr id="7" name="Freeform 7"/>
             <p:cNvSpPr/>
             <p:nvPr/>
           </p:nvSpPr>
           <p:spPr>
-            <a:xfrm flipH="false" flipV="false" rot="0">
+            <a:xfrm>
               <a:off x="0" y="0"/>
               <a:ext cx="7406640" cy="182880"/>
             </a:xfrm>
@@ -13918,9 +14191,9 @@
               <a:gdLst/>
               <a:ahLst/>
               <a:cxnLst/>
-              <a:rect r="r" b="b" t="t" l="l"/>
+              <a:rect l="l" t="t" r="r" b="b"/>
               <a:pathLst>
-                <a:path h="182880" w="7406640">
+                <a:path w="7406640" h="182880">
                   <a:moveTo>
                     <a:pt x="0" y="0"/>
                   </a:moveTo>
@@ -13945,12 +14218,12 @@
       </p:grpSp>
       <p:sp>
         <p:nvSpPr>
-          <p:cNvPr name="TextBox 8" id="8"/>
-          <p:cNvSpPr txBox="true"/>
-          <p:nvPr/>
-        </p:nvSpPr>
-        <p:spPr>
-          <a:xfrm rot="0">
+          <p:cNvPr id="8" name="TextBox 8"/>
+          <p:cNvSpPr txBox="1"/>
+          <p:nvPr/>
+        </p:nvSpPr>
+        <p:spPr>
+          <a:xfrm>
             <a:off x="992238" y="1975247"/>
             <a:ext cx="16303523" cy="1829095"/>
           </a:xfrm>
@@ -13959,7 +14232,7 @@
           </a:prstGeom>
         </p:spPr>
         <p:txBody>
-          <a:bodyPr anchor="t" rtlCol="false" tIns="0" lIns="0" bIns="0" rIns="0">
+          <a:bodyPr lIns="0" tIns="0" rIns="0" bIns="0" rtlCol="0" anchor="t">
             <a:spAutoFit/>
           </a:bodyPr>
           <a:lstStyle/>
@@ -13986,12 +14259,12 @@
       </p:sp>
       <p:grpSp>
         <p:nvGrpSpPr>
-          <p:cNvPr name="Group 9" id="9"/>
+          <p:cNvPr id="9" name="Group 9"/>
           <p:cNvGrpSpPr/>
           <p:nvPr/>
         </p:nvGrpSpPr>
         <p:grpSpPr>
-          <a:xfrm rot="0">
+          <a:xfrm>
             <a:off x="992238" y="4758480"/>
             <a:ext cx="5245446" cy="152400"/>
             <a:chOff x="0" y="0"/>
@@ -14000,12 +14273,12 @@
         </p:grpSpPr>
         <p:sp>
           <p:nvSpPr>
-            <p:cNvPr name="Freeform 10" id="10" descr="preencoded.png"/>
+            <p:cNvPr id="10" name="Freeform 10" descr="preencoded.png"/>
             <p:cNvSpPr/>
             <p:nvPr/>
           </p:nvSpPr>
           <p:spPr>
-            <a:xfrm flipH="false" flipV="false" rot="0">
+            <a:xfrm>
               <a:off x="0" y="0"/>
               <a:ext cx="6993890" cy="203200"/>
             </a:xfrm>
@@ -14014,9 +14287,9 @@
               <a:gdLst/>
               <a:ahLst/>
               <a:cxnLst/>
-              <a:rect r="r" b="b" t="t" l="l"/>
+              <a:rect l="l" t="t" r="r" b="b"/>
               <a:pathLst>
-                <a:path h="203200" w="6993890">
+                <a:path w="6993890" h="203200">
                   <a:moveTo>
                     <a:pt x="0" y="0"/>
                   </a:moveTo>
@@ -14039,7 +14312,7 @@
             <a:blipFill>
               <a:blip r:embed="rId3"/>
               <a:stretch>
-                <a:fillRect l="-26" t="0" r="-27" b="0"/>
+                <a:fillRect l="-26" r="-27"/>
               </a:stretch>
             </a:blipFill>
           </p:spPr>
@@ -14047,12 +14320,12 @@
       </p:grpSp>
       <p:sp>
         <p:nvSpPr>
-          <p:cNvPr name="TextBox 11" id="11"/>
-          <p:cNvSpPr txBox="true"/>
-          <p:nvPr/>
-        </p:nvSpPr>
-        <p:spPr>
-          <a:xfrm rot="0">
+          <p:cNvPr id="11" name="TextBox 11"/>
+          <p:cNvSpPr txBox="1"/>
+          <p:nvPr/>
+        </p:nvSpPr>
+        <p:spPr>
+          <a:xfrm>
             <a:off x="1313859" y="5467198"/>
             <a:ext cx="3774872" cy="481012"/>
           </a:xfrm>
@@ -14061,7 +14334,7 @@
           </a:prstGeom>
         </p:spPr>
         <p:txBody>
-          <a:bodyPr anchor="t" rtlCol="false" tIns="0" lIns="0" bIns="0" rIns="0">
+          <a:bodyPr lIns="0" tIns="0" rIns="0" bIns="0" rtlCol="0" anchor="t">
             <a:spAutoFit/>
           </a:bodyPr>
           <a:lstStyle/>
@@ -14088,12 +14361,12 @@
       </p:sp>
       <p:sp>
         <p:nvSpPr>
-          <p:cNvPr name="TextBox 12" id="12"/>
-          <p:cNvSpPr txBox="true"/>
-          <p:nvPr/>
-        </p:nvSpPr>
-        <p:spPr>
-          <a:xfrm rot="0">
+          <p:cNvPr id="12" name="TextBox 12"/>
+          <p:cNvSpPr txBox="1"/>
+          <p:nvPr/>
+        </p:nvSpPr>
+        <p:spPr>
+          <a:xfrm>
             <a:off x="1313859" y="6032602"/>
             <a:ext cx="4602213" cy="1900237"/>
           </a:xfrm>
@@ -14102,7 +14375,7 @@
           </a:prstGeom>
         </p:spPr>
         <p:txBody>
-          <a:bodyPr anchor="t" rtlCol="false" tIns="0" lIns="0" bIns="0" rIns="0">
+          <a:bodyPr lIns="0" tIns="0" rIns="0" bIns="0" rtlCol="0" anchor="t">
             <a:spAutoFit/>
           </a:bodyPr>
           <a:lstStyle/>
@@ -14129,12 +14402,12 @@
       </p:sp>
       <p:grpSp>
         <p:nvGrpSpPr>
-          <p:cNvPr name="Group 13" id="13"/>
+          <p:cNvPr id="13" name="Group 13"/>
           <p:cNvGrpSpPr/>
           <p:nvPr/>
         </p:nvGrpSpPr>
         <p:grpSpPr>
-          <a:xfrm rot="0">
+          <a:xfrm>
             <a:off x="6521206" y="4758480"/>
             <a:ext cx="5245446" cy="152400"/>
             <a:chOff x="0" y="0"/>
@@ -14143,12 +14416,12 @@
         </p:grpSpPr>
         <p:sp>
           <p:nvSpPr>
-            <p:cNvPr name="Freeform 14" id="14" descr="preencoded.png"/>
+            <p:cNvPr id="14" name="Freeform 14" descr="preencoded.png"/>
             <p:cNvSpPr/>
             <p:nvPr/>
           </p:nvSpPr>
           <p:spPr>
-            <a:xfrm flipH="false" flipV="false" rot="0">
+            <a:xfrm>
               <a:off x="0" y="0"/>
               <a:ext cx="6993890" cy="203200"/>
             </a:xfrm>
@@ -14157,9 +14430,9 @@
               <a:gdLst/>
               <a:ahLst/>
               <a:cxnLst/>
-              <a:rect r="r" b="b" t="t" l="l"/>
+              <a:rect l="l" t="t" r="r" b="b"/>
               <a:pathLst>
-                <a:path h="203200" w="6993890">
+                <a:path w="6993890" h="203200">
                   <a:moveTo>
                     <a:pt x="0" y="0"/>
                   </a:moveTo>
@@ -14182,7 +14455,7 @@
             <a:blipFill>
               <a:blip r:embed="rId3"/>
               <a:stretch>
-                <a:fillRect l="-26" t="0" r="-27" b="0"/>
+                <a:fillRect l="-26" r="-27"/>
               </a:stretch>
             </a:blipFill>
           </p:spPr>
@@ -14190,12 +14463,12 @@
       </p:grpSp>
       <p:sp>
         <p:nvSpPr>
-          <p:cNvPr name="TextBox 15" id="15"/>
-          <p:cNvSpPr txBox="true"/>
-          <p:nvPr/>
-        </p:nvSpPr>
-        <p:spPr>
-          <a:xfrm rot="0">
+          <p:cNvPr id="15" name="TextBox 15"/>
+          <p:cNvSpPr txBox="1"/>
+          <p:nvPr/>
+        </p:nvSpPr>
+        <p:spPr>
+          <a:xfrm>
             <a:off x="6842817" y="5467198"/>
             <a:ext cx="3544043" cy="481012"/>
           </a:xfrm>
@@ -14204,7 +14477,7 @@
           </a:prstGeom>
         </p:spPr>
         <p:txBody>
-          <a:bodyPr anchor="t" rtlCol="false" tIns="0" lIns="0" bIns="0" rIns="0">
+          <a:bodyPr lIns="0" tIns="0" rIns="0" bIns="0" rtlCol="0" anchor="t">
             <a:spAutoFit/>
           </a:bodyPr>
           <a:lstStyle/>
@@ -14231,12 +14504,12 @@
       </p:sp>
       <p:sp>
         <p:nvSpPr>
-          <p:cNvPr name="TextBox 16" id="16"/>
-          <p:cNvSpPr txBox="true"/>
-          <p:nvPr/>
-        </p:nvSpPr>
-        <p:spPr>
-          <a:xfrm rot="0">
+          <p:cNvPr id="16" name="TextBox 16"/>
+          <p:cNvSpPr txBox="1"/>
+          <p:nvPr/>
+        </p:nvSpPr>
+        <p:spPr>
+          <a:xfrm>
             <a:off x="6842817" y="6032602"/>
             <a:ext cx="4602213" cy="1900237"/>
           </a:xfrm>
@@ -14245,7 +14518,7 @@
           </a:prstGeom>
         </p:spPr>
         <p:txBody>
-          <a:bodyPr anchor="t" rtlCol="false" tIns="0" lIns="0" bIns="0" rIns="0">
+          <a:bodyPr lIns="0" tIns="0" rIns="0" bIns="0" rtlCol="0" anchor="t">
             <a:spAutoFit/>
           </a:bodyPr>
           <a:lstStyle/>
@@ -14272,12 +14545,12 @@
       </p:sp>
       <p:grpSp>
         <p:nvGrpSpPr>
-          <p:cNvPr name="Group 17" id="17"/>
+          <p:cNvPr id="17" name="Group 17"/>
           <p:cNvGrpSpPr/>
           <p:nvPr/>
         </p:nvGrpSpPr>
         <p:grpSpPr>
-          <a:xfrm rot="0">
+          <a:xfrm>
             <a:off x="12050163" y="4758480"/>
             <a:ext cx="5245446" cy="152400"/>
             <a:chOff x="0" y="0"/>
@@ -14286,12 +14559,12 @@
         </p:grpSpPr>
         <p:sp>
           <p:nvSpPr>
-            <p:cNvPr name="Freeform 18" id="18" descr="preencoded.png"/>
+            <p:cNvPr id="18" name="Freeform 18" descr="preencoded.png"/>
             <p:cNvSpPr/>
             <p:nvPr/>
           </p:nvSpPr>
           <p:spPr>
-            <a:xfrm flipH="false" flipV="false" rot="0">
+            <a:xfrm>
               <a:off x="0" y="0"/>
               <a:ext cx="6993890" cy="203200"/>
             </a:xfrm>
@@ -14300,9 +14573,9 @@
               <a:gdLst/>
               <a:ahLst/>
               <a:cxnLst/>
-              <a:rect r="r" b="b" t="t" l="l"/>
+              <a:rect l="l" t="t" r="r" b="b"/>
               <a:pathLst>
-                <a:path h="203200" w="6993890">
+                <a:path w="6993890" h="203200">
                   <a:moveTo>
                     <a:pt x="0" y="0"/>
                   </a:moveTo>
@@ -14325,7 +14598,7 @@
             <a:blipFill>
               <a:blip r:embed="rId3"/>
               <a:stretch>
-                <a:fillRect l="-26" t="0" r="-27" b="0"/>
+                <a:fillRect l="-26" r="-27"/>
               </a:stretch>
             </a:blipFill>
           </p:spPr>
@@ -14333,12 +14606,12 @@
       </p:grpSp>
       <p:grpSp>
         <p:nvGrpSpPr>
-          <p:cNvPr name="Group 19" id="19"/>
+          <p:cNvPr id="19" name="Group 19"/>
           <p:cNvGrpSpPr/>
           <p:nvPr/>
         </p:nvGrpSpPr>
         <p:grpSpPr>
-          <a:xfrm rot="0">
+          <a:xfrm>
             <a:off x="14247543" y="4371384"/>
             <a:ext cx="850554" cy="850554"/>
             <a:chOff x="0" y="0"/>
@@ -14347,12 +14620,12 @@
         </p:grpSpPr>
         <p:sp>
           <p:nvSpPr>
-            <p:cNvPr name="Freeform 20" id="20" descr="preencoded.png"/>
+            <p:cNvPr id="20" name="Freeform 20" descr="preencoded.png"/>
             <p:cNvSpPr/>
             <p:nvPr/>
           </p:nvSpPr>
           <p:spPr>
-            <a:xfrm flipH="false" flipV="false" rot="0">
+            <a:xfrm>
               <a:off x="0" y="0"/>
               <a:ext cx="1134110" cy="1134110"/>
             </a:xfrm>
@@ -14361,9 +14634,9 @@
               <a:gdLst/>
               <a:ahLst/>
               <a:cxnLst/>
-              <a:rect r="r" b="b" t="t" l="l"/>
+              <a:rect l="l" t="t" r="r" b="b"/>
               <a:pathLst>
-                <a:path h="1134110" w="1134110">
+                <a:path w="1134110" h="1134110">
                   <a:moveTo>
                     <a:pt x="0" y="0"/>
                   </a:moveTo>
@@ -14386,7 +14659,7 @@
             <a:blipFill>
               <a:blip r:embed="rId4"/>
               <a:stretch>
-                <a:fillRect l="0" t="0" r="3" b="3"/>
+                <a:fillRect r="3" b="3"/>
               </a:stretch>
             </a:blipFill>
           </p:spPr>
@@ -14394,12 +14667,12 @@
       </p:grpSp>
       <p:sp>
         <p:nvSpPr>
-          <p:cNvPr name="TextBox 21" id="21"/>
-          <p:cNvSpPr txBox="true"/>
-          <p:nvPr/>
-        </p:nvSpPr>
-        <p:spPr>
-          <a:xfrm rot="0">
+          <p:cNvPr id="21" name="TextBox 21"/>
+          <p:cNvSpPr txBox="1"/>
+          <p:nvPr/>
+        </p:nvSpPr>
+        <p:spPr>
+          <a:xfrm>
             <a:off x="12371784" y="5467198"/>
             <a:ext cx="3544043" cy="481012"/>
           </a:xfrm>
@@ -14408,7 +14681,7 @@
           </a:prstGeom>
         </p:spPr>
         <p:txBody>
-          <a:bodyPr anchor="t" rtlCol="false" tIns="0" lIns="0" bIns="0" rIns="0">
+          <a:bodyPr lIns="0" tIns="0" rIns="0" bIns="0" rtlCol="0" anchor="t">
             <a:spAutoFit/>
           </a:bodyPr>
           <a:lstStyle/>
@@ -14435,12 +14708,12 @@
       </p:sp>
       <p:sp>
         <p:nvSpPr>
-          <p:cNvPr name="TextBox 22" id="22"/>
-          <p:cNvSpPr txBox="true"/>
-          <p:nvPr/>
-        </p:nvSpPr>
-        <p:spPr>
-          <a:xfrm rot="0">
+          <p:cNvPr id="22" name="TextBox 22"/>
+          <p:cNvSpPr txBox="1"/>
+          <p:nvPr/>
+        </p:nvSpPr>
+        <p:spPr>
+          <a:xfrm>
             <a:off x="12371784" y="6032602"/>
             <a:ext cx="4602213" cy="1446609"/>
           </a:xfrm>
@@ -14449,7 +14722,7 @@
           </a:prstGeom>
         </p:spPr>
         <p:txBody>
-          <a:bodyPr anchor="t" rtlCol="false" tIns="0" lIns="0" bIns="0" rIns="0">
+          <a:bodyPr lIns="0" tIns="0" rIns="0" bIns="0" rtlCol="0" anchor="t">
             <a:spAutoFit/>
           </a:bodyPr>
           <a:lstStyle/>

--- a/tcc/TCC - Slides.pptx
+++ b/tcc/TCC - Slides.pptx
@@ -52,7 +52,7 @@
       <p:regular r:id="rId26"/>
     </p:embeddedFont>
     <p:embeddedFont>
-      <p:font typeface="Noto Sans Bold" panose="020B0604020202020204" charset="0"/>
+      <p:font typeface="Noto Sans Bold" panose="020B0802040504020204" charset="0"/>
       <p:regular r:id="rId27"/>
     </p:embeddedFont>
   </p:embeddedFontLst>
@@ -13871,7 +13871,7 @@
         </p:nvGrpSpPr>
         <p:grpSpPr>
           <a:xfrm>
-            <a:off x="10373973" y="128683"/>
+            <a:off x="9692640" y="1028700"/>
             <a:ext cx="7746921" cy="4885934"/>
             <a:chOff x="0" y="0"/>
             <a:chExt cx="10329228" cy="6514579"/>
@@ -13932,7 +13932,7 @@
         </p:nvGrpSpPr>
         <p:grpSpPr>
           <a:xfrm>
-            <a:off x="10373973" y="5272392"/>
+            <a:off x="9871281" y="5255696"/>
             <a:ext cx="7746921" cy="4849387"/>
             <a:chOff x="0" y="0"/>
             <a:chExt cx="10329228" cy="6465849"/>

--- a/tcc/TCC - Slides.pptx
+++ b/tcc/TCC - Slides.pptx
@@ -5646,7 +5646,7 @@
               </a:lnSpc>
             </a:pPr>
             <a:r>
-              <a:rPr lang="en-US" sz="5562">
+              <a:rPr lang="en-US" sz="5562" dirty="0" err="1">
                 <a:solidFill>
                   <a:srgbClr val="000000"/>
                 </a:solidFill>
@@ -5655,8 +5655,89 @@
                 <a:cs typeface="Arimo"/>
                 <a:sym typeface="Arimo"/>
               </a:rPr>
-              <a:t>Gestão Atípicos: Sistema Web Seguro para Educação Inclusiva</a:t>
-            </a:r>
+              <a:t>Gestão</a:t>
+            </a:r>
+            <a:r>
+              <a:rPr lang="en-US" sz="5562" dirty="0">
+                <a:solidFill>
+                  <a:srgbClr val="000000"/>
+                </a:solidFill>
+                <a:latin typeface="Arimo"/>
+                <a:ea typeface="Arimo"/>
+                <a:cs typeface="Arimo"/>
+                <a:sym typeface="Arimo"/>
+              </a:rPr>
+              <a:t> </a:t>
+            </a:r>
+            <a:r>
+              <a:rPr lang="en-US" sz="5562" dirty="0" err="1">
+                <a:solidFill>
+                  <a:srgbClr val="000000"/>
+                </a:solidFill>
+                <a:latin typeface="Arimo"/>
+                <a:ea typeface="Arimo"/>
+                <a:cs typeface="Arimo"/>
+                <a:sym typeface="Arimo"/>
+              </a:rPr>
+              <a:t>Atípicos</a:t>
+            </a:r>
+            <a:r>
+              <a:rPr lang="en-US" sz="5562" dirty="0">
+                <a:solidFill>
+                  <a:srgbClr val="000000"/>
+                </a:solidFill>
+                <a:latin typeface="Arimo"/>
+                <a:ea typeface="Arimo"/>
+                <a:cs typeface="Arimo"/>
+                <a:sym typeface="Arimo"/>
+              </a:rPr>
+              <a:t>: Sistema Web Seguro para </a:t>
+            </a:r>
+            <a:r>
+              <a:rPr lang="en-US" sz="5562" dirty="0" err="1">
+                <a:solidFill>
+                  <a:srgbClr val="000000"/>
+                </a:solidFill>
+                <a:latin typeface="Arimo"/>
+                <a:ea typeface="Arimo"/>
+                <a:cs typeface="Arimo"/>
+                <a:sym typeface="Arimo"/>
+              </a:rPr>
+              <a:t>Educação</a:t>
+            </a:r>
+            <a:r>
+              <a:rPr lang="en-US" sz="5562" dirty="0">
+                <a:solidFill>
+                  <a:srgbClr val="000000"/>
+                </a:solidFill>
+                <a:latin typeface="Arimo"/>
+                <a:ea typeface="Arimo"/>
+                <a:cs typeface="Arimo"/>
+                <a:sym typeface="Arimo"/>
+              </a:rPr>
+              <a:t> </a:t>
+            </a:r>
+            <a:r>
+              <a:rPr lang="en-US" sz="5562" dirty="0" err="1">
+                <a:solidFill>
+                  <a:srgbClr val="000000"/>
+                </a:solidFill>
+                <a:latin typeface="Arimo"/>
+                <a:ea typeface="Arimo"/>
+                <a:cs typeface="Arimo"/>
+                <a:sym typeface="Arimo"/>
+              </a:rPr>
+              <a:t>Inclusiva</a:t>
+            </a:r>
+            <a:endParaRPr lang="en-US" sz="5562" dirty="0">
+              <a:solidFill>
+                <a:srgbClr val="000000"/>
+              </a:solidFill>
+              <a:latin typeface="Arimo"/>
+              <a:ea typeface="Arimo"/>
+              <a:cs typeface="Arimo"/>
+              <a:sym typeface="Arimo"/>
+            </a:endParaRPr>
           </a:p>
         </p:txBody>
       </p:sp>

--- a/tcc/TCC - Slides.pptx
+++ b/tcc/TCC - Slides.pptx
@@ -832,8 +832,8 @@
         </p:nvSpPr>
         <p:spPr>
           <a:xfrm>
-            <a:off x="2857500" y="512763"/>
-            <a:ext cx="3429000" cy="2566987"/>
+            <a:off x="2290763" y="512763"/>
+            <a:ext cx="4562475" cy="2566987"/>
           </a:xfrm>
           <a:prstGeom prst="rect">
             <a:avLst/>
@@ -10347,7 +10347,7 @@
               </a:lnSpc>
             </a:pPr>
             <a:r>
-              <a:rPr lang="en-US" sz="3362">
+              <a:rPr lang="en-US" sz="3362" dirty="0">
                 <a:solidFill>
                   <a:srgbClr val="000000"/>
                 </a:solidFill>
@@ -10356,7 +10356,319 @@
                 <a:cs typeface="Arimo"/>
                 <a:sym typeface="Arimo"/>
               </a:rPr>
-              <a:t>Como desenvolver um sistema web seguro, acessível e funcional que centralize a gestão de alunos atípicos, facilitando o trabalho de gestores, cuidadores e responsáveis?</a:t>
+              <a:t>Como </a:t>
+            </a:r>
+            <a:r>
+              <a:rPr lang="en-US" sz="3362" dirty="0" err="1">
+                <a:solidFill>
+                  <a:srgbClr val="000000"/>
+                </a:solidFill>
+                <a:latin typeface="Arimo"/>
+                <a:ea typeface="Arimo"/>
+                <a:cs typeface="Arimo"/>
+                <a:sym typeface="Arimo"/>
+              </a:rPr>
+              <a:t>desenvolver</a:t>
+            </a:r>
+            <a:r>
+              <a:rPr lang="en-US" sz="3362" dirty="0">
+                <a:solidFill>
+                  <a:srgbClr val="000000"/>
+                </a:solidFill>
+                <a:latin typeface="Arimo"/>
+                <a:ea typeface="Arimo"/>
+                <a:cs typeface="Arimo"/>
+                <a:sym typeface="Arimo"/>
+              </a:rPr>
+              <a:t> um </a:t>
+            </a:r>
+            <a:r>
+              <a:rPr lang="en-US" sz="3362" dirty="0" err="1">
+                <a:solidFill>
+                  <a:srgbClr val="000000"/>
+                </a:solidFill>
+                <a:latin typeface="Arimo"/>
+                <a:ea typeface="Arimo"/>
+                <a:cs typeface="Arimo"/>
+                <a:sym typeface="Arimo"/>
+              </a:rPr>
+              <a:t>sistema</a:t>
+            </a:r>
+            <a:r>
+              <a:rPr lang="en-US" sz="3362" dirty="0">
+                <a:solidFill>
+                  <a:srgbClr val="000000"/>
+                </a:solidFill>
+                <a:latin typeface="Arimo"/>
+                <a:ea typeface="Arimo"/>
+                <a:cs typeface="Arimo"/>
+                <a:sym typeface="Arimo"/>
+              </a:rPr>
+              <a:t> web </a:t>
+            </a:r>
+            <a:r>
+              <a:rPr lang="en-US" sz="3362" dirty="0" err="1">
+                <a:solidFill>
+                  <a:srgbClr val="000000"/>
+                </a:solidFill>
+                <a:latin typeface="Arimo"/>
+                <a:ea typeface="Arimo"/>
+                <a:cs typeface="Arimo"/>
+                <a:sym typeface="Arimo"/>
+              </a:rPr>
+              <a:t>seguro</a:t>
+            </a:r>
+            <a:r>
+              <a:rPr lang="en-US" sz="3362" dirty="0">
+                <a:solidFill>
+                  <a:srgbClr val="000000"/>
+                </a:solidFill>
+                <a:latin typeface="Arimo"/>
+                <a:ea typeface="Arimo"/>
+                <a:cs typeface="Arimo"/>
+                <a:sym typeface="Arimo"/>
+              </a:rPr>
+              <a:t>, </a:t>
+            </a:r>
+            <a:r>
+              <a:rPr lang="en-US" sz="3362" dirty="0" err="1">
+                <a:solidFill>
+                  <a:srgbClr val="000000"/>
+                </a:solidFill>
+                <a:latin typeface="Arimo"/>
+                <a:ea typeface="Arimo"/>
+                <a:cs typeface="Arimo"/>
+                <a:sym typeface="Arimo"/>
+              </a:rPr>
+              <a:t>acessível</a:t>
+            </a:r>
+            <a:r>
+              <a:rPr lang="en-US" sz="3362" dirty="0">
+                <a:solidFill>
+                  <a:srgbClr val="000000"/>
+                </a:solidFill>
+                <a:latin typeface="Arimo"/>
+                <a:ea typeface="Arimo"/>
+                <a:cs typeface="Arimo"/>
+                <a:sym typeface="Arimo"/>
+              </a:rPr>
+              <a:t> e </a:t>
+            </a:r>
+            <a:r>
+              <a:rPr lang="en-US" sz="3362" dirty="0" err="1">
+                <a:solidFill>
+                  <a:srgbClr val="000000"/>
+                </a:solidFill>
+                <a:latin typeface="Arimo"/>
+                <a:ea typeface="Arimo"/>
+                <a:cs typeface="Arimo"/>
+                <a:sym typeface="Arimo"/>
+              </a:rPr>
+              <a:t>funcional</a:t>
+            </a:r>
+            <a:r>
+              <a:rPr lang="en-US" sz="3362" dirty="0">
+                <a:solidFill>
+                  <a:srgbClr val="000000"/>
+                </a:solidFill>
+                <a:latin typeface="Arimo"/>
+                <a:ea typeface="Arimo"/>
+                <a:cs typeface="Arimo"/>
+                <a:sym typeface="Arimo"/>
+              </a:rPr>
+              <a:t> que centralize a </a:t>
+            </a:r>
+            <a:r>
+              <a:rPr lang="en-US" sz="3362" dirty="0" err="1">
+                <a:solidFill>
+                  <a:srgbClr val="000000"/>
+                </a:solidFill>
+                <a:latin typeface="Arimo"/>
+                <a:ea typeface="Arimo"/>
+                <a:cs typeface="Arimo"/>
+                <a:sym typeface="Arimo"/>
+              </a:rPr>
+              <a:t>gestão</a:t>
+            </a:r>
+            <a:r>
+              <a:rPr lang="en-US" sz="3362" dirty="0">
+                <a:solidFill>
+                  <a:srgbClr val="000000"/>
+                </a:solidFill>
+                <a:latin typeface="Arimo"/>
+                <a:ea typeface="Arimo"/>
+                <a:cs typeface="Arimo"/>
+                <a:sym typeface="Arimo"/>
+              </a:rPr>
+              <a:t> de </a:t>
+            </a:r>
+            <a:r>
+              <a:rPr lang="en-US" sz="3362" dirty="0" err="1">
+                <a:solidFill>
+                  <a:srgbClr val="000000"/>
+                </a:solidFill>
+                <a:latin typeface="Arimo"/>
+                <a:ea typeface="Arimo"/>
+                <a:cs typeface="Arimo"/>
+                <a:sym typeface="Arimo"/>
+              </a:rPr>
+              <a:t>alunos</a:t>
+            </a:r>
+            <a:r>
+              <a:rPr lang="en-US" sz="3362" dirty="0">
+                <a:solidFill>
+                  <a:srgbClr val="000000"/>
+                </a:solidFill>
+                <a:latin typeface="Arimo"/>
+                <a:ea typeface="Arimo"/>
+                <a:cs typeface="Arimo"/>
+                <a:sym typeface="Arimo"/>
+              </a:rPr>
+              <a:t> </a:t>
+            </a:r>
+            <a:r>
+              <a:rPr lang="en-US" sz="3362" dirty="0" err="1">
+                <a:solidFill>
+                  <a:srgbClr val="000000"/>
+                </a:solidFill>
+                <a:latin typeface="Arimo"/>
+                <a:ea typeface="Arimo"/>
+                <a:cs typeface="Arimo"/>
+                <a:sym typeface="Arimo"/>
+              </a:rPr>
+              <a:t>atípicos</a:t>
+            </a:r>
+            <a:r>
+              <a:rPr lang="en-US" sz="3362" dirty="0">
+                <a:solidFill>
+                  <a:srgbClr val="000000"/>
+                </a:solidFill>
+                <a:latin typeface="Arimo"/>
+                <a:ea typeface="Arimo"/>
+                <a:cs typeface="Arimo"/>
+                <a:sym typeface="Arimo"/>
+              </a:rPr>
+              <a:t>, </a:t>
+            </a:r>
+            <a:r>
+              <a:rPr lang="en-US" sz="3362" dirty="0" err="1">
+                <a:solidFill>
+                  <a:srgbClr val="000000"/>
+                </a:solidFill>
+                <a:latin typeface="Arimo"/>
+                <a:ea typeface="Arimo"/>
+                <a:cs typeface="Arimo"/>
+                <a:sym typeface="Arimo"/>
+              </a:rPr>
+              <a:t>facilitando</a:t>
+            </a:r>
+            <a:r>
+              <a:rPr lang="en-US" sz="3362" dirty="0">
+                <a:solidFill>
+                  <a:srgbClr val="000000"/>
+                </a:solidFill>
+                <a:latin typeface="Arimo"/>
+                <a:ea typeface="Arimo"/>
+                <a:cs typeface="Arimo"/>
+                <a:sym typeface="Arimo"/>
+              </a:rPr>
+              <a:t> o </a:t>
+            </a:r>
+            <a:r>
+              <a:rPr lang="en-US" sz="3362" dirty="0" err="1">
+                <a:solidFill>
+                  <a:srgbClr val="000000"/>
+                </a:solidFill>
+                <a:latin typeface="Arimo"/>
+                <a:ea typeface="Arimo"/>
+                <a:cs typeface="Arimo"/>
+                <a:sym typeface="Arimo"/>
+              </a:rPr>
+              <a:t>trabalho</a:t>
+            </a:r>
+            <a:r>
+              <a:rPr lang="en-US" sz="3362" dirty="0">
+                <a:solidFill>
+                  <a:srgbClr val="000000"/>
+                </a:solidFill>
+                <a:latin typeface="Arimo"/>
+                <a:ea typeface="Arimo"/>
+                <a:cs typeface="Arimo"/>
+                <a:sym typeface="Arimo"/>
+              </a:rPr>
+              <a:t> de </a:t>
+            </a:r>
+            <a:r>
+              <a:rPr lang="en-US" sz="3362" dirty="0" err="1">
+                <a:solidFill>
+                  <a:srgbClr val="000000"/>
+                </a:solidFill>
+                <a:latin typeface="Arimo"/>
+                <a:ea typeface="Arimo"/>
+                <a:cs typeface="Arimo"/>
+                <a:sym typeface="Arimo"/>
+              </a:rPr>
+              <a:t>gestores</a:t>
+            </a:r>
+            <a:r>
+              <a:rPr lang="en-US" sz="3362" dirty="0">
+                <a:solidFill>
+                  <a:srgbClr val="000000"/>
+                </a:solidFill>
+                <a:latin typeface="Arimo"/>
+                <a:ea typeface="Arimo"/>
+                <a:cs typeface="Arimo"/>
+                <a:sym typeface="Arimo"/>
+              </a:rPr>
+              <a:t>, </a:t>
+            </a:r>
+            <a:r>
+              <a:rPr lang="en-US" sz="3362" dirty="0" err="1">
+                <a:solidFill>
+                  <a:srgbClr val="000000"/>
+                </a:solidFill>
+                <a:latin typeface="Arimo"/>
+                <a:ea typeface="Arimo"/>
+                <a:cs typeface="Arimo"/>
+                <a:sym typeface="Arimo"/>
+              </a:rPr>
+              <a:t>cuidadores</a:t>
+            </a:r>
+            <a:r>
+              <a:rPr lang="en-US" sz="3362" dirty="0">
+                <a:solidFill>
+                  <a:srgbClr val="000000"/>
+                </a:solidFill>
+                <a:latin typeface="Arimo"/>
+                <a:ea typeface="Arimo"/>
+                <a:cs typeface="Arimo"/>
+                <a:sym typeface="Arimo"/>
+              </a:rPr>
+              <a:t> e </a:t>
+            </a:r>
+            <a:r>
+              <a:rPr lang="en-US" sz="3362" dirty="0" err="1">
+                <a:solidFill>
+                  <a:srgbClr val="000000"/>
+                </a:solidFill>
+                <a:latin typeface="Arimo"/>
+                <a:ea typeface="Arimo"/>
+                <a:cs typeface="Arimo"/>
+                <a:sym typeface="Arimo"/>
+              </a:rPr>
+              <a:t>responsáveis</a:t>
+            </a:r>
+            <a:r>
+              <a:rPr lang="en-US" sz="3362" dirty="0">
+                <a:solidFill>
+                  <a:srgbClr val="000000"/>
+                </a:solidFill>
+                <a:latin typeface="Arimo"/>
+                <a:ea typeface="Arimo"/>
+                <a:cs typeface="Arimo"/>
+                <a:sym typeface="Arimo"/>
+              </a:rPr>
+              <a:t>?</a:t>
             </a:r>
           </a:p>
         </p:txBody>
@@ -10411,7 +10723,7 @@
         <p:spPr>
           <a:xfrm>
             <a:off x="1150371" y="2258084"/>
-            <a:ext cx="4593235" cy="1757471"/>
+            <a:ext cx="4593235" cy="1803635"/>
           </a:xfrm>
           <a:prstGeom prst="rect">
             <a:avLst/>
@@ -10429,7 +10741,7 @@
               </a:lnSpc>
             </a:pPr>
             <a:r>
-              <a:rPr lang="en-US" sz="2187">
+              <a:rPr lang="en-US" sz="2187" dirty="0">
                 <a:solidFill>
                   <a:srgbClr val="000000"/>
                 </a:solidFill>
@@ -10438,7 +10750,271 @@
                 <a:cs typeface="Noto Sans"/>
                 <a:sym typeface="Noto Sans"/>
               </a:rPr>
-              <a:t>A Lei Brasileira de Inclusão obriga o atendimento especializado, mas muitas escolas ainda usam planilhas e papel.</a:t>
+              <a:t>A Lei </a:t>
+            </a:r>
+            <a:r>
+              <a:rPr lang="en-US" sz="2187" dirty="0" err="1">
+                <a:solidFill>
+                  <a:srgbClr val="000000"/>
+                </a:solidFill>
+                <a:latin typeface="Noto Sans"/>
+                <a:ea typeface="Noto Sans"/>
+                <a:cs typeface="Noto Sans"/>
+                <a:sym typeface="Noto Sans"/>
+              </a:rPr>
+              <a:t>Brasileira</a:t>
+            </a:r>
+            <a:r>
+              <a:rPr lang="en-US" sz="2187" dirty="0">
+                <a:solidFill>
+                  <a:srgbClr val="000000"/>
+                </a:solidFill>
+                <a:latin typeface="Noto Sans"/>
+                <a:ea typeface="Noto Sans"/>
+                <a:cs typeface="Noto Sans"/>
+                <a:sym typeface="Noto Sans"/>
+              </a:rPr>
+              <a:t> de </a:t>
+            </a:r>
+            <a:r>
+              <a:rPr lang="en-US" sz="2187" dirty="0" err="1">
+                <a:solidFill>
+                  <a:srgbClr val="000000"/>
+                </a:solidFill>
+                <a:latin typeface="Noto Sans"/>
+                <a:ea typeface="Noto Sans"/>
+                <a:cs typeface="Noto Sans"/>
+                <a:sym typeface="Noto Sans"/>
+              </a:rPr>
+              <a:t>Inclusão</a:t>
+            </a:r>
+            <a:r>
+              <a:rPr lang="en-US" sz="2187" dirty="0">
+                <a:solidFill>
+                  <a:srgbClr val="000000"/>
+                </a:solidFill>
+                <a:latin typeface="Noto Sans"/>
+                <a:ea typeface="Noto Sans"/>
+                <a:cs typeface="Noto Sans"/>
+                <a:sym typeface="Noto Sans"/>
+              </a:rPr>
+              <a:t>, n° 13.146 </a:t>
+            </a:r>
+            <a:r>
+              <a:rPr lang="en-US" sz="2187" dirty="0" err="1">
+                <a:solidFill>
+                  <a:srgbClr val="000000"/>
+                </a:solidFill>
+                <a:latin typeface="Noto Sans"/>
+                <a:ea typeface="Noto Sans"/>
+                <a:cs typeface="Noto Sans"/>
+                <a:sym typeface="Noto Sans"/>
+              </a:rPr>
+              <a:t>obriga</a:t>
+            </a:r>
+            <a:r>
+              <a:rPr lang="en-US" sz="2187" dirty="0">
+                <a:solidFill>
+                  <a:srgbClr val="000000"/>
+                </a:solidFill>
+                <a:latin typeface="Noto Sans"/>
+                <a:ea typeface="Noto Sans"/>
+                <a:cs typeface="Noto Sans"/>
+                <a:sym typeface="Noto Sans"/>
+              </a:rPr>
+              <a:t> o </a:t>
+            </a:r>
+            <a:r>
+              <a:rPr lang="en-US" sz="2187" dirty="0" err="1">
+                <a:solidFill>
+                  <a:srgbClr val="000000"/>
+                </a:solidFill>
+                <a:latin typeface="Noto Sans"/>
+                <a:ea typeface="Noto Sans"/>
+                <a:cs typeface="Noto Sans"/>
+                <a:sym typeface="Noto Sans"/>
+              </a:rPr>
+              <a:t>atendimento</a:t>
+            </a:r>
+            <a:r>
+              <a:rPr lang="en-US" sz="2187" dirty="0">
+                <a:solidFill>
+                  <a:srgbClr val="000000"/>
+                </a:solidFill>
+                <a:latin typeface="Noto Sans"/>
+                <a:ea typeface="Noto Sans"/>
+                <a:cs typeface="Noto Sans"/>
+                <a:sym typeface="Noto Sans"/>
+              </a:rPr>
+              <a:t> </a:t>
+            </a:r>
+            <a:r>
+              <a:rPr lang="en-US" sz="2187" dirty="0" err="1">
+                <a:solidFill>
+                  <a:srgbClr val="000000"/>
+                </a:solidFill>
+                <a:latin typeface="Noto Sans"/>
+                <a:ea typeface="Noto Sans"/>
+                <a:cs typeface="Noto Sans"/>
+                <a:sym typeface="Noto Sans"/>
+              </a:rPr>
+              <a:t>especializado</a:t>
+            </a:r>
+            <a:r>
+              <a:rPr lang="en-US" sz="2187" dirty="0">
+                <a:solidFill>
+                  <a:srgbClr val="000000"/>
+                </a:solidFill>
+                <a:latin typeface="Noto Sans"/>
+                <a:ea typeface="Noto Sans"/>
+                <a:cs typeface="Noto Sans"/>
+                <a:sym typeface="Noto Sans"/>
+              </a:rPr>
+              <a:t>, mas </a:t>
+            </a:r>
+            <a:r>
+              <a:rPr lang="en-US" sz="2187" dirty="0" err="1">
+                <a:solidFill>
+                  <a:srgbClr val="000000"/>
+                </a:solidFill>
+                <a:latin typeface="Noto Sans"/>
+                <a:ea typeface="Noto Sans"/>
+                <a:cs typeface="Noto Sans"/>
+                <a:sym typeface="Noto Sans"/>
+              </a:rPr>
+              <a:t>muitas</a:t>
+            </a:r>
+            <a:r>
+              <a:rPr lang="en-US" sz="2187" dirty="0">
+                <a:solidFill>
+                  <a:srgbClr val="000000"/>
+                </a:solidFill>
+                <a:latin typeface="Noto Sans"/>
+                <a:ea typeface="Noto Sans"/>
+                <a:cs typeface="Noto Sans"/>
+                <a:sym typeface="Noto Sans"/>
+              </a:rPr>
+              <a:t> </a:t>
+            </a:r>
+            <a:r>
+              <a:rPr lang="en-US" sz="2187" dirty="0" err="1">
+                <a:solidFill>
+                  <a:srgbClr val="000000"/>
+                </a:solidFill>
+                <a:latin typeface="Noto Sans"/>
+                <a:ea typeface="Noto Sans"/>
+                <a:cs typeface="Noto Sans"/>
+                <a:sym typeface="Noto Sans"/>
+              </a:rPr>
+              <a:t>escolas</a:t>
+            </a:r>
+            <a:r>
+              <a:rPr lang="en-US" sz="2187" dirty="0">
+                <a:solidFill>
+                  <a:srgbClr val="000000"/>
+                </a:solidFill>
+                <a:latin typeface="Noto Sans"/>
+                <a:ea typeface="Noto Sans"/>
+                <a:cs typeface="Noto Sans"/>
+                <a:sym typeface="Noto Sans"/>
+              </a:rPr>
+              <a:t> </a:t>
+            </a:r>
+            <a:r>
+              <a:rPr lang="en-US" sz="2187" dirty="0" err="1">
+                <a:solidFill>
+                  <a:srgbClr val="000000"/>
+                </a:solidFill>
+                <a:latin typeface="Noto Sans"/>
+                <a:ea typeface="Noto Sans"/>
+                <a:cs typeface="Noto Sans"/>
+                <a:sym typeface="Noto Sans"/>
+              </a:rPr>
+              <a:t>ainda</a:t>
+            </a:r>
+            <a:r>
+              <a:rPr lang="en-US" sz="2187" dirty="0">
+                <a:solidFill>
+                  <a:srgbClr val="000000"/>
+                </a:solidFill>
+                <a:latin typeface="Noto Sans"/>
+                <a:ea typeface="Noto Sans"/>
+                <a:cs typeface="Noto Sans"/>
+                <a:sym typeface="Noto Sans"/>
+              </a:rPr>
+              <a:t> </a:t>
+            </a:r>
+            <a:r>
+              <a:rPr lang="en-US" sz="2187" dirty="0" err="1">
+                <a:solidFill>
+                  <a:srgbClr val="000000"/>
+                </a:solidFill>
+                <a:latin typeface="Noto Sans"/>
+                <a:ea typeface="Noto Sans"/>
+                <a:cs typeface="Noto Sans"/>
+                <a:sym typeface="Noto Sans"/>
+              </a:rPr>
+              <a:t>usam</a:t>
+            </a:r>
+            <a:r>
+              <a:rPr lang="en-US" sz="2187" dirty="0">
+                <a:solidFill>
+                  <a:srgbClr val="000000"/>
+                </a:solidFill>
+                <a:latin typeface="Noto Sans"/>
+                <a:ea typeface="Noto Sans"/>
+                <a:cs typeface="Noto Sans"/>
+                <a:sym typeface="Noto Sans"/>
+              </a:rPr>
+              <a:t> </a:t>
+            </a:r>
+            <a:r>
+              <a:rPr lang="en-US" sz="2187" dirty="0" err="1">
+                <a:solidFill>
+                  <a:srgbClr val="000000"/>
+                </a:solidFill>
+                <a:latin typeface="Noto Sans"/>
+                <a:ea typeface="Noto Sans"/>
+                <a:cs typeface="Noto Sans"/>
+                <a:sym typeface="Noto Sans"/>
+              </a:rPr>
+              <a:t>planilhas</a:t>
+            </a:r>
+            <a:r>
+              <a:rPr lang="en-US" sz="2187" dirty="0">
+                <a:solidFill>
+                  <a:srgbClr val="000000"/>
+                </a:solidFill>
+                <a:latin typeface="Noto Sans"/>
+                <a:ea typeface="Noto Sans"/>
+                <a:cs typeface="Noto Sans"/>
+                <a:sym typeface="Noto Sans"/>
+              </a:rPr>
+              <a:t> e </a:t>
+            </a:r>
+            <a:r>
+              <a:rPr lang="en-US" sz="2187" dirty="0" err="1">
+                <a:solidFill>
+                  <a:srgbClr val="000000"/>
+                </a:solidFill>
+                <a:latin typeface="Noto Sans"/>
+                <a:ea typeface="Noto Sans"/>
+                <a:cs typeface="Noto Sans"/>
+                <a:sym typeface="Noto Sans"/>
+              </a:rPr>
+              <a:t>papel</a:t>
+            </a:r>
+            <a:r>
+              <a:rPr lang="en-US" sz="2187" dirty="0">
+                <a:solidFill>
+                  <a:srgbClr val="000000"/>
+                </a:solidFill>
+                <a:latin typeface="Noto Sans"/>
+                <a:ea typeface="Noto Sans"/>
+                <a:cs typeface="Noto Sans"/>
+                <a:sym typeface="Noto Sans"/>
+              </a:rPr>
+              <a:t>.</a:t>
             </a:r>
           </a:p>
         </p:txBody>
@@ -11858,7 +12434,7 @@
               <a:buChar char="•"/>
             </a:pPr>
             <a:r>
-              <a:rPr lang="en-US" sz="2499">
+              <a:rPr lang="en-US" sz="2499" dirty="0">
                 <a:solidFill>
                   <a:srgbClr val="000000"/>
                 </a:solidFill>
@@ -11867,7 +12443,31 @@
                 <a:cs typeface="Noto Sans"/>
                 <a:sym typeface="Noto Sans"/>
               </a:rPr>
-              <a:t>Tipo de Pesquisa: </a:t>
+              <a:t>Tipo de </a:t>
+            </a:r>
+            <a:r>
+              <a:rPr lang="en-US" sz="2499" dirty="0" err="1">
+                <a:solidFill>
+                  <a:srgbClr val="000000"/>
+                </a:solidFill>
+                <a:latin typeface="Noto Sans"/>
+                <a:ea typeface="Noto Sans"/>
+                <a:cs typeface="Noto Sans"/>
+                <a:sym typeface="Noto Sans"/>
+              </a:rPr>
+              <a:t>Pesquisa</a:t>
+            </a:r>
+            <a:r>
+              <a:rPr lang="en-US" sz="2499" dirty="0">
+                <a:solidFill>
+                  <a:srgbClr val="000000"/>
+                </a:solidFill>
+                <a:latin typeface="Noto Sans"/>
+                <a:ea typeface="Noto Sans"/>
+                <a:cs typeface="Noto Sans"/>
+                <a:sym typeface="Noto Sans"/>
+              </a:rPr>
+              <a:t>: </a:t>
             </a:r>
           </a:p>
           <a:p>
@@ -11880,7 +12480,7 @@
               </a:spcBef>
             </a:pPr>
             <a:r>
-              <a:rPr lang="en-US" sz="2499">
+              <a:rPr lang="en-US" sz="2499" dirty="0" err="1">
                 <a:solidFill>
                   <a:srgbClr val="000000"/>
                 </a:solidFill>
@@ -11889,7 +12489,211 @@
                 <a:cs typeface="Noto Sans"/>
                 <a:sym typeface="Noto Sans"/>
               </a:rPr>
-              <a:t>Pesquisa aplicada de abordagem qualitativa, baseada no desenvolvimento ágil de software com entregas incrementais (Sprints).</a:t>
+              <a:t>Pesquisa</a:t>
+            </a:r>
+            <a:r>
+              <a:rPr lang="en-US" sz="2499" dirty="0">
+                <a:solidFill>
+                  <a:srgbClr val="000000"/>
+                </a:solidFill>
+                <a:latin typeface="Noto Sans"/>
+                <a:ea typeface="Noto Sans"/>
+                <a:cs typeface="Noto Sans"/>
+                <a:sym typeface="Noto Sans"/>
+              </a:rPr>
+              <a:t> </a:t>
+            </a:r>
+            <a:r>
+              <a:rPr lang="en-US" sz="2499" dirty="0" err="1">
+                <a:solidFill>
+                  <a:srgbClr val="000000"/>
+                </a:solidFill>
+                <a:latin typeface="Noto Sans"/>
+                <a:ea typeface="Noto Sans"/>
+                <a:cs typeface="Noto Sans"/>
+                <a:sym typeface="Noto Sans"/>
+              </a:rPr>
+              <a:t>aplicada</a:t>
+            </a:r>
+            <a:r>
+              <a:rPr lang="en-US" sz="2499" dirty="0">
+                <a:solidFill>
+                  <a:srgbClr val="000000"/>
+                </a:solidFill>
+                <a:latin typeface="Noto Sans"/>
+                <a:ea typeface="Noto Sans"/>
+                <a:cs typeface="Noto Sans"/>
+                <a:sym typeface="Noto Sans"/>
+              </a:rPr>
+              <a:t> de </a:t>
+            </a:r>
+            <a:r>
+              <a:rPr lang="en-US" sz="2499" dirty="0" err="1">
+                <a:solidFill>
+                  <a:srgbClr val="000000"/>
+                </a:solidFill>
+                <a:latin typeface="Noto Sans"/>
+                <a:ea typeface="Noto Sans"/>
+                <a:cs typeface="Noto Sans"/>
+                <a:sym typeface="Noto Sans"/>
+              </a:rPr>
+              <a:t>abordagem</a:t>
+            </a:r>
+            <a:r>
+              <a:rPr lang="en-US" sz="2499" dirty="0">
+                <a:solidFill>
+                  <a:srgbClr val="000000"/>
+                </a:solidFill>
+                <a:latin typeface="Noto Sans"/>
+                <a:ea typeface="Noto Sans"/>
+                <a:cs typeface="Noto Sans"/>
+                <a:sym typeface="Noto Sans"/>
+              </a:rPr>
+              <a:t> </a:t>
+            </a:r>
+            <a:r>
+              <a:rPr lang="en-US" sz="2499" dirty="0" err="1">
+                <a:solidFill>
+                  <a:srgbClr val="000000"/>
+                </a:solidFill>
+                <a:latin typeface="Noto Sans"/>
+                <a:ea typeface="Noto Sans"/>
+                <a:cs typeface="Noto Sans"/>
+                <a:sym typeface="Noto Sans"/>
+              </a:rPr>
+              <a:t>qualitativa</a:t>
+            </a:r>
+            <a:r>
+              <a:rPr lang="en-US" sz="2499" dirty="0">
+                <a:solidFill>
+                  <a:srgbClr val="000000"/>
+                </a:solidFill>
+                <a:latin typeface="Noto Sans"/>
+                <a:ea typeface="Noto Sans"/>
+                <a:cs typeface="Noto Sans"/>
+                <a:sym typeface="Noto Sans"/>
+              </a:rPr>
+              <a:t>, </a:t>
+            </a:r>
+            <a:r>
+              <a:rPr lang="en-US" sz="2499" dirty="0" err="1">
+                <a:solidFill>
+                  <a:srgbClr val="000000"/>
+                </a:solidFill>
+                <a:latin typeface="Noto Sans"/>
+                <a:ea typeface="Noto Sans"/>
+                <a:cs typeface="Noto Sans"/>
+                <a:sym typeface="Noto Sans"/>
+              </a:rPr>
+              <a:t>baseada</a:t>
+            </a:r>
+            <a:r>
+              <a:rPr lang="en-US" sz="2499" dirty="0">
+                <a:solidFill>
+                  <a:srgbClr val="000000"/>
+                </a:solidFill>
+                <a:latin typeface="Noto Sans"/>
+                <a:ea typeface="Noto Sans"/>
+                <a:cs typeface="Noto Sans"/>
+                <a:sym typeface="Noto Sans"/>
+              </a:rPr>
+              <a:t> no </a:t>
+            </a:r>
+            <a:r>
+              <a:rPr lang="en-US" sz="2499" dirty="0" err="1">
+                <a:solidFill>
+                  <a:srgbClr val="000000"/>
+                </a:solidFill>
+                <a:latin typeface="Noto Sans"/>
+                <a:ea typeface="Noto Sans"/>
+                <a:cs typeface="Noto Sans"/>
+                <a:sym typeface="Noto Sans"/>
+              </a:rPr>
+              <a:t>desenvolvimento</a:t>
+            </a:r>
+            <a:r>
+              <a:rPr lang="en-US" sz="2499" dirty="0">
+                <a:solidFill>
+                  <a:srgbClr val="000000"/>
+                </a:solidFill>
+                <a:latin typeface="Noto Sans"/>
+                <a:ea typeface="Noto Sans"/>
+                <a:cs typeface="Noto Sans"/>
+                <a:sym typeface="Noto Sans"/>
+              </a:rPr>
+              <a:t> </a:t>
+            </a:r>
+            <a:r>
+              <a:rPr lang="en-US" sz="2499" dirty="0" err="1">
+                <a:solidFill>
+                  <a:srgbClr val="000000"/>
+                </a:solidFill>
+                <a:latin typeface="Noto Sans"/>
+                <a:ea typeface="Noto Sans"/>
+                <a:cs typeface="Noto Sans"/>
+                <a:sym typeface="Noto Sans"/>
+              </a:rPr>
+              <a:t>ágil</a:t>
+            </a:r>
+            <a:r>
+              <a:rPr lang="en-US" sz="2499" dirty="0">
+                <a:solidFill>
+                  <a:srgbClr val="000000"/>
+                </a:solidFill>
+                <a:latin typeface="Noto Sans"/>
+                <a:ea typeface="Noto Sans"/>
+                <a:cs typeface="Noto Sans"/>
+                <a:sym typeface="Noto Sans"/>
+              </a:rPr>
+              <a:t> de software com </a:t>
+            </a:r>
+            <a:r>
+              <a:rPr lang="en-US" sz="2499" dirty="0" err="1">
+                <a:solidFill>
+                  <a:srgbClr val="000000"/>
+                </a:solidFill>
+                <a:latin typeface="Noto Sans"/>
+                <a:ea typeface="Noto Sans"/>
+                <a:cs typeface="Noto Sans"/>
+                <a:sym typeface="Noto Sans"/>
+              </a:rPr>
+              <a:t>entregas</a:t>
+            </a:r>
+            <a:r>
+              <a:rPr lang="en-US" sz="2499" dirty="0">
+                <a:solidFill>
+                  <a:srgbClr val="000000"/>
+                </a:solidFill>
+                <a:latin typeface="Noto Sans"/>
+                <a:ea typeface="Noto Sans"/>
+                <a:cs typeface="Noto Sans"/>
+                <a:sym typeface="Noto Sans"/>
+              </a:rPr>
+              <a:t> </a:t>
+            </a:r>
+            <a:r>
+              <a:rPr lang="en-US" sz="2499" dirty="0" err="1">
+                <a:solidFill>
+                  <a:srgbClr val="000000"/>
+                </a:solidFill>
+                <a:latin typeface="Noto Sans"/>
+                <a:ea typeface="Noto Sans"/>
+                <a:cs typeface="Noto Sans"/>
+                <a:sym typeface="Noto Sans"/>
+              </a:rPr>
+              <a:t>incrementais</a:t>
+            </a:r>
+            <a:r>
+              <a:rPr lang="en-US" sz="2499" dirty="0">
+                <a:solidFill>
+                  <a:srgbClr val="000000"/>
+                </a:solidFill>
+                <a:latin typeface="Noto Sans"/>
+                <a:ea typeface="Noto Sans"/>
+                <a:cs typeface="Noto Sans"/>
+                <a:sym typeface="Noto Sans"/>
+              </a:rPr>
+              <a:t> (Sprints).</a:t>
             </a:r>
           </a:p>
           <a:p>
@@ -11901,7 +12705,7 @@
                 <a:spcPct val="0"/>
               </a:spcBef>
             </a:pPr>
-            <a:endParaRPr lang="en-US" sz="2499">
+            <a:endParaRPr lang="en-US" sz="2499" dirty="0">
               <a:solidFill>
                 <a:srgbClr val="000000"/>
               </a:solidFill>
@@ -11920,7 +12724,7 @@
                 <a:spcPct val="0"/>
               </a:spcBef>
             </a:pPr>
-            <a:endParaRPr lang="en-US" sz="2499">
+            <a:endParaRPr lang="en-US" sz="2499" dirty="0">
               <a:solidFill>
                 <a:srgbClr val="000000"/>
               </a:solidFill>
@@ -11939,7 +12743,7 @@
               <a:buChar char="•"/>
             </a:pPr>
             <a:r>
-              <a:rPr lang="en-US" sz="2499">
+              <a:rPr lang="en-US" sz="2499" dirty="0">
                 <a:solidFill>
                   <a:srgbClr val="000000"/>
                 </a:solidFill>
@@ -11948,7 +12752,31 @@
                 <a:cs typeface="Noto Sans"/>
                 <a:sym typeface="Noto Sans"/>
               </a:rPr>
-              <a:t>Coleta de Dados (Requisitos): </a:t>
+              <a:t>Coleta de Dados (</a:t>
+            </a:r>
+            <a:r>
+              <a:rPr lang="en-US" sz="2499" dirty="0" err="1">
+                <a:solidFill>
+                  <a:srgbClr val="000000"/>
+                </a:solidFill>
+                <a:latin typeface="Noto Sans"/>
+                <a:ea typeface="Noto Sans"/>
+                <a:cs typeface="Noto Sans"/>
+                <a:sym typeface="Noto Sans"/>
+              </a:rPr>
+              <a:t>Requisitos</a:t>
+            </a:r>
+            <a:r>
+              <a:rPr lang="en-US" sz="2499" dirty="0">
+                <a:solidFill>
+                  <a:srgbClr val="000000"/>
+                </a:solidFill>
+                <a:latin typeface="Noto Sans"/>
+                <a:ea typeface="Noto Sans"/>
+                <a:cs typeface="Noto Sans"/>
+                <a:sym typeface="Noto Sans"/>
+              </a:rPr>
+              <a:t>): </a:t>
             </a:r>
           </a:p>
           <a:p>
@@ -11961,7 +12789,7 @@
               </a:spcBef>
             </a:pPr>
             <a:r>
-              <a:rPr lang="en-US" sz="2499">
+              <a:rPr lang="en-US" sz="2499" dirty="0" err="1">
                 <a:solidFill>
                   <a:srgbClr val="000000"/>
                 </a:solidFill>
@@ -11970,7 +12798,187 @@
                 <a:cs typeface="Noto Sans"/>
                 <a:sym typeface="Noto Sans"/>
               </a:rPr>
-              <a:t>Elicitação através de entrevistas não estruturadas com profissionais da área da educação.</a:t>
+              <a:t>Elicitação</a:t>
+            </a:r>
+            <a:r>
+              <a:rPr lang="en-US" sz="2499" dirty="0">
+                <a:solidFill>
+                  <a:srgbClr val="000000"/>
+                </a:solidFill>
+                <a:latin typeface="Noto Sans"/>
+                <a:ea typeface="Noto Sans"/>
+                <a:cs typeface="Noto Sans"/>
+                <a:sym typeface="Noto Sans"/>
+              </a:rPr>
+              <a:t> </a:t>
+            </a:r>
+            <a:r>
+              <a:rPr lang="en-US" sz="2499" dirty="0" err="1">
+                <a:solidFill>
+                  <a:srgbClr val="000000"/>
+                </a:solidFill>
+                <a:latin typeface="Noto Sans"/>
+                <a:ea typeface="Noto Sans"/>
+                <a:cs typeface="Noto Sans"/>
+                <a:sym typeface="Noto Sans"/>
+              </a:rPr>
+              <a:t>através</a:t>
+            </a:r>
+            <a:r>
+              <a:rPr lang="en-US" sz="2499" dirty="0">
+                <a:solidFill>
+                  <a:srgbClr val="000000"/>
+                </a:solidFill>
+                <a:latin typeface="Noto Sans"/>
+                <a:ea typeface="Noto Sans"/>
+                <a:cs typeface="Noto Sans"/>
+                <a:sym typeface="Noto Sans"/>
+              </a:rPr>
+              <a:t> de </a:t>
+            </a:r>
+            <a:r>
+              <a:rPr lang="en-US" sz="2499" dirty="0" err="1">
+                <a:solidFill>
+                  <a:srgbClr val="000000"/>
+                </a:solidFill>
+                <a:latin typeface="Noto Sans"/>
+                <a:ea typeface="Noto Sans"/>
+                <a:cs typeface="Noto Sans"/>
+                <a:sym typeface="Noto Sans"/>
+              </a:rPr>
+              <a:t>entrevistas</a:t>
+            </a:r>
+            <a:r>
+              <a:rPr lang="en-US" sz="2499" dirty="0">
+                <a:solidFill>
+                  <a:srgbClr val="000000"/>
+                </a:solidFill>
+                <a:latin typeface="Noto Sans"/>
+                <a:ea typeface="Noto Sans"/>
+                <a:cs typeface="Noto Sans"/>
+                <a:sym typeface="Noto Sans"/>
+              </a:rPr>
+              <a:t> </a:t>
+            </a:r>
+            <a:r>
+              <a:rPr lang="en-US" sz="2499" dirty="0" err="1">
+                <a:solidFill>
+                  <a:srgbClr val="000000"/>
+                </a:solidFill>
+                <a:latin typeface="Noto Sans"/>
+                <a:ea typeface="Noto Sans"/>
+                <a:cs typeface="Noto Sans"/>
+                <a:sym typeface="Noto Sans"/>
+              </a:rPr>
+              <a:t>não</a:t>
+            </a:r>
+            <a:r>
+              <a:rPr lang="en-US" sz="2499" dirty="0">
+                <a:solidFill>
+                  <a:srgbClr val="000000"/>
+                </a:solidFill>
+                <a:latin typeface="Noto Sans"/>
+                <a:ea typeface="Noto Sans"/>
+                <a:cs typeface="Noto Sans"/>
+                <a:sym typeface="Noto Sans"/>
+              </a:rPr>
+              <a:t> </a:t>
+            </a:r>
+            <a:r>
+              <a:rPr lang="en-US" sz="2499" dirty="0" err="1">
+                <a:solidFill>
+                  <a:srgbClr val="000000"/>
+                </a:solidFill>
+                <a:latin typeface="Noto Sans"/>
+                <a:ea typeface="Noto Sans"/>
+                <a:cs typeface="Noto Sans"/>
+                <a:sym typeface="Noto Sans"/>
+              </a:rPr>
+              <a:t>estruturadas</a:t>
+            </a:r>
+            <a:r>
+              <a:rPr lang="en-US" sz="2499" dirty="0">
+                <a:solidFill>
+                  <a:srgbClr val="000000"/>
+                </a:solidFill>
+                <a:latin typeface="Noto Sans"/>
+                <a:ea typeface="Noto Sans"/>
+                <a:cs typeface="Noto Sans"/>
+                <a:sym typeface="Noto Sans"/>
+              </a:rPr>
+              <a:t> com </a:t>
+            </a:r>
+            <a:r>
+              <a:rPr lang="en-US" sz="2499" dirty="0" err="1">
+                <a:solidFill>
+                  <a:srgbClr val="000000"/>
+                </a:solidFill>
+                <a:latin typeface="Noto Sans"/>
+                <a:ea typeface="Noto Sans"/>
+                <a:cs typeface="Noto Sans"/>
+                <a:sym typeface="Noto Sans"/>
+              </a:rPr>
+              <a:t>profissionais</a:t>
+            </a:r>
+            <a:r>
+              <a:rPr lang="en-US" sz="2499" dirty="0">
+                <a:solidFill>
+                  <a:srgbClr val="000000"/>
+                </a:solidFill>
+                <a:latin typeface="Noto Sans"/>
+                <a:ea typeface="Noto Sans"/>
+                <a:cs typeface="Noto Sans"/>
+                <a:sym typeface="Noto Sans"/>
+              </a:rPr>
+              <a:t> da </a:t>
+            </a:r>
+            <a:r>
+              <a:rPr lang="en-US" sz="2499" dirty="0" err="1">
+                <a:solidFill>
+                  <a:srgbClr val="000000"/>
+                </a:solidFill>
+                <a:latin typeface="Noto Sans"/>
+                <a:ea typeface="Noto Sans"/>
+                <a:cs typeface="Noto Sans"/>
+                <a:sym typeface="Noto Sans"/>
+              </a:rPr>
+              <a:t>área</a:t>
+            </a:r>
+            <a:r>
+              <a:rPr lang="en-US" sz="2499" dirty="0">
+                <a:solidFill>
+                  <a:srgbClr val="000000"/>
+                </a:solidFill>
+                <a:latin typeface="Noto Sans"/>
+                <a:ea typeface="Noto Sans"/>
+                <a:cs typeface="Noto Sans"/>
+                <a:sym typeface="Noto Sans"/>
+              </a:rPr>
+              <a:t> da </a:t>
+            </a:r>
+            <a:r>
+              <a:rPr lang="en-US" sz="2499" dirty="0" err="1">
+                <a:solidFill>
+                  <a:srgbClr val="000000"/>
+                </a:solidFill>
+                <a:latin typeface="Noto Sans"/>
+                <a:ea typeface="Noto Sans"/>
+                <a:cs typeface="Noto Sans"/>
+                <a:sym typeface="Noto Sans"/>
+              </a:rPr>
+              <a:t>educação</a:t>
+            </a:r>
+            <a:r>
+              <a:rPr lang="en-US" sz="2499" dirty="0">
+                <a:solidFill>
+                  <a:srgbClr val="000000"/>
+                </a:solidFill>
+                <a:latin typeface="Noto Sans"/>
+                <a:ea typeface="Noto Sans"/>
+                <a:cs typeface="Noto Sans"/>
+                <a:sym typeface="Noto Sans"/>
+              </a:rPr>
+              <a:t>.</a:t>
             </a:r>
           </a:p>
           <a:p>
@@ -11982,7 +12990,7 @@
                 <a:spcPct val="0"/>
               </a:spcBef>
             </a:pPr>
-            <a:endParaRPr lang="en-US" sz="2499">
+            <a:endParaRPr lang="en-US" sz="2499" dirty="0">
               <a:solidFill>
                 <a:srgbClr val="000000"/>
               </a:solidFill>
@@ -12001,7 +13009,7 @@
                 <a:spcPct val="0"/>
               </a:spcBef>
             </a:pPr>
-            <a:endParaRPr lang="en-US" sz="2499">
+            <a:endParaRPr lang="en-US" sz="2499" dirty="0">
               <a:solidFill>
                 <a:srgbClr val="000000"/>
               </a:solidFill>
@@ -12020,7 +13028,7 @@
               <a:buChar char="•"/>
             </a:pPr>
             <a:r>
-              <a:rPr lang="en-US" sz="2499">
+              <a:rPr lang="en-US" sz="2499" dirty="0" err="1">
                 <a:solidFill>
                   <a:srgbClr val="000000"/>
                 </a:solidFill>
@@ -12029,7 +13037,43 @@
                 <a:cs typeface="Noto Sans"/>
                 <a:sym typeface="Noto Sans"/>
               </a:rPr>
-              <a:t>Procedimentos de Desenvolvimento:  </a:t>
+              <a:t>Procedimentos</a:t>
+            </a:r>
+            <a:r>
+              <a:rPr lang="en-US" sz="2499" dirty="0">
+                <a:solidFill>
+                  <a:srgbClr val="000000"/>
+                </a:solidFill>
+                <a:latin typeface="Noto Sans"/>
+                <a:ea typeface="Noto Sans"/>
+                <a:cs typeface="Noto Sans"/>
+                <a:sym typeface="Noto Sans"/>
+              </a:rPr>
+              <a:t> de </a:t>
+            </a:r>
+            <a:r>
+              <a:rPr lang="en-US" sz="2499" dirty="0" err="1">
+                <a:solidFill>
+                  <a:srgbClr val="000000"/>
+                </a:solidFill>
+                <a:latin typeface="Noto Sans"/>
+                <a:ea typeface="Noto Sans"/>
+                <a:cs typeface="Noto Sans"/>
+                <a:sym typeface="Noto Sans"/>
+              </a:rPr>
+              <a:t>Desenvolvimento</a:t>
+            </a:r>
+            <a:r>
+              <a:rPr lang="en-US" sz="2499" dirty="0">
+                <a:solidFill>
+                  <a:srgbClr val="000000"/>
+                </a:solidFill>
+                <a:latin typeface="Noto Sans"/>
+                <a:ea typeface="Noto Sans"/>
+                <a:cs typeface="Noto Sans"/>
+                <a:sym typeface="Noto Sans"/>
+              </a:rPr>
+              <a:t>:  </a:t>
             </a:r>
           </a:p>
           <a:p>
@@ -12042,7 +13086,7 @@
               </a:spcBef>
             </a:pPr>
             <a:r>
-              <a:rPr lang="en-US" sz="2499">
+              <a:rPr lang="en-US" sz="2499" dirty="0" err="1">
                 <a:solidFill>
                   <a:srgbClr val="000000"/>
                 </a:solidFill>
@@ -12051,7 +13095,67 @@
                 <a:cs typeface="Noto Sans"/>
                 <a:sym typeface="Noto Sans"/>
               </a:rPr>
-              <a:t>Modelagem de dados e design de interfaces focadas em UI/UX.</a:t>
+              <a:t>Modelagem</a:t>
+            </a:r>
+            <a:r>
+              <a:rPr lang="en-US" sz="2499" dirty="0">
+                <a:solidFill>
+                  <a:srgbClr val="000000"/>
+                </a:solidFill>
+                <a:latin typeface="Noto Sans"/>
+                <a:ea typeface="Noto Sans"/>
+                <a:cs typeface="Noto Sans"/>
+                <a:sym typeface="Noto Sans"/>
+              </a:rPr>
+              <a:t> de dados e design de interfaces </a:t>
+            </a:r>
+            <a:r>
+              <a:rPr lang="en-US" sz="2499" dirty="0" err="1">
+                <a:solidFill>
+                  <a:srgbClr val="000000"/>
+                </a:solidFill>
+                <a:latin typeface="Noto Sans"/>
+                <a:ea typeface="Noto Sans"/>
+                <a:cs typeface="Noto Sans"/>
+                <a:sym typeface="Noto Sans"/>
+              </a:rPr>
+              <a:t>focadas</a:t>
+            </a:r>
+            <a:r>
+              <a:rPr lang="en-US" sz="2499" dirty="0">
+                <a:solidFill>
+                  <a:srgbClr val="000000"/>
+                </a:solidFill>
+                <a:latin typeface="Noto Sans"/>
+                <a:ea typeface="Noto Sans"/>
+                <a:cs typeface="Noto Sans"/>
+                <a:sym typeface="Noto Sans"/>
+              </a:rPr>
+              <a:t> </a:t>
+            </a:r>
+            <a:r>
+              <a:rPr lang="en-US" sz="2499" dirty="0" err="1">
+                <a:solidFill>
+                  <a:srgbClr val="000000"/>
+                </a:solidFill>
+                <a:latin typeface="Noto Sans"/>
+                <a:ea typeface="Noto Sans"/>
+                <a:cs typeface="Noto Sans"/>
+                <a:sym typeface="Noto Sans"/>
+              </a:rPr>
+              <a:t>em</a:t>
+            </a:r>
+            <a:r>
+              <a:rPr lang="en-US" sz="2499" dirty="0">
+                <a:solidFill>
+                  <a:srgbClr val="000000"/>
+                </a:solidFill>
+                <a:latin typeface="Noto Sans"/>
+                <a:ea typeface="Noto Sans"/>
+                <a:cs typeface="Noto Sans"/>
+                <a:sym typeface="Noto Sans"/>
+              </a:rPr>
+              <a:t> UI/UX.</a:t>
             </a:r>
           </a:p>
           <a:p>
@@ -12064,7 +13168,7 @@
               </a:spcBef>
             </a:pPr>
             <a:r>
-              <a:rPr lang="en-US" sz="2499">
+              <a:rPr lang="en-US" sz="2499" dirty="0" err="1">
                 <a:solidFill>
                   <a:srgbClr val="000000"/>
                 </a:solidFill>
@@ -12073,7 +13177,67 @@
                 <a:cs typeface="Noto Sans"/>
                 <a:sym typeface="Noto Sans"/>
               </a:rPr>
-              <a:t>Automação via pipeline CI/CD utilizando GitHub Actions e Vercel.</a:t>
+              <a:t>Automação</a:t>
+            </a:r>
+            <a:r>
+              <a:rPr lang="en-US" sz="2499" dirty="0">
+                <a:solidFill>
+                  <a:srgbClr val="000000"/>
+                </a:solidFill>
+                <a:latin typeface="Noto Sans"/>
+                <a:ea typeface="Noto Sans"/>
+                <a:cs typeface="Noto Sans"/>
+                <a:sym typeface="Noto Sans"/>
+              </a:rPr>
+              <a:t> via pipeline CI/CD </a:t>
+            </a:r>
+            <a:r>
+              <a:rPr lang="en-US" sz="2499" dirty="0" err="1">
+                <a:solidFill>
+                  <a:srgbClr val="000000"/>
+                </a:solidFill>
+                <a:latin typeface="Noto Sans"/>
+                <a:ea typeface="Noto Sans"/>
+                <a:cs typeface="Noto Sans"/>
+                <a:sym typeface="Noto Sans"/>
+              </a:rPr>
+              <a:t>utilizando</a:t>
+            </a:r>
+            <a:r>
+              <a:rPr lang="en-US" sz="2499" dirty="0">
+                <a:solidFill>
+                  <a:srgbClr val="000000"/>
+                </a:solidFill>
+                <a:latin typeface="Noto Sans"/>
+                <a:ea typeface="Noto Sans"/>
+                <a:cs typeface="Noto Sans"/>
+                <a:sym typeface="Noto Sans"/>
+              </a:rPr>
+              <a:t> GitHub Actions e </a:t>
+            </a:r>
+            <a:r>
+              <a:rPr lang="en-US" sz="2499" dirty="0" err="1">
+                <a:solidFill>
+                  <a:srgbClr val="000000"/>
+                </a:solidFill>
+                <a:latin typeface="Noto Sans"/>
+                <a:ea typeface="Noto Sans"/>
+                <a:cs typeface="Noto Sans"/>
+                <a:sym typeface="Noto Sans"/>
+              </a:rPr>
+              <a:t>Vercel</a:t>
+            </a:r>
+            <a:r>
+              <a:rPr lang="en-US" sz="2499" dirty="0">
+                <a:solidFill>
+                  <a:srgbClr val="000000"/>
+                </a:solidFill>
+                <a:latin typeface="Noto Sans"/>
+                <a:ea typeface="Noto Sans"/>
+                <a:cs typeface="Noto Sans"/>
+                <a:sym typeface="Noto Sans"/>
+              </a:rPr>
+              <a:t>.</a:t>
             </a:r>
           </a:p>
           <a:p>
@@ -12086,7 +13250,7 @@
               </a:spcBef>
             </a:pPr>
             <a:r>
-              <a:rPr lang="en-US" sz="2499">
+              <a:rPr lang="en-US" sz="2499" dirty="0" err="1">
                 <a:solidFill>
                   <a:srgbClr val="000000"/>
                 </a:solidFill>
@@ -12095,7 +13259,67 @@
                 <a:cs typeface="Noto Sans"/>
                 <a:sym typeface="Noto Sans"/>
               </a:rPr>
-              <a:t>Empacotamento híbrido (PWA e nativo Android via Capacitor).</a:t>
+              <a:t>Empacotamento</a:t>
+            </a:r>
+            <a:r>
+              <a:rPr lang="en-US" sz="2499" dirty="0">
+                <a:solidFill>
+                  <a:srgbClr val="000000"/>
+                </a:solidFill>
+                <a:latin typeface="Noto Sans"/>
+                <a:ea typeface="Noto Sans"/>
+                <a:cs typeface="Noto Sans"/>
+                <a:sym typeface="Noto Sans"/>
+              </a:rPr>
+              <a:t> </a:t>
+            </a:r>
+            <a:r>
+              <a:rPr lang="en-US" sz="2499" dirty="0" err="1">
+                <a:solidFill>
+                  <a:srgbClr val="000000"/>
+                </a:solidFill>
+                <a:latin typeface="Noto Sans"/>
+                <a:ea typeface="Noto Sans"/>
+                <a:cs typeface="Noto Sans"/>
+                <a:sym typeface="Noto Sans"/>
+              </a:rPr>
+              <a:t>híbrido</a:t>
+            </a:r>
+            <a:r>
+              <a:rPr lang="en-US" sz="2499" dirty="0">
+                <a:solidFill>
+                  <a:srgbClr val="000000"/>
+                </a:solidFill>
+                <a:latin typeface="Noto Sans"/>
+                <a:ea typeface="Noto Sans"/>
+                <a:cs typeface="Noto Sans"/>
+                <a:sym typeface="Noto Sans"/>
+              </a:rPr>
+              <a:t> (PWA e </a:t>
+            </a:r>
+            <a:r>
+              <a:rPr lang="en-US" sz="2499" dirty="0" err="1">
+                <a:solidFill>
+                  <a:srgbClr val="000000"/>
+                </a:solidFill>
+                <a:latin typeface="Noto Sans"/>
+                <a:ea typeface="Noto Sans"/>
+                <a:cs typeface="Noto Sans"/>
+                <a:sym typeface="Noto Sans"/>
+              </a:rPr>
+              <a:t>nativo</a:t>
+            </a:r>
+            <a:r>
+              <a:rPr lang="en-US" sz="2499" dirty="0">
+                <a:solidFill>
+                  <a:srgbClr val="000000"/>
+                </a:solidFill>
+                <a:latin typeface="Noto Sans"/>
+                <a:ea typeface="Noto Sans"/>
+                <a:cs typeface="Noto Sans"/>
+                <a:sym typeface="Noto Sans"/>
+              </a:rPr>
+              <a:t> Android via Capacitor).</a:t>
             </a:r>
           </a:p>
           <a:p>
@@ -12107,7 +13331,7 @@
                 <a:spcPct val="0"/>
               </a:spcBef>
             </a:pPr>
-            <a:endParaRPr lang="en-US" sz="2499">
+            <a:endParaRPr lang="en-US" sz="2499" dirty="0">
               <a:solidFill>
                 <a:srgbClr val="000000"/>
               </a:solidFill>
@@ -12126,7 +13350,7 @@
                 <a:spcPct val="0"/>
               </a:spcBef>
             </a:pPr>
-            <a:endParaRPr lang="en-US" sz="2499">
+            <a:endParaRPr lang="en-US" sz="2499" dirty="0">
               <a:solidFill>
                 <a:srgbClr val="000000"/>
               </a:solidFill>
@@ -12145,7 +13369,7 @@
               <a:buChar char="•"/>
             </a:pPr>
             <a:r>
-              <a:rPr lang="en-US" sz="2499">
+              <a:rPr lang="en-US" sz="2499" dirty="0" err="1">
                 <a:solidFill>
                   <a:srgbClr val="000000"/>
                 </a:solidFill>
@@ -12154,7 +13378,43 @@
                 <a:cs typeface="Noto Sans"/>
                 <a:sym typeface="Noto Sans"/>
               </a:rPr>
-              <a:t>Estratégia de Validação: </a:t>
+              <a:t>Estratégia</a:t>
+            </a:r>
+            <a:r>
+              <a:rPr lang="en-US" sz="2499" dirty="0">
+                <a:solidFill>
+                  <a:srgbClr val="000000"/>
+                </a:solidFill>
+                <a:latin typeface="Noto Sans"/>
+                <a:ea typeface="Noto Sans"/>
+                <a:cs typeface="Noto Sans"/>
+                <a:sym typeface="Noto Sans"/>
+              </a:rPr>
+              <a:t> de </a:t>
+            </a:r>
+            <a:r>
+              <a:rPr lang="en-US" sz="2499" dirty="0" err="1">
+                <a:solidFill>
+                  <a:srgbClr val="000000"/>
+                </a:solidFill>
+                <a:latin typeface="Noto Sans"/>
+                <a:ea typeface="Noto Sans"/>
+                <a:cs typeface="Noto Sans"/>
+                <a:sym typeface="Noto Sans"/>
+              </a:rPr>
+              <a:t>Validação</a:t>
+            </a:r>
+            <a:r>
+              <a:rPr lang="en-US" sz="2499" dirty="0">
+                <a:solidFill>
+                  <a:srgbClr val="000000"/>
+                </a:solidFill>
+                <a:latin typeface="Noto Sans"/>
+                <a:ea typeface="Noto Sans"/>
+                <a:cs typeface="Noto Sans"/>
+                <a:sym typeface="Noto Sans"/>
+              </a:rPr>
+              <a:t>: </a:t>
             </a:r>
           </a:p>
           <a:p>
@@ -12167,7 +13427,7 @@
               </a:spcBef>
             </a:pPr>
             <a:r>
-              <a:rPr lang="en-US" sz="2499">
+              <a:rPr lang="en-US" sz="2499" dirty="0" err="1">
                 <a:solidFill>
                   <a:srgbClr val="000000"/>
                 </a:solidFill>
@@ -12176,7 +13436,139 @@
                 <a:cs typeface="Noto Sans"/>
                 <a:sym typeface="Noto Sans"/>
               </a:rPr>
-              <a:t>Execução de testes automatizados unitários/integração (Vitest) e testes de penetração Black-Box.</a:t>
+              <a:t>Execução</a:t>
+            </a:r>
+            <a:r>
+              <a:rPr lang="en-US" sz="2499" dirty="0">
+                <a:solidFill>
+                  <a:srgbClr val="000000"/>
+                </a:solidFill>
+                <a:latin typeface="Noto Sans"/>
+                <a:ea typeface="Noto Sans"/>
+                <a:cs typeface="Noto Sans"/>
+                <a:sym typeface="Noto Sans"/>
+              </a:rPr>
+              <a:t> de testes </a:t>
+            </a:r>
+            <a:r>
+              <a:rPr lang="en-US" sz="2499" dirty="0" err="1">
+                <a:solidFill>
+                  <a:srgbClr val="000000"/>
+                </a:solidFill>
+                <a:latin typeface="Noto Sans"/>
+                <a:ea typeface="Noto Sans"/>
+                <a:cs typeface="Noto Sans"/>
+                <a:sym typeface="Noto Sans"/>
+              </a:rPr>
+              <a:t>automatizados</a:t>
+            </a:r>
+            <a:r>
+              <a:rPr lang="en-US" sz="2499" dirty="0">
+                <a:solidFill>
+                  <a:srgbClr val="000000"/>
+                </a:solidFill>
+                <a:latin typeface="Noto Sans"/>
+                <a:ea typeface="Noto Sans"/>
+                <a:cs typeface="Noto Sans"/>
+                <a:sym typeface="Noto Sans"/>
+              </a:rPr>
+              <a:t> </a:t>
+            </a:r>
+            <a:r>
+              <a:rPr lang="en-US" sz="2499" dirty="0" err="1">
+                <a:solidFill>
+                  <a:srgbClr val="000000"/>
+                </a:solidFill>
+                <a:latin typeface="Noto Sans"/>
+                <a:ea typeface="Noto Sans"/>
+                <a:cs typeface="Noto Sans"/>
+                <a:sym typeface="Noto Sans"/>
+              </a:rPr>
+              <a:t>unitários</a:t>
+            </a:r>
+            <a:r>
+              <a:rPr lang="en-US" sz="2499" dirty="0">
+                <a:solidFill>
+                  <a:srgbClr val="000000"/>
+                </a:solidFill>
+                <a:latin typeface="Noto Sans"/>
+                <a:ea typeface="Noto Sans"/>
+                <a:cs typeface="Noto Sans"/>
+                <a:sym typeface="Noto Sans"/>
+              </a:rPr>
+              <a:t>/</a:t>
+            </a:r>
+            <a:r>
+              <a:rPr lang="en-US" sz="2499" dirty="0" err="1">
+                <a:solidFill>
+                  <a:srgbClr val="000000"/>
+                </a:solidFill>
+                <a:latin typeface="Noto Sans"/>
+                <a:ea typeface="Noto Sans"/>
+                <a:cs typeface="Noto Sans"/>
+                <a:sym typeface="Noto Sans"/>
+              </a:rPr>
+              <a:t>integração</a:t>
+            </a:r>
+            <a:r>
+              <a:rPr lang="en-US" sz="2499" dirty="0">
+                <a:solidFill>
+                  <a:srgbClr val="000000"/>
+                </a:solidFill>
+                <a:latin typeface="Noto Sans"/>
+                <a:ea typeface="Noto Sans"/>
+                <a:cs typeface="Noto Sans"/>
+                <a:sym typeface="Noto Sans"/>
+              </a:rPr>
+              <a:t> (</a:t>
+            </a:r>
+            <a:r>
+              <a:rPr lang="en-US" sz="2499" dirty="0" err="1">
+                <a:solidFill>
+                  <a:srgbClr val="000000"/>
+                </a:solidFill>
+                <a:latin typeface="Noto Sans"/>
+                <a:ea typeface="Noto Sans"/>
+                <a:cs typeface="Noto Sans"/>
+                <a:sym typeface="Noto Sans"/>
+              </a:rPr>
+              <a:t>Vitest</a:t>
+            </a:r>
+            <a:r>
+              <a:rPr lang="en-US" sz="2499" dirty="0">
+                <a:solidFill>
+                  <a:srgbClr val="000000"/>
+                </a:solidFill>
+                <a:latin typeface="Noto Sans"/>
+                <a:ea typeface="Noto Sans"/>
+                <a:cs typeface="Noto Sans"/>
+                <a:sym typeface="Noto Sans"/>
+              </a:rPr>
+              <a:t>) e testes de </a:t>
+            </a:r>
+            <a:r>
+              <a:rPr lang="en-US" sz="2499" dirty="0" err="1">
+                <a:solidFill>
+                  <a:srgbClr val="000000"/>
+                </a:solidFill>
+                <a:latin typeface="Noto Sans"/>
+                <a:ea typeface="Noto Sans"/>
+                <a:cs typeface="Noto Sans"/>
+                <a:sym typeface="Noto Sans"/>
+              </a:rPr>
+              <a:t>penetração</a:t>
+            </a:r>
+            <a:r>
+              <a:rPr lang="en-US" sz="2499" dirty="0">
+                <a:solidFill>
+                  <a:srgbClr val="000000"/>
+                </a:solidFill>
+                <a:latin typeface="Noto Sans"/>
+                <a:ea typeface="Noto Sans"/>
+                <a:cs typeface="Noto Sans"/>
+                <a:sym typeface="Noto Sans"/>
+              </a:rPr>
+              <a:t> Black-Box.</a:t>
             </a:r>
           </a:p>
         </p:txBody>

--- a/tcc/TCC - Slides.pptx
+++ b/tcc/TCC - Slides.pptx
@@ -50,10 +50,13 @@
     <p:embeddedFont>
       <p:font typeface="Noto Sans" panose="020B0502040504020204" pitchFamily="34" charset="0"/>
       <p:regular r:id="rId26"/>
+      <p:bold r:id="rId27"/>
+      <p:italic r:id="rId28"/>
+      <p:boldItalic r:id="rId29"/>
     </p:embeddedFont>
     <p:embeddedFont>
       <p:font typeface="Noto Sans Bold" panose="020B0802040504020204" charset="0"/>
-      <p:regular r:id="rId27"/>
+      <p:regular r:id="rId30"/>
     </p:embeddedFont>
   </p:embeddedFontLst>
   <p:defaultTextStyle>
@@ -5605,7 +5608,7 @@
               </a:lnSpc>
             </a:pPr>
             <a:r>
-              <a:rPr lang="en-US" sz="5562">
+              <a:rPr lang="en-US" sz="5562" dirty="0" err="1">
                 <a:solidFill>
                   <a:srgbClr val="000000"/>
                 </a:solidFill>
@@ -5614,8 +5617,65 @@
                 <a:cs typeface="Arimo"/>
                 <a:sym typeface="Arimo"/>
               </a:rPr>
-              <a:t>Defesa de TCC - Sistemas de Informação</a:t>
-            </a:r>
+              <a:t>Defesa</a:t>
+            </a:r>
+            <a:r>
+              <a:rPr lang="en-US" sz="5562" dirty="0">
+                <a:solidFill>
+                  <a:srgbClr val="000000"/>
+                </a:solidFill>
+                <a:latin typeface="Arimo"/>
+                <a:ea typeface="Arimo"/>
+                <a:cs typeface="Arimo"/>
+                <a:sym typeface="Arimo"/>
+              </a:rPr>
+              <a:t> de TCC - </a:t>
+            </a:r>
+            <a:r>
+              <a:rPr lang="en-US" sz="5562" dirty="0" err="1">
+                <a:solidFill>
+                  <a:srgbClr val="000000"/>
+                </a:solidFill>
+                <a:latin typeface="Arimo"/>
+                <a:ea typeface="Arimo"/>
+                <a:cs typeface="Arimo"/>
+                <a:sym typeface="Arimo"/>
+              </a:rPr>
+              <a:t>Sistemas</a:t>
+            </a:r>
+            <a:r>
+              <a:rPr lang="en-US" sz="5562" dirty="0">
+                <a:solidFill>
+                  <a:srgbClr val="000000"/>
+                </a:solidFill>
+                <a:latin typeface="Arimo"/>
+                <a:ea typeface="Arimo"/>
+                <a:cs typeface="Arimo"/>
+                <a:sym typeface="Arimo"/>
+              </a:rPr>
+              <a:t> de </a:t>
+            </a:r>
+            <a:r>
+              <a:rPr lang="en-US" sz="5562" dirty="0" err="1">
+                <a:solidFill>
+                  <a:srgbClr val="000000"/>
+                </a:solidFill>
+                <a:latin typeface="Arimo"/>
+                <a:ea typeface="Arimo"/>
+                <a:cs typeface="Arimo"/>
+                <a:sym typeface="Arimo"/>
+              </a:rPr>
+              <a:t>Informação</a:t>
+            </a:r>
+            <a:endParaRPr lang="en-US" sz="5562" dirty="0">
+              <a:solidFill>
+                <a:srgbClr val="000000"/>
+              </a:solidFill>
+              <a:latin typeface="Arimo"/>
+              <a:ea typeface="Arimo"/>
+              <a:cs typeface="Arimo"/>
+              <a:sym typeface="Arimo"/>
+            </a:endParaRPr>
           </a:p>
         </p:txBody>
       </p:sp>

--- a/tcc/TCC - Slides.pptx
+++ b/tcc/TCC - Slides.pptx
@@ -37,26 +37,19 @@
       <p:regular r:id="rId20"/>
     </p:embeddedFont>
     <p:embeddedFont>
-      <p:font typeface="Calibri" panose="020F0502020204030204" pitchFamily="34" charset="0"/>
+      <p:font typeface="Gill Sans Bold" panose="020B0604020202020204" charset="0"/>
       <p:regular r:id="rId21"/>
-      <p:bold r:id="rId22"/>
-      <p:italic r:id="rId23"/>
-      <p:boldItalic r:id="rId24"/>
     </p:embeddedFont>
     <p:embeddedFont>
-      <p:font typeface="Gill Sans Bold" panose="020B0604020202020204" charset="0"/>
-      <p:regular r:id="rId25"/>
+      <p:font typeface="Noto Sans" panose="020B0502040204020203" pitchFamily="34" charset="0"/>
+      <p:regular r:id="rId22"/>
+      <p:bold r:id="rId23"/>
+      <p:italic r:id="rId24"/>
+      <p:boldItalic r:id="rId25"/>
     </p:embeddedFont>
     <p:embeddedFont>
-      <p:font typeface="Noto Sans" panose="020B0502040504020204" pitchFamily="34" charset="0"/>
+      <p:font typeface="Noto Sans Bold" panose="020B0604020202020204" charset="0"/>
       <p:regular r:id="rId26"/>
-      <p:bold r:id="rId27"/>
-      <p:italic r:id="rId28"/>
-      <p:boldItalic r:id="rId29"/>
-    </p:embeddedFont>
-    <p:embeddedFont>
-      <p:font typeface="Noto Sans Bold" panose="020B0802040504020204" charset="0"/>
-      <p:regular r:id="rId30"/>
     </p:embeddedFont>
   </p:embeddedFontLst>
   <p:defaultTextStyle>
@@ -617,8 +610,8 @@
         </p:nvSpPr>
         <p:spPr>
           <a:xfrm>
-            <a:off x="2857500" y="512763"/>
-            <a:ext cx="3429000" cy="2566987"/>
+            <a:off x="2290763" y="512763"/>
+            <a:ext cx="4562475" cy="2566987"/>
           </a:xfrm>
           <a:prstGeom prst="rect">
             <a:avLst/>
@@ -5581,104 +5574,6 @@
           </p:spPr>
         </p:sp>
       </p:grpSp>
-      <p:sp>
-        <p:nvSpPr>
-          <p:cNvPr id="8" name="TextBox 8"/>
-          <p:cNvSpPr txBox="1"/>
-          <p:nvPr/>
-        </p:nvSpPr>
-        <p:spPr>
-          <a:xfrm>
-            <a:off x="4437875" y="771144"/>
-            <a:ext cx="13180327" cy="900140"/>
-          </a:xfrm>
-          <a:prstGeom prst="rect">
-            <a:avLst/>
-          </a:prstGeom>
-        </p:spPr>
-        <p:txBody>
-          <a:bodyPr lIns="0" tIns="0" rIns="0" bIns="0" rtlCol="0" anchor="t">
-            <a:spAutoFit/>
-          </a:bodyPr>
-          <a:lstStyle/>
-          <a:p>
-            <a:pPr algn="l">
-              <a:lnSpc>
-                <a:spcPts val="6937"/>
-              </a:lnSpc>
-            </a:pPr>
-            <a:r>
-              <a:rPr lang="en-US" sz="5562" dirty="0" err="1">
-                <a:solidFill>
-                  <a:srgbClr val="000000"/>
-                </a:solidFill>
-                <a:latin typeface="Arimo"/>
-                <a:ea typeface="Arimo"/>
-                <a:cs typeface="Arimo"/>
-                <a:sym typeface="Arimo"/>
-              </a:rPr>
-              <a:t>Defesa</a:t>
-            </a:r>
-            <a:r>
-              <a:rPr lang="en-US" sz="5562" dirty="0">
-                <a:solidFill>
-                  <a:srgbClr val="000000"/>
-                </a:solidFill>
-                <a:latin typeface="Arimo"/>
-                <a:ea typeface="Arimo"/>
-                <a:cs typeface="Arimo"/>
-                <a:sym typeface="Arimo"/>
-              </a:rPr>
-              <a:t> de TCC - </a:t>
-            </a:r>
-            <a:r>
-              <a:rPr lang="en-US" sz="5562" dirty="0" err="1">
-                <a:solidFill>
-                  <a:srgbClr val="000000"/>
-                </a:solidFill>
-                <a:latin typeface="Arimo"/>
-                <a:ea typeface="Arimo"/>
-                <a:cs typeface="Arimo"/>
-                <a:sym typeface="Arimo"/>
-              </a:rPr>
-              <a:t>Sistemas</a:t>
-            </a:r>
-            <a:r>
-              <a:rPr lang="en-US" sz="5562" dirty="0">
-                <a:solidFill>
-                  <a:srgbClr val="000000"/>
-                </a:solidFill>
-                <a:latin typeface="Arimo"/>
-                <a:ea typeface="Arimo"/>
-                <a:cs typeface="Arimo"/>
-                <a:sym typeface="Arimo"/>
-              </a:rPr>
-              <a:t> de </a:t>
-            </a:r>
-            <a:r>
-              <a:rPr lang="en-US" sz="5562" dirty="0" err="1">
-                <a:solidFill>
-                  <a:srgbClr val="000000"/>
-                </a:solidFill>
-                <a:latin typeface="Arimo"/>
-                <a:ea typeface="Arimo"/>
-                <a:cs typeface="Arimo"/>
-                <a:sym typeface="Arimo"/>
-              </a:rPr>
-              <a:t>Informação</a:t>
-            </a:r>
-            <a:endParaRPr lang="en-US" sz="5562" dirty="0">
-              <a:solidFill>
-                <a:srgbClr val="000000"/>
-              </a:solidFill>
-              <a:latin typeface="Arimo"/>
-              <a:ea typeface="Arimo"/>
-              <a:cs typeface="Arimo"/>
-              <a:sym typeface="Arimo"/>
-            </a:endParaRPr>
-          </a:p>
-        </p:txBody>
-      </p:sp>
       <p:sp>
         <p:nvSpPr>
           <p:cNvPr id="9" name="TextBox 9"/>

--- a/tcc/TCC - Slides.pptx
+++ b/tcc/TCC - Slides.pptx
@@ -41,14 +41,14 @@
       <p:regular r:id="rId21"/>
     </p:embeddedFont>
     <p:embeddedFont>
-      <p:font typeface="Noto Sans" panose="020B0502040204020203" pitchFamily="34" charset="0"/>
+      <p:font typeface="Noto Sans" panose="020B0502040504020204" pitchFamily="34" charset="0"/>
       <p:regular r:id="rId22"/>
       <p:bold r:id="rId23"/>
       <p:italic r:id="rId24"/>
       <p:boldItalic r:id="rId25"/>
     </p:embeddedFont>
     <p:embeddedFont>
-      <p:font typeface="Noto Sans Bold" panose="020B0604020202020204" charset="0"/>
+      <p:font typeface="Noto Sans Bold" panose="020B0802040504020204" charset="0"/>
       <p:regular r:id="rId26"/>
     </p:embeddedFont>
   </p:embeddedFontLst>
@@ -248,7 +248,7 @@
           <a:p>
             <a:fld id="{B7268E1E-0E44-426D-905E-8AD9B19D2182}" type="datetimeFigureOut">
               <a:rPr lang="cs-CZ" smtClean="0"/>
-              <a:t>20.04.2026</a:t>
+              <a:t>21.04.2026</a:t>
             </a:fld>
             <a:endParaRPr lang="cs-CZ"/>
           </a:p>
@@ -1918,8 +1918,8 @@
         </p:nvSpPr>
         <p:spPr>
           <a:xfrm>
-            <a:off x="2857500" y="512763"/>
-            <a:ext cx="3429000" cy="2566987"/>
+            <a:off x="2290763" y="512763"/>
+            <a:ext cx="4562475" cy="2566987"/>
           </a:xfrm>
           <a:prstGeom prst="rect">
             <a:avLst/>
@@ -2658,7 +2658,7 @@
             <a:fld id="{1D8BD707-D9CF-40AE-B4C6-C98DA3205C09}" type="datetimeFigureOut">
               <a:rPr lang="en-US" smtClean="0"/>
               <a:pPr/>
-              <a:t>4/20/2026</a:t>
+              <a:t>4/21/2026</a:t>
             </a:fld>
             <a:endParaRPr lang="en-US"/>
           </a:p>
@@ -2823,7 +2823,7 @@
             <a:fld id="{1D8BD707-D9CF-40AE-B4C6-C98DA3205C09}" type="datetimeFigureOut">
               <a:rPr lang="en-US" smtClean="0"/>
               <a:pPr/>
-              <a:t>4/20/2026</a:t>
+              <a:t>4/21/2026</a:t>
             </a:fld>
             <a:endParaRPr lang="en-US"/>
           </a:p>
@@ -2998,7 +2998,7 @@
             <a:fld id="{1D8BD707-D9CF-40AE-B4C6-C98DA3205C09}" type="datetimeFigureOut">
               <a:rPr lang="en-US" smtClean="0"/>
               <a:pPr/>
-              <a:t>4/20/2026</a:t>
+              <a:t>4/21/2026</a:t>
             </a:fld>
             <a:endParaRPr lang="en-US"/>
           </a:p>
@@ -3163,7 +3163,7 @@
             <a:fld id="{1D8BD707-D9CF-40AE-B4C6-C98DA3205C09}" type="datetimeFigureOut">
               <a:rPr lang="en-US" smtClean="0"/>
               <a:pPr/>
-              <a:t>4/20/2026</a:t>
+              <a:t>4/21/2026</a:t>
             </a:fld>
             <a:endParaRPr lang="en-US"/>
           </a:p>
@@ -3405,7 +3405,7 @@
             <a:fld id="{1D8BD707-D9CF-40AE-B4C6-C98DA3205C09}" type="datetimeFigureOut">
               <a:rPr lang="en-US" smtClean="0"/>
               <a:pPr/>
-              <a:t>4/20/2026</a:t>
+              <a:t>4/21/2026</a:t>
             </a:fld>
             <a:endParaRPr lang="en-US"/>
           </a:p>
@@ -3687,7 +3687,7 @@
             <a:fld id="{1D8BD707-D9CF-40AE-B4C6-C98DA3205C09}" type="datetimeFigureOut">
               <a:rPr lang="en-US" smtClean="0"/>
               <a:pPr/>
-              <a:t>4/20/2026</a:t>
+              <a:t>4/21/2026</a:t>
             </a:fld>
             <a:endParaRPr lang="en-US"/>
           </a:p>
@@ -4103,7 +4103,7 @@
             <a:fld id="{1D8BD707-D9CF-40AE-B4C6-C98DA3205C09}" type="datetimeFigureOut">
               <a:rPr lang="en-US" smtClean="0"/>
               <a:pPr/>
-              <a:t>4/20/2026</a:t>
+              <a:t>4/21/2026</a:t>
             </a:fld>
             <a:endParaRPr lang="en-US"/>
           </a:p>
@@ -4217,7 +4217,7 @@
             <a:fld id="{1D8BD707-D9CF-40AE-B4C6-C98DA3205C09}" type="datetimeFigureOut">
               <a:rPr lang="en-US" smtClean="0"/>
               <a:pPr/>
-              <a:t>4/20/2026</a:t>
+              <a:t>4/21/2026</a:t>
             </a:fld>
             <a:endParaRPr lang="en-US"/>
           </a:p>
@@ -4309,7 +4309,7 @@
             <a:fld id="{1D8BD707-D9CF-40AE-B4C6-C98DA3205C09}" type="datetimeFigureOut">
               <a:rPr lang="en-US" smtClean="0"/>
               <a:pPr/>
-              <a:t>4/20/2026</a:t>
+              <a:t>4/21/2026</a:t>
             </a:fld>
             <a:endParaRPr lang="en-US"/>
           </a:p>
@@ -4581,7 +4581,7 @@
             <a:fld id="{1D8BD707-D9CF-40AE-B4C6-C98DA3205C09}" type="datetimeFigureOut">
               <a:rPr lang="en-US" smtClean="0"/>
               <a:pPr/>
-              <a:t>4/20/2026</a:t>
+              <a:t>4/21/2026</a:t>
             </a:fld>
             <a:endParaRPr lang="en-US"/>
           </a:p>
@@ -4830,7 +4830,7 @@
             <a:fld id="{1D8BD707-D9CF-40AE-B4C6-C98DA3205C09}" type="datetimeFigureOut">
               <a:rPr lang="en-US" smtClean="0"/>
               <a:pPr/>
-              <a:t>4/20/2026</a:t>
+              <a:t>4/21/2026</a:t>
             </a:fld>
             <a:endParaRPr lang="en-US"/>
           </a:p>
@@ -5038,7 +5038,7 @@
             <a:fld id="{1D8BD707-D9CF-40AE-B4C6-C98DA3205C09}" type="datetimeFigureOut">
               <a:rPr lang="en-US" smtClean="0"/>
               <a:pPr/>
-              <a:t>4/20/2026</a:t>
+              <a:t>4/21/2026</a:t>
             </a:fld>
             <a:endParaRPr lang="en-US"/>
           </a:p>
@@ -5739,67 +5739,6 @@
       </p:sp>
       <p:grpSp>
         <p:nvGrpSpPr>
-          <p:cNvPr id="11" name="Group 11"/>
-          <p:cNvGrpSpPr/>
-          <p:nvPr/>
-        </p:nvGrpSpPr>
-        <p:grpSpPr>
-          <a:xfrm>
-            <a:off x="7109460" y="1824250"/>
-            <a:ext cx="10654897" cy="6638500"/>
-            <a:chOff x="0" y="0"/>
-            <a:chExt cx="13401040" cy="8349475"/>
-          </a:xfrm>
-        </p:grpSpPr>
-        <p:sp>
-          <p:nvSpPr>
-            <p:cNvPr id="12" name="Freeform 12"/>
-            <p:cNvSpPr/>
-            <p:nvPr/>
-          </p:nvSpPr>
-          <p:spPr>
-            <a:xfrm>
-              <a:off x="0" y="0"/>
-              <a:ext cx="13401039" cy="8349488"/>
-            </a:xfrm>
-            <a:custGeom>
-              <a:avLst/>
-              <a:gdLst/>
-              <a:ahLst/>
-              <a:cxnLst/>
-              <a:rect l="l" t="t" r="r" b="b"/>
-              <a:pathLst>
-                <a:path w="13401039" h="8349488">
-                  <a:moveTo>
-                    <a:pt x="0" y="0"/>
-                  </a:moveTo>
-                  <a:lnTo>
-                    <a:pt x="13401039" y="0"/>
-                  </a:lnTo>
-                  <a:lnTo>
-                    <a:pt x="13401039" y="8349488"/>
-                  </a:lnTo>
-                  <a:lnTo>
-                    <a:pt x="0" y="8349488"/>
-                  </a:lnTo>
-                  <a:lnTo>
-                    <a:pt x="0" y="0"/>
-                  </a:lnTo>
-                  <a:close/>
-                </a:path>
-              </a:pathLst>
-            </a:custGeom>
-            <a:blipFill>
-              <a:blip r:embed="rId3"/>
-              <a:stretch>
-                <a:fillRect/>
-              </a:stretch>
-            </a:blipFill>
-          </p:spPr>
-        </p:sp>
-      </p:grpSp>
-      <p:grpSp>
-        <p:nvGrpSpPr>
           <p:cNvPr id="13" name="Group 13"/>
           <p:cNvGrpSpPr/>
           <p:nvPr/>
@@ -5851,7 +5790,7 @@
               </a:pathLst>
             </a:custGeom>
             <a:blipFill>
-              <a:blip r:embed="rId4"/>
+              <a:blip r:embed="rId3"/>
               <a:stretch>
                 <a:fillRect/>
               </a:stretch>
@@ -5859,6 +5798,43 @@
           </p:spPr>
         </p:sp>
       </p:grpSp>
+      <p:pic>
+        <p:nvPicPr>
+          <p:cNvPr id="15" name="Imagem 14">
+            <a:extLst>
+              <a:ext uri="{FF2B5EF4-FFF2-40B4-BE49-F238E27FC236}">
+                <a16:creationId xmlns:a16="http://schemas.microsoft.com/office/drawing/2014/main" id="{F8363E1B-B5B1-5031-3134-6682C0932938}"/>
+              </a:ext>
+            </a:extLst>
+          </p:cNvPr>
+          <p:cNvPicPr>
+            <a:picLocks noChangeAspect="1"/>
+          </p:cNvPicPr>
+          <p:nvPr/>
+        </p:nvPicPr>
+        <p:blipFill>
+          <a:blip r:embed="rId4">
+            <a:extLst>
+              <a:ext uri="{28A0092B-C50C-407E-A947-70E740481C1C}">
+                <a14:useLocalDpi xmlns:a14="http://schemas.microsoft.com/office/drawing/2010/main" val="0"/>
+              </a:ext>
+            </a:extLst>
+          </a:blip>
+          <a:srcRect r="17724"/>
+          <a:stretch>
+            <a:fillRect/>
+          </a:stretch>
+        </p:blipFill>
+        <p:spPr>
+          <a:xfrm>
+            <a:off x="7658862" y="1319681"/>
+            <a:ext cx="9959340" cy="7590476"/>
+          </a:xfrm>
+          <a:prstGeom prst="rect">
+            <a:avLst/>
+          </a:prstGeom>
+        </p:spPr>
+      </p:pic>
     </p:spTree>
   </p:cSld>
   <p:clrMapOvr>
@@ -7312,10 +7288,10 @@
         </p:nvGrpSpPr>
         <p:grpSpPr>
           <a:xfrm>
-            <a:off x="6521206" y="4617244"/>
-            <a:ext cx="5245446" cy="850554"/>
+            <a:off x="6521277" y="4617244"/>
+            <a:ext cx="5245418" cy="850583"/>
             <a:chOff x="0" y="0"/>
-            <a:chExt cx="6993928" cy="1134072"/>
+            <a:chExt cx="6993891" cy="1134111"/>
           </a:xfrm>
         </p:grpSpPr>
         <p:sp>
@@ -7327,7 +7303,7 @@
           <p:spPr>
             <a:xfrm>
               <a:off x="0" y="0"/>
-              <a:ext cx="6993890" cy="1134110"/>
+              <a:ext cx="6993891" cy="1134111"/>
             </a:xfrm>
             <a:custGeom>
               <a:avLst/>
@@ -15238,7 +15214,7 @@
         </p:nvGrpSpPr>
         <p:grpSpPr>
           <a:xfrm>
-            <a:off x="756999" y="5143500"/>
+            <a:off x="669798" y="5143500"/>
             <a:ext cx="7746921" cy="4931931"/>
             <a:chOff x="0" y="0"/>
             <a:chExt cx="10329228" cy="6575908"/>
@@ -15299,8 +15275,8 @@
         </p:nvGrpSpPr>
         <p:grpSpPr>
           <a:xfrm>
-            <a:off x="9692640" y="1028700"/>
-            <a:ext cx="7746921" cy="4885934"/>
+            <a:off x="9692641" y="1028700"/>
+            <a:ext cx="7010400" cy="3962400"/>
             <a:chOff x="0" y="0"/>
             <a:chExt cx="10329228" cy="6514579"/>
           </a:xfrm>
@@ -15352,67 +15328,6 @@
           </p:spPr>
         </p:sp>
       </p:grpSp>
-      <p:grpSp>
-        <p:nvGrpSpPr>
-          <p:cNvPr id="12" name="Group 12"/>
-          <p:cNvGrpSpPr/>
-          <p:nvPr/>
-        </p:nvGrpSpPr>
-        <p:grpSpPr>
-          <a:xfrm>
-            <a:off x="9871281" y="5255696"/>
-            <a:ext cx="7746921" cy="4849387"/>
-            <a:chOff x="0" y="0"/>
-            <a:chExt cx="10329228" cy="6465849"/>
-          </a:xfrm>
-        </p:grpSpPr>
-        <p:sp>
-          <p:nvSpPr>
-            <p:cNvPr id="13" name="Freeform 13"/>
-            <p:cNvSpPr/>
-            <p:nvPr/>
-          </p:nvSpPr>
-          <p:spPr>
-            <a:xfrm>
-              <a:off x="0" y="0"/>
-              <a:ext cx="10329291" cy="6465824"/>
-            </a:xfrm>
-            <a:custGeom>
-              <a:avLst/>
-              <a:gdLst/>
-              <a:ahLst/>
-              <a:cxnLst/>
-              <a:rect l="l" t="t" r="r" b="b"/>
-              <a:pathLst>
-                <a:path w="10329291" h="6465824">
-                  <a:moveTo>
-                    <a:pt x="0" y="0"/>
-                  </a:moveTo>
-                  <a:lnTo>
-                    <a:pt x="10329291" y="0"/>
-                  </a:lnTo>
-                  <a:lnTo>
-                    <a:pt x="10329291" y="6465824"/>
-                  </a:lnTo>
-                  <a:lnTo>
-                    <a:pt x="0" y="6465824"/>
-                  </a:lnTo>
-                  <a:lnTo>
-                    <a:pt x="0" y="0"/>
-                  </a:lnTo>
-                  <a:close/>
-                </a:path>
-              </a:pathLst>
-            </a:custGeom>
-            <a:blipFill>
-              <a:blip r:embed="rId4"/>
-              <a:stretch>
-                <a:fillRect/>
-              </a:stretch>
-            </a:blipFill>
-          </p:spPr>
-        </p:sp>
-      </p:grpSp>
       <p:sp>
         <p:nvSpPr>
           <p:cNvPr id="14" name="TextBox 14"/>
@@ -15454,6 +15369,42 @@
           </a:p>
         </p:txBody>
       </p:sp>
+      <p:pic>
+        <p:nvPicPr>
+          <p:cNvPr id="16" name="Imagem 15">
+            <a:extLst>
+              <a:ext uri="{FF2B5EF4-FFF2-40B4-BE49-F238E27FC236}">
+                <a16:creationId xmlns:a16="http://schemas.microsoft.com/office/drawing/2014/main" id="{A46474F6-77FB-9463-5450-1918E1D3BABC}"/>
+              </a:ext>
+            </a:extLst>
+          </p:cNvPr>
+          <p:cNvPicPr>
+            <a:picLocks noChangeAspect="1"/>
+          </p:cNvPicPr>
+          <p:nvPr/>
+        </p:nvPicPr>
+        <p:blipFill>
+          <a:blip r:embed="rId4">
+            <a:extLst>
+              <a:ext uri="{28A0092B-C50C-407E-A947-70E740481C1C}">
+                <a14:useLocalDpi xmlns:a14="http://schemas.microsoft.com/office/drawing/2010/main" val="0"/>
+              </a:ext>
+            </a:extLst>
+          </a:blip>
+          <a:stretch>
+            <a:fillRect/>
+          </a:stretch>
+        </p:blipFill>
+        <p:spPr>
+          <a:xfrm>
+            <a:off x="9692640" y="5143500"/>
+            <a:ext cx="7010400" cy="4395978"/>
+          </a:xfrm>
+          <a:prstGeom prst="rect">
+            <a:avLst/>
+          </a:prstGeom>
+        </p:spPr>
+      </p:pic>
     </p:spTree>
   </p:cSld>
   <p:clrMapOvr>
@@ -16161,7 +16112,7 @@
               </a:lnSpc>
             </a:pPr>
             <a:r>
-              <a:rPr lang="en-US" sz="2187">
+              <a:rPr lang="en-US" sz="2187" dirty="0">
                 <a:solidFill>
                   <a:srgbClr val="000000"/>
                 </a:solidFill>
@@ -16170,7 +16121,175 @@
                 <a:cs typeface="Noto Sans"/>
                 <a:sym typeface="Noto Sans"/>
               </a:rPr>
-              <a:t>Um Cuidador jamais consegue acessar dados de alunos que não são seus.</a:t>
+              <a:t>Um </a:t>
+            </a:r>
+            <a:r>
+              <a:rPr lang="en-US" sz="2187" dirty="0" err="1">
+                <a:solidFill>
+                  <a:srgbClr val="000000"/>
+                </a:solidFill>
+                <a:latin typeface="Noto Sans"/>
+                <a:ea typeface="Noto Sans"/>
+                <a:cs typeface="Noto Sans"/>
+                <a:sym typeface="Noto Sans"/>
+              </a:rPr>
+              <a:t>Cuidador</a:t>
+            </a:r>
+            <a:r>
+              <a:rPr lang="en-US" sz="2187" dirty="0">
+                <a:solidFill>
+                  <a:srgbClr val="000000"/>
+                </a:solidFill>
+                <a:latin typeface="Noto Sans"/>
+                <a:ea typeface="Noto Sans"/>
+                <a:cs typeface="Noto Sans"/>
+                <a:sym typeface="Noto Sans"/>
+              </a:rPr>
+              <a:t> jamais </a:t>
+            </a:r>
+            <a:r>
+              <a:rPr lang="en-US" sz="2187" dirty="0" err="1">
+                <a:solidFill>
+                  <a:srgbClr val="000000"/>
+                </a:solidFill>
+                <a:latin typeface="Noto Sans"/>
+                <a:ea typeface="Noto Sans"/>
+                <a:cs typeface="Noto Sans"/>
+                <a:sym typeface="Noto Sans"/>
+              </a:rPr>
+              <a:t>consegue</a:t>
+            </a:r>
+            <a:r>
+              <a:rPr lang="en-US" sz="2187" dirty="0">
+                <a:solidFill>
+                  <a:srgbClr val="000000"/>
+                </a:solidFill>
+                <a:latin typeface="Noto Sans"/>
+                <a:ea typeface="Noto Sans"/>
+                <a:cs typeface="Noto Sans"/>
+                <a:sym typeface="Noto Sans"/>
+              </a:rPr>
+              <a:t> </a:t>
+            </a:r>
+            <a:r>
+              <a:rPr lang="en-US" sz="2187" dirty="0" err="1">
+                <a:solidFill>
+                  <a:srgbClr val="000000"/>
+                </a:solidFill>
+                <a:latin typeface="Noto Sans"/>
+                <a:ea typeface="Noto Sans"/>
+                <a:cs typeface="Noto Sans"/>
+                <a:sym typeface="Noto Sans"/>
+              </a:rPr>
+              <a:t>acessar</a:t>
+            </a:r>
+            <a:r>
+              <a:rPr lang="en-US" sz="2187" dirty="0">
+                <a:solidFill>
+                  <a:srgbClr val="000000"/>
+                </a:solidFill>
+                <a:latin typeface="Noto Sans"/>
+                <a:ea typeface="Noto Sans"/>
+                <a:cs typeface="Noto Sans"/>
+                <a:sym typeface="Noto Sans"/>
+              </a:rPr>
+              <a:t> dados de </a:t>
+            </a:r>
+            <a:r>
+              <a:rPr lang="en-US" sz="2187" dirty="0" err="1">
+                <a:solidFill>
+                  <a:srgbClr val="000000"/>
+                </a:solidFill>
+                <a:latin typeface="Noto Sans"/>
+                <a:ea typeface="Noto Sans"/>
+                <a:cs typeface="Noto Sans"/>
+                <a:sym typeface="Noto Sans"/>
+              </a:rPr>
+              <a:t>alunos</a:t>
+            </a:r>
+            <a:r>
+              <a:rPr lang="en-US" sz="2187" dirty="0">
+                <a:solidFill>
+                  <a:srgbClr val="000000"/>
+                </a:solidFill>
+                <a:latin typeface="Noto Sans"/>
+                <a:ea typeface="Noto Sans"/>
+                <a:cs typeface="Noto Sans"/>
+                <a:sym typeface="Noto Sans"/>
+              </a:rPr>
+              <a:t> que </a:t>
+            </a:r>
+            <a:r>
+              <a:rPr lang="en-US" sz="2187" dirty="0" err="1">
+                <a:solidFill>
+                  <a:srgbClr val="000000"/>
+                </a:solidFill>
+                <a:latin typeface="Noto Sans"/>
+                <a:ea typeface="Noto Sans"/>
+                <a:cs typeface="Noto Sans"/>
+                <a:sym typeface="Noto Sans"/>
+              </a:rPr>
+              <a:t>não</a:t>
+            </a:r>
+            <a:r>
+              <a:rPr lang="en-US" sz="2187" dirty="0">
+                <a:solidFill>
+                  <a:srgbClr val="000000"/>
+                </a:solidFill>
+                <a:latin typeface="Noto Sans"/>
+                <a:ea typeface="Noto Sans"/>
+                <a:cs typeface="Noto Sans"/>
+                <a:sym typeface="Noto Sans"/>
+              </a:rPr>
+              <a:t> </a:t>
+            </a:r>
+            <a:r>
+              <a:rPr lang="en-US" sz="2187" dirty="0" err="1">
+                <a:solidFill>
+                  <a:srgbClr val="000000"/>
+                </a:solidFill>
+                <a:latin typeface="Noto Sans"/>
+                <a:ea typeface="Noto Sans"/>
+                <a:cs typeface="Noto Sans"/>
+                <a:sym typeface="Noto Sans"/>
+              </a:rPr>
+              <a:t>são</a:t>
+            </a:r>
+            <a:r>
+              <a:rPr lang="en-US" sz="2187" dirty="0">
+                <a:solidFill>
+                  <a:srgbClr val="000000"/>
+                </a:solidFill>
+                <a:latin typeface="Noto Sans"/>
+                <a:ea typeface="Noto Sans"/>
+                <a:cs typeface="Noto Sans"/>
+                <a:sym typeface="Noto Sans"/>
+              </a:rPr>
+              <a:t> </a:t>
+            </a:r>
+            <a:r>
+              <a:rPr lang="en-US" sz="2187" dirty="0" err="1">
+                <a:solidFill>
+                  <a:srgbClr val="000000"/>
+                </a:solidFill>
+                <a:latin typeface="Noto Sans"/>
+                <a:ea typeface="Noto Sans"/>
+                <a:cs typeface="Noto Sans"/>
+                <a:sym typeface="Noto Sans"/>
+              </a:rPr>
+              <a:t>seus</a:t>
+            </a:r>
+            <a:r>
+              <a:rPr lang="en-US" sz="2187" dirty="0">
+                <a:solidFill>
+                  <a:srgbClr val="000000"/>
+                </a:solidFill>
+                <a:latin typeface="Noto Sans"/>
+                <a:ea typeface="Noto Sans"/>
+                <a:cs typeface="Noto Sans"/>
+                <a:sym typeface="Noto Sans"/>
+              </a:rPr>
+              <a:t>.</a:t>
             </a:r>
           </a:p>
         </p:txBody>

--- a/tcc/TCC - Slides.pptx
+++ b/tcc/TCC - Slides.pptx
@@ -1046,8 +1046,8 @@
         </p:nvSpPr>
         <p:spPr>
           <a:xfrm>
-            <a:off x="2857500" y="512763"/>
-            <a:ext cx="3429000" cy="2566987"/>
+            <a:off x="2290763" y="512763"/>
+            <a:ext cx="4562475" cy="2566987"/>
           </a:xfrm>
           <a:prstGeom prst="rect">
             <a:avLst/>
@@ -1264,8 +1264,8 @@
         </p:nvSpPr>
         <p:spPr>
           <a:xfrm>
-            <a:off x="2857500" y="512763"/>
-            <a:ext cx="3429000" cy="2566987"/>
+            <a:off x="2290763" y="512763"/>
+            <a:ext cx="4562475" cy="2566987"/>
           </a:xfrm>
           <a:prstGeom prst="rect">
             <a:avLst/>
@@ -1482,8 +1482,8 @@
         </p:nvSpPr>
         <p:spPr>
           <a:xfrm>
-            <a:off x="2857500" y="512763"/>
-            <a:ext cx="3429000" cy="2566987"/>
+            <a:off x="2290763" y="512763"/>
+            <a:ext cx="4562475" cy="2566987"/>
           </a:xfrm>
           <a:prstGeom prst="rect">
             <a:avLst/>
@@ -1700,8 +1700,8 @@
         </p:nvSpPr>
         <p:spPr>
           <a:xfrm>
-            <a:off x="2857500" y="512763"/>
-            <a:ext cx="3429000" cy="2566987"/>
+            <a:off x="2290763" y="512763"/>
+            <a:ext cx="4562475" cy="2566987"/>
           </a:xfrm>
           <a:prstGeom prst="rect">
             <a:avLst/>
@@ -2136,8 +2136,8 @@
         </p:nvSpPr>
         <p:spPr>
           <a:xfrm>
-            <a:off x="2857500" y="512763"/>
-            <a:ext cx="3429000" cy="2566987"/>
+            <a:off x="2290763" y="512763"/>
+            <a:ext cx="4562475" cy="2566987"/>
           </a:xfrm>
           <a:prstGeom prst="rect">
             <a:avLst/>
@@ -5583,7 +5583,7 @@
         <p:spPr>
           <a:xfrm>
             <a:off x="329298" y="3392995"/>
-            <a:ext cx="6780162" cy="3443849"/>
+            <a:ext cx="6780162" cy="2621615"/>
           </a:xfrm>
           <a:prstGeom prst="rect">
             <a:avLst/>
@@ -5605,7 +5605,7 @@
                 <a:solidFill>
                   <a:srgbClr val="000000"/>
                 </a:solidFill>
-                <a:latin typeface="Arimo"/>
+                <a:latin typeface="+mj-lt"/>
                 <a:ea typeface="Arimo"/>
                 <a:cs typeface="Arimo"/>
                 <a:sym typeface="Arimo"/>
@@ -5617,7 +5617,7 @@
                 <a:solidFill>
                   <a:srgbClr val="000000"/>
                 </a:solidFill>
-                <a:latin typeface="Arimo"/>
+                <a:latin typeface="+mj-lt"/>
                 <a:ea typeface="Arimo"/>
                 <a:cs typeface="Arimo"/>
                 <a:sym typeface="Arimo"/>
@@ -5629,7 +5629,7 @@
                 <a:solidFill>
                   <a:srgbClr val="000000"/>
                 </a:solidFill>
-                <a:latin typeface="Arimo"/>
+                <a:latin typeface="+mj-lt"/>
                 <a:ea typeface="Arimo"/>
                 <a:cs typeface="Arimo"/>
                 <a:sym typeface="Arimo"/>
@@ -5641,7 +5641,7 @@
                 <a:solidFill>
                   <a:srgbClr val="000000"/>
                 </a:solidFill>
-                <a:latin typeface="Arimo"/>
+                <a:latin typeface="+mj-lt"/>
                 <a:ea typeface="Arimo"/>
                 <a:cs typeface="Arimo"/>
                 <a:sym typeface="Arimo"/>
@@ -5653,7 +5653,7 @@
                 <a:solidFill>
                   <a:srgbClr val="000000"/>
                 </a:solidFill>
-                <a:latin typeface="Arimo"/>
+                <a:latin typeface="+mj-lt"/>
                 <a:ea typeface="Arimo"/>
                 <a:cs typeface="Arimo"/>
                 <a:sym typeface="Arimo"/>
@@ -5665,7 +5665,7 @@
                 <a:solidFill>
                   <a:srgbClr val="000000"/>
                 </a:solidFill>
-                <a:latin typeface="Arimo"/>
+                <a:latin typeface="+mj-lt"/>
                 <a:ea typeface="Arimo"/>
                 <a:cs typeface="Arimo"/>
                 <a:sym typeface="Arimo"/>
@@ -5677,7 +5677,7 @@
                 <a:solidFill>
                   <a:srgbClr val="000000"/>
                 </a:solidFill>
-                <a:latin typeface="Arimo"/>
+                <a:latin typeface="+mj-lt"/>
                 <a:ea typeface="Arimo"/>
                 <a:cs typeface="Arimo"/>
                 <a:sym typeface="Arimo"/>
@@ -5688,7 +5688,7 @@
               <a:solidFill>
                 <a:srgbClr val="000000"/>
               </a:solidFill>
-              <a:latin typeface="Arimo"/>
+              <a:latin typeface="+mj-lt"/>
               <a:ea typeface="Arimo"/>
               <a:cs typeface="Arimo"/>
               <a:sym typeface="Arimo"/>
@@ -6509,7 +6509,7 @@
         <p:spPr>
           <a:xfrm>
             <a:off x="992238" y="1163393"/>
-            <a:ext cx="9445523" cy="1829095"/>
+            <a:ext cx="9445523" cy="1736757"/>
           </a:xfrm>
           <a:prstGeom prst="rect">
             <a:avLst/>
@@ -6527,16 +6527,52 @@
               </a:lnSpc>
             </a:pPr>
             <a:r>
-              <a:rPr lang="en-US" sz="5562">
-                <a:solidFill>
-                  <a:srgbClr val="000000"/>
-                </a:solidFill>
-                <a:latin typeface="Arimo"/>
-                <a:ea typeface="Arimo"/>
-                <a:cs typeface="Arimo"/>
-                <a:sym typeface="Arimo"/>
-              </a:rPr>
-              <a:t>Validação de Segurança (Pentest)</a:t>
+              <a:rPr lang="en-US" sz="5562" dirty="0" err="1">
+                <a:solidFill>
+                  <a:srgbClr val="000000"/>
+                </a:solidFill>
+                <a:latin typeface="+mj-lt"/>
+                <a:ea typeface="Arimo"/>
+                <a:cs typeface="Arimo"/>
+                <a:sym typeface="Arimo"/>
+              </a:rPr>
+              <a:t>Validação</a:t>
+            </a:r>
+            <a:r>
+              <a:rPr lang="en-US" sz="5562" dirty="0">
+                <a:solidFill>
+                  <a:srgbClr val="000000"/>
+                </a:solidFill>
+                <a:latin typeface="+mj-lt"/>
+                <a:ea typeface="Arimo"/>
+                <a:cs typeface="Arimo"/>
+                <a:sym typeface="Arimo"/>
+              </a:rPr>
+              <a:t> de </a:t>
+            </a:r>
+            <a:r>
+              <a:rPr lang="en-US" sz="5562" dirty="0" err="1">
+                <a:solidFill>
+                  <a:srgbClr val="000000"/>
+                </a:solidFill>
+                <a:latin typeface="+mj-lt"/>
+                <a:ea typeface="Arimo"/>
+                <a:cs typeface="Arimo"/>
+                <a:sym typeface="Arimo"/>
+              </a:rPr>
+              <a:t>Segurança</a:t>
+            </a:r>
+            <a:r>
+              <a:rPr lang="en-US" sz="5562" dirty="0">
+                <a:solidFill>
+                  <a:srgbClr val="000000"/>
+                </a:solidFill>
+                <a:latin typeface="+mj-lt"/>
+                <a:ea typeface="Arimo"/>
+                <a:cs typeface="Arimo"/>
+                <a:sym typeface="Arimo"/>
+              </a:rPr>
+              <a:t> (Pentest)</a:t>
             </a:r>
           </a:p>
         </p:txBody>
@@ -6550,7 +6586,7 @@
         <p:spPr>
           <a:xfrm>
             <a:off x="992238" y="3663105"/>
-            <a:ext cx="3544043" cy="481012"/>
+            <a:ext cx="3544043" cy="420115"/>
           </a:xfrm>
           <a:prstGeom prst="rect">
             <a:avLst/>
@@ -6568,17 +6604,24 @@
               </a:lnSpc>
             </a:pPr>
             <a:r>
-              <a:rPr lang="en-US" sz="2750">
-                <a:solidFill>
-                  <a:srgbClr val="000000"/>
-                </a:solidFill>
-                <a:latin typeface="Arimo"/>
+              <a:rPr lang="en-US" sz="2800" dirty="0" err="1">
+                <a:solidFill>
+                  <a:srgbClr val="000000"/>
+                </a:solidFill>
                 <a:ea typeface="Arimo"/>
                 <a:cs typeface="Arimo"/>
                 <a:sym typeface="Arimo"/>
               </a:rPr>
               <a:t>Metodologia</a:t>
             </a:r>
+            <a:endParaRPr lang="en-US" sz="2800" dirty="0">
+              <a:solidFill>
+                <a:srgbClr val="000000"/>
+              </a:solidFill>
+              <a:ea typeface="Arimo"/>
+              <a:cs typeface="Arimo"/>
+              <a:sym typeface="Arimo"/>
+            </a:endParaRPr>
           </a:p>
         </p:txBody>
       </p:sp>
@@ -6591,7 +6634,7 @@
         <p:spPr>
           <a:xfrm>
             <a:off x="992238" y="4341914"/>
-            <a:ext cx="4376890" cy="992981"/>
+            <a:ext cx="4376890" cy="881973"/>
           </a:xfrm>
           <a:prstGeom prst="rect">
             <a:avLst/>
@@ -6609,16 +6652,59 @@
               </a:lnSpc>
             </a:pPr>
             <a:r>
-              <a:rPr lang="en-US" sz="2187">
-                <a:solidFill>
-                  <a:srgbClr val="000000"/>
-                </a:solidFill>
-                <a:latin typeface="Noto Sans"/>
-                <a:ea typeface="Noto Sans"/>
-                <a:cs typeface="Noto Sans"/>
-                <a:sym typeface="Noto Sans"/>
-              </a:rPr>
-              <a:t>Testes de Penetração Black-Box baseados no OWASP ASVS.</a:t>
+              <a:rPr lang="en-US" sz="2400" dirty="0">
+                <a:solidFill>
+                  <a:srgbClr val="000000"/>
+                </a:solidFill>
+                <a:ea typeface="Noto Sans"/>
+                <a:cs typeface="Noto Sans"/>
+                <a:sym typeface="Noto Sans"/>
+              </a:rPr>
+              <a:t>Testes de </a:t>
+            </a:r>
+            <a:r>
+              <a:rPr lang="en-US" sz="2400" dirty="0" err="1">
+                <a:solidFill>
+                  <a:srgbClr val="000000"/>
+                </a:solidFill>
+                <a:ea typeface="Noto Sans"/>
+                <a:cs typeface="Noto Sans"/>
+                <a:sym typeface="Noto Sans"/>
+              </a:rPr>
+              <a:t>Penetração</a:t>
+            </a:r>
+            <a:r>
+              <a:rPr lang="en-US" sz="2400" dirty="0">
+                <a:solidFill>
+                  <a:srgbClr val="000000"/>
+                </a:solidFill>
+                <a:ea typeface="Noto Sans"/>
+                <a:cs typeface="Noto Sans"/>
+                <a:sym typeface="Noto Sans"/>
+              </a:rPr>
+              <a:t> Black-Box </a:t>
+            </a:r>
+            <a:r>
+              <a:rPr lang="en-US" sz="2400" dirty="0" err="1">
+                <a:solidFill>
+                  <a:srgbClr val="000000"/>
+                </a:solidFill>
+                <a:ea typeface="Noto Sans"/>
+                <a:cs typeface="Noto Sans"/>
+                <a:sym typeface="Noto Sans"/>
+              </a:rPr>
+              <a:t>baseados</a:t>
+            </a:r>
+            <a:r>
+              <a:rPr lang="en-US" sz="2400" dirty="0">
+                <a:solidFill>
+                  <a:srgbClr val="000000"/>
+                </a:solidFill>
+                <a:ea typeface="Noto Sans"/>
+                <a:cs typeface="Noto Sans"/>
+                <a:sym typeface="Noto Sans"/>
+              </a:rPr>
+              <a:t> no OWASP ASVS.</a:t>
             </a:r>
           </a:p>
         </p:txBody>
@@ -6632,7 +6718,7 @@
         <p:spPr>
           <a:xfrm>
             <a:off x="992238" y="5580307"/>
-            <a:ext cx="3544043" cy="481012"/>
+            <a:ext cx="3544043" cy="420115"/>
           </a:xfrm>
           <a:prstGeom prst="rect">
             <a:avLst/>
@@ -6650,11 +6736,10 @@
               </a:lnSpc>
             </a:pPr>
             <a:r>
-              <a:rPr lang="en-US" sz="2750">
-                <a:solidFill>
-                  <a:srgbClr val="000000"/>
-                </a:solidFill>
-                <a:latin typeface="Arimo"/>
+              <a:rPr lang="en-US" sz="2800">
+                <a:solidFill>
+                  <a:srgbClr val="000000"/>
+                </a:solidFill>
                 <a:ea typeface="Arimo"/>
                 <a:cs typeface="Arimo"/>
                 <a:sym typeface="Arimo"/>
@@ -6672,8 +6757,8 @@
         </p:nvSpPr>
         <p:spPr>
           <a:xfrm>
-            <a:off x="992238" y="6259116"/>
-            <a:ext cx="4376890" cy="539353"/>
+            <a:off x="992238" y="6128274"/>
+            <a:ext cx="4376890" cy="427489"/>
           </a:xfrm>
           <a:prstGeom prst="rect">
             <a:avLst/>
@@ -6691,11 +6776,10 @@
               </a:lnSpc>
             </a:pPr>
             <a:r>
-              <a:rPr lang="en-US" sz="2187">
-                <a:solidFill>
-                  <a:srgbClr val="000000"/>
-                </a:solidFill>
-                <a:latin typeface="Noto Sans"/>
+              <a:rPr lang="en-US" sz="2400" dirty="0">
+                <a:solidFill>
+                  <a:srgbClr val="000000"/>
+                </a:solidFill>
                 <a:ea typeface="Noto Sans"/>
                 <a:cs typeface="Noto Sans"/>
                 <a:sym typeface="Noto Sans"/>
@@ -6714,7 +6798,7 @@
         <p:spPr>
           <a:xfrm>
             <a:off x="6070397" y="3663105"/>
-            <a:ext cx="3544043" cy="481012"/>
+            <a:ext cx="3544043" cy="420115"/>
           </a:xfrm>
           <a:prstGeom prst="rect">
             <a:avLst/>
@@ -6732,11 +6816,10 @@
               </a:lnSpc>
             </a:pPr>
             <a:r>
-              <a:rPr lang="en-US" sz="2750">
-                <a:solidFill>
-                  <a:srgbClr val="000000"/>
-                </a:solidFill>
-                <a:latin typeface="Arimo"/>
+              <a:rPr lang="en-US" sz="2800">
+                <a:solidFill>
+                  <a:srgbClr val="000000"/>
+                </a:solidFill>
                 <a:ea typeface="Arimo"/>
                 <a:cs typeface="Arimo"/>
                 <a:sym typeface="Arimo"/>
@@ -6755,7 +6838,7 @@
         <p:spPr>
           <a:xfrm>
             <a:off x="6070397" y="4341914"/>
-            <a:ext cx="4376890" cy="539353"/>
+            <a:ext cx="4376890" cy="427489"/>
           </a:xfrm>
           <a:prstGeom prst="rect">
             <a:avLst/>
@@ -6775,11 +6858,10 @@
               <a:buChar char="•"/>
             </a:pPr>
             <a:r>
-              <a:rPr lang="en-US" sz="2187">
-                <a:solidFill>
-                  <a:srgbClr val="000000"/>
-                </a:solidFill>
-                <a:latin typeface="Noto Sans"/>
+              <a:rPr lang="en-US" sz="2400">
+                <a:solidFill>
+                  <a:srgbClr val="000000"/>
+                </a:solidFill>
                 <a:ea typeface="Noto Sans"/>
                 <a:cs typeface="Noto Sans"/>
                 <a:sym typeface="Noto Sans"/>
@@ -6798,7 +6880,7 @@
         <p:spPr>
           <a:xfrm>
             <a:off x="6070397" y="4894659"/>
-            <a:ext cx="4376890" cy="992981"/>
+            <a:ext cx="4376890" cy="889154"/>
           </a:xfrm>
           <a:prstGeom prst="rect">
             <a:avLst/>
@@ -6818,11 +6900,10 @@
               <a:buChar char="•"/>
             </a:pPr>
             <a:r>
-              <a:rPr lang="en-US" sz="2187">
-                <a:solidFill>
-                  <a:srgbClr val="000000"/>
-                </a:solidFill>
-                <a:latin typeface="Noto Sans"/>
+              <a:rPr lang="en-US" sz="2400">
+                <a:solidFill>
+                  <a:srgbClr val="000000"/>
+                </a:solidFill>
                 <a:ea typeface="Noto Sans"/>
                 <a:cs typeface="Noto Sans"/>
                 <a:sym typeface="Noto Sans"/>
@@ -6841,7 +6922,7 @@
         <p:spPr>
           <a:xfrm>
             <a:off x="6070397" y="5901033"/>
-            <a:ext cx="4376890" cy="992981"/>
+            <a:ext cx="4376890" cy="881973"/>
           </a:xfrm>
           <a:prstGeom prst="rect">
             <a:avLst/>
@@ -6861,11 +6942,10 @@
               <a:buChar char="•"/>
             </a:pPr>
             <a:r>
-              <a:rPr lang="en-US" sz="2187">
-                <a:solidFill>
-                  <a:srgbClr val="000000"/>
-                </a:solidFill>
-                <a:latin typeface="Noto Sans"/>
+              <a:rPr lang="en-US" sz="2400">
+                <a:solidFill>
+                  <a:srgbClr val="000000"/>
+                </a:solidFill>
                 <a:ea typeface="Noto Sans"/>
                 <a:cs typeface="Noto Sans"/>
                 <a:sym typeface="Noto Sans"/>
@@ -6883,8 +6963,8 @@
         </p:nvSpPr>
         <p:spPr>
           <a:xfrm>
-            <a:off x="6070397" y="7139435"/>
-            <a:ext cx="3544043" cy="481012"/>
+            <a:off x="6070397" y="7102049"/>
+            <a:ext cx="3544043" cy="420115"/>
           </a:xfrm>
           <a:prstGeom prst="rect">
             <a:avLst/>
@@ -6902,11 +6982,10 @@
               </a:lnSpc>
             </a:pPr>
             <a:r>
-              <a:rPr lang="en-US" sz="2750">
-                <a:solidFill>
-                  <a:srgbClr val="000000"/>
-                </a:solidFill>
-                <a:latin typeface="Arimo"/>
+              <a:rPr lang="en-US" sz="2800" dirty="0">
+                <a:solidFill>
+                  <a:srgbClr val="000000"/>
+                </a:solidFill>
                 <a:ea typeface="Arimo"/>
                 <a:cs typeface="Arimo"/>
                 <a:sym typeface="Arimo"/>
@@ -6925,7 +7004,7 @@
         <p:spPr>
           <a:xfrm>
             <a:off x="6070397" y="7818234"/>
-            <a:ext cx="4376890" cy="992981"/>
+            <a:ext cx="4376890" cy="881973"/>
           </a:xfrm>
           <a:prstGeom prst="rect">
             <a:avLst/>
@@ -6943,11 +7022,10 @@
               </a:lnSpc>
             </a:pPr>
             <a:r>
-              <a:rPr lang="en-US" sz="2187">
-                <a:solidFill>
-                  <a:srgbClr val="000000"/>
-                </a:solidFill>
-                <a:latin typeface="Noto Sans"/>
+              <a:rPr lang="en-US" sz="2400">
+                <a:solidFill>
+                  <a:srgbClr val="000000"/>
+                </a:solidFill>
                 <a:ea typeface="Noto Sans"/>
                 <a:cs typeface="Noto Sans"/>
                 <a:sym typeface="Noto Sans"/>
@@ -7589,7 +7667,7 @@
         <p:spPr>
           <a:xfrm>
             <a:off x="992238" y="2221116"/>
-            <a:ext cx="16303523" cy="1829095"/>
+            <a:ext cx="16303523" cy="851900"/>
           </a:xfrm>
           <a:prstGeom prst="rect">
             <a:avLst/>
@@ -7611,7 +7689,7 @@
                 <a:solidFill>
                   <a:srgbClr val="000000"/>
                 </a:solidFill>
-                <a:latin typeface="Arimo"/>
+                <a:latin typeface="+mj-lt"/>
                 <a:ea typeface="Arimo"/>
                 <a:cs typeface="Arimo"/>
                 <a:sym typeface="Arimo"/>
@@ -7623,7 +7701,7 @@
                 <a:solidFill>
                   <a:srgbClr val="000000"/>
                 </a:solidFill>
-                <a:latin typeface="Arimo"/>
+                <a:latin typeface="+mj-lt"/>
                 <a:ea typeface="Arimo"/>
                 <a:cs typeface="Arimo"/>
                 <a:sym typeface="Arimo"/>
@@ -7635,7 +7713,7 @@
                 <a:solidFill>
                   <a:srgbClr val="000000"/>
                 </a:solidFill>
-                <a:latin typeface="Arimo"/>
+                <a:latin typeface="+mj-lt"/>
                 <a:ea typeface="Arimo"/>
                 <a:cs typeface="Arimo"/>
                 <a:sym typeface="Arimo"/>
@@ -7647,7 +7725,7 @@
                 <a:solidFill>
                   <a:srgbClr val="000000"/>
                 </a:solidFill>
-                <a:latin typeface="Arimo"/>
+                <a:latin typeface="+mj-lt"/>
                 <a:ea typeface="Arimo"/>
                 <a:cs typeface="Arimo"/>
                 <a:sym typeface="Arimo"/>
@@ -7659,7 +7737,7 @@
                 <a:solidFill>
                   <a:srgbClr val="000000"/>
                 </a:solidFill>
-                <a:latin typeface="Arimo"/>
+                <a:latin typeface="+mj-lt"/>
                 <a:ea typeface="Arimo"/>
                 <a:cs typeface="Arimo"/>
                 <a:sym typeface="Arimo"/>
@@ -7671,7 +7749,7 @@
                 <a:solidFill>
                   <a:srgbClr val="000000"/>
                 </a:solidFill>
-                <a:latin typeface="Arimo"/>
+                <a:latin typeface="+mj-lt"/>
                 <a:ea typeface="Arimo"/>
                 <a:cs typeface="Arimo"/>
                 <a:sym typeface="Arimo"/>
@@ -7690,7 +7768,7 @@
         <p:spPr>
           <a:xfrm>
             <a:off x="1275759" y="5713209"/>
-            <a:ext cx="3544043" cy="481012"/>
+            <a:ext cx="3544043" cy="420115"/>
           </a:xfrm>
           <a:prstGeom prst="rect">
             <a:avLst/>
@@ -7712,7 +7790,7 @@
                 <a:solidFill>
                   <a:srgbClr val="000000"/>
                 </a:solidFill>
-                <a:latin typeface="Arimo"/>
+                <a:latin typeface="+mj-lt"/>
                 <a:ea typeface="Arimo"/>
                 <a:cs typeface="Arimo"/>
                 <a:sym typeface="Arimo"/>
@@ -7731,7 +7809,7 @@
         <p:spPr>
           <a:xfrm>
             <a:off x="1275759" y="6278613"/>
-            <a:ext cx="4678413" cy="1446609"/>
+            <a:ext cx="4678413" cy="881973"/>
           </a:xfrm>
           <a:prstGeom prst="rect">
             <a:avLst/>
@@ -7749,16 +7827,136 @@
               </a:lnSpc>
             </a:pPr>
             <a:r>
-              <a:rPr lang="en-US" sz="2187">
-                <a:solidFill>
-                  <a:srgbClr val="000000"/>
-                </a:solidFill>
-                <a:latin typeface="Noto Sans"/>
-                <a:ea typeface="Noto Sans"/>
-                <a:cs typeface="Noto Sans"/>
-                <a:sym typeface="Noto Sans"/>
-              </a:rPr>
-              <a:t>Credenciais falsas inseridas no código para atrair e detectar invasores.</a:t>
+              <a:rPr lang="en-US" sz="2187" dirty="0" err="1">
+                <a:solidFill>
+                  <a:srgbClr val="000000"/>
+                </a:solidFill>
+                <a:ea typeface="Noto Sans"/>
+                <a:cs typeface="Noto Sans"/>
+                <a:sym typeface="Noto Sans"/>
+              </a:rPr>
+              <a:t>Credenciais</a:t>
+            </a:r>
+            <a:r>
+              <a:rPr lang="en-US" sz="2187" dirty="0">
+                <a:solidFill>
+                  <a:srgbClr val="000000"/>
+                </a:solidFill>
+                <a:ea typeface="Noto Sans"/>
+                <a:cs typeface="Noto Sans"/>
+                <a:sym typeface="Noto Sans"/>
+              </a:rPr>
+              <a:t> falsas </a:t>
+            </a:r>
+            <a:r>
+              <a:rPr lang="en-US" sz="2187" dirty="0" err="1">
+                <a:solidFill>
+                  <a:srgbClr val="000000"/>
+                </a:solidFill>
+                <a:ea typeface="Noto Sans"/>
+                <a:cs typeface="Noto Sans"/>
+                <a:sym typeface="Noto Sans"/>
+              </a:rPr>
+              <a:t>inseridas</a:t>
+            </a:r>
+            <a:r>
+              <a:rPr lang="en-US" sz="2187" dirty="0">
+                <a:solidFill>
+                  <a:srgbClr val="000000"/>
+                </a:solidFill>
+                <a:ea typeface="Noto Sans"/>
+                <a:cs typeface="Noto Sans"/>
+                <a:sym typeface="Noto Sans"/>
+              </a:rPr>
+              <a:t> no </a:t>
+            </a:r>
+            <a:r>
+              <a:rPr lang="en-US" sz="2187" dirty="0" err="1">
+                <a:solidFill>
+                  <a:srgbClr val="000000"/>
+                </a:solidFill>
+                <a:ea typeface="Noto Sans"/>
+                <a:cs typeface="Noto Sans"/>
+                <a:sym typeface="Noto Sans"/>
+              </a:rPr>
+              <a:t>código</a:t>
+            </a:r>
+            <a:r>
+              <a:rPr lang="en-US" sz="2187" dirty="0">
+                <a:solidFill>
+                  <a:srgbClr val="000000"/>
+                </a:solidFill>
+                <a:ea typeface="Noto Sans"/>
+                <a:cs typeface="Noto Sans"/>
+                <a:sym typeface="Noto Sans"/>
+              </a:rPr>
+              <a:t> para </a:t>
+            </a:r>
+            <a:r>
+              <a:rPr lang="en-US" sz="2187" dirty="0" err="1">
+                <a:solidFill>
+                  <a:srgbClr val="000000"/>
+                </a:solidFill>
+                <a:ea typeface="Noto Sans"/>
+                <a:cs typeface="Noto Sans"/>
+                <a:sym typeface="Noto Sans"/>
+              </a:rPr>
+              <a:t>atrair</a:t>
+            </a:r>
+            <a:r>
+              <a:rPr lang="en-US" sz="2187" dirty="0">
+                <a:solidFill>
+                  <a:srgbClr val="000000"/>
+                </a:solidFill>
+                <a:ea typeface="Noto Sans"/>
+                <a:cs typeface="Noto Sans"/>
+                <a:sym typeface="Noto Sans"/>
+              </a:rPr>
+              <a:t> e </a:t>
+            </a:r>
+            <a:r>
+              <a:rPr lang="en-US" sz="2187" dirty="0" err="1">
+                <a:solidFill>
+                  <a:srgbClr val="000000"/>
+                </a:solidFill>
+                <a:ea typeface="Noto Sans"/>
+                <a:cs typeface="Noto Sans"/>
+                <a:sym typeface="Noto Sans"/>
+              </a:rPr>
+              <a:t>detectar</a:t>
+            </a:r>
+            <a:r>
+              <a:rPr lang="en-US" sz="2187" dirty="0">
+                <a:solidFill>
+                  <a:srgbClr val="000000"/>
+                </a:solidFill>
+                <a:ea typeface="Noto Sans"/>
+                <a:cs typeface="Noto Sans"/>
+                <a:sym typeface="Noto Sans"/>
+              </a:rPr>
+              <a:t> </a:t>
+            </a:r>
+            <a:r>
+              <a:rPr lang="en-US" sz="2187" dirty="0" err="1">
+                <a:solidFill>
+                  <a:srgbClr val="000000"/>
+                </a:solidFill>
+                <a:ea typeface="Noto Sans"/>
+                <a:cs typeface="Noto Sans"/>
+                <a:sym typeface="Noto Sans"/>
+              </a:rPr>
+              <a:t>invasores</a:t>
+            </a:r>
+            <a:r>
+              <a:rPr lang="en-US" sz="2187" dirty="0">
+                <a:solidFill>
+                  <a:srgbClr val="000000"/>
+                </a:solidFill>
+                <a:ea typeface="Noto Sans"/>
+                <a:cs typeface="Noto Sans"/>
+                <a:sym typeface="Noto Sans"/>
+              </a:rPr>
+              <a:t>.</a:t>
             </a:r>
           </a:p>
         </p:txBody>
@@ -7772,7 +7970,7 @@
         <p:spPr>
           <a:xfrm>
             <a:off x="6804717" y="5713209"/>
-            <a:ext cx="3544043" cy="481012"/>
+            <a:ext cx="3544043" cy="420115"/>
           </a:xfrm>
           <a:prstGeom prst="rect">
             <a:avLst/>
@@ -7794,7 +7992,7 @@
                 <a:solidFill>
                   <a:srgbClr val="000000"/>
                 </a:solidFill>
-                <a:latin typeface="Arimo"/>
+                <a:latin typeface="+mj-lt"/>
                 <a:ea typeface="Arimo"/>
                 <a:cs typeface="Arimo"/>
                 <a:sym typeface="Arimo"/>
@@ -7813,7 +8011,7 @@
         <p:spPr>
           <a:xfrm>
             <a:off x="6804717" y="6278613"/>
-            <a:ext cx="4678413" cy="992981"/>
+            <a:ext cx="4678413" cy="881973"/>
           </a:xfrm>
           <a:prstGeom prst="rect">
             <a:avLst/>
@@ -7835,7 +8033,6 @@
                 <a:solidFill>
                   <a:srgbClr val="000000"/>
                 </a:solidFill>
-                <a:latin typeface="Noto Sans"/>
                 <a:ea typeface="Noto Sans"/>
                 <a:cs typeface="Noto Sans"/>
                 <a:sym typeface="Noto Sans"/>
@@ -7854,7 +8051,7 @@
         <p:spPr>
           <a:xfrm>
             <a:off x="12333684" y="5713209"/>
-            <a:ext cx="3544043" cy="481012"/>
+            <a:ext cx="3544043" cy="420115"/>
           </a:xfrm>
           <a:prstGeom prst="rect">
             <a:avLst/>
@@ -7876,7 +8073,7 @@
                 <a:solidFill>
                   <a:srgbClr val="000000"/>
                 </a:solidFill>
-                <a:latin typeface="Arimo"/>
+                <a:latin typeface="+mj-lt"/>
                 <a:ea typeface="Arimo"/>
                 <a:cs typeface="Arimo"/>
                 <a:sym typeface="Arimo"/>
@@ -7895,7 +8092,7 @@
         <p:spPr>
           <a:xfrm>
             <a:off x="12333684" y="6278613"/>
-            <a:ext cx="4678413" cy="992981"/>
+            <a:ext cx="4678413" cy="881973"/>
           </a:xfrm>
           <a:prstGeom prst="rect">
             <a:avLst/>
@@ -7917,7 +8114,6 @@
                 <a:solidFill>
                   <a:srgbClr val="000000"/>
                 </a:solidFill>
-                <a:latin typeface="Noto Sans"/>
                 <a:ea typeface="Noto Sans"/>
                 <a:cs typeface="Noto Sans"/>
                 <a:sym typeface="Noto Sans"/>
@@ -8144,7 +8340,7 @@
               </a:lnSpc>
             </a:pPr>
             <a:r>
-              <a:rPr lang="en-US" sz="5559">
+              <a:rPr lang="en-US" sz="5559" dirty="0" err="1">
                 <a:solidFill>
                   <a:srgbClr val="000000"/>
                 </a:solidFill>
@@ -8153,7 +8349,67 @@
                 <a:cs typeface="Arimo"/>
                 <a:sym typeface="Arimo"/>
               </a:rPr>
-              <a:t>Aplicativo  PWA e Capacitor (Aplicativo Nativo)</a:t>
+              <a:t>Aplicativo</a:t>
+            </a:r>
+            <a:r>
+              <a:rPr lang="en-US" sz="5559" dirty="0">
+                <a:solidFill>
+                  <a:srgbClr val="000000"/>
+                </a:solidFill>
+                <a:latin typeface="Arimo"/>
+                <a:ea typeface="Arimo"/>
+                <a:cs typeface="Arimo"/>
+                <a:sym typeface="Arimo"/>
+              </a:rPr>
+              <a:t>  </a:t>
+            </a:r>
+            <a:r>
+              <a:rPr lang="en-US" sz="5559" dirty="0">
+                <a:solidFill>
+                  <a:srgbClr val="000000"/>
+                </a:solidFill>
+                <a:latin typeface="+mj-lt"/>
+                <a:ea typeface="Arimo"/>
+                <a:cs typeface="Arimo"/>
+                <a:sym typeface="Arimo"/>
+              </a:rPr>
+              <a:t>PWA</a:t>
+            </a:r>
+            <a:r>
+              <a:rPr lang="en-US" sz="5559" dirty="0">
+                <a:solidFill>
+                  <a:srgbClr val="000000"/>
+                </a:solidFill>
+                <a:latin typeface="Arimo"/>
+                <a:ea typeface="Arimo"/>
+                <a:cs typeface="Arimo"/>
+                <a:sym typeface="Arimo"/>
+              </a:rPr>
+              <a:t> e Capacitor (</a:t>
+            </a:r>
+            <a:r>
+              <a:rPr lang="en-US" sz="5559" dirty="0" err="1">
+                <a:solidFill>
+                  <a:srgbClr val="000000"/>
+                </a:solidFill>
+                <a:latin typeface="Arimo"/>
+                <a:ea typeface="Arimo"/>
+                <a:cs typeface="Arimo"/>
+                <a:sym typeface="Arimo"/>
+              </a:rPr>
+              <a:t>Aplicativo</a:t>
+            </a:r>
+            <a:r>
+              <a:rPr lang="en-US" sz="5559" dirty="0">
+                <a:solidFill>
+                  <a:srgbClr val="000000"/>
+                </a:solidFill>
+                <a:latin typeface="Arimo"/>
+                <a:ea typeface="Arimo"/>
+                <a:cs typeface="Arimo"/>
+                <a:sym typeface="Arimo"/>
+              </a:rPr>
+              <a:t> Nativo)</a:t>
             </a:r>
           </a:p>
         </p:txBody>
@@ -8479,7 +8735,7 @@
         <p:spPr>
           <a:xfrm>
             <a:off x="669798" y="2090014"/>
-            <a:ext cx="6792786" cy="900140"/>
+            <a:ext cx="6792786" cy="846386"/>
           </a:xfrm>
           <a:prstGeom prst="rect">
             <a:avLst/>
@@ -8497,7 +8753,19 @@
               </a:lnSpc>
             </a:pPr>
             <a:r>
-              <a:rPr lang="en-US" sz="5562">
+              <a:rPr lang="en-US" sz="5562" dirty="0" err="1">
+                <a:solidFill>
+                  <a:srgbClr val="000000"/>
+                </a:solidFill>
+                <a:latin typeface="+mj-lt"/>
+                <a:ea typeface="Arimo"/>
+                <a:cs typeface="Arimo"/>
+                <a:sym typeface="Arimo"/>
+              </a:rPr>
+              <a:t>Considerações</a:t>
+            </a:r>
+            <a:r>
+              <a:rPr lang="en-US" sz="5562" dirty="0">
                 <a:solidFill>
                   <a:srgbClr val="000000"/>
                 </a:solidFill>
@@ -8506,8 +8774,29 @@
                 <a:cs typeface="Arimo"/>
                 <a:sym typeface="Arimo"/>
               </a:rPr>
-              <a:t>Considerações Finais</a:t>
-            </a:r>
+              <a:t> </a:t>
+            </a:r>
+            <a:r>
+              <a:rPr lang="en-US" sz="5562" dirty="0" err="1">
+                <a:solidFill>
+                  <a:srgbClr val="000000"/>
+                </a:solidFill>
+                <a:latin typeface="Arimo"/>
+                <a:ea typeface="Arimo"/>
+                <a:cs typeface="Arimo"/>
+                <a:sym typeface="Arimo"/>
+              </a:rPr>
+              <a:t>Finais</a:t>
+            </a:r>
+            <a:endParaRPr lang="en-US" sz="5562" dirty="0">
+              <a:solidFill>
+                <a:srgbClr val="000000"/>
+              </a:solidFill>
+              <a:latin typeface="Arimo"/>
+              <a:ea typeface="Arimo"/>
+              <a:cs typeface="Arimo"/>
+              <a:sym typeface="Arimo"/>
+            </a:endParaRPr>
           </a:p>
         </p:txBody>
       </p:sp>
@@ -8520,7 +8809,7 @@
         <p:spPr>
           <a:xfrm>
             <a:off x="992238" y="4413799"/>
-            <a:ext cx="5198269" cy="830761"/>
+            <a:ext cx="5198269" cy="949684"/>
           </a:xfrm>
           <a:prstGeom prst="rect">
             <a:avLst/>
@@ -8538,11 +8827,11 @@
               </a:lnSpc>
             </a:pPr>
             <a:r>
-              <a:rPr lang="en-US" sz="7312">
-                <a:solidFill>
-                  <a:srgbClr val="000000"/>
-                </a:solidFill>
-                <a:latin typeface="Arimo"/>
+              <a:rPr lang="en-US" sz="7312" dirty="0">
+                <a:solidFill>
+                  <a:srgbClr val="000000"/>
+                </a:solidFill>
+                <a:latin typeface="+mj-lt"/>
                 <a:ea typeface="Arimo"/>
                 <a:cs typeface="Arimo"/>
                 <a:sym typeface="Arimo"/>
@@ -8561,7 +8850,7 @@
         <p:spPr>
           <a:xfrm>
             <a:off x="1819275" y="5560666"/>
-            <a:ext cx="3544043" cy="481012"/>
+            <a:ext cx="3544043" cy="420115"/>
           </a:xfrm>
           <a:prstGeom prst="rect">
             <a:avLst/>
@@ -8583,7 +8872,7 @@
                 <a:solidFill>
                   <a:srgbClr val="000000"/>
                 </a:solidFill>
-                <a:latin typeface="Arimo"/>
+                <a:latin typeface="+mj-lt"/>
                 <a:ea typeface="Arimo"/>
                 <a:cs typeface="Arimo"/>
                 <a:sym typeface="Arimo"/>
@@ -8602,7 +8891,7 @@
         <p:spPr>
           <a:xfrm>
             <a:off x="992238" y="6126061"/>
-            <a:ext cx="5198269" cy="992981"/>
+            <a:ext cx="5198269" cy="881973"/>
           </a:xfrm>
           <a:prstGeom prst="rect">
             <a:avLst/>
@@ -8624,7 +8913,7 @@
                 <a:solidFill>
                   <a:srgbClr val="000000"/>
                 </a:solidFill>
-                <a:latin typeface="Noto Sans"/>
+                <a:latin typeface="+mj-lt"/>
                 <a:ea typeface="Noto Sans"/>
                 <a:cs typeface="Noto Sans"/>
                 <a:sym typeface="Noto Sans"/>
@@ -8643,7 +8932,7 @@
         <p:spPr>
           <a:xfrm>
             <a:off x="6544866" y="4413799"/>
-            <a:ext cx="5198269" cy="830761"/>
+            <a:ext cx="5198269" cy="949684"/>
           </a:xfrm>
           <a:prstGeom prst="rect">
             <a:avLst/>
@@ -8665,7 +8954,7 @@
                 <a:solidFill>
                   <a:srgbClr val="000000"/>
                 </a:solidFill>
-                <a:latin typeface="Arimo"/>
+                <a:latin typeface="+mj-lt"/>
                 <a:ea typeface="Arimo"/>
                 <a:cs typeface="Arimo"/>
                 <a:sym typeface="Arimo"/>
@@ -8684,7 +8973,7 @@
         <p:spPr>
           <a:xfrm>
             <a:off x="7371902" y="5560666"/>
-            <a:ext cx="3544043" cy="481012"/>
+            <a:ext cx="3544043" cy="420115"/>
           </a:xfrm>
           <a:prstGeom prst="rect">
             <a:avLst/>
@@ -8706,7 +8995,7 @@
                 <a:solidFill>
                   <a:srgbClr val="000000"/>
                 </a:solidFill>
-                <a:latin typeface="Arimo"/>
+                <a:latin typeface="+mj-lt"/>
                 <a:ea typeface="Arimo"/>
                 <a:cs typeface="Arimo"/>
                 <a:sym typeface="Arimo"/>
@@ -8725,7 +9014,7 @@
         <p:spPr>
           <a:xfrm>
             <a:off x="6544866" y="6126061"/>
-            <a:ext cx="5198269" cy="992981"/>
+            <a:ext cx="5198269" cy="881973"/>
           </a:xfrm>
           <a:prstGeom prst="rect">
             <a:avLst/>
@@ -8747,7 +9036,7 @@
                 <a:solidFill>
                   <a:srgbClr val="000000"/>
                 </a:solidFill>
-                <a:latin typeface="Noto Sans"/>
+                <a:latin typeface="+mj-lt"/>
                 <a:ea typeface="Noto Sans"/>
                 <a:cs typeface="Noto Sans"/>
                 <a:sym typeface="Noto Sans"/>
@@ -8766,7 +9055,7 @@
         <p:spPr>
           <a:xfrm>
             <a:off x="12097493" y="4413799"/>
-            <a:ext cx="5198269" cy="830761"/>
+            <a:ext cx="5198269" cy="949684"/>
           </a:xfrm>
           <a:prstGeom prst="rect">
             <a:avLst/>
@@ -8788,7 +9077,7 @@
                 <a:solidFill>
                   <a:srgbClr val="000000"/>
                 </a:solidFill>
-                <a:latin typeface="Arimo"/>
+                <a:latin typeface="+mj-lt"/>
                 <a:ea typeface="Arimo"/>
                 <a:cs typeface="Arimo"/>
                 <a:sym typeface="Arimo"/>
@@ -8807,7 +9096,7 @@
         <p:spPr>
           <a:xfrm>
             <a:off x="13658001" y="5560666"/>
-            <a:ext cx="2077099" cy="449262"/>
+            <a:ext cx="2077099" cy="420115"/>
           </a:xfrm>
           <a:prstGeom prst="rect">
             <a:avLst/>
@@ -8829,7 +9118,7 @@
                 <a:solidFill>
                   <a:srgbClr val="000000"/>
                 </a:solidFill>
-                <a:latin typeface="Arimo"/>
+                <a:latin typeface="+mj-lt"/>
                 <a:ea typeface="Arimo"/>
                 <a:cs typeface="Arimo"/>
                 <a:sym typeface="Arimo"/>
@@ -8848,7 +9137,7 @@
         <p:spPr>
           <a:xfrm>
             <a:off x="12097493" y="6126061"/>
-            <a:ext cx="5198269" cy="1446609"/>
+            <a:ext cx="5198269" cy="1343638"/>
           </a:xfrm>
           <a:prstGeom prst="rect">
             <a:avLst/>
@@ -8870,7 +9159,7 @@
                 <a:solidFill>
                   <a:srgbClr val="000000"/>
                 </a:solidFill>
-                <a:latin typeface="Noto Sans"/>
+                <a:latin typeface="+mj-lt"/>
                 <a:ea typeface="Noto Sans"/>
                 <a:cs typeface="Noto Sans"/>
                 <a:sym typeface="Noto Sans"/>
@@ -8935,11 +9224,10 @@
               </a:spcBef>
             </a:pPr>
             <a:r>
-              <a:rPr lang="en-US" sz="2599">
-                <a:solidFill>
-                  <a:srgbClr val="000000"/>
-                </a:solidFill>
-                <a:latin typeface="Arimo"/>
+              <a:rPr lang="en-US" sz="2599" dirty="0">
+                <a:solidFill>
+                  <a:srgbClr val="000000"/>
+                </a:solidFill>
                 <a:ea typeface="Arimo"/>
                 <a:cs typeface="Arimo"/>
                 <a:sym typeface="Arimo"/>
@@ -8956,11 +9244,10 @@
                 <a:spcPct val="0"/>
               </a:spcBef>
             </a:pPr>
-            <a:endParaRPr lang="en-US" sz="2599">
+            <a:endParaRPr lang="en-US" sz="2599" dirty="0">
               <a:solidFill>
                 <a:srgbClr val="000000"/>
               </a:solidFill>
-              <a:latin typeface="Arimo"/>
               <a:ea typeface="Arimo"/>
               <a:cs typeface="Arimo"/>
               <a:sym typeface="Arimo"/>
@@ -8975,11 +9262,10 @@
                 <a:spcPct val="0"/>
               </a:spcBef>
             </a:pPr>
-            <a:endParaRPr lang="en-US" sz="2599">
+            <a:endParaRPr lang="en-US" sz="2599" dirty="0">
               <a:solidFill>
                 <a:srgbClr val="000000"/>
               </a:solidFill>
-              <a:latin typeface="Arimo"/>
               <a:ea typeface="Arimo"/>
               <a:cs typeface="Arimo"/>
               <a:sym typeface="Arimo"/>
@@ -8995,40 +9281,323 @@
               </a:spcBef>
             </a:pPr>
             <a:r>
-              <a:rPr lang="en-US" sz="2599">
-                <a:solidFill>
-                  <a:srgbClr val="000000"/>
-                </a:solidFill>
-                <a:latin typeface="Arimo"/>
-                <a:ea typeface="Arimo"/>
-                <a:cs typeface="Arimo"/>
-                <a:sym typeface="Arimo"/>
-              </a:rPr>
-              <a:t> BRASIL. [Portal da Legislação]. </a:t>
-            </a:r>
-            <a:r>
-              <a:rPr lang="en-US" sz="2599" b="1">
-                <a:solidFill>
-                  <a:srgbClr val="000000"/>
-                </a:solidFill>
-                <a:latin typeface="Arimo Bold"/>
+              <a:rPr lang="en-US" sz="2599" dirty="0">
+                <a:solidFill>
+                  <a:srgbClr val="000000"/>
+                </a:solidFill>
+                <a:ea typeface="Arimo"/>
+                <a:cs typeface="Arimo"/>
+                <a:sym typeface="Arimo"/>
+              </a:rPr>
+              <a:t> BRASIL. [Portal da </a:t>
+            </a:r>
+            <a:r>
+              <a:rPr lang="en-US" sz="2599" dirty="0" err="1">
+                <a:solidFill>
+                  <a:srgbClr val="000000"/>
+                </a:solidFill>
+                <a:ea typeface="Arimo"/>
+                <a:cs typeface="Arimo"/>
+                <a:sym typeface="Arimo"/>
+              </a:rPr>
+              <a:t>Legislação</a:t>
+            </a:r>
+            <a:r>
+              <a:rPr lang="en-US" sz="2599" dirty="0">
+                <a:solidFill>
+                  <a:srgbClr val="000000"/>
+                </a:solidFill>
+                <a:ea typeface="Arimo"/>
+                <a:cs typeface="Arimo"/>
+                <a:sym typeface="Arimo"/>
+              </a:rPr>
+              <a:t>]. </a:t>
+            </a:r>
+            <a:r>
+              <a:rPr lang="en-US" sz="2599" b="1" dirty="0">
+                <a:solidFill>
+                  <a:srgbClr val="000000"/>
+                </a:solidFill>
                 <a:ea typeface="Arimo Bold"/>
                 <a:cs typeface="Arimo Bold"/>
                 <a:sym typeface="Arimo Bold"/>
               </a:rPr>
-              <a:t>Lei nº 13.146, de 6 de julho de 2015</a:t>
-            </a:r>
-            <a:r>
-              <a:rPr lang="en-US" sz="2599">
-                <a:solidFill>
-                  <a:srgbClr val="000000"/>
-                </a:solidFill>
-                <a:latin typeface="Arimo"/>
-                <a:ea typeface="Arimo"/>
-                <a:cs typeface="Arimo"/>
-                <a:sym typeface="Arimo"/>
-              </a:rPr>
-              <a:t>. Institui a Lei Brasileira de Inclusão da Pessoa com Deficiência (Estatuto da Pessoa com Deficiência). Brasília, DF: Presidência da República, [2015]. Disponível em: http://www.planalto.gov.br/ccivil_03/_ato2015 2018/2015/lei/l13146.htm. Acesso em: 15 dez. 2025. </a:t>
+              <a:t>Lei nº 13.146, de 6 de </a:t>
+            </a:r>
+            <a:r>
+              <a:rPr lang="en-US" sz="2599" b="1" dirty="0" err="1">
+                <a:solidFill>
+                  <a:srgbClr val="000000"/>
+                </a:solidFill>
+                <a:ea typeface="Arimo Bold"/>
+                <a:cs typeface="Arimo Bold"/>
+                <a:sym typeface="Arimo Bold"/>
+              </a:rPr>
+              <a:t>julho</a:t>
+            </a:r>
+            <a:r>
+              <a:rPr lang="en-US" sz="2599" b="1" dirty="0">
+                <a:solidFill>
+                  <a:srgbClr val="000000"/>
+                </a:solidFill>
+                <a:ea typeface="Arimo Bold"/>
+                <a:cs typeface="Arimo Bold"/>
+                <a:sym typeface="Arimo Bold"/>
+              </a:rPr>
+              <a:t> de 2015</a:t>
+            </a:r>
+            <a:r>
+              <a:rPr lang="en-US" sz="2599" dirty="0">
+                <a:solidFill>
+                  <a:srgbClr val="000000"/>
+                </a:solidFill>
+                <a:ea typeface="Arimo"/>
+                <a:cs typeface="Arimo"/>
+                <a:sym typeface="Arimo"/>
+              </a:rPr>
+              <a:t>. </a:t>
+            </a:r>
+            <a:r>
+              <a:rPr lang="en-US" sz="2599" dirty="0" err="1">
+                <a:solidFill>
+                  <a:srgbClr val="000000"/>
+                </a:solidFill>
+                <a:ea typeface="Arimo"/>
+                <a:cs typeface="Arimo"/>
+                <a:sym typeface="Arimo"/>
+              </a:rPr>
+              <a:t>Institui</a:t>
+            </a:r>
+            <a:r>
+              <a:rPr lang="en-US" sz="2599" dirty="0">
+                <a:solidFill>
+                  <a:srgbClr val="000000"/>
+                </a:solidFill>
+                <a:ea typeface="Arimo"/>
+                <a:cs typeface="Arimo"/>
+                <a:sym typeface="Arimo"/>
+              </a:rPr>
+              <a:t> a Lei Brasileira de </a:t>
+            </a:r>
+            <a:r>
+              <a:rPr lang="en-US" sz="2599" dirty="0" err="1">
+                <a:solidFill>
+                  <a:srgbClr val="000000"/>
+                </a:solidFill>
+                <a:ea typeface="Arimo"/>
+                <a:cs typeface="Arimo"/>
+                <a:sym typeface="Arimo"/>
+              </a:rPr>
+              <a:t>Inclusão</a:t>
+            </a:r>
+            <a:r>
+              <a:rPr lang="en-US" sz="2599" dirty="0">
+                <a:solidFill>
+                  <a:srgbClr val="000000"/>
+                </a:solidFill>
+                <a:ea typeface="Arimo"/>
+                <a:cs typeface="Arimo"/>
+                <a:sym typeface="Arimo"/>
+              </a:rPr>
+              <a:t> da Pessoa com </a:t>
+            </a:r>
+            <a:r>
+              <a:rPr lang="en-US" sz="2599" dirty="0" err="1">
+                <a:solidFill>
+                  <a:srgbClr val="000000"/>
+                </a:solidFill>
+                <a:ea typeface="Arimo"/>
+                <a:cs typeface="Arimo"/>
+                <a:sym typeface="Arimo"/>
+              </a:rPr>
+              <a:t>Deficiência</a:t>
+            </a:r>
+            <a:r>
+              <a:rPr lang="en-US" sz="2599" dirty="0">
+                <a:solidFill>
+                  <a:srgbClr val="000000"/>
+                </a:solidFill>
+                <a:ea typeface="Arimo"/>
+                <a:cs typeface="Arimo"/>
+                <a:sym typeface="Arimo"/>
+              </a:rPr>
+              <a:t> (</a:t>
+            </a:r>
+            <a:r>
+              <a:rPr lang="en-US" sz="2599" dirty="0" err="1">
+                <a:solidFill>
+                  <a:srgbClr val="000000"/>
+                </a:solidFill>
+                <a:ea typeface="Arimo"/>
+                <a:cs typeface="Arimo"/>
+                <a:sym typeface="Arimo"/>
+              </a:rPr>
+              <a:t>Estatuto</a:t>
+            </a:r>
+            <a:r>
+              <a:rPr lang="en-US" sz="2599" dirty="0">
+                <a:solidFill>
+                  <a:srgbClr val="000000"/>
+                </a:solidFill>
+                <a:ea typeface="Arimo"/>
+                <a:cs typeface="Arimo"/>
+                <a:sym typeface="Arimo"/>
+              </a:rPr>
+              <a:t> da Pessoa com </a:t>
+            </a:r>
+            <a:r>
+              <a:rPr lang="en-US" sz="2599" dirty="0" err="1">
+                <a:solidFill>
+                  <a:srgbClr val="000000"/>
+                </a:solidFill>
+                <a:ea typeface="Arimo"/>
+                <a:cs typeface="Arimo"/>
+                <a:sym typeface="Arimo"/>
+              </a:rPr>
+              <a:t>Deficiência</a:t>
+            </a:r>
+            <a:r>
+              <a:rPr lang="en-US" sz="2599" dirty="0">
+                <a:solidFill>
+                  <a:srgbClr val="000000"/>
+                </a:solidFill>
+                <a:ea typeface="Arimo"/>
+                <a:cs typeface="Arimo"/>
+                <a:sym typeface="Arimo"/>
+              </a:rPr>
+              <a:t>). Brasília, DF: </a:t>
+            </a:r>
+            <a:r>
+              <a:rPr lang="en-US" sz="2599" dirty="0" err="1">
+                <a:solidFill>
+                  <a:srgbClr val="000000"/>
+                </a:solidFill>
+                <a:ea typeface="Arimo"/>
+                <a:cs typeface="Arimo"/>
+                <a:sym typeface="Arimo"/>
+              </a:rPr>
+              <a:t>Presidência</a:t>
+            </a:r>
+            <a:r>
+              <a:rPr lang="en-US" sz="2599" dirty="0">
+                <a:solidFill>
+                  <a:srgbClr val="000000"/>
+                </a:solidFill>
+                <a:ea typeface="Arimo"/>
+                <a:cs typeface="Arimo"/>
+                <a:sym typeface="Arimo"/>
+              </a:rPr>
+              <a:t> da República, [2015]. </a:t>
+            </a:r>
+            <a:r>
+              <a:rPr lang="en-US" sz="2599" dirty="0" err="1">
+                <a:solidFill>
+                  <a:srgbClr val="000000"/>
+                </a:solidFill>
+                <a:ea typeface="Arimo"/>
+                <a:cs typeface="Arimo"/>
+                <a:sym typeface="Arimo"/>
+              </a:rPr>
+              <a:t>Disponível</a:t>
+            </a:r>
+            <a:r>
+              <a:rPr lang="en-US" sz="2599" dirty="0">
+                <a:solidFill>
+                  <a:srgbClr val="000000"/>
+                </a:solidFill>
+                <a:ea typeface="Arimo"/>
+                <a:cs typeface="Arimo"/>
+                <a:sym typeface="Arimo"/>
+              </a:rPr>
+              <a:t> </a:t>
+            </a:r>
+            <a:r>
+              <a:rPr lang="en-US" sz="2599" dirty="0" err="1">
+                <a:solidFill>
+                  <a:srgbClr val="000000"/>
+                </a:solidFill>
+                <a:ea typeface="Arimo"/>
+                <a:cs typeface="Arimo"/>
+                <a:sym typeface="Arimo"/>
+              </a:rPr>
+              <a:t>em</a:t>
+            </a:r>
+            <a:r>
+              <a:rPr lang="en-US" sz="2599" dirty="0">
+                <a:solidFill>
+                  <a:srgbClr val="000000"/>
+                </a:solidFill>
+                <a:ea typeface="Arimo"/>
+                <a:cs typeface="Arimo"/>
+                <a:sym typeface="Arimo"/>
+              </a:rPr>
+              <a:t>: http://www.planalto.gov.br/ccivil_03/_ato2015 2018/2015/lei/l13146.htm. </a:t>
+            </a:r>
+            <a:r>
+              <a:rPr lang="en-US" sz="2599" dirty="0" err="1">
+                <a:solidFill>
+                  <a:srgbClr val="000000"/>
+                </a:solidFill>
+                <a:ea typeface="Arimo"/>
+                <a:cs typeface="Arimo"/>
+                <a:sym typeface="Arimo"/>
+              </a:rPr>
+              <a:t>Acesso</a:t>
+            </a:r>
+            <a:r>
+              <a:rPr lang="en-US" sz="2599" dirty="0">
+                <a:solidFill>
+                  <a:srgbClr val="000000"/>
+                </a:solidFill>
+                <a:ea typeface="Arimo"/>
+                <a:cs typeface="Arimo"/>
+                <a:sym typeface="Arimo"/>
+              </a:rPr>
+              <a:t> </a:t>
+            </a:r>
+            <a:r>
+              <a:rPr lang="en-US" sz="2599" dirty="0" err="1">
+                <a:solidFill>
+                  <a:srgbClr val="000000"/>
+                </a:solidFill>
+                <a:ea typeface="Arimo"/>
+                <a:cs typeface="Arimo"/>
+                <a:sym typeface="Arimo"/>
+              </a:rPr>
+              <a:t>em</a:t>
+            </a:r>
+            <a:r>
+              <a:rPr lang="en-US" sz="2599" dirty="0">
+                <a:solidFill>
+                  <a:srgbClr val="000000"/>
+                </a:solidFill>
+                <a:ea typeface="Arimo"/>
+                <a:cs typeface="Arimo"/>
+                <a:sym typeface="Arimo"/>
+              </a:rPr>
+              <a:t>: 15 </a:t>
+            </a:r>
+            <a:r>
+              <a:rPr lang="en-US" sz="2599" dirty="0" err="1">
+                <a:solidFill>
+                  <a:srgbClr val="000000"/>
+                </a:solidFill>
+                <a:ea typeface="Arimo"/>
+                <a:cs typeface="Arimo"/>
+                <a:sym typeface="Arimo"/>
+              </a:rPr>
+              <a:t>dez</a:t>
+            </a:r>
+            <a:r>
+              <a:rPr lang="en-US" sz="2599" dirty="0">
+                <a:solidFill>
+                  <a:srgbClr val="000000"/>
+                </a:solidFill>
+                <a:ea typeface="Arimo"/>
+                <a:cs typeface="Arimo"/>
+                <a:sym typeface="Arimo"/>
+              </a:rPr>
+              <a:t>. 2025. </a:t>
             </a:r>
           </a:p>
           <a:p>
@@ -9040,11 +9609,10 @@
                 <a:spcPct val="0"/>
               </a:spcBef>
             </a:pPr>
-            <a:endParaRPr lang="en-US" sz="2599">
+            <a:endParaRPr lang="en-US" sz="2599" dirty="0">
               <a:solidFill>
                 <a:srgbClr val="000000"/>
               </a:solidFill>
-              <a:latin typeface="Arimo"/>
               <a:ea typeface="Arimo"/>
               <a:cs typeface="Arimo"/>
               <a:sym typeface="Arimo"/>
@@ -9060,40 +9628,257 @@
               </a:spcBef>
             </a:pPr>
             <a:r>
-              <a:rPr lang="en-US" sz="2599">
-                <a:solidFill>
-                  <a:srgbClr val="000000"/>
-                </a:solidFill>
-                <a:latin typeface="Arimo"/>
-                <a:ea typeface="Arimo"/>
-                <a:cs typeface="Arimo"/>
-                <a:sym typeface="Arimo"/>
-              </a:rPr>
-              <a:t>BRASIL. [Portal da Legislação]. </a:t>
-            </a:r>
-            <a:r>
-              <a:rPr lang="en-US" sz="2599" b="1">
-                <a:solidFill>
-                  <a:srgbClr val="000000"/>
-                </a:solidFill>
-                <a:latin typeface="Arimo Bold"/>
+              <a:rPr lang="en-US" sz="2599" dirty="0">
+                <a:solidFill>
+                  <a:srgbClr val="000000"/>
+                </a:solidFill>
+                <a:ea typeface="Arimo"/>
+                <a:cs typeface="Arimo"/>
+                <a:sym typeface="Arimo"/>
+              </a:rPr>
+              <a:t>BRASIL. [Portal da </a:t>
+            </a:r>
+            <a:r>
+              <a:rPr lang="en-US" sz="2599" dirty="0" err="1">
+                <a:solidFill>
+                  <a:srgbClr val="000000"/>
+                </a:solidFill>
+                <a:ea typeface="Arimo"/>
+                <a:cs typeface="Arimo"/>
+                <a:sym typeface="Arimo"/>
+              </a:rPr>
+              <a:t>Legislação</a:t>
+            </a:r>
+            <a:r>
+              <a:rPr lang="en-US" sz="2599" dirty="0">
+                <a:solidFill>
+                  <a:srgbClr val="000000"/>
+                </a:solidFill>
+                <a:ea typeface="Arimo"/>
+                <a:cs typeface="Arimo"/>
+                <a:sym typeface="Arimo"/>
+              </a:rPr>
+              <a:t>]. </a:t>
+            </a:r>
+            <a:r>
+              <a:rPr lang="en-US" sz="2599" b="1" dirty="0">
+                <a:solidFill>
+                  <a:srgbClr val="000000"/>
+                </a:solidFill>
                 <a:ea typeface="Arimo Bold"/>
                 <a:cs typeface="Arimo Bold"/>
                 <a:sym typeface="Arimo Bold"/>
               </a:rPr>
-              <a:t>Lei nº 13.709, de 14 de agosto de 2018</a:t>
-            </a:r>
-            <a:r>
-              <a:rPr lang="en-US" sz="2599">
-                <a:solidFill>
-                  <a:srgbClr val="000000"/>
-                </a:solidFill>
-                <a:latin typeface="Arimo"/>
-                <a:ea typeface="Arimo"/>
-                <a:cs typeface="Arimo"/>
-                <a:sym typeface="Arimo"/>
-              </a:rPr>
-              <a:t>. Lei Geral de Proteção de Dados Pessoais (LGPD). Brasília, DF: Presidência da República, [2018]. Disponível em: http://www.planalto.gov.br/ccivil_03/_ato2017-2020/2018/lei/l13709.htm. Acesso em: 15 dez. 2025. </a:t>
+              <a:t>Lei nº 13.709, de 14 de </a:t>
+            </a:r>
+            <a:r>
+              <a:rPr lang="en-US" sz="2599" b="1" dirty="0" err="1">
+                <a:solidFill>
+                  <a:srgbClr val="000000"/>
+                </a:solidFill>
+                <a:ea typeface="Arimo Bold"/>
+                <a:cs typeface="Arimo Bold"/>
+                <a:sym typeface="Arimo Bold"/>
+              </a:rPr>
+              <a:t>agosto</a:t>
+            </a:r>
+            <a:r>
+              <a:rPr lang="en-US" sz="2599" b="1" dirty="0">
+                <a:solidFill>
+                  <a:srgbClr val="000000"/>
+                </a:solidFill>
+                <a:ea typeface="Arimo Bold"/>
+                <a:cs typeface="Arimo Bold"/>
+                <a:sym typeface="Arimo Bold"/>
+              </a:rPr>
+              <a:t> de 2018</a:t>
+            </a:r>
+            <a:r>
+              <a:rPr lang="en-US" sz="2599" dirty="0">
+                <a:solidFill>
+                  <a:srgbClr val="000000"/>
+                </a:solidFill>
+                <a:ea typeface="Arimo"/>
+                <a:cs typeface="Arimo"/>
+                <a:sym typeface="Arimo"/>
+              </a:rPr>
+              <a:t>. Lei Geral de </a:t>
+            </a:r>
+            <a:r>
+              <a:rPr lang="en-US" sz="2599" dirty="0" err="1">
+                <a:solidFill>
+                  <a:srgbClr val="000000"/>
+                </a:solidFill>
+                <a:ea typeface="Arimo"/>
+                <a:cs typeface="Arimo"/>
+                <a:sym typeface="Arimo"/>
+              </a:rPr>
+              <a:t>Proteção</a:t>
+            </a:r>
+            <a:r>
+              <a:rPr lang="en-US" sz="2599" dirty="0">
+                <a:solidFill>
+                  <a:srgbClr val="000000"/>
+                </a:solidFill>
+                <a:ea typeface="Arimo"/>
+                <a:cs typeface="Arimo"/>
+                <a:sym typeface="Arimo"/>
+              </a:rPr>
+              <a:t> de Dados </a:t>
+            </a:r>
+            <a:r>
+              <a:rPr lang="en-US" sz="2599" dirty="0" err="1">
+                <a:solidFill>
+                  <a:srgbClr val="000000"/>
+                </a:solidFill>
+                <a:ea typeface="Arimo"/>
+                <a:cs typeface="Arimo"/>
+                <a:sym typeface="Arimo"/>
+              </a:rPr>
+              <a:t>Pessoais</a:t>
+            </a:r>
+            <a:r>
+              <a:rPr lang="en-US" sz="2599" dirty="0">
+                <a:solidFill>
+                  <a:srgbClr val="000000"/>
+                </a:solidFill>
+                <a:ea typeface="Arimo"/>
+                <a:cs typeface="Arimo"/>
+                <a:sym typeface="Arimo"/>
+              </a:rPr>
+              <a:t> (LGPD). Brasília, DF: </a:t>
+            </a:r>
+            <a:r>
+              <a:rPr lang="en-US" sz="2599" dirty="0" err="1">
+                <a:solidFill>
+                  <a:srgbClr val="000000"/>
+                </a:solidFill>
+                <a:ea typeface="Arimo"/>
+                <a:cs typeface="Arimo"/>
+                <a:sym typeface="Arimo"/>
+              </a:rPr>
+              <a:t>Presidência</a:t>
+            </a:r>
+            <a:r>
+              <a:rPr lang="en-US" sz="2599" dirty="0">
+                <a:solidFill>
+                  <a:srgbClr val="000000"/>
+                </a:solidFill>
+                <a:ea typeface="Arimo"/>
+                <a:cs typeface="Arimo"/>
+                <a:sym typeface="Arimo"/>
+              </a:rPr>
+              <a:t> da República, [2018]. </a:t>
+            </a:r>
+            <a:r>
+              <a:rPr lang="en-US" sz="2599" dirty="0" err="1">
+                <a:solidFill>
+                  <a:srgbClr val="000000"/>
+                </a:solidFill>
+                <a:ea typeface="Arimo"/>
+                <a:cs typeface="Arimo"/>
+                <a:sym typeface="Arimo"/>
+              </a:rPr>
+              <a:t>Disponível</a:t>
+            </a:r>
+            <a:r>
+              <a:rPr lang="en-US" sz="2599" dirty="0">
+                <a:solidFill>
+                  <a:srgbClr val="000000"/>
+                </a:solidFill>
+                <a:ea typeface="Arimo"/>
+                <a:cs typeface="Arimo"/>
+                <a:sym typeface="Arimo"/>
+              </a:rPr>
+              <a:t> </a:t>
+            </a:r>
+            <a:r>
+              <a:rPr lang="en-US" sz="2599" dirty="0" err="1">
+                <a:solidFill>
+                  <a:srgbClr val="000000"/>
+                </a:solidFill>
+                <a:ea typeface="Arimo"/>
+                <a:cs typeface="Arimo"/>
+                <a:sym typeface="Arimo"/>
+              </a:rPr>
+              <a:t>em</a:t>
+            </a:r>
+            <a:r>
+              <a:rPr lang="en-US" sz="2599" dirty="0">
+                <a:solidFill>
+                  <a:srgbClr val="000000"/>
+                </a:solidFill>
+                <a:ea typeface="Arimo"/>
+                <a:cs typeface="Arimo"/>
+                <a:sym typeface="Arimo"/>
+              </a:rPr>
+              <a:t>: http://www.planalto.gov.br/ccivil_03/_ato2017-2020/2018/lei/l13709.htm. </a:t>
+            </a:r>
+            <a:r>
+              <a:rPr lang="en-US" sz="2599" dirty="0" err="1">
+                <a:solidFill>
+                  <a:srgbClr val="000000"/>
+                </a:solidFill>
+                <a:ea typeface="Arimo"/>
+                <a:cs typeface="Arimo"/>
+                <a:sym typeface="Arimo"/>
+              </a:rPr>
+              <a:t>Acesso</a:t>
+            </a:r>
+            <a:r>
+              <a:rPr lang="en-US" sz="2599" dirty="0">
+                <a:solidFill>
+                  <a:srgbClr val="000000"/>
+                </a:solidFill>
+                <a:ea typeface="Arimo"/>
+                <a:cs typeface="Arimo"/>
+                <a:sym typeface="Arimo"/>
+              </a:rPr>
+              <a:t> </a:t>
+            </a:r>
+            <a:r>
+              <a:rPr lang="en-US" sz="2599" dirty="0" err="1">
+                <a:solidFill>
+                  <a:srgbClr val="000000"/>
+                </a:solidFill>
+                <a:ea typeface="Arimo"/>
+                <a:cs typeface="Arimo"/>
+                <a:sym typeface="Arimo"/>
+              </a:rPr>
+              <a:t>em</a:t>
+            </a:r>
+            <a:r>
+              <a:rPr lang="en-US" sz="2599" dirty="0">
+                <a:solidFill>
+                  <a:srgbClr val="000000"/>
+                </a:solidFill>
+                <a:ea typeface="Arimo"/>
+                <a:cs typeface="Arimo"/>
+                <a:sym typeface="Arimo"/>
+              </a:rPr>
+              <a:t>: 15 </a:t>
+            </a:r>
+            <a:r>
+              <a:rPr lang="en-US" sz="2599" dirty="0" err="1">
+                <a:solidFill>
+                  <a:srgbClr val="000000"/>
+                </a:solidFill>
+                <a:ea typeface="Arimo"/>
+                <a:cs typeface="Arimo"/>
+                <a:sym typeface="Arimo"/>
+              </a:rPr>
+              <a:t>dez</a:t>
+            </a:r>
+            <a:r>
+              <a:rPr lang="en-US" sz="2599" dirty="0">
+                <a:solidFill>
+                  <a:srgbClr val="000000"/>
+                </a:solidFill>
+                <a:ea typeface="Arimo"/>
+                <a:cs typeface="Arimo"/>
+                <a:sym typeface="Arimo"/>
+              </a:rPr>
+              <a:t>. 2025. </a:t>
             </a:r>
           </a:p>
           <a:p>
@@ -9105,11 +9890,10 @@
                 <a:spcPct val="0"/>
               </a:spcBef>
             </a:pPr>
-            <a:endParaRPr lang="en-US" sz="2599">
+            <a:endParaRPr lang="en-US" sz="2599" dirty="0">
               <a:solidFill>
                 <a:srgbClr val="000000"/>
               </a:solidFill>
-              <a:latin typeface="Arimo"/>
               <a:ea typeface="Arimo"/>
               <a:cs typeface="Arimo"/>
               <a:sym typeface="Arimo"/>
@@ -9125,11 +9909,10 @@
               </a:spcBef>
             </a:pPr>
             <a:r>
-              <a:rPr lang="en-US" sz="2599">
-                <a:solidFill>
-                  <a:srgbClr val="000000"/>
-                </a:solidFill>
-                <a:latin typeface="Arimo"/>
+              <a:rPr lang="en-US" sz="2599" dirty="0">
+                <a:solidFill>
+                  <a:srgbClr val="000000"/>
+                </a:solidFill>
                 <a:ea typeface="Arimo"/>
                 <a:cs typeface="Arimo"/>
                 <a:sym typeface="Arimo"/>
@@ -9137,28 +9920,565 @@
               <a:t>BRASIL. </a:t>
             </a:r>
             <a:r>
-              <a:rPr lang="en-US" sz="2599" b="1">
-                <a:solidFill>
-                  <a:srgbClr val="000000"/>
-                </a:solidFill>
-                <a:latin typeface="Arimo Bold"/>
+              <a:rPr lang="en-US" sz="2599" b="1" dirty="0" err="1">
+                <a:solidFill>
+                  <a:srgbClr val="000000"/>
+                </a:solidFill>
                 <a:ea typeface="Arimo Bold"/>
                 <a:cs typeface="Arimo Bold"/>
                 <a:sym typeface="Arimo Bold"/>
               </a:rPr>
-              <a:t>Decreto nº 10.502, de 30 de setembro de 2020</a:t>
-            </a:r>
-            <a:r>
-              <a:rPr lang="en-US" sz="2599">
-                <a:solidFill>
-                  <a:srgbClr val="000000"/>
-                </a:solidFill>
-                <a:latin typeface="Arimo"/>
-                <a:ea typeface="Arimo"/>
-                <a:cs typeface="Arimo"/>
-                <a:sym typeface="Arimo"/>
-              </a:rPr>
-              <a:t>. Institui a Política Nacional de Educação Especial: Equitativa, Inclusiva e com Aprendizado ao Longo da Vida. Brasília, DF: Presidência da República, 2020. LIMA, Marcos Guilherme Oliveira. Gestão Atípicos: Sistema Web para Gestão Especializada de Alunos Atípicos na Educação Inclusiva. 2025. Repositório de código (GitHub). Disponível em: https://github.com/z12guilherme/gestao_atipicos. Acesso em: 19 dez. 2025. </a:t>
+              <a:t>Decreto</a:t>
+            </a:r>
+            <a:r>
+              <a:rPr lang="en-US" sz="2599" b="1" dirty="0">
+                <a:solidFill>
+                  <a:srgbClr val="000000"/>
+                </a:solidFill>
+                <a:ea typeface="Arimo Bold"/>
+                <a:cs typeface="Arimo Bold"/>
+                <a:sym typeface="Arimo Bold"/>
+              </a:rPr>
+              <a:t> nº 10.502, de 30 de </a:t>
+            </a:r>
+            <a:r>
+              <a:rPr lang="en-US" sz="2599" b="1" dirty="0" err="1">
+                <a:solidFill>
+                  <a:srgbClr val="000000"/>
+                </a:solidFill>
+                <a:ea typeface="Arimo Bold"/>
+                <a:cs typeface="Arimo Bold"/>
+                <a:sym typeface="Arimo Bold"/>
+              </a:rPr>
+              <a:t>setembro</a:t>
+            </a:r>
+            <a:r>
+              <a:rPr lang="en-US" sz="2599" b="1" dirty="0">
+                <a:solidFill>
+                  <a:srgbClr val="000000"/>
+                </a:solidFill>
+                <a:ea typeface="Arimo Bold"/>
+                <a:cs typeface="Arimo Bold"/>
+                <a:sym typeface="Arimo Bold"/>
+              </a:rPr>
+              <a:t> de 2020</a:t>
+            </a:r>
+            <a:r>
+              <a:rPr lang="en-US" sz="2599" dirty="0">
+                <a:solidFill>
+                  <a:srgbClr val="000000"/>
+                </a:solidFill>
+                <a:ea typeface="Arimo"/>
+                <a:cs typeface="Arimo"/>
+                <a:sym typeface="Arimo"/>
+              </a:rPr>
+              <a:t>. </a:t>
+            </a:r>
+            <a:r>
+              <a:rPr lang="en-US" sz="2599" dirty="0" err="1">
+                <a:solidFill>
+                  <a:srgbClr val="000000"/>
+                </a:solidFill>
+                <a:ea typeface="Arimo"/>
+                <a:cs typeface="Arimo"/>
+                <a:sym typeface="Arimo"/>
+              </a:rPr>
+              <a:t>Institui</a:t>
+            </a:r>
+            <a:r>
+              <a:rPr lang="en-US" sz="2599" dirty="0">
+                <a:solidFill>
+                  <a:srgbClr val="000000"/>
+                </a:solidFill>
+                <a:ea typeface="Arimo"/>
+                <a:cs typeface="Arimo"/>
+                <a:sym typeface="Arimo"/>
+              </a:rPr>
+              <a:t> a Política Nacional de </a:t>
+            </a:r>
+            <a:r>
+              <a:rPr lang="en-US" sz="2599" dirty="0" err="1">
+                <a:solidFill>
+                  <a:srgbClr val="000000"/>
+                </a:solidFill>
+                <a:ea typeface="Arimo"/>
+                <a:cs typeface="Arimo"/>
+                <a:sym typeface="Arimo"/>
+              </a:rPr>
+              <a:t>Educação</a:t>
+            </a:r>
+            <a:r>
+              <a:rPr lang="en-US" sz="2599" dirty="0">
+                <a:solidFill>
+                  <a:srgbClr val="000000"/>
+                </a:solidFill>
+                <a:ea typeface="Arimo"/>
+                <a:cs typeface="Arimo"/>
+                <a:sym typeface="Arimo"/>
+              </a:rPr>
+              <a:t> Especial: </a:t>
+            </a:r>
+            <a:r>
+              <a:rPr lang="en-US" sz="2599" dirty="0" err="1">
+                <a:solidFill>
+                  <a:srgbClr val="000000"/>
+                </a:solidFill>
+                <a:ea typeface="Arimo"/>
+                <a:cs typeface="Arimo"/>
+                <a:sym typeface="Arimo"/>
+              </a:rPr>
+              <a:t>Equitativa</a:t>
+            </a:r>
+            <a:r>
+              <a:rPr lang="en-US" sz="2599" dirty="0">
+                <a:solidFill>
+                  <a:srgbClr val="000000"/>
+                </a:solidFill>
+                <a:ea typeface="Arimo"/>
+                <a:cs typeface="Arimo"/>
+                <a:sym typeface="Arimo"/>
+              </a:rPr>
+              <a:t>, </a:t>
+            </a:r>
+            <a:r>
+              <a:rPr lang="en-US" sz="2599" dirty="0" err="1">
+                <a:solidFill>
+                  <a:srgbClr val="000000"/>
+                </a:solidFill>
+                <a:ea typeface="Arimo"/>
+                <a:cs typeface="Arimo"/>
+                <a:sym typeface="Arimo"/>
+              </a:rPr>
+              <a:t>Inclusiva</a:t>
+            </a:r>
+            <a:r>
+              <a:rPr lang="en-US" sz="2599" dirty="0">
+                <a:solidFill>
+                  <a:srgbClr val="000000"/>
+                </a:solidFill>
+                <a:ea typeface="Arimo"/>
+                <a:cs typeface="Arimo"/>
+                <a:sym typeface="Arimo"/>
+              </a:rPr>
+              <a:t> e com </a:t>
+            </a:r>
+            <a:r>
+              <a:rPr lang="en-US" sz="2599" dirty="0" err="1">
+                <a:solidFill>
+                  <a:srgbClr val="000000"/>
+                </a:solidFill>
+                <a:ea typeface="Arimo"/>
+                <a:cs typeface="Arimo"/>
+                <a:sym typeface="Arimo"/>
+              </a:rPr>
+              <a:t>Aprendizado</a:t>
+            </a:r>
+            <a:r>
+              <a:rPr lang="en-US" sz="2599" dirty="0">
+                <a:solidFill>
+                  <a:srgbClr val="000000"/>
+                </a:solidFill>
+                <a:ea typeface="Arimo"/>
+                <a:cs typeface="Arimo"/>
+                <a:sym typeface="Arimo"/>
+              </a:rPr>
+              <a:t> </a:t>
+            </a:r>
+            <a:r>
+              <a:rPr lang="en-US" sz="2599" dirty="0" err="1">
+                <a:solidFill>
+                  <a:srgbClr val="000000"/>
+                </a:solidFill>
+                <a:ea typeface="Arimo"/>
+                <a:cs typeface="Arimo"/>
+                <a:sym typeface="Arimo"/>
+              </a:rPr>
+              <a:t>ao</a:t>
+            </a:r>
+            <a:r>
+              <a:rPr lang="en-US" sz="2599" dirty="0">
+                <a:solidFill>
+                  <a:srgbClr val="000000"/>
+                </a:solidFill>
+                <a:ea typeface="Arimo"/>
+                <a:cs typeface="Arimo"/>
+                <a:sym typeface="Arimo"/>
+              </a:rPr>
+              <a:t> Longo da Vida. Brasília, DF: </a:t>
+            </a:r>
+            <a:r>
+              <a:rPr lang="en-US" sz="2599" dirty="0" err="1">
+                <a:solidFill>
+                  <a:srgbClr val="000000"/>
+                </a:solidFill>
+                <a:ea typeface="Arimo"/>
+                <a:cs typeface="Arimo"/>
+                <a:sym typeface="Arimo"/>
+              </a:rPr>
+              <a:t>Presidência</a:t>
+            </a:r>
+            <a:r>
+              <a:rPr lang="en-US" sz="2599" dirty="0">
+                <a:solidFill>
+                  <a:srgbClr val="000000"/>
+                </a:solidFill>
+                <a:ea typeface="Arimo"/>
+                <a:cs typeface="Arimo"/>
+                <a:sym typeface="Arimo"/>
+              </a:rPr>
+              <a:t> da República, 2020. LIMA, Marcos Guilherme Oliveira. </a:t>
+            </a:r>
+            <a:r>
+              <a:rPr lang="en-US" sz="2599" dirty="0" err="1">
+                <a:solidFill>
+                  <a:srgbClr val="000000"/>
+                </a:solidFill>
+                <a:ea typeface="Arimo"/>
+                <a:cs typeface="Arimo"/>
+                <a:sym typeface="Arimo"/>
+              </a:rPr>
+              <a:t>Gestão</a:t>
+            </a:r>
+            <a:r>
+              <a:rPr lang="en-US" sz="2599" dirty="0">
+                <a:solidFill>
+                  <a:srgbClr val="000000"/>
+                </a:solidFill>
+                <a:ea typeface="Arimo"/>
+                <a:cs typeface="Arimo"/>
+                <a:sym typeface="Arimo"/>
+              </a:rPr>
+              <a:t> </a:t>
+            </a:r>
+            <a:r>
+              <a:rPr lang="en-US" sz="2599" dirty="0" err="1">
+                <a:solidFill>
+                  <a:srgbClr val="000000"/>
+                </a:solidFill>
+                <a:ea typeface="Arimo"/>
+                <a:cs typeface="Arimo"/>
+                <a:sym typeface="Arimo"/>
+              </a:rPr>
+              <a:t>Atípicos</a:t>
+            </a:r>
+            <a:r>
+              <a:rPr lang="en-US" sz="2599" dirty="0">
+                <a:solidFill>
+                  <a:srgbClr val="000000"/>
+                </a:solidFill>
+                <a:ea typeface="Arimo"/>
+                <a:cs typeface="Arimo"/>
+                <a:sym typeface="Arimo"/>
+              </a:rPr>
+              <a:t>: Sistema Web para </a:t>
+            </a:r>
+            <a:r>
+              <a:rPr lang="en-US" sz="2599" dirty="0" err="1">
+                <a:solidFill>
+                  <a:srgbClr val="000000"/>
+                </a:solidFill>
+                <a:ea typeface="Arimo"/>
+                <a:cs typeface="Arimo"/>
+                <a:sym typeface="Arimo"/>
+              </a:rPr>
+              <a:t>Gestão</a:t>
+            </a:r>
+            <a:r>
+              <a:rPr lang="en-US" sz="2599" dirty="0">
+                <a:solidFill>
+                  <a:srgbClr val="000000"/>
+                </a:solidFill>
+                <a:ea typeface="Arimo"/>
+                <a:cs typeface="Arimo"/>
+                <a:sym typeface="Arimo"/>
+              </a:rPr>
+              <a:t> </a:t>
+            </a:r>
+            <a:r>
+              <a:rPr lang="en-US" sz="2599" dirty="0" err="1">
+                <a:solidFill>
+                  <a:srgbClr val="000000"/>
+                </a:solidFill>
+                <a:ea typeface="Arimo"/>
+                <a:cs typeface="Arimo"/>
+                <a:sym typeface="Arimo"/>
+              </a:rPr>
+              <a:t>Especializada</a:t>
+            </a:r>
+            <a:r>
+              <a:rPr lang="en-US" sz="2599" dirty="0">
+                <a:solidFill>
+                  <a:srgbClr val="000000"/>
+                </a:solidFill>
+                <a:ea typeface="Arimo"/>
+                <a:cs typeface="Arimo"/>
+                <a:sym typeface="Arimo"/>
+              </a:rPr>
+              <a:t> de </a:t>
+            </a:r>
+            <a:r>
+              <a:rPr lang="en-US" sz="2599" dirty="0" err="1">
+                <a:solidFill>
+                  <a:srgbClr val="000000"/>
+                </a:solidFill>
+                <a:ea typeface="Arimo"/>
+                <a:cs typeface="Arimo"/>
+                <a:sym typeface="Arimo"/>
+              </a:rPr>
+              <a:t>Alunos</a:t>
+            </a:r>
+            <a:r>
+              <a:rPr lang="en-US" sz="2599" dirty="0">
+                <a:solidFill>
+                  <a:srgbClr val="000000"/>
+                </a:solidFill>
+                <a:ea typeface="Arimo"/>
+                <a:cs typeface="Arimo"/>
+                <a:sym typeface="Arimo"/>
+              </a:rPr>
+              <a:t> </a:t>
+            </a:r>
+            <a:r>
+              <a:rPr lang="en-US" sz="2599" dirty="0" err="1">
+                <a:solidFill>
+                  <a:srgbClr val="000000"/>
+                </a:solidFill>
+                <a:ea typeface="Arimo"/>
+                <a:cs typeface="Arimo"/>
+                <a:sym typeface="Arimo"/>
+              </a:rPr>
+              <a:t>Atípicos</a:t>
+            </a:r>
+            <a:r>
+              <a:rPr lang="en-US" sz="2599" dirty="0">
+                <a:solidFill>
+                  <a:srgbClr val="000000"/>
+                </a:solidFill>
+                <a:ea typeface="Arimo"/>
+                <a:cs typeface="Arimo"/>
+                <a:sym typeface="Arimo"/>
+              </a:rPr>
+              <a:t> </a:t>
+            </a:r>
+            <a:r>
+              <a:rPr lang="en-US" sz="2599" dirty="0" err="1">
+                <a:solidFill>
+                  <a:srgbClr val="000000"/>
+                </a:solidFill>
+                <a:ea typeface="Arimo"/>
+                <a:cs typeface="Arimo"/>
+                <a:sym typeface="Arimo"/>
+              </a:rPr>
+              <a:t>na</a:t>
+            </a:r>
+            <a:r>
+              <a:rPr lang="en-US" sz="2599" dirty="0">
+                <a:solidFill>
+                  <a:srgbClr val="000000"/>
+                </a:solidFill>
+                <a:ea typeface="Arimo"/>
+                <a:cs typeface="Arimo"/>
+                <a:sym typeface="Arimo"/>
+              </a:rPr>
+              <a:t> </a:t>
+            </a:r>
+            <a:r>
+              <a:rPr lang="en-US" sz="2599" dirty="0" err="1">
+                <a:solidFill>
+                  <a:srgbClr val="000000"/>
+                </a:solidFill>
+                <a:ea typeface="Arimo"/>
+                <a:cs typeface="Arimo"/>
+                <a:sym typeface="Arimo"/>
+              </a:rPr>
+              <a:t>Educação</a:t>
+            </a:r>
+            <a:r>
+              <a:rPr lang="en-US" sz="2599" dirty="0">
+                <a:solidFill>
+                  <a:srgbClr val="000000"/>
+                </a:solidFill>
+                <a:ea typeface="Arimo"/>
+                <a:cs typeface="Arimo"/>
+                <a:sym typeface="Arimo"/>
+              </a:rPr>
+              <a:t> </a:t>
+            </a:r>
+            <a:r>
+              <a:rPr lang="en-US" sz="2599" dirty="0" err="1">
+                <a:solidFill>
+                  <a:srgbClr val="000000"/>
+                </a:solidFill>
+                <a:ea typeface="Arimo"/>
+                <a:cs typeface="Arimo"/>
+                <a:sym typeface="Arimo"/>
+              </a:rPr>
+              <a:t>Inclusiva</a:t>
+            </a:r>
+            <a:r>
+              <a:rPr lang="en-US" sz="2599" dirty="0">
+                <a:solidFill>
+                  <a:srgbClr val="000000"/>
+                </a:solidFill>
+                <a:ea typeface="Arimo"/>
+                <a:cs typeface="Arimo"/>
+                <a:sym typeface="Arimo"/>
+              </a:rPr>
+              <a:t>. 2025. </a:t>
+            </a:r>
+            <a:r>
+              <a:rPr lang="en-US" sz="2599" dirty="0" err="1">
+                <a:solidFill>
+                  <a:srgbClr val="000000"/>
+                </a:solidFill>
+                <a:ea typeface="Arimo"/>
+                <a:cs typeface="Arimo"/>
+                <a:sym typeface="Arimo"/>
+              </a:rPr>
+              <a:t>Repositório</a:t>
+            </a:r>
+            <a:r>
+              <a:rPr lang="en-US" sz="2599" dirty="0">
+                <a:solidFill>
+                  <a:srgbClr val="000000"/>
+                </a:solidFill>
+                <a:ea typeface="Arimo"/>
+                <a:cs typeface="Arimo"/>
+                <a:sym typeface="Arimo"/>
+              </a:rPr>
+              <a:t> de </a:t>
+            </a:r>
+            <a:r>
+              <a:rPr lang="en-US" sz="2599" dirty="0" err="1">
+                <a:solidFill>
+                  <a:srgbClr val="000000"/>
+                </a:solidFill>
+                <a:ea typeface="Arimo"/>
+                <a:cs typeface="Arimo"/>
+                <a:sym typeface="Arimo"/>
+              </a:rPr>
+              <a:t>código</a:t>
+            </a:r>
+            <a:r>
+              <a:rPr lang="en-US" sz="2599" dirty="0">
+                <a:solidFill>
+                  <a:srgbClr val="000000"/>
+                </a:solidFill>
+                <a:ea typeface="Arimo"/>
+                <a:cs typeface="Arimo"/>
+                <a:sym typeface="Arimo"/>
+              </a:rPr>
+              <a:t> (GitHub). </a:t>
+            </a:r>
+            <a:r>
+              <a:rPr lang="en-US" sz="2599" dirty="0" err="1">
+                <a:solidFill>
+                  <a:srgbClr val="000000"/>
+                </a:solidFill>
+                <a:ea typeface="Arimo"/>
+                <a:cs typeface="Arimo"/>
+                <a:sym typeface="Arimo"/>
+              </a:rPr>
+              <a:t>Disponível</a:t>
+            </a:r>
+            <a:r>
+              <a:rPr lang="en-US" sz="2599" dirty="0">
+                <a:solidFill>
+                  <a:srgbClr val="000000"/>
+                </a:solidFill>
+                <a:ea typeface="Arimo"/>
+                <a:cs typeface="Arimo"/>
+                <a:sym typeface="Arimo"/>
+              </a:rPr>
+              <a:t> </a:t>
+            </a:r>
+            <a:r>
+              <a:rPr lang="en-US" sz="2599" dirty="0" err="1">
+                <a:solidFill>
+                  <a:srgbClr val="000000"/>
+                </a:solidFill>
+                <a:ea typeface="Arimo"/>
+                <a:cs typeface="Arimo"/>
+                <a:sym typeface="Arimo"/>
+              </a:rPr>
+              <a:t>em</a:t>
+            </a:r>
+            <a:r>
+              <a:rPr lang="en-US" sz="2599" dirty="0">
+                <a:solidFill>
+                  <a:srgbClr val="000000"/>
+                </a:solidFill>
+                <a:ea typeface="Arimo"/>
+                <a:cs typeface="Arimo"/>
+                <a:sym typeface="Arimo"/>
+              </a:rPr>
+              <a:t>: https://github.com/z12guilherme/gestao_atipicos. </a:t>
+            </a:r>
+            <a:r>
+              <a:rPr lang="en-US" sz="2599" dirty="0" err="1">
+                <a:solidFill>
+                  <a:srgbClr val="000000"/>
+                </a:solidFill>
+                <a:ea typeface="Arimo"/>
+                <a:cs typeface="Arimo"/>
+                <a:sym typeface="Arimo"/>
+              </a:rPr>
+              <a:t>Acesso</a:t>
+            </a:r>
+            <a:r>
+              <a:rPr lang="en-US" sz="2599" dirty="0">
+                <a:solidFill>
+                  <a:srgbClr val="000000"/>
+                </a:solidFill>
+                <a:ea typeface="Arimo"/>
+                <a:cs typeface="Arimo"/>
+                <a:sym typeface="Arimo"/>
+              </a:rPr>
+              <a:t> </a:t>
+            </a:r>
+            <a:r>
+              <a:rPr lang="en-US" sz="2599" dirty="0" err="1">
+                <a:solidFill>
+                  <a:srgbClr val="000000"/>
+                </a:solidFill>
+                <a:ea typeface="Arimo"/>
+                <a:cs typeface="Arimo"/>
+                <a:sym typeface="Arimo"/>
+              </a:rPr>
+              <a:t>em</a:t>
+            </a:r>
+            <a:r>
+              <a:rPr lang="en-US" sz="2599" dirty="0">
+                <a:solidFill>
+                  <a:srgbClr val="000000"/>
+                </a:solidFill>
+                <a:ea typeface="Arimo"/>
+                <a:cs typeface="Arimo"/>
+                <a:sym typeface="Arimo"/>
+              </a:rPr>
+              <a:t>: 19 </a:t>
+            </a:r>
+            <a:r>
+              <a:rPr lang="en-US" sz="2599" dirty="0" err="1">
+                <a:solidFill>
+                  <a:srgbClr val="000000"/>
+                </a:solidFill>
+                <a:ea typeface="Arimo"/>
+                <a:cs typeface="Arimo"/>
+                <a:sym typeface="Arimo"/>
+              </a:rPr>
+              <a:t>dez</a:t>
+            </a:r>
+            <a:r>
+              <a:rPr lang="en-US" sz="2599" dirty="0">
+                <a:solidFill>
+                  <a:srgbClr val="000000"/>
+                </a:solidFill>
+                <a:ea typeface="Arimo"/>
+                <a:cs typeface="Arimo"/>
+                <a:sym typeface="Arimo"/>
+              </a:rPr>
+              <a:t>. 2025. </a:t>
             </a:r>
           </a:p>
           <a:p>
@@ -9170,11 +10490,10 @@
                 <a:spcPct val="0"/>
               </a:spcBef>
             </a:pPr>
-            <a:endParaRPr lang="en-US" sz="2599">
+            <a:endParaRPr lang="en-US" sz="2599" dirty="0">
               <a:solidFill>
                 <a:srgbClr val="000000"/>
               </a:solidFill>
-              <a:latin typeface="Arimo"/>
               <a:ea typeface="Arimo"/>
               <a:cs typeface="Arimo"/>
               <a:sym typeface="Arimo"/>
@@ -9190,11 +10509,10 @@
               </a:spcBef>
             </a:pPr>
             <a:r>
-              <a:rPr lang="en-US" sz="2599">
-                <a:solidFill>
-                  <a:srgbClr val="000000"/>
-                </a:solidFill>
-                <a:latin typeface="Arimo"/>
+              <a:rPr lang="en-US" sz="2599" dirty="0">
+                <a:solidFill>
+                  <a:srgbClr val="000000"/>
+                </a:solidFill>
                 <a:ea typeface="Arimo"/>
                 <a:cs typeface="Arimo"/>
                 <a:sym typeface="Arimo"/>
@@ -9202,11 +10520,10 @@
               <a:t>MICROSOFT. </a:t>
             </a:r>
             <a:r>
-              <a:rPr lang="en-US" sz="2599" b="1">
-                <a:solidFill>
-                  <a:srgbClr val="000000"/>
-                </a:solidFill>
-                <a:latin typeface="Arimo Bold"/>
+              <a:rPr lang="en-US" sz="2599" b="1" dirty="0">
+                <a:solidFill>
+                  <a:srgbClr val="000000"/>
+                </a:solidFill>
                 <a:ea typeface="Arimo Bold"/>
                 <a:cs typeface="Arimo Bold"/>
                 <a:sym typeface="Arimo Bold"/>
@@ -9214,16 +10531,125 @@
               <a:t>The STRIDE Threat Model</a:t>
             </a:r>
             <a:r>
-              <a:rPr lang="en-US" sz="2599">
-                <a:solidFill>
-                  <a:srgbClr val="000000"/>
-                </a:solidFill>
-                <a:latin typeface="Arimo"/>
-                <a:ea typeface="Arimo"/>
-                <a:cs typeface="Arimo"/>
-                <a:sym typeface="Arimo"/>
-              </a:rPr>
-              <a:t>. Azure Security Center, 2026. Disponível em: https://learn.microsoft.com/en-us/azure/security/develop/threat-modeling-tool-threats. Acesso em: 15 dez. 2025. </a:t>
+              <a:rPr lang="en-US" sz="2599" dirty="0">
+                <a:solidFill>
+                  <a:srgbClr val="000000"/>
+                </a:solidFill>
+                <a:ea typeface="Arimo"/>
+                <a:cs typeface="Arimo"/>
+                <a:sym typeface="Arimo"/>
+              </a:rPr>
+              <a:t>. Azure Security Center, 2026. </a:t>
+            </a:r>
+            <a:r>
+              <a:rPr lang="en-US" sz="2599" dirty="0" err="1">
+                <a:solidFill>
+                  <a:srgbClr val="000000"/>
+                </a:solidFill>
+                <a:ea typeface="Arimo"/>
+                <a:cs typeface="Arimo"/>
+                <a:sym typeface="Arimo"/>
+              </a:rPr>
+              <a:t>Disponível</a:t>
+            </a:r>
+            <a:r>
+              <a:rPr lang="en-US" sz="2599" dirty="0">
+                <a:solidFill>
+                  <a:srgbClr val="000000"/>
+                </a:solidFill>
+                <a:ea typeface="Arimo"/>
+                <a:cs typeface="Arimo"/>
+                <a:sym typeface="Arimo"/>
+              </a:rPr>
+              <a:t> </a:t>
+            </a:r>
+            <a:r>
+              <a:rPr lang="en-US" sz="2599" dirty="0" err="1">
+                <a:solidFill>
+                  <a:srgbClr val="000000"/>
+                </a:solidFill>
+                <a:ea typeface="Arimo"/>
+                <a:cs typeface="Arimo"/>
+                <a:sym typeface="Arimo"/>
+              </a:rPr>
+              <a:t>em</a:t>
+            </a:r>
+            <a:r>
+              <a:rPr lang="en-US" sz="2599" dirty="0">
+                <a:solidFill>
+                  <a:srgbClr val="000000"/>
+                </a:solidFill>
+                <a:ea typeface="Arimo"/>
+                <a:cs typeface="Arimo"/>
+                <a:sym typeface="Arimo"/>
+              </a:rPr>
+              <a:t>: https://learn.microsoft.com/en-us/azure/security/develop/threat-modeling-tool-threats. </a:t>
+            </a:r>
+            <a:r>
+              <a:rPr lang="en-US" sz="2599" dirty="0" err="1">
+                <a:solidFill>
+                  <a:srgbClr val="000000"/>
+                </a:solidFill>
+                <a:ea typeface="Arimo"/>
+                <a:cs typeface="Arimo"/>
+                <a:sym typeface="Arimo"/>
+              </a:rPr>
+              <a:t>Acesso</a:t>
+            </a:r>
+            <a:r>
+              <a:rPr lang="en-US" sz="2599" dirty="0">
+                <a:solidFill>
+                  <a:srgbClr val="000000"/>
+                </a:solidFill>
+                <a:ea typeface="Arimo"/>
+                <a:cs typeface="Arimo"/>
+                <a:sym typeface="Arimo"/>
+              </a:rPr>
+              <a:t> </a:t>
+            </a:r>
+            <a:r>
+              <a:rPr lang="en-US" sz="2599" dirty="0" err="1">
+                <a:solidFill>
+                  <a:srgbClr val="000000"/>
+                </a:solidFill>
+                <a:ea typeface="Arimo"/>
+                <a:cs typeface="Arimo"/>
+                <a:sym typeface="Arimo"/>
+              </a:rPr>
+              <a:t>em</a:t>
+            </a:r>
+            <a:r>
+              <a:rPr lang="en-US" sz="2599" dirty="0">
+                <a:solidFill>
+                  <a:srgbClr val="000000"/>
+                </a:solidFill>
+                <a:ea typeface="Arimo"/>
+                <a:cs typeface="Arimo"/>
+                <a:sym typeface="Arimo"/>
+              </a:rPr>
+              <a:t>: 15 </a:t>
+            </a:r>
+            <a:r>
+              <a:rPr lang="en-US" sz="2599" dirty="0" err="1">
+                <a:solidFill>
+                  <a:srgbClr val="000000"/>
+                </a:solidFill>
+                <a:ea typeface="Arimo"/>
+                <a:cs typeface="Arimo"/>
+                <a:sym typeface="Arimo"/>
+              </a:rPr>
+              <a:t>dez</a:t>
+            </a:r>
+            <a:r>
+              <a:rPr lang="en-US" sz="2599" dirty="0">
+                <a:solidFill>
+                  <a:srgbClr val="000000"/>
+                </a:solidFill>
+                <a:ea typeface="Arimo"/>
+                <a:cs typeface="Arimo"/>
+                <a:sym typeface="Arimo"/>
+              </a:rPr>
+              <a:t>. 2025. </a:t>
             </a:r>
           </a:p>
           <a:p>
@@ -9235,11 +10661,10 @@
                 <a:spcPct val="0"/>
               </a:spcBef>
             </a:pPr>
-            <a:endParaRPr lang="en-US" sz="2599">
+            <a:endParaRPr lang="en-US" sz="2599" dirty="0">
               <a:solidFill>
                 <a:srgbClr val="000000"/>
               </a:solidFill>
-              <a:latin typeface="Arimo"/>
               <a:ea typeface="Arimo"/>
               <a:cs typeface="Arimo"/>
               <a:sym typeface="Arimo"/>
@@ -9255,11 +10680,10 @@
               </a:spcBef>
             </a:pPr>
             <a:r>
-              <a:rPr lang="en-US" sz="2599">
-                <a:solidFill>
-                  <a:srgbClr val="000000"/>
-                </a:solidFill>
-                <a:latin typeface="Arimo"/>
+              <a:rPr lang="en-US" sz="2599" dirty="0">
+                <a:solidFill>
+                  <a:srgbClr val="000000"/>
+                </a:solidFill>
                 <a:ea typeface="Arimo"/>
                 <a:cs typeface="Arimo"/>
                 <a:sym typeface="Arimo"/>
@@ -9267,11 +10691,10 @@
               <a:t>OWASP FOUNDATION. </a:t>
             </a:r>
             <a:r>
-              <a:rPr lang="en-US" sz="2599" b="1">
-                <a:solidFill>
-                  <a:srgbClr val="000000"/>
-                </a:solidFill>
-                <a:latin typeface="Arimo Bold"/>
+              <a:rPr lang="en-US" sz="2599" b="1" dirty="0">
+                <a:solidFill>
+                  <a:srgbClr val="000000"/>
+                </a:solidFill>
                 <a:ea typeface="Arimo Bold"/>
                 <a:cs typeface="Arimo Bold"/>
                 <a:sym typeface="Arimo Bold"/>
@@ -9279,16 +10702,125 @@
               <a:t>Application Security Verification Standard</a:t>
             </a:r>
             <a:r>
-              <a:rPr lang="en-US" sz="2599">
-                <a:solidFill>
-                  <a:srgbClr val="000000"/>
-                </a:solidFill>
-                <a:latin typeface="Arimo"/>
-                <a:ea typeface="Arimo"/>
-                <a:cs typeface="Arimo"/>
-                <a:sym typeface="Arimo"/>
-              </a:rPr>
-              <a:t> (ASVS). Version 4.0.3. 2021. Disponível em: https://owasp.org/www-project-application-security-verification-standard/. Acesso em: 15 dez. 2025. </a:t>
+              <a:rPr lang="en-US" sz="2599" dirty="0">
+                <a:solidFill>
+                  <a:srgbClr val="000000"/>
+                </a:solidFill>
+                <a:ea typeface="Arimo"/>
+                <a:cs typeface="Arimo"/>
+                <a:sym typeface="Arimo"/>
+              </a:rPr>
+              <a:t> (ASVS). Version 4.0.3. 2021. </a:t>
+            </a:r>
+            <a:r>
+              <a:rPr lang="en-US" sz="2599" dirty="0" err="1">
+                <a:solidFill>
+                  <a:srgbClr val="000000"/>
+                </a:solidFill>
+                <a:ea typeface="Arimo"/>
+                <a:cs typeface="Arimo"/>
+                <a:sym typeface="Arimo"/>
+              </a:rPr>
+              <a:t>Disponível</a:t>
+            </a:r>
+            <a:r>
+              <a:rPr lang="en-US" sz="2599" dirty="0">
+                <a:solidFill>
+                  <a:srgbClr val="000000"/>
+                </a:solidFill>
+                <a:ea typeface="Arimo"/>
+                <a:cs typeface="Arimo"/>
+                <a:sym typeface="Arimo"/>
+              </a:rPr>
+              <a:t> </a:t>
+            </a:r>
+            <a:r>
+              <a:rPr lang="en-US" sz="2599" dirty="0" err="1">
+                <a:solidFill>
+                  <a:srgbClr val="000000"/>
+                </a:solidFill>
+                <a:ea typeface="Arimo"/>
+                <a:cs typeface="Arimo"/>
+                <a:sym typeface="Arimo"/>
+              </a:rPr>
+              <a:t>em</a:t>
+            </a:r>
+            <a:r>
+              <a:rPr lang="en-US" sz="2599" dirty="0">
+                <a:solidFill>
+                  <a:srgbClr val="000000"/>
+                </a:solidFill>
+                <a:ea typeface="Arimo"/>
+                <a:cs typeface="Arimo"/>
+                <a:sym typeface="Arimo"/>
+              </a:rPr>
+              <a:t>: https://owasp.org/www-project-application-security-verification-standard/. </a:t>
+            </a:r>
+            <a:r>
+              <a:rPr lang="en-US" sz="2599" dirty="0" err="1">
+                <a:solidFill>
+                  <a:srgbClr val="000000"/>
+                </a:solidFill>
+                <a:ea typeface="Arimo"/>
+                <a:cs typeface="Arimo"/>
+                <a:sym typeface="Arimo"/>
+              </a:rPr>
+              <a:t>Acesso</a:t>
+            </a:r>
+            <a:r>
+              <a:rPr lang="en-US" sz="2599" dirty="0">
+                <a:solidFill>
+                  <a:srgbClr val="000000"/>
+                </a:solidFill>
+                <a:ea typeface="Arimo"/>
+                <a:cs typeface="Arimo"/>
+                <a:sym typeface="Arimo"/>
+              </a:rPr>
+              <a:t> </a:t>
+            </a:r>
+            <a:r>
+              <a:rPr lang="en-US" sz="2599" dirty="0" err="1">
+                <a:solidFill>
+                  <a:srgbClr val="000000"/>
+                </a:solidFill>
+                <a:ea typeface="Arimo"/>
+                <a:cs typeface="Arimo"/>
+                <a:sym typeface="Arimo"/>
+              </a:rPr>
+              <a:t>em</a:t>
+            </a:r>
+            <a:r>
+              <a:rPr lang="en-US" sz="2599" dirty="0">
+                <a:solidFill>
+                  <a:srgbClr val="000000"/>
+                </a:solidFill>
+                <a:ea typeface="Arimo"/>
+                <a:cs typeface="Arimo"/>
+                <a:sym typeface="Arimo"/>
+              </a:rPr>
+              <a:t>: 15 </a:t>
+            </a:r>
+            <a:r>
+              <a:rPr lang="en-US" sz="2599" dirty="0" err="1">
+                <a:solidFill>
+                  <a:srgbClr val="000000"/>
+                </a:solidFill>
+                <a:ea typeface="Arimo"/>
+                <a:cs typeface="Arimo"/>
+                <a:sym typeface="Arimo"/>
+              </a:rPr>
+              <a:t>dez</a:t>
+            </a:r>
+            <a:r>
+              <a:rPr lang="en-US" sz="2599" dirty="0">
+                <a:solidFill>
+                  <a:srgbClr val="000000"/>
+                </a:solidFill>
+                <a:ea typeface="Arimo"/>
+                <a:cs typeface="Arimo"/>
+                <a:sym typeface="Arimo"/>
+              </a:rPr>
+              <a:t>. 2025. </a:t>
             </a:r>
           </a:p>
           <a:p>
@@ -9300,11 +10832,10 @@
                 <a:spcPct val="0"/>
               </a:spcBef>
             </a:pPr>
-            <a:endParaRPr lang="en-US" sz="2599">
+            <a:endParaRPr lang="en-US" sz="2599" dirty="0">
               <a:solidFill>
                 <a:srgbClr val="000000"/>
               </a:solidFill>
-              <a:latin typeface="Arimo"/>
               <a:ea typeface="Arimo"/>
               <a:cs typeface="Arimo"/>
               <a:sym typeface="Arimo"/>
@@ -9320,11 +10851,10 @@
               </a:spcBef>
             </a:pPr>
             <a:r>
-              <a:rPr lang="en-US" sz="2599">
-                <a:solidFill>
-                  <a:srgbClr val="000000"/>
-                </a:solidFill>
-                <a:latin typeface="Arimo"/>
+              <a:rPr lang="en-US" sz="2599" dirty="0">
+                <a:solidFill>
+                  <a:srgbClr val="000000"/>
+                </a:solidFill>
                 <a:ea typeface="Arimo"/>
                 <a:cs typeface="Arimo"/>
                 <a:sym typeface="Arimo"/>
@@ -9332,11 +10862,10 @@
               <a:t>OWASP FOUNDATION. </a:t>
             </a:r>
             <a:r>
-              <a:rPr lang="en-US" sz="2599" b="1">
-                <a:solidFill>
-                  <a:srgbClr val="000000"/>
-                </a:solidFill>
-                <a:latin typeface="Arimo Bold"/>
+              <a:rPr lang="en-US" sz="2599" b="1" dirty="0">
+                <a:solidFill>
+                  <a:srgbClr val="000000"/>
+                </a:solidFill>
                 <a:ea typeface="Arimo Bold"/>
                 <a:cs typeface="Arimo Bold"/>
                 <a:sym typeface="Arimo Bold"/>
@@ -9344,16 +10873,125 @@
               <a:t>OWASP Top 10:2021</a:t>
             </a:r>
             <a:r>
-              <a:rPr lang="en-US" sz="2599">
-                <a:solidFill>
-                  <a:srgbClr val="000000"/>
-                </a:solidFill>
-                <a:latin typeface="Arimo"/>
-                <a:ea typeface="Arimo"/>
-                <a:cs typeface="Arimo"/>
-                <a:sym typeface="Arimo"/>
-              </a:rPr>
-              <a:t>. The Most Critical Web Application Security Risks. Disponível em: https://owasp.org/www-project-top-ten/. Acesso em: 15 dez. 2025. </a:t>
+              <a:rPr lang="en-US" sz="2599" dirty="0">
+                <a:solidFill>
+                  <a:srgbClr val="000000"/>
+                </a:solidFill>
+                <a:ea typeface="Arimo"/>
+                <a:cs typeface="Arimo"/>
+                <a:sym typeface="Arimo"/>
+              </a:rPr>
+              <a:t>. The Most Critical Web Application Security Risks. </a:t>
+            </a:r>
+            <a:r>
+              <a:rPr lang="en-US" sz="2599" dirty="0" err="1">
+                <a:solidFill>
+                  <a:srgbClr val="000000"/>
+                </a:solidFill>
+                <a:ea typeface="Arimo"/>
+                <a:cs typeface="Arimo"/>
+                <a:sym typeface="Arimo"/>
+              </a:rPr>
+              <a:t>Disponível</a:t>
+            </a:r>
+            <a:r>
+              <a:rPr lang="en-US" sz="2599" dirty="0">
+                <a:solidFill>
+                  <a:srgbClr val="000000"/>
+                </a:solidFill>
+                <a:ea typeface="Arimo"/>
+                <a:cs typeface="Arimo"/>
+                <a:sym typeface="Arimo"/>
+              </a:rPr>
+              <a:t> </a:t>
+            </a:r>
+            <a:r>
+              <a:rPr lang="en-US" sz="2599" dirty="0" err="1">
+                <a:solidFill>
+                  <a:srgbClr val="000000"/>
+                </a:solidFill>
+                <a:ea typeface="Arimo"/>
+                <a:cs typeface="Arimo"/>
+                <a:sym typeface="Arimo"/>
+              </a:rPr>
+              <a:t>em</a:t>
+            </a:r>
+            <a:r>
+              <a:rPr lang="en-US" sz="2599" dirty="0">
+                <a:solidFill>
+                  <a:srgbClr val="000000"/>
+                </a:solidFill>
+                <a:ea typeface="Arimo"/>
+                <a:cs typeface="Arimo"/>
+                <a:sym typeface="Arimo"/>
+              </a:rPr>
+              <a:t>: https://owasp.org/www-project-top-ten/. </a:t>
+            </a:r>
+            <a:r>
+              <a:rPr lang="en-US" sz="2599" dirty="0" err="1">
+                <a:solidFill>
+                  <a:srgbClr val="000000"/>
+                </a:solidFill>
+                <a:ea typeface="Arimo"/>
+                <a:cs typeface="Arimo"/>
+                <a:sym typeface="Arimo"/>
+              </a:rPr>
+              <a:t>Acesso</a:t>
+            </a:r>
+            <a:r>
+              <a:rPr lang="en-US" sz="2599" dirty="0">
+                <a:solidFill>
+                  <a:srgbClr val="000000"/>
+                </a:solidFill>
+                <a:ea typeface="Arimo"/>
+                <a:cs typeface="Arimo"/>
+                <a:sym typeface="Arimo"/>
+              </a:rPr>
+              <a:t> </a:t>
+            </a:r>
+            <a:r>
+              <a:rPr lang="en-US" sz="2599" dirty="0" err="1">
+                <a:solidFill>
+                  <a:srgbClr val="000000"/>
+                </a:solidFill>
+                <a:ea typeface="Arimo"/>
+                <a:cs typeface="Arimo"/>
+                <a:sym typeface="Arimo"/>
+              </a:rPr>
+              <a:t>em</a:t>
+            </a:r>
+            <a:r>
+              <a:rPr lang="en-US" sz="2599" dirty="0">
+                <a:solidFill>
+                  <a:srgbClr val="000000"/>
+                </a:solidFill>
+                <a:ea typeface="Arimo"/>
+                <a:cs typeface="Arimo"/>
+                <a:sym typeface="Arimo"/>
+              </a:rPr>
+              <a:t>: 15 </a:t>
+            </a:r>
+            <a:r>
+              <a:rPr lang="en-US" sz="2599" dirty="0" err="1">
+                <a:solidFill>
+                  <a:srgbClr val="000000"/>
+                </a:solidFill>
+                <a:ea typeface="Arimo"/>
+                <a:cs typeface="Arimo"/>
+                <a:sym typeface="Arimo"/>
+              </a:rPr>
+              <a:t>dez</a:t>
+            </a:r>
+            <a:r>
+              <a:rPr lang="en-US" sz="2599" dirty="0">
+                <a:solidFill>
+                  <a:srgbClr val="000000"/>
+                </a:solidFill>
+                <a:ea typeface="Arimo"/>
+                <a:cs typeface="Arimo"/>
+                <a:sym typeface="Arimo"/>
+              </a:rPr>
+              <a:t>. 2025. </a:t>
             </a:r>
           </a:p>
           <a:p>
@@ -9365,11 +11003,10 @@
                 <a:spcPct val="0"/>
               </a:spcBef>
             </a:pPr>
-            <a:endParaRPr lang="en-US" sz="2599">
+            <a:endParaRPr lang="en-US" sz="2599" dirty="0">
               <a:solidFill>
                 <a:srgbClr val="000000"/>
               </a:solidFill>
-              <a:latin typeface="Arimo"/>
               <a:ea typeface="Arimo"/>
               <a:cs typeface="Arimo"/>
               <a:sym typeface="Arimo"/>
@@ -9385,11 +11022,10 @@
               </a:spcBef>
             </a:pPr>
             <a:r>
-              <a:rPr lang="en-US" sz="2599">
-                <a:solidFill>
-                  <a:srgbClr val="000000"/>
-                </a:solidFill>
-                <a:latin typeface="Arimo"/>
+              <a:rPr lang="en-US" sz="2599" dirty="0">
+                <a:solidFill>
+                  <a:srgbClr val="000000"/>
+                </a:solidFill>
                 <a:ea typeface="Arimo"/>
                 <a:cs typeface="Arimo"/>
                 <a:sym typeface="Arimo"/>
@@ -9397,11 +11033,10 @@
               <a:t>SUPABASE INC. </a:t>
             </a:r>
             <a:r>
-              <a:rPr lang="en-US" sz="2599" b="1">
-                <a:solidFill>
-                  <a:srgbClr val="000000"/>
-                </a:solidFill>
-                <a:latin typeface="Arimo Bold"/>
+              <a:rPr lang="en-US" sz="2599" b="1" dirty="0">
+                <a:solidFill>
+                  <a:srgbClr val="000000"/>
+                </a:solidFill>
                 <a:ea typeface="Arimo Bold"/>
                 <a:cs typeface="Arimo Bold"/>
                 <a:sym typeface="Arimo Bold"/>
@@ -9409,16 +11044,125 @@
               <a:t>Row Level Security</a:t>
             </a:r>
             <a:r>
-              <a:rPr lang="en-US" sz="2599">
-                <a:solidFill>
-                  <a:srgbClr val="000000"/>
-                </a:solidFill>
-                <a:latin typeface="Arimo"/>
-                <a:ea typeface="Arimo"/>
-                <a:cs typeface="Arimo"/>
-                <a:sym typeface="Arimo"/>
-              </a:rPr>
-              <a:t>. Documentation. 2026. Disponível em: https://supabase.com/docs/guides/auth/row-level-security. Acesso em: 15 dez. 2025. </a:t>
+              <a:rPr lang="en-US" sz="2599" dirty="0">
+                <a:solidFill>
+                  <a:srgbClr val="000000"/>
+                </a:solidFill>
+                <a:ea typeface="Arimo"/>
+                <a:cs typeface="Arimo"/>
+                <a:sym typeface="Arimo"/>
+              </a:rPr>
+              <a:t>. Documentation. 2026. </a:t>
+            </a:r>
+            <a:r>
+              <a:rPr lang="en-US" sz="2599" dirty="0" err="1">
+                <a:solidFill>
+                  <a:srgbClr val="000000"/>
+                </a:solidFill>
+                <a:ea typeface="Arimo"/>
+                <a:cs typeface="Arimo"/>
+                <a:sym typeface="Arimo"/>
+              </a:rPr>
+              <a:t>Disponível</a:t>
+            </a:r>
+            <a:r>
+              <a:rPr lang="en-US" sz="2599" dirty="0">
+                <a:solidFill>
+                  <a:srgbClr val="000000"/>
+                </a:solidFill>
+                <a:ea typeface="Arimo"/>
+                <a:cs typeface="Arimo"/>
+                <a:sym typeface="Arimo"/>
+              </a:rPr>
+              <a:t> </a:t>
+            </a:r>
+            <a:r>
+              <a:rPr lang="en-US" sz="2599" dirty="0" err="1">
+                <a:solidFill>
+                  <a:srgbClr val="000000"/>
+                </a:solidFill>
+                <a:ea typeface="Arimo"/>
+                <a:cs typeface="Arimo"/>
+                <a:sym typeface="Arimo"/>
+              </a:rPr>
+              <a:t>em</a:t>
+            </a:r>
+            <a:r>
+              <a:rPr lang="en-US" sz="2599" dirty="0">
+                <a:solidFill>
+                  <a:srgbClr val="000000"/>
+                </a:solidFill>
+                <a:ea typeface="Arimo"/>
+                <a:cs typeface="Arimo"/>
+                <a:sym typeface="Arimo"/>
+              </a:rPr>
+              <a:t>: https://supabase.com/docs/guides/auth/row-level-security. </a:t>
+            </a:r>
+            <a:r>
+              <a:rPr lang="en-US" sz="2599" dirty="0" err="1">
+                <a:solidFill>
+                  <a:srgbClr val="000000"/>
+                </a:solidFill>
+                <a:ea typeface="Arimo"/>
+                <a:cs typeface="Arimo"/>
+                <a:sym typeface="Arimo"/>
+              </a:rPr>
+              <a:t>Acesso</a:t>
+            </a:r>
+            <a:r>
+              <a:rPr lang="en-US" sz="2599" dirty="0">
+                <a:solidFill>
+                  <a:srgbClr val="000000"/>
+                </a:solidFill>
+                <a:ea typeface="Arimo"/>
+                <a:cs typeface="Arimo"/>
+                <a:sym typeface="Arimo"/>
+              </a:rPr>
+              <a:t> </a:t>
+            </a:r>
+            <a:r>
+              <a:rPr lang="en-US" sz="2599" dirty="0" err="1">
+                <a:solidFill>
+                  <a:srgbClr val="000000"/>
+                </a:solidFill>
+                <a:ea typeface="Arimo"/>
+                <a:cs typeface="Arimo"/>
+                <a:sym typeface="Arimo"/>
+              </a:rPr>
+              <a:t>em</a:t>
+            </a:r>
+            <a:r>
+              <a:rPr lang="en-US" sz="2599" dirty="0">
+                <a:solidFill>
+                  <a:srgbClr val="000000"/>
+                </a:solidFill>
+                <a:ea typeface="Arimo"/>
+                <a:cs typeface="Arimo"/>
+                <a:sym typeface="Arimo"/>
+              </a:rPr>
+              <a:t>: 15 </a:t>
+            </a:r>
+            <a:r>
+              <a:rPr lang="en-US" sz="2599" dirty="0" err="1">
+                <a:solidFill>
+                  <a:srgbClr val="000000"/>
+                </a:solidFill>
+                <a:ea typeface="Arimo"/>
+                <a:cs typeface="Arimo"/>
+                <a:sym typeface="Arimo"/>
+              </a:rPr>
+              <a:t>dez</a:t>
+            </a:r>
+            <a:r>
+              <a:rPr lang="en-US" sz="2599" dirty="0">
+                <a:solidFill>
+                  <a:srgbClr val="000000"/>
+                </a:solidFill>
+                <a:ea typeface="Arimo"/>
+                <a:cs typeface="Arimo"/>
+                <a:sym typeface="Arimo"/>
+              </a:rPr>
+              <a:t>. 2025. </a:t>
             </a:r>
           </a:p>
         </p:txBody>
@@ -10282,7 +12026,6 @@
                 <a:solidFill>
                   <a:srgbClr val="000000"/>
                 </a:solidFill>
-                <a:latin typeface="Arimo"/>
                 <a:ea typeface="Arimo"/>
                 <a:cs typeface="Arimo"/>
                 <a:sym typeface="Arimo"/>
@@ -10294,7 +12037,6 @@
                 <a:solidFill>
                   <a:srgbClr val="000000"/>
                 </a:solidFill>
-                <a:latin typeface="Arimo"/>
                 <a:ea typeface="Arimo"/>
                 <a:cs typeface="Arimo"/>
                 <a:sym typeface="Arimo"/>
@@ -10306,7 +12048,6 @@
                 <a:solidFill>
                   <a:srgbClr val="000000"/>
                 </a:solidFill>
-                <a:latin typeface="Arimo"/>
                 <a:ea typeface="Arimo"/>
                 <a:cs typeface="Arimo"/>
                 <a:sym typeface="Arimo"/>
@@ -10318,7 +12059,6 @@
                 <a:solidFill>
                   <a:srgbClr val="000000"/>
                 </a:solidFill>
-                <a:latin typeface="Arimo"/>
                 <a:ea typeface="Arimo"/>
                 <a:cs typeface="Arimo"/>
                 <a:sym typeface="Arimo"/>
@@ -10330,7 +12070,6 @@
                 <a:solidFill>
                   <a:srgbClr val="000000"/>
                 </a:solidFill>
-                <a:latin typeface="Arimo"/>
                 <a:ea typeface="Arimo"/>
                 <a:cs typeface="Arimo"/>
                 <a:sym typeface="Arimo"/>
@@ -10342,7 +12081,6 @@
                 <a:solidFill>
                   <a:srgbClr val="000000"/>
                 </a:solidFill>
-                <a:latin typeface="Arimo"/>
                 <a:ea typeface="Arimo"/>
                 <a:cs typeface="Arimo"/>
                 <a:sym typeface="Arimo"/>
@@ -10354,7 +12092,6 @@
                 <a:solidFill>
                   <a:srgbClr val="000000"/>
                 </a:solidFill>
-                <a:latin typeface="Arimo"/>
                 <a:ea typeface="Arimo"/>
                 <a:cs typeface="Arimo"/>
                 <a:sym typeface="Arimo"/>
@@ -10366,7 +12103,6 @@
                 <a:solidFill>
                   <a:srgbClr val="000000"/>
                 </a:solidFill>
-                <a:latin typeface="Arimo"/>
                 <a:ea typeface="Arimo"/>
                 <a:cs typeface="Arimo"/>
                 <a:sym typeface="Arimo"/>
@@ -10378,7 +12114,6 @@
                 <a:solidFill>
                   <a:srgbClr val="000000"/>
                 </a:solidFill>
-                <a:latin typeface="Arimo"/>
                 <a:ea typeface="Arimo"/>
                 <a:cs typeface="Arimo"/>
                 <a:sym typeface="Arimo"/>
@@ -10390,7 +12125,6 @@
                 <a:solidFill>
                   <a:srgbClr val="000000"/>
                 </a:solidFill>
-                <a:latin typeface="Arimo"/>
                 <a:ea typeface="Arimo"/>
                 <a:cs typeface="Arimo"/>
                 <a:sym typeface="Arimo"/>
@@ -10402,7 +12136,6 @@
                 <a:solidFill>
                   <a:srgbClr val="000000"/>
                 </a:solidFill>
-                <a:latin typeface="Arimo"/>
                 <a:ea typeface="Arimo"/>
                 <a:cs typeface="Arimo"/>
                 <a:sym typeface="Arimo"/>
@@ -10414,7 +12147,6 @@
                 <a:solidFill>
                   <a:srgbClr val="000000"/>
                 </a:solidFill>
-                <a:latin typeface="Arimo"/>
                 <a:ea typeface="Arimo"/>
                 <a:cs typeface="Arimo"/>
                 <a:sym typeface="Arimo"/>
@@ -10426,7 +12158,6 @@
                 <a:solidFill>
                   <a:srgbClr val="000000"/>
                 </a:solidFill>
-                <a:latin typeface="Arimo"/>
                 <a:ea typeface="Arimo"/>
                 <a:cs typeface="Arimo"/>
                 <a:sym typeface="Arimo"/>
@@ -10438,7 +12169,6 @@
                 <a:solidFill>
                   <a:srgbClr val="000000"/>
                 </a:solidFill>
-                <a:latin typeface="Arimo"/>
                 <a:ea typeface="Arimo"/>
                 <a:cs typeface="Arimo"/>
                 <a:sym typeface="Arimo"/>
@@ -10450,7 +12180,6 @@
                 <a:solidFill>
                   <a:srgbClr val="000000"/>
                 </a:solidFill>
-                <a:latin typeface="Arimo"/>
                 <a:ea typeface="Arimo"/>
                 <a:cs typeface="Arimo"/>
                 <a:sym typeface="Arimo"/>
@@ -10462,7 +12191,6 @@
                 <a:solidFill>
                   <a:srgbClr val="000000"/>
                 </a:solidFill>
-                <a:latin typeface="Arimo"/>
                 <a:ea typeface="Arimo"/>
                 <a:cs typeface="Arimo"/>
                 <a:sym typeface="Arimo"/>
@@ -10474,7 +12202,6 @@
                 <a:solidFill>
                   <a:srgbClr val="000000"/>
                 </a:solidFill>
-                <a:latin typeface="Arimo"/>
                 <a:ea typeface="Arimo"/>
                 <a:cs typeface="Arimo"/>
                 <a:sym typeface="Arimo"/>
@@ -10486,7 +12213,6 @@
                 <a:solidFill>
                   <a:srgbClr val="000000"/>
                 </a:solidFill>
-                <a:latin typeface="Arimo"/>
                 <a:ea typeface="Arimo"/>
                 <a:cs typeface="Arimo"/>
                 <a:sym typeface="Arimo"/>
@@ -10498,7 +12224,6 @@
                 <a:solidFill>
                   <a:srgbClr val="000000"/>
                 </a:solidFill>
-                <a:latin typeface="Arimo"/>
                 <a:ea typeface="Arimo"/>
                 <a:cs typeface="Arimo"/>
                 <a:sym typeface="Arimo"/>
@@ -10510,7 +12235,6 @@
                 <a:solidFill>
                   <a:srgbClr val="000000"/>
                 </a:solidFill>
-                <a:latin typeface="Arimo"/>
                 <a:ea typeface="Arimo"/>
                 <a:cs typeface="Arimo"/>
                 <a:sym typeface="Arimo"/>
@@ -10522,7 +12246,6 @@
                 <a:solidFill>
                   <a:srgbClr val="000000"/>
                 </a:solidFill>
-                <a:latin typeface="Arimo"/>
                 <a:ea typeface="Arimo"/>
                 <a:cs typeface="Arimo"/>
                 <a:sym typeface="Arimo"/>
@@ -10534,7 +12257,6 @@
                 <a:solidFill>
                   <a:srgbClr val="000000"/>
                 </a:solidFill>
-                <a:latin typeface="Arimo"/>
                 <a:ea typeface="Arimo"/>
                 <a:cs typeface="Arimo"/>
                 <a:sym typeface="Arimo"/>
@@ -10546,7 +12268,6 @@
                 <a:solidFill>
                   <a:srgbClr val="000000"/>
                 </a:solidFill>
-                <a:latin typeface="Arimo"/>
                 <a:ea typeface="Arimo"/>
                 <a:cs typeface="Arimo"/>
                 <a:sym typeface="Arimo"/>
@@ -10558,7 +12279,6 @@
                 <a:solidFill>
                   <a:srgbClr val="000000"/>
                 </a:solidFill>
-                <a:latin typeface="Arimo"/>
                 <a:ea typeface="Arimo"/>
                 <a:cs typeface="Arimo"/>
                 <a:sym typeface="Arimo"/>
@@ -10570,7 +12290,6 @@
                 <a:solidFill>
                   <a:srgbClr val="000000"/>
                 </a:solidFill>
-                <a:latin typeface="Arimo"/>
                 <a:ea typeface="Arimo"/>
                 <a:cs typeface="Arimo"/>
                 <a:sym typeface="Arimo"/>
@@ -10582,7 +12301,6 @@
                 <a:solidFill>
                   <a:srgbClr val="000000"/>
                 </a:solidFill>
-                <a:latin typeface="Arimo"/>
                 <a:ea typeface="Arimo"/>
                 <a:cs typeface="Arimo"/>
                 <a:sym typeface="Arimo"/>
@@ -10594,7 +12312,6 @@
                 <a:solidFill>
                   <a:srgbClr val="000000"/>
                 </a:solidFill>
-                <a:latin typeface="Arimo"/>
                 <a:ea typeface="Arimo"/>
                 <a:cs typeface="Arimo"/>
                 <a:sym typeface="Arimo"/>
@@ -10613,7 +12330,7 @@
         <p:spPr>
           <a:xfrm>
             <a:off x="1150371" y="1692690"/>
-            <a:ext cx="1330730" cy="449262"/>
+            <a:ext cx="1330730" cy="420115"/>
           </a:xfrm>
           <a:prstGeom prst="rect">
             <a:avLst/>
@@ -10631,11 +12348,11 @@
               </a:lnSpc>
             </a:pPr>
             <a:r>
-              <a:rPr lang="en-US" sz="2750" b="1">
-                <a:solidFill>
-                  <a:srgbClr val="000000"/>
-                </a:solidFill>
-                <a:latin typeface="Arimo Bold"/>
+              <a:rPr lang="en-US" sz="2800" b="1" dirty="0">
+                <a:solidFill>
+                  <a:srgbClr val="000000"/>
+                </a:solidFill>
+                <a:latin typeface="+mj-lt"/>
                 <a:ea typeface="Arimo Bold"/>
                 <a:cs typeface="Arimo Bold"/>
                 <a:sym typeface="Arimo Bold"/>
@@ -10672,11 +12389,10 @@
               </a:lnSpc>
             </a:pPr>
             <a:r>
-              <a:rPr lang="en-US" sz="2187" dirty="0">
-                <a:solidFill>
-                  <a:srgbClr val="000000"/>
-                </a:solidFill>
-                <a:latin typeface="Noto Sans"/>
+              <a:rPr lang="en-US" sz="2400" dirty="0">
+                <a:solidFill>
+                  <a:srgbClr val="000000"/>
+                </a:solidFill>
                 <a:ea typeface="Noto Sans"/>
                 <a:cs typeface="Noto Sans"/>
                 <a:sym typeface="Noto Sans"/>
@@ -10684,11 +12400,10 @@
               <a:t>A Lei </a:t>
             </a:r>
             <a:r>
-              <a:rPr lang="en-US" sz="2187" dirty="0" err="1">
-                <a:solidFill>
-                  <a:srgbClr val="000000"/>
-                </a:solidFill>
-                <a:latin typeface="Noto Sans"/>
+              <a:rPr lang="en-US" sz="2400" dirty="0" err="1">
+                <a:solidFill>
+                  <a:srgbClr val="000000"/>
+                </a:solidFill>
                 <a:ea typeface="Noto Sans"/>
                 <a:cs typeface="Noto Sans"/>
                 <a:sym typeface="Noto Sans"/>
@@ -10696,11 +12411,10 @@
               <a:t>Brasileira</a:t>
             </a:r>
             <a:r>
-              <a:rPr lang="en-US" sz="2187" dirty="0">
-                <a:solidFill>
-                  <a:srgbClr val="000000"/>
-                </a:solidFill>
-                <a:latin typeface="Noto Sans"/>
+              <a:rPr lang="en-US" sz="2400" dirty="0">
+                <a:solidFill>
+                  <a:srgbClr val="000000"/>
+                </a:solidFill>
                 <a:ea typeface="Noto Sans"/>
                 <a:cs typeface="Noto Sans"/>
                 <a:sym typeface="Noto Sans"/>
@@ -10708,11 +12422,10 @@
               <a:t> de </a:t>
             </a:r>
             <a:r>
-              <a:rPr lang="en-US" sz="2187" dirty="0" err="1">
-                <a:solidFill>
-                  <a:srgbClr val="000000"/>
-                </a:solidFill>
-                <a:latin typeface="Noto Sans"/>
+              <a:rPr lang="en-US" sz="2400" dirty="0" err="1">
+                <a:solidFill>
+                  <a:srgbClr val="000000"/>
+                </a:solidFill>
                 <a:ea typeface="Noto Sans"/>
                 <a:cs typeface="Noto Sans"/>
                 <a:sym typeface="Noto Sans"/>
@@ -10720,11 +12433,10 @@
               <a:t>Inclusão</a:t>
             </a:r>
             <a:r>
-              <a:rPr lang="en-US" sz="2187" dirty="0">
-                <a:solidFill>
-                  <a:srgbClr val="000000"/>
-                </a:solidFill>
-                <a:latin typeface="Noto Sans"/>
+              <a:rPr lang="en-US" sz="2400" dirty="0">
+                <a:solidFill>
+                  <a:srgbClr val="000000"/>
+                </a:solidFill>
                 <a:ea typeface="Noto Sans"/>
                 <a:cs typeface="Noto Sans"/>
                 <a:sym typeface="Noto Sans"/>
@@ -10732,11 +12444,10 @@
               <a:t>, n° 13.146 </a:t>
             </a:r>
             <a:r>
-              <a:rPr lang="en-US" sz="2187" dirty="0" err="1">
-                <a:solidFill>
-                  <a:srgbClr val="000000"/>
-                </a:solidFill>
-                <a:latin typeface="Noto Sans"/>
+              <a:rPr lang="en-US" sz="2400" dirty="0" err="1">
+                <a:solidFill>
+                  <a:srgbClr val="000000"/>
+                </a:solidFill>
                 <a:ea typeface="Noto Sans"/>
                 <a:cs typeface="Noto Sans"/>
                 <a:sym typeface="Noto Sans"/>
@@ -10744,11 +12455,10 @@
               <a:t>obriga</a:t>
             </a:r>
             <a:r>
-              <a:rPr lang="en-US" sz="2187" dirty="0">
-                <a:solidFill>
-                  <a:srgbClr val="000000"/>
-                </a:solidFill>
-                <a:latin typeface="Noto Sans"/>
+              <a:rPr lang="en-US" sz="2400" dirty="0">
+                <a:solidFill>
+                  <a:srgbClr val="000000"/>
+                </a:solidFill>
                 <a:ea typeface="Noto Sans"/>
                 <a:cs typeface="Noto Sans"/>
                 <a:sym typeface="Noto Sans"/>
@@ -10756,11 +12466,10 @@
               <a:t> o </a:t>
             </a:r>
             <a:r>
-              <a:rPr lang="en-US" sz="2187" dirty="0" err="1">
-                <a:solidFill>
-                  <a:srgbClr val="000000"/>
-                </a:solidFill>
-                <a:latin typeface="Noto Sans"/>
+              <a:rPr lang="en-US" sz="2400" dirty="0" err="1">
+                <a:solidFill>
+                  <a:srgbClr val="000000"/>
+                </a:solidFill>
                 <a:ea typeface="Noto Sans"/>
                 <a:cs typeface="Noto Sans"/>
                 <a:sym typeface="Noto Sans"/>
@@ -10768,11 +12477,10 @@
               <a:t>atendimento</a:t>
             </a:r>
             <a:r>
-              <a:rPr lang="en-US" sz="2187" dirty="0">
-                <a:solidFill>
-                  <a:srgbClr val="000000"/>
-                </a:solidFill>
-                <a:latin typeface="Noto Sans"/>
+              <a:rPr lang="en-US" sz="2400" dirty="0">
+                <a:solidFill>
+                  <a:srgbClr val="000000"/>
+                </a:solidFill>
                 <a:ea typeface="Noto Sans"/>
                 <a:cs typeface="Noto Sans"/>
                 <a:sym typeface="Noto Sans"/>
@@ -10780,11 +12488,10 @@
               <a:t> </a:t>
             </a:r>
             <a:r>
-              <a:rPr lang="en-US" sz="2187" dirty="0" err="1">
-                <a:solidFill>
-                  <a:srgbClr val="000000"/>
-                </a:solidFill>
-                <a:latin typeface="Noto Sans"/>
+              <a:rPr lang="en-US" sz="2400" dirty="0" err="1">
+                <a:solidFill>
+                  <a:srgbClr val="000000"/>
+                </a:solidFill>
                 <a:ea typeface="Noto Sans"/>
                 <a:cs typeface="Noto Sans"/>
                 <a:sym typeface="Noto Sans"/>
@@ -10792,11 +12499,10 @@
               <a:t>especializado</a:t>
             </a:r>
             <a:r>
-              <a:rPr lang="en-US" sz="2187" dirty="0">
-                <a:solidFill>
-                  <a:srgbClr val="000000"/>
-                </a:solidFill>
-                <a:latin typeface="Noto Sans"/>
+              <a:rPr lang="en-US" sz="2400" dirty="0">
+                <a:solidFill>
+                  <a:srgbClr val="000000"/>
+                </a:solidFill>
                 <a:ea typeface="Noto Sans"/>
                 <a:cs typeface="Noto Sans"/>
                 <a:sym typeface="Noto Sans"/>
@@ -10804,11 +12510,10 @@
               <a:t>, mas </a:t>
             </a:r>
             <a:r>
-              <a:rPr lang="en-US" sz="2187" dirty="0" err="1">
-                <a:solidFill>
-                  <a:srgbClr val="000000"/>
-                </a:solidFill>
-                <a:latin typeface="Noto Sans"/>
+              <a:rPr lang="en-US" sz="2400" dirty="0" err="1">
+                <a:solidFill>
+                  <a:srgbClr val="000000"/>
+                </a:solidFill>
                 <a:ea typeface="Noto Sans"/>
                 <a:cs typeface="Noto Sans"/>
                 <a:sym typeface="Noto Sans"/>
@@ -10816,11 +12521,10 @@
               <a:t>muitas</a:t>
             </a:r>
             <a:r>
-              <a:rPr lang="en-US" sz="2187" dirty="0">
-                <a:solidFill>
-                  <a:srgbClr val="000000"/>
-                </a:solidFill>
-                <a:latin typeface="Noto Sans"/>
+              <a:rPr lang="en-US" sz="2400" dirty="0">
+                <a:solidFill>
+                  <a:srgbClr val="000000"/>
+                </a:solidFill>
                 <a:ea typeface="Noto Sans"/>
                 <a:cs typeface="Noto Sans"/>
                 <a:sym typeface="Noto Sans"/>
@@ -10828,11 +12532,10 @@
               <a:t> </a:t>
             </a:r>
             <a:r>
-              <a:rPr lang="en-US" sz="2187" dirty="0" err="1">
-                <a:solidFill>
-                  <a:srgbClr val="000000"/>
-                </a:solidFill>
-                <a:latin typeface="Noto Sans"/>
+              <a:rPr lang="en-US" sz="2800" dirty="0" err="1">
+                <a:solidFill>
+                  <a:srgbClr val="000000"/>
+                </a:solidFill>
                 <a:ea typeface="Noto Sans"/>
                 <a:cs typeface="Noto Sans"/>
                 <a:sym typeface="Noto Sans"/>
@@ -10840,11 +12543,10 @@
               <a:t>escolas</a:t>
             </a:r>
             <a:r>
-              <a:rPr lang="en-US" sz="2187" dirty="0">
-                <a:solidFill>
-                  <a:srgbClr val="000000"/>
-                </a:solidFill>
-                <a:latin typeface="Noto Sans"/>
+              <a:rPr lang="en-US" sz="2400" dirty="0">
+                <a:solidFill>
+                  <a:srgbClr val="000000"/>
+                </a:solidFill>
                 <a:ea typeface="Noto Sans"/>
                 <a:cs typeface="Noto Sans"/>
                 <a:sym typeface="Noto Sans"/>
@@ -10852,11 +12554,10 @@
               <a:t> </a:t>
             </a:r>
             <a:r>
-              <a:rPr lang="en-US" sz="2187" dirty="0" err="1">
-                <a:solidFill>
-                  <a:srgbClr val="000000"/>
-                </a:solidFill>
-                <a:latin typeface="Noto Sans"/>
+              <a:rPr lang="en-US" sz="2400" dirty="0" err="1">
+                <a:solidFill>
+                  <a:srgbClr val="000000"/>
+                </a:solidFill>
                 <a:ea typeface="Noto Sans"/>
                 <a:cs typeface="Noto Sans"/>
                 <a:sym typeface="Noto Sans"/>
@@ -10864,11 +12565,10 @@
               <a:t>ainda</a:t>
             </a:r>
             <a:r>
-              <a:rPr lang="en-US" sz="2187" dirty="0">
-                <a:solidFill>
-                  <a:srgbClr val="000000"/>
-                </a:solidFill>
-                <a:latin typeface="Noto Sans"/>
+              <a:rPr lang="en-US" sz="2400" dirty="0">
+                <a:solidFill>
+                  <a:srgbClr val="000000"/>
+                </a:solidFill>
                 <a:ea typeface="Noto Sans"/>
                 <a:cs typeface="Noto Sans"/>
                 <a:sym typeface="Noto Sans"/>
@@ -10876,11 +12576,10 @@
               <a:t> </a:t>
             </a:r>
             <a:r>
-              <a:rPr lang="en-US" sz="2187" dirty="0" err="1">
-                <a:solidFill>
-                  <a:srgbClr val="000000"/>
-                </a:solidFill>
-                <a:latin typeface="Noto Sans"/>
+              <a:rPr lang="en-US" sz="2400" dirty="0" err="1">
+                <a:solidFill>
+                  <a:srgbClr val="000000"/>
+                </a:solidFill>
                 <a:ea typeface="Noto Sans"/>
                 <a:cs typeface="Noto Sans"/>
                 <a:sym typeface="Noto Sans"/>
@@ -10888,11 +12587,10 @@
               <a:t>usam</a:t>
             </a:r>
             <a:r>
-              <a:rPr lang="en-US" sz="2187" dirty="0">
-                <a:solidFill>
-                  <a:srgbClr val="000000"/>
-                </a:solidFill>
-                <a:latin typeface="Noto Sans"/>
+              <a:rPr lang="en-US" sz="2400" dirty="0">
+                <a:solidFill>
+                  <a:srgbClr val="000000"/>
+                </a:solidFill>
                 <a:ea typeface="Noto Sans"/>
                 <a:cs typeface="Noto Sans"/>
                 <a:sym typeface="Noto Sans"/>
@@ -10900,11 +12598,10 @@
               <a:t> </a:t>
             </a:r>
             <a:r>
-              <a:rPr lang="en-US" sz="2187" dirty="0" err="1">
-                <a:solidFill>
-                  <a:srgbClr val="000000"/>
-                </a:solidFill>
-                <a:latin typeface="Noto Sans"/>
+              <a:rPr lang="en-US" sz="2400" dirty="0" err="1">
+                <a:solidFill>
+                  <a:srgbClr val="000000"/>
+                </a:solidFill>
                 <a:ea typeface="Noto Sans"/>
                 <a:cs typeface="Noto Sans"/>
                 <a:sym typeface="Noto Sans"/>
@@ -10912,11 +12609,10 @@
               <a:t>planilhas</a:t>
             </a:r>
             <a:r>
-              <a:rPr lang="en-US" sz="2187" dirty="0">
-                <a:solidFill>
-                  <a:srgbClr val="000000"/>
-                </a:solidFill>
-                <a:latin typeface="Noto Sans"/>
+              <a:rPr lang="en-US" sz="2400" dirty="0">
+                <a:solidFill>
+                  <a:srgbClr val="000000"/>
+                </a:solidFill>
                 <a:ea typeface="Noto Sans"/>
                 <a:cs typeface="Noto Sans"/>
                 <a:sym typeface="Noto Sans"/>
@@ -10924,11 +12620,10 @@
               <a:t> e </a:t>
             </a:r>
             <a:r>
-              <a:rPr lang="en-US" sz="2187" dirty="0" err="1">
-                <a:solidFill>
-                  <a:srgbClr val="000000"/>
-                </a:solidFill>
-                <a:latin typeface="Noto Sans"/>
+              <a:rPr lang="en-US" sz="2400" dirty="0" err="1">
+                <a:solidFill>
+                  <a:srgbClr val="000000"/>
+                </a:solidFill>
                 <a:ea typeface="Noto Sans"/>
                 <a:cs typeface="Noto Sans"/>
                 <a:sym typeface="Noto Sans"/>
@@ -10936,11 +12631,10 @@
               <a:t>papel</a:t>
             </a:r>
             <a:r>
-              <a:rPr lang="en-US" sz="2187" dirty="0">
-                <a:solidFill>
-                  <a:srgbClr val="000000"/>
-                </a:solidFill>
-                <a:latin typeface="Noto Sans"/>
+              <a:rPr lang="en-US" sz="2400" dirty="0">
+                <a:solidFill>
+                  <a:srgbClr val="000000"/>
+                </a:solidFill>
                 <a:ea typeface="Noto Sans"/>
                 <a:cs typeface="Noto Sans"/>
                 <a:sym typeface="Noto Sans"/>
@@ -10959,7 +12653,7 @@
         <p:spPr>
           <a:xfrm>
             <a:off x="6806197" y="1692690"/>
-            <a:ext cx="1172178" cy="449262"/>
+            <a:ext cx="1172178" cy="420115"/>
           </a:xfrm>
           <a:prstGeom prst="rect">
             <a:avLst/>
@@ -10977,17 +12671,26 @@
               </a:lnSpc>
             </a:pPr>
             <a:r>
-              <a:rPr lang="en-US" sz="2750" b="1">
-                <a:solidFill>
-                  <a:srgbClr val="000000"/>
-                </a:solidFill>
-                <a:latin typeface="Arimo Bold"/>
+              <a:rPr lang="en-US" sz="2800" b="1" dirty="0" err="1">
+                <a:solidFill>
+                  <a:srgbClr val="000000"/>
+                </a:solidFill>
+                <a:latin typeface="+mj-lt"/>
                 <a:ea typeface="Arimo Bold"/>
                 <a:cs typeface="Arimo Bold"/>
                 <a:sym typeface="Arimo Bold"/>
               </a:rPr>
               <a:t>Riscos</a:t>
             </a:r>
+            <a:endParaRPr lang="en-US" sz="2800" b="1" dirty="0">
+              <a:solidFill>
+                <a:srgbClr val="000000"/>
+              </a:solidFill>
+              <a:latin typeface="+mj-lt"/>
+              <a:ea typeface="Arimo Bold"/>
+              <a:cs typeface="Arimo Bold"/>
+              <a:sym typeface="Arimo Bold"/>
+            </a:endParaRPr>
           </a:p>
         </p:txBody>
       </p:sp>
@@ -11000,7 +12703,7 @@
         <p:spPr>
           <a:xfrm>
             <a:off x="6806197" y="2258084"/>
-            <a:ext cx="4593235" cy="1309769"/>
+            <a:ext cx="4593235" cy="1343638"/>
           </a:xfrm>
           <a:prstGeom prst="rect">
             <a:avLst/>
@@ -11018,16 +12721,136 @@
               </a:lnSpc>
             </a:pPr>
             <a:r>
-              <a:rPr lang="en-US" sz="2187">
-                <a:solidFill>
-                  <a:srgbClr val="000000"/>
-                </a:solidFill>
-                <a:latin typeface="Noto Sans"/>
-                <a:ea typeface="Noto Sans"/>
-                <a:cs typeface="Noto Sans"/>
-                <a:sym typeface="Noto Sans"/>
-              </a:rPr>
-              <a:t>Perda de histórico pedagógico e, principalmente, vulnerabilidade jurídica perante a LGPD.</a:t>
+              <a:rPr lang="en-US" sz="2400" dirty="0" err="1">
+                <a:solidFill>
+                  <a:srgbClr val="000000"/>
+                </a:solidFill>
+                <a:ea typeface="Noto Sans"/>
+                <a:cs typeface="Noto Sans"/>
+                <a:sym typeface="Noto Sans"/>
+              </a:rPr>
+              <a:t>Perda</a:t>
+            </a:r>
+            <a:r>
+              <a:rPr lang="en-US" sz="2400" dirty="0">
+                <a:solidFill>
+                  <a:srgbClr val="000000"/>
+                </a:solidFill>
+                <a:ea typeface="Noto Sans"/>
+                <a:cs typeface="Noto Sans"/>
+                <a:sym typeface="Noto Sans"/>
+              </a:rPr>
+              <a:t> de histórico </a:t>
+            </a:r>
+            <a:r>
+              <a:rPr lang="en-US" sz="2400" dirty="0" err="1">
+                <a:solidFill>
+                  <a:srgbClr val="000000"/>
+                </a:solidFill>
+                <a:ea typeface="Noto Sans"/>
+                <a:cs typeface="Noto Sans"/>
+                <a:sym typeface="Noto Sans"/>
+              </a:rPr>
+              <a:t>pedagógico</a:t>
+            </a:r>
+            <a:r>
+              <a:rPr lang="en-US" sz="2400" dirty="0">
+                <a:solidFill>
+                  <a:srgbClr val="000000"/>
+                </a:solidFill>
+                <a:ea typeface="Noto Sans"/>
+                <a:cs typeface="Noto Sans"/>
+                <a:sym typeface="Noto Sans"/>
+              </a:rPr>
+              <a:t> e, </a:t>
+            </a:r>
+            <a:r>
+              <a:rPr lang="en-US" sz="2400" dirty="0" err="1">
+                <a:solidFill>
+                  <a:srgbClr val="000000"/>
+                </a:solidFill>
+                <a:ea typeface="Noto Sans"/>
+                <a:cs typeface="Noto Sans"/>
+                <a:sym typeface="Noto Sans"/>
+              </a:rPr>
+              <a:t>principalmente</a:t>
+            </a:r>
+            <a:r>
+              <a:rPr lang="en-US" sz="2400" dirty="0">
+                <a:solidFill>
+                  <a:srgbClr val="000000"/>
+                </a:solidFill>
+                <a:ea typeface="Noto Sans"/>
+                <a:cs typeface="Noto Sans"/>
+                <a:sym typeface="Noto Sans"/>
+              </a:rPr>
+              <a:t>, </a:t>
+            </a:r>
+            <a:r>
+              <a:rPr lang="en-US" sz="2400" dirty="0" err="1">
+                <a:solidFill>
+                  <a:srgbClr val="000000"/>
+                </a:solidFill>
+                <a:ea typeface="Noto Sans"/>
+                <a:cs typeface="Noto Sans"/>
+                <a:sym typeface="Noto Sans"/>
+              </a:rPr>
+              <a:t>vulnerabilidade</a:t>
+            </a:r>
+            <a:r>
+              <a:rPr lang="en-US" sz="2400" dirty="0">
+                <a:solidFill>
+                  <a:srgbClr val="000000"/>
+                </a:solidFill>
+                <a:ea typeface="Noto Sans"/>
+                <a:cs typeface="Noto Sans"/>
+                <a:sym typeface="Noto Sans"/>
+              </a:rPr>
+              <a:t> </a:t>
+            </a:r>
+            <a:r>
+              <a:rPr lang="en-US" sz="2400" dirty="0" err="1">
+                <a:solidFill>
+                  <a:srgbClr val="000000"/>
+                </a:solidFill>
+                <a:ea typeface="Noto Sans"/>
+                <a:cs typeface="Noto Sans"/>
+                <a:sym typeface="Noto Sans"/>
+              </a:rPr>
+              <a:t>jurídica</a:t>
+            </a:r>
+            <a:r>
+              <a:rPr lang="en-US" sz="2400" dirty="0">
+                <a:solidFill>
+                  <a:srgbClr val="000000"/>
+                </a:solidFill>
+                <a:ea typeface="Noto Sans"/>
+                <a:cs typeface="Noto Sans"/>
+                <a:sym typeface="Noto Sans"/>
+              </a:rPr>
+              <a:t> </a:t>
+            </a:r>
+            <a:r>
+              <a:rPr lang="en-US" sz="2400" dirty="0" err="1">
+                <a:solidFill>
+                  <a:srgbClr val="000000"/>
+                </a:solidFill>
+                <a:ea typeface="Noto Sans"/>
+                <a:cs typeface="Noto Sans"/>
+                <a:sym typeface="Noto Sans"/>
+              </a:rPr>
+              <a:t>perante</a:t>
+            </a:r>
+            <a:r>
+              <a:rPr lang="en-US" sz="2400" dirty="0">
+                <a:solidFill>
+                  <a:srgbClr val="000000"/>
+                </a:solidFill>
+                <a:ea typeface="Noto Sans"/>
+                <a:cs typeface="Noto Sans"/>
+                <a:sym typeface="Noto Sans"/>
+              </a:rPr>
+              <a:t> a LGPD.</a:t>
             </a:r>
           </a:p>
         </p:txBody>
@@ -11041,7 +12864,7 @@
         <p:spPr>
           <a:xfrm>
             <a:off x="12464908" y="1692690"/>
-            <a:ext cx="2840922" cy="449262"/>
+            <a:ext cx="2840922" cy="408766"/>
           </a:xfrm>
           <a:prstGeom prst="rect">
             <a:avLst/>
@@ -11059,7 +12882,7 @@
               </a:lnSpc>
             </a:pPr>
             <a:r>
-              <a:rPr lang="en-US" sz="2750" b="1">
+              <a:rPr lang="en-US" sz="2800" b="1" dirty="0">
                 <a:solidFill>
                   <a:srgbClr val="000000"/>
                 </a:solidFill>
@@ -11068,8 +12891,41 @@
                 <a:cs typeface="Arimo Bold"/>
                 <a:sym typeface="Arimo Bold"/>
               </a:rPr>
-              <a:t>Dados Sensíveis</a:t>
-            </a:r>
+              <a:t>Dados</a:t>
+            </a:r>
+            <a:r>
+              <a:rPr lang="en-US" sz="2750" b="1" dirty="0">
+                <a:solidFill>
+                  <a:srgbClr val="000000"/>
+                </a:solidFill>
+                <a:latin typeface="Arimo Bold"/>
+                <a:ea typeface="Arimo Bold"/>
+                <a:cs typeface="Arimo Bold"/>
+                <a:sym typeface="Arimo Bold"/>
+              </a:rPr>
+              <a:t> </a:t>
+            </a:r>
+            <a:r>
+              <a:rPr lang="en-US" sz="2750" b="1" dirty="0" err="1">
+                <a:solidFill>
+                  <a:srgbClr val="000000"/>
+                </a:solidFill>
+                <a:latin typeface="Arimo Bold"/>
+                <a:ea typeface="Arimo Bold"/>
+                <a:cs typeface="Arimo Bold"/>
+                <a:sym typeface="Arimo Bold"/>
+              </a:rPr>
+              <a:t>Sensíveis</a:t>
+            </a:r>
+            <a:endParaRPr lang="en-US" sz="2750" b="1" dirty="0">
+              <a:solidFill>
+                <a:srgbClr val="000000"/>
+              </a:solidFill>
+              <a:latin typeface="Arimo Bold"/>
+              <a:ea typeface="Arimo Bold"/>
+              <a:cs typeface="Arimo Bold"/>
+              <a:sym typeface="Arimo Bold"/>
+            </a:endParaRPr>
           </a:p>
         </p:txBody>
       </p:sp>
@@ -11082,7 +12938,7 @@
         <p:spPr>
           <a:xfrm>
             <a:off x="12464908" y="2258084"/>
-            <a:ext cx="4593235" cy="1309769"/>
+            <a:ext cx="4593235" cy="1349024"/>
           </a:xfrm>
           <a:prstGeom prst="rect">
             <a:avLst/>
@@ -11100,7 +12956,7 @@
               </a:lnSpc>
             </a:pPr>
             <a:r>
-              <a:rPr lang="en-US" sz="2187">
+              <a:rPr lang="en-US" sz="2400" dirty="0" err="1">
                 <a:solidFill>
                   <a:srgbClr val="000000"/>
                 </a:solidFill>
@@ -11109,7 +12965,211 @@
                 <a:cs typeface="Noto Sans"/>
                 <a:sym typeface="Noto Sans"/>
               </a:rPr>
-              <a:t>Laudos médicos e diagnósticos de crianças expostos sem controle de acesso adequado.</a:t>
+              <a:t>Laudos</a:t>
+            </a:r>
+            <a:r>
+              <a:rPr lang="en-US" sz="2400" dirty="0">
+                <a:solidFill>
+                  <a:srgbClr val="000000"/>
+                </a:solidFill>
+                <a:latin typeface="Noto Sans"/>
+                <a:ea typeface="Noto Sans"/>
+                <a:cs typeface="Noto Sans"/>
+                <a:sym typeface="Noto Sans"/>
+              </a:rPr>
+              <a:t> </a:t>
+            </a:r>
+            <a:r>
+              <a:rPr lang="en-US" sz="2400" dirty="0" err="1">
+                <a:solidFill>
+                  <a:srgbClr val="000000"/>
+                </a:solidFill>
+                <a:latin typeface="Noto Sans"/>
+                <a:ea typeface="Noto Sans"/>
+                <a:cs typeface="Noto Sans"/>
+                <a:sym typeface="Noto Sans"/>
+              </a:rPr>
+              <a:t>médicos</a:t>
+            </a:r>
+            <a:r>
+              <a:rPr lang="en-US" sz="2400" dirty="0">
+                <a:solidFill>
+                  <a:srgbClr val="000000"/>
+                </a:solidFill>
+                <a:latin typeface="Noto Sans"/>
+                <a:ea typeface="Noto Sans"/>
+                <a:cs typeface="Noto Sans"/>
+                <a:sym typeface="Noto Sans"/>
+              </a:rPr>
+              <a:t> e </a:t>
+            </a:r>
+            <a:r>
+              <a:rPr lang="en-US" sz="2400" dirty="0" err="1">
+                <a:solidFill>
+                  <a:srgbClr val="000000"/>
+                </a:solidFill>
+                <a:latin typeface="Noto Sans"/>
+                <a:ea typeface="Noto Sans"/>
+                <a:cs typeface="Noto Sans"/>
+                <a:sym typeface="Noto Sans"/>
+              </a:rPr>
+              <a:t>diagnósticos</a:t>
+            </a:r>
+            <a:r>
+              <a:rPr lang="en-US" sz="2400" dirty="0">
+                <a:solidFill>
+                  <a:srgbClr val="000000"/>
+                </a:solidFill>
+                <a:latin typeface="Noto Sans"/>
+                <a:ea typeface="Noto Sans"/>
+                <a:cs typeface="Noto Sans"/>
+                <a:sym typeface="Noto Sans"/>
+              </a:rPr>
+              <a:t> de </a:t>
+            </a:r>
+            <a:r>
+              <a:rPr lang="en-US" sz="2400" dirty="0" err="1">
+                <a:solidFill>
+                  <a:srgbClr val="000000"/>
+                </a:solidFill>
+                <a:latin typeface="Noto Sans"/>
+                <a:ea typeface="Noto Sans"/>
+                <a:cs typeface="Noto Sans"/>
+                <a:sym typeface="Noto Sans"/>
+              </a:rPr>
+              <a:t>crianças</a:t>
+            </a:r>
+            <a:r>
+              <a:rPr lang="en-US" sz="2400" dirty="0">
+                <a:solidFill>
+                  <a:srgbClr val="000000"/>
+                </a:solidFill>
+                <a:latin typeface="Noto Sans"/>
+                <a:ea typeface="Noto Sans"/>
+                <a:cs typeface="Noto Sans"/>
+                <a:sym typeface="Noto Sans"/>
+              </a:rPr>
+              <a:t> </a:t>
+            </a:r>
+            <a:r>
+              <a:rPr lang="en-US" sz="2400" dirty="0" err="1">
+                <a:solidFill>
+                  <a:srgbClr val="000000"/>
+                </a:solidFill>
+                <a:latin typeface="Noto Sans"/>
+                <a:ea typeface="Noto Sans"/>
+                <a:cs typeface="Noto Sans"/>
+                <a:sym typeface="Noto Sans"/>
+              </a:rPr>
+              <a:t>expostos</a:t>
+            </a:r>
+            <a:r>
+              <a:rPr lang="en-US" sz="2400" dirty="0">
+                <a:solidFill>
+                  <a:srgbClr val="000000"/>
+                </a:solidFill>
+                <a:latin typeface="Noto Sans"/>
+                <a:ea typeface="Noto Sans"/>
+                <a:cs typeface="Noto Sans"/>
+                <a:sym typeface="Noto Sans"/>
+              </a:rPr>
+              <a:t> </a:t>
+            </a:r>
+            <a:r>
+              <a:rPr lang="en-US" sz="2400" dirty="0" err="1">
+                <a:solidFill>
+                  <a:srgbClr val="000000"/>
+                </a:solidFill>
+                <a:latin typeface="Noto Sans"/>
+                <a:ea typeface="Noto Sans"/>
+                <a:cs typeface="Noto Sans"/>
+                <a:sym typeface="Noto Sans"/>
+              </a:rPr>
+              <a:t>sem</a:t>
+            </a:r>
+            <a:r>
+              <a:rPr lang="en-US" sz="2400" dirty="0">
+                <a:solidFill>
+                  <a:srgbClr val="000000"/>
+                </a:solidFill>
+                <a:latin typeface="Noto Sans"/>
+                <a:ea typeface="Noto Sans"/>
+                <a:cs typeface="Noto Sans"/>
+                <a:sym typeface="Noto Sans"/>
+              </a:rPr>
+              <a:t> </a:t>
+            </a:r>
+            <a:r>
+              <a:rPr lang="en-US" sz="2400" dirty="0" err="1">
+                <a:solidFill>
+                  <a:srgbClr val="000000"/>
+                </a:solidFill>
+                <a:latin typeface="Noto Sans"/>
+                <a:ea typeface="Noto Sans"/>
+                <a:cs typeface="Noto Sans"/>
+                <a:sym typeface="Noto Sans"/>
+              </a:rPr>
+              <a:t>controle</a:t>
+            </a:r>
+            <a:r>
+              <a:rPr lang="en-US" sz="2400" dirty="0">
+                <a:solidFill>
+                  <a:srgbClr val="000000"/>
+                </a:solidFill>
+                <a:latin typeface="Noto Sans"/>
+                <a:ea typeface="Noto Sans"/>
+                <a:cs typeface="Noto Sans"/>
+                <a:sym typeface="Noto Sans"/>
+              </a:rPr>
+              <a:t> de </a:t>
+            </a:r>
+            <a:r>
+              <a:rPr lang="en-US" sz="2400" dirty="0" err="1">
+                <a:solidFill>
+                  <a:srgbClr val="000000"/>
+                </a:solidFill>
+                <a:latin typeface="Noto Sans"/>
+                <a:ea typeface="Noto Sans"/>
+                <a:cs typeface="Noto Sans"/>
+                <a:sym typeface="Noto Sans"/>
+              </a:rPr>
+              <a:t>acesso</a:t>
+            </a:r>
+            <a:r>
+              <a:rPr lang="en-US" sz="2400" dirty="0">
+                <a:solidFill>
+                  <a:srgbClr val="000000"/>
+                </a:solidFill>
+                <a:latin typeface="Noto Sans"/>
+                <a:ea typeface="Noto Sans"/>
+                <a:cs typeface="Noto Sans"/>
+                <a:sym typeface="Noto Sans"/>
+              </a:rPr>
+              <a:t> </a:t>
+            </a:r>
+            <a:r>
+              <a:rPr lang="en-US" sz="2400" dirty="0" err="1">
+                <a:solidFill>
+                  <a:srgbClr val="000000"/>
+                </a:solidFill>
+                <a:latin typeface="Noto Sans"/>
+                <a:ea typeface="Noto Sans"/>
+                <a:cs typeface="Noto Sans"/>
+                <a:sym typeface="Noto Sans"/>
+              </a:rPr>
+              <a:t>adequado</a:t>
+            </a:r>
+            <a:r>
+              <a:rPr lang="en-US" sz="2400" dirty="0">
+                <a:solidFill>
+                  <a:srgbClr val="000000"/>
+                </a:solidFill>
+                <a:latin typeface="Noto Sans"/>
+                <a:ea typeface="Noto Sans"/>
+                <a:cs typeface="Noto Sans"/>
+                <a:sym typeface="Noto Sans"/>
+              </a:rPr>
+              <a:t>.</a:t>
             </a:r>
           </a:p>
         </p:txBody>
@@ -11148,7 +13208,7 @@
         <p:spPr>
           <a:xfrm>
             <a:off x="7667854" y="1133440"/>
-            <a:ext cx="2944767" cy="900140"/>
+            <a:ext cx="2944767" cy="851900"/>
           </a:xfrm>
           <a:prstGeom prst="rect">
             <a:avLst/>
@@ -11166,17 +13226,26 @@
               </a:lnSpc>
             </a:pPr>
             <a:r>
-              <a:rPr lang="en-US" sz="5562">
-                <a:solidFill>
-                  <a:srgbClr val="000000"/>
-                </a:solidFill>
-                <a:latin typeface="Arimo"/>
+              <a:rPr lang="en-US" sz="5562" dirty="0" err="1">
+                <a:solidFill>
+                  <a:srgbClr val="000000"/>
+                </a:solidFill>
+                <a:latin typeface="+mj-lt"/>
                 <a:ea typeface="Arimo"/>
                 <a:cs typeface="Arimo"/>
                 <a:sym typeface="Arimo"/>
               </a:rPr>
               <a:t>Objetivos</a:t>
             </a:r>
+            <a:endParaRPr lang="en-US" sz="5562" dirty="0">
+              <a:solidFill>
+                <a:srgbClr val="000000"/>
+              </a:solidFill>
+              <a:latin typeface="+mj-lt"/>
+              <a:ea typeface="Arimo"/>
+              <a:cs typeface="Arimo"/>
+              <a:sym typeface="Arimo"/>
+            </a:endParaRPr>
           </a:p>
         </p:txBody>
       </p:sp>
@@ -11354,7 +13423,7 @@
         <p:spPr>
           <a:xfrm>
             <a:off x="669798" y="2952013"/>
-            <a:ext cx="15711243" cy="4263755"/>
+            <a:ext cx="15711243" cy="4369145"/>
           </a:xfrm>
           <a:prstGeom prst="rect">
             <a:avLst/>
@@ -11375,16 +13444,28 @@
               </a:spcBef>
             </a:pPr>
             <a:r>
-              <a:rPr lang="en-US" sz="2999" b="1">
-                <a:solidFill>
-                  <a:srgbClr val="000000"/>
-                </a:solidFill>
-                <a:latin typeface="Noto Sans Bold"/>
+              <a:rPr lang="en-US" sz="2999" b="1" dirty="0" err="1">
+                <a:solidFill>
+                  <a:srgbClr val="000000"/>
+                </a:solidFill>
+                <a:latin typeface="+mj-lt"/>
                 <a:ea typeface="Noto Sans Bold"/>
                 <a:cs typeface="Noto Sans Bold"/>
                 <a:sym typeface="Noto Sans Bold"/>
               </a:rPr>
-              <a:t>Objetivo Geral:</a:t>
+              <a:t>Objetivo</a:t>
+            </a:r>
+            <a:r>
+              <a:rPr lang="en-US" sz="2999" b="1" dirty="0">
+                <a:solidFill>
+                  <a:srgbClr val="000000"/>
+                </a:solidFill>
+                <a:latin typeface="+mj-lt"/>
+                <a:ea typeface="Noto Sans Bold"/>
+                <a:cs typeface="Noto Sans Bold"/>
+                <a:sym typeface="Noto Sans Bold"/>
+              </a:rPr>
+              <a:t> Geral:</a:t>
             </a:r>
           </a:p>
           <a:p>
@@ -11396,7 +13477,7 @@
                 <a:spcPct val="0"/>
               </a:spcBef>
             </a:pPr>
-            <a:endParaRPr lang="en-US" sz="2999" b="1">
+            <a:endParaRPr lang="en-US" sz="2999" b="1" dirty="0">
               <a:solidFill>
                 <a:srgbClr val="000000"/>
               </a:solidFill>
@@ -11416,16 +13497,191 @@
               </a:spcBef>
             </a:pPr>
             <a:r>
-              <a:rPr lang="en-US" sz="2499">
-                <a:solidFill>
-                  <a:srgbClr val="000000"/>
-                </a:solidFill>
-                <a:latin typeface="Noto Sans"/>
-                <a:ea typeface="Noto Sans"/>
-                <a:cs typeface="Noto Sans"/>
-                <a:sym typeface="Noto Sans"/>
-              </a:rPr>
-              <a:t> Desenvolver um sistema web seguro e centralizado para a gestão de alunos com necessidades especiais.</a:t>
+              <a:rPr lang="en-US" sz="2499" dirty="0">
+                <a:solidFill>
+                  <a:srgbClr val="000000"/>
+                </a:solidFill>
+                <a:ea typeface="Noto Sans"/>
+                <a:cs typeface="Noto Sans"/>
+                <a:sym typeface="Noto Sans"/>
+              </a:rPr>
+              <a:t> </a:t>
+            </a:r>
+            <a:r>
+              <a:rPr lang="en-US" sz="2499" dirty="0" err="1">
+                <a:solidFill>
+                  <a:srgbClr val="000000"/>
+                </a:solidFill>
+                <a:ea typeface="Noto Sans"/>
+                <a:cs typeface="Noto Sans"/>
+                <a:sym typeface="Noto Sans"/>
+              </a:rPr>
+              <a:t>Desenvolver</a:t>
+            </a:r>
+            <a:r>
+              <a:rPr lang="en-US" sz="2499" dirty="0">
+                <a:solidFill>
+                  <a:srgbClr val="000000"/>
+                </a:solidFill>
+                <a:ea typeface="Noto Sans"/>
+                <a:cs typeface="Noto Sans"/>
+                <a:sym typeface="Noto Sans"/>
+              </a:rPr>
+              <a:t> um </a:t>
+            </a:r>
+            <a:r>
+              <a:rPr lang="en-US" sz="2499" dirty="0" err="1">
+                <a:solidFill>
+                  <a:srgbClr val="000000"/>
+                </a:solidFill>
+                <a:ea typeface="Noto Sans"/>
+                <a:cs typeface="Noto Sans"/>
+                <a:sym typeface="Noto Sans"/>
+              </a:rPr>
+              <a:t>sistema</a:t>
+            </a:r>
+            <a:r>
+              <a:rPr lang="en-US" sz="2499" dirty="0">
+                <a:solidFill>
+                  <a:srgbClr val="000000"/>
+                </a:solidFill>
+                <a:ea typeface="Noto Sans"/>
+                <a:cs typeface="Noto Sans"/>
+                <a:sym typeface="Noto Sans"/>
+              </a:rPr>
+              <a:t> web </a:t>
+            </a:r>
+            <a:r>
+              <a:rPr lang="en-US" sz="2499" dirty="0" err="1">
+                <a:solidFill>
+                  <a:srgbClr val="000000"/>
+                </a:solidFill>
+                <a:ea typeface="Noto Sans"/>
+                <a:cs typeface="Noto Sans"/>
+                <a:sym typeface="Noto Sans"/>
+              </a:rPr>
+              <a:t>seguro</a:t>
+            </a:r>
+            <a:r>
+              <a:rPr lang="en-US" sz="2499" dirty="0">
+                <a:solidFill>
+                  <a:srgbClr val="000000"/>
+                </a:solidFill>
+                <a:ea typeface="Noto Sans"/>
+                <a:cs typeface="Noto Sans"/>
+                <a:sym typeface="Noto Sans"/>
+              </a:rPr>
+              <a:t> e </a:t>
+            </a:r>
+            <a:r>
+              <a:rPr lang="en-US" sz="2499" dirty="0" err="1">
+                <a:solidFill>
+                  <a:srgbClr val="000000"/>
+                </a:solidFill>
+                <a:ea typeface="Noto Sans"/>
+                <a:cs typeface="Noto Sans"/>
+                <a:sym typeface="Noto Sans"/>
+              </a:rPr>
+              <a:t>centralizado</a:t>
+            </a:r>
+            <a:r>
+              <a:rPr lang="en-US" sz="2499" dirty="0">
+                <a:solidFill>
+                  <a:srgbClr val="000000"/>
+                </a:solidFill>
+                <a:ea typeface="Noto Sans"/>
+                <a:cs typeface="Noto Sans"/>
+                <a:sym typeface="Noto Sans"/>
+              </a:rPr>
+              <a:t> para a </a:t>
+            </a:r>
+            <a:r>
+              <a:rPr lang="en-US" sz="2499" dirty="0" err="1">
+                <a:solidFill>
+                  <a:srgbClr val="000000"/>
+                </a:solidFill>
+                <a:ea typeface="Noto Sans"/>
+                <a:cs typeface="Noto Sans"/>
+                <a:sym typeface="Noto Sans"/>
+              </a:rPr>
+              <a:t>gestão</a:t>
+            </a:r>
+            <a:r>
+              <a:rPr lang="en-US" sz="2499" dirty="0">
+                <a:solidFill>
+                  <a:srgbClr val="000000"/>
+                </a:solidFill>
+                <a:ea typeface="Noto Sans"/>
+                <a:cs typeface="Noto Sans"/>
+                <a:sym typeface="Noto Sans"/>
+              </a:rPr>
+              <a:t> de </a:t>
+            </a:r>
+            <a:r>
+              <a:rPr lang="en-US" sz="2499" dirty="0" err="1">
+                <a:solidFill>
+                  <a:srgbClr val="000000"/>
+                </a:solidFill>
+                <a:ea typeface="Noto Sans"/>
+                <a:cs typeface="Noto Sans"/>
+                <a:sym typeface="Noto Sans"/>
+              </a:rPr>
+              <a:t>alunos</a:t>
+            </a:r>
+            <a:r>
+              <a:rPr lang="en-US" sz="2499" dirty="0">
+                <a:solidFill>
+                  <a:srgbClr val="000000"/>
+                </a:solidFill>
+                <a:ea typeface="Noto Sans"/>
+                <a:cs typeface="Noto Sans"/>
+                <a:sym typeface="Noto Sans"/>
+              </a:rPr>
+              <a:t> com </a:t>
+            </a:r>
+            <a:r>
+              <a:rPr lang="en-US" sz="2499" dirty="0" err="1">
+                <a:solidFill>
+                  <a:srgbClr val="000000"/>
+                </a:solidFill>
+                <a:ea typeface="Noto Sans"/>
+                <a:cs typeface="Noto Sans"/>
+                <a:sym typeface="Noto Sans"/>
+              </a:rPr>
+              <a:t>necessidades</a:t>
+            </a:r>
+            <a:r>
+              <a:rPr lang="en-US" sz="2499" dirty="0">
+                <a:solidFill>
+                  <a:srgbClr val="000000"/>
+                </a:solidFill>
+                <a:ea typeface="Noto Sans"/>
+                <a:cs typeface="Noto Sans"/>
+                <a:sym typeface="Noto Sans"/>
+              </a:rPr>
+              <a:t> </a:t>
+            </a:r>
+            <a:r>
+              <a:rPr lang="en-US" sz="2499" dirty="0" err="1">
+                <a:solidFill>
+                  <a:srgbClr val="000000"/>
+                </a:solidFill>
+                <a:ea typeface="Noto Sans"/>
+                <a:cs typeface="Noto Sans"/>
+                <a:sym typeface="Noto Sans"/>
+              </a:rPr>
+              <a:t>especiais</a:t>
+            </a:r>
+            <a:r>
+              <a:rPr lang="en-US" sz="2499" dirty="0">
+                <a:solidFill>
+                  <a:srgbClr val="000000"/>
+                </a:solidFill>
+                <a:ea typeface="Noto Sans"/>
+                <a:cs typeface="Noto Sans"/>
+                <a:sym typeface="Noto Sans"/>
+              </a:rPr>
+              <a:t>.</a:t>
             </a:r>
           </a:p>
           <a:p>
@@ -11437,7 +13693,7 @@
                 <a:spcPct val="0"/>
               </a:spcBef>
             </a:pPr>
-            <a:endParaRPr lang="en-US" sz="2499">
+            <a:endParaRPr lang="en-US" sz="2499" dirty="0">
               <a:solidFill>
                 <a:srgbClr val="000000"/>
               </a:solidFill>
@@ -11457,16 +13713,52 @@
               </a:spcBef>
             </a:pPr>
             <a:r>
-              <a:rPr lang="en-US" sz="2999" b="1">
-                <a:solidFill>
-                  <a:srgbClr val="000000"/>
-                </a:solidFill>
-                <a:latin typeface="Noto Sans Bold"/>
+              <a:rPr lang="en-US" sz="2999" b="1" dirty="0" err="1">
+                <a:solidFill>
+                  <a:srgbClr val="000000"/>
+                </a:solidFill>
+                <a:latin typeface="+mj-lt"/>
                 <a:ea typeface="Noto Sans Bold"/>
                 <a:cs typeface="Noto Sans Bold"/>
                 <a:sym typeface="Noto Sans Bold"/>
               </a:rPr>
-              <a:t>Objetivos Específicos:  </a:t>
+              <a:t>Objetivos</a:t>
+            </a:r>
+            <a:r>
+              <a:rPr lang="en-US" sz="2999" b="1" dirty="0">
+                <a:solidFill>
+                  <a:srgbClr val="000000"/>
+                </a:solidFill>
+                <a:latin typeface="+mj-lt"/>
+                <a:ea typeface="Noto Sans Bold"/>
+                <a:cs typeface="Noto Sans Bold"/>
+                <a:sym typeface="Noto Sans Bold"/>
+              </a:rPr>
+              <a:t> </a:t>
+            </a:r>
+            <a:r>
+              <a:rPr lang="en-US" sz="2999" b="1" dirty="0" err="1">
+                <a:solidFill>
+                  <a:srgbClr val="000000"/>
+                </a:solidFill>
+                <a:latin typeface="+mj-lt"/>
+                <a:ea typeface="Noto Sans Bold"/>
+                <a:cs typeface="Noto Sans Bold"/>
+                <a:sym typeface="Noto Sans Bold"/>
+              </a:rPr>
+              <a:t>Específicos</a:t>
+            </a:r>
+            <a:r>
+              <a:rPr lang="en-US" sz="2999" b="1" dirty="0">
+                <a:solidFill>
+                  <a:srgbClr val="000000"/>
+                </a:solidFill>
+                <a:latin typeface="+mj-lt"/>
+                <a:ea typeface="Noto Sans Bold"/>
+                <a:cs typeface="Noto Sans Bold"/>
+                <a:sym typeface="Noto Sans Bold"/>
+              </a:rPr>
+              <a:t>:  </a:t>
             </a:r>
           </a:p>
           <a:p>
@@ -11478,7 +13770,7 @@
                 <a:spcPct val="0"/>
               </a:spcBef>
             </a:pPr>
-            <a:endParaRPr lang="en-US" sz="2999" b="1">
+            <a:endParaRPr lang="en-US" sz="2999" b="1" dirty="0">
               <a:solidFill>
                 <a:srgbClr val="000000"/>
               </a:solidFill>
@@ -11497,16 +13789,114 @@
               <a:buChar char="•"/>
             </a:pPr>
             <a:r>
-              <a:rPr lang="en-US" sz="2499">
-                <a:solidFill>
-                  <a:srgbClr val="000000"/>
-                </a:solidFill>
-                <a:latin typeface="Noto Sans"/>
-                <a:ea typeface="Noto Sans"/>
-                <a:cs typeface="Noto Sans"/>
-                <a:sym typeface="Noto Sans"/>
-              </a:rPr>
-              <a:t>Substituir registros manuais por um "cofre digital".</a:t>
+              <a:rPr lang="en-US" sz="2499" dirty="0" err="1">
+                <a:solidFill>
+                  <a:srgbClr val="000000"/>
+                </a:solidFill>
+                <a:ea typeface="Noto Sans"/>
+                <a:cs typeface="Noto Sans"/>
+                <a:sym typeface="Noto Sans"/>
+              </a:rPr>
+              <a:t>Substituir</a:t>
+            </a:r>
+            <a:r>
+              <a:rPr lang="en-US" sz="2499" dirty="0">
+                <a:solidFill>
+                  <a:srgbClr val="000000"/>
+                </a:solidFill>
+                <a:ea typeface="Noto Sans"/>
+                <a:cs typeface="Noto Sans"/>
+                <a:sym typeface="Noto Sans"/>
+              </a:rPr>
+              <a:t> </a:t>
+            </a:r>
+            <a:r>
+              <a:rPr lang="en-US" sz="2499" dirty="0" err="1">
+                <a:solidFill>
+                  <a:srgbClr val="000000"/>
+                </a:solidFill>
+                <a:ea typeface="Noto Sans"/>
+                <a:cs typeface="Noto Sans"/>
+                <a:sym typeface="Noto Sans"/>
+              </a:rPr>
+              <a:t>registros</a:t>
+            </a:r>
+            <a:r>
+              <a:rPr lang="en-US" sz="2499" dirty="0">
+                <a:solidFill>
+                  <a:srgbClr val="000000"/>
+                </a:solidFill>
+                <a:ea typeface="Noto Sans"/>
+                <a:cs typeface="Noto Sans"/>
+                <a:sym typeface="Noto Sans"/>
+              </a:rPr>
+              <a:t> </a:t>
+            </a:r>
+            <a:r>
+              <a:rPr lang="en-US" sz="2499" dirty="0" err="1">
+                <a:solidFill>
+                  <a:srgbClr val="000000"/>
+                </a:solidFill>
+                <a:ea typeface="Noto Sans"/>
+                <a:cs typeface="Noto Sans"/>
+                <a:sym typeface="Noto Sans"/>
+              </a:rPr>
+              <a:t>manuais</a:t>
+            </a:r>
+            <a:r>
+              <a:rPr lang="en-US" sz="2499" dirty="0">
+                <a:solidFill>
+                  <a:srgbClr val="000000"/>
+                </a:solidFill>
+                <a:ea typeface="Noto Sans"/>
+                <a:cs typeface="Noto Sans"/>
+                <a:sym typeface="Noto Sans"/>
+              </a:rPr>
+              <a:t> </a:t>
+            </a:r>
+            <a:r>
+              <a:rPr lang="en-US" sz="2499" dirty="0" err="1">
+                <a:solidFill>
+                  <a:srgbClr val="000000"/>
+                </a:solidFill>
+                <a:ea typeface="Noto Sans"/>
+                <a:cs typeface="Noto Sans"/>
+                <a:sym typeface="Noto Sans"/>
+              </a:rPr>
+              <a:t>por</a:t>
+            </a:r>
+            <a:r>
+              <a:rPr lang="en-US" sz="2499" dirty="0">
+                <a:solidFill>
+                  <a:srgbClr val="000000"/>
+                </a:solidFill>
+                <a:ea typeface="Noto Sans"/>
+                <a:cs typeface="Noto Sans"/>
+                <a:sym typeface="Noto Sans"/>
+              </a:rPr>
+              <a:t> um "</a:t>
+            </a:r>
+            <a:r>
+              <a:rPr lang="en-US" sz="2499" dirty="0" err="1">
+                <a:solidFill>
+                  <a:srgbClr val="000000"/>
+                </a:solidFill>
+                <a:ea typeface="Noto Sans"/>
+                <a:cs typeface="Noto Sans"/>
+                <a:sym typeface="Noto Sans"/>
+              </a:rPr>
+              <a:t>cofre</a:t>
+            </a:r>
+            <a:r>
+              <a:rPr lang="en-US" sz="2499" dirty="0">
+                <a:solidFill>
+                  <a:srgbClr val="000000"/>
+                </a:solidFill>
+                <a:ea typeface="Noto Sans"/>
+                <a:cs typeface="Noto Sans"/>
+                <a:sym typeface="Noto Sans"/>
+              </a:rPr>
+              <a:t> digital".</a:t>
             </a:r>
           </a:p>
           <a:p>
@@ -11518,16 +13908,92 @@
               <a:buChar char="•"/>
             </a:pPr>
             <a:r>
-              <a:rPr lang="en-US" sz="2499">
-                <a:solidFill>
-                  <a:srgbClr val="000000"/>
-                </a:solidFill>
-                <a:latin typeface="Noto Sans"/>
-                <a:ea typeface="Noto Sans"/>
-                <a:cs typeface="Noto Sans"/>
-                <a:sym typeface="Noto Sans"/>
-              </a:rPr>
-              <a:t>Implementar segurança em nível de banco de dados (RLS).</a:t>
+              <a:rPr lang="en-US" sz="2499" dirty="0" err="1">
+                <a:solidFill>
+                  <a:srgbClr val="000000"/>
+                </a:solidFill>
+                <a:ea typeface="Noto Sans"/>
+                <a:cs typeface="Noto Sans"/>
+                <a:sym typeface="Noto Sans"/>
+              </a:rPr>
+              <a:t>Implementar</a:t>
+            </a:r>
+            <a:r>
+              <a:rPr lang="en-US" sz="2499" dirty="0">
+                <a:solidFill>
+                  <a:srgbClr val="000000"/>
+                </a:solidFill>
+                <a:ea typeface="Noto Sans"/>
+                <a:cs typeface="Noto Sans"/>
+                <a:sym typeface="Noto Sans"/>
+              </a:rPr>
+              <a:t> </a:t>
+            </a:r>
+            <a:r>
+              <a:rPr lang="en-US" sz="2499" dirty="0" err="1">
+                <a:solidFill>
+                  <a:srgbClr val="000000"/>
+                </a:solidFill>
+                <a:ea typeface="Noto Sans"/>
+                <a:cs typeface="Noto Sans"/>
+                <a:sym typeface="Noto Sans"/>
+              </a:rPr>
+              <a:t>segurança</a:t>
+            </a:r>
+            <a:r>
+              <a:rPr lang="en-US" sz="2499" dirty="0">
+                <a:solidFill>
+                  <a:srgbClr val="000000"/>
+                </a:solidFill>
+                <a:ea typeface="Noto Sans"/>
+                <a:cs typeface="Noto Sans"/>
+                <a:sym typeface="Noto Sans"/>
+              </a:rPr>
+              <a:t> </a:t>
+            </a:r>
+            <a:r>
+              <a:rPr lang="en-US" sz="2499" dirty="0" err="1">
+                <a:solidFill>
+                  <a:srgbClr val="000000"/>
+                </a:solidFill>
+                <a:ea typeface="Noto Sans"/>
+                <a:cs typeface="Noto Sans"/>
+                <a:sym typeface="Noto Sans"/>
+              </a:rPr>
+              <a:t>em</a:t>
+            </a:r>
+            <a:r>
+              <a:rPr lang="en-US" sz="2499" dirty="0">
+                <a:solidFill>
+                  <a:srgbClr val="000000"/>
+                </a:solidFill>
+                <a:ea typeface="Noto Sans"/>
+                <a:cs typeface="Noto Sans"/>
+                <a:sym typeface="Noto Sans"/>
+              </a:rPr>
+              <a:t> </a:t>
+            </a:r>
+            <a:r>
+              <a:rPr lang="en-US" sz="2499" dirty="0" err="1">
+                <a:solidFill>
+                  <a:srgbClr val="000000"/>
+                </a:solidFill>
+                <a:ea typeface="Noto Sans"/>
+                <a:cs typeface="Noto Sans"/>
+                <a:sym typeface="Noto Sans"/>
+              </a:rPr>
+              <a:t>nível</a:t>
+            </a:r>
+            <a:r>
+              <a:rPr lang="en-US" sz="2499" dirty="0">
+                <a:solidFill>
+                  <a:srgbClr val="000000"/>
+                </a:solidFill>
+                <a:ea typeface="Noto Sans"/>
+                <a:cs typeface="Noto Sans"/>
+                <a:sym typeface="Noto Sans"/>
+              </a:rPr>
+              <a:t> de banco de dados (RLS).</a:t>
             </a:r>
           </a:p>
           <a:p>
@@ -11539,16 +14005,125 @@
               <a:buChar char="•"/>
             </a:pPr>
             <a:r>
-              <a:rPr lang="en-US" sz="2499">
-                <a:solidFill>
-                  <a:srgbClr val="000000"/>
-                </a:solidFill>
-                <a:latin typeface="Noto Sans"/>
-                <a:ea typeface="Noto Sans"/>
-                <a:cs typeface="Noto Sans"/>
-                <a:sym typeface="Noto Sans"/>
-              </a:rPr>
-              <a:t>Validar a aplicação contra vulnerabilidades críticas através de pentests.</a:t>
+              <a:rPr lang="en-US" sz="2499" dirty="0">
+                <a:solidFill>
+                  <a:srgbClr val="000000"/>
+                </a:solidFill>
+                <a:ea typeface="Noto Sans"/>
+                <a:cs typeface="Noto Sans"/>
+                <a:sym typeface="Noto Sans"/>
+              </a:rPr>
+              <a:t>Validar a </a:t>
+            </a:r>
+            <a:r>
+              <a:rPr lang="en-US" sz="2499" dirty="0" err="1">
+                <a:solidFill>
+                  <a:srgbClr val="000000"/>
+                </a:solidFill>
+                <a:ea typeface="Noto Sans"/>
+                <a:cs typeface="Noto Sans"/>
+                <a:sym typeface="Noto Sans"/>
+              </a:rPr>
+              <a:t>aplicação</a:t>
+            </a:r>
+            <a:r>
+              <a:rPr lang="en-US" sz="2499" dirty="0">
+                <a:solidFill>
+                  <a:srgbClr val="000000"/>
+                </a:solidFill>
+                <a:ea typeface="Noto Sans"/>
+                <a:cs typeface="Noto Sans"/>
+                <a:sym typeface="Noto Sans"/>
+              </a:rPr>
+              <a:t> contra </a:t>
+            </a:r>
+            <a:r>
+              <a:rPr lang="en-US" sz="2499" dirty="0" err="1">
+                <a:solidFill>
+                  <a:srgbClr val="000000"/>
+                </a:solidFill>
+                <a:ea typeface="Noto Sans"/>
+                <a:cs typeface="Noto Sans"/>
+                <a:sym typeface="Noto Sans"/>
+              </a:rPr>
+              <a:t>vulnerabilidades</a:t>
+            </a:r>
+            <a:r>
+              <a:rPr lang="en-US" sz="2499" dirty="0">
+                <a:solidFill>
+                  <a:srgbClr val="000000"/>
+                </a:solidFill>
+                <a:ea typeface="Noto Sans"/>
+                <a:cs typeface="Noto Sans"/>
+                <a:sym typeface="Noto Sans"/>
+              </a:rPr>
+              <a:t> </a:t>
+            </a:r>
+            <a:r>
+              <a:rPr lang="en-US" sz="2499" dirty="0" err="1">
+                <a:solidFill>
+                  <a:srgbClr val="000000"/>
+                </a:solidFill>
+                <a:ea typeface="Noto Sans"/>
+                <a:cs typeface="Noto Sans"/>
+                <a:sym typeface="Noto Sans"/>
+              </a:rPr>
+              <a:t>críticas</a:t>
+            </a:r>
+            <a:r>
+              <a:rPr lang="en-US" sz="2499" dirty="0">
+                <a:solidFill>
+                  <a:srgbClr val="000000"/>
+                </a:solidFill>
+                <a:ea typeface="Noto Sans"/>
+                <a:cs typeface="Noto Sans"/>
+                <a:sym typeface="Noto Sans"/>
+              </a:rPr>
+              <a:t> </a:t>
+            </a:r>
+            <a:r>
+              <a:rPr lang="en-US" sz="2499" dirty="0" err="1">
+                <a:solidFill>
+                  <a:srgbClr val="000000"/>
+                </a:solidFill>
+                <a:ea typeface="Noto Sans"/>
+                <a:cs typeface="Noto Sans"/>
+                <a:sym typeface="Noto Sans"/>
+              </a:rPr>
+              <a:t>através</a:t>
+            </a:r>
+            <a:r>
+              <a:rPr lang="en-US" sz="2499" dirty="0">
+                <a:solidFill>
+                  <a:srgbClr val="000000"/>
+                </a:solidFill>
+                <a:ea typeface="Noto Sans"/>
+                <a:cs typeface="Noto Sans"/>
+                <a:sym typeface="Noto Sans"/>
+              </a:rPr>
+              <a:t> de </a:t>
+            </a:r>
+            <a:r>
+              <a:rPr lang="en-US" sz="2499" dirty="0" err="1">
+                <a:solidFill>
+                  <a:srgbClr val="000000"/>
+                </a:solidFill>
+                <a:ea typeface="Noto Sans"/>
+                <a:cs typeface="Noto Sans"/>
+                <a:sym typeface="Noto Sans"/>
+              </a:rPr>
+              <a:t>pentests</a:t>
+            </a:r>
+            <a:r>
+              <a:rPr lang="en-US" sz="2499" dirty="0">
+                <a:solidFill>
+                  <a:srgbClr val="000000"/>
+                </a:solidFill>
+                <a:ea typeface="Noto Sans"/>
+                <a:cs typeface="Noto Sans"/>
+                <a:sym typeface="Noto Sans"/>
+              </a:rPr>
+              <a:t>.</a:t>
             </a:r>
           </a:p>
         </p:txBody>
@@ -11960,7 +14535,7 @@
         <p:spPr>
           <a:xfrm>
             <a:off x="4696884" y="1156926"/>
-            <a:ext cx="7657072" cy="900140"/>
+            <a:ext cx="7657072" cy="851900"/>
           </a:xfrm>
           <a:prstGeom prst="rect">
             <a:avLst/>
@@ -11978,17 +14553,50 @@
               </a:lnSpc>
             </a:pPr>
             <a:r>
-              <a:rPr lang="en-US" sz="5562">
-                <a:solidFill>
-                  <a:srgbClr val="000000"/>
-                </a:solidFill>
-                <a:latin typeface="Arimo"/>
-                <a:ea typeface="Arimo"/>
-                <a:cs typeface="Arimo"/>
-                <a:sym typeface="Arimo"/>
-              </a:rPr>
-              <a:t>Fundamentação Teórica</a:t>
-            </a:r>
+              <a:rPr lang="en-US" sz="5562" dirty="0" err="1">
+                <a:solidFill>
+                  <a:srgbClr val="000000"/>
+                </a:solidFill>
+                <a:latin typeface="+mj-lt"/>
+                <a:ea typeface="Arimo"/>
+                <a:cs typeface="Arimo"/>
+                <a:sym typeface="Arimo"/>
+              </a:rPr>
+              <a:t>Fundamentação</a:t>
+            </a:r>
+            <a:r>
+              <a:rPr lang="en-US" sz="5562" dirty="0">
+                <a:solidFill>
+                  <a:srgbClr val="000000"/>
+                </a:solidFill>
+                <a:latin typeface="+mj-lt"/>
+                <a:ea typeface="Arimo"/>
+                <a:cs typeface="Arimo"/>
+                <a:sym typeface="Arimo"/>
+              </a:rPr>
+              <a:t> </a:t>
+            </a:r>
+            <a:r>
+              <a:rPr lang="en-US" sz="5562" dirty="0" err="1">
+                <a:solidFill>
+                  <a:srgbClr val="000000"/>
+                </a:solidFill>
+                <a:latin typeface="+mj-lt"/>
+                <a:ea typeface="Arimo"/>
+                <a:cs typeface="Arimo"/>
+                <a:sym typeface="Arimo"/>
+              </a:rPr>
+              <a:t>Teórica</a:t>
+            </a:r>
+            <a:endParaRPr lang="en-US" sz="5562" dirty="0">
+              <a:solidFill>
+                <a:srgbClr val="000000"/>
+              </a:solidFill>
+              <a:latin typeface="+mj-lt"/>
+              <a:ea typeface="Arimo"/>
+              <a:cs typeface="Arimo"/>
+              <a:sym typeface="Arimo"/>
+            </a:endParaRPr>
           </a:p>
         </p:txBody>
       </p:sp>
@@ -12001,7 +14609,7 @@
         <p:spPr>
           <a:xfrm>
             <a:off x="5735372" y="3141281"/>
-            <a:ext cx="11523928" cy="6021387"/>
+            <a:ext cx="11523928" cy="5216300"/>
           </a:xfrm>
           <a:prstGeom prst="rect">
             <a:avLst/>
@@ -12021,16 +14629,224 @@
               <a:buChar char="•"/>
             </a:pPr>
             <a:r>
-              <a:rPr lang="en-US" sz="2750">
-                <a:solidFill>
-                  <a:srgbClr val="000000"/>
-                </a:solidFill>
-                <a:latin typeface="Arimo"/>
-                <a:ea typeface="Arimo"/>
-                <a:cs typeface="Arimo"/>
-                <a:sym typeface="Arimo"/>
-              </a:rPr>
-              <a:t>Educação Inclusiva: Diretrizes da Lei nº 13.146/2015 (Estatuto da Pessoa com Deficiência) e a importância da gestão do Atendimento Educacional Especializado (AEE).</a:t>
+              <a:rPr lang="en-US" sz="2750" dirty="0" err="1">
+                <a:solidFill>
+                  <a:srgbClr val="000000"/>
+                </a:solidFill>
+                <a:ea typeface="Arimo"/>
+                <a:cs typeface="Arimo"/>
+                <a:sym typeface="Arimo"/>
+              </a:rPr>
+              <a:t>Educação</a:t>
+            </a:r>
+            <a:r>
+              <a:rPr lang="en-US" sz="2750" dirty="0">
+                <a:solidFill>
+                  <a:srgbClr val="000000"/>
+                </a:solidFill>
+                <a:ea typeface="Arimo"/>
+                <a:cs typeface="Arimo"/>
+                <a:sym typeface="Arimo"/>
+              </a:rPr>
+              <a:t> </a:t>
+            </a:r>
+            <a:r>
+              <a:rPr lang="en-US" sz="2750" dirty="0" err="1">
+                <a:solidFill>
+                  <a:srgbClr val="000000"/>
+                </a:solidFill>
+                <a:ea typeface="Arimo"/>
+                <a:cs typeface="Arimo"/>
+                <a:sym typeface="Arimo"/>
+              </a:rPr>
+              <a:t>Inclusiva</a:t>
+            </a:r>
+            <a:r>
+              <a:rPr lang="en-US" sz="2750" dirty="0">
+                <a:solidFill>
+                  <a:srgbClr val="000000"/>
+                </a:solidFill>
+                <a:ea typeface="Arimo"/>
+                <a:cs typeface="Arimo"/>
+                <a:sym typeface="Arimo"/>
+              </a:rPr>
+              <a:t>: </a:t>
+            </a:r>
+            <a:r>
+              <a:rPr lang="en-US" sz="2750" dirty="0" err="1">
+                <a:solidFill>
+                  <a:srgbClr val="000000"/>
+                </a:solidFill>
+                <a:ea typeface="Arimo"/>
+                <a:cs typeface="Arimo"/>
+                <a:sym typeface="Arimo"/>
+              </a:rPr>
+              <a:t>Diretrizes</a:t>
+            </a:r>
+            <a:r>
+              <a:rPr lang="en-US" sz="2750" dirty="0">
+                <a:solidFill>
+                  <a:srgbClr val="000000"/>
+                </a:solidFill>
+                <a:ea typeface="Arimo"/>
+                <a:cs typeface="Arimo"/>
+                <a:sym typeface="Arimo"/>
+              </a:rPr>
+              <a:t> da Lei nº 13.146/2015 (</a:t>
+            </a:r>
+            <a:r>
+              <a:rPr lang="en-US" sz="2750" dirty="0" err="1">
+                <a:solidFill>
+                  <a:srgbClr val="000000"/>
+                </a:solidFill>
+                <a:ea typeface="Arimo"/>
+                <a:cs typeface="Arimo"/>
+                <a:sym typeface="Arimo"/>
+              </a:rPr>
+              <a:t>Estatuto</a:t>
+            </a:r>
+            <a:r>
+              <a:rPr lang="en-US" sz="2750" dirty="0">
+                <a:solidFill>
+                  <a:srgbClr val="000000"/>
+                </a:solidFill>
+                <a:ea typeface="Arimo"/>
+                <a:cs typeface="Arimo"/>
+                <a:sym typeface="Arimo"/>
+              </a:rPr>
+              <a:t> da Pessoa com </a:t>
+            </a:r>
+            <a:r>
+              <a:rPr lang="en-US" sz="2750" dirty="0" err="1">
+                <a:solidFill>
+                  <a:srgbClr val="000000"/>
+                </a:solidFill>
+                <a:ea typeface="Arimo"/>
+                <a:cs typeface="Arimo"/>
+                <a:sym typeface="Arimo"/>
+              </a:rPr>
+              <a:t>Deficiência</a:t>
+            </a:r>
+            <a:r>
+              <a:rPr lang="en-US" sz="2750" dirty="0">
+                <a:solidFill>
+                  <a:srgbClr val="000000"/>
+                </a:solidFill>
+                <a:ea typeface="Arimo"/>
+                <a:cs typeface="Arimo"/>
+                <a:sym typeface="Arimo"/>
+              </a:rPr>
+              <a:t>) e a </a:t>
+            </a:r>
+            <a:r>
+              <a:rPr lang="en-US" sz="2750" dirty="0" err="1">
+                <a:solidFill>
+                  <a:srgbClr val="000000"/>
+                </a:solidFill>
+                <a:ea typeface="Arimo"/>
+                <a:cs typeface="Arimo"/>
+                <a:sym typeface="Arimo"/>
+              </a:rPr>
+              <a:t>importância</a:t>
+            </a:r>
+            <a:r>
+              <a:rPr lang="en-US" sz="2750" dirty="0">
+                <a:solidFill>
+                  <a:srgbClr val="000000"/>
+                </a:solidFill>
+                <a:ea typeface="Arimo"/>
+                <a:cs typeface="Arimo"/>
+                <a:sym typeface="Arimo"/>
+              </a:rPr>
+              <a:t> da </a:t>
+            </a:r>
+            <a:r>
+              <a:rPr lang="en-US" sz="2750" dirty="0" err="1">
+                <a:solidFill>
+                  <a:srgbClr val="000000"/>
+                </a:solidFill>
+                <a:ea typeface="Arimo"/>
+                <a:cs typeface="Arimo"/>
+                <a:sym typeface="Arimo"/>
+              </a:rPr>
+              <a:t>gestão</a:t>
+            </a:r>
+            <a:r>
+              <a:rPr lang="en-US" sz="2750" dirty="0">
+                <a:solidFill>
+                  <a:srgbClr val="000000"/>
+                </a:solidFill>
+                <a:ea typeface="Arimo"/>
+                <a:cs typeface="Arimo"/>
+                <a:sym typeface="Arimo"/>
+              </a:rPr>
+              <a:t> do </a:t>
+            </a:r>
+            <a:r>
+              <a:rPr lang="en-US" sz="2750" dirty="0" err="1">
+                <a:solidFill>
+                  <a:srgbClr val="000000"/>
+                </a:solidFill>
+                <a:ea typeface="Arimo"/>
+                <a:cs typeface="Arimo"/>
+                <a:sym typeface="Arimo"/>
+              </a:rPr>
+              <a:t>Atendimento</a:t>
+            </a:r>
+            <a:r>
+              <a:rPr lang="en-US" sz="2750" dirty="0">
+                <a:solidFill>
+                  <a:srgbClr val="000000"/>
+                </a:solidFill>
+                <a:ea typeface="Arimo"/>
+                <a:cs typeface="Arimo"/>
+                <a:sym typeface="Arimo"/>
+              </a:rPr>
+              <a:t> </a:t>
+            </a:r>
+            <a:r>
+              <a:rPr lang="en-US" sz="2750" dirty="0" err="1">
+                <a:solidFill>
+                  <a:srgbClr val="000000"/>
+                </a:solidFill>
+                <a:ea typeface="Arimo"/>
+                <a:cs typeface="Arimo"/>
+                <a:sym typeface="Arimo"/>
+              </a:rPr>
+              <a:t>Educacional</a:t>
+            </a:r>
+            <a:r>
+              <a:rPr lang="en-US" sz="2750" dirty="0">
+                <a:solidFill>
+                  <a:srgbClr val="000000"/>
+                </a:solidFill>
+                <a:ea typeface="Arimo"/>
+                <a:cs typeface="Arimo"/>
+                <a:sym typeface="Arimo"/>
+              </a:rPr>
+              <a:t> </a:t>
+            </a:r>
+            <a:r>
+              <a:rPr lang="en-US" sz="2750" dirty="0" err="1">
+                <a:solidFill>
+                  <a:srgbClr val="000000"/>
+                </a:solidFill>
+                <a:ea typeface="Arimo"/>
+                <a:cs typeface="Arimo"/>
+                <a:sym typeface="Arimo"/>
+              </a:rPr>
+              <a:t>Especializado</a:t>
+            </a:r>
+            <a:r>
+              <a:rPr lang="en-US" sz="2750" dirty="0">
+                <a:solidFill>
+                  <a:srgbClr val="000000"/>
+                </a:solidFill>
+                <a:ea typeface="Arimo"/>
+                <a:cs typeface="Arimo"/>
+                <a:sym typeface="Arimo"/>
+              </a:rPr>
+              <a:t> (AEE).</a:t>
             </a:r>
           </a:p>
           <a:p>
@@ -12039,11 +14855,10 @@
                 <a:spcPts val="3437"/>
               </a:lnSpc>
             </a:pPr>
-            <a:endParaRPr lang="en-US" sz="2750">
+            <a:endParaRPr lang="en-US" sz="2750" dirty="0">
               <a:solidFill>
                 <a:srgbClr val="000000"/>
               </a:solidFill>
-              <a:latin typeface="Arimo"/>
               <a:ea typeface="Arimo"/>
               <a:cs typeface="Arimo"/>
               <a:sym typeface="Arimo"/>
@@ -12058,16 +14873,202 @@
               <a:buChar char="•"/>
             </a:pPr>
             <a:r>
-              <a:rPr lang="en-US" sz="2750">
-                <a:solidFill>
-                  <a:srgbClr val="000000"/>
-                </a:solidFill>
-                <a:latin typeface="Arimo"/>
-                <a:ea typeface="Arimo"/>
-                <a:cs typeface="Arimo"/>
-                <a:sym typeface="Arimo"/>
-              </a:rPr>
-              <a:t>Privacidade e Ética: Diretrizes da LGPD (Lei nº 13.709/2018) focadas no "melhor interesse" e proteção de dados sensíveis de menores de idade.</a:t>
+              <a:rPr lang="en-US" sz="2750" dirty="0" err="1">
+                <a:solidFill>
+                  <a:srgbClr val="000000"/>
+                </a:solidFill>
+                <a:ea typeface="Arimo"/>
+                <a:cs typeface="Arimo"/>
+                <a:sym typeface="Arimo"/>
+              </a:rPr>
+              <a:t>Privacidade</a:t>
+            </a:r>
+            <a:r>
+              <a:rPr lang="en-US" sz="2750" dirty="0">
+                <a:solidFill>
+                  <a:srgbClr val="000000"/>
+                </a:solidFill>
+                <a:ea typeface="Arimo"/>
+                <a:cs typeface="Arimo"/>
+                <a:sym typeface="Arimo"/>
+              </a:rPr>
+              <a:t> e </a:t>
+            </a:r>
+            <a:r>
+              <a:rPr lang="en-US" sz="2750" dirty="0" err="1">
+                <a:solidFill>
+                  <a:srgbClr val="000000"/>
+                </a:solidFill>
+                <a:ea typeface="Arimo"/>
+                <a:cs typeface="Arimo"/>
+                <a:sym typeface="Arimo"/>
+              </a:rPr>
+              <a:t>Ética</a:t>
+            </a:r>
+            <a:r>
+              <a:rPr lang="en-US" sz="2750" dirty="0">
+                <a:solidFill>
+                  <a:srgbClr val="000000"/>
+                </a:solidFill>
+                <a:ea typeface="Arimo"/>
+                <a:cs typeface="Arimo"/>
+                <a:sym typeface="Arimo"/>
+              </a:rPr>
+              <a:t>: </a:t>
+            </a:r>
+            <a:r>
+              <a:rPr lang="en-US" sz="2750" dirty="0" err="1">
+                <a:solidFill>
+                  <a:srgbClr val="000000"/>
+                </a:solidFill>
+                <a:ea typeface="Arimo"/>
+                <a:cs typeface="Arimo"/>
+                <a:sym typeface="Arimo"/>
+              </a:rPr>
+              <a:t>Diretrizes</a:t>
+            </a:r>
+            <a:r>
+              <a:rPr lang="en-US" sz="2750" dirty="0">
+                <a:solidFill>
+                  <a:srgbClr val="000000"/>
+                </a:solidFill>
+                <a:ea typeface="Arimo"/>
+                <a:cs typeface="Arimo"/>
+                <a:sym typeface="Arimo"/>
+              </a:rPr>
+              <a:t> da LGPD (Lei nº 13.709/2018) </a:t>
+            </a:r>
+            <a:r>
+              <a:rPr lang="en-US" sz="2750" dirty="0" err="1">
+                <a:solidFill>
+                  <a:srgbClr val="000000"/>
+                </a:solidFill>
+                <a:ea typeface="Arimo"/>
+                <a:cs typeface="Arimo"/>
+                <a:sym typeface="Arimo"/>
+              </a:rPr>
+              <a:t>focadas</a:t>
+            </a:r>
+            <a:r>
+              <a:rPr lang="en-US" sz="2750" dirty="0">
+                <a:solidFill>
+                  <a:srgbClr val="000000"/>
+                </a:solidFill>
+                <a:ea typeface="Arimo"/>
+                <a:cs typeface="Arimo"/>
+                <a:sym typeface="Arimo"/>
+              </a:rPr>
+              <a:t> no "</a:t>
+            </a:r>
+            <a:r>
+              <a:rPr lang="en-US" sz="2750" dirty="0" err="1">
+                <a:solidFill>
+                  <a:srgbClr val="000000"/>
+                </a:solidFill>
+                <a:ea typeface="Arimo"/>
+                <a:cs typeface="Arimo"/>
+                <a:sym typeface="Arimo"/>
+              </a:rPr>
+              <a:t>melhor</a:t>
+            </a:r>
+            <a:r>
+              <a:rPr lang="en-US" sz="2750" dirty="0">
+                <a:solidFill>
+                  <a:srgbClr val="000000"/>
+                </a:solidFill>
+                <a:ea typeface="Arimo"/>
+                <a:cs typeface="Arimo"/>
+                <a:sym typeface="Arimo"/>
+              </a:rPr>
+              <a:t> interesse" e </a:t>
+            </a:r>
+            <a:r>
+              <a:rPr lang="en-US" sz="2750" dirty="0" err="1">
+                <a:solidFill>
+                  <a:srgbClr val="000000"/>
+                </a:solidFill>
+                <a:ea typeface="Arimo"/>
+                <a:cs typeface="Arimo"/>
+                <a:sym typeface="Arimo"/>
+              </a:rPr>
+              <a:t>proteção</a:t>
+            </a:r>
+            <a:r>
+              <a:rPr lang="en-US" sz="2750" dirty="0">
+                <a:solidFill>
+                  <a:srgbClr val="000000"/>
+                </a:solidFill>
+                <a:ea typeface="Arimo"/>
+                <a:cs typeface="Arimo"/>
+                <a:sym typeface="Arimo"/>
+              </a:rPr>
+              <a:t> de dados </a:t>
+            </a:r>
+            <a:r>
+              <a:rPr lang="en-US" sz="2750" dirty="0" err="1">
+                <a:solidFill>
+                  <a:srgbClr val="000000"/>
+                </a:solidFill>
+                <a:ea typeface="Arimo"/>
+                <a:cs typeface="Arimo"/>
+                <a:sym typeface="Arimo"/>
+              </a:rPr>
+              <a:t>sensíveis</a:t>
+            </a:r>
+            <a:r>
+              <a:rPr lang="en-US" sz="2750" dirty="0">
+                <a:solidFill>
+                  <a:srgbClr val="000000"/>
+                </a:solidFill>
+                <a:ea typeface="Arimo"/>
+                <a:cs typeface="Arimo"/>
+                <a:sym typeface="Arimo"/>
+              </a:rPr>
+              <a:t> de </a:t>
+            </a:r>
+            <a:r>
+              <a:rPr lang="en-US" sz="2750" dirty="0" err="1">
+                <a:solidFill>
+                  <a:srgbClr val="000000"/>
+                </a:solidFill>
+                <a:ea typeface="Arimo"/>
+                <a:cs typeface="Arimo"/>
+                <a:sym typeface="Arimo"/>
+              </a:rPr>
+              <a:t>menores</a:t>
+            </a:r>
+            <a:r>
+              <a:rPr lang="en-US" sz="2750" dirty="0">
+                <a:solidFill>
+                  <a:srgbClr val="000000"/>
+                </a:solidFill>
+                <a:ea typeface="Arimo"/>
+                <a:cs typeface="Arimo"/>
+                <a:sym typeface="Arimo"/>
+              </a:rPr>
+              <a:t> de </a:t>
+            </a:r>
+            <a:r>
+              <a:rPr lang="en-US" sz="2750" dirty="0" err="1">
+                <a:solidFill>
+                  <a:srgbClr val="000000"/>
+                </a:solidFill>
+                <a:ea typeface="Arimo"/>
+                <a:cs typeface="Arimo"/>
+                <a:sym typeface="Arimo"/>
+              </a:rPr>
+              <a:t>idade</a:t>
+            </a:r>
+            <a:r>
+              <a:rPr lang="en-US" sz="2750" dirty="0">
+                <a:solidFill>
+                  <a:srgbClr val="000000"/>
+                </a:solidFill>
+                <a:ea typeface="Arimo"/>
+                <a:cs typeface="Arimo"/>
+                <a:sym typeface="Arimo"/>
+              </a:rPr>
+              <a:t>.</a:t>
             </a:r>
           </a:p>
           <a:p>
@@ -12076,11 +15077,10 @@
                 <a:spcPts val="3437"/>
               </a:lnSpc>
             </a:pPr>
-            <a:endParaRPr lang="en-US" sz="2750">
+            <a:endParaRPr lang="en-US" sz="2750" dirty="0">
               <a:solidFill>
                 <a:srgbClr val="000000"/>
               </a:solidFill>
-              <a:latin typeface="Arimo"/>
               <a:ea typeface="Arimo"/>
               <a:cs typeface="Arimo"/>
               <a:sym typeface="Arimo"/>
@@ -12095,16 +15095,180 @@
               <a:buChar char="•"/>
             </a:pPr>
             <a:r>
-              <a:rPr lang="en-US" sz="2750">
-                <a:solidFill>
-                  <a:srgbClr val="000000"/>
-                </a:solidFill>
-                <a:latin typeface="Arimo"/>
-                <a:ea typeface="Arimo"/>
-                <a:cs typeface="Arimo"/>
-                <a:sym typeface="Arimo"/>
-              </a:rPr>
-              <a:t>Segurança da Informação: Adoção de padrões globais OWASP (Top 10 e ASVS) e aplicação da Modelagem de Ameaças STRIDE.</a:t>
+              <a:rPr lang="en-US" sz="2750" dirty="0" err="1">
+                <a:solidFill>
+                  <a:srgbClr val="000000"/>
+                </a:solidFill>
+                <a:ea typeface="Arimo"/>
+                <a:cs typeface="Arimo"/>
+                <a:sym typeface="Arimo"/>
+              </a:rPr>
+              <a:t>Segurança</a:t>
+            </a:r>
+            <a:r>
+              <a:rPr lang="en-US" sz="2750" dirty="0">
+                <a:solidFill>
+                  <a:srgbClr val="000000"/>
+                </a:solidFill>
+                <a:ea typeface="Arimo"/>
+                <a:cs typeface="Arimo"/>
+                <a:sym typeface="Arimo"/>
+              </a:rPr>
+              <a:t> da </a:t>
+            </a:r>
+            <a:r>
+              <a:rPr lang="en-US" sz="2750" dirty="0" err="1">
+                <a:solidFill>
+                  <a:srgbClr val="000000"/>
+                </a:solidFill>
+                <a:ea typeface="Arimo"/>
+                <a:cs typeface="Arimo"/>
+                <a:sym typeface="Arimo"/>
+              </a:rPr>
+              <a:t>Informação</a:t>
+            </a:r>
+            <a:r>
+              <a:rPr lang="en-US" sz="2750" dirty="0">
+                <a:solidFill>
+                  <a:srgbClr val="000000"/>
+                </a:solidFill>
+                <a:ea typeface="Arimo"/>
+                <a:cs typeface="Arimo"/>
+                <a:sym typeface="Arimo"/>
+              </a:rPr>
+              <a:t>: </a:t>
+            </a:r>
+            <a:r>
+              <a:rPr lang="en-US" sz="2750" dirty="0" err="1">
+                <a:solidFill>
+                  <a:srgbClr val="000000"/>
+                </a:solidFill>
+                <a:ea typeface="Arimo"/>
+                <a:cs typeface="Arimo"/>
+                <a:sym typeface="Arimo"/>
+              </a:rPr>
+              <a:t>Adoção</a:t>
+            </a:r>
+            <a:r>
+              <a:rPr lang="en-US" sz="2750" dirty="0">
+                <a:solidFill>
+                  <a:srgbClr val="000000"/>
+                </a:solidFill>
+                <a:ea typeface="Arimo"/>
+                <a:cs typeface="Arimo"/>
+                <a:sym typeface="Arimo"/>
+              </a:rPr>
+              <a:t> de </a:t>
+            </a:r>
+            <a:r>
+              <a:rPr lang="en-US" sz="2750" dirty="0" err="1">
+                <a:solidFill>
+                  <a:srgbClr val="000000"/>
+                </a:solidFill>
+                <a:ea typeface="Arimo"/>
+                <a:cs typeface="Arimo"/>
+                <a:sym typeface="Arimo"/>
+              </a:rPr>
+              <a:t>padrões</a:t>
+            </a:r>
+            <a:r>
+              <a:rPr lang="en-US" sz="2750" dirty="0">
+                <a:solidFill>
+                  <a:srgbClr val="000000"/>
+                </a:solidFill>
+                <a:ea typeface="Arimo"/>
+                <a:cs typeface="Arimo"/>
+                <a:sym typeface="Arimo"/>
+              </a:rPr>
+              <a:t> </a:t>
+            </a:r>
+            <a:r>
+              <a:rPr lang="en-US" sz="2750" dirty="0" err="1">
+                <a:solidFill>
+                  <a:srgbClr val="000000"/>
+                </a:solidFill>
+                <a:ea typeface="Arimo"/>
+                <a:cs typeface="Arimo"/>
+                <a:sym typeface="Arimo"/>
+              </a:rPr>
+              <a:t>globais</a:t>
+            </a:r>
+            <a:r>
+              <a:rPr lang="en-US" sz="2750" dirty="0">
+                <a:solidFill>
+                  <a:srgbClr val="000000"/>
+                </a:solidFill>
+                <a:ea typeface="Arimo"/>
+                <a:cs typeface="Arimo"/>
+                <a:sym typeface="Arimo"/>
+              </a:rPr>
+              <a:t> OWASP (Top 10 e ASVS) e </a:t>
+            </a:r>
+            <a:r>
+              <a:rPr lang="en-US" sz="2750" dirty="0" err="1">
+                <a:solidFill>
+                  <a:srgbClr val="000000"/>
+                </a:solidFill>
+                <a:ea typeface="Arimo"/>
+                <a:cs typeface="Arimo"/>
+                <a:sym typeface="Arimo"/>
+              </a:rPr>
+              <a:t>aplicação</a:t>
+            </a:r>
+            <a:r>
+              <a:rPr lang="en-US" sz="2750" dirty="0">
+                <a:solidFill>
+                  <a:srgbClr val="000000"/>
+                </a:solidFill>
+                <a:ea typeface="Arimo"/>
+                <a:cs typeface="Arimo"/>
+                <a:sym typeface="Arimo"/>
+              </a:rPr>
+              <a:t> da </a:t>
+            </a:r>
+            <a:r>
+              <a:rPr lang="en-US" sz="2750" dirty="0" err="1">
+                <a:solidFill>
+                  <a:srgbClr val="000000"/>
+                </a:solidFill>
+                <a:ea typeface="Arimo"/>
+                <a:cs typeface="Arimo"/>
+                <a:sym typeface="Arimo"/>
+              </a:rPr>
+              <a:t>Modelagem</a:t>
+            </a:r>
+            <a:r>
+              <a:rPr lang="en-US" sz="2750" dirty="0">
+                <a:solidFill>
+                  <a:srgbClr val="000000"/>
+                </a:solidFill>
+                <a:ea typeface="Arimo"/>
+                <a:cs typeface="Arimo"/>
+                <a:sym typeface="Arimo"/>
+              </a:rPr>
+              <a:t> de </a:t>
+            </a:r>
+            <a:r>
+              <a:rPr lang="en-US" sz="2750" dirty="0" err="1">
+                <a:solidFill>
+                  <a:srgbClr val="000000"/>
+                </a:solidFill>
+                <a:ea typeface="Arimo"/>
+                <a:cs typeface="Arimo"/>
+                <a:sym typeface="Arimo"/>
+              </a:rPr>
+              <a:t>Ameaças</a:t>
+            </a:r>
+            <a:r>
+              <a:rPr lang="en-US" sz="2750" dirty="0">
+                <a:solidFill>
+                  <a:srgbClr val="000000"/>
+                </a:solidFill>
+                <a:ea typeface="Arimo"/>
+                <a:cs typeface="Arimo"/>
+                <a:sym typeface="Arimo"/>
+              </a:rPr>
+              <a:t> STRIDE.</a:t>
             </a:r>
           </a:p>
           <a:p>
@@ -12113,11 +15277,10 @@
                 <a:spcPts val="3437"/>
               </a:lnSpc>
             </a:pPr>
-            <a:endParaRPr lang="en-US" sz="2750">
+            <a:endParaRPr lang="en-US" sz="2750" dirty="0">
               <a:solidFill>
                 <a:srgbClr val="000000"/>
               </a:solidFill>
-              <a:latin typeface="Arimo"/>
               <a:ea typeface="Arimo"/>
               <a:cs typeface="Arimo"/>
               <a:sym typeface="Arimo"/>
@@ -12132,16 +15295,114 @@
               <a:buChar char="•"/>
             </a:pPr>
             <a:r>
-              <a:rPr lang="en-US" sz="2750">
-                <a:solidFill>
-                  <a:srgbClr val="000000"/>
-                </a:solidFill>
-                <a:latin typeface="Arimo"/>
-                <a:ea typeface="Arimo"/>
-                <a:cs typeface="Arimo"/>
-                <a:sym typeface="Arimo"/>
-              </a:rPr>
-              <a:t>Arquitetura de Software: Modelos Serverless (Backend as a Service) e segurança isolada no banco de dados através de Row Level Security (RLS).</a:t>
+              <a:rPr lang="en-US" sz="2750" dirty="0" err="1">
+                <a:solidFill>
+                  <a:srgbClr val="000000"/>
+                </a:solidFill>
+                <a:ea typeface="Arimo"/>
+                <a:cs typeface="Arimo"/>
+                <a:sym typeface="Arimo"/>
+              </a:rPr>
+              <a:t>Arquitetura</a:t>
+            </a:r>
+            <a:r>
+              <a:rPr lang="en-US" sz="2750" dirty="0">
+                <a:solidFill>
+                  <a:srgbClr val="000000"/>
+                </a:solidFill>
+                <a:ea typeface="Arimo"/>
+                <a:cs typeface="Arimo"/>
+                <a:sym typeface="Arimo"/>
+              </a:rPr>
+              <a:t> de Software: </a:t>
+            </a:r>
+            <a:r>
+              <a:rPr lang="en-US" sz="2750" dirty="0" err="1">
+                <a:solidFill>
+                  <a:srgbClr val="000000"/>
+                </a:solidFill>
+                <a:ea typeface="Arimo"/>
+                <a:cs typeface="Arimo"/>
+                <a:sym typeface="Arimo"/>
+              </a:rPr>
+              <a:t>Modelos</a:t>
+            </a:r>
+            <a:r>
+              <a:rPr lang="en-US" sz="2750" dirty="0">
+                <a:solidFill>
+                  <a:srgbClr val="000000"/>
+                </a:solidFill>
+                <a:ea typeface="Arimo"/>
+                <a:cs typeface="Arimo"/>
+                <a:sym typeface="Arimo"/>
+              </a:rPr>
+              <a:t> Serverless (Backend as a Service) e </a:t>
+            </a:r>
+            <a:r>
+              <a:rPr lang="en-US" sz="2750" dirty="0" err="1">
+                <a:solidFill>
+                  <a:srgbClr val="000000"/>
+                </a:solidFill>
+                <a:ea typeface="Arimo"/>
+                <a:cs typeface="Arimo"/>
+                <a:sym typeface="Arimo"/>
+              </a:rPr>
+              <a:t>segurança</a:t>
+            </a:r>
+            <a:r>
+              <a:rPr lang="en-US" sz="2750" dirty="0">
+                <a:solidFill>
+                  <a:srgbClr val="000000"/>
+                </a:solidFill>
+                <a:ea typeface="Arimo"/>
+                <a:cs typeface="Arimo"/>
+                <a:sym typeface="Arimo"/>
+              </a:rPr>
+              <a:t> </a:t>
+            </a:r>
+            <a:r>
+              <a:rPr lang="en-US" sz="2750" dirty="0" err="1">
+                <a:solidFill>
+                  <a:srgbClr val="000000"/>
+                </a:solidFill>
+                <a:ea typeface="Arimo"/>
+                <a:cs typeface="Arimo"/>
+                <a:sym typeface="Arimo"/>
+              </a:rPr>
+              <a:t>isolada</a:t>
+            </a:r>
+            <a:r>
+              <a:rPr lang="en-US" sz="2750" dirty="0">
+                <a:solidFill>
+                  <a:srgbClr val="000000"/>
+                </a:solidFill>
+                <a:ea typeface="Arimo"/>
+                <a:cs typeface="Arimo"/>
+                <a:sym typeface="Arimo"/>
+              </a:rPr>
+              <a:t> no banco de dados </a:t>
+            </a:r>
+            <a:r>
+              <a:rPr lang="en-US" sz="2750" dirty="0" err="1">
+                <a:solidFill>
+                  <a:srgbClr val="000000"/>
+                </a:solidFill>
+                <a:ea typeface="Arimo"/>
+                <a:cs typeface="Arimo"/>
+                <a:sym typeface="Arimo"/>
+              </a:rPr>
+              <a:t>através</a:t>
+            </a:r>
+            <a:r>
+              <a:rPr lang="en-US" sz="2750" dirty="0">
+                <a:solidFill>
+                  <a:srgbClr val="000000"/>
+                </a:solidFill>
+                <a:ea typeface="Arimo"/>
+                <a:cs typeface="Arimo"/>
+                <a:sym typeface="Arimo"/>
+              </a:rPr>
+              <a:t> de Row Level Security (RLS).</a:t>
             </a:r>
           </a:p>
         </p:txBody>
@@ -12345,7 +15606,7 @@
         <p:spPr>
           <a:xfrm>
             <a:off x="2610082" y="2483689"/>
-            <a:ext cx="14649218" cy="7431755"/>
+            <a:ext cx="14649218" cy="7602659"/>
           </a:xfrm>
           <a:prstGeom prst="rect">
             <a:avLst/>
@@ -12369,7 +15630,6 @@
                 <a:solidFill>
                   <a:srgbClr val="000000"/>
                 </a:solidFill>
-                <a:latin typeface="Noto Sans"/>
                 <a:ea typeface="Noto Sans"/>
                 <a:cs typeface="Noto Sans"/>
                 <a:sym typeface="Noto Sans"/>
@@ -12381,7 +15641,6 @@
                 <a:solidFill>
                   <a:srgbClr val="000000"/>
                 </a:solidFill>
-                <a:latin typeface="Noto Sans"/>
                 <a:ea typeface="Noto Sans"/>
                 <a:cs typeface="Noto Sans"/>
                 <a:sym typeface="Noto Sans"/>
@@ -12393,7 +15652,6 @@
                 <a:solidFill>
                   <a:srgbClr val="000000"/>
                 </a:solidFill>
-                <a:latin typeface="Noto Sans"/>
                 <a:ea typeface="Noto Sans"/>
                 <a:cs typeface="Noto Sans"/>
                 <a:sym typeface="Noto Sans"/>
@@ -12415,7 +15673,6 @@
                 <a:solidFill>
                   <a:srgbClr val="000000"/>
                 </a:solidFill>
-                <a:latin typeface="Noto Sans"/>
                 <a:ea typeface="Noto Sans"/>
                 <a:cs typeface="Noto Sans"/>
                 <a:sym typeface="Noto Sans"/>
@@ -12427,7 +15684,6 @@
                 <a:solidFill>
                   <a:srgbClr val="000000"/>
                 </a:solidFill>
-                <a:latin typeface="Noto Sans"/>
                 <a:ea typeface="Noto Sans"/>
                 <a:cs typeface="Noto Sans"/>
                 <a:sym typeface="Noto Sans"/>
@@ -12439,7 +15695,6 @@
                 <a:solidFill>
                   <a:srgbClr val="000000"/>
                 </a:solidFill>
-                <a:latin typeface="Noto Sans"/>
                 <a:ea typeface="Noto Sans"/>
                 <a:cs typeface="Noto Sans"/>
                 <a:sym typeface="Noto Sans"/>
@@ -12451,7 +15706,6 @@
                 <a:solidFill>
                   <a:srgbClr val="000000"/>
                 </a:solidFill>
-                <a:latin typeface="Noto Sans"/>
                 <a:ea typeface="Noto Sans"/>
                 <a:cs typeface="Noto Sans"/>
                 <a:sym typeface="Noto Sans"/>
@@ -12463,7 +15717,6 @@
                 <a:solidFill>
                   <a:srgbClr val="000000"/>
                 </a:solidFill>
-                <a:latin typeface="Noto Sans"/>
                 <a:ea typeface="Noto Sans"/>
                 <a:cs typeface="Noto Sans"/>
                 <a:sym typeface="Noto Sans"/>
@@ -12475,7 +15728,6 @@
                 <a:solidFill>
                   <a:srgbClr val="000000"/>
                 </a:solidFill>
-                <a:latin typeface="Noto Sans"/>
                 <a:ea typeface="Noto Sans"/>
                 <a:cs typeface="Noto Sans"/>
                 <a:sym typeface="Noto Sans"/>
@@ -12487,7 +15739,6 @@
                 <a:solidFill>
                   <a:srgbClr val="000000"/>
                 </a:solidFill>
-                <a:latin typeface="Noto Sans"/>
                 <a:ea typeface="Noto Sans"/>
                 <a:cs typeface="Noto Sans"/>
                 <a:sym typeface="Noto Sans"/>
@@ -12499,7 +15750,6 @@
                 <a:solidFill>
                   <a:srgbClr val="000000"/>
                 </a:solidFill>
-                <a:latin typeface="Noto Sans"/>
                 <a:ea typeface="Noto Sans"/>
                 <a:cs typeface="Noto Sans"/>
                 <a:sym typeface="Noto Sans"/>
@@ -12511,7 +15761,6 @@
                 <a:solidFill>
                   <a:srgbClr val="000000"/>
                 </a:solidFill>
-                <a:latin typeface="Noto Sans"/>
                 <a:ea typeface="Noto Sans"/>
                 <a:cs typeface="Noto Sans"/>
                 <a:sym typeface="Noto Sans"/>
@@ -12523,7 +15772,6 @@
                 <a:solidFill>
                   <a:srgbClr val="000000"/>
                 </a:solidFill>
-                <a:latin typeface="Noto Sans"/>
                 <a:ea typeface="Noto Sans"/>
                 <a:cs typeface="Noto Sans"/>
                 <a:sym typeface="Noto Sans"/>
@@ -12535,7 +15783,6 @@
                 <a:solidFill>
                   <a:srgbClr val="000000"/>
                 </a:solidFill>
-                <a:latin typeface="Noto Sans"/>
                 <a:ea typeface="Noto Sans"/>
                 <a:cs typeface="Noto Sans"/>
                 <a:sym typeface="Noto Sans"/>
@@ -12547,7 +15794,6 @@
                 <a:solidFill>
                   <a:srgbClr val="000000"/>
                 </a:solidFill>
-                <a:latin typeface="Noto Sans"/>
                 <a:ea typeface="Noto Sans"/>
                 <a:cs typeface="Noto Sans"/>
                 <a:sym typeface="Noto Sans"/>
@@ -12559,7 +15805,6 @@
                 <a:solidFill>
                   <a:srgbClr val="000000"/>
                 </a:solidFill>
-                <a:latin typeface="Noto Sans"/>
                 <a:ea typeface="Noto Sans"/>
                 <a:cs typeface="Noto Sans"/>
                 <a:sym typeface="Noto Sans"/>
@@ -12571,7 +15816,6 @@
                 <a:solidFill>
                   <a:srgbClr val="000000"/>
                 </a:solidFill>
-                <a:latin typeface="Noto Sans"/>
                 <a:ea typeface="Noto Sans"/>
                 <a:cs typeface="Noto Sans"/>
                 <a:sym typeface="Noto Sans"/>
@@ -12583,7 +15827,6 @@
                 <a:solidFill>
                   <a:srgbClr val="000000"/>
                 </a:solidFill>
-                <a:latin typeface="Noto Sans"/>
                 <a:ea typeface="Noto Sans"/>
                 <a:cs typeface="Noto Sans"/>
                 <a:sym typeface="Noto Sans"/>
@@ -12595,7 +15838,6 @@
                 <a:solidFill>
                   <a:srgbClr val="000000"/>
                 </a:solidFill>
-                <a:latin typeface="Noto Sans"/>
                 <a:ea typeface="Noto Sans"/>
                 <a:cs typeface="Noto Sans"/>
                 <a:sym typeface="Noto Sans"/>
@@ -12607,7 +15849,6 @@
                 <a:solidFill>
                   <a:srgbClr val="000000"/>
                 </a:solidFill>
-                <a:latin typeface="Noto Sans"/>
                 <a:ea typeface="Noto Sans"/>
                 <a:cs typeface="Noto Sans"/>
                 <a:sym typeface="Noto Sans"/>
@@ -12619,7 +15860,6 @@
                 <a:solidFill>
                   <a:srgbClr val="000000"/>
                 </a:solidFill>
-                <a:latin typeface="Noto Sans"/>
                 <a:ea typeface="Noto Sans"/>
                 <a:cs typeface="Noto Sans"/>
                 <a:sym typeface="Noto Sans"/>
@@ -12640,7 +15880,6 @@
               <a:solidFill>
                 <a:srgbClr val="000000"/>
               </a:solidFill>
-              <a:latin typeface="Noto Sans"/>
               <a:ea typeface="Noto Sans"/>
               <a:cs typeface="Noto Sans"/>
               <a:sym typeface="Noto Sans"/>
@@ -12659,7 +15898,6 @@
               <a:solidFill>
                 <a:srgbClr val="000000"/>
               </a:solidFill>
-              <a:latin typeface="Noto Sans"/>
               <a:ea typeface="Noto Sans"/>
               <a:cs typeface="Noto Sans"/>
               <a:sym typeface="Noto Sans"/>
@@ -12678,7 +15916,6 @@
                 <a:solidFill>
                   <a:srgbClr val="000000"/>
                 </a:solidFill>
-                <a:latin typeface="Noto Sans"/>
                 <a:ea typeface="Noto Sans"/>
                 <a:cs typeface="Noto Sans"/>
                 <a:sym typeface="Noto Sans"/>
@@ -12690,7 +15927,6 @@
                 <a:solidFill>
                   <a:srgbClr val="000000"/>
                 </a:solidFill>
-                <a:latin typeface="Noto Sans"/>
                 <a:ea typeface="Noto Sans"/>
                 <a:cs typeface="Noto Sans"/>
                 <a:sym typeface="Noto Sans"/>
@@ -12702,7 +15938,6 @@
                 <a:solidFill>
                   <a:srgbClr val="000000"/>
                 </a:solidFill>
-                <a:latin typeface="Noto Sans"/>
                 <a:ea typeface="Noto Sans"/>
                 <a:cs typeface="Noto Sans"/>
                 <a:sym typeface="Noto Sans"/>
@@ -12724,7 +15959,6 @@
                 <a:solidFill>
                   <a:srgbClr val="000000"/>
                 </a:solidFill>
-                <a:latin typeface="Noto Sans"/>
                 <a:ea typeface="Noto Sans"/>
                 <a:cs typeface="Noto Sans"/>
                 <a:sym typeface="Noto Sans"/>
@@ -12736,7 +15970,6 @@
                 <a:solidFill>
                   <a:srgbClr val="000000"/>
                 </a:solidFill>
-                <a:latin typeface="Noto Sans"/>
                 <a:ea typeface="Noto Sans"/>
                 <a:cs typeface="Noto Sans"/>
                 <a:sym typeface="Noto Sans"/>
@@ -12748,7 +15981,6 @@
                 <a:solidFill>
                   <a:srgbClr val="000000"/>
                 </a:solidFill>
-                <a:latin typeface="Noto Sans"/>
                 <a:ea typeface="Noto Sans"/>
                 <a:cs typeface="Noto Sans"/>
                 <a:sym typeface="Noto Sans"/>
@@ -12760,7 +15992,6 @@
                 <a:solidFill>
                   <a:srgbClr val="000000"/>
                 </a:solidFill>
-                <a:latin typeface="Noto Sans"/>
                 <a:ea typeface="Noto Sans"/>
                 <a:cs typeface="Noto Sans"/>
                 <a:sym typeface="Noto Sans"/>
@@ -12772,7 +16003,6 @@
                 <a:solidFill>
                   <a:srgbClr val="000000"/>
                 </a:solidFill>
-                <a:latin typeface="Noto Sans"/>
                 <a:ea typeface="Noto Sans"/>
                 <a:cs typeface="Noto Sans"/>
                 <a:sym typeface="Noto Sans"/>
@@ -12784,7 +16014,6 @@
                 <a:solidFill>
                   <a:srgbClr val="000000"/>
                 </a:solidFill>
-                <a:latin typeface="Noto Sans"/>
                 <a:ea typeface="Noto Sans"/>
                 <a:cs typeface="Noto Sans"/>
                 <a:sym typeface="Noto Sans"/>
@@ -12796,7 +16025,6 @@
                 <a:solidFill>
                   <a:srgbClr val="000000"/>
                 </a:solidFill>
-                <a:latin typeface="Noto Sans"/>
                 <a:ea typeface="Noto Sans"/>
                 <a:cs typeface="Noto Sans"/>
                 <a:sym typeface="Noto Sans"/>
@@ -12808,7 +16036,6 @@
                 <a:solidFill>
                   <a:srgbClr val="000000"/>
                 </a:solidFill>
-                <a:latin typeface="Noto Sans"/>
                 <a:ea typeface="Noto Sans"/>
                 <a:cs typeface="Noto Sans"/>
                 <a:sym typeface="Noto Sans"/>
@@ -12820,7 +16047,6 @@
                 <a:solidFill>
                   <a:srgbClr val="000000"/>
                 </a:solidFill>
-                <a:latin typeface="Noto Sans"/>
                 <a:ea typeface="Noto Sans"/>
                 <a:cs typeface="Noto Sans"/>
                 <a:sym typeface="Noto Sans"/>
@@ -12832,7 +16058,6 @@
                 <a:solidFill>
                   <a:srgbClr val="000000"/>
                 </a:solidFill>
-                <a:latin typeface="Noto Sans"/>
                 <a:ea typeface="Noto Sans"/>
                 <a:cs typeface="Noto Sans"/>
                 <a:sym typeface="Noto Sans"/>
@@ -12844,7 +16069,6 @@
                 <a:solidFill>
                   <a:srgbClr val="000000"/>
                 </a:solidFill>
-                <a:latin typeface="Noto Sans"/>
                 <a:ea typeface="Noto Sans"/>
                 <a:cs typeface="Noto Sans"/>
                 <a:sym typeface="Noto Sans"/>
@@ -12856,7 +16080,6 @@
                 <a:solidFill>
                   <a:srgbClr val="000000"/>
                 </a:solidFill>
-                <a:latin typeface="Noto Sans"/>
                 <a:ea typeface="Noto Sans"/>
                 <a:cs typeface="Noto Sans"/>
                 <a:sym typeface="Noto Sans"/>
@@ -12868,7 +16091,6 @@
                 <a:solidFill>
                   <a:srgbClr val="000000"/>
                 </a:solidFill>
-                <a:latin typeface="Noto Sans"/>
                 <a:ea typeface="Noto Sans"/>
                 <a:cs typeface="Noto Sans"/>
                 <a:sym typeface="Noto Sans"/>
@@ -12880,7 +16102,6 @@
                 <a:solidFill>
                   <a:srgbClr val="000000"/>
                 </a:solidFill>
-                <a:latin typeface="Noto Sans"/>
                 <a:ea typeface="Noto Sans"/>
                 <a:cs typeface="Noto Sans"/>
                 <a:sym typeface="Noto Sans"/>
@@ -12892,7 +16113,6 @@
                 <a:solidFill>
                   <a:srgbClr val="000000"/>
                 </a:solidFill>
-                <a:latin typeface="Noto Sans"/>
                 <a:ea typeface="Noto Sans"/>
                 <a:cs typeface="Noto Sans"/>
                 <a:sym typeface="Noto Sans"/>
@@ -12904,7 +16124,6 @@
                 <a:solidFill>
                   <a:srgbClr val="000000"/>
                 </a:solidFill>
-                <a:latin typeface="Noto Sans"/>
                 <a:ea typeface="Noto Sans"/>
                 <a:cs typeface="Noto Sans"/>
                 <a:sym typeface="Noto Sans"/>
@@ -12925,7 +16144,6 @@
               <a:solidFill>
                 <a:srgbClr val="000000"/>
               </a:solidFill>
-              <a:latin typeface="Noto Sans"/>
               <a:ea typeface="Noto Sans"/>
               <a:cs typeface="Noto Sans"/>
               <a:sym typeface="Noto Sans"/>
@@ -12944,7 +16162,6 @@
               <a:solidFill>
                 <a:srgbClr val="000000"/>
               </a:solidFill>
-              <a:latin typeface="Noto Sans"/>
               <a:ea typeface="Noto Sans"/>
               <a:cs typeface="Noto Sans"/>
               <a:sym typeface="Noto Sans"/>
@@ -12963,7 +16180,6 @@
                 <a:solidFill>
                   <a:srgbClr val="000000"/>
                 </a:solidFill>
-                <a:latin typeface="Noto Sans"/>
                 <a:ea typeface="Noto Sans"/>
                 <a:cs typeface="Noto Sans"/>
                 <a:sym typeface="Noto Sans"/>
@@ -12975,7 +16191,6 @@
                 <a:solidFill>
                   <a:srgbClr val="000000"/>
                 </a:solidFill>
-                <a:latin typeface="Noto Sans"/>
                 <a:ea typeface="Noto Sans"/>
                 <a:cs typeface="Noto Sans"/>
                 <a:sym typeface="Noto Sans"/>
@@ -12987,7 +16202,6 @@
                 <a:solidFill>
                   <a:srgbClr val="000000"/>
                 </a:solidFill>
-                <a:latin typeface="Noto Sans"/>
                 <a:ea typeface="Noto Sans"/>
                 <a:cs typeface="Noto Sans"/>
                 <a:sym typeface="Noto Sans"/>
@@ -12999,7 +16213,6 @@
                 <a:solidFill>
                   <a:srgbClr val="000000"/>
                 </a:solidFill>
-                <a:latin typeface="Noto Sans"/>
                 <a:ea typeface="Noto Sans"/>
                 <a:cs typeface="Noto Sans"/>
                 <a:sym typeface="Noto Sans"/>
@@ -13021,7 +16234,6 @@
                 <a:solidFill>
                   <a:srgbClr val="000000"/>
                 </a:solidFill>
-                <a:latin typeface="Noto Sans"/>
                 <a:ea typeface="Noto Sans"/>
                 <a:cs typeface="Noto Sans"/>
                 <a:sym typeface="Noto Sans"/>
@@ -13033,7 +16245,6 @@
                 <a:solidFill>
                   <a:srgbClr val="000000"/>
                 </a:solidFill>
-                <a:latin typeface="Noto Sans"/>
                 <a:ea typeface="Noto Sans"/>
                 <a:cs typeface="Noto Sans"/>
                 <a:sym typeface="Noto Sans"/>
@@ -13045,7 +16256,6 @@
                 <a:solidFill>
                   <a:srgbClr val="000000"/>
                 </a:solidFill>
-                <a:latin typeface="Noto Sans"/>
                 <a:ea typeface="Noto Sans"/>
                 <a:cs typeface="Noto Sans"/>
                 <a:sym typeface="Noto Sans"/>
@@ -13057,7 +16267,6 @@
                 <a:solidFill>
                   <a:srgbClr val="000000"/>
                 </a:solidFill>
-                <a:latin typeface="Noto Sans"/>
                 <a:ea typeface="Noto Sans"/>
                 <a:cs typeface="Noto Sans"/>
                 <a:sym typeface="Noto Sans"/>
@@ -13069,7 +16278,6 @@
                 <a:solidFill>
                   <a:srgbClr val="000000"/>
                 </a:solidFill>
-                <a:latin typeface="Noto Sans"/>
                 <a:ea typeface="Noto Sans"/>
                 <a:cs typeface="Noto Sans"/>
                 <a:sym typeface="Noto Sans"/>
@@ -13081,7 +16289,6 @@
                 <a:solidFill>
                   <a:srgbClr val="000000"/>
                 </a:solidFill>
-                <a:latin typeface="Noto Sans"/>
                 <a:ea typeface="Noto Sans"/>
                 <a:cs typeface="Noto Sans"/>
                 <a:sym typeface="Noto Sans"/>
@@ -13103,7 +16310,6 @@
                 <a:solidFill>
                   <a:srgbClr val="000000"/>
                 </a:solidFill>
-                <a:latin typeface="Noto Sans"/>
                 <a:ea typeface="Noto Sans"/>
                 <a:cs typeface="Noto Sans"/>
                 <a:sym typeface="Noto Sans"/>
@@ -13115,7 +16321,6 @@
                 <a:solidFill>
                   <a:srgbClr val="000000"/>
                 </a:solidFill>
-                <a:latin typeface="Noto Sans"/>
                 <a:ea typeface="Noto Sans"/>
                 <a:cs typeface="Noto Sans"/>
                 <a:sym typeface="Noto Sans"/>
@@ -13127,7 +16332,6 @@
                 <a:solidFill>
                   <a:srgbClr val="000000"/>
                 </a:solidFill>
-                <a:latin typeface="Noto Sans"/>
                 <a:ea typeface="Noto Sans"/>
                 <a:cs typeface="Noto Sans"/>
                 <a:sym typeface="Noto Sans"/>
@@ -13139,7 +16343,6 @@
                 <a:solidFill>
                   <a:srgbClr val="000000"/>
                 </a:solidFill>
-                <a:latin typeface="Noto Sans"/>
                 <a:ea typeface="Noto Sans"/>
                 <a:cs typeface="Noto Sans"/>
                 <a:sym typeface="Noto Sans"/>
@@ -13151,7 +16354,6 @@
                 <a:solidFill>
                   <a:srgbClr val="000000"/>
                 </a:solidFill>
-                <a:latin typeface="Noto Sans"/>
                 <a:ea typeface="Noto Sans"/>
                 <a:cs typeface="Noto Sans"/>
                 <a:sym typeface="Noto Sans"/>
@@ -13163,7 +16365,6 @@
                 <a:solidFill>
                   <a:srgbClr val="000000"/>
                 </a:solidFill>
-                <a:latin typeface="Noto Sans"/>
                 <a:ea typeface="Noto Sans"/>
                 <a:cs typeface="Noto Sans"/>
                 <a:sym typeface="Noto Sans"/>
@@ -13185,7 +16386,6 @@
                 <a:solidFill>
                   <a:srgbClr val="000000"/>
                 </a:solidFill>
-                <a:latin typeface="Noto Sans"/>
                 <a:ea typeface="Noto Sans"/>
                 <a:cs typeface="Noto Sans"/>
                 <a:sym typeface="Noto Sans"/>
@@ -13197,7 +16397,6 @@
                 <a:solidFill>
                   <a:srgbClr val="000000"/>
                 </a:solidFill>
-                <a:latin typeface="Noto Sans"/>
                 <a:ea typeface="Noto Sans"/>
                 <a:cs typeface="Noto Sans"/>
                 <a:sym typeface="Noto Sans"/>
@@ -13209,7 +16408,6 @@
                 <a:solidFill>
                   <a:srgbClr val="000000"/>
                 </a:solidFill>
-                <a:latin typeface="Noto Sans"/>
                 <a:ea typeface="Noto Sans"/>
                 <a:cs typeface="Noto Sans"/>
                 <a:sym typeface="Noto Sans"/>
@@ -13221,7 +16419,6 @@
                 <a:solidFill>
                   <a:srgbClr val="000000"/>
                 </a:solidFill>
-                <a:latin typeface="Noto Sans"/>
                 <a:ea typeface="Noto Sans"/>
                 <a:cs typeface="Noto Sans"/>
                 <a:sym typeface="Noto Sans"/>
@@ -13233,7 +16430,6 @@
                 <a:solidFill>
                   <a:srgbClr val="000000"/>
                 </a:solidFill>
-                <a:latin typeface="Noto Sans"/>
                 <a:ea typeface="Noto Sans"/>
                 <a:cs typeface="Noto Sans"/>
                 <a:sym typeface="Noto Sans"/>
@@ -13245,7 +16441,6 @@
                 <a:solidFill>
                   <a:srgbClr val="000000"/>
                 </a:solidFill>
-                <a:latin typeface="Noto Sans"/>
                 <a:ea typeface="Noto Sans"/>
                 <a:cs typeface="Noto Sans"/>
                 <a:sym typeface="Noto Sans"/>
@@ -13266,7 +16461,6 @@
               <a:solidFill>
                 <a:srgbClr val="000000"/>
               </a:solidFill>
-              <a:latin typeface="Noto Sans"/>
               <a:ea typeface="Noto Sans"/>
               <a:cs typeface="Noto Sans"/>
               <a:sym typeface="Noto Sans"/>
@@ -13285,7 +16479,6 @@
               <a:solidFill>
                 <a:srgbClr val="000000"/>
               </a:solidFill>
-              <a:latin typeface="Noto Sans"/>
               <a:ea typeface="Noto Sans"/>
               <a:cs typeface="Noto Sans"/>
               <a:sym typeface="Noto Sans"/>
@@ -13304,7 +16497,6 @@
                 <a:solidFill>
                   <a:srgbClr val="000000"/>
                 </a:solidFill>
-                <a:latin typeface="Noto Sans"/>
                 <a:ea typeface="Noto Sans"/>
                 <a:cs typeface="Noto Sans"/>
                 <a:sym typeface="Noto Sans"/>
@@ -13316,7 +16508,6 @@
                 <a:solidFill>
                   <a:srgbClr val="000000"/>
                 </a:solidFill>
-                <a:latin typeface="Noto Sans"/>
                 <a:ea typeface="Noto Sans"/>
                 <a:cs typeface="Noto Sans"/>
                 <a:sym typeface="Noto Sans"/>
@@ -13328,7 +16519,6 @@
                 <a:solidFill>
                   <a:srgbClr val="000000"/>
                 </a:solidFill>
-                <a:latin typeface="Noto Sans"/>
                 <a:ea typeface="Noto Sans"/>
                 <a:cs typeface="Noto Sans"/>
                 <a:sym typeface="Noto Sans"/>
@@ -13340,7 +16530,6 @@
                 <a:solidFill>
                   <a:srgbClr val="000000"/>
                 </a:solidFill>
-                <a:latin typeface="Noto Sans"/>
                 <a:ea typeface="Noto Sans"/>
                 <a:cs typeface="Noto Sans"/>
                 <a:sym typeface="Noto Sans"/>
@@ -13362,7 +16551,6 @@
                 <a:solidFill>
                   <a:srgbClr val="000000"/>
                 </a:solidFill>
-                <a:latin typeface="Noto Sans"/>
                 <a:ea typeface="Noto Sans"/>
                 <a:cs typeface="Noto Sans"/>
                 <a:sym typeface="Noto Sans"/>
@@ -13374,7 +16562,6 @@
                 <a:solidFill>
                   <a:srgbClr val="000000"/>
                 </a:solidFill>
-                <a:latin typeface="Noto Sans"/>
                 <a:ea typeface="Noto Sans"/>
                 <a:cs typeface="Noto Sans"/>
                 <a:sym typeface="Noto Sans"/>
@@ -13386,7 +16573,6 @@
                 <a:solidFill>
                   <a:srgbClr val="000000"/>
                 </a:solidFill>
-                <a:latin typeface="Noto Sans"/>
                 <a:ea typeface="Noto Sans"/>
                 <a:cs typeface="Noto Sans"/>
                 <a:sym typeface="Noto Sans"/>
@@ -13398,7 +16584,6 @@
                 <a:solidFill>
                   <a:srgbClr val="000000"/>
                 </a:solidFill>
-                <a:latin typeface="Noto Sans"/>
                 <a:ea typeface="Noto Sans"/>
                 <a:cs typeface="Noto Sans"/>
                 <a:sym typeface="Noto Sans"/>
@@ -13410,7 +16595,6 @@
                 <a:solidFill>
                   <a:srgbClr val="000000"/>
                 </a:solidFill>
-                <a:latin typeface="Noto Sans"/>
                 <a:ea typeface="Noto Sans"/>
                 <a:cs typeface="Noto Sans"/>
                 <a:sym typeface="Noto Sans"/>
@@ -13422,7 +16606,6 @@
                 <a:solidFill>
                   <a:srgbClr val="000000"/>
                 </a:solidFill>
-                <a:latin typeface="Noto Sans"/>
                 <a:ea typeface="Noto Sans"/>
                 <a:cs typeface="Noto Sans"/>
                 <a:sym typeface="Noto Sans"/>
@@ -13434,7 +16617,6 @@
                 <a:solidFill>
                   <a:srgbClr val="000000"/>
                 </a:solidFill>
-                <a:latin typeface="Noto Sans"/>
                 <a:ea typeface="Noto Sans"/>
                 <a:cs typeface="Noto Sans"/>
                 <a:sym typeface="Noto Sans"/>
@@ -13446,7 +16628,6 @@
                 <a:solidFill>
                   <a:srgbClr val="000000"/>
                 </a:solidFill>
-                <a:latin typeface="Noto Sans"/>
                 <a:ea typeface="Noto Sans"/>
                 <a:cs typeface="Noto Sans"/>
                 <a:sym typeface="Noto Sans"/>
@@ -13458,7 +16639,6 @@
                 <a:solidFill>
                   <a:srgbClr val="000000"/>
                 </a:solidFill>
-                <a:latin typeface="Noto Sans"/>
                 <a:ea typeface="Noto Sans"/>
                 <a:cs typeface="Noto Sans"/>
                 <a:sym typeface="Noto Sans"/>
@@ -13470,7 +16650,6 @@
                 <a:solidFill>
                   <a:srgbClr val="000000"/>
                 </a:solidFill>
-                <a:latin typeface="Noto Sans"/>
                 <a:ea typeface="Noto Sans"/>
                 <a:cs typeface="Noto Sans"/>
                 <a:sym typeface="Noto Sans"/>
@@ -13482,7 +16661,6 @@
                 <a:solidFill>
                   <a:srgbClr val="000000"/>
                 </a:solidFill>
-                <a:latin typeface="Noto Sans"/>
                 <a:ea typeface="Noto Sans"/>
                 <a:cs typeface="Noto Sans"/>
                 <a:sym typeface="Noto Sans"/>
@@ -13494,7 +16672,6 @@
                 <a:solidFill>
                   <a:srgbClr val="000000"/>
                 </a:solidFill>
-                <a:latin typeface="Noto Sans"/>
                 <a:ea typeface="Noto Sans"/>
                 <a:cs typeface="Noto Sans"/>
                 <a:sym typeface="Noto Sans"/>
@@ -13721,7 +16898,7 @@
         <p:spPr>
           <a:xfrm>
             <a:off x="6881115" y="1227385"/>
-            <a:ext cx="3848695" cy="900140"/>
+            <a:ext cx="3848695" cy="851900"/>
           </a:xfrm>
           <a:prstGeom prst="rect">
             <a:avLst/>
@@ -13739,17 +16916,26 @@
               </a:lnSpc>
             </a:pPr>
             <a:r>
-              <a:rPr lang="en-US" sz="5562">
-                <a:solidFill>
-                  <a:srgbClr val="000000"/>
-                </a:solidFill>
-                <a:latin typeface="Arimo"/>
+              <a:rPr lang="en-US" sz="5562" dirty="0" err="1">
+                <a:solidFill>
+                  <a:srgbClr val="000000"/>
+                </a:solidFill>
+                <a:latin typeface="+mj-lt"/>
                 <a:ea typeface="Arimo"/>
                 <a:cs typeface="Arimo"/>
                 <a:sym typeface="Arimo"/>
               </a:rPr>
               <a:t>Metodologia</a:t>
             </a:r>
+            <a:endParaRPr lang="en-US" sz="5562" dirty="0">
+              <a:solidFill>
+                <a:srgbClr val="000000"/>
+              </a:solidFill>
+              <a:latin typeface="+mj-lt"/>
+              <a:ea typeface="Arimo"/>
+              <a:cs typeface="Arimo"/>
+              <a:sym typeface="Arimo"/>
+            </a:endParaRPr>
           </a:p>
         </p:txBody>
       </p:sp>
@@ -14108,7 +17294,7 @@
         <p:spPr>
           <a:xfrm>
             <a:off x="992238" y="2522334"/>
-            <a:ext cx="7107136" cy="943127"/>
+            <a:ext cx="7107136" cy="851900"/>
           </a:xfrm>
           <a:prstGeom prst="rect">
             <a:avLst/>
@@ -14126,17 +17312,62 @@
               </a:lnSpc>
             </a:pPr>
             <a:r>
-              <a:rPr lang="en-US" sz="5562">
-                <a:solidFill>
-                  <a:srgbClr val="000000"/>
-                </a:solidFill>
-                <a:latin typeface="Arimo"/>
-                <a:ea typeface="Arimo"/>
-                <a:cs typeface="Arimo"/>
-                <a:sym typeface="Arimo"/>
-              </a:rPr>
-              <a:t>A Solução Proposta</a:t>
-            </a:r>
+              <a:rPr lang="en-US" sz="5562" dirty="0">
+                <a:solidFill>
+                  <a:srgbClr val="000000"/>
+                </a:solidFill>
+                <a:latin typeface="+mj-lt"/>
+                <a:ea typeface="Arimo"/>
+                <a:cs typeface="Arimo"/>
+                <a:sym typeface="Arimo"/>
+              </a:rPr>
+              <a:t>A </a:t>
+            </a:r>
+            <a:r>
+              <a:rPr lang="en-US" sz="5562" dirty="0" err="1">
+                <a:solidFill>
+                  <a:srgbClr val="000000"/>
+                </a:solidFill>
+                <a:latin typeface="+mj-lt"/>
+                <a:ea typeface="Arimo"/>
+                <a:cs typeface="Arimo"/>
+                <a:sym typeface="Arimo"/>
+              </a:rPr>
+              <a:t>Solução</a:t>
+            </a:r>
+            <a:r>
+              <a:rPr lang="en-US" sz="5562" dirty="0">
+                <a:solidFill>
+                  <a:srgbClr val="000000"/>
+                </a:solidFill>
+                <a:latin typeface="+mj-lt"/>
+                <a:ea typeface="Arimo"/>
+                <a:cs typeface="Arimo"/>
+                <a:sym typeface="Arimo"/>
+              </a:rPr>
+              <a:t> </a:t>
+            </a:r>
+            <a:r>
+              <a:rPr lang="en-US" sz="5562" dirty="0" err="1">
+                <a:solidFill>
+                  <a:srgbClr val="000000"/>
+                </a:solidFill>
+                <a:latin typeface="+mj-lt"/>
+                <a:ea typeface="Arimo"/>
+                <a:cs typeface="Arimo"/>
+                <a:sym typeface="Arimo"/>
+              </a:rPr>
+              <a:t>Proposta</a:t>
+            </a:r>
+            <a:endParaRPr lang="en-US" sz="5562" dirty="0">
+              <a:solidFill>
+                <a:srgbClr val="000000"/>
+              </a:solidFill>
+              <a:latin typeface="+mj-lt"/>
+              <a:ea typeface="Arimo"/>
+              <a:cs typeface="Arimo"/>
+              <a:sym typeface="Arimo"/>
+            </a:endParaRPr>
           </a:p>
         </p:txBody>
       </p:sp>
@@ -14149,7 +17380,7 @@
         <p:spPr>
           <a:xfrm>
             <a:off x="1275759" y="5411991"/>
-            <a:ext cx="3544043" cy="481012"/>
+            <a:ext cx="3544043" cy="420115"/>
           </a:xfrm>
           <a:prstGeom prst="rect">
             <a:avLst/>
@@ -14167,17 +17398,26 @@
               </a:lnSpc>
             </a:pPr>
             <a:r>
-              <a:rPr lang="en-US" sz="2750">
-                <a:solidFill>
-                  <a:srgbClr val="000000"/>
-                </a:solidFill>
-                <a:latin typeface="Arimo"/>
+              <a:rPr lang="en-US" sz="2750" dirty="0" err="1">
+                <a:solidFill>
+                  <a:srgbClr val="000000"/>
+                </a:solidFill>
+                <a:latin typeface="+mj-lt"/>
                 <a:ea typeface="Arimo"/>
                 <a:cs typeface="Arimo"/>
                 <a:sym typeface="Arimo"/>
               </a:rPr>
               <a:t>Objetivo</a:t>
             </a:r>
+            <a:endParaRPr lang="en-US" sz="2750" dirty="0">
+              <a:solidFill>
+                <a:srgbClr val="000000"/>
+              </a:solidFill>
+              <a:latin typeface="+mj-lt"/>
+              <a:ea typeface="Arimo"/>
+              <a:cs typeface="Arimo"/>
+              <a:sym typeface="Arimo"/>
+            </a:endParaRPr>
           </a:p>
         </p:txBody>
       </p:sp>
@@ -14190,7 +17430,7 @@
         <p:spPr>
           <a:xfrm>
             <a:off x="1275759" y="5977385"/>
-            <a:ext cx="4678413" cy="992981"/>
+            <a:ext cx="4678413" cy="881973"/>
           </a:xfrm>
           <a:prstGeom prst="rect">
             <a:avLst/>
@@ -14208,16 +17448,103 @@
               </a:lnSpc>
             </a:pPr>
             <a:r>
-              <a:rPr lang="en-US" sz="2187">
-                <a:solidFill>
-                  <a:srgbClr val="000000"/>
-                </a:solidFill>
-                <a:latin typeface="Noto Sans"/>
-                <a:ea typeface="Noto Sans"/>
-                <a:cs typeface="Noto Sans"/>
-                <a:sym typeface="Noto Sans"/>
-              </a:rPr>
-              <a:t>Sistema Web Centralizado para gestão de alunos atípicos.</a:t>
+              <a:rPr lang="en-US" sz="2400" dirty="0">
+                <a:solidFill>
+                  <a:srgbClr val="000000"/>
+                </a:solidFill>
+                <a:ea typeface="Noto Sans"/>
+                <a:cs typeface="Noto Sans"/>
+                <a:sym typeface="Noto Sans"/>
+              </a:rPr>
+              <a:t>Sistema Web </a:t>
+            </a:r>
+            <a:r>
+              <a:rPr lang="en-US" sz="2400" dirty="0" err="1">
+                <a:solidFill>
+                  <a:srgbClr val="000000"/>
+                </a:solidFill>
+                <a:ea typeface="Noto Sans"/>
+                <a:cs typeface="Noto Sans"/>
+                <a:sym typeface="Noto Sans"/>
+              </a:rPr>
+              <a:t>Centralizado</a:t>
+            </a:r>
+            <a:r>
+              <a:rPr lang="en-US" sz="2400" dirty="0">
+                <a:solidFill>
+                  <a:srgbClr val="000000"/>
+                </a:solidFill>
+                <a:ea typeface="Noto Sans"/>
+                <a:cs typeface="Noto Sans"/>
+                <a:sym typeface="Noto Sans"/>
+              </a:rPr>
+              <a:t> para </a:t>
+            </a:r>
+            <a:r>
+              <a:rPr lang="en-US" sz="2400" dirty="0" err="1">
+                <a:solidFill>
+                  <a:srgbClr val="000000"/>
+                </a:solidFill>
+                <a:ea typeface="Noto Sans"/>
+                <a:cs typeface="Noto Sans"/>
+                <a:sym typeface="Noto Sans"/>
+              </a:rPr>
+              <a:t>gestão</a:t>
+            </a:r>
+            <a:r>
+              <a:rPr lang="en-US" sz="2400" dirty="0">
+                <a:solidFill>
+                  <a:srgbClr val="000000"/>
+                </a:solidFill>
+                <a:ea typeface="Noto Sans"/>
+                <a:cs typeface="Noto Sans"/>
+                <a:sym typeface="Noto Sans"/>
+              </a:rPr>
+              <a:t> de </a:t>
+            </a:r>
+            <a:r>
+              <a:rPr lang="en-US" sz="2400" dirty="0" err="1">
+                <a:solidFill>
+                  <a:srgbClr val="000000"/>
+                </a:solidFill>
+                <a:ea typeface="Noto Sans"/>
+                <a:cs typeface="Noto Sans"/>
+                <a:sym typeface="Noto Sans"/>
+              </a:rPr>
+              <a:t>alunos</a:t>
+            </a:r>
+            <a:r>
+              <a:rPr lang="en-US" sz="2400" dirty="0">
+                <a:solidFill>
+                  <a:srgbClr val="000000"/>
+                </a:solidFill>
+                <a:ea typeface="Noto Sans"/>
+                <a:cs typeface="Noto Sans"/>
+                <a:sym typeface="Noto Sans"/>
+              </a:rPr>
+              <a:t> </a:t>
+            </a:r>
+            <a:r>
+              <a:rPr lang="en-US" sz="2400" dirty="0" err="1">
+                <a:solidFill>
+                  <a:srgbClr val="000000"/>
+                </a:solidFill>
+                <a:ea typeface="Noto Sans"/>
+                <a:cs typeface="Noto Sans"/>
+                <a:sym typeface="Noto Sans"/>
+              </a:rPr>
+              <a:t>atípicos</a:t>
+            </a:r>
+            <a:r>
+              <a:rPr lang="en-US" sz="2400" dirty="0">
+                <a:solidFill>
+                  <a:srgbClr val="000000"/>
+                </a:solidFill>
+                <a:ea typeface="Noto Sans"/>
+                <a:cs typeface="Noto Sans"/>
+                <a:sym typeface="Noto Sans"/>
+              </a:rPr>
+              <a:t>.</a:t>
             </a:r>
           </a:p>
         </p:txBody>
@@ -14231,7 +17558,7 @@
         <p:spPr>
           <a:xfrm>
             <a:off x="6804717" y="5411991"/>
-            <a:ext cx="3544043" cy="481012"/>
+            <a:ext cx="3544043" cy="420115"/>
           </a:xfrm>
           <a:prstGeom prst="rect">
             <a:avLst/>
@@ -14249,11 +17576,11 @@
               </a:lnSpc>
             </a:pPr>
             <a:r>
-              <a:rPr lang="en-US" sz="2750">
-                <a:solidFill>
-                  <a:srgbClr val="000000"/>
-                </a:solidFill>
-                <a:latin typeface="Arimo"/>
+              <a:rPr lang="en-US" sz="2750" dirty="0">
+                <a:solidFill>
+                  <a:srgbClr val="000000"/>
+                </a:solidFill>
+                <a:latin typeface="+mj-lt"/>
                 <a:ea typeface="Arimo"/>
                 <a:cs typeface="Arimo"/>
                 <a:sym typeface="Arimo"/>
@@ -14272,7 +17599,7 @@
         <p:spPr>
           <a:xfrm>
             <a:off x="6804717" y="5977385"/>
-            <a:ext cx="4678413" cy="1446609"/>
+            <a:ext cx="4678413" cy="1350819"/>
           </a:xfrm>
           <a:prstGeom prst="rect">
             <a:avLst/>
@@ -14290,16 +17617,180 @@
               </a:lnSpc>
             </a:pPr>
             <a:r>
-              <a:rPr lang="en-US" sz="2187">
-                <a:solidFill>
-                  <a:srgbClr val="000000"/>
-                </a:solidFill>
-                <a:latin typeface="Noto Sans"/>
-                <a:ea typeface="Noto Sans"/>
-                <a:cs typeface="Noto Sans"/>
-                <a:sym typeface="Noto Sans"/>
-              </a:rPr>
-              <a:t>Conecta Gestores, Cuidadores e Responsáveis em uma única plataforma.</a:t>
+              <a:rPr lang="en-US" sz="2400" dirty="0" err="1">
+                <a:solidFill>
+                  <a:srgbClr val="000000"/>
+                </a:solidFill>
+                <a:ea typeface="Noto Sans"/>
+                <a:cs typeface="Noto Sans"/>
+                <a:sym typeface="Noto Sans"/>
+              </a:rPr>
+              <a:t>Conecta</a:t>
+            </a:r>
+            <a:r>
+              <a:rPr lang="en-US" sz="2400" dirty="0">
+                <a:solidFill>
+                  <a:srgbClr val="000000"/>
+                </a:solidFill>
+                <a:ea typeface="Noto Sans"/>
+                <a:cs typeface="Noto Sans"/>
+                <a:sym typeface="Noto Sans"/>
+              </a:rPr>
+              <a:t> </a:t>
+            </a:r>
+            <a:r>
+              <a:rPr lang="en-US" sz="2400" dirty="0" err="1">
+                <a:solidFill>
+                  <a:srgbClr val="000000"/>
+                </a:solidFill>
+                <a:ea typeface="Noto Sans"/>
+                <a:cs typeface="Noto Sans"/>
+                <a:sym typeface="Noto Sans"/>
+              </a:rPr>
+              <a:t>Gestores</a:t>
+            </a:r>
+            <a:r>
+              <a:rPr lang="en-US" sz="2400" dirty="0">
+                <a:solidFill>
+                  <a:srgbClr val="000000"/>
+                </a:solidFill>
+                <a:ea typeface="Noto Sans"/>
+                <a:cs typeface="Noto Sans"/>
+                <a:sym typeface="Noto Sans"/>
+              </a:rPr>
+              <a:t>, </a:t>
+            </a:r>
+            <a:r>
+              <a:rPr lang="en-US" sz="2400" dirty="0" err="1">
+                <a:solidFill>
+                  <a:srgbClr val="000000"/>
+                </a:solidFill>
+                <a:ea typeface="Noto Sans"/>
+                <a:cs typeface="Noto Sans"/>
+                <a:sym typeface="Noto Sans"/>
+              </a:rPr>
+              <a:t>Cuidadores</a:t>
+            </a:r>
+            <a:r>
+              <a:rPr lang="en-US" sz="2400" dirty="0">
+                <a:solidFill>
+                  <a:srgbClr val="000000"/>
+                </a:solidFill>
+                <a:ea typeface="Noto Sans"/>
+                <a:cs typeface="Noto Sans"/>
+                <a:sym typeface="Noto Sans"/>
+              </a:rPr>
+              <a:t> e </a:t>
+            </a:r>
+            <a:r>
+              <a:rPr lang="en-US" sz="2400" dirty="0" err="1">
+                <a:solidFill>
+                  <a:srgbClr val="000000"/>
+                </a:solidFill>
+                <a:ea typeface="Noto Sans"/>
+                <a:cs typeface="Noto Sans"/>
+                <a:sym typeface="Noto Sans"/>
+              </a:rPr>
+              <a:t>Responsáveis</a:t>
+            </a:r>
+            <a:r>
+              <a:rPr lang="en-US" sz="2400" dirty="0">
+                <a:solidFill>
+                  <a:srgbClr val="000000"/>
+                </a:solidFill>
+                <a:ea typeface="Noto Sans"/>
+                <a:cs typeface="Noto Sans"/>
+                <a:sym typeface="Noto Sans"/>
+              </a:rPr>
+              <a:t> </a:t>
+            </a:r>
+            <a:r>
+              <a:rPr lang="en-US" sz="2400" dirty="0" err="1">
+                <a:solidFill>
+                  <a:srgbClr val="000000"/>
+                </a:solidFill>
+                <a:ea typeface="Noto Sans"/>
+                <a:cs typeface="Noto Sans"/>
+                <a:sym typeface="Noto Sans"/>
+              </a:rPr>
+              <a:t>em</a:t>
+            </a:r>
+            <a:r>
+              <a:rPr lang="en-US" sz="2400" dirty="0">
+                <a:solidFill>
+                  <a:srgbClr val="000000"/>
+                </a:solidFill>
+                <a:ea typeface="Noto Sans"/>
+                <a:cs typeface="Noto Sans"/>
+                <a:sym typeface="Noto Sans"/>
+              </a:rPr>
+              <a:t> </a:t>
+            </a:r>
+            <a:r>
+              <a:rPr lang="en-US" sz="2400" dirty="0" err="1">
+                <a:solidFill>
+                  <a:srgbClr val="000000"/>
+                </a:solidFill>
+                <a:ea typeface="Noto Sans"/>
+                <a:cs typeface="Noto Sans"/>
+                <a:sym typeface="Noto Sans"/>
+              </a:rPr>
+              <a:t>uma</a:t>
+            </a:r>
+            <a:r>
+              <a:rPr lang="en-US" sz="2400" dirty="0">
+                <a:solidFill>
+                  <a:srgbClr val="000000"/>
+                </a:solidFill>
+                <a:ea typeface="Noto Sans"/>
+                <a:cs typeface="Noto Sans"/>
+                <a:sym typeface="Noto Sans"/>
+              </a:rPr>
+              <a:t> </a:t>
+            </a:r>
+            <a:r>
+              <a:rPr lang="en-US" sz="2400" dirty="0" err="1">
+                <a:solidFill>
+                  <a:srgbClr val="000000"/>
+                </a:solidFill>
+                <a:ea typeface="Noto Sans"/>
+                <a:cs typeface="Noto Sans"/>
+                <a:sym typeface="Noto Sans"/>
+              </a:rPr>
+              <a:t>única</a:t>
+            </a:r>
+            <a:r>
+              <a:rPr lang="en-US" sz="2400" dirty="0">
+                <a:solidFill>
+                  <a:srgbClr val="000000"/>
+                </a:solidFill>
+                <a:ea typeface="Noto Sans"/>
+                <a:cs typeface="Noto Sans"/>
+                <a:sym typeface="Noto Sans"/>
+              </a:rPr>
+              <a:t> </a:t>
+            </a:r>
+            <a:r>
+              <a:rPr lang="en-US" sz="2400" dirty="0" err="1">
+                <a:solidFill>
+                  <a:srgbClr val="000000"/>
+                </a:solidFill>
+                <a:ea typeface="Noto Sans"/>
+                <a:cs typeface="Noto Sans"/>
+                <a:sym typeface="Noto Sans"/>
+              </a:rPr>
+              <a:t>plataforma</a:t>
+            </a:r>
+            <a:r>
+              <a:rPr lang="en-US" sz="2400" dirty="0">
+                <a:solidFill>
+                  <a:srgbClr val="000000"/>
+                </a:solidFill>
+                <a:ea typeface="Noto Sans"/>
+                <a:cs typeface="Noto Sans"/>
+                <a:sym typeface="Noto Sans"/>
+              </a:rPr>
+              <a:t>.</a:t>
             </a:r>
           </a:p>
         </p:txBody>
@@ -14313,7 +17804,7 @@
         <p:spPr>
           <a:xfrm>
             <a:off x="12333684" y="5411991"/>
-            <a:ext cx="3544043" cy="481012"/>
+            <a:ext cx="3544043" cy="420115"/>
           </a:xfrm>
           <a:prstGeom prst="rect">
             <a:avLst/>
@@ -14331,11 +17822,11 @@
               </a:lnSpc>
             </a:pPr>
             <a:r>
-              <a:rPr lang="en-US" sz="2750">
-                <a:solidFill>
-                  <a:srgbClr val="000000"/>
-                </a:solidFill>
-                <a:latin typeface="Arimo"/>
+              <a:rPr lang="en-US" sz="2750" dirty="0">
+                <a:solidFill>
+                  <a:srgbClr val="000000"/>
+                </a:solidFill>
+                <a:latin typeface="+mj-lt"/>
                 <a:ea typeface="Arimo"/>
                 <a:cs typeface="Arimo"/>
                 <a:sym typeface="Arimo"/>
@@ -14354,7 +17845,7 @@
         <p:spPr>
           <a:xfrm>
             <a:off x="12333684" y="5977385"/>
-            <a:ext cx="4678413" cy="1446609"/>
+            <a:ext cx="4678413" cy="881973"/>
           </a:xfrm>
           <a:prstGeom prst="rect">
             <a:avLst/>
@@ -14372,16 +17863,158 @@
               </a:lnSpc>
             </a:pPr>
             <a:r>
-              <a:rPr lang="en-US" sz="2187">
-                <a:solidFill>
-                  <a:srgbClr val="000000"/>
-                </a:solidFill>
-                <a:latin typeface="Noto Sans"/>
-                <a:ea typeface="Noto Sans"/>
-                <a:cs typeface="Noto Sans"/>
-                <a:sym typeface="Noto Sans"/>
-              </a:rPr>
-              <a:t>Substituir processos manuais por um "cofre digital" seguro e acessível.</a:t>
+              <a:rPr lang="en-US" sz="2400" dirty="0" err="1">
+                <a:solidFill>
+                  <a:srgbClr val="000000"/>
+                </a:solidFill>
+                <a:ea typeface="Noto Sans"/>
+                <a:cs typeface="Noto Sans"/>
+                <a:sym typeface="Noto Sans"/>
+              </a:rPr>
+              <a:t>Substituir</a:t>
+            </a:r>
+            <a:r>
+              <a:rPr lang="en-US" sz="2400" dirty="0">
+                <a:solidFill>
+                  <a:srgbClr val="000000"/>
+                </a:solidFill>
+                <a:ea typeface="Noto Sans"/>
+                <a:cs typeface="Noto Sans"/>
+                <a:sym typeface="Noto Sans"/>
+              </a:rPr>
+              <a:t> </a:t>
+            </a:r>
+            <a:r>
+              <a:rPr lang="en-US" sz="2400" dirty="0" err="1">
+                <a:solidFill>
+                  <a:srgbClr val="000000"/>
+                </a:solidFill>
+                <a:ea typeface="Noto Sans"/>
+                <a:cs typeface="Noto Sans"/>
+                <a:sym typeface="Noto Sans"/>
+              </a:rPr>
+              <a:t>processos</a:t>
+            </a:r>
+            <a:r>
+              <a:rPr lang="en-US" sz="2400" dirty="0">
+                <a:solidFill>
+                  <a:srgbClr val="000000"/>
+                </a:solidFill>
+                <a:ea typeface="Noto Sans"/>
+                <a:cs typeface="Noto Sans"/>
+                <a:sym typeface="Noto Sans"/>
+              </a:rPr>
+              <a:t> </a:t>
+            </a:r>
+            <a:r>
+              <a:rPr lang="en-US" sz="2400" dirty="0" err="1">
+                <a:solidFill>
+                  <a:srgbClr val="000000"/>
+                </a:solidFill>
+                <a:ea typeface="Noto Sans"/>
+                <a:cs typeface="Noto Sans"/>
+                <a:sym typeface="Noto Sans"/>
+              </a:rPr>
+              <a:t>manuais</a:t>
+            </a:r>
+            <a:r>
+              <a:rPr lang="en-US" sz="2400" dirty="0">
+                <a:solidFill>
+                  <a:srgbClr val="000000"/>
+                </a:solidFill>
+                <a:ea typeface="Noto Sans"/>
+                <a:cs typeface="Noto Sans"/>
+                <a:sym typeface="Noto Sans"/>
+              </a:rPr>
+              <a:t> </a:t>
+            </a:r>
+            <a:r>
+              <a:rPr lang="en-US" sz="2400" dirty="0" err="1">
+                <a:solidFill>
+                  <a:srgbClr val="000000"/>
+                </a:solidFill>
+                <a:ea typeface="Noto Sans"/>
+                <a:cs typeface="Noto Sans"/>
+                <a:sym typeface="Noto Sans"/>
+              </a:rPr>
+              <a:t>por</a:t>
+            </a:r>
+            <a:r>
+              <a:rPr lang="en-US" sz="2400" dirty="0">
+                <a:solidFill>
+                  <a:srgbClr val="000000"/>
+                </a:solidFill>
+                <a:ea typeface="Noto Sans"/>
+                <a:cs typeface="Noto Sans"/>
+                <a:sym typeface="Noto Sans"/>
+              </a:rPr>
+              <a:t> um "</a:t>
+            </a:r>
+            <a:r>
+              <a:rPr lang="en-US" sz="2400" dirty="0" err="1">
+                <a:solidFill>
+                  <a:srgbClr val="000000"/>
+                </a:solidFill>
+                <a:ea typeface="Noto Sans"/>
+                <a:cs typeface="Noto Sans"/>
+                <a:sym typeface="Noto Sans"/>
+              </a:rPr>
+              <a:t>cofre</a:t>
+            </a:r>
+            <a:r>
+              <a:rPr lang="en-US" sz="2400" dirty="0">
+                <a:solidFill>
+                  <a:srgbClr val="000000"/>
+                </a:solidFill>
+                <a:ea typeface="Noto Sans"/>
+                <a:cs typeface="Noto Sans"/>
+                <a:sym typeface="Noto Sans"/>
+              </a:rPr>
+              <a:t> digital" </a:t>
+            </a:r>
+            <a:r>
+              <a:rPr lang="en-US" sz="2400" dirty="0" err="1">
+                <a:solidFill>
+                  <a:srgbClr val="000000"/>
+                </a:solidFill>
+                <a:ea typeface="Noto Sans"/>
+                <a:cs typeface="Noto Sans"/>
+                <a:sym typeface="Noto Sans"/>
+              </a:rPr>
+              <a:t>seguro</a:t>
+            </a:r>
+            <a:r>
+              <a:rPr lang="en-US" sz="2400" dirty="0">
+                <a:solidFill>
+                  <a:srgbClr val="000000"/>
+                </a:solidFill>
+                <a:ea typeface="Noto Sans"/>
+                <a:cs typeface="Noto Sans"/>
+                <a:sym typeface="Noto Sans"/>
+              </a:rPr>
+              <a:t> e </a:t>
+            </a:r>
+            <a:r>
+              <a:rPr lang="en-US" sz="2400" dirty="0" err="1">
+                <a:solidFill>
+                  <a:srgbClr val="000000"/>
+                </a:solidFill>
+                <a:ea typeface="Noto Sans"/>
+                <a:cs typeface="Noto Sans"/>
+                <a:sym typeface="Noto Sans"/>
+              </a:rPr>
+              <a:t>acessível</a:t>
+            </a:r>
+            <a:r>
+              <a:rPr lang="en-US" sz="2400" dirty="0">
+                <a:solidFill>
+                  <a:srgbClr val="000000"/>
+                </a:solidFill>
+                <a:ea typeface="Noto Sans"/>
+                <a:cs typeface="Noto Sans"/>
+                <a:sym typeface="Noto Sans"/>
+              </a:rPr>
+              <a:t>.</a:t>
             </a:r>
           </a:p>
         </p:txBody>
@@ -14585,7 +18218,7 @@
         <p:spPr>
           <a:xfrm>
             <a:off x="690858" y="1199269"/>
-            <a:ext cx="6977805" cy="654996"/>
+            <a:ext cx="6977805" cy="592855"/>
           </a:xfrm>
           <a:prstGeom prst="rect">
             <a:avLst/>
@@ -14603,16 +18236,40 @@
               </a:lnSpc>
             </a:pPr>
             <a:r>
-              <a:rPr lang="en-US" sz="3875">
-                <a:solidFill>
-                  <a:srgbClr val="000000"/>
-                </a:solidFill>
-                <a:latin typeface="Arimo"/>
-                <a:ea typeface="Arimo"/>
-                <a:cs typeface="Arimo"/>
-                <a:sym typeface="Arimo"/>
-              </a:rPr>
-              <a:t>Stack Tecnológica Moderna</a:t>
+              <a:rPr lang="en-US" sz="3875" dirty="0">
+                <a:solidFill>
+                  <a:srgbClr val="000000"/>
+                </a:solidFill>
+                <a:latin typeface="+mj-lt"/>
+                <a:ea typeface="Arimo"/>
+                <a:cs typeface="Arimo"/>
+                <a:sym typeface="Arimo"/>
+              </a:rPr>
+              <a:t>Stack </a:t>
+            </a:r>
+            <a:r>
+              <a:rPr lang="en-US" sz="3875" dirty="0" err="1">
+                <a:solidFill>
+                  <a:srgbClr val="000000"/>
+                </a:solidFill>
+                <a:latin typeface="+mj-lt"/>
+                <a:ea typeface="Arimo"/>
+                <a:cs typeface="Arimo"/>
+                <a:sym typeface="Arimo"/>
+              </a:rPr>
+              <a:t>Tecnológica</a:t>
+            </a:r>
+            <a:r>
+              <a:rPr lang="en-US" sz="3875" dirty="0">
+                <a:solidFill>
+                  <a:srgbClr val="000000"/>
+                </a:solidFill>
+                <a:latin typeface="+mj-lt"/>
+                <a:ea typeface="Arimo"/>
+                <a:cs typeface="Arimo"/>
+                <a:sym typeface="Arimo"/>
+              </a:rPr>
+              <a:t> Moderna</a:t>
             </a:r>
           </a:p>
         </p:txBody>
@@ -14644,11 +18301,11 @@
               </a:lnSpc>
             </a:pPr>
             <a:r>
-              <a:rPr lang="en-US" sz="2499" b="1">
-                <a:solidFill>
-                  <a:srgbClr val="000000"/>
-                </a:solidFill>
-                <a:latin typeface="Arimo Bold"/>
+              <a:rPr lang="en-US" sz="2499" b="1" dirty="0">
+                <a:solidFill>
+                  <a:srgbClr val="000000"/>
+                </a:solidFill>
+                <a:latin typeface="+mj-lt"/>
                 <a:ea typeface="Arimo Bold"/>
                 <a:cs typeface="Arimo Bold"/>
                 <a:sym typeface="Arimo Bold"/>
@@ -14667,7 +18324,7 @@
         <p:spPr>
           <a:xfrm>
             <a:off x="690858" y="2604959"/>
-            <a:ext cx="8212341" cy="268043"/>
+            <a:ext cx="8212341" cy="621324"/>
           </a:xfrm>
           <a:prstGeom prst="rect">
             <a:avLst/>
@@ -14685,16 +18342,37 @@
               </a:lnSpc>
             </a:pPr>
             <a:r>
-              <a:rPr lang="en-US" sz="2499">
-                <a:solidFill>
-                  <a:srgbClr val="000000"/>
-                </a:solidFill>
-                <a:latin typeface="Noto Sans"/>
-                <a:ea typeface="Noto Sans"/>
-                <a:cs typeface="Noto Sans"/>
-                <a:sym typeface="Noto Sans"/>
-              </a:rPr>
-              <a:t>React com TypeScript e Tailwind CSS (Foco em </a:t>
+              <a:rPr lang="en-US" sz="2499" dirty="0">
+                <a:solidFill>
+                  <a:srgbClr val="000000"/>
+                </a:solidFill>
+                <a:ea typeface="Noto Sans"/>
+                <a:cs typeface="Noto Sans"/>
+                <a:sym typeface="Noto Sans"/>
+              </a:rPr>
+              <a:t>React com TypeScript e Tailwind CSS (Foco </a:t>
+            </a:r>
+            <a:r>
+              <a:rPr lang="en-US" sz="2499" dirty="0" err="1">
+                <a:solidFill>
+                  <a:srgbClr val="000000"/>
+                </a:solidFill>
+                <a:ea typeface="Noto Sans"/>
+                <a:cs typeface="Noto Sans"/>
+                <a:sym typeface="Noto Sans"/>
+              </a:rPr>
+              <a:t>em</a:t>
+            </a:r>
+            <a:r>
+              <a:rPr lang="en-US" sz="2499" dirty="0">
+                <a:solidFill>
+                  <a:srgbClr val="000000"/>
+                </a:solidFill>
+                <a:ea typeface="Noto Sans"/>
+                <a:cs typeface="Noto Sans"/>
+                <a:sym typeface="Noto Sans"/>
+              </a:rPr>
+              <a:t> </a:t>
             </a:r>
           </a:p>
           <a:p>
@@ -14704,16 +18382,48 @@
               </a:lnSpc>
             </a:pPr>
             <a:r>
-              <a:rPr lang="en-US" sz="2499">
-                <a:solidFill>
-                  <a:srgbClr val="000000"/>
-                </a:solidFill>
-                <a:latin typeface="Noto Sans"/>
-                <a:ea typeface="Noto Sans"/>
-                <a:cs typeface="Noto Sans"/>
-                <a:sym typeface="Noto Sans"/>
-              </a:rPr>
-              <a:t>Usabilidade e Acessibilidade).</a:t>
+              <a:rPr lang="en-US" sz="2499" dirty="0" err="1">
+                <a:solidFill>
+                  <a:srgbClr val="000000"/>
+                </a:solidFill>
+                <a:ea typeface="Noto Sans"/>
+                <a:cs typeface="Noto Sans"/>
+                <a:sym typeface="Noto Sans"/>
+              </a:rPr>
+              <a:t>Usabilidade</a:t>
+            </a:r>
+            <a:r>
+              <a:rPr lang="en-US" sz="2499" dirty="0">
+                <a:solidFill>
+                  <a:srgbClr val="000000"/>
+                </a:solidFill>
+                <a:ea typeface="Noto Sans"/>
+                <a:cs typeface="Noto Sans"/>
+                <a:sym typeface="Noto Sans"/>
+              </a:rPr>
+              <a:t> e </a:t>
+            </a:r>
+            <a:r>
+              <a:rPr lang="en-US" sz="2499" dirty="0" err="1">
+                <a:solidFill>
+                  <a:srgbClr val="000000"/>
+                </a:solidFill>
+                <a:ea typeface="Noto Sans"/>
+                <a:cs typeface="Noto Sans"/>
+                <a:sym typeface="Noto Sans"/>
+              </a:rPr>
+              <a:t>Acessibilidade</a:t>
+            </a:r>
+            <a:r>
+              <a:rPr lang="en-US" sz="2499" dirty="0">
+                <a:solidFill>
+                  <a:srgbClr val="000000"/>
+                </a:solidFill>
+                <a:ea typeface="Noto Sans"/>
+                <a:cs typeface="Noto Sans"/>
+                <a:sym typeface="Noto Sans"/>
+              </a:rPr>
+              <a:t>).</a:t>
             </a:r>
           </a:p>
         </p:txBody>
@@ -14744,7 +18454,7 @@
                 <a:spcPts val="2375"/>
               </a:lnSpc>
             </a:pPr>
-            <a:endParaRPr/>
+            <a:endParaRPr dirty="0"/>
           </a:p>
           <a:p>
             <a:pPr algn="l">
@@ -14753,11 +18463,11 @@
               </a:lnSpc>
             </a:pPr>
             <a:r>
-              <a:rPr lang="en-US" sz="2499" b="1">
-                <a:solidFill>
-                  <a:srgbClr val="000000"/>
-                </a:solidFill>
-                <a:latin typeface="Arimo Bold"/>
+              <a:rPr lang="en-US" sz="2499" b="1" dirty="0">
+                <a:solidFill>
+                  <a:srgbClr val="000000"/>
+                </a:solidFill>
+                <a:latin typeface="+mj-lt"/>
                 <a:ea typeface="Arimo Bold"/>
                 <a:cs typeface="Arimo Bold"/>
                 <a:sym typeface="Arimo Bold"/>
@@ -14776,7 +18486,7 @@
         <p:spPr>
           <a:xfrm>
             <a:off x="669798" y="4131188"/>
-            <a:ext cx="8212341" cy="268043"/>
+            <a:ext cx="8212341" cy="623184"/>
           </a:xfrm>
           <a:prstGeom prst="rect">
             <a:avLst/>
@@ -14793,7 +18503,7 @@
                 <a:spcPts val="2437"/>
               </a:lnSpc>
             </a:pPr>
-            <a:endParaRPr/>
+            <a:endParaRPr dirty="0"/>
           </a:p>
           <a:p>
             <a:pPr algn="l">
@@ -14802,16 +18512,26 @@
               </a:lnSpc>
             </a:pPr>
             <a:r>
-              <a:rPr lang="en-US" sz="2499">
-                <a:solidFill>
-                  <a:srgbClr val="000000"/>
-                </a:solidFill>
-                <a:latin typeface="Noto Sans"/>
-                <a:ea typeface="Noto Sans"/>
-                <a:cs typeface="Noto Sans"/>
-                <a:sym typeface="Noto Sans"/>
-              </a:rPr>
-              <a:t>Supabase (Backend as a Service).</a:t>
+              <a:rPr lang="en-US" sz="2499" dirty="0" err="1">
+                <a:solidFill>
+                  <a:srgbClr val="000000"/>
+                </a:solidFill>
+                <a:ea typeface="Noto Sans"/>
+                <a:cs typeface="Noto Sans"/>
+                <a:sym typeface="Noto Sans"/>
+              </a:rPr>
+              <a:t>Supabase</a:t>
+            </a:r>
+            <a:r>
+              <a:rPr lang="en-US" sz="2499" dirty="0">
+                <a:solidFill>
+                  <a:srgbClr val="000000"/>
+                </a:solidFill>
+                <a:ea typeface="Noto Sans"/>
+                <a:cs typeface="Noto Sans"/>
+                <a:sym typeface="Noto Sans"/>
+              </a:rPr>
+              <a:t> (Backend as a Service).</a:t>
             </a:r>
           </a:p>
         </p:txBody>
@@ -14825,7 +18545,7 @@
         <p:spPr>
           <a:xfrm>
             <a:off x="669798" y="4644195"/>
-            <a:ext cx="2467270" cy="260747"/>
+            <a:ext cx="2467270" cy="623184"/>
           </a:xfrm>
           <a:prstGeom prst="rect">
             <a:avLst/>
@@ -14842,7 +18562,7 @@
                 <a:spcPts val="2375"/>
               </a:lnSpc>
             </a:pPr>
-            <a:endParaRPr/>
+            <a:endParaRPr dirty="0"/>
           </a:p>
           <a:p>
             <a:pPr algn="l">
@@ -14851,17 +18571,24 @@
               </a:lnSpc>
             </a:pPr>
             <a:r>
-              <a:rPr lang="en-US" sz="2499">
-                <a:solidFill>
-                  <a:srgbClr val="000000"/>
-                </a:solidFill>
-                <a:latin typeface="Arimo"/>
+              <a:rPr lang="en-US" sz="2499" dirty="0" err="1">
+                <a:solidFill>
+                  <a:srgbClr val="000000"/>
+                </a:solidFill>
                 <a:ea typeface="Arimo"/>
                 <a:cs typeface="Arimo"/>
                 <a:sym typeface="Arimo"/>
               </a:rPr>
               <a:t>Infraestrutura</a:t>
             </a:r>
+            <a:endParaRPr lang="en-US" sz="2499" dirty="0">
+              <a:solidFill>
+                <a:srgbClr val="000000"/>
+              </a:solidFill>
+              <a:ea typeface="Arimo"/>
+              <a:cs typeface="Arimo"/>
+              <a:sym typeface="Arimo"/>
+            </a:endParaRPr>
           </a:p>
         </p:txBody>
       </p:sp>
@@ -14874,7 +18601,7 @@
         <p:spPr>
           <a:xfrm>
             <a:off x="669798" y="5149915"/>
-            <a:ext cx="8212341" cy="268043"/>
+            <a:ext cx="8212341" cy="623184"/>
           </a:xfrm>
           <a:prstGeom prst="rect">
             <a:avLst/>
@@ -14891,7 +18618,7 @@
                 <a:spcPts val="2437"/>
               </a:lnSpc>
             </a:pPr>
-            <a:endParaRPr/>
+            <a:endParaRPr dirty="0"/>
           </a:p>
           <a:p>
             <a:pPr algn="l">
@@ -14900,16 +18627,26 @@
               </a:lnSpc>
             </a:pPr>
             <a:r>
-              <a:rPr lang="en-US" sz="2499">
-                <a:solidFill>
-                  <a:srgbClr val="000000"/>
-                </a:solidFill>
-                <a:latin typeface="Noto Sans"/>
-                <a:ea typeface="Noto Sans"/>
-                <a:cs typeface="Noto Sans"/>
-                <a:sym typeface="Noto Sans"/>
-              </a:rPr>
-              <a:t>Vercel (Serverless Edge).</a:t>
+              <a:rPr lang="en-US" sz="2499" dirty="0" err="1">
+                <a:solidFill>
+                  <a:srgbClr val="000000"/>
+                </a:solidFill>
+                <a:ea typeface="Noto Sans"/>
+                <a:cs typeface="Noto Sans"/>
+                <a:sym typeface="Noto Sans"/>
+              </a:rPr>
+              <a:t>Vercel</a:t>
+            </a:r>
+            <a:r>
+              <a:rPr lang="en-US" sz="2499" dirty="0">
+                <a:solidFill>
+                  <a:srgbClr val="000000"/>
+                </a:solidFill>
+                <a:ea typeface="Noto Sans"/>
+                <a:cs typeface="Noto Sans"/>
+                <a:sym typeface="Noto Sans"/>
+              </a:rPr>
+              <a:t> (Serverless Edge).</a:t>
             </a:r>
           </a:p>
         </p:txBody>
@@ -15337,7 +19074,7 @@
         <p:spPr>
           <a:xfrm>
             <a:off x="848439" y="857822"/>
-            <a:ext cx="8961120" cy="1985905"/>
+            <a:ext cx="8961120" cy="1666995"/>
           </a:xfrm>
           <a:prstGeom prst="rect">
             <a:avLst/>
@@ -15355,17 +19092,86 @@
               </a:lnSpc>
             </a:pPr>
             <a:r>
-              <a:rPr lang="en-US" sz="3500">
-                <a:solidFill>
-                  <a:srgbClr val="000000"/>
-                </a:solidFill>
-                <a:latin typeface="Arimo"/>
-                <a:ea typeface="Arimo"/>
-                <a:cs typeface="Arimo"/>
-                <a:sym typeface="Arimo"/>
-              </a:rPr>
-              <a:t>Prints das Telas do Gestor, Cuidador e Responsável</a:t>
-            </a:r>
+              <a:rPr lang="en-US" sz="3500" dirty="0">
+                <a:solidFill>
+                  <a:srgbClr val="000000"/>
+                </a:solidFill>
+                <a:latin typeface="+mj-lt"/>
+                <a:ea typeface="Arimo"/>
+                <a:cs typeface="Arimo"/>
+                <a:sym typeface="Arimo"/>
+              </a:rPr>
+              <a:t>Prints das </a:t>
+            </a:r>
+            <a:r>
+              <a:rPr lang="en-US" sz="3500" dirty="0" err="1">
+                <a:solidFill>
+                  <a:srgbClr val="000000"/>
+                </a:solidFill>
+                <a:latin typeface="+mj-lt"/>
+                <a:ea typeface="Arimo"/>
+                <a:cs typeface="Arimo"/>
+                <a:sym typeface="Arimo"/>
+              </a:rPr>
+              <a:t>Telas</a:t>
+            </a:r>
+            <a:r>
+              <a:rPr lang="en-US" sz="3500" dirty="0">
+                <a:solidFill>
+                  <a:srgbClr val="000000"/>
+                </a:solidFill>
+                <a:latin typeface="+mj-lt"/>
+                <a:ea typeface="Arimo"/>
+                <a:cs typeface="Arimo"/>
+                <a:sym typeface="Arimo"/>
+              </a:rPr>
+              <a:t> do Gestor, </a:t>
+            </a:r>
+            <a:r>
+              <a:rPr lang="en-US" sz="3500" dirty="0" err="1">
+                <a:solidFill>
+                  <a:srgbClr val="000000"/>
+                </a:solidFill>
+                <a:latin typeface="+mj-lt"/>
+                <a:ea typeface="Arimo"/>
+                <a:cs typeface="Arimo"/>
+                <a:sym typeface="Arimo"/>
+              </a:rPr>
+              <a:t>Cuidador</a:t>
+            </a:r>
+            <a:r>
+              <a:rPr lang="en-US" sz="3500" dirty="0">
+                <a:solidFill>
+                  <a:srgbClr val="000000"/>
+                </a:solidFill>
+                <a:latin typeface="+mj-lt"/>
+                <a:ea typeface="Arimo"/>
+                <a:cs typeface="Arimo"/>
+                <a:sym typeface="Arimo"/>
+              </a:rPr>
+              <a:t> e </a:t>
+            </a:r>
+            <a:r>
+              <a:rPr lang="en-US" sz="3500" dirty="0" err="1">
+                <a:solidFill>
+                  <a:srgbClr val="000000"/>
+                </a:solidFill>
+                <a:latin typeface="+mj-lt"/>
+                <a:ea typeface="Arimo"/>
+                <a:cs typeface="Arimo"/>
+                <a:sym typeface="Arimo"/>
+              </a:rPr>
+              <a:t>Responsável</a:t>
+            </a:r>
+            <a:endParaRPr lang="en-US" sz="3500" dirty="0">
+              <a:solidFill>
+                <a:srgbClr val="000000"/>
+              </a:solidFill>
+              <a:latin typeface="+mj-lt"/>
+              <a:ea typeface="Arimo"/>
+              <a:cs typeface="Arimo"/>
+              <a:sym typeface="Arimo"/>
+            </a:endParaRPr>
           </a:p>
         </p:txBody>
       </p:sp>
@@ -15603,15 +19409,15 @@
         </p:nvSpPr>
         <p:spPr>
           <a:xfrm>
-            <a:off x="992238" y="1975247"/>
-            <a:ext cx="16303523" cy="1829095"/>
+            <a:off x="992239" y="1975247"/>
+            <a:ext cx="14704962" cy="851900"/>
           </a:xfrm>
           <a:prstGeom prst="rect">
             <a:avLst/>
           </a:prstGeom>
         </p:spPr>
         <p:txBody>
-          <a:bodyPr lIns="0" tIns="0" rIns="0" bIns="0" rtlCol="0" anchor="t">
+          <a:bodyPr wrap="square" lIns="0" tIns="0" rIns="0" bIns="0" rtlCol="0" anchor="t">
             <a:spAutoFit/>
           </a:bodyPr>
           <a:lstStyle/>
@@ -15622,16 +19428,52 @@
               </a:lnSpc>
             </a:pPr>
             <a:r>
-              <a:rPr lang="en-US" sz="5562">
-                <a:solidFill>
-                  <a:srgbClr val="000000"/>
-                </a:solidFill>
-                <a:latin typeface="Arimo"/>
-                <a:ea typeface="Arimo"/>
-                <a:cs typeface="Arimo"/>
-                <a:sym typeface="Arimo"/>
-              </a:rPr>
-              <a:t>Engenharia de Segurança - Row Level Security (RLS)</a:t>
+              <a:rPr lang="en-US" sz="5562" dirty="0" err="1">
+                <a:solidFill>
+                  <a:srgbClr val="000000"/>
+                </a:solidFill>
+                <a:latin typeface="+mj-lt"/>
+                <a:ea typeface="Arimo"/>
+                <a:cs typeface="Arimo"/>
+                <a:sym typeface="Arimo"/>
+              </a:rPr>
+              <a:t>Engenharia</a:t>
+            </a:r>
+            <a:r>
+              <a:rPr lang="en-US" sz="5562" dirty="0">
+                <a:solidFill>
+                  <a:srgbClr val="000000"/>
+                </a:solidFill>
+                <a:latin typeface="+mj-lt"/>
+                <a:ea typeface="Arimo"/>
+                <a:cs typeface="Arimo"/>
+                <a:sym typeface="Arimo"/>
+              </a:rPr>
+              <a:t> de </a:t>
+            </a:r>
+            <a:r>
+              <a:rPr lang="en-US" sz="5562" dirty="0" err="1">
+                <a:solidFill>
+                  <a:srgbClr val="000000"/>
+                </a:solidFill>
+                <a:latin typeface="+mj-lt"/>
+                <a:ea typeface="Arimo"/>
+                <a:cs typeface="Arimo"/>
+                <a:sym typeface="Arimo"/>
+              </a:rPr>
+              <a:t>Segurança</a:t>
+            </a:r>
+            <a:r>
+              <a:rPr lang="en-US" sz="5562" dirty="0">
+                <a:solidFill>
+                  <a:srgbClr val="000000"/>
+                </a:solidFill>
+                <a:latin typeface="+mj-lt"/>
+                <a:ea typeface="Arimo"/>
+                <a:cs typeface="Arimo"/>
+                <a:sym typeface="Arimo"/>
+              </a:rPr>
+              <a:t> - Row Level Security (RLS)</a:t>
             </a:r>
           </a:p>
         </p:txBody>
@@ -15706,7 +19548,7 @@
         <p:spPr>
           <a:xfrm>
             <a:off x="1313859" y="5467198"/>
-            <a:ext cx="3774872" cy="481012"/>
+            <a:ext cx="3774872" cy="420115"/>
           </a:xfrm>
           <a:prstGeom prst="rect">
             <a:avLst/>
@@ -15724,11 +19566,11 @@
               </a:lnSpc>
             </a:pPr>
             <a:r>
-              <a:rPr lang="en-US" sz="2750">
-                <a:solidFill>
-                  <a:srgbClr val="000000"/>
-                </a:solidFill>
-                <a:latin typeface="Arimo"/>
+              <a:rPr lang="en-US" sz="2800">
+                <a:solidFill>
+                  <a:srgbClr val="000000"/>
+                </a:solidFill>
+                <a:latin typeface="+mj-lt"/>
                 <a:ea typeface="Arimo"/>
                 <a:cs typeface="Arimo"/>
                 <a:sym typeface="Arimo"/>
@@ -15747,7 +19589,7 @@
         <p:spPr>
           <a:xfrm>
             <a:off x="1313859" y="6032602"/>
-            <a:ext cx="4602213" cy="1900237"/>
+            <a:ext cx="4602213" cy="1343638"/>
           </a:xfrm>
           <a:prstGeom prst="rect">
             <a:avLst/>
@@ -15765,16 +19607,147 @@
               </a:lnSpc>
             </a:pPr>
             <a:r>
-              <a:rPr lang="en-US" sz="2187">
-                <a:solidFill>
-                  <a:srgbClr val="000000"/>
-                </a:solidFill>
-                <a:latin typeface="Noto Sans"/>
-                <a:ea typeface="Noto Sans"/>
-                <a:cs typeface="Noto Sans"/>
-                <a:sym typeface="Noto Sans"/>
-              </a:rPr>
-              <a:t>A segurança não depende apenas da API, mas é aplicada diretamente no Banco de Dados (PostgreSQL).</a:t>
+              <a:rPr lang="en-US" sz="2400" dirty="0">
+                <a:solidFill>
+                  <a:srgbClr val="000000"/>
+                </a:solidFill>
+                <a:ea typeface="Noto Sans"/>
+                <a:cs typeface="Noto Sans"/>
+                <a:sym typeface="Noto Sans"/>
+              </a:rPr>
+              <a:t>A </a:t>
+            </a:r>
+            <a:r>
+              <a:rPr lang="en-US" sz="2400" dirty="0" err="1">
+                <a:solidFill>
+                  <a:srgbClr val="000000"/>
+                </a:solidFill>
+                <a:ea typeface="Noto Sans"/>
+                <a:cs typeface="Noto Sans"/>
+                <a:sym typeface="Noto Sans"/>
+              </a:rPr>
+              <a:t>segurança</a:t>
+            </a:r>
+            <a:r>
+              <a:rPr lang="en-US" sz="2400" dirty="0">
+                <a:solidFill>
+                  <a:srgbClr val="000000"/>
+                </a:solidFill>
+                <a:ea typeface="Noto Sans"/>
+                <a:cs typeface="Noto Sans"/>
+                <a:sym typeface="Noto Sans"/>
+              </a:rPr>
+              <a:t> </a:t>
+            </a:r>
+            <a:r>
+              <a:rPr lang="en-US" sz="2400" dirty="0" err="1">
+                <a:solidFill>
+                  <a:srgbClr val="000000"/>
+                </a:solidFill>
+                <a:ea typeface="Noto Sans"/>
+                <a:cs typeface="Noto Sans"/>
+                <a:sym typeface="Noto Sans"/>
+              </a:rPr>
+              <a:t>não</a:t>
+            </a:r>
+            <a:r>
+              <a:rPr lang="en-US" sz="2400" dirty="0">
+                <a:solidFill>
+                  <a:srgbClr val="000000"/>
+                </a:solidFill>
+                <a:ea typeface="Noto Sans"/>
+                <a:cs typeface="Noto Sans"/>
+                <a:sym typeface="Noto Sans"/>
+              </a:rPr>
+              <a:t> </a:t>
+            </a:r>
+            <a:r>
+              <a:rPr lang="en-US" sz="2400" dirty="0" err="1">
+                <a:solidFill>
+                  <a:srgbClr val="000000"/>
+                </a:solidFill>
+                <a:ea typeface="Noto Sans"/>
+                <a:cs typeface="Noto Sans"/>
+                <a:sym typeface="Noto Sans"/>
+              </a:rPr>
+              <a:t>depende</a:t>
+            </a:r>
+            <a:r>
+              <a:rPr lang="en-US" sz="2400" dirty="0">
+                <a:solidFill>
+                  <a:srgbClr val="000000"/>
+                </a:solidFill>
+                <a:ea typeface="Noto Sans"/>
+                <a:cs typeface="Noto Sans"/>
+                <a:sym typeface="Noto Sans"/>
+              </a:rPr>
+              <a:t> </a:t>
+            </a:r>
+            <a:r>
+              <a:rPr lang="en-US" sz="2400" dirty="0" err="1">
+                <a:solidFill>
+                  <a:srgbClr val="000000"/>
+                </a:solidFill>
+                <a:ea typeface="Noto Sans"/>
+                <a:cs typeface="Noto Sans"/>
+                <a:sym typeface="Noto Sans"/>
+              </a:rPr>
+              <a:t>apenas</a:t>
+            </a:r>
+            <a:r>
+              <a:rPr lang="en-US" sz="2400" dirty="0">
+                <a:solidFill>
+                  <a:srgbClr val="000000"/>
+                </a:solidFill>
+                <a:ea typeface="Noto Sans"/>
+                <a:cs typeface="Noto Sans"/>
+                <a:sym typeface="Noto Sans"/>
+              </a:rPr>
+              <a:t> da API, mas é </a:t>
+            </a:r>
+            <a:r>
+              <a:rPr lang="en-US" sz="2400" dirty="0" err="1">
+                <a:solidFill>
+                  <a:srgbClr val="000000"/>
+                </a:solidFill>
+                <a:ea typeface="Noto Sans"/>
+                <a:cs typeface="Noto Sans"/>
+                <a:sym typeface="Noto Sans"/>
+              </a:rPr>
+              <a:t>aplicada</a:t>
+            </a:r>
+            <a:r>
+              <a:rPr lang="en-US" sz="2400" dirty="0">
+                <a:solidFill>
+                  <a:srgbClr val="000000"/>
+                </a:solidFill>
+                <a:ea typeface="Noto Sans"/>
+                <a:cs typeface="Noto Sans"/>
+                <a:sym typeface="Noto Sans"/>
+              </a:rPr>
+              <a:t> </a:t>
+            </a:r>
+            <a:r>
+              <a:rPr lang="en-US" sz="2400" dirty="0" err="1">
+                <a:solidFill>
+                  <a:srgbClr val="000000"/>
+                </a:solidFill>
+                <a:ea typeface="Noto Sans"/>
+                <a:cs typeface="Noto Sans"/>
+                <a:sym typeface="Noto Sans"/>
+              </a:rPr>
+              <a:t>diretamente</a:t>
+            </a:r>
+            <a:r>
+              <a:rPr lang="en-US" sz="2400" dirty="0">
+                <a:solidFill>
+                  <a:srgbClr val="000000"/>
+                </a:solidFill>
+                <a:ea typeface="Noto Sans"/>
+                <a:cs typeface="Noto Sans"/>
+                <a:sym typeface="Noto Sans"/>
+              </a:rPr>
+              <a:t> no Banco de Dados (PostgreSQL).</a:t>
             </a:r>
           </a:p>
         </p:txBody>
@@ -15849,7 +19822,7 @@
         <p:spPr>
           <a:xfrm>
             <a:off x="6842817" y="5467198"/>
-            <a:ext cx="3544043" cy="481012"/>
+            <a:ext cx="3544043" cy="420115"/>
           </a:xfrm>
           <a:prstGeom prst="rect">
             <a:avLst/>
@@ -15867,11 +19840,11 @@
               </a:lnSpc>
             </a:pPr>
             <a:r>
-              <a:rPr lang="en-US" sz="2750">
-                <a:solidFill>
-                  <a:srgbClr val="000000"/>
-                </a:solidFill>
-                <a:latin typeface="Arimo"/>
+              <a:rPr lang="en-US" sz="2800">
+                <a:solidFill>
+                  <a:srgbClr val="000000"/>
+                </a:solidFill>
+                <a:latin typeface="+mj-lt"/>
                 <a:ea typeface="Arimo"/>
                 <a:cs typeface="Arimo"/>
                 <a:sym typeface="Arimo"/>
@@ -15890,7 +19863,7 @@
         <p:spPr>
           <a:xfrm>
             <a:off x="6842817" y="6032602"/>
-            <a:ext cx="4602213" cy="1900237"/>
+            <a:ext cx="4602213" cy="1805302"/>
           </a:xfrm>
           <a:prstGeom prst="rect">
             <a:avLst/>
@@ -15908,16 +19881,224 @@
               </a:lnSpc>
             </a:pPr>
             <a:r>
-              <a:rPr lang="en-US" sz="2187">
-                <a:solidFill>
-                  <a:srgbClr val="000000"/>
-                </a:solidFill>
-                <a:latin typeface="Noto Sans"/>
-                <a:ea typeface="Noto Sans"/>
-                <a:cs typeface="Noto Sans"/>
-                <a:sym typeface="Noto Sans"/>
-              </a:rPr>
-              <a:t>Mesmo com a chave pública exposta no frontend, o banco recusa a leitura de dados se o usuário não tiver o token correto.</a:t>
+              <a:rPr lang="en-US" sz="2400" dirty="0" err="1">
+                <a:solidFill>
+                  <a:srgbClr val="000000"/>
+                </a:solidFill>
+                <a:ea typeface="Noto Sans"/>
+                <a:cs typeface="Noto Sans"/>
+                <a:sym typeface="Noto Sans"/>
+              </a:rPr>
+              <a:t>Mesmo</a:t>
+            </a:r>
+            <a:r>
+              <a:rPr lang="en-US" sz="2400" dirty="0">
+                <a:solidFill>
+                  <a:srgbClr val="000000"/>
+                </a:solidFill>
+                <a:ea typeface="Noto Sans"/>
+                <a:cs typeface="Noto Sans"/>
+                <a:sym typeface="Noto Sans"/>
+              </a:rPr>
+              <a:t> com a </a:t>
+            </a:r>
+            <a:r>
+              <a:rPr lang="en-US" sz="2400" dirty="0" err="1">
+                <a:solidFill>
+                  <a:srgbClr val="000000"/>
+                </a:solidFill>
+                <a:ea typeface="Noto Sans"/>
+                <a:cs typeface="Noto Sans"/>
+                <a:sym typeface="Noto Sans"/>
+              </a:rPr>
+              <a:t>chave</a:t>
+            </a:r>
+            <a:r>
+              <a:rPr lang="en-US" sz="2400" dirty="0">
+                <a:solidFill>
+                  <a:srgbClr val="000000"/>
+                </a:solidFill>
+                <a:ea typeface="Noto Sans"/>
+                <a:cs typeface="Noto Sans"/>
+                <a:sym typeface="Noto Sans"/>
+              </a:rPr>
+              <a:t> </a:t>
+            </a:r>
+            <a:r>
+              <a:rPr lang="en-US" sz="2400" dirty="0" err="1">
+                <a:solidFill>
+                  <a:srgbClr val="000000"/>
+                </a:solidFill>
+                <a:ea typeface="Noto Sans"/>
+                <a:cs typeface="Noto Sans"/>
+                <a:sym typeface="Noto Sans"/>
+              </a:rPr>
+              <a:t>pública</a:t>
+            </a:r>
+            <a:r>
+              <a:rPr lang="en-US" sz="2400" dirty="0">
+                <a:solidFill>
+                  <a:srgbClr val="000000"/>
+                </a:solidFill>
+                <a:ea typeface="Noto Sans"/>
+                <a:cs typeface="Noto Sans"/>
+                <a:sym typeface="Noto Sans"/>
+              </a:rPr>
+              <a:t> </a:t>
+            </a:r>
+            <a:r>
+              <a:rPr lang="en-US" sz="2400" dirty="0" err="1">
+                <a:solidFill>
+                  <a:srgbClr val="000000"/>
+                </a:solidFill>
+                <a:ea typeface="Noto Sans"/>
+                <a:cs typeface="Noto Sans"/>
+                <a:sym typeface="Noto Sans"/>
+              </a:rPr>
+              <a:t>exposta</a:t>
+            </a:r>
+            <a:r>
+              <a:rPr lang="en-US" sz="2400" dirty="0">
+                <a:solidFill>
+                  <a:srgbClr val="000000"/>
+                </a:solidFill>
+                <a:ea typeface="Noto Sans"/>
+                <a:cs typeface="Noto Sans"/>
+                <a:sym typeface="Noto Sans"/>
+              </a:rPr>
+              <a:t> no frontend, o banco </a:t>
+            </a:r>
+            <a:r>
+              <a:rPr lang="en-US" sz="2400" dirty="0" err="1">
+                <a:solidFill>
+                  <a:srgbClr val="000000"/>
+                </a:solidFill>
+                <a:ea typeface="Noto Sans"/>
+                <a:cs typeface="Noto Sans"/>
+                <a:sym typeface="Noto Sans"/>
+              </a:rPr>
+              <a:t>recusa</a:t>
+            </a:r>
+            <a:r>
+              <a:rPr lang="en-US" sz="2400" dirty="0">
+                <a:solidFill>
+                  <a:srgbClr val="000000"/>
+                </a:solidFill>
+                <a:ea typeface="Noto Sans"/>
+                <a:cs typeface="Noto Sans"/>
+                <a:sym typeface="Noto Sans"/>
+              </a:rPr>
+              <a:t> a </a:t>
+            </a:r>
+            <a:r>
+              <a:rPr lang="en-US" sz="2400" dirty="0" err="1">
+                <a:solidFill>
+                  <a:srgbClr val="000000"/>
+                </a:solidFill>
+                <a:ea typeface="Noto Sans"/>
+                <a:cs typeface="Noto Sans"/>
+                <a:sym typeface="Noto Sans"/>
+              </a:rPr>
+              <a:t>leitura</a:t>
+            </a:r>
+            <a:r>
+              <a:rPr lang="en-US" sz="2400" dirty="0">
+                <a:solidFill>
+                  <a:srgbClr val="000000"/>
+                </a:solidFill>
+                <a:ea typeface="Noto Sans"/>
+                <a:cs typeface="Noto Sans"/>
+                <a:sym typeface="Noto Sans"/>
+              </a:rPr>
+              <a:t> de dados se o </a:t>
+            </a:r>
+            <a:r>
+              <a:rPr lang="en-US" sz="2400" dirty="0" err="1">
+                <a:solidFill>
+                  <a:srgbClr val="000000"/>
+                </a:solidFill>
+                <a:ea typeface="Noto Sans"/>
+                <a:cs typeface="Noto Sans"/>
+                <a:sym typeface="Noto Sans"/>
+              </a:rPr>
+              <a:t>usuário</a:t>
+            </a:r>
+            <a:r>
+              <a:rPr lang="en-US" sz="2400" dirty="0">
+                <a:solidFill>
+                  <a:srgbClr val="000000"/>
+                </a:solidFill>
+                <a:ea typeface="Noto Sans"/>
+                <a:cs typeface="Noto Sans"/>
+                <a:sym typeface="Noto Sans"/>
+              </a:rPr>
+              <a:t> </a:t>
+            </a:r>
+            <a:r>
+              <a:rPr lang="en-US" sz="2400" dirty="0" err="1">
+                <a:solidFill>
+                  <a:srgbClr val="000000"/>
+                </a:solidFill>
+                <a:ea typeface="Noto Sans"/>
+                <a:cs typeface="Noto Sans"/>
+                <a:sym typeface="Noto Sans"/>
+              </a:rPr>
+              <a:t>não</a:t>
+            </a:r>
+            <a:r>
+              <a:rPr lang="en-US" sz="2400" dirty="0">
+                <a:solidFill>
+                  <a:srgbClr val="000000"/>
+                </a:solidFill>
+                <a:ea typeface="Noto Sans"/>
+                <a:cs typeface="Noto Sans"/>
+                <a:sym typeface="Noto Sans"/>
+              </a:rPr>
+              <a:t> </a:t>
+            </a:r>
+            <a:r>
+              <a:rPr lang="en-US" sz="2400" dirty="0" err="1">
+                <a:solidFill>
+                  <a:srgbClr val="000000"/>
+                </a:solidFill>
+                <a:ea typeface="Noto Sans"/>
+                <a:cs typeface="Noto Sans"/>
+                <a:sym typeface="Noto Sans"/>
+              </a:rPr>
+              <a:t>tiver</a:t>
+            </a:r>
+            <a:r>
+              <a:rPr lang="en-US" sz="2400" dirty="0">
+                <a:solidFill>
+                  <a:srgbClr val="000000"/>
+                </a:solidFill>
+                <a:ea typeface="Noto Sans"/>
+                <a:cs typeface="Noto Sans"/>
+                <a:sym typeface="Noto Sans"/>
+              </a:rPr>
+              <a:t> o token </a:t>
+            </a:r>
+            <a:r>
+              <a:rPr lang="en-US" sz="2400" dirty="0" err="1">
+                <a:solidFill>
+                  <a:srgbClr val="000000"/>
+                </a:solidFill>
+                <a:ea typeface="Noto Sans"/>
+                <a:cs typeface="Noto Sans"/>
+                <a:sym typeface="Noto Sans"/>
+              </a:rPr>
+              <a:t>correto</a:t>
+            </a:r>
+            <a:r>
+              <a:rPr lang="en-US" sz="2400" dirty="0">
+                <a:solidFill>
+                  <a:srgbClr val="000000"/>
+                </a:solidFill>
+                <a:ea typeface="Noto Sans"/>
+                <a:cs typeface="Noto Sans"/>
+                <a:sym typeface="Noto Sans"/>
+              </a:rPr>
+              <a:t>.</a:t>
             </a:r>
           </a:p>
         </p:txBody>
@@ -16053,7 +20234,7 @@
         <p:spPr>
           <a:xfrm>
             <a:off x="12371784" y="5467198"/>
-            <a:ext cx="3544043" cy="481012"/>
+            <a:ext cx="3544043" cy="420115"/>
           </a:xfrm>
           <a:prstGeom prst="rect">
             <a:avLst/>
@@ -16071,11 +20252,11 @@
               </a:lnSpc>
             </a:pPr>
             <a:r>
-              <a:rPr lang="en-US" sz="2750">
-                <a:solidFill>
-                  <a:srgbClr val="000000"/>
-                </a:solidFill>
-                <a:latin typeface="Arimo"/>
+              <a:rPr lang="en-US" sz="2800">
+                <a:solidFill>
+                  <a:srgbClr val="000000"/>
+                </a:solidFill>
+                <a:latin typeface="+mj-lt"/>
                 <a:ea typeface="Arimo"/>
                 <a:cs typeface="Arimo"/>
                 <a:sym typeface="Arimo"/>
@@ -16094,7 +20275,7 @@
         <p:spPr>
           <a:xfrm>
             <a:off x="12371784" y="6032602"/>
-            <a:ext cx="4602213" cy="1446609"/>
+            <a:ext cx="4602213" cy="1350819"/>
           </a:xfrm>
           <a:prstGeom prst="rect">
             <a:avLst/>
@@ -16112,11 +20293,10 @@
               </a:lnSpc>
             </a:pPr>
             <a:r>
-              <a:rPr lang="en-US" sz="2187" dirty="0">
-                <a:solidFill>
-                  <a:srgbClr val="000000"/>
-                </a:solidFill>
-                <a:latin typeface="Noto Sans"/>
+              <a:rPr lang="en-US" sz="2400" dirty="0">
+                <a:solidFill>
+                  <a:srgbClr val="000000"/>
+                </a:solidFill>
                 <a:ea typeface="Noto Sans"/>
                 <a:cs typeface="Noto Sans"/>
                 <a:sym typeface="Noto Sans"/>
@@ -16124,11 +20304,10 @@
               <a:t>Um </a:t>
             </a:r>
             <a:r>
-              <a:rPr lang="en-US" sz="2187" dirty="0" err="1">
-                <a:solidFill>
-                  <a:srgbClr val="000000"/>
-                </a:solidFill>
-                <a:latin typeface="Noto Sans"/>
+              <a:rPr lang="en-US" sz="2400" dirty="0" err="1">
+                <a:solidFill>
+                  <a:srgbClr val="000000"/>
+                </a:solidFill>
                 <a:ea typeface="Noto Sans"/>
                 <a:cs typeface="Noto Sans"/>
                 <a:sym typeface="Noto Sans"/>
@@ -16136,11 +20315,10 @@
               <a:t>Cuidador</a:t>
             </a:r>
             <a:r>
-              <a:rPr lang="en-US" sz="2187" dirty="0">
-                <a:solidFill>
-                  <a:srgbClr val="000000"/>
-                </a:solidFill>
-                <a:latin typeface="Noto Sans"/>
+              <a:rPr lang="en-US" sz="2400" dirty="0">
+                <a:solidFill>
+                  <a:srgbClr val="000000"/>
+                </a:solidFill>
                 <a:ea typeface="Noto Sans"/>
                 <a:cs typeface="Noto Sans"/>
                 <a:sym typeface="Noto Sans"/>
@@ -16148,11 +20326,10 @@
               <a:t> jamais </a:t>
             </a:r>
             <a:r>
-              <a:rPr lang="en-US" sz="2187" dirty="0" err="1">
-                <a:solidFill>
-                  <a:srgbClr val="000000"/>
-                </a:solidFill>
-                <a:latin typeface="Noto Sans"/>
+              <a:rPr lang="en-US" sz="2400" dirty="0" err="1">
+                <a:solidFill>
+                  <a:srgbClr val="000000"/>
+                </a:solidFill>
                 <a:ea typeface="Noto Sans"/>
                 <a:cs typeface="Noto Sans"/>
                 <a:sym typeface="Noto Sans"/>
@@ -16160,11 +20337,10 @@
               <a:t>consegue</a:t>
             </a:r>
             <a:r>
-              <a:rPr lang="en-US" sz="2187" dirty="0">
-                <a:solidFill>
-                  <a:srgbClr val="000000"/>
-                </a:solidFill>
-                <a:latin typeface="Noto Sans"/>
+              <a:rPr lang="en-US" sz="2400" dirty="0">
+                <a:solidFill>
+                  <a:srgbClr val="000000"/>
+                </a:solidFill>
                 <a:ea typeface="Noto Sans"/>
                 <a:cs typeface="Noto Sans"/>
                 <a:sym typeface="Noto Sans"/>
@@ -16172,11 +20348,10 @@
               <a:t> </a:t>
             </a:r>
             <a:r>
-              <a:rPr lang="en-US" sz="2187" dirty="0" err="1">
-                <a:solidFill>
-                  <a:srgbClr val="000000"/>
-                </a:solidFill>
-                <a:latin typeface="Noto Sans"/>
+              <a:rPr lang="en-US" sz="2400" dirty="0" err="1">
+                <a:solidFill>
+                  <a:srgbClr val="000000"/>
+                </a:solidFill>
                 <a:ea typeface="Noto Sans"/>
                 <a:cs typeface="Noto Sans"/>
                 <a:sym typeface="Noto Sans"/>
@@ -16184,11 +20359,10 @@
               <a:t>acessar</a:t>
             </a:r>
             <a:r>
-              <a:rPr lang="en-US" sz="2187" dirty="0">
-                <a:solidFill>
-                  <a:srgbClr val="000000"/>
-                </a:solidFill>
-                <a:latin typeface="Noto Sans"/>
+              <a:rPr lang="en-US" sz="2400" dirty="0">
+                <a:solidFill>
+                  <a:srgbClr val="000000"/>
+                </a:solidFill>
                 <a:ea typeface="Noto Sans"/>
                 <a:cs typeface="Noto Sans"/>
                 <a:sym typeface="Noto Sans"/>
@@ -16196,11 +20370,10 @@
               <a:t> dados de </a:t>
             </a:r>
             <a:r>
-              <a:rPr lang="en-US" sz="2187" dirty="0" err="1">
-                <a:solidFill>
-                  <a:srgbClr val="000000"/>
-                </a:solidFill>
-                <a:latin typeface="Noto Sans"/>
+              <a:rPr lang="en-US" sz="2400" dirty="0" err="1">
+                <a:solidFill>
+                  <a:srgbClr val="000000"/>
+                </a:solidFill>
                 <a:ea typeface="Noto Sans"/>
                 <a:cs typeface="Noto Sans"/>
                 <a:sym typeface="Noto Sans"/>
@@ -16208,11 +20381,10 @@
               <a:t>alunos</a:t>
             </a:r>
             <a:r>
-              <a:rPr lang="en-US" sz="2187" dirty="0">
-                <a:solidFill>
-                  <a:srgbClr val="000000"/>
-                </a:solidFill>
-                <a:latin typeface="Noto Sans"/>
+              <a:rPr lang="en-US" sz="2400" dirty="0">
+                <a:solidFill>
+                  <a:srgbClr val="000000"/>
+                </a:solidFill>
                 <a:ea typeface="Noto Sans"/>
                 <a:cs typeface="Noto Sans"/>
                 <a:sym typeface="Noto Sans"/>
@@ -16220,11 +20392,10 @@
               <a:t> que </a:t>
             </a:r>
             <a:r>
-              <a:rPr lang="en-US" sz="2187" dirty="0" err="1">
-                <a:solidFill>
-                  <a:srgbClr val="000000"/>
-                </a:solidFill>
-                <a:latin typeface="Noto Sans"/>
+              <a:rPr lang="en-US" sz="2400" dirty="0" err="1">
+                <a:solidFill>
+                  <a:srgbClr val="000000"/>
+                </a:solidFill>
                 <a:ea typeface="Noto Sans"/>
                 <a:cs typeface="Noto Sans"/>
                 <a:sym typeface="Noto Sans"/>
@@ -16232,11 +20403,10 @@
               <a:t>não</a:t>
             </a:r>
             <a:r>
-              <a:rPr lang="en-US" sz="2187" dirty="0">
-                <a:solidFill>
-                  <a:srgbClr val="000000"/>
-                </a:solidFill>
-                <a:latin typeface="Noto Sans"/>
+              <a:rPr lang="en-US" sz="2400" dirty="0">
+                <a:solidFill>
+                  <a:srgbClr val="000000"/>
+                </a:solidFill>
                 <a:ea typeface="Noto Sans"/>
                 <a:cs typeface="Noto Sans"/>
                 <a:sym typeface="Noto Sans"/>
@@ -16244,11 +20414,10 @@
               <a:t> </a:t>
             </a:r>
             <a:r>
-              <a:rPr lang="en-US" sz="2187" dirty="0" err="1">
-                <a:solidFill>
-                  <a:srgbClr val="000000"/>
-                </a:solidFill>
-                <a:latin typeface="Noto Sans"/>
+              <a:rPr lang="en-US" sz="2400" dirty="0" err="1">
+                <a:solidFill>
+                  <a:srgbClr val="000000"/>
+                </a:solidFill>
                 <a:ea typeface="Noto Sans"/>
                 <a:cs typeface="Noto Sans"/>
                 <a:sym typeface="Noto Sans"/>
@@ -16256,11 +20425,10 @@
               <a:t>são</a:t>
             </a:r>
             <a:r>
-              <a:rPr lang="en-US" sz="2187" dirty="0">
-                <a:solidFill>
-                  <a:srgbClr val="000000"/>
-                </a:solidFill>
-                <a:latin typeface="Noto Sans"/>
+              <a:rPr lang="en-US" sz="2400" dirty="0">
+                <a:solidFill>
+                  <a:srgbClr val="000000"/>
+                </a:solidFill>
                 <a:ea typeface="Noto Sans"/>
                 <a:cs typeface="Noto Sans"/>
                 <a:sym typeface="Noto Sans"/>
@@ -16268,11 +20436,10 @@
               <a:t> </a:t>
             </a:r>
             <a:r>
-              <a:rPr lang="en-US" sz="2187" dirty="0" err="1">
-                <a:solidFill>
-                  <a:srgbClr val="000000"/>
-                </a:solidFill>
-                <a:latin typeface="Noto Sans"/>
+              <a:rPr lang="en-US" sz="2400" dirty="0" err="1">
+                <a:solidFill>
+                  <a:srgbClr val="000000"/>
+                </a:solidFill>
                 <a:ea typeface="Noto Sans"/>
                 <a:cs typeface="Noto Sans"/>
                 <a:sym typeface="Noto Sans"/>
@@ -16280,11 +20447,10 @@
               <a:t>seus</a:t>
             </a:r>
             <a:r>
-              <a:rPr lang="en-US" sz="2187" dirty="0">
-                <a:solidFill>
-                  <a:srgbClr val="000000"/>
-                </a:solidFill>
-                <a:latin typeface="Noto Sans"/>
+              <a:rPr lang="en-US" sz="2400" dirty="0">
+                <a:solidFill>
+                  <a:srgbClr val="000000"/>
+                </a:solidFill>
                 <a:ea typeface="Noto Sans"/>
                 <a:cs typeface="Noto Sans"/>
                 <a:sym typeface="Noto Sans"/>

--- a/tcc/TCC - Slides.pptx
+++ b/tcc/TCC - Slides.pptx
@@ -5704,15 +5704,15 @@
         </p:nvSpPr>
         <p:spPr>
           <a:xfrm>
-            <a:off x="7357042" y="9030942"/>
-            <a:ext cx="2455050" cy="414365"/>
+            <a:off x="6858000" y="9601200"/>
+            <a:ext cx="3158558" cy="461665"/>
           </a:xfrm>
           <a:prstGeom prst="rect">
             <a:avLst/>
           </a:prstGeom>
         </p:spPr>
         <p:txBody>
-          <a:bodyPr lIns="0" tIns="0" rIns="0" bIns="0" rtlCol="0" anchor="t">
+          <a:bodyPr wrap="square" lIns="0" tIns="0" rIns="0" bIns="0" rtlCol="0" anchor="t">
             <a:spAutoFit/>
           </a:bodyPr>
           <a:lstStyle/>
@@ -5723,11 +5723,11 @@
               </a:lnSpc>
             </a:pPr>
             <a:r>
-              <a:rPr lang="en-US" sz="2187" b="1">
-                <a:solidFill>
-                  <a:srgbClr val="000000"/>
-                </a:solidFill>
-                <a:latin typeface="Noto Sans Bold"/>
+              <a:rPr lang="en-US" sz="3200" b="1" dirty="0">
+                <a:solidFill>
+                  <a:srgbClr val="000000"/>
+                </a:solidFill>
+                <a:latin typeface="+mj-lt"/>
                 <a:ea typeface="Noto Sans Bold"/>
                 <a:cs typeface="Noto Sans Bold"/>
                 <a:sym typeface="Noto Sans Bold"/>

--- a/tcc/TCC - Slides.pptx
+++ b/tcc/TCC - Slides.pptx
@@ -14609,7 +14609,7 @@
         <p:spPr>
           <a:xfrm>
             <a:off x="5735372" y="3141281"/>
-            <a:ext cx="11523928" cy="5216300"/>
+            <a:ext cx="11523928" cy="5652317"/>
           </a:xfrm>
           <a:prstGeom prst="rect">
             <a:avLst/>
@@ -14865,7 +14865,7 @@
             </a:endParaRPr>
           </a:p>
           <a:p>
-            <a:pPr marL="593726" lvl="1" indent="-296863" algn="l">
+            <a:pPr marL="593726" lvl="1" indent="-296863">
               <a:lnSpc>
                 <a:spcPts val="3437"/>
               </a:lnSpc>
@@ -14939,128 +14939,15 @@
               <a:t> da LGPD (Lei nº 13.709/2018) </a:t>
             </a:r>
             <a:r>
-              <a:rPr lang="en-US" sz="2750" dirty="0" err="1">
-                <a:solidFill>
-                  <a:srgbClr val="000000"/>
-                </a:solidFill>
-                <a:ea typeface="Arimo"/>
-                <a:cs typeface="Arimo"/>
-                <a:sym typeface="Arimo"/>
-              </a:rPr>
-              <a:t>focadas</a:t>
-            </a:r>
-            <a:r>
-              <a:rPr lang="en-US" sz="2750" dirty="0">
-                <a:solidFill>
-                  <a:srgbClr val="000000"/>
-                </a:solidFill>
-                <a:ea typeface="Arimo"/>
-                <a:cs typeface="Arimo"/>
-                <a:sym typeface="Arimo"/>
-              </a:rPr>
-              <a:t> no "</a:t>
-            </a:r>
-            <a:r>
-              <a:rPr lang="en-US" sz="2750" dirty="0" err="1">
-                <a:solidFill>
-                  <a:srgbClr val="000000"/>
-                </a:solidFill>
-                <a:ea typeface="Arimo"/>
-                <a:cs typeface="Arimo"/>
-                <a:sym typeface="Arimo"/>
-              </a:rPr>
-              <a:t>melhor</a:t>
-            </a:r>
-            <a:r>
-              <a:rPr lang="en-US" sz="2750" dirty="0">
-                <a:solidFill>
-                  <a:srgbClr val="000000"/>
-                </a:solidFill>
-                <a:ea typeface="Arimo"/>
-                <a:cs typeface="Arimo"/>
-                <a:sym typeface="Arimo"/>
-              </a:rPr>
-              <a:t> interesse" e </a:t>
-            </a:r>
-            <a:r>
-              <a:rPr lang="en-US" sz="2750" dirty="0" err="1">
-                <a:solidFill>
-                  <a:srgbClr val="000000"/>
-                </a:solidFill>
-                <a:ea typeface="Arimo"/>
-                <a:cs typeface="Arimo"/>
-                <a:sym typeface="Arimo"/>
-              </a:rPr>
-              <a:t>proteção</a:t>
-            </a:r>
-            <a:r>
-              <a:rPr lang="en-US" sz="2750" dirty="0">
-                <a:solidFill>
-                  <a:srgbClr val="000000"/>
-                </a:solidFill>
-                <a:ea typeface="Arimo"/>
-                <a:cs typeface="Arimo"/>
-                <a:sym typeface="Arimo"/>
-              </a:rPr>
-              <a:t> de dados </a:t>
-            </a:r>
-            <a:r>
-              <a:rPr lang="en-US" sz="2750" dirty="0" err="1">
-                <a:solidFill>
-                  <a:srgbClr val="000000"/>
-                </a:solidFill>
-                <a:ea typeface="Arimo"/>
-                <a:cs typeface="Arimo"/>
-                <a:sym typeface="Arimo"/>
-              </a:rPr>
-              <a:t>sensíveis</a:t>
-            </a:r>
-            <a:r>
-              <a:rPr lang="en-US" sz="2750" dirty="0">
-                <a:solidFill>
-                  <a:srgbClr val="000000"/>
-                </a:solidFill>
-                <a:ea typeface="Arimo"/>
-                <a:cs typeface="Arimo"/>
-                <a:sym typeface="Arimo"/>
-              </a:rPr>
-              <a:t> de </a:t>
-            </a:r>
-            <a:r>
-              <a:rPr lang="en-US" sz="2750" dirty="0" err="1">
-                <a:solidFill>
-                  <a:srgbClr val="000000"/>
-                </a:solidFill>
-                <a:ea typeface="Arimo"/>
-                <a:cs typeface="Arimo"/>
-                <a:sym typeface="Arimo"/>
-              </a:rPr>
-              <a:t>menores</a:t>
-            </a:r>
-            <a:r>
-              <a:rPr lang="en-US" sz="2750" dirty="0">
-                <a:solidFill>
-                  <a:srgbClr val="000000"/>
-                </a:solidFill>
-                <a:ea typeface="Arimo"/>
-                <a:cs typeface="Arimo"/>
-                <a:sym typeface="Arimo"/>
-              </a:rPr>
-              <a:t> de </a:t>
-            </a:r>
-            <a:r>
-              <a:rPr lang="en-US" sz="2750" dirty="0" err="1">
-                <a:solidFill>
-                  <a:srgbClr val="000000"/>
-                </a:solidFill>
-                <a:ea typeface="Arimo"/>
-                <a:cs typeface="Arimo"/>
-                <a:sym typeface="Arimo"/>
-              </a:rPr>
-              <a:t>idade</a:t>
-            </a:r>
-            <a:r>
-              <a:rPr lang="en-US" sz="2750" dirty="0">
+              <a:rPr lang="pt-BR" sz="2800" dirty="0"/>
+              <a:t>voltadas para garantir o bem-estar das crianças e adolescentes e proteger informações pessoais delicadas, como dados </a:t>
+            </a:r>
+            <a:r>
+              <a:rPr lang="pt-BR" sz="2800"/>
+              <a:t>de saúde</a:t>
+            </a:r>
+            <a:r>
+              <a:rPr lang="en-US" sz="2750">
                 <a:solidFill>
                   <a:srgbClr val="000000"/>
                 </a:solidFill>
@@ -15070,6 +14957,14 @@
               </a:rPr>
               <a:t>.</a:t>
             </a:r>
+            <a:endParaRPr lang="en-US" sz="2750" dirty="0">
+              <a:solidFill>
+                <a:srgbClr val="000000"/>
+              </a:solidFill>
+              <a:ea typeface="Arimo"/>
+              <a:cs typeface="Arimo"/>
+              <a:sym typeface="Arimo"/>
+            </a:endParaRPr>
           </a:p>
           <a:p>
             <a:pPr algn="l">

--- a/tcc/TCC - Slides.pptx
+++ b/tcc/TCC - Slides.pptx
@@ -6386,69 +6386,14 @@
       </p:grpSp>
       <p:grpSp>
         <p:nvGrpSpPr>
-          <p:cNvPr id="10" name="Group 10"/>
-          <p:cNvGrpSpPr/>
-          <p:nvPr/>
-        </p:nvGrpSpPr>
-        <p:grpSpPr>
-          <a:xfrm>
-            <a:off x="11430000" y="0"/>
-            <a:ext cx="6858000" cy="10287000"/>
-            <a:chOff x="0" y="0"/>
-            <a:chExt cx="9144000" cy="13716000"/>
-          </a:xfrm>
-        </p:grpSpPr>
-        <p:sp>
-          <p:nvSpPr>
-            <p:cNvPr id="11" name="Freeform 11"/>
-            <p:cNvSpPr/>
-            <p:nvPr/>
-          </p:nvSpPr>
-          <p:spPr>
-            <a:xfrm>
-              <a:off x="0" y="0"/>
-              <a:ext cx="9144000" cy="13716000"/>
-            </a:xfrm>
-            <a:custGeom>
-              <a:avLst/>
-              <a:gdLst/>
-              <a:ahLst/>
-              <a:cxnLst/>
-              <a:rect l="l" t="t" r="r" b="b"/>
-              <a:pathLst>
-                <a:path w="9144000" h="13716000">
-                  <a:moveTo>
-                    <a:pt x="0" y="0"/>
-                  </a:moveTo>
-                  <a:lnTo>
-                    <a:pt x="9144000" y="0"/>
-                  </a:lnTo>
-                  <a:lnTo>
-                    <a:pt x="9144000" y="13716000"/>
-                  </a:lnTo>
-                  <a:lnTo>
-                    <a:pt x="0" y="13716000"/>
-                  </a:lnTo>
-                  <a:close/>
-                </a:path>
-              </a:pathLst>
-            </a:custGeom>
-            <a:solidFill>
-              <a:srgbClr val="DFDFE0"/>
-            </a:solidFill>
-          </p:spPr>
-        </p:sp>
-      </p:grpSp>
-      <p:grpSp>
-        <p:nvGrpSpPr>
           <p:cNvPr id="12" name="Group 12"/>
           <p:cNvGrpSpPr/>
           <p:nvPr/>
         </p:nvGrpSpPr>
         <p:grpSpPr>
           <a:xfrm>
-            <a:off x="11430000" y="0"/>
-            <a:ext cx="6858000" cy="10287000"/>
+            <a:off x="11824855" y="680466"/>
+            <a:ext cx="6477000" cy="9464040"/>
             <a:chOff x="0" y="0"/>
             <a:chExt cx="9144000" cy="13716000"/>
           </a:xfrm>
@@ -6604,7 +6549,7 @@
               </a:lnSpc>
             </a:pPr>
             <a:r>
-              <a:rPr lang="en-US" sz="2800" dirty="0" err="1">
+              <a:rPr lang="en-US" sz="2800" b="1" dirty="0" err="1">
                 <a:solidFill>
                   <a:srgbClr val="000000"/>
                 </a:solidFill>
@@ -6614,7 +6559,7 @@
               </a:rPr>
               <a:t>Metodologia</a:t>
             </a:r>
-            <a:endParaRPr lang="en-US" sz="2800" dirty="0">
+            <a:endParaRPr lang="en-US" sz="2800" b="1" dirty="0">
               <a:solidFill>
                 <a:srgbClr val="000000"/>
               </a:solidFill>
@@ -6736,7 +6681,7 @@
               </a:lnSpc>
             </a:pPr>
             <a:r>
-              <a:rPr lang="en-US" sz="2800">
+              <a:rPr lang="en-US" sz="2800" b="1" dirty="0">
                 <a:solidFill>
                   <a:srgbClr val="000000"/>
                 </a:solidFill>
@@ -6797,7 +6742,7 @@
         </p:nvSpPr>
         <p:spPr>
           <a:xfrm>
-            <a:off x="6070397" y="3663105"/>
+            <a:off x="6224778" y="3687347"/>
             <a:ext cx="3544043" cy="420115"/>
           </a:xfrm>
           <a:prstGeom prst="rect">
@@ -6816,7 +6761,7 @@
               </a:lnSpc>
             </a:pPr>
             <a:r>
-              <a:rPr lang="en-US" sz="2800">
+              <a:rPr lang="en-US" sz="2800" b="1" dirty="0" err="1">
                 <a:solidFill>
                   <a:srgbClr val="000000"/>
                 </a:solidFill>
@@ -6826,6 +6771,14 @@
               </a:rPr>
               <a:t>Resultados</a:t>
             </a:r>
+            <a:endParaRPr lang="en-US" sz="2800" b="1" dirty="0">
+              <a:solidFill>
+                <a:srgbClr val="000000"/>
+              </a:solidFill>
+              <a:ea typeface="Arimo"/>
+              <a:cs typeface="Arimo"/>
+              <a:sym typeface="Arimo"/>
+            </a:endParaRPr>
           </a:p>
         </p:txBody>
       </p:sp>
@@ -6900,15 +6853,37 @@
               <a:buChar char="•"/>
             </a:pPr>
             <a:r>
-              <a:rPr lang="en-US" sz="2400">
-                <a:solidFill>
-                  <a:srgbClr val="000000"/>
-                </a:solidFill>
-                <a:ea typeface="Noto Sans"/>
-                <a:cs typeface="Noto Sans"/>
-                <a:sym typeface="Noto Sans"/>
-              </a:rPr>
-              <a:t>XSS (Cross-Site Scripting): Mitigado.</a:t>
+              <a:rPr lang="en-US" sz="2400" dirty="0">
+                <a:solidFill>
+                  <a:srgbClr val="000000"/>
+                </a:solidFill>
+                <a:ea typeface="Noto Sans"/>
+                <a:cs typeface="Noto Sans"/>
+                <a:sym typeface="Noto Sans"/>
+              </a:rPr>
+              <a:t>XSS (Cross-Site Scripting): </a:t>
+            </a:r>
+            <a:r>
+              <a:rPr lang="en-US" sz="2400" dirty="0" err="1">
+                <a:solidFill>
+                  <a:srgbClr val="000000"/>
+                </a:solidFill>
+                <a:ea typeface="Noto Sans"/>
+                <a:cs typeface="Noto Sans"/>
+                <a:sym typeface="Noto Sans"/>
+              </a:rPr>
+              <a:t>Mitigado</a:t>
+            </a:r>
+            <a:r>
+              <a:rPr lang="en-US" sz="2400" dirty="0">
+                <a:solidFill>
+                  <a:srgbClr val="000000"/>
+                </a:solidFill>
+                <a:ea typeface="Noto Sans"/>
+                <a:cs typeface="Noto Sans"/>
+                <a:sym typeface="Noto Sans"/>
+              </a:rPr>
+              <a:t>.</a:t>
             </a:r>
           </a:p>
         </p:txBody>
@@ -6963,7 +6938,7 @@
         </p:nvSpPr>
         <p:spPr>
           <a:xfrm>
-            <a:off x="6070397" y="7102049"/>
+            <a:off x="6224778" y="7144789"/>
             <a:ext cx="3544043" cy="420115"/>
           </a:xfrm>
           <a:prstGeom prst="rect">
@@ -6982,7 +6957,7 @@
               </a:lnSpc>
             </a:pPr>
             <a:r>
-              <a:rPr lang="en-US" sz="2800" dirty="0">
+              <a:rPr lang="en-US" sz="2800" b="1" dirty="0">
                 <a:solidFill>
                   <a:srgbClr val="000000"/>
                 </a:solidFill>
@@ -7003,7 +6978,7 @@
         </p:nvSpPr>
         <p:spPr>
           <a:xfrm>
-            <a:off x="6070397" y="7818234"/>
+            <a:off x="6224778" y="7847370"/>
             <a:ext cx="4376890" cy="881973"/>
           </a:xfrm>
           <a:prstGeom prst="rect">
@@ -7022,15 +6997,114 @@
               </a:lnSpc>
             </a:pPr>
             <a:r>
-              <a:rPr lang="en-US" sz="2400">
-                <a:solidFill>
-                  <a:srgbClr val="000000"/>
-                </a:solidFill>
-                <a:ea typeface="Noto Sans"/>
-                <a:cs typeface="Noto Sans"/>
-                <a:sym typeface="Noto Sans"/>
-              </a:rPr>
-              <a:t>Aplicação aprovada sem vulnerabilidades críticas.</a:t>
+              <a:rPr lang="en-US" sz="2400" dirty="0" err="1">
+                <a:solidFill>
+                  <a:srgbClr val="000000"/>
+                </a:solidFill>
+                <a:ea typeface="Noto Sans"/>
+                <a:cs typeface="Noto Sans"/>
+                <a:sym typeface="Noto Sans"/>
+              </a:rPr>
+              <a:t>Aplicação</a:t>
+            </a:r>
+            <a:r>
+              <a:rPr lang="en-US" sz="2400" dirty="0">
+                <a:solidFill>
+                  <a:srgbClr val="000000"/>
+                </a:solidFill>
+                <a:ea typeface="Noto Sans"/>
+                <a:cs typeface="Noto Sans"/>
+                <a:sym typeface="Noto Sans"/>
+              </a:rPr>
+              <a:t> </a:t>
+            </a:r>
+            <a:r>
+              <a:rPr lang="en-US" sz="2400" dirty="0" err="1">
+                <a:solidFill>
+                  <a:srgbClr val="000000"/>
+                </a:solidFill>
+                <a:ea typeface="Noto Sans"/>
+                <a:cs typeface="Noto Sans"/>
+                <a:sym typeface="Noto Sans"/>
+              </a:rPr>
+              <a:t>aprovada</a:t>
+            </a:r>
+            <a:r>
+              <a:rPr lang="en-US" sz="2400" dirty="0">
+                <a:solidFill>
+                  <a:srgbClr val="000000"/>
+                </a:solidFill>
+                <a:ea typeface="Noto Sans"/>
+                <a:cs typeface="Noto Sans"/>
+                <a:sym typeface="Noto Sans"/>
+              </a:rPr>
+              <a:t> </a:t>
+            </a:r>
+            <a:r>
+              <a:rPr lang="en-US" sz="2400" dirty="0" err="1">
+                <a:solidFill>
+                  <a:srgbClr val="000000"/>
+                </a:solidFill>
+                <a:ea typeface="Noto Sans"/>
+                <a:cs typeface="Noto Sans"/>
+                <a:sym typeface="Noto Sans"/>
+              </a:rPr>
+              <a:t>sem</a:t>
+            </a:r>
+            <a:r>
+              <a:rPr lang="en-US" sz="2400" dirty="0">
+                <a:solidFill>
+                  <a:srgbClr val="000000"/>
+                </a:solidFill>
+                <a:ea typeface="Noto Sans"/>
+                <a:cs typeface="Noto Sans"/>
+                <a:sym typeface="Noto Sans"/>
+              </a:rPr>
+              <a:t> </a:t>
+            </a:r>
+            <a:r>
+              <a:rPr lang="en-US" sz="2400" dirty="0" err="1">
+                <a:solidFill>
+                  <a:srgbClr val="000000"/>
+                </a:solidFill>
+                <a:ea typeface="Noto Sans"/>
+                <a:cs typeface="Noto Sans"/>
+                <a:sym typeface="Noto Sans"/>
+              </a:rPr>
+              <a:t>vulnerabilidades</a:t>
+            </a:r>
+            <a:r>
+              <a:rPr lang="en-US" sz="2400" dirty="0">
+                <a:solidFill>
+                  <a:srgbClr val="000000"/>
+                </a:solidFill>
+                <a:ea typeface="Noto Sans"/>
+                <a:cs typeface="Noto Sans"/>
+                <a:sym typeface="Noto Sans"/>
+              </a:rPr>
+              <a:t> </a:t>
+            </a:r>
+            <a:r>
+              <a:rPr lang="en-US" sz="2400" dirty="0" err="1">
+                <a:solidFill>
+                  <a:srgbClr val="000000"/>
+                </a:solidFill>
+                <a:ea typeface="Noto Sans"/>
+                <a:cs typeface="Noto Sans"/>
+                <a:sym typeface="Noto Sans"/>
+              </a:rPr>
+              <a:t>críticas</a:t>
+            </a:r>
+            <a:r>
+              <a:rPr lang="en-US" sz="2400" dirty="0">
+                <a:solidFill>
+                  <a:srgbClr val="000000"/>
+                </a:solidFill>
+                <a:ea typeface="Noto Sans"/>
+                <a:cs typeface="Noto Sans"/>
+                <a:sym typeface="Noto Sans"/>
+              </a:rPr>
+              <a:t>.</a:t>
             </a:r>
           </a:p>
         </p:txBody>
@@ -7043,8 +7117,8 @@
         </p:nvGrpSpPr>
         <p:grpSpPr>
           <a:xfrm>
-            <a:off x="11430000" y="3223260"/>
-            <a:ext cx="6858000" cy="3840480"/>
+            <a:off x="11811000" y="3223260"/>
+            <a:ext cx="6477000" cy="3840480"/>
             <a:chOff x="0" y="0"/>
             <a:chExt cx="9144000" cy="5120640"/>
           </a:xfrm>
@@ -8422,7 +8496,7 @@
         </p:nvGrpSpPr>
         <p:grpSpPr>
           <a:xfrm>
-            <a:off x="9391240" y="3577419"/>
+            <a:off x="9140238" y="3648837"/>
             <a:ext cx="8241992" cy="2472595"/>
             <a:chOff x="0" y="0"/>
             <a:chExt cx="10989323" cy="3296793"/>
@@ -14940,14 +15014,10 @@
             </a:r>
             <a:r>
               <a:rPr lang="pt-BR" sz="2800" dirty="0"/>
-              <a:t>voltadas para garantir o bem-estar das crianças e adolescentes e proteger informações pessoais delicadas, como dados </a:t>
-            </a:r>
-            <a:r>
-              <a:rPr lang="pt-BR" sz="2800"/>
-              <a:t>de saúde</a:t>
-            </a:r>
-            <a:r>
-              <a:rPr lang="en-US" sz="2750">
+              <a:t>voltadas para garantir o bem-estar das crianças e adolescentes e proteger informações pessoais delicadas, como dados de saúde</a:t>
+            </a:r>
+            <a:r>
+              <a:rPr lang="en-US" sz="2750" dirty="0">
                 <a:solidFill>
                   <a:srgbClr val="000000"/>
                 </a:solidFill>
@@ -14957,14 +15027,6 @@
               </a:rPr>
               <a:t>.</a:t>
             </a:r>
-            <a:endParaRPr lang="en-US" sz="2750" dirty="0">
-              <a:solidFill>
-                <a:srgbClr val="000000"/>
-              </a:solidFill>
-              <a:ea typeface="Arimo"/>
-              <a:cs typeface="Arimo"/>
-              <a:sym typeface="Arimo"/>
-            </a:endParaRPr>
           </a:p>
           <a:p>
             <a:pPr algn="l">

--- a/tcc/TCC - Slides.pptx
+++ b/tcc/TCC - Slides.pptx
@@ -5582,7 +5582,7 @@
         </p:nvSpPr>
         <p:spPr>
           <a:xfrm>
-            <a:off x="329298" y="3392995"/>
+            <a:off x="329298" y="4381500"/>
             <a:ext cx="6780162" cy="2621615"/>
           </a:xfrm>
           <a:prstGeom prst="rect">
@@ -5745,7 +5745,7 @@
         </p:nvGrpSpPr>
         <p:grpSpPr>
           <a:xfrm>
-            <a:off x="329298" y="276859"/>
+            <a:off x="0" y="1319681"/>
             <a:ext cx="2788849" cy="2788849"/>
             <a:chOff x="0" y="0"/>
             <a:chExt cx="8796338" cy="8796338"/>
@@ -12606,7 +12606,7 @@
               <a:t> </a:t>
             </a:r>
             <a:r>
-              <a:rPr lang="en-US" sz="2800" dirty="0" err="1">
+              <a:rPr lang="en-US" sz="2400" dirty="0" err="1">
                 <a:solidFill>
                   <a:srgbClr val="000000"/>
                 </a:solidFill>
@@ -13034,7 +13034,6 @@
                 <a:solidFill>
                   <a:srgbClr val="000000"/>
                 </a:solidFill>
-                <a:latin typeface="Noto Sans"/>
                 <a:ea typeface="Noto Sans"/>
                 <a:cs typeface="Noto Sans"/>
                 <a:sym typeface="Noto Sans"/>
@@ -13046,7 +13045,6 @@
                 <a:solidFill>
                   <a:srgbClr val="000000"/>
                 </a:solidFill>
-                <a:latin typeface="Noto Sans"/>
                 <a:ea typeface="Noto Sans"/>
                 <a:cs typeface="Noto Sans"/>
                 <a:sym typeface="Noto Sans"/>
@@ -13058,7 +13056,6 @@
                 <a:solidFill>
                   <a:srgbClr val="000000"/>
                 </a:solidFill>
-                <a:latin typeface="Noto Sans"/>
                 <a:ea typeface="Noto Sans"/>
                 <a:cs typeface="Noto Sans"/>
                 <a:sym typeface="Noto Sans"/>
@@ -13070,7 +13067,6 @@
                 <a:solidFill>
                   <a:srgbClr val="000000"/>
                 </a:solidFill>
-                <a:latin typeface="Noto Sans"/>
                 <a:ea typeface="Noto Sans"/>
                 <a:cs typeface="Noto Sans"/>
                 <a:sym typeface="Noto Sans"/>
@@ -13082,7 +13078,6 @@
                 <a:solidFill>
                   <a:srgbClr val="000000"/>
                 </a:solidFill>
-                <a:latin typeface="Noto Sans"/>
                 <a:ea typeface="Noto Sans"/>
                 <a:cs typeface="Noto Sans"/>
                 <a:sym typeface="Noto Sans"/>
@@ -13094,7 +13089,6 @@
                 <a:solidFill>
                   <a:srgbClr val="000000"/>
                 </a:solidFill>
-                <a:latin typeface="Noto Sans"/>
                 <a:ea typeface="Noto Sans"/>
                 <a:cs typeface="Noto Sans"/>
                 <a:sym typeface="Noto Sans"/>
@@ -13106,7 +13100,6 @@
                 <a:solidFill>
                   <a:srgbClr val="000000"/>
                 </a:solidFill>
-                <a:latin typeface="Noto Sans"/>
                 <a:ea typeface="Noto Sans"/>
                 <a:cs typeface="Noto Sans"/>
                 <a:sym typeface="Noto Sans"/>
@@ -13118,7 +13111,6 @@
                 <a:solidFill>
                   <a:srgbClr val="000000"/>
                 </a:solidFill>
-                <a:latin typeface="Noto Sans"/>
                 <a:ea typeface="Noto Sans"/>
                 <a:cs typeface="Noto Sans"/>
                 <a:sym typeface="Noto Sans"/>
@@ -13130,7 +13122,6 @@
                 <a:solidFill>
                   <a:srgbClr val="000000"/>
                 </a:solidFill>
-                <a:latin typeface="Noto Sans"/>
                 <a:ea typeface="Noto Sans"/>
                 <a:cs typeface="Noto Sans"/>
                 <a:sym typeface="Noto Sans"/>
@@ -13142,7 +13133,6 @@
                 <a:solidFill>
                   <a:srgbClr val="000000"/>
                 </a:solidFill>
-                <a:latin typeface="Noto Sans"/>
                 <a:ea typeface="Noto Sans"/>
                 <a:cs typeface="Noto Sans"/>
                 <a:sym typeface="Noto Sans"/>
@@ -13154,7 +13144,6 @@
                 <a:solidFill>
                   <a:srgbClr val="000000"/>
                 </a:solidFill>
-                <a:latin typeface="Noto Sans"/>
                 <a:ea typeface="Noto Sans"/>
                 <a:cs typeface="Noto Sans"/>
                 <a:sym typeface="Noto Sans"/>
@@ -13166,7 +13155,6 @@
                 <a:solidFill>
                   <a:srgbClr val="000000"/>
                 </a:solidFill>
-                <a:latin typeface="Noto Sans"/>
                 <a:ea typeface="Noto Sans"/>
                 <a:cs typeface="Noto Sans"/>
                 <a:sym typeface="Noto Sans"/>
@@ -13178,7 +13166,6 @@
                 <a:solidFill>
                   <a:srgbClr val="000000"/>
                 </a:solidFill>
-                <a:latin typeface="Noto Sans"/>
                 <a:ea typeface="Noto Sans"/>
                 <a:cs typeface="Noto Sans"/>
                 <a:sym typeface="Noto Sans"/>
@@ -13190,7 +13177,6 @@
                 <a:solidFill>
                   <a:srgbClr val="000000"/>
                 </a:solidFill>
-                <a:latin typeface="Noto Sans"/>
                 <a:ea typeface="Noto Sans"/>
                 <a:cs typeface="Noto Sans"/>
                 <a:sym typeface="Noto Sans"/>
@@ -13202,7 +13188,6 @@
                 <a:solidFill>
                   <a:srgbClr val="000000"/>
                 </a:solidFill>
-                <a:latin typeface="Noto Sans"/>
                 <a:ea typeface="Noto Sans"/>
                 <a:cs typeface="Noto Sans"/>
                 <a:sym typeface="Noto Sans"/>
@@ -13214,7 +13199,6 @@
                 <a:solidFill>
                   <a:srgbClr val="000000"/>
                 </a:solidFill>
-                <a:latin typeface="Noto Sans"/>
                 <a:ea typeface="Noto Sans"/>
                 <a:cs typeface="Noto Sans"/>
                 <a:sym typeface="Noto Sans"/>
@@ -13226,7 +13210,6 @@
                 <a:solidFill>
                   <a:srgbClr val="000000"/>
                 </a:solidFill>
-                <a:latin typeface="Noto Sans"/>
                 <a:ea typeface="Noto Sans"/>
                 <a:cs typeface="Noto Sans"/>
                 <a:sym typeface="Noto Sans"/>
@@ -13238,7 +13221,6 @@
                 <a:solidFill>
                   <a:srgbClr val="000000"/>
                 </a:solidFill>
-                <a:latin typeface="Noto Sans"/>
                 <a:ea typeface="Noto Sans"/>
                 <a:cs typeface="Noto Sans"/>
                 <a:sym typeface="Noto Sans"/>

--- a/tcc/TCC - Slides.pptx
+++ b/tcc/TCC - Slides.pptx
@@ -12938,7 +12938,7 @@
         <p:spPr>
           <a:xfrm>
             <a:off x="12464908" y="1692690"/>
-            <a:ext cx="2840922" cy="408766"/>
+            <a:ext cx="2840922" cy="421782"/>
           </a:xfrm>
           <a:prstGeom prst="rect">
             <a:avLst/>
@@ -12960,7 +12960,7 @@
                 <a:solidFill>
                   <a:srgbClr val="000000"/>
                 </a:solidFill>
-                <a:latin typeface="Arimo Bold"/>
+                <a:latin typeface="+mj-lt"/>
                 <a:ea typeface="Arimo Bold"/>
                 <a:cs typeface="Arimo Bold"/>
                 <a:sym typeface="Arimo Bold"/>
@@ -12972,7 +12972,7 @@
                 <a:solidFill>
                   <a:srgbClr val="000000"/>
                 </a:solidFill>
-                <a:latin typeface="Arimo Bold"/>
+                <a:latin typeface="+mj-lt"/>
                 <a:ea typeface="Arimo Bold"/>
                 <a:cs typeface="Arimo Bold"/>
                 <a:sym typeface="Arimo Bold"/>
@@ -12980,22 +12980,22 @@
               <a:t> </a:t>
             </a:r>
             <a:r>
-              <a:rPr lang="en-US" sz="2750" b="1" dirty="0" err="1">
-                <a:solidFill>
-                  <a:srgbClr val="000000"/>
-                </a:solidFill>
-                <a:latin typeface="Arimo Bold"/>
+              <a:rPr lang="en-US" sz="2800" b="1" dirty="0" err="1">
+                <a:solidFill>
+                  <a:srgbClr val="000000"/>
+                </a:solidFill>
+                <a:latin typeface="+mj-lt"/>
                 <a:ea typeface="Arimo Bold"/>
                 <a:cs typeface="Arimo Bold"/>
                 <a:sym typeface="Arimo Bold"/>
               </a:rPr>
               <a:t>Sensíveis</a:t>
             </a:r>
-            <a:endParaRPr lang="en-US" sz="2750" b="1" dirty="0">
+            <a:endParaRPr lang="en-US" sz="2800" b="1" dirty="0">
               <a:solidFill>
                 <a:srgbClr val="000000"/>
               </a:solidFill>
-              <a:latin typeface="Arimo Bold"/>
+              <a:latin typeface="+mj-lt"/>
               <a:ea typeface="Arimo Bold"/>
               <a:cs typeface="Arimo Bold"/>
               <a:sym typeface="Arimo Bold"/>

--- a/tcc/TCC - Slides.pptx
+++ b/tcc/TCC - Slides.pptx
@@ -13479,14 +13479,14 @@
         <p:spPr>
           <a:xfrm>
             <a:off x="669798" y="2952013"/>
-            <a:ext cx="15711243" cy="4369145"/>
+            <a:ext cx="15711243" cy="4039567"/>
           </a:xfrm>
           <a:prstGeom prst="rect">
             <a:avLst/>
           </a:prstGeom>
         </p:spPr>
         <p:txBody>
-          <a:bodyPr lIns="0" tIns="0" rIns="0" bIns="0" rtlCol="0" anchor="t">
+          <a:bodyPr lIns="0" tIns="0" rIns="0" bIns="0" numCol="2" rtlCol="0" anchor="t">
             <a:spAutoFit/>
           </a:bodyPr>
           <a:lstStyle/>
@@ -13768,6 +13768,75 @@
                 <a:spcPct val="0"/>
               </a:spcBef>
             </a:pPr>
+            <a:endParaRPr lang="en-US" sz="2999" b="1" dirty="0">
+              <a:solidFill>
+                <a:srgbClr val="000000"/>
+              </a:solidFill>
+              <a:latin typeface="+mj-lt"/>
+              <a:ea typeface="Noto Sans Bold"/>
+              <a:cs typeface="Noto Sans Bold"/>
+              <a:sym typeface="Noto Sans Bold"/>
+            </a:endParaRPr>
+          </a:p>
+          <a:p>
+            <a:pPr algn="l">
+              <a:lnSpc>
+                <a:spcPts val="4199"/>
+              </a:lnSpc>
+              <a:spcBef>
+                <a:spcPct val="0"/>
+              </a:spcBef>
+            </a:pPr>
+            <a:endParaRPr lang="en-US" sz="2999" b="1" dirty="0">
+              <a:solidFill>
+                <a:srgbClr val="000000"/>
+              </a:solidFill>
+              <a:latin typeface="+mj-lt"/>
+              <a:ea typeface="Noto Sans Bold"/>
+              <a:cs typeface="Noto Sans Bold"/>
+              <a:sym typeface="Noto Sans Bold"/>
+            </a:endParaRPr>
+          </a:p>
+          <a:p>
+            <a:pPr algn="l">
+              <a:lnSpc>
+                <a:spcPts val="4199"/>
+              </a:lnSpc>
+              <a:spcBef>
+                <a:spcPct val="0"/>
+              </a:spcBef>
+            </a:pPr>
+            <a:endParaRPr lang="en-US" sz="2999" b="1" dirty="0">
+              <a:solidFill>
+                <a:srgbClr val="000000"/>
+              </a:solidFill>
+              <a:latin typeface="+mj-lt"/>
+              <a:ea typeface="Noto Sans Bold"/>
+              <a:cs typeface="Noto Sans Bold"/>
+              <a:sym typeface="Noto Sans Bold"/>
+            </a:endParaRPr>
+          </a:p>
+          <a:p>
+            <a:pPr algn="just">
+              <a:lnSpc>
+                <a:spcPts val="4199"/>
+              </a:lnSpc>
+              <a:spcBef>
+                <a:spcPct val="0"/>
+              </a:spcBef>
+            </a:pPr>
+            <a:r>
+              <a:rPr lang="en-US" sz="2999" b="1" dirty="0">
+                <a:solidFill>
+                  <a:srgbClr val="000000"/>
+                </a:solidFill>
+                <a:latin typeface="+mj-lt"/>
+                <a:ea typeface="Noto Sans Bold"/>
+                <a:cs typeface="Noto Sans Bold"/>
+                <a:sym typeface="Noto Sans Bold"/>
+              </a:rPr>
+              <a:t>   </a:t>
+            </a:r>
             <a:r>
               <a:rPr lang="en-US" sz="2999" b="1" dirty="0" err="1">
                 <a:solidFill>

--- a/tcc/TCC - Slides.pptx
+++ b/tcc/TCC - Slides.pptx
@@ -2354,8 +2354,8 @@
         </p:nvSpPr>
         <p:spPr>
           <a:xfrm>
-            <a:off x="2857500" y="512763"/>
-            <a:ext cx="3429000" cy="2566987"/>
+            <a:off x="2290763" y="512763"/>
+            <a:ext cx="4562475" cy="2566987"/>
           </a:xfrm>
           <a:prstGeom prst="rect">
             <a:avLst/>
@@ -11663,8 +11663,8 @@
         </p:nvSpPr>
         <p:spPr>
           <a:xfrm>
-            <a:off x="13875144" y="5234930"/>
-            <a:ext cx="3758013" cy="1100823"/>
+            <a:off x="13857818" y="5529475"/>
+            <a:ext cx="3758013" cy="674608"/>
           </a:xfrm>
           <a:prstGeom prst="rect">
             <a:avLst/>
@@ -11682,7 +11682,7 @@
               </a:lnSpc>
             </a:pPr>
             <a:r>
-              <a:rPr lang="en-US" sz="2249" b="1">
+              <a:rPr lang="en-US" sz="2249" b="1" dirty="0">
                 <a:solidFill>
                   <a:srgbClr val="000000"/>
                 </a:solidFill>
@@ -11691,7 +11691,7 @@
                 <a:cs typeface="Gill Sans Bold"/>
                 <a:sym typeface="Gill Sans Bold"/>
               </a:rPr>
-              <a:t>LEIA O QR CODE PARA ACESSAR O REPOSITÓRIO:</a:t>
+              <a:t>LEIA O QR CODE PARA ACESSAR O SISTEMA:</a:t>
             </a:r>
           </a:p>
         </p:txBody>
@@ -14443,214 +14443,235 @@
           </p:spPr>
         </p:sp>
       </p:grpSp>
-      <p:sp>
-        <p:nvSpPr>
-          <p:cNvPr id="8" name="Freeform 8"/>
-          <p:cNvSpPr/>
+      <p:grpSp>
+        <p:nvGrpSpPr>
+          <p:cNvPr id="14" name="Agrupar 13">
+            <a:extLst>
+              <a:ext uri="{FF2B5EF4-FFF2-40B4-BE49-F238E27FC236}">
+                <a16:creationId xmlns:a16="http://schemas.microsoft.com/office/drawing/2014/main" id="{10D82C0B-D5AA-C1B8-106E-2D8393E01EF5}"/>
+              </a:ext>
+            </a:extLst>
+          </p:cNvPr>
+          <p:cNvGrpSpPr/>
           <p:nvPr/>
-        </p:nvSpPr>
-        <p:spPr>
-          <a:xfrm>
-            <a:off x="1885314" y="2432563"/>
-            <a:ext cx="1561974" cy="1493637"/>
-          </a:xfrm>
-          <a:custGeom>
-            <a:avLst/>
-            <a:gdLst/>
-            <a:ahLst/>
-            <a:cxnLst/>
-            <a:rect l="l" t="t" r="r" b="b"/>
-            <a:pathLst>
-              <a:path w="1561974" h="1493637">
-                <a:moveTo>
-                  <a:pt x="0" y="0"/>
-                </a:moveTo>
-                <a:lnTo>
-                  <a:pt x="1561974" y="0"/>
-                </a:lnTo>
-                <a:lnTo>
-                  <a:pt x="1561974" y="1493637"/>
-                </a:lnTo>
-                <a:lnTo>
-                  <a:pt x="0" y="1493637"/>
-                </a:lnTo>
-                <a:lnTo>
-                  <a:pt x="0" y="0"/>
-                </a:lnTo>
-                <a:close/>
-              </a:path>
-            </a:pathLst>
-          </a:custGeom>
-          <a:blipFill>
-            <a:blip r:embed="rId2">
-              <a:extLst>
-                <a:ext uri="{96DAC541-7B7A-43D3-8B79-37D633B846F1}">
-                  <asvg:svgBlip xmlns:asvg="http://schemas.microsoft.com/office/drawing/2016/SVG/main" r:embed="rId3"/>
-                </a:ext>
-              </a:extLst>
-            </a:blip>
-            <a:stretch>
-              <a:fillRect/>
-            </a:stretch>
-          </a:blipFill>
-        </p:spPr>
-      </p:sp>
-      <p:sp>
-        <p:nvSpPr>
-          <p:cNvPr id="9" name="Freeform 9"/>
-          <p:cNvSpPr/>
-          <p:nvPr/>
-        </p:nvSpPr>
-        <p:spPr>
-          <a:xfrm>
-            <a:off x="1885314" y="4405675"/>
-            <a:ext cx="1319260" cy="1618724"/>
-          </a:xfrm>
-          <a:custGeom>
-            <a:avLst/>
-            <a:gdLst/>
-            <a:ahLst/>
-            <a:cxnLst/>
-            <a:rect l="l" t="t" r="r" b="b"/>
-            <a:pathLst>
-              <a:path w="1319260" h="1618724">
-                <a:moveTo>
-                  <a:pt x="0" y="0"/>
-                </a:moveTo>
-                <a:lnTo>
-                  <a:pt x="1319260" y="0"/>
-                </a:lnTo>
-                <a:lnTo>
-                  <a:pt x="1319260" y="1618724"/>
-                </a:lnTo>
-                <a:lnTo>
-                  <a:pt x="0" y="1618724"/>
-                </a:lnTo>
-                <a:lnTo>
-                  <a:pt x="0" y="0"/>
-                </a:lnTo>
-                <a:close/>
-              </a:path>
-            </a:pathLst>
-          </a:custGeom>
-          <a:blipFill>
-            <a:blip r:embed="rId4">
-              <a:extLst>
-                <a:ext uri="{96DAC541-7B7A-43D3-8B79-37D633B846F1}">
-                  <asvg:svgBlip xmlns:asvg="http://schemas.microsoft.com/office/drawing/2016/SVG/main" r:embed="rId5"/>
-                </a:ext>
-              </a:extLst>
-            </a:blip>
-            <a:stretch>
-              <a:fillRect/>
-            </a:stretch>
-          </a:blipFill>
-        </p:spPr>
-      </p:sp>
-      <p:sp>
-        <p:nvSpPr>
-          <p:cNvPr id="10" name="Freeform 10"/>
-          <p:cNvSpPr/>
-          <p:nvPr/>
-        </p:nvSpPr>
-        <p:spPr>
-          <a:xfrm>
-            <a:off x="1838010" y="6171025"/>
-            <a:ext cx="1413869" cy="1665825"/>
-          </a:xfrm>
-          <a:custGeom>
-            <a:avLst/>
-            <a:gdLst/>
-            <a:ahLst/>
-            <a:cxnLst/>
-            <a:rect l="l" t="t" r="r" b="b"/>
-            <a:pathLst>
-              <a:path w="1413869" h="1665825">
-                <a:moveTo>
-                  <a:pt x="0" y="0"/>
-                </a:moveTo>
-                <a:lnTo>
-                  <a:pt x="1413869" y="0"/>
-                </a:lnTo>
-                <a:lnTo>
-                  <a:pt x="1413869" y="1665825"/>
-                </a:lnTo>
-                <a:lnTo>
-                  <a:pt x="0" y="1665825"/>
-                </a:lnTo>
-                <a:lnTo>
-                  <a:pt x="0" y="0"/>
-                </a:lnTo>
-                <a:close/>
-              </a:path>
-            </a:pathLst>
-          </a:custGeom>
-          <a:blipFill>
-            <a:blip r:embed="rId6">
-              <a:extLst>
-                <a:ext uri="{96DAC541-7B7A-43D3-8B79-37D633B846F1}">
-                  <asvg:svgBlip xmlns:asvg="http://schemas.microsoft.com/office/drawing/2016/SVG/main" r:embed="rId7"/>
-                </a:ext>
-              </a:extLst>
-            </a:blip>
-            <a:stretch>
-              <a:fillRect/>
-            </a:stretch>
-          </a:blipFill>
-        </p:spPr>
-      </p:sp>
-      <p:sp>
-        <p:nvSpPr>
-          <p:cNvPr id="11" name="Freeform 11"/>
-          <p:cNvSpPr/>
-          <p:nvPr/>
-        </p:nvSpPr>
-        <p:spPr>
-          <a:xfrm>
-            <a:off x="1728097" y="7979725"/>
-            <a:ext cx="1719191" cy="1719191"/>
-          </a:xfrm>
-          <a:custGeom>
-            <a:avLst/>
-            <a:gdLst/>
-            <a:ahLst/>
-            <a:cxnLst/>
-            <a:rect l="l" t="t" r="r" b="b"/>
-            <a:pathLst>
-              <a:path w="1719191" h="1719191">
-                <a:moveTo>
-                  <a:pt x="0" y="0"/>
-                </a:moveTo>
-                <a:lnTo>
-                  <a:pt x="1719191" y="0"/>
-                </a:lnTo>
-                <a:lnTo>
-                  <a:pt x="1719191" y="1719191"/>
-                </a:lnTo>
-                <a:lnTo>
-                  <a:pt x="0" y="1719191"/>
-                </a:lnTo>
-                <a:lnTo>
-                  <a:pt x="0" y="0"/>
-                </a:lnTo>
-                <a:close/>
-              </a:path>
-            </a:pathLst>
-          </a:custGeom>
-          <a:blipFill>
-            <a:blip r:embed="rId8">
-              <a:extLst>
-                <a:ext uri="{96DAC541-7B7A-43D3-8B79-37D633B846F1}">
-                  <asvg:svgBlip xmlns:asvg="http://schemas.microsoft.com/office/drawing/2016/SVG/main" r:embed="rId9"/>
-                </a:ext>
-              </a:extLst>
-            </a:blip>
-            <a:stretch>
-              <a:fillRect/>
-            </a:stretch>
-          </a:blipFill>
-        </p:spPr>
-      </p:sp>
+        </p:nvGrpSpPr>
+        <p:grpSpPr>
+          <a:xfrm>
+            <a:off x="2587692" y="2372362"/>
+            <a:ext cx="1719191" cy="7266353"/>
+            <a:chOff x="1728097" y="2432563"/>
+            <a:chExt cx="1719191" cy="7266353"/>
+          </a:xfrm>
+        </p:grpSpPr>
+        <p:sp>
+          <p:nvSpPr>
+            <p:cNvPr id="8" name="Freeform 8"/>
+            <p:cNvSpPr/>
+            <p:nvPr/>
+          </p:nvSpPr>
+          <p:spPr>
+            <a:xfrm>
+              <a:off x="1885314" y="2432563"/>
+              <a:ext cx="1561974" cy="1493637"/>
+            </a:xfrm>
+            <a:custGeom>
+              <a:avLst/>
+              <a:gdLst/>
+              <a:ahLst/>
+              <a:cxnLst/>
+              <a:rect l="l" t="t" r="r" b="b"/>
+              <a:pathLst>
+                <a:path w="1561974" h="1493637">
+                  <a:moveTo>
+                    <a:pt x="0" y="0"/>
+                  </a:moveTo>
+                  <a:lnTo>
+                    <a:pt x="1561974" y="0"/>
+                  </a:lnTo>
+                  <a:lnTo>
+                    <a:pt x="1561974" y="1493637"/>
+                  </a:lnTo>
+                  <a:lnTo>
+                    <a:pt x="0" y="1493637"/>
+                  </a:lnTo>
+                  <a:lnTo>
+                    <a:pt x="0" y="0"/>
+                  </a:lnTo>
+                  <a:close/>
+                </a:path>
+              </a:pathLst>
+            </a:custGeom>
+            <a:blipFill>
+              <a:blip r:embed="rId2">
+                <a:extLst>
+                  <a:ext uri="{96DAC541-7B7A-43D3-8B79-37D633B846F1}">
+                    <asvg:svgBlip xmlns:asvg="http://schemas.microsoft.com/office/drawing/2016/SVG/main" r:embed="rId3"/>
+                  </a:ext>
+                </a:extLst>
+              </a:blip>
+              <a:stretch>
+                <a:fillRect/>
+              </a:stretch>
+            </a:blipFill>
+          </p:spPr>
+        </p:sp>
+        <p:sp>
+          <p:nvSpPr>
+            <p:cNvPr id="9" name="Freeform 9"/>
+            <p:cNvSpPr/>
+            <p:nvPr/>
+          </p:nvSpPr>
+          <p:spPr>
+            <a:xfrm>
+              <a:off x="1885314" y="4405675"/>
+              <a:ext cx="1319260" cy="1618724"/>
+            </a:xfrm>
+            <a:custGeom>
+              <a:avLst/>
+              <a:gdLst/>
+              <a:ahLst/>
+              <a:cxnLst/>
+              <a:rect l="l" t="t" r="r" b="b"/>
+              <a:pathLst>
+                <a:path w="1319260" h="1618724">
+                  <a:moveTo>
+                    <a:pt x="0" y="0"/>
+                  </a:moveTo>
+                  <a:lnTo>
+                    <a:pt x="1319260" y="0"/>
+                  </a:lnTo>
+                  <a:lnTo>
+                    <a:pt x="1319260" y="1618724"/>
+                  </a:lnTo>
+                  <a:lnTo>
+                    <a:pt x="0" y="1618724"/>
+                  </a:lnTo>
+                  <a:lnTo>
+                    <a:pt x="0" y="0"/>
+                  </a:lnTo>
+                  <a:close/>
+                </a:path>
+              </a:pathLst>
+            </a:custGeom>
+            <a:blipFill>
+              <a:blip r:embed="rId4">
+                <a:extLst>
+                  <a:ext uri="{96DAC541-7B7A-43D3-8B79-37D633B846F1}">
+                    <asvg:svgBlip xmlns:asvg="http://schemas.microsoft.com/office/drawing/2016/SVG/main" r:embed="rId5"/>
+                  </a:ext>
+                </a:extLst>
+              </a:blip>
+              <a:stretch>
+                <a:fillRect/>
+              </a:stretch>
+            </a:blipFill>
+          </p:spPr>
+        </p:sp>
+        <p:sp>
+          <p:nvSpPr>
+            <p:cNvPr id="10" name="Freeform 10"/>
+            <p:cNvSpPr/>
+            <p:nvPr/>
+          </p:nvSpPr>
+          <p:spPr>
+            <a:xfrm>
+              <a:off x="1838010" y="6171025"/>
+              <a:ext cx="1413869" cy="1665825"/>
+            </a:xfrm>
+            <a:custGeom>
+              <a:avLst/>
+              <a:gdLst/>
+              <a:ahLst/>
+              <a:cxnLst/>
+              <a:rect l="l" t="t" r="r" b="b"/>
+              <a:pathLst>
+                <a:path w="1413869" h="1665825">
+                  <a:moveTo>
+                    <a:pt x="0" y="0"/>
+                  </a:moveTo>
+                  <a:lnTo>
+                    <a:pt x="1413869" y="0"/>
+                  </a:lnTo>
+                  <a:lnTo>
+                    <a:pt x="1413869" y="1665825"/>
+                  </a:lnTo>
+                  <a:lnTo>
+                    <a:pt x="0" y="1665825"/>
+                  </a:lnTo>
+                  <a:lnTo>
+                    <a:pt x="0" y="0"/>
+                  </a:lnTo>
+                  <a:close/>
+                </a:path>
+              </a:pathLst>
+            </a:custGeom>
+            <a:blipFill>
+              <a:blip r:embed="rId6">
+                <a:extLst>
+                  <a:ext uri="{96DAC541-7B7A-43D3-8B79-37D633B846F1}">
+                    <asvg:svgBlip xmlns:asvg="http://schemas.microsoft.com/office/drawing/2016/SVG/main" r:embed="rId7"/>
+                  </a:ext>
+                </a:extLst>
+              </a:blip>
+              <a:stretch>
+                <a:fillRect/>
+              </a:stretch>
+            </a:blipFill>
+          </p:spPr>
+        </p:sp>
+        <p:sp>
+          <p:nvSpPr>
+            <p:cNvPr id="11" name="Freeform 11"/>
+            <p:cNvSpPr/>
+            <p:nvPr/>
+          </p:nvSpPr>
+          <p:spPr>
+            <a:xfrm>
+              <a:off x="1728097" y="7979725"/>
+              <a:ext cx="1719191" cy="1719191"/>
+            </a:xfrm>
+            <a:custGeom>
+              <a:avLst/>
+              <a:gdLst/>
+              <a:ahLst/>
+              <a:cxnLst/>
+              <a:rect l="l" t="t" r="r" b="b"/>
+              <a:pathLst>
+                <a:path w="1719191" h="1719191">
+                  <a:moveTo>
+                    <a:pt x="0" y="0"/>
+                  </a:moveTo>
+                  <a:lnTo>
+                    <a:pt x="1719191" y="0"/>
+                  </a:lnTo>
+                  <a:lnTo>
+                    <a:pt x="1719191" y="1719191"/>
+                  </a:lnTo>
+                  <a:lnTo>
+                    <a:pt x="0" y="1719191"/>
+                  </a:lnTo>
+                  <a:lnTo>
+                    <a:pt x="0" y="0"/>
+                  </a:lnTo>
+                  <a:close/>
+                </a:path>
+              </a:pathLst>
+            </a:custGeom>
+            <a:blipFill>
+              <a:blip r:embed="rId8">
+                <a:extLst>
+                  <a:ext uri="{96DAC541-7B7A-43D3-8B79-37D633B846F1}">
+                    <asvg:svgBlip xmlns:asvg="http://schemas.microsoft.com/office/drawing/2016/SVG/main" r:embed="rId9"/>
+                  </a:ext>
+                </a:extLst>
+              </a:blip>
+              <a:stretch>
+                <a:fillRect/>
+              </a:stretch>
+            </a:blipFill>
+          </p:spPr>
+        </p:sp>
+      </p:grpSp>
       <p:sp>
         <p:nvSpPr>
           <p:cNvPr id="12" name="TextBox 12"/>
@@ -14659,7 +14680,7 @@
         </p:nvSpPr>
         <p:spPr>
           <a:xfrm>
-            <a:off x="4696884" y="1156926"/>
+            <a:off x="5311702" y="1067452"/>
             <a:ext cx="7657072" cy="851900"/>
           </a:xfrm>
           <a:prstGeom prst="rect">
@@ -14733,7 +14754,7 @@
         </p:nvSpPr>
         <p:spPr>
           <a:xfrm>
-            <a:off x="5735372" y="3141281"/>
+            <a:off x="4878758" y="3179381"/>
             <a:ext cx="11523928" cy="5652317"/>
           </a:xfrm>
           <a:prstGeom prst="rect">

--- a/tcc/TCC - Slides.pptx
+++ b/tcc/TCC - Slides.pptx
@@ -11535,67 +11535,6 @@
       </p:sp>
       <p:grpSp>
         <p:nvGrpSpPr>
-          <p:cNvPr id="11" name="Group 11"/>
-          <p:cNvGrpSpPr/>
-          <p:nvPr/>
-        </p:nvGrpSpPr>
-        <p:grpSpPr>
-          <a:xfrm>
-            <a:off x="13892508" y="6294672"/>
-            <a:ext cx="3723294" cy="3723294"/>
-            <a:chOff x="0" y="0"/>
-            <a:chExt cx="4964392" cy="4964392"/>
-          </a:xfrm>
-        </p:grpSpPr>
-        <p:sp>
-          <p:nvSpPr>
-            <p:cNvPr id="12" name="Freeform 12"/>
-            <p:cNvSpPr/>
-            <p:nvPr/>
-          </p:nvSpPr>
-          <p:spPr>
-            <a:xfrm>
-              <a:off x="0" y="0"/>
-              <a:ext cx="4964430" cy="4964430"/>
-            </a:xfrm>
-            <a:custGeom>
-              <a:avLst/>
-              <a:gdLst/>
-              <a:ahLst/>
-              <a:cxnLst/>
-              <a:rect l="l" t="t" r="r" b="b"/>
-              <a:pathLst>
-                <a:path w="4964430" h="4964430">
-                  <a:moveTo>
-                    <a:pt x="0" y="0"/>
-                  </a:moveTo>
-                  <a:lnTo>
-                    <a:pt x="4964430" y="0"/>
-                  </a:lnTo>
-                  <a:lnTo>
-                    <a:pt x="4964430" y="4964430"/>
-                  </a:lnTo>
-                  <a:lnTo>
-                    <a:pt x="0" y="4964430"/>
-                  </a:lnTo>
-                  <a:lnTo>
-                    <a:pt x="0" y="0"/>
-                  </a:lnTo>
-                  <a:close/>
-                </a:path>
-              </a:pathLst>
-            </a:custGeom>
-            <a:blipFill>
-              <a:blip r:embed="rId4"/>
-              <a:stretch>
-                <a:fillRect/>
-              </a:stretch>
-            </a:blipFill>
-          </p:spPr>
-        </p:sp>
-      </p:grpSp>
-      <p:grpSp>
-        <p:nvGrpSpPr>
           <p:cNvPr id="13" name="Group 13"/>
           <p:cNvGrpSpPr/>
           <p:nvPr/>
@@ -11647,7 +11586,7 @@
               </a:pathLst>
             </a:custGeom>
             <a:blipFill>
-              <a:blip r:embed="rId5"/>
+              <a:blip r:embed="rId4"/>
               <a:stretch>
                 <a:fillRect/>
               </a:stretch>
@@ -11696,6 +11635,36 @@
           </a:p>
         </p:txBody>
       </p:sp>
+      <p:pic>
+        <p:nvPicPr>
+          <p:cNvPr id="19" name="Imagem 18">
+            <a:extLst>
+              <a:ext uri="{FF2B5EF4-FFF2-40B4-BE49-F238E27FC236}">
+                <a16:creationId xmlns:a16="http://schemas.microsoft.com/office/drawing/2014/main" id="{B16EC33E-986D-D9F4-42E9-F5ADB4D1BBAF}"/>
+              </a:ext>
+            </a:extLst>
+          </p:cNvPr>
+          <p:cNvPicPr>
+            <a:picLocks noChangeAspect="1"/>
+          </p:cNvPicPr>
+          <p:nvPr/>
+        </p:nvPicPr>
+        <p:blipFill>
+          <a:blip r:embed="rId5"/>
+          <a:stretch>
+            <a:fillRect/>
+          </a:stretch>
+        </p:blipFill>
+        <p:spPr>
+          <a:xfrm>
+            <a:off x="13717093" y="6380693"/>
+            <a:ext cx="3924300" cy="3895725"/>
+          </a:xfrm>
+          <a:prstGeom prst="rect">
+            <a:avLst/>
+          </a:prstGeom>
+        </p:spPr>
+      </p:pic>
     </p:spTree>
   </p:cSld>
   <p:clrMapOvr>
